--- a/docs/提案/提案簡報-訴願智審臺.pptx
+++ b/docs/提案/提案簡報-訴願智審臺.pptx
@@ -9241,8 +9241,8 @@
         </p:nvSpPr>
         <p:spPr>
           <a:xfrm>
-            <a:off x="868680" y="1764792"/>
-            <a:ext cx="502920" cy="502920"/>
+            <a:off x="960119" y="2194560"/>
+            <a:ext cx="777240" cy="777240"/>
           </a:xfrm>
           <a:prstGeom prst="ellipse">
             <a:avLst/>
@@ -9275,7 +9275,7 @@
           <a:p>
             <a:pPr algn="ctr"/>
             <a:r>
-              <a:rPr sz="1800" b="1">
+              <a:rPr sz="2600" b="1">
                 <a:solidFill>
                   <a:srgbClr val="FFFFFF"/>
                 </a:solidFill>
@@ -9294,23 +9294,23 @@
         </p:nvSpPr>
         <p:spPr>
           <a:xfrm>
-            <a:off x="1554480" y="1691639"/>
-            <a:ext cx="4343400" cy="457200"/>
-          </a:xfrm>
-          <a:prstGeom prst="rect">
-            <a:avLst/>
-          </a:prstGeom>
-          <a:noFill/>
-        </p:spPr>
-        <p:txBody>
-          <a:bodyPr wrap="square" anchor="t" lIns="45720" rIns="45720" tIns="27432" bIns="27432">
+            <a:off x="1965960" y="1874519"/>
+            <a:ext cx="3931920" cy="1417320"/>
+          </a:xfrm>
+          <a:prstGeom prst="rect">
+            <a:avLst/>
+          </a:prstGeom>
+          <a:noFill/>
+        </p:spPr>
+        <p:txBody>
+          <a:bodyPr wrap="square" anchor="ctr" lIns="45720" rIns="45720" tIns="27432" bIns="27432">
             <a:spAutoFit/>
           </a:bodyPr>
           <a:lstStyle/>
           <a:p>
             <a:pPr algn="l"/>
             <a:r>
-              <a:rPr sz="1900" b="1">
+              <a:rPr sz="2800" b="1">
                 <a:solidFill>
                   <a:srgbClr val="16304F"/>
                 </a:solidFill>
@@ -9323,55 +9323,22 @@
       </p:sp>
       <p:sp>
         <p:nvSpPr>
-          <p:cNvPr id="12" name="TextBox 11"/>
-          <p:cNvSpPr txBox="1"/>
-          <p:nvPr/>
-        </p:nvSpPr>
-        <p:spPr>
-          <a:xfrm>
-            <a:off x="1554480" y="2167128"/>
-            <a:ext cx="4343400" cy="868680"/>
-          </a:xfrm>
-          <a:prstGeom prst="rect">
-            <a:avLst/>
-          </a:prstGeom>
-          <a:noFill/>
-        </p:spPr>
-        <p:txBody>
-          <a:bodyPr wrap="square" anchor="t" lIns="45720" rIns="45720" tIns="27432" bIns="27432">
-            <a:spAutoFit/>
-          </a:bodyPr>
-          <a:lstStyle/>
-          <a:p>
-            <a:pPr algn="l"/>
-            <a:r>
-              <a:rPr sz="1350" b="0">
-                <a:solidFill>
-                  <a:srgbClr val="334455"/>
-                </a:solidFill>
-                <a:latin typeface="Microsoft JhengHei"/>
-              </a:rPr>
-              <a:t>AI 給選項＋各自的法律後果與風險，決定權在承辦人。</a:t>
-            </a:r>
-          </a:p>
-        </p:txBody>
-      </p:sp>
-      <p:sp>
-        <p:nvSpPr>
-          <p:cNvPr id="13" name="Rectangle 12"/>
+          <p:cNvPr id="12" name="Rounded Rectangle 11"/>
           <p:cNvSpPr/>
           <p:nvPr/>
         </p:nvSpPr>
         <p:spPr>
           <a:xfrm>
-            <a:off x="1554480" y="3063239"/>
-            <a:ext cx="45720" cy="411480"/>
-          </a:xfrm>
-          <a:prstGeom prst="rect">
-            <a:avLst/>
-          </a:prstGeom>
-          <a:solidFill>
-            <a:srgbClr val="D98E04"/>
+            <a:off x="6172200" y="1508760"/>
+            <a:ext cx="5394960" cy="2148840"/>
+          </a:xfrm>
+          <a:prstGeom prst="roundRect">
+            <a:avLst>
+              <a:gd name="adj" fmla="val 8000"/>
+            </a:avLst>
+          </a:prstGeom>
+          <a:solidFill>
+            <a:srgbClr val="F4F6F9"/>
           </a:solidFill>
           <a:ln>
             <a:noFill/>
@@ -9402,57 +9369,20 @@
       </p:sp>
       <p:sp>
         <p:nvSpPr>
-          <p:cNvPr id="14" name="TextBox 13"/>
-          <p:cNvSpPr txBox="1"/>
-          <p:nvPr/>
-        </p:nvSpPr>
-        <p:spPr>
-          <a:xfrm>
-            <a:off x="1691639" y="3044952"/>
-            <a:ext cx="4206240" cy="457200"/>
-          </a:xfrm>
-          <a:prstGeom prst="rect">
-            <a:avLst/>
-          </a:prstGeom>
-          <a:noFill/>
-        </p:spPr>
-        <p:txBody>
-          <a:bodyPr wrap="square" anchor="t" lIns="45720" rIns="45720" tIns="27432" bIns="27432">
-            <a:spAutoFit/>
-          </a:bodyPr>
-          <a:lstStyle/>
-          <a:p>
-            <a:pPr algn="l"/>
-            <a:r>
-              <a:rPr sz="1150" b="0">
-                <a:solidFill>
-                  <a:srgbClr val="8A5A00"/>
-                </a:solidFill>
-                <a:latin typeface="Microsoft JhengHei"/>
-              </a:rPr>
-              <a:t>避開「AI 替政府做決定」的政治風險</a:t>
-            </a:r>
-          </a:p>
-        </p:txBody>
-      </p:sp>
-      <p:sp>
-        <p:nvSpPr>
-          <p:cNvPr id="15" name="Rounded Rectangle 14"/>
+          <p:cNvPr id="13" name="Oval 12"/>
           <p:cNvSpPr/>
           <p:nvPr/>
         </p:nvSpPr>
         <p:spPr>
           <a:xfrm>
-            <a:off x="6172200" y="1508760"/>
-            <a:ext cx="5394960" cy="2148840"/>
-          </a:xfrm>
-          <a:prstGeom prst="roundRect">
-            <a:avLst>
-              <a:gd name="adj" fmla="val 8000"/>
-            </a:avLst>
-          </a:prstGeom>
-          <a:solidFill>
-            <a:srgbClr val="F4F6F9"/>
+            <a:off x="6492240" y="2194560"/>
+            <a:ext cx="777240" cy="777240"/>
+          </a:xfrm>
+          <a:prstGeom prst="ellipse">
+            <a:avLst/>
+          </a:prstGeom>
+          <a:solidFill>
+            <a:srgbClr val="16304F"/>
           </a:solidFill>
           <a:ln>
             <a:noFill/>
@@ -9474,29 +9404,75 @@
           </a:fontRef>
         </p:style>
         <p:txBody>
-          <a:bodyPr rtlCol="0" anchor="ctr"/>
-          <a:lstStyle/>
-          <a:p>
-            <a:pPr algn="ctr"/>
-          </a:p>
-        </p:txBody>
-      </p:sp>
-      <p:sp>
-        <p:nvSpPr>
-          <p:cNvPr id="16" name="Oval 15"/>
+          <a:bodyPr rtlCol="0" anchor="ctr" lIns="0" rIns="0" tIns="0" bIns="0"/>
+          <a:lstStyle/>
+          <a:p>
+            <a:pPr algn="ctr"/>
+            <a:r>
+              <a:rPr sz="2600" b="1">
+                <a:solidFill>
+                  <a:srgbClr val="FFFFFF"/>
+                </a:solidFill>
+                <a:latin typeface="Microsoft JhengHei"/>
+              </a:rPr>
+              <a:t>2</a:t>
+            </a:r>
+          </a:p>
+        </p:txBody>
+      </p:sp>
+      <p:sp>
+        <p:nvSpPr>
+          <p:cNvPr id="14" name="TextBox 13"/>
+          <p:cNvSpPr txBox="1"/>
+          <p:nvPr/>
+        </p:nvSpPr>
+        <p:spPr>
+          <a:xfrm>
+            <a:off x="7498079" y="1874519"/>
+            <a:ext cx="3931920" cy="1417320"/>
+          </a:xfrm>
+          <a:prstGeom prst="rect">
+            <a:avLst/>
+          </a:prstGeom>
+          <a:noFill/>
+        </p:spPr>
+        <p:txBody>
+          <a:bodyPr wrap="square" anchor="ctr" lIns="45720" rIns="45720" tIns="27432" bIns="27432">
+            <a:spAutoFit/>
+          </a:bodyPr>
+          <a:lstStyle/>
+          <a:p>
+            <a:pPr algn="l"/>
+            <a:r>
+              <a:rPr sz="2800" b="1">
+                <a:solidFill>
+                  <a:srgbClr val="16304F"/>
+                </a:solidFill>
+                <a:latin typeface="Microsoft JhengHei"/>
+              </a:rPr>
+              <a:t>透明、步驟式、非黑盒</a:t>
+            </a:r>
+          </a:p>
+        </p:txBody>
+      </p:sp>
+      <p:sp>
+        <p:nvSpPr>
+          <p:cNvPr id="15" name="Rounded Rectangle 14"/>
           <p:cNvSpPr/>
           <p:nvPr/>
         </p:nvSpPr>
         <p:spPr>
           <a:xfrm>
-            <a:off x="6400800" y="1764792"/>
-            <a:ext cx="502920" cy="502920"/>
-          </a:xfrm>
-          <a:prstGeom prst="ellipse">
-            <a:avLst/>
-          </a:prstGeom>
-          <a:solidFill>
-            <a:srgbClr val="16304F"/>
+            <a:off x="640080" y="3840479"/>
+            <a:ext cx="5394960" cy="2148840"/>
+          </a:xfrm>
+          <a:prstGeom prst="roundRect">
+            <a:avLst>
+              <a:gd name="adj" fmla="val 8000"/>
+            </a:avLst>
+          </a:prstGeom>
+          <a:solidFill>
+            <a:srgbClr val="F4F6F9"/>
           </a:solidFill>
           <a:ln>
             <a:noFill/>
@@ -9518,108 +9494,29 @@
           </a:fontRef>
         </p:style>
         <p:txBody>
-          <a:bodyPr rtlCol="0" anchor="ctr" lIns="0" rIns="0" tIns="0" bIns="0"/>
-          <a:lstStyle/>
-          <a:p>
-            <a:pPr algn="ctr"/>
-            <a:r>
-              <a:rPr sz="1800" b="1">
-                <a:solidFill>
-                  <a:srgbClr val="FFFFFF"/>
-                </a:solidFill>
-                <a:latin typeface="Microsoft JhengHei"/>
-              </a:rPr>
-              <a:t>2</a:t>
-            </a:r>
-          </a:p>
-        </p:txBody>
-      </p:sp>
-      <p:sp>
-        <p:nvSpPr>
-          <p:cNvPr id="17" name="TextBox 16"/>
-          <p:cNvSpPr txBox="1"/>
-          <p:nvPr/>
-        </p:nvSpPr>
-        <p:spPr>
-          <a:xfrm>
-            <a:off x="7086600" y="1691639"/>
-            <a:ext cx="4343400" cy="457200"/>
-          </a:xfrm>
-          <a:prstGeom prst="rect">
-            <a:avLst/>
-          </a:prstGeom>
-          <a:noFill/>
-        </p:spPr>
-        <p:txBody>
-          <a:bodyPr wrap="square" anchor="t" lIns="45720" rIns="45720" tIns="27432" bIns="27432">
-            <a:spAutoFit/>
-          </a:bodyPr>
-          <a:lstStyle/>
-          <a:p>
-            <a:pPr algn="l"/>
-            <a:r>
-              <a:rPr sz="1900" b="1">
-                <a:solidFill>
-                  <a:srgbClr val="16304F"/>
-                </a:solidFill>
-                <a:latin typeface="Microsoft JhengHei"/>
-              </a:rPr>
-              <a:t>數據飛輪：法規庫＋案件庫</a:t>
-            </a:r>
-          </a:p>
-        </p:txBody>
-      </p:sp>
-      <p:sp>
-        <p:nvSpPr>
-          <p:cNvPr id="18" name="TextBox 17"/>
-          <p:cNvSpPr txBox="1"/>
-          <p:nvPr/>
-        </p:nvSpPr>
-        <p:spPr>
-          <a:xfrm>
-            <a:off x="7086600" y="2167128"/>
-            <a:ext cx="4343400" cy="868680"/>
-          </a:xfrm>
-          <a:prstGeom prst="rect">
-            <a:avLst/>
-          </a:prstGeom>
-          <a:noFill/>
-        </p:spPr>
-        <p:txBody>
-          <a:bodyPr wrap="square" anchor="t" lIns="45720" rIns="45720" tIns="27432" bIns="27432">
-            <a:spAutoFit/>
-          </a:bodyPr>
-          <a:lstStyle/>
-          <a:p>
-            <a:pPr algn="l"/>
-            <a:r>
-              <a:rPr sz="1350" b="0">
-                <a:solidFill>
-                  <a:srgbClr val="334455"/>
-                </a:solidFill>
-                <a:latin typeface="Microsoft JhengHei"/>
-              </a:rPr>
-              <a:t>答辯書和卷證依法不公開，只能靠每辦一案累積；補件也走同一條路。</a:t>
-            </a:r>
-          </a:p>
-        </p:txBody>
-      </p:sp>
-      <p:sp>
-        <p:nvSpPr>
-          <p:cNvPr id="19" name="Rectangle 18"/>
+          <a:bodyPr rtlCol="0" anchor="ctr"/>
+          <a:lstStyle/>
+          <a:p>
+            <a:pPr algn="ctr"/>
+          </a:p>
+        </p:txBody>
+      </p:sp>
+      <p:sp>
+        <p:nvSpPr>
+          <p:cNvPr id="16" name="Oval 15"/>
           <p:cNvSpPr/>
           <p:nvPr/>
         </p:nvSpPr>
         <p:spPr>
           <a:xfrm>
-            <a:off x="7086600" y="3063239"/>
-            <a:ext cx="45720" cy="411480"/>
-          </a:xfrm>
-          <a:prstGeom prst="rect">
-            <a:avLst/>
-          </a:prstGeom>
-          <a:solidFill>
-            <a:srgbClr val="D98E04"/>
+            <a:off x="960119" y="4526279"/>
+            <a:ext cx="777240" cy="777240"/>
+          </a:xfrm>
+          <a:prstGeom prst="ellipse">
+            <a:avLst/>
+          </a:prstGeom>
+          <a:solidFill>
+            <a:srgbClr val="16304F"/>
           </a:solidFill>
           <a:ln>
             <a:noFill/>
@@ -9641,57 +9538,66 @@
           </a:fontRef>
         </p:style>
         <p:txBody>
-          <a:bodyPr rtlCol="0" anchor="ctr"/>
-          <a:lstStyle/>
-          <a:p>
-            <a:pPr algn="ctr"/>
-          </a:p>
-        </p:txBody>
-      </p:sp>
-      <p:sp>
-        <p:nvSpPr>
-          <p:cNvPr id="20" name="TextBox 19"/>
-          <p:cNvSpPr txBox="1"/>
-          <p:nvPr/>
-        </p:nvSpPr>
-        <p:spPr>
-          <a:xfrm>
-            <a:off x="7223760" y="3044952"/>
-            <a:ext cx="4206240" cy="457200"/>
-          </a:xfrm>
-          <a:prstGeom prst="rect">
-            <a:avLst/>
-          </a:prstGeom>
-          <a:noFill/>
-        </p:spPr>
-        <p:txBody>
-          <a:bodyPr wrap="square" anchor="t" lIns="45720" rIns="45720" tIns="27432" bIns="27432">
+          <a:bodyPr rtlCol="0" anchor="ctr" lIns="0" rIns="0" tIns="0" bIns="0"/>
+          <a:lstStyle/>
+          <a:p>
+            <a:pPr algn="ctr"/>
+            <a:r>
+              <a:rPr sz="2600" b="1">
+                <a:solidFill>
+                  <a:srgbClr val="FFFFFF"/>
+                </a:solidFill>
+                <a:latin typeface="Microsoft JhengHei"/>
+              </a:rPr>
+              <a:t>3</a:t>
+            </a:r>
+          </a:p>
+        </p:txBody>
+      </p:sp>
+      <p:sp>
+        <p:nvSpPr>
+          <p:cNvPr id="17" name="TextBox 16"/>
+          <p:cNvSpPr txBox="1"/>
+          <p:nvPr/>
+        </p:nvSpPr>
+        <p:spPr>
+          <a:xfrm>
+            <a:off x="1965960" y="4206240"/>
+            <a:ext cx="3931920" cy="1417320"/>
+          </a:xfrm>
+          <a:prstGeom prst="rect">
+            <a:avLst/>
+          </a:prstGeom>
+          <a:noFill/>
+        </p:spPr>
+        <p:txBody>
+          <a:bodyPr wrap="square" anchor="ctr" lIns="45720" rIns="45720" tIns="27432" bIns="27432">
             <a:spAutoFit/>
           </a:bodyPr>
           <a:lstStyle/>
           <a:p>
             <a:pPr algn="l"/>
             <a:r>
-              <a:rPr sz="1150" b="0">
-                <a:solidFill>
-                  <a:srgbClr val="8A5A00"/>
-                </a:solidFill>
-                <a:latin typeface="Microsoft JhengHei"/>
-              </a:rPr>
-              <a:t>沒有它，系統只學得到結論，學不到怎麼判</a:t>
-            </a:r>
-          </a:p>
-        </p:txBody>
-      </p:sp>
-      <p:sp>
-        <p:nvSpPr>
-          <p:cNvPr id="21" name="Rounded Rectangle 20"/>
+              <a:rPr sz="2800" b="1">
+                <a:solidFill>
+                  <a:srgbClr val="16304F"/>
+                </a:solidFill>
+                <a:latin typeface="Microsoft JhengHei"/>
+              </a:rPr>
+              <a:t>修正意見是正式入口</a:t>
+            </a:r>
+          </a:p>
+        </p:txBody>
+      </p:sp>
+      <p:sp>
+        <p:nvSpPr>
+          <p:cNvPr id="18" name="Rounded Rectangle 17"/>
           <p:cNvSpPr/>
           <p:nvPr/>
         </p:nvSpPr>
         <p:spPr>
           <a:xfrm>
-            <a:off x="640080" y="3840479"/>
+            <a:off x="6172200" y="3840479"/>
             <a:ext cx="5394960" cy="2148840"/>
           </a:xfrm>
           <a:prstGeom prst="roundRect">
@@ -9731,14 +9637,14 @@
       </p:sp>
       <p:sp>
         <p:nvSpPr>
-          <p:cNvPr id="22" name="Oval 21"/>
+          <p:cNvPr id="19" name="Oval 18"/>
           <p:cNvSpPr/>
           <p:nvPr/>
         </p:nvSpPr>
         <p:spPr>
           <a:xfrm>
-            <a:off x="868680" y="4096511"/>
-            <a:ext cx="502920" cy="502920"/>
+            <a:off x="6492240" y="4526279"/>
+            <a:ext cx="777240" cy="777240"/>
           </a:xfrm>
           <a:prstGeom prst="ellipse">
             <a:avLst/>
@@ -9771,410 +9677,48 @@
           <a:p>
             <a:pPr algn="ctr"/>
             <a:r>
-              <a:rPr sz="1800" b="1">
+              <a:rPr sz="2600" b="1">
                 <a:solidFill>
                   <a:srgbClr val="FFFFFF"/>
                 </a:solidFill>
                 <a:latin typeface="Microsoft JhengHei"/>
               </a:rPr>
-              <a:t>3</a:t>
-            </a:r>
-          </a:p>
-        </p:txBody>
-      </p:sp>
-      <p:sp>
-        <p:nvSpPr>
-          <p:cNvPr id="23" name="TextBox 22"/>
-          <p:cNvSpPr txBox="1"/>
-          <p:nvPr/>
-        </p:nvSpPr>
-        <p:spPr>
-          <a:xfrm>
-            <a:off x="1554480" y="4023359"/>
-            <a:ext cx="4343400" cy="457200"/>
-          </a:xfrm>
-          <a:prstGeom prst="rect">
-            <a:avLst/>
-          </a:prstGeom>
-          <a:noFill/>
-        </p:spPr>
-        <p:txBody>
-          <a:bodyPr wrap="square" anchor="t" lIns="45720" rIns="45720" tIns="27432" bIns="27432">
+              <a:t>4</a:t>
+            </a:r>
+          </a:p>
+        </p:txBody>
+      </p:sp>
+      <p:sp>
+        <p:nvSpPr>
+          <p:cNvPr id="20" name="TextBox 19"/>
+          <p:cNvSpPr txBox="1"/>
+          <p:nvPr/>
+        </p:nvSpPr>
+        <p:spPr>
+          <a:xfrm>
+            <a:off x="7498079" y="4206240"/>
+            <a:ext cx="3931920" cy="1417320"/>
+          </a:xfrm>
+          <a:prstGeom prst="rect">
+            <a:avLst/>
+          </a:prstGeom>
+          <a:noFill/>
+        </p:spPr>
+        <p:txBody>
+          <a:bodyPr wrap="square" anchor="ctr" lIns="45720" rIns="45720" tIns="27432" bIns="27432">
             <a:spAutoFit/>
           </a:bodyPr>
           <a:lstStyle/>
           <a:p>
             <a:pPr algn="l"/>
             <a:r>
-              <a:rPr sz="1900" b="1">
+              <a:rPr sz="2800" b="1">
                 <a:solidFill>
                   <a:srgbClr val="16304F"/>
                 </a:solidFill>
                 <a:latin typeface="Microsoft JhengHei"/>
               </a:rPr>
-              <a:t>修正意見是正式入口</a:t>
-            </a:r>
-          </a:p>
-        </p:txBody>
-      </p:sp>
-      <p:sp>
-        <p:nvSpPr>
-          <p:cNvPr id="24" name="TextBox 23"/>
-          <p:cNvSpPr txBox="1"/>
-          <p:nvPr/>
-        </p:nvSpPr>
-        <p:spPr>
-          <a:xfrm>
-            <a:off x="1554480" y="4498847"/>
-            <a:ext cx="4343400" cy="868680"/>
-          </a:xfrm>
-          <a:prstGeom prst="rect">
-            <a:avLst/>
-          </a:prstGeom>
-          <a:noFill/>
-        </p:spPr>
-        <p:txBody>
-          <a:bodyPr wrap="square" anchor="t" lIns="45720" rIns="45720" tIns="27432" bIns="27432">
-            <a:spAutoFit/>
-          </a:bodyPr>
-          <a:lstStyle/>
-          <a:p>
-            <a:pPr algn="l"/>
-            <a:r>
-              <a:rPr sz="1350" b="0">
-                <a:solidFill>
-                  <a:srgbClr val="334455"/>
-                </a:solidFill>
-                <a:latin typeface="Microsoft JhengHei"/>
-              </a:rPr>
-              <a:t>承辦人在任何一層提修正 → 只重算受影響的層 → 逐項回覆採納與否。</a:t>
-            </a:r>
-          </a:p>
-        </p:txBody>
-      </p:sp>
-      <p:sp>
-        <p:nvSpPr>
-          <p:cNvPr id="25" name="Rectangle 24"/>
-          <p:cNvSpPr/>
-          <p:nvPr/>
-        </p:nvSpPr>
-        <p:spPr>
-          <a:xfrm>
-            <a:off x="1554480" y="5394959"/>
-            <a:ext cx="45720" cy="411480"/>
-          </a:xfrm>
-          <a:prstGeom prst="rect">
-            <a:avLst/>
-          </a:prstGeom>
-          <a:solidFill>
-            <a:srgbClr val="D98E04"/>
-          </a:solidFill>
-          <a:ln>
-            <a:noFill/>
-          </a:ln>
-          <a:effectLst/>
-        </p:spPr>
-        <p:style>
-          <a:lnRef idx="1">
-            <a:schemeClr val="accent1"/>
-          </a:lnRef>
-          <a:fillRef idx="3">
-            <a:schemeClr val="accent1"/>
-          </a:fillRef>
-          <a:effectRef idx="2">
-            <a:schemeClr val="accent1"/>
-          </a:effectRef>
-          <a:fontRef idx="minor">
-            <a:schemeClr val="lt1"/>
-          </a:fontRef>
-        </p:style>
-        <p:txBody>
-          <a:bodyPr rtlCol="0" anchor="ctr"/>
-          <a:lstStyle/>
-          <a:p>
-            <a:pPr algn="ctr"/>
-          </a:p>
-        </p:txBody>
-      </p:sp>
-      <p:sp>
-        <p:nvSpPr>
-          <p:cNvPr id="26" name="TextBox 25"/>
-          <p:cNvSpPr txBox="1"/>
-          <p:nvPr/>
-        </p:nvSpPr>
-        <p:spPr>
-          <a:xfrm>
-            <a:off x="1691639" y="5376671"/>
-            <a:ext cx="4206240" cy="457200"/>
-          </a:xfrm>
-          <a:prstGeom prst="rect">
-            <a:avLst/>
-          </a:prstGeom>
-          <a:noFill/>
-        </p:spPr>
-        <p:txBody>
-          <a:bodyPr wrap="square" anchor="t" lIns="45720" rIns="45720" tIns="27432" bIns="27432">
-            <a:spAutoFit/>
-          </a:bodyPr>
-          <a:lstStyle/>
-          <a:p>
-            <a:pPr algn="l"/>
-            <a:r>
-              <a:rPr sz="1150" b="0">
-                <a:solidFill>
-                  <a:srgbClr val="8A5A00"/>
-                </a:solidFill>
-                <a:latin typeface="Microsoft JhengHei"/>
-              </a:rPr>
-              <a:t>「輔助」兩個字的實作</a:t>
-            </a:r>
-          </a:p>
-        </p:txBody>
-      </p:sp>
-      <p:sp>
-        <p:nvSpPr>
-          <p:cNvPr id="27" name="Rounded Rectangle 26"/>
-          <p:cNvSpPr/>
-          <p:nvPr/>
-        </p:nvSpPr>
-        <p:spPr>
-          <a:xfrm>
-            <a:off x="6172200" y="3840479"/>
-            <a:ext cx="5394960" cy="2148840"/>
-          </a:xfrm>
-          <a:prstGeom prst="roundRect">
-            <a:avLst>
-              <a:gd name="adj" fmla="val 8000"/>
-            </a:avLst>
-          </a:prstGeom>
-          <a:solidFill>
-            <a:srgbClr val="F4F6F9"/>
-          </a:solidFill>
-          <a:ln>
-            <a:noFill/>
-          </a:ln>
-          <a:effectLst/>
-        </p:spPr>
-        <p:style>
-          <a:lnRef idx="1">
-            <a:schemeClr val="accent1"/>
-          </a:lnRef>
-          <a:fillRef idx="3">
-            <a:schemeClr val="accent1"/>
-          </a:fillRef>
-          <a:effectRef idx="2">
-            <a:schemeClr val="accent1"/>
-          </a:effectRef>
-          <a:fontRef idx="minor">
-            <a:schemeClr val="lt1"/>
-          </a:fontRef>
-        </p:style>
-        <p:txBody>
-          <a:bodyPr rtlCol="0" anchor="ctr"/>
-          <a:lstStyle/>
-          <a:p>
-            <a:pPr algn="ctr"/>
-          </a:p>
-        </p:txBody>
-      </p:sp>
-      <p:sp>
-        <p:nvSpPr>
-          <p:cNvPr id="28" name="Oval 27"/>
-          <p:cNvSpPr/>
-          <p:nvPr/>
-        </p:nvSpPr>
-        <p:spPr>
-          <a:xfrm>
-            <a:off x="6400800" y="4096511"/>
-            <a:ext cx="502920" cy="502920"/>
-          </a:xfrm>
-          <a:prstGeom prst="ellipse">
-            <a:avLst/>
-          </a:prstGeom>
-          <a:solidFill>
-            <a:srgbClr val="16304F"/>
-          </a:solidFill>
-          <a:ln>
-            <a:noFill/>
-          </a:ln>
-          <a:effectLst/>
-        </p:spPr>
-        <p:style>
-          <a:lnRef idx="1">
-            <a:schemeClr val="accent1"/>
-          </a:lnRef>
-          <a:fillRef idx="3">
-            <a:schemeClr val="accent1"/>
-          </a:fillRef>
-          <a:effectRef idx="2">
-            <a:schemeClr val="accent1"/>
-          </a:effectRef>
-          <a:fontRef idx="minor">
-            <a:schemeClr val="lt1"/>
-          </a:fontRef>
-        </p:style>
-        <p:txBody>
-          <a:bodyPr rtlCol="0" anchor="ctr" lIns="0" rIns="0" tIns="0" bIns="0"/>
-          <a:lstStyle/>
-          <a:p>
-            <a:pPr algn="ctr"/>
-            <a:r>
-              <a:rPr sz="1800" b="1">
-                <a:solidFill>
-                  <a:srgbClr val="FFFFFF"/>
-                </a:solidFill>
-                <a:latin typeface="Microsoft JhengHei"/>
-              </a:rPr>
-              <a:t>4</a:t>
-            </a:r>
-          </a:p>
-        </p:txBody>
-      </p:sp>
-      <p:sp>
-        <p:nvSpPr>
-          <p:cNvPr id="29" name="TextBox 28"/>
-          <p:cNvSpPr txBox="1"/>
-          <p:nvPr/>
-        </p:nvSpPr>
-        <p:spPr>
-          <a:xfrm>
-            <a:off x="7086600" y="4023359"/>
-            <a:ext cx="4343400" cy="457200"/>
-          </a:xfrm>
-          <a:prstGeom prst="rect">
-            <a:avLst/>
-          </a:prstGeom>
-          <a:noFill/>
-        </p:spPr>
-        <p:txBody>
-          <a:bodyPr wrap="square" anchor="t" lIns="45720" rIns="45720" tIns="27432" bIns="27432">
-            <a:spAutoFit/>
-          </a:bodyPr>
-          <a:lstStyle/>
-          <a:p>
-            <a:pPr algn="l"/>
-            <a:r>
-              <a:rPr sz="1900" b="1">
-                <a:solidFill>
-                  <a:srgbClr val="16304F"/>
-                </a:solidFill>
-                <a:latin typeface="Microsoft JhengHei"/>
-              </a:rPr>
-              <a:t>透明、步驟式、非黑盒</a:t>
-            </a:r>
-          </a:p>
-        </p:txBody>
-      </p:sp>
-      <p:sp>
-        <p:nvSpPr>
-          <p:cNvPr id="30" name="TextBox 29"/>
-          <p:cNvSpPr txBox="1"/>
-          <p:nvPr/>
-        </p:nvSpPr>
-        <p:spPr>
-          <a:xfrm>
-            <a:off x="7086600" y="4498847"/>
-            <a:ext cx="4343400" cy="868680"/>
-          </a:xfrm>
-          <a:prstGeom prst="rect">
-            <a:avLst/>
-          </a:prstGeom>
-          <a:noFill/>
-        </p:spPr>
-        <p:txBody>
-          <a:bodyPr wrap="square" anchor="t" lIns="45720" rIns="45720" tIns="27432" bIns="27432">
-            <a:spAutoFit/>
-          </a:bodyPr>
-          <a:lstStyle/>
-          <a:p>
-            <a:pPr algn="l"/>
-            <a:r>
-              <a:rPr sz="1350" b="0">
-                <a:solidFill>
-                  <a:srgbClr val="334455"/>
-                </a:solidFill>
-                <a:latin typeface="Microsoft JhengHei"/>
-              </a:rPr>
-              <a:t>固定七步、每步落地、每個結論可點回卷證原句與真實條號。</a:t>
-            </a:r>
-          </a:p>
-        </p:txBody>
-      </p:sp>
-      <p:sp>
-        <p:nvSpPr>
-          <p:cNvPr id="31" name="Rectangle 30"/>
-          <p:cNvSpPr/>
-          <p:nvPr/>
-        </p:nvSpPr>
-        <p:spPr>
-          <a:xfrm>
-            <a:off x="7086600" y="5394959"/>
-            <a:ext cx="45720" cy="411480"/>
-          </a:xfrm>
-          <a:prstGeom prst="rect">
-            <a:avLst/>
-          </a:prstGeom>
-          <a:solidFill>
-            <a:srgbClr val="D98E04"/>
-          </a:solidFill>
-          <a:ln>
-            <a:noFill/>
-          </a:ln>
-          <a:effectLst/>
-        </p:spPr>
-        <p:style>
-          <a:lnRef idx="1">
-            <a:schemeClr val="accent1"/>
-          </a:lnRef>
-          <a:fillRef idx="3">
-            <a:schemeClr val="accent1"/>
-          </a:fillRef>
-          <a:effectRef idx="2">
-            <a:schemeClr val="accent1"/>
-          </a:effectRef>
-          <a:fontRef idx="minor">
-            <a:schemeClr val="lt1"/>
-          </a:fontRef>
-        </p:style>
-        <p:txBody>
-          <a:bodyPr rtlCol="0" anchor="ctr"/>
-          <a:lstStyle/>
-          <a:p>
-            <a:pPr algn="ctr"/>
-          </a:p>
-        </p:txBody>
-      </p:sp>
-      <p:sp>
-        <p:nvSpPr>
-          <p:cNvPr id="32" name="TextBox 31"/>
-          <p:cNvSpPr txBox="1"/>
-          <p:nvPr/>
-        </p:nvSpPr>
-        <p:spPr>
-          <a:xfrm>
-            <a:off x="7223760" y="5376671"/>
-            <a:ext cx="4206240" cy="457200"/>
-          </a:xfrm>
-          <a:prstGeom prst="rect">
-            <a:avLst/>
-          </a:prstGeom>
-          <a:noFill/>
-        </p:spPr>
-        <p:txBody>
-          <a:bodyPr wrap="square" anchor="t" lIns="45720" rIns="45720" tIns="27432" bIns="27432">
-            <a:spAutoFit/>
-          </a:bodyPr>
-          <a:lstStyle/>
-          <a:p>
-            <a:pPr algn="l"/>
-            <a:r>
-              <a:rPr sz="1150" b="0">
-                <a:solidFill>
-                  <a:srgbClr val="8A5A00"/>
-                </a:solidFill>
-                <a:latin typeface="Microsoft JhengHei"/>
-              </a:rPr>
-              <a:t>評審問「怎麼知道它沒亂講」的答案</a:t>
+              <a:t>數據飛輪：法規庫＋案件庫</a:t>
             </a:r>
           </a:p>
         </p:txBody>
@@ -11231,7 +10775,7 @@
                 </a:solidFill>
                 <a:latin typeface="Microsoft JhengHei"/>
               </a:rPr>
-              <a:t>數據飛輪：決定書是輸出，答辯書和卷證才是輸入</a:t>
+              <a:t>透明、步驟式、非黑盒：固定七步，哪一步錯就修哪一步</a:t>
             </a:r>
           </a:p>
         </p:txBody>
@@ -11358,8 +10902,8 @@
         </p:nvSpPr>
         <p:spPr>
           <a:xfrm>
-            <a:off x="640080" y="1508760"/>
-            <a:ext cx="5029200" cy="2651760"/>
+            <a:off x="640080" y="1554480"/>
+            <a:ext cx="1481328" cy="1234440"/>
           </a:xfrm>
           <a:prstGeom prst="roundRect">
             <a:avLst>
@@ -11367,10 +10911,12 @@
             </a:avLst>
           </a:prstGeom>
           <a:solidFill>
-            <a:srgbClr val="F4F6F9"/>
-          </a:solidFill>
-          <a:ln>
-            <a:noFill/>
+            <a:srgbClr val="FFFFFF"/>
+          </a:solidFill>
+          <a:ln w="19050">
+            <a:solidFill>
+              <a:srgbClr val="DDE3EA"/>
+            </a:solidFill>
           </a:ln>
           <a:effectLst/>
         </p:spPr>
@@ -11404,8 +10950,8 @@
         </p:nvSpPr>
         <p:spPr>
           <a:xfrm>
-            <a:off x="868680" y="1645920"/>
-            <a:ext cx="4572000" cy="365760"/>
+            <a:off x="640080" y="1664208"/>
+            <a:ext cx="1481328" cy="457200"/>
           </a:xfrm>
           <a:prstGeom prst="rect">
             <a:avLst/>
@@ -11418,72 +10964,37 @@
           </a:bodyPr>
           <a:lstStyle/>
           <a:p>
-            <a:pPr algn="l"/>
-            <a:r>
-              <a:rPr sz="1500" b="1">
+            <a:pPr algn="ctr"/>
+            <a:r>
+              <a:rPr sz="1450" b="1">
                 <a:solidFill>
                   <a:srgbClr val="16304F"/>
                 </a:solidFill>
                 <a:latin typeface="Microsoft JhengHei"/>
               </a:rPr>
-              <a:t>為什麼輸入拿不到</a:t>
-            </a:r>
-          </a:p>
-        </p:txBody>
-      </p:sp>
-      <p:sp>
-        <p:nvSpPr>
-          <p:cNvPr id="11" name="TextBox 10"/>
-          <p:cNvSpPr txBox="1"/>
-          <p:nvPr/>
-        </p:nvSpPr>
-        <p:spPr>
-          <a:xfrm>
-            <a:off x="868680" y="2057400"/>
-            <a:ext cx="4572000" cy="2103120"/>
-          </a:xfrm>
-          <a:prstGeom prst="rect">
-            <a:avLst/>
-          </a:prstGeom>
-          <a:noFill/>
-        </p:spPr>
-        <p:txBody>
-          <a:bodyPr wrap="square" anchor="t" lIns="45720" rIns="45720" tIns="27432" bIns="27432">
-            <a:spAutoFit/>
-          </a:bodyPr>
-          <a:lstStyle/>
-          <a:p>
-            <a:pPr algn="l"/>
-            <a:r>
-              <a:rPr sz="1200" b="0">
-                <a:solidFill>
-                  <a:srgbClr val="334455"/>
-                </a:solidFill>
-                <a:latin typeface="Microsoft JhengHei"/>
-              </a:rPr>
-              <a:t>・訴願法 §58 III／IV：答辯書只存在於機關、受理機關卷內、訴願人手上，沒有公開機制
-・訴願法 §49、§75 II：卷宗閱覽限訴願人、參加人、代理人
-・所以決定書到處都是、答辯書一份難求——這是制度設計的結果，不是錯覺</a:t>
-            </a:r>
-          </a:p>
-        </p:txBody>
-      </p:sp>
-      <p:sp>
-        <p:nvSpPr>
-          <p:cNvPr id="12" name="Rectangle 11"/>
+              <a:t>欄位擷取</a:t>
+            </a:r>
+          </a:p>
+        </p:txBody>
+      </p:sp>
+      <p:sp>
+        <p:nvSpPr>
+          <p:cNvPr id="11" name="Rounded Rectangle 10"/>
           <p:cNvSpPr/>
           <p:nvPr/>
         </p:nvSpPr>
         <p:spPr>
           <a:xfrm>
-            <a:off x="640080" y="4343400"/>
-            <a:ext cx="5029200" cy="1143000"/>
-          </a:xfrm>
-          <a:prstGeom prst="rect">
-            <a:avLst/>
-          </a:prstGeom>
-          <a:solidFill>
-            <a:srgbClr val="FFF8EA"/>
+            <a:off x="822959" y="2212848"/>
+            <a:ext cx="1115568" cy="365760"/>
+          </a:xfrm>
+          <a:prstGeom prst="roundRect">
+            <a:avLst>
+              <a:gd name="adj" fmla="val 30000"/>
+            </a:avLst>
+          </a:prstGeom>
+          <a:solidFill>
+            <a:srgbClr val="FFF2D6"/>
           </a:solidFill>
           <a:ln>
             <a:noFill/>
@@ -11514,23 +11025,62 @@
       </p:sp>
       <p:sp>
         <p:nvSpPr>
-          <p:cNvPr id="13" name="Rectangle 12"/>
+          <p:cNvPr id="12" name="TextBox 11"/>
+          <p:cNvSpPr txBox="1"/>
+          <p:nvPr/>
+        </p:nvSpPr>
+        <p:spPr>
+          <a:xfrm>
+            <a:off x="822959" y="2212848"/>
+            <a:ext cx="1115568" cy="365760"/>
+          </a:xfrm>
+          <a:prstGeom prst="rect">
+            <a:avLst/>
+          </a:prstGeom>
+          <a:noFill/>
+        </p:spPr>
+        <p:txBody>
+          <a:bodyPr wrap="square" anchor="ctr" lIns="45720" rIns="45720" tIns="27432" bIns="27432">
+            <a:spAutoFit/>
+          </a:bodyPr>
+          <a:lstStyle/>
+          <a:p>
+            <a:pPr algn="ctr"/>
+            <a:r>
+              <a:rPr sz="1100" b="1">
+                <a:solidFill>
+                  <a:srgbClr val="B36F00"/>
+                </a:solidFill>
+                <a:latin typeface="Microsoft JhengHei"/>
+              </a:rPr>
+              <a:t>模型 1 次</a:t>
+            </a:r>
+          </a:p>
+        </p:txBody>
+      </p:sp>
+      <p:sp>
+        <p:nvSpPr>
+          <p:cNvPr id="13" name="Rounded Rectangle 12"/>
           <p:cNvSpPr/>
           <p:nvPr/>
         </p:nvSpPr>
         <p:spPr>
           <a:xfrm>
-            <a:off x="640080" y="4343400"/>
-            <a:ext cx="64008" cy="1143000"/>
-          </a:xfrm>
-          <a:prstGeom prst="rect">
-            <a:avLst/>
-          </a:prstGeom>
-          <a:solidFill>
-            <a:srgbClr val="D98E04"/>
-          </a:solidFill>
-          <a:ln>
-            <a:noFill/>
+            <a:off x="2203704" y="1554480"/>
+            <a:ext cx="1481328" cy="1234440"/>
+          </a:xfrm>
+          <a:prstGeom prst="roundRect">
+            <a:avLst>
+              <a:gd name="adj" fmla="val 8000"/>
+            </a:avLst>
+          </a:prstGeom>
+          <a:solidFill>
+            <a:srgbClr val="F2F8F3"/>
+          </a:solidFill>
+          <a:ln w="19050">
+            <a:solidFill>
+              <a:srgbClr val="2E7D32"/>
+            </a:solidFill>
           </a:ln>
           <a:effectLst/>
         </p:spPr>
@@ -11564,53 +11114,54 @@
         </p:nvSpPr>
         <p:spPr>
           <a:xfrm>
-            <a:off x="822960" y="4370832"/>
-            <a:ext cx="4754880" cy="1097280"/>
-          </a:xfrm>
-          <a:prstGeom prst="rect">
-            <a:avLst/>
-          </a:prstGeom>
-          <a:noFill/>
-        </p:spPr>
-        <p:txBody>
-          <a:bodyPr wrap="square" anchor="ctr" lIns="45720" rIns="45720" tIns="27432" bIns="27432">
-            <a:spAutoFit/>
-          </a:bodyPr>
-          <a:lstStyle/>
-          <a:p>
-            <a:pPr algn="l"/>
-            <a:r>
-              <a:rPr sz="1200" b="0">
-                <a:solidFill>
-                  <a:srgbClr val="334455"/>
-                </a:solidFill>
-                <a:latin typeface="Microsoft JhengHei"/>
-              </a:rPr>
-              <a:t>補件與重新匯入走同一條路：承辦人跟助手說「補這份」→ 只辨識新檔 → 只重算受影響的步驟 → 前端立即更新</a:t>
-            </a:r>
-          </a:p>
-        </p:txBody>
-      </p:sp>
-      <p:sp>
-        <p:nvSpPr>
-          <p:cNvPr id="15" name="Oval 14"/>
+            <a:off x="2203704" y="1664208"/>
+            <a:ext cx="1481328" cy="457200"/>
+          </a:xfrm>
+          <a:prstGeom prst="rect">
+            <a:avLst/>
+          </a:prstGeom>
+          <a:noFill/>
+        </p:spPr>
+        <p:txBody>
+          <a:bodyPr wrap="square" anchor="t" lIns="45720" rIns="45720" tIns="27432" bIns="27432">
+            <a:spAutoFit/>
+          </a:bodyPr>
+          <a:lstStyle/>
+          <a:p>
+            <a:pPr algn="ctr"/>
+            <a:r>
+              <a:rPr sz="1450" b="1">
+                <a:solidFill>
+                  <a:srgbClr val="16304F"/>
+                </a:solidFill>
+                <a:latin typeface="Microsoft JhengHei"/>
+              </a:rPr>
+              <a:t>期間・程序</a:t>
+            </a:r>
+          </a:p>
+        </p:txBody>
+      </p:sp>
+      <p:sp>
+        <p:nvSpPr>
+          <p:cNvPr id="15" name="Rounded Rectangle 14"/>
           <p:cNvSpPr/>
           <p:nvPr/>
         </p:nvSpPr>
         <p:spPr>
           <a:xfrm>
-            <a:off x="7360919" y="2103120"/>
-            <a:ext cx="2834640" cy="2834640"/>
-          </a:xfrm>
-          <a:prstGeom prst="ellipse">
-            <a:avLst/>
-          </a:prstGeom>
-          <a:noFill/>
-          <a:ln w="50800">
-            <a:solidFill>
-              <a:srgbClr val="D98E04"/>
-            </a:solidFill>
-            <a:prstDash val="dash"/>
+            <a:off x="2386584" y="2212848"/>
+            <a:ext cx="1115568" cy="365760"/>
+          </a:xfrm>
+          <a:prstGeom prst="roundRect">
+            <a:avLst>
+              <a:gd name="adj" fmla="val 30000"/>
+            </a:avLst>
+          </a:prstGeom>
+          <a:solidFill>
+            <a:srgbClr val="E0F0E2"/>
+          </a:solidFill>
+          <a:ln>
+            <a:noFill/>
           </a:ln>
           <a:effectLst/>
         </p:spPr>
@@ -11644,8 +11195,8 @@
         </p:nvSpPr>
         <p:spPr>
           <a:xfrm>
-            <a:off x="7863840" y="3246120"/>
-            <a:ext cx="1828800" cy="548640"/>
+            <a:off x="2386584" y="2212848"/>
+            <a:ext cx="1115568" cy="365760"/>
           </a:xfrm>
           <a:prstGeom prst="rect">
             <a:avLst/>
@@ -11660,36 +11211,40 @@
           <a:p>
             <a:pPr algn="ctr"/>
             <a:r>
-              <a:rPr sz="1800" b="1">
-                <a:solidFill>
-                  <a:srgbClr val="D98E04"/>
-                </a:solidFill>
-                <a:latin typeface="Microsoft JhengHei"/>
-              </a:rPr>
-              <a:t>越用越準</a:t>
-            </a:r>
-          </a:p>
-        </p:txBody>
-      </p:sp>
-      <p:sp>
-        <p:nvSpPr>
-          <p:cNvPr id="17" name="Oval 16"/>
+              <a:rPr sz="1100" b="1">
+                <a:solidFill>
+                  <a:srgbClr val="2E7D32"/>
+                </a:solidFill>
+                <a:latin typeface="Microsoft JhengHei"/>
+              </a:rPr>
+              <a:t>程式 0 次</a:t>
+            </a:r>
+          </a:p>
+        </p:txBody>
+      </p:sp>
+      <p:sp>
+        <p:nvSpPr>
+          <p:cNvPr id="17" name="Rounded Rectangle 16"/>
           <p:cNvSpPr/>
           <p:nvPr/>
         </p:nvSpPr>
         <p:spPr>
           <a:xfrm>
-            <a:off x="8366760" y="1691639"/>
-            <a:ext cx="822960" cy="822960"/>
-          </a:xfrm>
-          <a:prstGeom prst="ellipse">
-            <a:avLst/>
-          </a:prstGeom>
-          <a:solidFill>
-            <a:srgbClr val="16304F"/>
-          </a:solidFill>
-          <a:ln>
-            <a:noFill/>
+            <a:off x="3767328" y="1554480"/>
+            <a:ext cx="1481328" cy="1234440"/>
+          </a:xfrm>
+          <a:prstGeom prst="roundRect">
+            <a:avLst>
+              <a:gd name="adj" fmla="val 8000"/>
+            </a:avLst>
+          </a:prstGeom>
+          <a:solidFill>
+            <a:srgbClr val="FFFFFF"/>
+          </a:solidFill>
+          <a:ln w="19050">
+            <a:solidFill>
+              <a:srgbClr val="DDE3EA"/>
+            </a:solidFill>
           </a:ln>
           <a:effectLst/>
         </p:spPr>
@@ -11708,19 +11263,10 @@
           </a:fontRef>
         </p:style>
         <p:txBody>
-          <a:bodyPr rtlCol="0" anchor="ctr" lIns="0" rIns="0" tIns="0" bIns="0"/>
-          <a:lstStyle/>
-          <a:p>
-            <a:pPr algn="ctr"/>
-            <a:r>
-              <a:rPr sz="1400" b="1">
-                <a:solidFill>
-                  <a:srgbClr val="FFFFFF"/>
-                </a:solidFill>
-                <a:latin typeface="Microsoft JhengHei"/>
-              </a:rPr>
-              <a:t>辦案</a:t>
-            </a:r>
+          <a:bodyPr rtlCol="0" anchor="ctr"/>
+          <a:lstStyle/>
+          <a:p>
+            <a:pPr algn="ctr"/>
           </a:p>
         </p:txBody>
       </p:sp>
@@ -11732,49 +11278,51 @@
         </p:nvSpPr>
         <p:spPr>
           <a:xfrm>
-            <a:off x="7772400" y="868679"/>
-            <a:ext cx="2011680" cy="457200"/>
-          </a:xfrm>
-          <a:prstGeom prst="rect">
-            <a:avLst/>
-          </a:prstGeom>
-          <a:noFill/>
-        </p:spPr>
-        <p:txBody>
-          <a:bodyPr wrap="square" anchor="ctr" lIns="45720" rIns="45720" tIns="27432" bIns="27432">
-            <a:spAutoFit/>
-          </a:bodyPr>
-          <a:lstStyle/>
-          <a:p>
-            <a:pPr algn="ctr"/>
-            <a:r>
-              <a:rPr sz="1050" b="0">
-                <a:solidFill>
-                  <a:srgbClr val="334455"/>
-                </a:solidFill>
-                <a:latin typeface="Microsoft JhengHei"/>
-              </a:rPr>
-              <a:t>承辦人上傳卷宗、答辯書</a:t>
-            </a:r>
-          </a:p>
-        </p:txBody>
-      </p:sp>
-      <p:sp>
-        <p:nvSpPr>
-          <p:cNvPr id="19" name="Oval 18"/>
+            <a:off x="3767328" y="1664208"/>
+            <a:ext cx="1481328" cy="457200"/>
+          </a:xfrm>
+          <a:prstGeom prst="rect">
+            <a:avLst/>
+          </a:prstGeom>
+          <a:noFill/>
+        </p:spPr>
+        <p:txBody>
+          <a:bodyPr wrap="square" anchor="t" lIns="45720" rIns="45720" tIns="27432" bIns="27432">
+            <a:spAutoFit/>
+          </a:bodyPr>
+          <a:lstStyle/>
+          <a:p>
+            <a:pPr algn="ctr"/>
+            <a:r>
+              <a:rPr sz="1450" b="1">
+                <a:solidFill>
+                  <a:srgbClr val="16304F"/>
+                </a:solidFill>
+                <a:latin typeface="Microsoft JhengHei"/>
+              </a:rPr>
+              <a:t>爭點</a:t>
+            </a:r>
+          </a:p>
+        </p:txBody>
+      </p:sp>
+      <p:sp>
+        <p:nvSpPr>
+          <p:cNvPr id="19" name="Rounded Rectangle 18"/>
           <p:cNvSpPr/>
           <p:nvPr/>
         </p:nvSpPr>
         <p:spPr>
           <a:xfrm>
-            <a:off x="9714711" y="2670984"/>
-            <a:ext cx="822960" cy="822960"/>
-          </a:xfrm>
-          <a:prstGeom prst="ellipse">
-            <a:avLst/>
-          </a:prstGeom>
-          <a:solidFill>
-            <a:srgbClr val="16304F"/>
+            <a:off x="3950208" y="2212848"/>
+            <a:ext cx="1115568" cy="365760"/>
+          </a:xfrm>
+          <a:prstGeom prst="roundRect">
+            <a:avLst>
+              <a:gd name="adj" fmla="val 30000"/>
+            </a:avLst>
+          </a:prstGeom>
+          <a:solidFill>
+            <a:srgbClr val="FFF2D6"/>
           </a:solidFill>
           <a:ln>
             <a:noFill/>
@@ -11796,19 +11344,10 @@
           </a:fontRef>
         </p:style>
         <p:txBody>
-          <a:bodyPr rtlCol="0" anchor="ctr" lIns="0" rIns="0" tIns="0" bIns="0"/>
-          <a:lstStyle/>
-          <a:p>
-            <a:pPr algn="ctr"/>
-            <a:r>
-              <a:rPr sz="1400" b="1">
-                <a:solidFill>
-                  <a:srgbClr val="FFFFFF"/>
-                </a:solidFill>
-                <a:latin typeface="Microsoft JhengHei"/>
-              </a:rPr>
-              <a:t>歸戶</a:t>
-            </a:r>
+          <a:bodyPr rtlCol="0" anchor="ctr"/>
+          <a:lstStyle/>
+          <a:p>
+            <a:pPr algn="ctr"/>
           </a:p>
         </p:txBody>
       </p:sp>
@@ -11820,8 +11359,8 @@
         </p:nvSpPr>
         <p:spPr>
           <a:xfrm>
-            <a:off x="10076962" y="2543042"/>
-            <a:ext cx="2011680" cy="457200"/>
+            <a:off x="3950208" y="2212848"/>
+            <a:ext cx="1115568" cy="365760"/>
           </a:xfrm>
           <a:prstGeom prst="rect">
             <a:avLst/>
@@ -11834,38 +11373,42 @@
           </a:bodyPr>
           <a:lstStyle/>
           <a:p>
-            <a:pPr algn="l"/>
-            <a:r>
-              <a:rPr sz="1050" b="0">
-                <a:solidFill>
-                  <a:srgbClr val="334455"/>
-                </a:solidFill>
-                <a:latin typeface="Microsoft JhengHei"/>
-              </a:rPr>
-              <a:t>27 類文件，自動命名進案件庫</a:t>
-            </a:r>
-          </a:p>
-        </p:txBody>
-      </p:sp>
-      <p:sp>
-        <p:nvSpPr>
-          <p:cNvPr id="21" name="Oval 20"/>
+            <a:pPr algn="ctr"/>
+            <a:r>
+              <a:rPr sz="1100" b="1">
+                <a:solidFill>
+                  <a:srgbClr val="B36F00"/>
+                </a:solidFill>
+                <a:latin typeface="Microsoft JhengHei"/>
+              </a:rPr>
+              <a:t>模型 1 次</a:t>
+            </a:r>
+          </a:p>
+        </p:txBody>
+      </p:sp>
+      <p:sp>
+        <p:nvSpPr>
+          <p:cNvPr id="21" name="Rounded Rectangle 20"/>
           <p:cNvSpPr/>
           <p:nvPr/>
         </p:nvSpPr>
         <p:spPr>
           <a:xfrm>
-            <a:off x="9199839" y="4255595"/>
-            <a:ext cx="822960" cy="822960"/>
-          </a:xfrm>
-          <a:prstGeom prst="ellipse">
-            <a:avLst/>
-          </a:prstGeom>
-          <a:solidFill>
-            <a:srgbClr val="16304F"/>
-          </a:solidFill>
-          <a:ln>
-            <a:noFill/>
+            <a:off x="5330952" y="1554480"/>
+            <a:ext cx="1481328" cy="1234440"/>
+          </a:xfrm>
+          <a:prstGeom prst="roundRect">
+            <a:avLst>
+              <a:gd name="adj" fmla="val 8000"/>
+            </a:avLst>
+          </a:prstGeom>
+          <a:solidFill>
+            <a:srgbClr val="FFFFFF"/>
+          </a:solidFill>
+          <a:ln w="19050">
+            <a:solidFill>
+              <a:srgbClr val="DDE3EA"/>
+            </a:solidFill>
           </a:ln>
           <a:effectLst/>
         </p:spPr>
@@ -11884,19 +11427,10 @@
           </a:fontRef>
         </p:style>
         <p:txBody>
-          <a:bodyPr rtlCol="0" anchor="ctr" lIns="0" rIns="0" tIns="0" bIns="0"/>
-          <a:lstStyle/>
-          <a:p>
-            <a:pPr algn="ctr"/>
-            <a:r>
-              <a:rPr sz="1400" b="1">
-                <a:solidFill>
-                  <a:srgbClr val="FFFFFF"/>
-                </a:solidFill>
-                <a:latin typeface="Microsoft JhengHei"/>
-              </a:rPr>
-              <a:t>分析</a:t>
-            </a:r>
+          <a:bodyPr rtlCol="0" anchor="ctr"/>
+          <a:lstStyle/>
+          <a:p>
+            <a:pPr algn="ctr"/>
           </a:p>
         </p:txBody>
       </p:sp>
@@ -11908,49 +11442,51 @@
         </p:nvSpPr>
         <p:spPr>
           <a:xfrm>
-            <a:off x="9196697" y="5252217"/>
-            <a:ext cx="2011680" cy="457200"/>
-          </a:xfrm>
-          <a:prstGeom prst="rect">
-            <a:avLst/>
-          </a:prstGeom>
-          <a:noFill/>
-        </p:spPr>
-        <p:txBody>
-          <a:bodyPr wrap="square" anchor="ctr" lIns="45720" rIns="45720" tIns="27432" bIns="27432">
-            <a:spAutoFit/>
-          </a:bodyPr>
-          <a:lstStyle/>
-          <a:p>
-            <a:pPr algn="l"/>
-            <a:r>
-              <a:rPr sz="1050" b="0">
-                <a:solidFill>
-                  <a:srgbClr val="334455"/>
-                </a:solidFill>
-                <a:latin typeface="Microsoft JhengHei"/>
-              </a:rPr>
-              <a:t>法規庫檢索、相似案例、草稿</a:t>
-            </a:r>
-          </a:p>
-        </p:txBody>
-      </p:sp>
-      <p:sp>
-        <p:nvSpPr>
-          <p:cNvPr id="23" name="Oval 22"/>
+            <a:off x="5330952" y="1664208"/>
+            <a:ext cx="1481328" cy="457200"/>
+          </a:xfrm>
+          <a:prstGeom prst="rect">
+            <a:avLst/>
+          </a:prstGeom>
+          <a:noFill/>
+        </p:spPr>
+        <p:txBody>
+          <a:bodyPr wrap="square" anchor="t" lIns="45720" rIns="45720" tIns="27432" bIns="27432">
+            <a:spAutoFit/>
+          </a:bodyPr>
+          <a:lstStyle/>
+          <a:p>
+            <a:pPr algn="ctr"/>
+            <a:r>
+              <a:rPr sz="1450" b="1">
+                <a:solidFill>
+                  <a:srgbClr val="16304F"/>
+                </a:solidFill>
+                <a:latin typeface="Microsoft JhengHei"/>
+              </a:rPr>
+              <a:t>法規</a:t>
+            </a:r>
+          </a:p>
+        </p:txBody>
+      </p:sp>
+      <p:sp>
+        <p:nvSpPr>
+          <p:cNvPr id="23" name="Rounded Rectangle 22"/>
           <p:cNvSpPr/>
           <p:nvPr/>
         </p:nvSpPr>
         <p:spPr>
           <a:xfrm>
-            <a:off x="7533680" y="4255595"/>
-            <a:ext cx="822960" cy="822960"/>
-          </a:xfrm>
-          <a:prstGeom prst="ellipse">
-            <a:avLst/>
-          </a:prstGeom>
-          <a:solidFill>
-            <a:srgbClr val="16304F"/>
+            <a:off x="5513832" y="2212848"/>
+            <a:ext cx="1115568" cy="365760"/>
+          </a:xfrm>
+          <a:prstGeom prst="roundRect">
+            <a:avLst>
+              <a:gd name="adj" fmla="val 30000"/>
+            </a:avLst>
+          </a:prstGeom>
+          <a:solidFill>
+            <a:srgbClr val="FFF2D6"/>
           </a:solidFill>
           <a:ln>
             <a:noFill/>
@@ -11972,19 +11508,10 @@
           </a:fontRef>
         </p:style>
         <p:txBody>
-          <a:bodyPr rtlCol="0" anchor="ctr" lIns="0" rIns="0" tIns="0" bIns="0"/>
-          <a:lstStyle/>
-          <a:p>
-            <a:pPr algn="ctr"/>
-            <a:r>
-              <a:rPr sz="1400" b="1">
-                <a:solidFill>
-                  <a:srgbClr val="FFFFFF"/>
-                </a:solidFill>
-                <a:latin typeface="Microsoft JhengHei"/>
-              </a:rPr>
-              <a:t>修正</a:t>
-            </a:r>
+          <a:bodyPr rtlCol="0" anchor="ctr"/>
+          <a:lstStyle/>
+          <a:p>
+            <a:pPr algn="ctr"/>
           </a:p>
         </p:txBody>
       </p:sp>
@@ -11996,8 +11523,8 @@
         </p:nvSpPr>
         <p:spPr>
           <a:xfrm>
-            <a:off x="6348102" y="5252217"/>
-            <a:ext cx="2011680" cy="457200"/>
+            <a:off x="5513832" y="2212848"/>
+            <a:ext cx="1115568" cy="365760"/>
           </a:xfrm>
           <a:prstGeom prst="rect">
             <a:avLst/>
@@ -12010,38 +11537,42 @@
           </a:bodyPr>
           <a:lstStyle/>
           <a:p>
-            <a:pPr algn="r"/>
-            <a:r>
-              <a:rPr sz="1050" b="0">
-                <a:solidFill>
-                  <a:srgbClr val="334455"/>
-                </a:solidFill>
-                <a:latin typeface="Microsoft JhengHei"/>
-              </a:rPr>
-              <a:t>承辦人確認／修改，寫回案件庫</a:t>
-            </a:r>
-          </a:p>
-        </p:txBody>
-      </p:sp>
-      <p:sp>
-        <p:nvSpPr>
-          <p:cNvPr id="25" name="Oval 24"/>
+            <a:pPr algn="ctr"/>
+            <a:r>
+              <a:rPr sz="1100" b="1">
+                <a:solidFill>
+                  <a:srgbClr val="B36F00"/>
+                </a:solidFill>
+                <a:latin typeface="Microsoft JhengHei"/>
+              </a:rPr>
+              <a:t>檢索＋1 次</a:t>
+            </a:r>
+          </a:p>
+        </p:txBody>
+      </p:sp>
+      <p:sp>
+        <p:nvSpPr>
+          <p:cNvPr id="25" name="Rounded Rectangle 24"/>
           <p:cNvSpPr/>
           <p:nvPr/>
         </p:nvSpPr>
         <p:spPr>
           <a:xfrm>
-            <a:off x="7018808" y="2670984"/>
-            <a:ext cx="822960" cy="822960"/>
-          </a:xfrm>
-          <a:prstGeom prst="ellipse">
-            <a:avLst/>
-          </a:prstGeom>
-          <a:solidFill>
-            <a:srgbClr val="16304F"/>
-          </a:solidFill>
-          <a:ln>
-            <a:noFill/>
+            <a:off x="6894576" y="1554480"/>
+            <a:ext cx="1481328" cy="1234440"/>
+          </a:xfrm>
+          <a:prstGeom prst="roundRect">
+            <a:avLst>
+              <a:gd name="adj" fmla="val 8000"/>
+            </a:avLst>
+          </a:prstGeom>
+          <a:solidFill>
+            <a:srgbClr val="FFFFFF"/>
+          </a:solidFill>
+          <a:ln w="19050">
+            <a:solidFill>
+              <a:srgbClr val="DDE3EA"/>
+            </a:solidFill>
           </a:ln>
           <a:effectLst/>
         </p:spPr>
@@ -12060,19 +11591,10 @@
           </a:fontRef>
         </p:style>
         <p:txBody>
-          <a:bodyPr rtlCol="0" anchor="ctr" lIns="0" rIns="0" tIns="0" bIns="0"/>
-          <a:lstStyle/>
-          <a:p>
-            <a:pPr algn="ctr"/>
-            <a:r>
-              <a:rPr sz="1400" b="1">
-                <a:solidFill>
-                  <a:srgbClr val="FFFFFF"/>
-                </a:solidFill>
-                <a:latin typeface="Microsoft JhengHei"/>
-              </a:rPr>
-              <a:t>累積</a:t>
-            </a:r>
+          <a:bodyPr rtlCol="0" anchor="ctr"/>
+          <a:lstStyle/>
+          <a:p>
+            <a:pPr algn="ctr"/>
           </a:p>
         </p:txBody>
       </p:sp>
@@ -12084,8 +11606,89 @@
         </p:nvSpPr>
         <p:spPr>
           <a:xfrm>
-            <a:off x="5467837" y="2543042"/>
-            <a:ext cx="2011680" cy="457200"/>
+            <a:off x="6894576" y="1664208"/>
+            <a:ext cx="1481328" cy="457200"/>
+          </a:xfrm>
+          <a:prstGeom prst="rect">
+            <a:avLst/>
+          </a:prstGeom>
+          <a:noFill/>
+        </p:spPr>
+        <p:txBody>
+          <a:bodyPr wrap="square" anchor="t" lIns="45720" rIns="45720" tIns="27432" bIns="27432">
+            <a:spAutoFit/>
+          </a:bodyPr>
+          <a:lstStyle/>
+          <a:p>
+            <a:pPr algn="ctr"/>
+            <a:r>
+              <a:rPr sz="1450" b="1">
+                <a:solidFill>
+                  <a:srgbClr val="16304F"/>
+                </a:solidFill>
+                <a:latin typeface="Microsoft JhengHei"/>
+              </a:rPr>
+              <a:t>相似案例</a:t>
+            </a:r>
+          </a:p>
+        </p:txBody>
+      </p:sp>
+      <p:sp>
+        <p:nvSpPr>
+          <p:cNvPr id="27" name="Rounded Rectangle 26"/>
+          <p:cNvSpPr/>
+          <p:nvPr/>
+        </p:nvSpPr>
+        <p:spPr>
+          <a:xfrm>
+            <a:off x="7077456" y="2212848"/>
+            <a:ext cx="1115568" cy="365760"/>
+          </a:xfrm>
+          <a:prstGeom prst="roundRect">
+            <a:avLst>
+              <a:gd name="adj" fmla="val 30000"/>
+            </a:avLst>
+          </a:prstGeom>
+          <a:solidFill>
+            <a:srgbClr val="FFF2D6"/>
+          </a:solidFill>
+          <a:ln>
+            <a:noFill/>
+          </a:ln>
+          <a:effectLst/>
+        </p:spPr>
+        <p:style>
+          <a:lnRef idx="1">
+            <a:schemeClr val="accent1"/>
+          </a:lnRef>
+          <a:fillRef idx="3">
+            <a:schemeClr val="accent1"/>
+          </a:fillRef>
+          <a:effectRef idx="2">
+            <a:schemeClr val="accent1"/>
+          </a:effectRef>
+          <a:fontRef idx="minor">
+            <a:schemeClr val="lt1"/>
+          </a:fontRef>
+        </p:style>
+        <p:txBody>
+          <a:bodyPr rtlCol="0" anchor="ctr"/>
+          <a:lstStyle/>
+          <a:p>
+            <a:pPr algn="ctr"/>
+          </a:p>
+        </p:txBody>
+      </p:sp>
+      <p:sp>
+        <p:nvSpPr>
+          <p:cNvPr id="28" name="TextBox 27"/>
+          <p:cNvSpPr txBox="1"/>
+          <p:nvPr/>
+        </p:nvSpPr>
+        <p:spPr>
+          <a:xfrm>
+            <a:off x="7077456" y="2212848"/>
+            <a:ext cx="1115568" cy="365760"/>
           </a:xfrm>
           <a:prstGeom prst="rect">
             <a:avLst/>
@@ -12098,15 +11701,483 @@
           </a:bodyPr>
           <a:lstStyle/>
           <a:p>
-            <a:pPr algn="r"/>
-            <a:r>
-              <a:rPr sz="1050" b="0">
+            <a:pPr algn="ctr"/>
+            <a:r>
+              <a:rPr sz="1100" b="1">
+                <a:solidFill>
+                  <a:srgbClr val="B36F00"/>
+                </a:solidFill>
+                <a:latin typeface="Microsoft JhengHei"/>
+              </a:rPr>
+              <a:t>檢索＋1 次</a:t>
+            </a:r>
+          </a:p>
+        </p:txBody>
+      </p:sp>
+      <p:sp>
+        <p:nvSpPr>
+          <p:cNvPr id="29" name="Rounded Rectangle 28"/>
+          <p:cNvSpPr/>
+          <p:nvPr/>
+        </p:nvSpPr>
+        <p:spPr>
+          <a:xfrm>
+            <a:off x="8458200" y="1554480"/>
+            <a:ext cx="1481328" cy="1234440"/>
+          </a:xfrm>
+          <a:prstGeom prst="roundRect">
+            <a:avLst>
+              <a:gd name="adj" fmla="val 8000"/>
+            </a:avLst>
+          </a:prstGeom>
+          <a:solidFill>
+            <a:srgbClr val="FFFFFF"/>
+          </a:solidFill>
+          <a:ln w="19050">
+            <a:solidFill>
+              <a:srgbClr val="DDE3EA"/>
+            </a:solidFill>
+          </a:ln>
+          <a:effectLst/>
+        </p:spPr>
+        <p:style>
+          <a:lnRef idx="1">
+            <a:schemeClr val="accent1"/>
+          </a:lnRef>
+          <a:fillRef idx="3">
+            <a:schemeClr val="accent1"/>
+          </a:fillRef>
+          <a:effectRef idx="2">
+            <a:schemeClr val="accent1"/>
+          </a:effectRef>
+          <a:fontRef idx="minor">
+            <a:schemeClr val="lt1"/>
+          </a:fontRef>
+        </p:style>
+        <p:txBody>
+          <a:bodyPr rtlCol="0" anchor="ctr"/>
+          <a:lstStyle/>
+          <a:p>
+            <a:pPr algn="ctr"/>
+          </a:p>
+        </p:txBody>
+      </p:sp>
+      <p:sp>
+        <p:nvSpPr>
+          <p:cNvPr id="30" name="TextBox 29"/>
+          <p:cNvSpPr txBox="1"/>
+          <p:nvPr/>
+        </p:nvSpPr>
+        <p:spPr>
+          <a:xfrm>
+            <a:off x="8458200" y="1664208"/>
+            <a:ext cx="1481328" cy="457200"/>
+          </a:xfrm>
+          <a:prstGeom prst="rect">
+            <a:avLst/>
+          </a:prstGeom>
+          <a:noFill/>
+        </p:spPr>
+        <p:txBody>
+          <a:bodyPr wrap="square" anchor="t" lIns="45720" rIns="45720" tIns="27432" bIns="27432">
+            <a:spAutoFit/>
+          </a:bodyPr>
+          <a:lstStyle/>
+          <a:p>
+            <a:pPr algn="ctr"/>
+            <a:r>
+              <a:rPr sz="1450" b="1">
+                <a:solidFill>
+                  <a:srgbClr val="16304F"/>
+                </a:solidFill>
+                <a:latin typeface="Microsoft JhengHei"/>
+              </a:rPr>
+              <a:t>草稿</a:t>
+            </a:r>
+          </a:p>
+        </p:txBody>
+      </p:sp>
+      <p:sp>
+        <p:nvSpPr>
+          <p:cNvPr id="31" name="Rounded Rectangle 30"/>
+          <p:cNvSpPr/>
+          <p:nvPr/>
+        </p:nvSpPr>
+        <p:spPr>
+          <a:xfrm>
+            <a:off x="8641080" y="2212848"/>
+            <a:ext cx="1115568" cy="365760"/>
+          </a:xfrm>
+          <a:prstGeom prst="roundRect">
+            <a:avLst>
+              <a:gd name="adj" fmla="val 30000"/>
+            </a:avLst>
+          </a:prstGeom>
+          <a:solidFill>
+            <a:srgbClr val="FFF2D6"/>
+          </a:solidFill>
+          <a:ln>
+            <a:noFill/>
+          </a:ln>
+          <a:effectLst/>
+        </p:spPr>
+        <p:style>
+          <a:lnRef idx="1">
+            <a:schemeClr val="accent1"/>
+          </a:lnRef>
+          <a:fillRef idx="3">
+            <a:schemeClr val="accent1"/>
+          </a:fillRef>
+          <a:effectRef idx="2">
+            <a:schemeClr val="accent1"/>
+          </a:effectRef>
+          <a:fontRef idx="minor">
+            <a:schemeClr val="lt1"/>
+          </a:fontRef>
+        </p:style>
+        <p:txBody>
+          <a:bodyPr rtlCol="0" anchor="ctr"/>
+          <a:lstStyle/>
+          <a:p>
+            <a:pPr algn="ctr"/>
+          </a:p>
+        </p:txBody>
+      </p:sp>
+      <p:sp>
+        <p:nvSpPr>
+          <p:cNvPr id="32" name="TextBox 31"/>
+          <p:cNvSpPr txBox="1"/>
+          <p:nvPr/>
+        </p:nvSpPr>
+        <p:spPr>
+          <a:xfrm>
+            <a:off x="8641080" y="2212848"/>
+            <a:ext cx="1115568" cy="365760"/>
+          </a:xfrm>
+          <a:prstGeom prst="rect">
+            <a:avLst/>
+          </a:prstGeom>
+          <a:noFill/>
+        </p:spPr>
+        <p:txBody>
+          <a:bodyPr wrap="square" anchor="ctr" lIns="45720" rIns="45720" tIns="27432" bIns="27432">
+            <a:spAutoFit/>
+          </a:bodyPr>
+          <a:lstStyle/>
+          <a:p>
+            <a:pPr algn="ctr"/>
+            <a:r>
+              <a:rPr sz="1100" b="1">
+                <a:solidFill>
+                  <a:srgbClr val="B36F00"/>
+                </a:solidFill>
+                <a:latin typeface="Microsoft JhengHei"/>
+              </a:rPr>
+              <a:t>模型 1 次</a:t>
+            </a:r>
+          </a:p>
+        </p:txBody>
+      </p:sp>
+      <p:sp>
+        <p:nvSpPr>
+          <p:cNvPr id="33" name="Rounded Rectangle 32"/>
+          <p:cNvSpPr/>
+          <p:nvPr/>
+        </p:nvSpPr>
+        <p:spPr>
+          <a:xfrm>
+            <a:off x="10021824" y="1554480"/>
+            <a:ext cx="1481328" cy="1234440"/>
+          </a:xfrm>
+          <a:prstGeom prst="roundRect">
+            <a:avLst>
+              <a:gd name="adj" fmla="val 8000"/>
+            </a:avLst>
+          </a:prstGeom>
+          <a:solidFill>
+            <a:srgbClr val="FFFFFF"/>
+          </a:solidFill>
+          <a:ln w="19050">
+            <a:solidFill>
+              <a:srgbClr val="DDE3EA"/>
+            </a:solidFill>
+          </a:ln>
+          <a:effectLst/>
+        </p:spPr>
+        <p:style>
+          <a:lnRef idx="1">
+            <a:schemeClr val="accent1"/>
+          </a:lnRef>
+          <a:fillRef idx="3">
+            <a:schemeClr val="accent1"/>
+          </a:fillRef>
+          <a:effectRef idx="2">
+            <a:schemeClr val="accent1"/>
+          </a:effectRef>
+          <a:fontRef idx="minor">
+            <a:schemeClr val="lt1"/>
+          </a:fontRef>
+        </p:style>
+        <p:txBody>
+          <a:bodyPr rtlCol="0" anchor="ctr"/>
+          <a:lstStyle/>
+          <a:p>
+            <a:pPr algn="ctr"/>
+          </a:p>
+        </p:txBody>
+      </p:sp>
+      <p:sp>
+        <p:nvSpPr>
+          <p:cNvPr id="34" name="TextBox 33"/>
+          <p:cNvSpPr txBox="1"/>
+          <p:nvPr/>
+        </p:nvSpPr>
+        <p:spPr>
+          <a:xfrm>
+            <a:off x="10021824" y="1664208"/>
+            <a:ext cx="1481328" cy="457200"/>
+          </a:xfrm>
+          <a:prstGeom prst="rect">
+            <a:avLst/>
+          </a:prstGeom>
+          <a:noFill/>
+        </p:spPr>
+        <p:txBody>
+          <a:bodyPr wrap="square" anchor="t" lIns="45720" rIns="45720" tIns="27432" bIns="27432">
+            <a:spAutoFit/>
+          </a:bodyPr>
+          <a:lstStyle/>
+          <a:p>
+            <a:pPr algn="ctr"/>
+            <a:r>
+              <a:rPr sz="1450" b="1">
+                <a:solidFill>
+                  <a:srgbClr val="16304F"/>
+                </a:solidFill>
+                <a:latin typeface="Microsoft JhengHei"/>
+              </a:rPr>
+              <a:t>修正重跑</a:t>
+            </a:r>
+          </a:p>
+        </p:txBody>
+      </p:sp>
+      <p:sp>
+        <p:nvSpPr>
+          <p:cNvPr id="35" name="Rounded Rectangle 34"/>
+          <p:cNvSpPr/>
+          <p:nvPr/>
+        </p:nvSpPr>
+        <p:spPr>
+          <a:xfrm>
+            <a:off x="10204703" y="2212848"/>
+            <a:ext cx="1115568" cy="365760"/>
+          </a:xfrm>
+          <a:prstGeom prst="roundRect">
+            <a:avLst>
+              <a:gd name="adj" fmla="val 30000"/>
+            </a:avLst>
+          </a:prstGeom>
+          <a:solidFill>
+            <a:srgbClr val="FFF2D6"/>
+          </a:solidFill>
+          <a:ln>
+            <a:noFill/>
+          </a:ln>
+          <a:effectLst/>
+        </p:spPr>
+        <p:style>
+          <a:lnRef idx="1">
+            <a:schemeClr val="accent1"/>
+          </a:lnRef>
+          <a:fillRef idx="3">
+            <a:schemeClr val="accent1"/>
+          </a:fillRef>
+          <a:effectRef idx="2">
+            <a:schemeClr val="accent1"/>
+          </a:effectRef>
+          <a:fontRef idx="minor">
+            <a:schemeClr val="lt1"/>
+          </a:fontRef>
+        </p:style>
+        <p:txBody>
+          <a:bodyPr rtlCol="0" anchor="ctr"/>
+          <a:lstStyle/>
+          <a:p>
+            <a:pPr algn="ctr"/>
+          </a:p>
+        </p:txBody>
+      </p:sp>
+      <p:sp>
+        <p:nvSpPr>
+          <p:cNvPr id="36" name="TextBox 35"/>
+          <p:cNvSpPr txBox="1"/>
+          <p:nvPr/>
+        </p:nvSpPr>
+        <p:spPr>
+          <a:xfrm>
+            <a:off x="10204703" y="2212848"/>
+            <a:ext cx="1115568" cy="365760"/>
+          </a:xfrm>
+          <a:prstGeom prst="rect">
+            <a:avLst/>
+          </a:prstGeom>
+          <a:noFill/>
+        </p:spPr>
+        <p:txBody>
+          <a:bodyPr wrap="square" anchor="ctr" lIns="45720" rIns="45720" tIns="27432" bIns="27432">
+            <a:spAutoFit/>
+          </a:bodyPr>
+          <a:lstStyle/>
+          <a:p>
+            <a:pPr algn="ctr"/>
+            <a:r>
+              <a:rPr sz="1100" b="1">
+                <a:solidFill>
+                  <a:srgbClr val="B36F00"/>
+                </a:solidFill>
+                <a:latin typeface="Microsoft JhengHei"/>
+              </a:rPr>
+              <a:t>只跑受影響步</a:t>
+            </a:r>
+          </a:p>
+        </p:txBody>
+      </p:sp>
+      <p:sp>
+        <p:nvSpPr>
+          <p:cNvPr id="37" name="TextBox 36"/>
+          <p:cNvSpPr txBox="1"/>
+          <p:nvPr/>
+        </p:nvSpPr>
+        <p:spPr>
+          <a:xfrm>
+            <a:off x="640080" y="3200400"/>
+            <a:ext cx="2103120" cy="1463040"/>
+          </a:xfrm>
+          <a:prstGeom prst="rect">
+            <a:avLst/>
+          </a:prstGeom>
+          <a:noFill/>
+        </p:spPr>
+        <p:txBody>
+          <a:bodyPr wrap="square" anchor="ctr" lIns="45720" rIns="45720" tIns="27432" bIns="27432">
+            <a:spAutoFit/>
+          </a:bodyPr>
+          <a:lstStyle/>
+          <a:p>
+            <a:pPr algn="l"/>
+            <a:r>
+              <a:rPr sz="9600" b="1">
+                <a:solidFill>
+                  <a:srgbClr val="16304F"/>
+                </a:solidFill>
+                <a:latin typeface="Microsoft JhengHei"/>
+              </a:rPr>
+              <a:t>6</a:t>
+            </a:r>
+          </a:p>
+        </p:txBody>
+      </p:sp>
+      <p:sp>
+        <p:nvSpPr>
+          <p:cNvPr id="38" name="TextBox 37"/>
+          <p:cNvSpPr txBox="1"/>
+          <p:nvPr/>
+        </p:nvSpPr>
+        <p:spPr>
+          <a:xfrm>
+            <a:off x="2743200" y="3977639"/>
+            <a:ext cx="2560320" cy="548640"/>
+          </a:xfrm>
+          <a:prstGeom prst="rect">
+            <a:avLst/>
+          </a:prstGeom>
+          <a:noFill/>
+        </p:spPr>
+        <p:txBody>
+          <a:bodyPr wrap="square" anchor="t" lIns="45720" rIns="45720" tIns="27432" bIns="27432">
+            <a:spAutoFit/>
+          </a:bodyPr>
+          <a:lstStyle/>
+          <a:p>
+            <a:pPr algn="l"/>
+            <a:r>
+              <a:rPr sz="1800" b="0">
+                <a:solidFill>
+                  <a:srgbClr val="5B6573"/>
+                </a:solidFill>
+                <a:latin typeface="Microsoft JhengHei"/>
+              </a:rPr>
+              <a:t>次模型呼叫・約 2 分鐘</a:t>
+            </a:r>
+          </a:p>
+        </p:txBody>
+      </p:sp>
+      <p:sp>
+        <p:nvSpPr>
+          <p:cNvPr id="39" name="TextBox 38"/>
+          <p:cNvSpPr txBox="1"/>
+          <p:nvPr/>
+        </p:nvSpPr>
+        <p:spPr>
+          <a:xfrm>
+            <a:off x="5486400" y="3291840"/>
+            <a:ext cx="6035040" cy="914400"/>
+          </a:xfrm>
+          <a:prstGeom prst="rect">
+            <a:avLst/>
+          </a:prstGeom>
+          <a:noFill/>
+        </p:spPr>
+        <p:txBody>
+          <a:bodyPr wrap="square" anchor="t" lIns="45720" rIns="45720" tIns="27432" bIns="27432">
+            <a:spAutoFit/>
+          </a:bodyPr>
+          <a:lstStyle/>
+          <a:p>
+            <a:pPr algn="l"/>
+            <a:r>
+              <a:rPr sz="1800" b="0">
                 <a:solidFill>
                   <a:srgbClr val="334455"/>
                 </a:solidFill>
                 <a:latin typeface="Microsoft JhengHei"/>
               </a:rPr>
-              <a:t>下一案的相似案例＋法規版本更新</a:t>
+              <a:t>每步輸出落地、每個結論附卷證原句與真實條號；呼叫次數固定，所以能在 1 RPS 下跑、能單步重跑、能做評測。</a:t>
+            </a:r>
+          </a:p>
+        </p:txBody>
+      </p:sp>
+      <p:sp>
+        <p:nvSpPr>
+          <p:cNvPr id="40" name="TextBox 39"/>
+          <p:cNvSpPr txBox="1"/>
+          <p:nvPr/>
+        </p:nvSpPr>
+        <p:spPr>
+          <a:xfrm>
+            <a:off x="5486400" y="4297680"/>
+            <a:ext cx="6035040" cy="731520"/>
+          </a:xfrm>
+          <a:prstGeom prst="rect">
+            <a:avLst/>
+          </a:prstGeom>
+          <a:noFill/>
+        </p:spPr>
+        <p:txBody>
+          <a:bodyPr wrap="square" anchor="t" lIns="45720" rIns="45720" tIns="27432" bIns="27432">
+            <a:spAutoFit/>
+          </a:bodyPr>
+          <a:lstStyle/>
+          <a:p>
+            <a:pPr algn="l"/>
+            <a:r>
+              <a:rPr sz="1800" b="1">
+                <a:solidFill>
+                  <a:srgbClr val="2E7D32"/>
+                </a:solidFill>
+                <a:latin typeface="Microsoft JhengHei"/>
+              </a:rPr>
+              <a:t>綠色那步是程式算的：30 日期間、八款不受理，不交給模型猜。</a:t>
             </a:r>
           </a:p>
         </p:txBody>
@@ -13383,7 +13454,7 @@
                 </a:solidFill>
                 <a:latin typeface="Microsoft JhengHei"/>
               </a:rPr>
-              <a:t>透明、步驟式、非黑盒：固定七步，哪一步錯就修哪一步</a:t>
+              <a:t>數據飛輪：決定書是輸出，答辯書和卷證才是輸入</a:t>
             </a:r>
           </a:p>
         </p:txBody>
@@ -13510,8 +13581,8 @@
         </p:nvSpPr>
         <p:spPr>
           <a:xfrm>
-            <a:off x="640080" y="1554480"/>
-            <a:ext cx="1481328" cy="1234440"/>
+            <a:off x="640080" y="1508760"/>
+            <a:ext cx="5029200" cy="2651760"/>
           </a:xfrm>
           <a:prstGeom prst="roundRect">
             <a:avLst>
@@ -13519,12 +13590,10 @@
             </a:avLst>
           </a:prstGeom>
           <a:solidFill>
-            <a:srgbClr val="FFFFFF"/>
-          </a:solidFill>
-          <a:ln w="19050">
-            <a:solidFill>
-              <a:srgbClr val="DDE3EA"/>
-            </a:solidFill>
+            <a:srgbClr val="F4F6F9"/>
+          </a:solidFill>
+          <a:ln>
+            <a:noFill/>
           </a:ln>
           <a:effectLst/>
         </p:spPr>
@@ -13558,8 +13627,8 @@
         </p:nvSpPr>
         <p:spPr>
           <a:xfrm>
-            <a:off x="640080" y="1664208"/>
-            <a:ext cx="1481328" cy="457200"/>
+            <a:off x="868680" y="1645920"/>
+            <a:ext cx="4572000" cy="365760"/>
           </a:xfrm>
           <a:prstGeom prst="rect">
             <a:avLst/>
@@ -13572,37 +13641,72 @@
           </a:bodyPr>
           <a:lstStyle/>
           <a:p>
-            <a:pPr algn="ctr"/>
-            <a:r>
-              <a:rPr sz="1450" b="1">
+            <a:pPr algn="l"/>
+            <a:r>
+              <a:rPr sz="1500" b="1">
                 <a:solidFill>
                   <a:srgbClr val="16304F"/>
                 </a:solidFill>
                 <a:latin typeface="Microsoft JhengHei"/>
               </a:rPr>
-              <a:t>欄位擷取</a:t>
-            </a:r>
-          </a:p>
-        </p:txBody>
-      </p:sp>
-      <p:sp>
-        <p:nvSpPr>
-          <p:cNvPr id="11" name="Rounded Rectangle 10"/>
+              <a:t>為什麼輸入拿不到</a:t>
+            </a:r>
+          </a:p>
+        </p:txBody>
+      </p:sp>
+      <p:sp>
+        <p:nvSpPr>
+          <p:cNvPr id="11" name="TextBox 10"/>
+          <p:cNvSpPr txBox="1"/>
+          <p:nvPr/>
+        </p:nvSpPr>
+        <p:spPr>
+          <a:xfrm>
+            <a:off x="868680" y="2057400"/>
+            <a:ext cx="4572000" cy="2103120"/>
+          </a:xfrm>
+          <a:prstGeom prst="rect">
+            <a:avLst/>
+          </a:prstGeom>
+          <a:noFill/>
+        </p:spPr>
+        <p:txBody>
+          <a:bodyPr wrap="square" anchor="t" lIns="45720" rIns="45720" tIns="27432" bIns="27432">
+            <a:spAutoFit/>
+          </a:bodyPr>
+          <a:lstStyle/>
+          <a:p>
+            <a:pPr algn="l"/>
+            <a:r>
+              <a:rPr sz="1200" b="0">
+                <a:solidFill>
+                  <a:srgbClr val="334455"/>
+                </a:solidFill>
+                <a:latin typeface="Microsoft JhengHei"/>
+              </a:rPr>
+              <a:t>・訴願法 §58 III／IV：答辯書只存在於機關、受理機關卷內、訴願人手上，沒有公開機制
+・訴願法 §49、§75 II：卷宗閱覽限訴願人、參加人、代理人
+・所以決定書到處都是、答辯書一份難求——這是制度設計的結果，不是錯覺</a:t>
+            </a:r>
+          </a:p>
+        </p:txBody>
+      </p:sp>
+      <p:sp>
+        <p:nvSpPr>
+          <p:cNvPr id="12" name="Rectangle 11"/>
           <p:cNvSpPr/>
           <p:nvPr/>
         </p:nvSpPr>
         <p:spPr>
           <a:xfrm>
-            <a:off x="822959" y="2212848"/>
-            <a:ext cx="1115568" cy="365760"/>
-          </a:xfrm>
-          <a:prstGeom prst="roundRect">
-            <a:avLst>
-              <a:gd name="adj" fmla="val 30000"/>
-            </a:avLst>
-          </a:prstGeom>
-          <a:solidFill>
-            <a:srgbClr val="FFF2D6"/>
+            <a:off x="640080" y="4343400"/>
+            <a:ext cx="5029200" cy="1143000"/>
+          </a:xfrm>
+          <a:prstGeom prst="rect">
+            <a:avLst/>
+          </a:prstGeom>
+          <a:solidFill>
+            <a:srgbClr val="FFF8EA"/>
           </a:solidFill>
           <a:ln>
             <a:noFill/>
@@ -13633,62 +13737,23 @@
       </p:sp>
       <p:sp>
         <p:nvSpPr>
-          <p:cNvPr id="12" name="TextBox 11"/>
-          <p:cNvSpPr txBox="1"/>
-          <p:nvPr/>
-        </p:nvSpPr>
-        <p:spPr>
-          <a:xfrm>
-            <a:off x="822959" y="2212848"/>
-            <a:ext cx="1115568" cy="365760"/>
-          </a:xfrm>
-          <a:prstGeom prst="rect">
-            <a:avLst/>
-          </a:prstGeom>
-          <a:noFill/>
-        </p:spPr>
-        <p:txBody>
-          <a:bodyPr wrap="square" anchor="ctr" lIns="45720" rIns="45720" tIns="27432" bIns="27432">
-            <a:spAutoFit/>
-          </a:bodyPr>
-          <a:lstStyle/>
-          <a:p>
-            <a:pPr algn="ctr"/>
-            <a:r>
-              <a:rPr sz="1100" b="1">
-                <a:solidFill>
-                  <a:srgbClr val="B36F00"/>
-                </a:solidFill>
-                <a:latin typeface="Microsoft JhengHei"/>
-              </a:rPr>
-              <a:t>模型 1 次</a:t>
-            </a:r>
-          </a:p>
-        </p:txBody>
-      </p:sp>
-      <p:sp>
-        <p:nvSpPr>
-          <p:cNvPr id="13" name="Rounded Rectangle 12"/>
+          <p:cNvPr id="13" name="Rectangle 12"/>
           <p:cNvSpPr/>
           <p:nvPr/>
         </p:nvSpPr>
         <p:spPr>
           <a:xfrm>
-            <a:off x="2203704" y="1554480"/>
-            <a:ext cx="1481328" cy="1234440"/>
-          </a:xfrm>
-          <a:prstGeom prst="roundRect">
-            <a:avLst>
-              <a:gd name="adj" fmla="val 8000"/>
-            </a:avLst>
-          </a:prstGeom>
-          <a:solidFill>
-            <a:srgbClr val="F2F8F3"/>
-          </a:solidFill>
-          <a:ln w="19050">
-            <a:solidFill>
-              <a:srgbClr val="2E7D32"/>
-            </a:solidFill>
+            <a:off x="640080" y="4343400"/>
+            <a:ext cx="64008" cy="1143000"/>
+          </a:xfrm>
+          <a:prstGeom prst="rect">
+            <a:avLst/>
+          </a:prstGeom>
+          <a:solidFill>
+            <a:srgbClr val="D98E04"/>
+          </a:solidFill>
+          <a:ln>
+            <a:noFill/>
           </a:ln>
           <a:effectLst/>
         </p:spPr>
@@ -13722,54 +13787,53 @@
         </p:nvSpPr>
         <p:spPr>
           <a:xfrm>
-            <a:off x="2203704" y="1664208"/>
-            <a:ext cx="1481328" cy="457200"/>
-          </a:xfrm>
-          <a:prstGeom prst="rect">
-            <a:avLst/>
-          </a:prstGeom>
-          <a:noFill/>
-        </p:spPr>
-        <p:txBody>
-          <a:bodyPr wrap="square" anchor="t" lIns="45720" rIns="45720" tIns="27432" bIns="27432">
-            <a:spAutoFit/>
-          </a:bodyPr>
-          <a:lstStyle/>
-          <a:p>
-            <a:pPr algn="ctr"/>
-            <a:r>
-              <a:rPr sz="1450" b="1">
-                <a:solidFill>
-                  <a:srgbClr val="16304F"/>
-                </a:solidFill>
-                <a:latin typeface="Microsoft JhengHei"/>
-              </a:rPr>
-              <a:t>期間・程序</a:t>
-            </a:r>
-          </a:p>
-        </p:txBody>
-      </p:sp>
-      <p:sp>
-        <p:nvSpPr>
-          <p:cNvPr id="15" name="Rounded Rectangle 14"/>
+            <a:off x="822960" y="4370832"/>
+            <a:ext cx="4754880" cy="1097280"/>
+          </a:xfrm>
+          <a:prstGeom prst="rect">
+            <a:avLst/>
+          </a:prstGeom>
+          <a:noFill/>
+        </p:spPr>
+        <p:txBody>
+          <a:bodyPr wrap="square" anchor="ctr" lIns="45720" rIns="45720" tIns="27432" bIns="27432">
+            <a:spAutoFit/>
+          </a:bodyPr>
+          <a:lstStyle/>
+          <a:p>
+            <a:pPr algn="l"/>
+            <a:r>
+              <a:rPr sz="1200" b="0">
+                <a:solidFill>
+                  <a:srgbClr val="334455"/>
+                </a:solidFill>
+                <a:latin typeface="Microsoft JhengHei"/>
+              </a:rPr>
+              <a:t>補件與重新匯入走同一條路：承辦人跟助手說「補這份」→ 只辨識新檔 → 只重算受影響的步驟 → 前端立即更新</a:t>
+            </a:r>
+          </a:p>
+        </p:txBody>
+      </p:sp>
+      <p:sp>
+        <p:nvSpPr>
+          <p:cNvPr id="15" name="Oval 14"/>
           <p:cNvSpPr/>
           <p:nvPr/>
         </p:nvSpPr>
         <p:spPr>
           <a:xfrm>
-            <a:off x="2386584" y="2212848"/>
-            <a:ext cx="1115568" cy="365760"/>
-          </a:xfrm>
-          <a:prstGeom prst="roundRect">
-            <a:avLst>
-              <a:gd name="adj" fmla="val 30000"/>
-            </a:avLst>
-          </a:prstGeom>
-          <a:solidFill>
-            <a:srgbClr val="E0F0E2"/>
-          </a:solidFill>
-          <a:ln>
-            <a:noFill/>
+            <a:off x="7360919" y="2103120"/>
+            <a:ext cx="2834640" cy="2834640"/>
+          </a:xfrm>
+          <a:prstGeom prst="ellipse">
+            <a:avLst/>
+          </a:prstGeom>
+          <a:noFill/>
+          <a:ln w="50800">
+            <a:solidFill>
+              <a:srgbClr val="D98E04"/>
+            </a:solidFill>
+            <a:prstDash val="dash"/>
           </a:ln>
           <a:effectLst/>
         </p:spPr>
@@ -13803,8 +13867,8 @@
         </p:nvSpPr>
         <p:spPr>
           <a:xfrm>
-            <a:off x="2386584" y="2212848"/>
-            <a:ext cx="1115568" cy="365760"/>
+            <a:off x="7863840" y="3246120"/>
+            <a:ext cx="1828800" cy="548640"/>
           </a:xfrm>
           <a:prstGeom prst="rect">
             <a:avLst/>
@@ -13819,40 +13883,36 @@
           <a:p>
             <a:pPr algn="ctr"/>
             <a:r>
-              <a:rPr sz="1100" b="1">
-                <a:solidFill>
-                  <a:srgbClr val="2E7D32"/>
-                </a:solidFill>
-                <a:latin typeface="Microsoft JhengHei"/>
-              </a:rPr>
-              <a:t>程式 0 次</a:t>
-            </a:r>
-          </a:p>
-        </p:txBody>
-      </p:sp>
-      <p:sp>
-        <p:nvSpPr>
-          <p:cNvPr id="17" name="Rounded Rectangle 16"/>
+              <a:rPr sz="1800" b="1">
+                <a:solidFill>
+                  <a:srgbClr val="D98E04"/>
+                </a:solidFill>
+                <a:latin typeface="Microsoft JhengHei"/>
+              </a:rPr>
+              <a:t>越用越準</a:t>
+            </a:r>
+          </a:p>
+        </p:txBody>
+      </p:sp>
+      <p:sp>
+        <p:nvSpPr>
+          <p:cNvPr id="17" name="Oval 16"/>
           <p:cNvSpPr/>
           <p:nvPr/>
         </p:nvSpPr>
         <p:spPr>
           <a:xfrm>
-            <a:off x="3767328" y="1554480"/>
-            <a:ext cx="1481328" cy="1234440"/>
-          </a:xfrm>
-          <a:prstGeom prst="roundRect">
-            <a:avLst>
-              <a:gd name="adj" fmla="val 8000"/>
-            </a:avLst>
-          </a:prstGeom>
-          <a:solidFill>
-            <a:srgbClr val="FFFFFF"/>
-          </a:solidFill>
-          <a:ln w="19050">
-            <a:solidFill>
-              <a:srgbClr val="DDE3EA"/>
-            </a:solidFill>
+            <a:off x="8366760" y="1691639"/>
+            <a:ext cx="822960" cy="822960"/>
+          </a:xfrm>
+          <a:prstGeom prst="ellipse">
+            <a:avLst/>
+          </a:prstGeom>
+          <a:solidFill>
+            <a:srgbClr val="16304F"/>
+          </a:solidFill>
+          <a:ln>
+            <a:noFill/>
           </a:ln>
           <a:effectLst/>
         </p:spPr>
@@ -13871,10 +13931,19 @@
           </a:fontRef>
         </p:style>
         <p:txBody>
-          <a:bodyPr rtlCol="0" anchor="ctr"/>
-          <a:lstStyle/>
-          <a:p>
-            <a:pPr algn="ctr"/>
+          <a:bodyPr rtlCol="0" anchor="ctr" lIns="0" rIns="0" tIns="0" bIns="0"/>
+          <a:lstStyle/>
+          <a:p>
+            <a:pPr algn="ctr"/>
+            <a:r>
+              <a:rPr sz="1400" b="1">
+                <a:solidFill>
+                  <a:srgbClr val="FFFFFF"/>
+                </a:solidFill>
+                <a:latin typeface="Microsoft JhengHei"/>
+              </a:rPr>
+              <a:t>辦案</a:t>
+            </a:r>
           </a:p>
         </p:txBody>
       </p:sp>
@@ -13886,51 +13955,49 @@
         </p:nvSpPr>
         <p:spPr>
           <a:xfrm>
-            <a:off x="3767328" y="1664208"/>
-            <a:ext cx="1481328" cy="457200"/>
-          </a:xfrm>
-          <a:prstGeom prst="rect">
-            <a:avLst/>
-          </a:prstGeom>
-          <a:noFill/>
-        </p:spPr>
-        <p:txBody>
-          <a:bodyPr wrap="square" anchor="t" lIns="45720" rIns="45720" tIns="27432" bIns="27432">
-            <a:spAutoFit/>
-          </a:bodyPr>
-          <a:lstStyle/>
-          <a:p>
-            <a:pPr algn="ctr"/>
-            <a:r>
-              <a:rPr sz="1450" b="1">
-                <a:solidFill>
-                  <a:srgbClr val="16304F"/>
-                </a:solidFill>
-                <a:latin typeface="Microsoft JhengHei"/>
-              </a:rPr>
-              <a:t>爭點</a:t>
-            </a:r>
-          </a:p>
-        </p:txBody>
-      </p:sp>
-      <p:sp>
-        <p:nvSpPr>
-          <p:cNvPr id="19" name="Rounded Rectangle 18"/>
+            <a:off x="7772400" y="868679"/>
+            <a:ext cx="2011680" cy="457200"/>
+          </a:xfrm>
+          <a:prstGeom prst="rect">
+            <a:avLst/>
+          </a:prstGeom>
+          <a:noFill/>
+        </p:spPr>
+        <p:txBody>
+          <a:bodyPr wrap="square" anchor="ctr" lIns="45720" rIns="45720" tIns="27432" bIns="27432">
+            <a:spAutoFit/>
+          </a:bodyPr>
+          <a:lstStyle/>
+          <a:p>
+            <a:pPr algn="ctr"/>
+            <a:r>
+              <a:rPr sz="1050" b="0">
+                <a:solidFill>
+                  <a:srgbClr val="334455"/>
+                </a:solidFill>
+                <a:latin typeface="Microsoft JhengHei"/>
+              </a:rPr>
+              <a:t>承辦人上傳卷宗、答辯書</a:t>
+            </a:r>
+          </a:p>
+        </p:txBody>
+      </p:sp>
+      <p:sp>
+        <p:nvSpPr>
+          <p:cNvPr id="19" name="Oval 18"/>
           <p:cNvSpPr/>
           <p:nvPr/>
         </p:nvSpPr>
         <p:spPr>
           <a:xfrm>
-            <a:off x="3950208" y="2212848"/>
-            <a:ext cx="1115568" cy="365760"/>
-          </a:xfrm>
-          <a:prstGeom prst="roundRect">
-            <a:avLst>
-              <a:gd name="adj" fmla="val 30000"/>
-            </a:avLst>
-          </a:prstGeom>
-          <a:solidFill>
-            <a:srgbClr val="FFF2D6"/>
+            <a:off x="9714711" y="2670984"/>
+            <a:ext cx="822960" cy="822960"/>
+          </a:xfrm>
+          <a:prstGeom prst="ellipse">
+            <a:avLst/>
+          </a:prstGeom>
+          <a:solidFill>
+            <a:srgbClr val="16304F"/>
           </a:solidFill>
           <a:ln>
             <a:noFill/>
@@ -13952,10 +14019,19 @@
           </a:fontRef>
         </p:style>
         <p:txBody>
-          <a:bodyPr rtlCol="0" anchor="ctr"/>
-          <a:lstStyle/>
-          <a:p>
-            <a:pPr algn="ctr"/>
+          <a:bodyPr rtlCol="0" anchor="ctr" lIns="0" rIns="0" tIns="0" bIns="0"/>
+          <a:lstStyle/>
+          <a:p>
+            <a:pPr algn="ctr"/>
+            <a:r>
+              <a:rPr sz="1400" b="1">
+                <a:solidFill>
+                  <a:srgbClr val="FFFFFF"/>
+                </a:solidFill>
+                <a:latin typeface="Microsoft JhengHei"/>
+              </a:rPr>
+              <a:t>歸戶</a:t>
+            </a:r>
           </a:p>
         </p:txBody>
       </p:sp>
@@ -13967,8 +14043,8 @@
         </p:nvSpPr>
         <p:spPr>
           <a:xfrm>
-            <a:off x="3950208" y="2212848"/>
-            <a:ext cx="1115568" cy="365760"/>
+            <a:off x="10076962" y="2543042"/>
+            <a:ext cx="2011680" cy="457200"/>
           </a:xfrm>
           <a:prstGeom prst="rect">
             <a:avLst/>
@@ -13981,42 +14057,38 @@
           </a:bodyPr>
           <a:lstStyle/>
           <a:p>
-            <a:pPr algn="ctr"/>
-            <a:r>
-              <a:rPr sz="1100" b="1">
-                <a:solidFill>
-                  <a:srgbClr val="B36F00"/>
-                </a:solidFill>
-                <a:latin typeface="Microsoft JhengHei"/>
-              </a:rPr>
-              <a:t>模型 1 次</a:t>
-            </a:r>
-          </a:p>
-        </p:txBody>
-      </p:sp>
-      <p:sp>
-        <p:nvSpPr>
-          <p:cNvPr id="21" name="Rounded Rectangle 20"/>
+            <a:pPr algn="l"/>
+            <a:r>
+              <a:rPr sz="1050" b="0">
+                <a:solidFill>
+                  <a:srgbClr val="334455"/>
+                </a:solidFill>
+                <a:latin typeface="Microsoft JhengHei"/>
+              </a:rPr>
+              <a:t>27 類文件，自動命名進案件庫</a:t>
+            </a:r>
+          </a:p>
+        </p:txBody>
+      </p:sp>
+      <p:sp>
+        <p:nvSpPr>
+          <p:cNvPr id="21" name="Oval 20"/>
           <p:cNvSpPr/>
           <p:nvPr/>
         </p:nvSpPr>
         <p:spPr>
           <a:xfrm>
-            <a:off x="5330952" y="1554480"/>
-            <a:ext cx="1481328" cy="1234440"/>
-          </a:xfrm>
-          <a:prstGeom prst="roundRect">
-            <a:avLst>
-              <a:gd name="adj" fmla="val 8000"/>
-            </a:avLst>
-          </a:prstGeom>
-          <a:solidFill>
-            <a:srgbClr val="FFFFFF"/>
-          </a:solidFill>
-          <a:ln w="19050">
-            <a:solidFill>
-              <a:srgbClr val="DDE3EA"/>
-            </a:solidFill>
+            <a:off x="9199839" y="4255595"/>
+            <a:ext cx="822960" cy="822960"/>
+          </a:xfrm>
+          <a:prstGeom prst="ellipse">
+            <a:avLst/>
+          </a:prstGeom>
+          <a:solidFill>
+            <a:srgbClr val="16304F"/>
+          </a:solidFill>
+          <a:ln>
+            <a:noFill/>
           </a:ln>
           <a:effectLst/>
         </p:spPr>
@@ -14035,10 +14107,19 @@
           </a:fontRef>
         </p:style>
         <p:txBody>
-          <a:bodyPr rtlCol="0" anchor="ctr"/>
-          <a:lstStyle/>
-          <a:p>
-            <a:pPr algn="ctr"/>
+          <a:bodyPr rtlCol="0" anchor="ctr" lIns="0" rIns="0" tIns="0" bIns="0"/>
+          <a:lstStyle/>
+          <a:p>
+            <a:pPr algn="ctr"/>
+            <a:r>
+              <a:rPr sz="1400" b="1">
+                <a:solidFill>
+                  <a:srgbClr val="FFFFFF"/>
+                </a:solidFill>
+                <a:latin typeface="Microsoft JhengHei"/>
+              </a:rPr>
+              <a:t>分析</a:t>
+            </a:r>
           </a:p>
         </p:txBody>
       </p:sp>
@@ -14050,51 +14131,49 @@
         </p:nvSpPr>
         <p:spPr>
           <a:xfrm>
-            <a:off x="5330952" y="1664208"/>
-            <a:ext cx="1481328" cy="457200"/>
-          </a:xfrm>
-          <a:prstGeom prst="rect">
-            <a:avLst/>
-          </a:prstGeom>
-          <a:noFill/>
-        </p:spPr>
-        <p:txBody>
-          <a:bodyPr wrap="square" anchor="t" lIns="45720" rIns="45720" tIns="27432" bIns="27432">
-            <a:spAutoFit/>
-          </a:bodyPr>
-          <a:lstStyle/>
-          <a:p>
-            <a:pPr algn="ctr"/>
-            <a:r>
-              <a:rPr sz="1450" b="1">
-                <a:solidFill>
-                  <a:srgbClr val="16304F"/>
-                </a:solidFill>
-                <a:latin typeface="Microsoft JhengHei"/>
-              </a:rPr>
-              <a:t>法規</a:t>
-            </a:r>
-          </a:p>
-        </p:txBody>
-      </p:sp>
-      <p:sp>
-        <p:nvSpPr>
-          <p:cNvPr id="23" name="Rounded Rectangle 22"/>
+            <a:off x="9196697" y="5252217"/>
+            <a:ext cx="2011680" cy="457200"/>
+          </a:xfrm>
+          <a:prstGeom prst="rect">
+            <a:avLst/>
+          </a:prstGeom>
+          <a:noFill/>
+        </p:spPr>
+        <p:txBody>
+          <a:bodyPr wrap="square" anchor="ctr" lIns="45720" rIns="45720" tIns="27432" bIns="27432">
+            <a:spAutoFit/>
+          </a:bodyPr>
+          <a:lstStyle/>
+          <a:p>
+            <a:pPr algn="l"/>
+            <a:r>
+              <a:rPr sz="1050" b="0">
+                <a:solidFill>
+                  <a:srgbClr val="334455"/>
+                </a:solidFill>
+                <a:latin typeface="Microsoft JhengHei"/>
+              </a:rPr>
+              <a:t>法規庫檢索、相似案例、草稿</a:t>
+            </a:r>
+          </a:p>
+        </p:txBody>
+      </p:sp>
+      <p:sp>
+        <p:nvSpPr>
+          <p:cNvPr id="23" name="Oval 22"/>
           <p:cNvSpPr/>
           <p:nvPr/>
         </p:nvSpPr>
         <p:spPr>
           <a:xfrm>
-            <a:off x="5513832" y="2212848"/>
-            <a:ext cx="1115568" cy="365760"/>
-          </a:xfrm>
-          <a:prstGeom prst="roundRect">
-            <a:avLst>
-              <a:gd name="adj" fmla="val 30000"/>
-            </a:avLst>
-          </a:prstGeom>
-          <a:solidFill>
-            <a:srgbClr val="FFF2D6"/>
+            <a:off x="7533680" y="4255595"/>
+            <a:ext cx="822960" cy="822960"/>
+          </a:xfrm>
+          <a:prstGeom prst="ellipse">
+            <a:avLst/>
+          </a:prstGeom>
+          <a:solidFill>
+            <a:srgbClr val="16304F"/>
           </a:solidFill>
           <a:ln>
             <a:noFill/>
@@ -14116,10 +14195,19 @@
           </a:fontRef>
         </p:style>
         <p:txBody>
-          <a:bodyPr rtlCol="0" anchor="ctr"/>
-          <a:lstStyle/>
-          <a:p>
-            <a:pPr algn="ctr"/>
+          <a:bodyPr rtlCol="0" anchor="ctr" lIns="0" rIns="0" tIns="0" bIns="0"/>
+          <a:lstStyle/>
+          <a:p>
+            <a:pPr algn="ctr"/>
+            <a:r>
+              <a:rPr sz="1400" b="1">
+                <a:solidFill>
+                  <a:srgbClr val="FFFFFF"/>
+                </a:solidFill>
+                <a:latin typeface="Microsoft JhengHei"/>
+              </a:rPr>
+              <a:t>修正</a:t>
+            </a:r>
           </a:p>
         </p:txBody>
       </p:sp>
@@ -14131,8 +14219,8 @@
         </p:nvSpPr>
         <p:spPr>
           <a:xfrm>
-            <a:off x="5513832" y="2212848"/>
-            <a:ext cx="1115568" cy="365760"/>
+            <a:off x="6348102" y="5252217"/>
+            <a:ext cx="2011680" cy="457200"/>
           </a:xfrm>
           <a:prstGeom prst="rect">
             <a:avLst/>
@@ -14145,42 +14233,38 @@
           </a:bodyPr>
           <a:lstStyle/>
           <a:p>
-            <a:pPr algn="ctr"/>
-            <a:r>
-              <a:rPr sz="1100" b="1">
-                <a:solidFill>
-                  <a:srgbClr val="B36F00"/>
-                </a:solidFill>
-                <a:latin typeface="Microsoft JhengHei"/>
-              </a:rPr>
-              <a:t>檢索＋1 次</a:t>
-            </a:r>
-          </a:p>
-        </p:txBody>
-      </p:sp>
-      <p:sp>
-        <p:nvSpPr>
-          <p:cNvPr id="25" name="Rounded Rectangle 24"/>
+            <a:pPr algn="r"/>
+            <a:r>
+              <a:rPr sz="1050" b="0">
+                <a:solidFill>
+                  <a:srgbClr val="334455"/>
+                </a:solidFill>
+                <a:latin typeface="Microsoft JhengHei"/>
+              </a:rPr>
+              <a:t>承辦人確認／修改，寫回案件庫</a:t>
+            </a:r>
+          </a:p>
+        </p:txBody>
+      </p:sp>
+      <p:sp>
+        <p:nvSpPr>
+          <p:cNvPr id="25" name="Oval 24"/>
           <p:cNvSpPr/>
           <p:nvPr/>
         </p:nvSpPr>
         <p:spPr>
           <a:xfrm>
-            <a:off x="6894576" y="1554480"/>
-            <a:ext cx="1481328" cy="1234440"/>
-          </a:xfrm>
-          <a:prstGeom prst="roundRect">
-            <a:avLst>
-              <a:gd name="adj" fmla="val 8000"/>
-            </a:avLst>
-          </a:prstGeom>
-          <a:solidFill>
-            <a:srgbClr val="FFFFFF"/>
-          </a:solidFill>
-          <a:ln w="19050">
-            <a:solidFill>
-              <a:srgbClr val="DDE3EA"/>
-            </a:solidFill>
+            <a:off x="7018808" y="2670984"/>
+            <a:ext cx="822960" cy="822960"/>
+          </a:xfrm>
+          <a:prstGeom prst="ellipse">
+            <a:avLst/>
+          </a:prstGeom>
+          <a:solidFill>
+            <a:srgbClr val="16304F"/>
+          </a:solidFill>
+          <a:ln>
+            <a:noFill/>
           </a:ln>
           <a:effectLst/>
         </p:spPr>
@@ -14199,10 +14283,19 @@
           </a:fontRef>
         </p:style>
         <p:txBody>
-          <a:bodyPr rtlCol="0" anchor="ctr"/>
-          <a:lstStyle/>
-          <a:p>
-            <a:pPr algn="ctr"/>
+          <a:bodyPr rtlCol="0" anchor="ctr" lIns="0" rIns="0" tIns="0" bIns="0"/>
+          <a:lstStyle/>
+          <a:p>
+            <a:pPr algn="ctr"/>
+            <a:r>
+              <a:rPr sz="1400" b="1">
+                <a:solidFill>
+                  <a:srgbClr val="FFFFFF"/>
+                </a:solidFill>
+                <a:latin typeface="Microsoft JhengHei"/>
+              </a:rPr>
+              <a:t>累積</a:t>
+            </a:r>
           </a:p>
         </p:txBody>
       </p:sp>
@@ -14214,89 +14307,8 @@
         </p:nvSpPr>
         <p:spPr>
           <a:xfrm>
-            <a:off x="6894576" y="1664208"/>
-            <a:ext cx="1481328" cy="457200"/>
-          </a:xfrm>
-          <a:prstGeom prst="rect">
-            <a:avLst/>
-          </a:prstGeom>
-          <a:noFill/>
-        </p:spPr>
-        <p:txBody>
-          <a:bodyPr wrap="square" anchor="t" lIns="45720" rIns="45720" tIns="27432" bIns="27432">
-            <a:spAutoFit/>
-          </a:bodyPr>
-          <a:lstStyle/>
-          <a:p>
-            <a:pPr algn="ctr"/>
-            <a:r>
-              <a:rPr sz="1450" b="1">
-                <a:solidFill>
-                  <a:srgbClr val="16304F"/>
-                </a:solidFill>
-                <a:latin typeface="Microsoft JhengHei"/>
-              </a:rPr>
-              <a:t>相似案例</a:t>
-            </a:r>
-          </a:p>
-        </p:txBody>
-      </p:sp>
-      <p:sp>
-        <p:nvSpPr>
-          <p:cNvPr id="27" name="Rounded Rectangle 26"/>
-          <p:cNvSpPr/>
-          <p:nvPr/>
-        </p:nvSpPr>
-        <p:spPr>
-          <a:xfrm>
-            <a:off x="7077456" y="2212848"/>
-            <a:ext cx="1115568" cy="365760"/>
-          </a:xfrm>
-          <a:prstGeom prst="roundRect">
-            <a:avLst>
-              <a:gd name="adj" fmla="val 30000"/>
-            </a:avLst>
-          </a:prstGeom>
-          <a:solidFill>
-            <a:srgbClr val="FFF2D6"/>
-          </a:solidFill>
-          <a:ln>
-            <a:noFill/>
-          </a:ln>
-          <a:effectLst/>
-        </p:spPr>
-        <p:style>
-          <a:lnRef idx="1">
-            <a:schemeClr val="accent1"/>
-          </a:lnRef>
-          <a:fillRef idx="3">
-            <a:schemeClr val="accent1"/>
-          </a:fillRef>
-          <a:effectRef idx="2">
-            <a:schemeClr val="accent1"/>
-          </a:effectRef>
-          <a:fontRef idx="minor">
-            <a:schemeClr val="lt1"/>
-          </a:fontRef>
-        </p:style>
-        <p:txBody>
-          <a:bodyPr rtlCol="0" anchor="ctr"/>
-          <a:lstStyle/>
-          <a:p>
-            <a:pPr algn="ctr"/>
-          </a:p>
-        </p:txBody>
-      </p:sp>
-      <p:sp>
-        <p:nvSpPr>
-          <p:cNvPr id="28" name="TextBox 27"/>
-          <p:cNvSpPr txBox="1"/>
-          <p:nvPr/>
-        </p:nvSpPr>
-        <p:spPr>
-          <a:xfrm>
-            <a:off x="7077456" y="2212848"/>
-            <a:ext cx="1115568" cy="365760"/>
+            <a:off x="5467837" y="2543042"/>
+            <a:ext cx="2011680" cy="457200"/>
           </a:xfrm>
           <a:prstGeom prst="rect">
             <a:avLst/>
@@ -14309,483 +14321,15 @@
           </a:bodyPr>
           <a:lstStyle/>
           <a:p>
-            <a:pPr algn="ctr"/>
-            <a:r>
-              <a:rPr sz="1100" b="1">
-                <a:solidFill>
-                  <a:srgbClr val="B36F00"/>
-                </a:solidFill>
-                <a:latin typeface="Microsoft JhengHei"/>
-              </a:rPr>
-              <a:t>檢索＋1 次</a:t>
-            </a:r>
-          </a:p>
-        </p:txBody>
-      </p:sp>
-      <p:sp>
-        <p:nvSpPr>
-          <p:cNvPr id="29" name="Rounded Rectangle 28"/>
-          <p:cNvSpPr/>
-          <p:nvPr/>
-        </p:nvSpPr>
-        <p:spPr>
-          <a:xfrm>
-            <a:off x="8458200" y="1554480"/>
-            <a:ext cx="1481328" cy="1234440"/>
-          </a:xfrm>
-          <a:prstGeom prst="roundRect">
-            <a:avLst>
-              <a:gd name="adj" fmla="val 8000"/>
-            </a:avLst>
-          </a:prstGeom>
-          <a:solidFill>
-            <a:srgbClr val="FFFFFF"/>
-          </a:solidFill>
-          <a:ln w="19050">
-            <a:solidFill>
-              <a:srgbClr val="DDE3EA"/>
-            </a:solidFill>
-          </a:ln>
-          <a:effectLst/>
-        </p:spPr>
-        <p:style>
-          <a:lnRef idx="1">
-            <a:schemeClr val="accent1"/>
-          </a:lnRef>
-          <a:fillRef idx="3">
-            <a:schemeClr val="accent1"/>
-          </a:fillRef>
-          <a:effectRef idx="2">
-            <a:schemeClr val="accent1"/>
-          </a:effectRef>
-          <a:fontRef idx="minor">
-            <a:schemeClr val="lt1"/>
-          </a:fontRef>
-        </p:style>
-        <p:txBody>
-          <a:bodyPr rtlCol="0" anchor="ctr"/>
-          <a:lstStyle/>
-          <a:p>
-            <a:pPr algn="ctr"/>
-          </a:p>
-        </p:txBody>
-      </p:sp>
-      <p:sp>
-        <p:nvSpPr>
-          <p:cNvPr id="30" name="TextBox 29"/>
-          <p:cNvSpPr txBox="1"/>
-          <p:nvPr/>
-        </p:nvSpPr>
-        <p:spPr>
-          <a:xfrm>
-            <a:off x="8458200" y="1664208"/>
-            <a:ext cx="1481328" cy="457200"/>
-          </a:xfrm>
-          <a:prstGeom prst="rect">
-            <a:avLst/>
-          </a:prstGeom>
-          <a:noFill/>
-        </p:spPr>
-        <p:txBody>
-          <a:bodyPr wrap="square" anchor="t" lIns="45720" rIns="45720" tIns="27432" bIns="27432">
-            <a:spAutoFit/>
-          </a:bodyPr>
-          <a:lstStyle/>
-          <a:p>
-            <a:pPr algn="ctr"/>
-            <a:r>
-              <a:rPr sz="1450" b="1">
-                <a:solidFill>
-                  <a:srgbClr val="16304F"/>
-                </a:solidFill>
-                <a:latin typeface="Microsoft JhengHei"/>
-              </a:rPr>
-              <a:t>草稿</a:t>
-            </a:r>
-          </a:p>
-        </p:txBody>
-      </p:sp>
-      <p:sp>
-        <p:nvSpPr>
-          <p:cNvPr id="31" name="Rounded Rectangle 30"/>
-          <p:cNvSpPr/>
-          <p:nvPr/>
-        </p:nvSpPr>
-        <p:spPr>
-          <a:xfrm>
-            <a:off x="8641080" y="2212848"/>
-            <a:ext cx="1115568" cy="365760"/>
-          </a:xfrm>
-          <a:prstGeom prst="roundRect">
-            <a:avLst>
-              <a:gd name="adj" fmla="val 30000"/>
-            </a:avLst>
-          </a:prstGeom>
-          <a:solidFill>
-            <a:srgbClr val="FFF2D6"/>
-          </a:solidFill>
-          <a:ln>
-            <a:noFill/>
-          </a:ln>
-          <a:effectLst/>
-        </p:spPr>
-        <p:style>
-          <a:lnRef idx="1">
-            <a:schemeClr val="accent1"/>
-          </a:lnRef>
-          <a:fillRef idx="3">
-            <a:schemeClr val="accent1"/>
-          </a:fillRef>
-          <a:effectRef idx="2">
-            <a:schemeClr val="accent1"/>
-          </a:effectRef>
-          <a:fontRef idx="minor">
-            <a:schemeClr val="lt1"/>
-          </a:fontRef>
-        </p:style>
-        <p:txBody>
-          <a:bodyPr rtlCol="0" anchor="ctr"/>
-          <a:lstStyle/>
-          <a:p>
-            <a:pPr algn="ctr"/>
-          </a:p>
-        </p:txBody>
-      </p:sp>
-      <p:sp>
-        <p:nvSpPr>
-          <p:cNvPr id="32" name="TextBox 31"/>
-          <p:cNvSpPr txBox="1"/>
-          <p:nvPr/>
-        </p:nvSpPr>
-        <p:spPr>
-          <a:xfrm>
-            <a:off x="8641080" y="2212848"/>
-            <a:ext cx="1115568" cy="365760"/>
-          </a:xfrm>
-          <a:prstGeom prst="rect">
-            <a:avLst/>
-          </a:prstGeom>
-          <a:noFill/>
-        </p:spPr>
-        <p:txBody>
-          <a:bodyPr wrap="square" anchor="ctr" lIns="45720" rIns="45720" tIns="27432" bIns="27432">
-            <a:spAutoFit/>
-          </a:bodyPr>
-          <a:lstStyle/>
-          <a:p>
-            <a:pPr algn="ctr"/>
-            <a:r>
-              <a:rPr sz="1100" b="1">
-                <a:solidFill>
-                  <a:srgbClr val="B36F00"/>
-                </a:solidFill>
-                <a:latin typeface="Microsoft JhengHei"/>
-              </a:rPr>
-              <a:t>模型 1 次</a:t>
-            </a:r>
-          </a:p>
-        </p:txBody>
-      </p:sp>
-      <p:sp>
-        <p:nvSpPr>
-          <p:cNvPr id="33" name="Rounded Rectangle 32"/>
-          <p:cNvSpPr/>
-          <p:nvPr/>
-        </p:nvSpPr>
-        <p:spPr>
-          <a:xfrm>
-            <a:off x="10021824" y="1554480"/>
-            <a:ext cx="1481328" cy="1234440"/>
-          </a:xfrm>
-          <a:prstGeom prst="roundRect">
-            <a:avLst>
-              <a:gd name="adj" fmla="val 8000"/>
-            </a:avLst>
-          </a:prstGeom>
-          <a:solidFill>
-            <a:srgbClr val="FFFFFF"/>
-          </a:solidFill>
-          <a:ln w="19050">
-            <a:solidFill>
-              <a:srgbClr val="DDE3EA"/>
-            </a:solidFill>
-          </a:ln>
-          <a:effectLst/>
-        </p:spPr>
-        <p:style>
-          <a:lnRef idx="1">
-            <a:schemeClr val="accent1"/>
-          </a:lnRef>
-          <a:fillRef idx="3">
-            <a:schemeClr val="accent1"/>
-          </a:fillRef>
-          <a:effectRef idx="2">
-            <a:schemeClr val="accent1"/>
-          </a:effectRef>
-          <a:fontRef idx="minor">
-            <a:schemeClr val="lt1"/>
-          </a:fontRef>
-        </p:style>
-        <p:txBody>
-          <a:bodyPr rtlCol="0" anchor="ctr"/>
-          <a:lstStyle/>
-          <a:p>
-            <a:pPr algn="ctr"/>
-          </a:p>
-        </p:txBody>
-      </p:sp>
-      <p:sp>
-        <p:nvSpPr>
-          <p:cNvPr id="34" name="TextBox 33"/>
-          <p:cNvSpPr txBox="1"/>
-          <p:nvPr/>
-        </p:nvSpPr>
-        <p:spPr>
-          <a:xfrm>
-            <a:off x="10021824" y="1664208"/>
-            <a:ext cx="1481328" cy="457200"/>
-          </a:xfrm>
-          <a:prstGeom prst="rect">
-            <a:avLst/>
-          </a:prstGeom>
-          <a:noFill/>
-        </p:spPr>
-        <p:txBody>
-          <a:bodyPr wrap="square" anchor="t" lIns="45720" rIns="45720" tIns="27432" bIns="27432">
-            <a:spAutoFit/>
-          </a:bodyPr>
-          <a:lstStyle/>
-          <a:p>
-            <a:pPr algn="ctr"/>
-            <a:r>
-              <a:rPr sz="1450" b="1">
-                <a:solidFill>
-                  <a:srgbClr val="16304F"/>
-                </a:solidFill>
-                <a:latin typeface="Microsoft JhengHei"/>
-              </a:rPr>
-              <a:t>修正重跑</a:t>
-            </a:r>
-          </a:p>
-        </p:txBody>
-      </p:sp>
-      <p:sp>
-        <p:nvSpPr>
-          <p:cNvPr id="35" name="Rounded Rectangle 34"/>
-          <p:cNvSpPr/>
-          <p:nvPr/>
-        </p:nvSpPr>
-        <p:spPr>
-          <a:xfrm>
-            <a:off x="10204703" y="2212848"/>
-            <a:ext cx="1115568" cy="365760"/>
-          </a:xfrm>
-          <a:prstGeom prst="roundRect">
-            <a:avLst>
-              <a:gd name="adj" fmla="val 30000"/>
-            </a:avLst>
-          </a:prstGeom>
-          <a:solidFill>
-            <a:srgbClr val="FFF2D6"/>
-          </a:solidFill>
-          <a:ln>
-            <a:noFill/>
-          </a:ln>
-          <a:effectLst/>
-        </p:spPr>
-        <p:style>
-          <a:lnRef idx="1">
-            <a:schemeClr val="accent1"/>
-          </a:lnRef>
-          <a:fillRef idx="3">
-            <a:schemeClr val="accent1"/>
-          </a:fillRef>
-          <a:effectRef idx="2">
-            <a:schemeClr val="accent1"/>
-          </a:effectRef>
-          <a:fontRef idx="minor">
-            <a:schemeClr val="lt1"/>
-          </a:fontRef>
-        </p:style>
-        <p:txBody>
-          <a:bodyPr rtlCol="0" anchor="ctr"/>
-          <a:lstStyle/>
-          <a:p>
-            <a:pPr algn="ctr"/>
-          </a:p>
-        </p:txBody>
-      </p:sp>
-      <p:sp>
-        <p:nvSpPr>
-          <p:cNvPr id="36" name="TextBox 35"/>
-          <p:cNvSpPr txBox="1"/>
-          <p:nvPr/>
-        </p:nvSpPr>
-        <p:spPr>
-          <a:xfrm>
-            <a:off x="10204703" y="2212848"/>
-            <a:ext cx="1115568" cy="365760"/>
-          </a:xfrm>
-          <a:prstGeom prst="rect">
-            <a:avLst/>
-          </a:prstGeom>
-          <a:noFill/>
-        </p:spPr>
-        <p:txBody>
-          <a:bodyPr wrap="square" anchor="ctr" lIns="45720" rIns="45720" tIns="27432" bIns="27432">
-            <a:spAutoFit/>
-          </a:bodyPr>
-          <a:lstStyle/>
-          <a:p>
-            <a:pPr algn="ctr"/>
-            <a:r>
-              <a:rPr sz="1100" b="1">
-                <a:solidFill>
-                  <a:srgbClr val="B36F00"/>
-                </a:solidFill>
-                <a:latin typeface="Microsoft JhengHei"/>
-              </a:rPr>
-              <a:t>只跑受影響步</a:t>
-            </a:r>
-          </a:p>
-        </p:txBody>
-      </p:sp>
-      <p:sp>
-        <p:nvSpPr>
-          <p:cNvPr id="37" name="TextBox 36"/>
-          <p:cNvSpPr txBox="1"/>
-          <p:nvPr/>
-        </p:nvSpPr>
-        <p:spPr>
-          <a:xfrm>
-            <a:off x="640080" y="3200400"/>
-            <a:ext cx="2103120" cy="1463040"/>
-          </a:xfrm>
-          <a:prstGeom prst="rect">
-            <a:avLst/>
-          </a:prstGeom>
-          <a:noFill/>
-        </p:spPr>
-        <p:txBody>
-          <a:bodyPr wrap="square" anchor="ctr" lIns="45720" rIns="45720" tIns="27432" bIns="27432">
-            <a:spAutoFit/>
-          </a:bodyPr>
-          <a:lstStyle/>
-          <a:p>
-            <a:pPr algn="l"/>
-            <a:r>
-              <a:rPr sz="9600" b="1">
-                <a:solidFill>
-                  <a:srgbClr val="16304F"/>
-                </a:solidFill>
-                <a:latin typeface="Microsoft JhengHei"/>
-              </a:rPr>
-              <a:t>6</a:t>
-            </a:r>
-          </a:p>
-        </p:txBody>
-      </p:sp>
-      <p:sp>
-        <p:nvSpPr>
-          <p:cNvPr id="38" name="TextBox 37"/>
-          <p:cNvSpPr txBox="1"/>
-          <p:nvPr/>
-        </p:nvSpPr>
-        <p:spPr>
-          <a:xfrm>
-            <a:off x="2743200" y="3977639"/>
-            <a:ext cx="2560320" cy="548640"/>
-          </a:xfrm>
-          <a:prstGeom prst="rect">
-            <a:avLst/>
-          </a:prstGeom>
-          <a:noFill/>
-        </p:spPr>
-        <p:txBody>
-          <a:bodyPr wrap="square" anchor="t" lIns="45720" rIns="45720" tIns="27432" bIns="27432">
-            <a:spAutoFit/>
-          </a:bodyPr>
-          <a:lstStyle/>
-          <a:p>
-            <a:pPr algn="l"/>
-            <a:r>
-              <a:rPr sz="1800" b="0">
-                <a:solidFill>
-                  <a:srgbClr val="5B6573"/>
-                </a:solidFill>
-                <a:latin typeface="Microsoft JhengHei"/>
-              </a:rPr>
-              <a:t>次模型呼叫・約 2 分鐘</a:t>
-            </a:r>
-          </a:p>
-        </p:txBody>
-      </p:sp>
-      <p:sp>
-        <p:nvSpPr>
-          <p:cNvPr id="39" name="TextBox 38"/>
-          <p:cNvSpPr txBox="1"/>
-          <p:nvPr/>
-        </p:nvSpPr>
-        <p:spPr>
-          <a:xfrm>
-            <a:off x="5486400" y="3291840"/>
-            <a:ext cx="6035040" cy="914400"/>
-          </a:xfrm>
-          <a:prstGeom prst="rect">
-            <a:avLst/>
-          </a:prstGeom>
-          <a:noFill/>
-        </p:spPr>
-        <p:txBody>
-          <a:bodyPr wrap="square" anchor="t" lIns="45720" rIns="45720" tIns="27432" bIns="27432">
-            <a:spAutoFit/>
-          </a:bodyPr>
-          <a:lstStyle/>
-          <a:p>
-            <a:pPr algn="l"/>
-            <a:r>
-              <a:rPr sz="1800" b="0">
+            <a:pPr algn="r"/>
+            <a:r>
+              <a:rPr sz="1050" b="0">
                 <a:solidFill>
                   <a:srgbClr val="334455"/>
                 </a:solidFill>
                 <a:latin typeface="Microsoft JhengHei"/>
               </a:rPr>
-              <a:t>每步輸出落地、每個結論附卷證原句與真實條號；呼叫次數固定，所以能在 1 RPS 下跑、能單步重跑、能做評測。</a:t>
-            </a:r>
-          </a:p>
-        </p:txBody>
-      </p:sp>
-      <p:sp>
-        <p:nvSpPr>
-          <p:cNvPr id="40" name="TextBox 39"/>
-          <p:cNvSpPr txBox="1"/>
-          <p:nvPr/>
-        </p:nvSpPr>
-        <p:spPr>
-          <a:xfrm>
-            <a:off x="5486400" y="4297680"/>
-            <a:ext cx="6035040" cy="731520"/>
-          </a:xfrm>
-          <a:prstGeom prst="rect">
-            <a:avLst/>
-          </a:prstGeom>
-          <a:noFill/>
-        </p:spPr>
-        <p:txBody>
-          <a:bodyPr wrap="square" anchor="t" lIns="45720" rIns="45720" tIns="27432" bIns="27432">
-            <a:spAutoFit/>
-          </a:bodyPr>
-          <a:lstStyle/>
-          <a:p>
-            <a:pPr algn="l"/>
-            <a:r>
-              <a:rPr sz="1800" b="1">
-                <a:solidFill>
-                  <a:srgbClr val="2E7D32"/>
-                </a:solidFill>
-                <a:latin typeface="Microsoft JhengHei"/>
-              </a:rPr>
-              <a:t>綠色那步是程式算的：30 日期間、八款不受理，不交給模型猜。</a:t>
+              <a:t>下一案的相似案例＋法規版本更新</a:t>
             </a:r>
           </a:p>
         </p:txBody>

--- a/docs/提案/提案簡報-訴願智審臺.pptx
+++ b/docs/提案/提案簡報-訴願智審臺.pptx
@@ -3333,7 +3333,7 @@
                 </a:solidFill>
                 <a:latin typeface="Microsoft JhengHei"/>
               </a:rPr>
-              <a:t>讓法制局能安心採用、而且會越用越準的 AI 審卷系統</a:t>
+              <a:t>訴願承辦人的 AI 助手：安心採用，越用越準</a:t>
             </a:r>
           </a:p>
         </p:txBody>
@@ -3412,7 +3412,7 @@
                 </a:solidFill>
                 <a:latin typeface="Microsoft JhengHei"/>
               </a:rPr>
-              <a:t>AI 把例行比對做完、把證據攤開；決定，留給承辦人。</a:t>
+              <a:t>AI 做完例行比對、列出證據；決定，留給承辦人。</a:t>
             </a:r>
           </a:p>
         </p:txBody>
@@ -3623,7 +3623,7 @@
                 </a:solidFill>
                 <a:latin typeface="Microsoft JhengHei"/>
               </a:rPr>
-              <a:t>AI 最常犯的四種錯，各有一道閘門</a:t>
+              <a:t>AI 常見的四種錯誤，各有一道程式檢查</a:t>
             </a:r>
           </a:p>
         </p:txBody>
@@ -3906,7 +3906,7 @@
                 </a:solidFill>
                 <a:latin typeface="Microsoft JhengHei"/>
               </a:rPr>
-              <a:t>11 部法規逐條字典查核；查無就標「未收錄」</a:t>
+              <a:t>11 部法規逐條比對；查無就標「未收錄」</a:t>
             </a:r>
           </a:p>
         </p:txBody>
@@ -4040,7 +4040,7 @@
                 </a:solidFill>
                 <a:latin typeface="Microsoft JhengHei"/>
               </a:rPr>
-              <a:t>引句不符卷證</a:t>
+              <a:t>引用的原文對不上卷證</a:t>
             </a:r>
           </a:p>
         </p:txBody>
@@ -4075,7 +4075,7 @@
                 </a:solidFill>
                 <a:latin typeface="Microsoft JhengHei"/>
               </a:rPr>
-              <a:t>每句引文回查原文；查不到列入未驗證清單</a:t>
+              <a:t>每句引文回查原文；查不到就標示為未驗證</a:t>
             </a:r>
           </a:p>
         </p:txBody>
@@ -4244,7 +4244,7 @@
                 </a:solidFill>
                 <a:latin typeface="Microsoft JhengHei"/>
               </a:rPr>
-              <a:t>行為時／裁處時／決定時三時點比對，修正過就提示</a:t>
+              <a:t>行為時／裁處時／決定時三個時點比對，修正過就提示</a:t>
             </a:r>
           </a:p>
         </p:txBody>
@@ -4413,7 +4413,7 @@
                 </a:solidFill>
                 <a:latin typeface="Microsoft JhengHei"/>
               </a:rPr>
-              <a:t>不受理／駁回／撤銷由程式選模板，模型只寫理由</a:t>
+              <a:t>不受理／駁回／撤銷由程式決定，AI 只寫理由</a:t>
             </a:r>
           </a:p>
         </p:txBody>
@@ -4987,7 +4987,7 @@
                 </a:solidFill>
                 <a:latin typeface="Microsoft JhengHei"/>
               </a:rPr>
-              <a:t>七成案子連實體都不審——程序（30 日、八款）是勝負手。</a:t>
+              <a:t>七成案子在程序上就結束，不進入實質審理——程序判斷是關鍵。</a:t>
             </a:r>
           </a:p>
         </p:txBody>
@@ -5022,7 +5022,7 @@
                 </a:solidFill>
                 <a:latin typeface="Microsoft JhengHei"/>
               </a:rPr>
-              <a:t>所以期間計算做成程式，不交給模型；不受理案的草稿不寫實體。</a:t>
+              <a:t>所以期間計算由程式負責，不交給 AI；不受理案的草稿不寫實質認定。</a:t>
             </a:r>
           </a:p>
         </p:txBody>
@@ -5138,7 +5138,7 @@
                 </a:solidFill>
                 <a:latin typeface="Microsoft JhengHei"/>
               </a:rPr>
-              <a:t>逐條字典＋KB</a:t>
+              <a:t>逐條比對＋知識庫</a:t>
             </a:r>
           </a:p>
         </p:txBody>
@@ -5254,7 +5254,7 @@
                 </a:solidFill>
                 <a:latin typeface="Microsoft JhengHei"/>
               </a:rPr>
-              <a:t>KB metadata</a:t>
+              <a:t>進知識庫並標註類型</a:t>
             </a:r>
           </a:p>
         </p:txBody>
@@ -5546,7 +5546,7 @@
                 </a:solidFill>
                 <a:latin typeface="Microsoft JhengHei"/>
               </a:rPr>
-              <a:t>輸入拿不到——我們自己造了三案考題</a:t>
+              <a:t>公開資料沒有答辯書和卷宗——我們自己做了三套考題</a:t>
             </a:r>
           </a:p>
         </p:txBody>
@@ -5894,7 +5894,7 @@
                 </a:solidFill>
                 <a:latin typeface="Microsoft JhengHei"/>
               </a:rPr>
-              <a:t>卷宗塞滿實體理由和照片當干擾；正確答案仍是程序不受理，一字實體都不能寫。</a:t>
+              <a:t>卷宗塞滿實質理由和照片當干擾；正確答案仍是程序不受理，不能寫任何實質認定。</a:t>
             </a:r>
           </a:p>
         </p:txBody>
@@ -6362,7 +6362,7 @@
                 </a:solidFill>
                 <a:latin typeface="Microsoft JhengHei"/>
               </a:rPr>
-              <a:t>簽證不實證據很強，但三年裁處權時效已過；答辯書迴避不答，系統要自己算出來。</a:t>
+              <a:t>簽證不實證據很強，但三年裁處權時效已過；答辯書迴避不答，系統必須自行從卷內算出時效。</a:t>
             </a:r>
           </a:p>
         </p:txBody>
@@ -6863,7 +6863,7 @@
                 </a:solidFill>
                 <a:latin typeface="Microsoft JhengHei"/>
               </a:rPr>
-              <a:t>文件歸戶</a:t>
+              <a:t>卷證分類</a:t>
             </a:r>
           </a:p>
         </p:txBody>
@@ -6995,7 +6995,7 @@
                 </a:solidFill>
                 <a:latin typeface="Microsoft JhengHei"/>
               </a:rPr>
-              <a:t>五分頁分析</a:t>
+              <a:t>五項分析結果</a:t>
             </a:r>
           </a:p>
         </p:txBody>
@@ -7127,7 +7127,7 @@
                 </a:solidFill>
                 <a:latin typeface="Microsoft JhengHei"/>
               </a:rPr>
-              <a:t>修正提案 → 確認 → 局部重跑</a:t>
+              <a:t>修正 → 確認 → 局部重算</a:t>
             </a:r>
           </a:p>
         </p:txBody>
@@ -7391,7 +7391,7 @@
                 </a:solidFill>
                 <a:latin typeface="Microsoft JhengHei"/>
               </a:rPr>
-              <a:t>前端接真 API</a:t>
+              <a:t>畫面全部連到線上系統</a:t>
             </a:r>
           </a:p>
         </p:txBody>
@@ -7982,7 +7982,7 @@
                 </a:solidFill>
                 <a:latin typeface="Microsoft JhengHei"/>
               </a:rPr>
-              <a:t>允許清單內；1 RPS 下固定 pipeline</a:t>
+              <a:t>允許清單內；在競賽呼叫頻率限制下固定流程</a:t>
             </a:r>
           </a:p>
         </p:txBody>
@@ -8284,7 +8284,7 @@
                 </a:solidFill>
                 <a:latin typeface="Microsoft JhengHei"/>
               </a:rPr>
-              <a:t>101 份讀完再設計；三案評測集</a:t>
+              <a:t>101 份讀完再設計；三套考題</a:t>
             </a:r>
           </a:p>
         </p:txBody>
@@ -8558,7 +8558,7 @@
                 </a:solidFill>
                 <a:latin typeface="Microsoft JhengHei"/>
               </a:rPr>
-              <a:t>Live Demo　http://100.20.156.38/　— 所有數據都是 EC2 真跑，不是 mock</a:t>
+              <a:t>Live Demo　http://100.20.156.38/　— 所有畫面都是線上實際執行的結果，不是預錄</a:t>
             </a:r>
           </a:p>
         </p:txBody>
@@ -8813,7 +8813,7 @@
                 </a:solidFill>
                 <a:latin typeface="Microsoft JhengHei"/>
               </a:rPr>
-              <a:t>下一步：接補件 API・法規同步排程・擴到洗錢／空污案型</a:t>
+              <a:t>下一步：補件功能完成・法規自動更新・擴到洗錢防制與空污案件</a:t>
             </a:r>
           </a:p>
         </p:txBody>
@@ -8892,7 +8892,7 @@
                 </a:solidFill>
                 <a:latin typeface="Microsoft JhengHei"/>
               </a:rPr>
-              <a:t>Live Demo　http://100.20.156.38/　　GitHub　完整原始碼＋評測集</a:t>
+              <a:t>Live Demo　http://100.20.156.38/　　GitHub　完整原始碼＋三套考題</a:t>
             </a:r>
           </a:p>
         </p:txBody>
@@ -9068,7 +9068,7 @@
                 </a:solidFill>
                 <a:latin typeface="Microsoft JhengHei"/>
               </a:rPr>
-              <a:t>四個設計決定，每一個都是「採不採用」的門檻</a:t>
+              <a:t>法制局願意用的四個前提</a:t>
             </a:r>
           </a:p>
         </p:txBody>
@@ -9450,7 +9450,7 @@
                 </a:solidFill>
                 <a:latin typeface="Microsoft JhengHei"/>
               </a:rPr>
-              <a:t>透明、步驟式、非黑盒</a:t>
+              <a:t>每一步都看得見</a:t>
             </a:r>
           </a:p>
         </p:txBody>
@@ -9584,7 +9584,7 @@
                 </a:solidFill>
                 <a:latin typeface="Microsoft JhengHei"/>
               </a:rPr>
-              <a:t>修正意見是正式入口</a:t>
+              <a:t>修正有正式管道</a:t>
             </a:r>
           </a:p>
         </p:txBody>
@@ -9718,7 +9718,7 @@
                 </a:solidFill>
                 <a:latin typeface="Microsoft JhengHei"/>
               </a:rPr>
-              <a:t>數據飛輪：法規庫＋案件庫</a:t>
+              <a:t>數據飛輪：法規庫／案件庫</a:t>
             </a:r>
           </a:p>
         </p:txBody>
@@ -10089,7 +10089,7 @@
                 </a:solidFill>
                 <a:latin typeface="Microsoft JhengHei"/>
               </a:rPr>
-              <a:t>✕  AI 直接給答案</a:t>
+              <a:t>✕  AI 只給一個結論</a:t>
             </a:r>
           </a:p>
         </p:txBody>
@@ -10124,7 +10124,7 @@
                 </a:solidFill>
                 <a:latin typeface="Microsoft JhengHei"/>
               </a:rPr>
-              <a:t>「本案應駁回。」——承辦人只能信或不信；法制局第一反應：那承辦人幹嘛？</a:t>
+              <a:t>「本案應駁回。」——承辦人只能信或不信，無從審查。</a:t>
             </a:r>
           </a:p>
         </p:txBody>
@@ -10321,7 +10321,7 @@
                 </a:solidFill>
                 <a:latin typeface="Microsoft JhengHei"/>
               </a:rPr>
-              <a:t>✓  AI 攤開選項與證據</a:t>
+              <a:t>✓  AI 列出選項和證據</a:t>
             </a:r>
           </a:p>
         </p:txBody>
@@ -10356,7 +10356,7 @@
                 </a:solidFill>
                 <a:latin typeface="Microsoft JhengHei"/>
               </a:rPr>
-              <a:t>每個爭點附「認定＋依據一句＋卷證原句」，並標示採哪一方的法律後果與風險；決定自己下。</a:t>
+              <a:t>每個爭點附「認定＋依據＋可點回卷證的原文出處」，並說明採信任一方的法律後果；由承辦人決定。</a:t>
             </a:r>
           </a:p>
         </p:txBody>
@@ -10437,7 +10437,7 @@
                 </a:solidFill>
                 <a:latin typeface="Microsoft JhengHei"/>
               </a:rPr>
-              <a:t>爭點 1　採機關　→ 送達證書 p.2「本人簽收」</a:t>
+              <a:t>爭點 1　採信機關　→ 送達證書 p.2「本人簽收」</a:t>
             </a:r>
           </a:p>
         </p:txBody>
@@ -10518,7 +10518,7 @@
                 </a:solidFill>
                 <a:latin typeface="Microsoft JhengHei"/>
               </a:rPr>
-              <a:t>爭點 2　採訴願人 → 影片 00:14「未見拋擲」・風險：中</a:t>
+              <a:t>爭點 2　採信訴願人 → 影片 00:14「未見拋擲」</a:t>
             </a:r>
           </a:p>
         </p:txBody>
@@ -10599,7 +10599,7 @@
                 </a:solidFill>
                 <a:latin typeface="Microsoft JhengHei"/>
               </a:rPr>
-              <a:t>承辦人：確認／修改 → 才寫進草稿</a:t>
+              <a:t>承辦人確認或修改後，才寫進草稿</a:t>
             </a:r>
           </a:p>
         </p:txBody>
@@ -10775,7 +10775,7 @@
                 </a:solidFill>
                 <a:latin typeface="Microsoft JhengHei"/>
               </a:rPr>
-              <a:t>透明、步驟式、非黑盒：固定七步，哪一步錯就修哪一步</a:t>
+              <a:t>固定七個步驟，哪一步錯就修哪一步</a:t>
             </a:r>
           </a:p>
         </p:txBody>
@@ -10972,7 +10972,7 @@
                 </a:solidFill>
                 <a:latin typeface="Microsoft JhengHei"/>
               </a:rPr>
-              <a:t>欄位擷取</a:t>
+              <a:t>讀出基本資料</a:t>
             </a:r>
           </a:p>
         </p:txBody>
@@ -11053,7 +11053,7 @@
                 </a:solidFill>
                 <a:latin typeface="Microsoft JhengHei"/>
               </a:rPr>
-              <a:t>模型 1 次</a:t>
+              <a:t>問 AI 一次</a:t>
             </a:r>
           </a:p>
         </p:txBody>
@@ -11217,7 +11217,7 @@
                 </a:solidFill>
                 <a:latin typeface="Microsoft JhengHei"/>
               </a:rPr>
-              <a:t>程式 0 次</a:t>
+              <a:t>程式算，不問 AI</a:t>
             </a:r>
           </a:p>
         </p:txBody>
@@ -11300,7 +11300,7 @@
                 </a:solidFill>
                 <a:latin typeface="Microsoft JhengHei"/>
               </a:rPr>
-              <a:t>爭點</a:t>
+              <a:t>整理爭點</a:t>
             </a:r>
           </a:p>
         </p:txBody>
@@ -11381,7 +11381,7 @@
                 </a:solidFill>
                 <a:latin typeface="Microsoft JhengHei"/>
               </a:rPr>
-              <a:t>模型 1 次</a:t>
+              <a:t>問 AI 一次</a:t>
             </a:r>
           </a:p>
         </p:txBody>
@@ -11464,7 +11464,7 @@
                 </a:solidFill>
                 <a:latin typeface="Microsoft JhengHei"/>
               </a:rPr>
-              <a:t>法規</a:t>
+              <a:t>找法規</a:t>
             </a:r>
           </a:p>
         </p:txBody>
@@ -11545,7 +11545,7 @@
                 </a:solidFill>
                 <a:latin typeface="Microsoft JhengHei"/>
               </a:rPr>
-              <a:t>檢索＋1 次</a:t>
+              <a:t>查知識庫＋問一次</a:t>
             </a:r>
           </a:p>
         </p:txBody>
@@ -11628,7 +11628,7 @@
                 </a:solidFill>
                 <a:latin typeface="Microsoft JhengHei"/>
               </a:rPr>
-              <a:t>相似案例</a:t>
+              <a:t>找相似案例</a:t>
             </a:r>
           </a:p>
         </p:txBody>
@@ -11709,7 +11709,7 @@
                 </a:solidFill>
                 <a:latin typeface="Microsoft JhengHei"/>
               </a:rPr>
-              <a:t>檢索＋1 次</a:t>
+              <a:t>查知識庫＋問一次</a:t>
             </a:r>
           </a:p>
         </p:txBody>
@@ -11792,7 +11792,7 @@
                 </a:solidFill>
                 <a:latin typeface="Microsoft JhengHei"/>
               </a:rPr>
-              <a:t>草稿</a:t>
+              <a:t>寫草稿</a:t>
             </a:r>
           </a:p>
         </p:txBody>
@@ -11873,7 +11873,7 @@
                 </a:solidFill>
                 <a:latin typeface="Microsoft JhengHei"/>
               </a:rPr>
-              <a:t>模型 1 次</a:t>
+              <a:t>問 AI 一次</a:t>
             </a:r>
           </a:p>
         </p:txBody>
@@ -11956,7 +11956,7 @@
                 </a:solidFill>
                 <a:latin typeface="Microsoft JhengHei"/>
               </a:rPr>
-              <a:t>修正重跑</a:t>
+              <a:t>承辦人修正</a:t>
             </a:r>
           </a:p>
         </p:txBody>
@@ -12037,7 +12037,7 @@
                 </a:solidFill>
                 <a:latin typeface="Microsoft JhengHei"/>
               </a:rPr>
-              <a:t>只跑受影響步</a:t>
+              <a:t>只重算受影響步驟</a:t>
             </a:r>
           </a:p>
         </p:txBody>
@@ -12107,7 +12107,7 @@
                 </a:solidFill>
                 <a:latin typeface="Microsoft JhengHei"/>
               </a:rPr>
-              <a:t>次模型呼叫・約 2 分鐘</a:t>
+              <a:t>次問 AI・約 2 分鐘</a:t>
             </a:r>
           </a:p>
         </p:txBody>
@@ -12142,7 +12142,7 @@
                 </a:solidFill>
                 <a:latin typeface="Microsoft JhengHei"/>
               </a:rPr>
-              <a:t>每步輸出落地、每個結論附卷證原句與真實條號；呼叫次數固定，所以能在 1 RPS 下跑、能單步重跑、能做評測。</a:t>
+              <a:t>每一步的結果都保存，每個結論都能點回卷證出處和法條；步驟固定，所以錯了可以只修一步，也能拿考題來驗證。</a:t>
             </a:r>
           </a:p>
         </p:txBody>
@@ -12177,7 +12177,7 @@
                 </a:solidFill>
                 <a:latin typeface="Microsoft JhengHei"/>
               </a:rPr>
-              <a:t>綠色那步是程式算的：30 日期間、八款不受理，不交給模型猜。</a:t>
+              <a:t>綠色那一步不問 AI：30 日期間、訴願法第 77 條的不受理事由，都由程式計算。</a:t>
             </a:r>
           </a:p>
         </p:txBody>
@@ -12353,7 +12353,7 @@
                 </a:solidFill>
                 <a:latin typeface="Microsoft JhengHei"/>
               </a:rPr>
-              <a:t>修正意見是正式入口——不是聊天，是可追蹤的變更</a:t>
+              <a:t>承辦人的修正意見，系統逐項處理、逐項回覆</a:t>
             </a:r>
           </a:p>
         </p:txBody>
@@ -12603,7 +12603,7 @@
                 </a:solidFill>
                 <a:latin typeface="Microsoft JhengHei"/>
               </a:rPr>
-              <a:t>承辦人說</a:t>
+              <a:t>承辦人提出</a:t>
             </a:r>
           </a:p>
         </p:txBody>
@@ -12638,7 +12638,7 @@
                 </a:solidFill>
                 <a:latin typeface="Microsoft JhengHei"/>
               </a:rPr>
-              <a:t>「爭點 2 改採訴願人，因為影片 00:14 看不到拋擲」
+              <a:t>「爭點 2 改採信訴願人，因為影片 00:14 看不到拋擲」
 可多點、可附卷證依據</a:t>
             </a:r>
           </a:p>
@@ -12775,7 +12775,7 @@
                 </a:solidFill>
                 <a:latin typeface="Microsoft JhengHei"/>
               </a:rPr>
-              <a:t>系統判斷影響範圍</a:t>
+              <a:t>系統判斷牽動哪幾步</a:t>
             </a:r>
           </a:p>
         </p:txBody>
@@ -12811,7 +12811,7 @@
                 <a:latin typeface="Microsoft JhengHei"/>
               </a:rPr>
               <a:t>爭點 → 法規 → 相似案例 → 草稿
-只重算這幾層，其他不動</a:t>
+只重算這幾步，其他不動</a:t>
             </a:r>
           </a:p>
         </p:txBody>
@@ -12947,7 +12947,7 @@
                 </a:solidFill>
                 <a:latin typeface="Microsoft JhengHei"/>
               </a:rPr>
-              <a:t>提案卡：修改前 → 修改後</a:t>
+              <a:t>先看改前改後，確認才生效</a:t>
             </a:r>
           </a:p>
         </p:txBody>
@@ -12982,7 +12982,7 @@
                 </a:solidFill>
                 <a:latin typeface="Microsoft JhengHei"/>
               </a:rPr>
-              <a:t>所見即所得；按「確認」才執行
+              <a:t>畫面上直接看到會改成什麼樣
 取消則原樣不動</a:t>
             </a:r>
           </a:p>
@@ -13119,7 +13119,7 @@
                 </a:solidFill>
                 <a:latin typeface="Microsoft JhengHei"/>
               </a:rPr>
-              <a:t>逐項回覆</a:t>
+              <a:t>逐項回覆採納與否</a:t>
             </a:r>
           </a:p>
         </p:txBody>
@@ -13155,7 +13155,7 @@
                 <a:latin typeface="Microsoft JhengHei"/>
               </a:rPr>
               <a:t>採納／部分採納／無法採納
-每一項附證據，寫入稽核</a:t>
+每一項附證據，留下紀錄</a:t>
             </a:r>
           </a:p>
         </p:txBody>
@@ -13278,7 +13278,7 @@
                 </a:solidFill>
                 <a:latin typeface="Microsoft JhengHei"/>
               </a:rPr>
-              <a:t>右下角助手「有據才答」：查法條、查決定書、查本案卷證、算期間——查無就說查無；查到的東西一鍵轉成修正意見。</a:t>
+              <a:t>問答助手只根據法條、決定書和本案卷證回答，查不到就說查不到；查到的內容可以直接變成修正意見。</a:t>
             </a:r>
           </a:p>
         </p:txBody>
@@ -13454,7 +13454,7 @@
                 </a:solidFill>
                 <a:latin typeface="Microsoft JhengHei"/>
               </a:rPr>
-              <a:t>數據飛輪：決定書是輸出，答辯書和卷證才是輸入</a:t>
+              <a:t>數據飛輪：公開的只有決定書，卷證要自己累積</a:t>
             </a:r>
           </a:p>
         </p:txBody>
@@ -13809,7 +13809,7 @@
                 </a:solidFill>
                 <a:latin typeface="Microsoft JhengHei"/>
               </a:rPr>
-              <a:t>補件與重新匯入走同一條路：承辦人跟助手說「補這份」→ 只辨識新檔 → 只重算受影響的步驟 → 前端立即更新</a:t>
+              <a:t>案件進行中補件也一樣：跟助手說「補這份」，系統只辨識新檔、只重算受影響的步驟，畫面立即更新</a:t>
             </a:r>
           </a:p>
         </p:txBody>
@@ -14030,7 +14030,7 @@
                 </a:solidFill>
                 <a:latin typeface="Microsoft JhengHei"/>
               </a:rPr>
-              <a:t>歸戶</a:t>
+              <a:t>分類</a:t>
             </a:r>
           </a:p>
         </p:txBody>
@@ -14065,7 +14065,7 @@
                 </a:solidFill>
                 <a:latin typeface="Microsoft JhengHei"/>
               </a:rPr>
-              <a:t>27 類文件，自動命名進案件庫</a:t>
+              <a:t>27 類文件，自動命名</a:t>
             </a:r>
           </a:p>
         </p:txBody>
@@ -14153,7 +14153,7 @@
                 </a:solidFill>
                 <a:latin typeface="Microsoft JhengHei"/>
               </a:rPr>
-              <a:t>法規庫檢索、相似案例、草稿</a:t>
+              <a:t>查法規庫、找相似案例、寫草稿</a:t>
             </a:r>
           </a:p>
         </p:txBody>
@@ -14241,7 +14241,7 @@
                 </a:solidFill>
                 <a:latin typeface="Microsoft JhengHei"/>
               </a:rPr>
-              <a:t>承辦人確認／修改，寫回案件庫</a:t>
+              <a:t>承辦人確認或修改</a:t>
             </a:r>
           </a:p>
         </p:txBody>
@@ -14294,7 +14294,7 @@
                 </a:solidFill>
                 <a:latin typeface="Microsoft JhengHei"/>
               </a:rPr>
-              <a:t>累積</a:t>
+              <a:t>存入案件庫</a:t>
             </a:r>
           </a:p>
         </p:txBody>
@@ -14753,7 +14753,7 @@
                 </a:solidFill>
                 <a:latin typeface="Microsoft JhengHei"/>
               </a:rPr>
-              <a:t>丟卷宗</a:t>
+              <a:t>上傳卷宗</a:t>
             </a:r>
           </a:p>
         </p:txBody>
@@ -14922,7 +14922,7 @@
                 </a:solidFill>
                 <a:latin typeface="Microsoft JhengHei"/>
               </a:rPr>
-              <a:t>自動歸戶</a:t>
+              <a:t>自動分類</a:t>
             </a:r>
           </a:p>
         </p:txBody>
@@ -15091,7 +15091,7 @@
                 </a:solidFill>
                 <a:latin typeface="Microsoft JhengHei"/>
               </a:rPr>
-              <a:t>看五分頁</a:t>
+              <a:t>看五項結果</a:t>
             </a:r>
           </a:p>
         </p:txBody>
@@ -15126,7 +15126,7 @@
                 </a:solidFill>
                 <a:latin typeface="Microsoft JhengHei"/>
               </a:rPr>
-              <a:t>欄位・爭點・法規・案例・草稿</a:t>
+              <a:t>基本資料・爭點・法規・相似案例・草稿</a:t>
             </a:r>
           </a:p>
         </p:txBody>
@@ -15260,7 +15260,7 @@
                 </a:solidFill>
                 <a:latin typeface="Microsoft JhengHei"/>
               </a:rPr>
-              <a:t>提修正</a:t>
+              <a:t>提出修正</a:t>
             </a:r>
           </a:p>
         </p:txBody>
@@ -15295,7 +15295,7 @@
                 </a:solidFill>
                 <a:latin typeface="Microsoft JhengHei"/>
               </a:rPr>
-              <a:t>「爭點 2 改採訴願人」</a:t>
+              <a:t>「爭點 2 改採信訴願人」</a:t>
             </a:r>
           </a:p>
         </p:txBody>
@@ -15587,7 +15587,7 @@
                 </a:solidFill>
                 <a:latin typeface="Microsoft JhengHei"/>
               </a:rPr>
-              <a:t>示範：case02 亂丟煙蒂，20 頁卷宗＋影片 — 90 秒歸戶、2 分鐘出五分頁</a:t>
+              <a:t>示範案例：廢棄物清理法亂丟煙蒂案，20 頁卷宗＋影片 — 90 秒分類、2 分鐘出五項結果</a:t>
             </a:r>
           </a:p>
         </p:txBody>
@@ -15728,7 +15728,7 @@
                 </a:solidFill>
                 <a:latin typeface="Microsoft JhengHei"/>
               </a:rPr>
-              <a:t>07 ／ 貼心</a:t>
+              <a:t>07 ／ 附帶的便利</a:t>
             </a:r>
           </a:p>
         </p:txBody>
@@ -15763,7 +15763,7 @@
                 </a:solidFill>
                 <a:latin typeface="Microsoft JhengHei"/>
               </a:rPr>
-              <a:t>卷宗怎麼來都收得下——降低上手門檻的細節</a:t>
+              <a:t>卷宗不必先整理，系統自己分類</a:t>
             </a:r>
           </a:p>
         </p:txBody>
@@ -16316,7 +16316,7 @@
                 </a:solidFill>
                 <a:latin typeface="Microsoft JhengHei"/>
               </a:rPr>
-              <a:t>亂檔名全對</a:t>
+              <a:t>亂檔名 20 份全部分對</a:t>
             </a:r>
           </a:p>
         </p:txBody>
@@ -16432,7 +16432,7 @@
                 </a:solidFill>
                 <a:latin typeface="Microsoft JhengHei"/>
               </a:rPr>
-              <a:t>20 檔含影片</a:t>
+              <a:t>20 份含影片</a:t>
             </a:r>
           </a:p>
         </p:txBody>
@@ -16555,7 +16555,7 @@
                 </a:solidFill>
                 <a:latin typeface="Microsoft JhengHei"/>
               </a:rPr>
-              <a:t>不是核心功能：承辦人不必先整理檔名或格式，系統看內容分類；分錯了在畫面上改，寫稽核。</a:t>
+              <a:t>承辦人不必先整理檔名或格式，系統看內容分類；分錯了在畫面上改，會留下紀錄。</a:t>
             </a:r>
           </a:p>
         </p:txBody>
@@ -16731,7 +16731,7 @@
                 </a:solidFill>
                 <a:latin typeface="Microsoft JhengHei"/>
               </a:rPr>
-              <a:t>一台 EC2，三個 AWS 服務，全在允許清單內</a:t>
+              <a:t>一台 EC2 ＋ Bedrock、S3、DynamoDB，全在允許清單內</a:t>
             </a:r>
           </a:p>
         </p:txBody>

--- a/docs/提案/提案簡報-訴願智審臺.pptx
+++ b/docs/提案/提案簡報-訴願智審臺.pptx
@@ -3333,7 +3333,7 @@
                 </a:solidFill>
                 <a:latin typeface="Microsoft JhengHei"/>
               </a:rPr>
-              <a:t>訴願承辦人的 AI 助手：安心採用，越用越準</a:t>
+              <a:t>承辦人的 AI 審卷夥伴</a:t>
             </a:r>
           </a:p>
         </p:txBody>
@@ -3412,7 +3412,7 @@
                 </a:solidFill>
                 <a:latin typeface="Microsoft JhengHei"/>
               </a:rPr>
-              <a:t>AI 做完例行比對、列出證據；決定，留給承辦人。</a:t>
+              <a:t>例行的比對交給 AI，證據攤在眼前，決定仍在承辦人手上。</a:t>
             </a:r>
           </a:p>
         </p:txBody>
@@ -3623,7 +3623,7 @@
                 </a:solidFill>
                 <a:latin typeface="Microsoft JhengHei"/>
               </a:rPr>
-              <a:t>AI 常見的四種錯誤，各有一道程式檢查</a:t>
+              <a:t>AI 會犯的四種錯，四道關卡</a:t>
             </a:r>
           </a:p>
         </p:txBody>
@@ -4040,7 +4040,7 @@
                 </a:solidFill>
                 <a:latin typeface="Microsoft JhengHei"/>
               </a:rPr>
-              <a:t>引用的原文對不上卷證</a:t>
+              <a:t>引文對不上卷證</a:t>
             </a:r>
           </a:p>
         </p:txBody>
@@ -4987,7 +4987,7 @@
                 </a:solidFill>
                 <a:latin typeface="Microsoft JhengHei"/>
               </a:rPr>
-              <a:t>七成案子在程序上就結束，不進入實質審理——程序判斷是關鍵。</a:t>
+              <a:t>七成案子在程序就結束了。</a:t>
             </a:r>
           </a:p>
         </p:txBody>
@@ -5022,7 +5022,7 @@
                 </a:solidFill>
                 <a:latin typeface="Microsoft JhengHei"/>
               </a:rPr>
-              <a:t>所以期間計算由程式負責，不交給 AI；不受理案的草稿不寫實質認定。</a:t>
+              <a:t>所以期間交給程式算；不受理的案子，草稿一個字都不碰實體。</a:t>
             </a:r>
           </a:p>
         </p:txBody>
@@ -5546,7 +5546,7 @@
                 </a:solidFill>
                 <a:latin typeface="Microsoft JhengHei"/>
               </a:rPr>
-              <a:t>公開資料沒有答辯書和卷宗——我們自己做了三套考題</a:t>
+              <a:t>拿不到答辯書和卷宗，就自己出三套考題</a:t>
             </a:r>
           </a:p>
         </p:txBody>
@@ -6661,7 +6661,7 @@
                 </a:solidFill>
                 <a:latin typeface="Microsoft JhengHei"/>
               </a:rPr>
-              <a:t>今天線上能做到哪裡，對到四個評分項目</a:t>
+              <a:t>今天做到哪裡</a:t>
             </a:r>
           </a:p>
         </p:txBody>
@@ -6995,7 +6995,7 @@
                 </a:solidFill>
                 <a:latin typeface="Microsoft JhengHei"/>
               </a:rPr>
-              <a:t>五項分析結果</a:t>
+              <a:t>五項分析</a:t>
             </a:r>
           </a:p>
         </p:txBody>
@@ -7982,7 +7982,7 @@
                 </a:solidFill>
                 <a:latin typeface="Microsoft JhengHei"/>
               </a:rPr>
-              <a:t>允許清單內；在競賽呼叫頻率限制下固定流程</a:t>
+              <a:t>允許清單內；呼叫頻率限制下固定流程</a:t>
             </a:r>
           </a:p>
         </p:txBody>
@@ -8558,7 +8558,7 @@
                 </a:solidFill>
                 <a:latin typeface="Microsoft JhengHei"/>
               </a:rPr>
-              <a:t>Live Demo　http://100.20.156.38/　— 所有畫面都是線上實際執行的結果，不是預錄</a:t>
+              <a:t>Live Demo　http://100.20.156.38/　— 所有畫面都是線上現跑的</a:t>
             </a:r>
           </a:p>
         </p:txBody>
@@ -8813,7 +8813,7 @@
                 </a:solidFill>
                 <a:latin typeface="Microsoft JhengHei"/>
               </a:rPr>
-              <a:t>下一步：補件功能完成・法規自動更新・擴到洗錢防制與空污案件</a:t>
+              <a:t>接下來：補件、法規自動更新、洗錢與空污案型</a:t>
             </a:r>
           </a:p>
         </p:txBody>
@@ -9068,7 +9068,7 @@
                 </a:solidFill>
                 <a:latin typeface="Microsoft JhengHei"/>
               </a:rPr>
-              <a:t>法制局願意用的四個前提</a:t>
+              <a:t>四個前提，缺一不可</a:t>
             </a:r>
           </a:p>
         </p:txBody>
@@ -9450,7 +9450,7 @@
                 </a:solidFill>
                 <a:latin typeface="Microsoft JhengHei"/>
               </a:rPr>
-              <a:t>每一步都看得見</a:t>
+              <a:t>每一步看得見</a:t>
             </a:r>
           </a:p>
         </p:txBody>
@@ -9584,7 +9584,7 @@
                 </a:solidFill>
                 <a:latin typeface="Microsoft JhengHei"/>
               </a:rPr>
-              <a:t>修正有正式管道</a:t>
+              <a:t>改，就改對的那一步</a:t>
             </a:r>
           </a:p>
         </p:txBody>
@@ -10124,7 +10124,7 @@
                 </a:solidFill>
                 <a:latin typeface="Microsoft JhengHei"/>
               </a:rPr>
-              <a:t>「本案應駁回。」——承辦人只能信或不信，無從審查。</a:t>
+              <a:t>「本案應駁回。」——信也不是，不信也不是。</a:t>
             </a:r>
           </a:p>
         </p:txBody>
@@ -10321,7 +10321,7 @@
                 </a:solidFill>
                 <a:latin typeface="Microsoft JhengHei"/>
               </a:rPr>
-              <a:t>✓  AI 列出選項和證據</a:t>
+              <a:t>✓  AI 把選項和證據攤在眼前</a:t>
             </a:r>
           </a:p>
         </p:txBody>
@@ -10356,7 +10356,7 @@
                 </a:solidFill>
                 <a:latin typeface="Microsoft JhengHei"/>
               </a:rPr>
-              <a:t>每個爭點附「認定＋依據＋可點回卷證的原文出處」，並說明採信任一方的法律後果；由承辦人決定。</a:t>
+              <a:t>每個爭點：AI 怎麼認、憑什麼認、卷證在哪一頁；採信哪一方會有什麼後果——都寫清楚，然後交給承辦人。</a:t>
             </a:r>
           </a:p>
         </p:txBody>
@@ -10599,7 +10599,7 @@
                 </a:solidFill>
                 <a:latin typeface="Microsoft JhengHei"/>
               </a:rPr>
-              <a:t>承辦人確認或修改後，才寫進草稿</a:t>
+              <a:t>承辦人點頭，才進草稿</a:t>
             </a:r>
           </a:p>
         </p:txBody>
@@ -11053,7 +11053,7 @@
                 </a:solidFill>
                 <a:latin typeface="Microsoft JhengHei"/>
               </a:rPr>
-              <a:t>問 AI 一次</a:t>
+              <a:t>AI ×1</a:t>
             </a:r>
           </a:p>
         </p:txBody>
@@ -11217,7 +11217,7 @@
                 </a:solidFill>
                 <a:latin typeface="Microsoft JhengHei"/>
               </a:rPr>
-              <a:t>程式算，不問 AI</a:t>
+              <a:t>程式</a:t>
             </a:r>
           </a:p>
         </p:txBody>
@@ -11381,7 +11381,7 @@
                 </a:solidFill>
                 <a:latin typeface="Microsoft JhengHei"/>
               </a:rPr>
-              <a:t>問 AI 一次</a:t>
+              <a:t>AI ×1</a:t>
             </a:r>
           </a:p>
         </p:txBody>
@@ -11545,7 +11545,7 @@
                 </a:solidFill>
                 <a:latin typeface="Microsoft JhengHei"/>
               </a:rPr>
-              <a:t>查知識庫＋問一次</a:t>
+              <a:t>檢索＋AI ×1</a:t>
             </a:r>
           </a:p>
         </p:txBody>
@@ -11709,7 +11709,7 @@
                 </a:solidFill>
                 <a:latin typeface="Microsoft JhengHei"/>
               </a:rPr>
-              <a:t>查知識庫＋問一次</a:t>
+              <a:t>檢索＋AI ×1</a:t>
             </a:r>
           </a:p>
         </p:txBody>
@@ -11873,7 +11873,7 @@
                 </a:solidFill>
                 <a:latin typeface="Microsoft JhengHei"/>
               </a:rPr>
-              <a:t>問 AI 一次</a:t>
+              <a:t>AI ×1</a:t>
             </a:r>
           </a:p>
         </p:txBody>
@@ -12037,7 +12037,7 @@
                 </a:solidFill>
                 <a:latin typeface="Microsoft JhengHei"/>
               </a:rPr>
-              <a:t>只重算受影響步驟</a:t>
+              <a:t>局部重算</a:t>
             </a:r>
           </a:p>
         </p:txBody>
@@ -12107,7 +12107,7 @@
                 </a:solidFill>
                 <a:latin typeface="Microsoft JhengHei"/>
               </a:rPr>
-              <a:t>次問 AI・約 2 分鐘</a:t>
+              <a:t>次 AI・約 2 分鐘</a:t>
             </a:r>
           </a:p>
         </p:txBody>
@@ -12142,7 +12142,7 @@
                 </a:solidFill>
                 <a:latin typeface="Microsoft JhengHei"/>
               </a:rPr>
-              <a:t>每一步的結果都保存，每個結論都能點回卷證出處和法條；步驟固定，所以錯了可以只修一步，也能拿考題來驗證。</a:t>
+              <a:t>步驟固定，結果留底。錯在哪一步，就修那一步；每個結論都指得出卷證和條號。</a:t>
             </a:r>
           </a:p>
         </p:txBody>
@@ -12177,7 +12177,7 @@
                 </a:solidFill>
                 <a:latin typeface="Microsoft JhengHei"/>
               </a:rPr>
-              <a:t>綠色那一步不問 AI：30 日期間、訴願法第 77 條的不受理事由，都由程式計算。</a:t>
+              <a:t>期間怎麼算、該不該受理，是法條說了算，不是 AI 猜——這一步交給程式。</a:t>
             </a:r>
           </a:p>
         </p:txBody>
@@ -12353,7 +12353,7 @@
                 </a:solidFill>
                 <a:latin typeface="Microsoft JhengHei"/>
               </a:rPr>
-              <a:t>承辦人的修正意見，系統逐項處理、逐項回覆</a:t>
+              <a:t>承辦人說改哪裡，系統改哪裡，改了什麼都有交代</a:t>
             </a:r>
           </a:p>
         </p:txBody>
@@ -12603,7 +12603,7 @@
                 </a:solidFill>
                 <a:latin typeface="Microsoft JhengHei"/>
               </a:rPr>
-              <a:t>承辦人提出</a:t>
+              <a:t>承辦人指出問題</a:t>
             </a:r>
           </a:p>
         </p:txBody>
@@ -12775,7 +12775,7 @@
                 </a:solidFill>
                 <a:latin typeface="Microsoft JhengHei"/>
               </a:rPr>
-              <a:t>系統判斷牽動哪幾步</a:t>
+              <a:t>系統算出牽動哪幾步</a:t>
             </a:r>
           </a:p>
         </p:txBody>
@@ -12947,7 +12947,7 @@
                 </a:solidFill>
                 <a:latin typeface="Microsoft JhengHei"/>
               </a:rPr>
-              <a:t>先看改前改後，確認才生效</a:t>
+              <a:t>改前改後並排，點確認才生效</a:t>
             </a:r>
           </a:p>
         </p:txBody>
@@ -12982,7 +12982,7 @@
                 </a:solidFill>
                 <a:latin typeface="Microsoft JhengHei"/>
               </a:rPr>
-              <a:t>畫面上直接看到會改成什麼樣
+              <a:t>改成什麼樣，先看見
 取消則原樣不動</a:t>
             </a:r>
           </a:p>
@@ -13119,7 +13119,7 @@
                 </a:solidFill>
                 <a:latin typeface="Microsoft JhengHei"/>
               </a:rPr>
-              <a:t>逐項回覆採納與否</a:t>
+              <a:t>每一點都回覆</a:t>
             </a:r>
           </a:p>
         </p:txBody>
@@ -13154,8 +13154,8 @@
                 </a:solidFill>
                 <a:latin typeface="Microsoft JhengHei"/>
               </a:rPr>
-              <a:t>採納／部分採納／無法採納
-每一項附證據，留下紀錄</a:t>
+              <a:t>採納、部分採納、或不採納
+附理由，留紀錄</a:t>
             </a:r>
           </a:p>
         </p:txBody>
@@ -13278,7 +13278,7 @@
                 </a:solidFill>
                 <a:latin typeface="Microsoft JhengHei"/>
               </a:rPr>
-              <a:t>問答助手只根據法條、決定書和本案卷證回答，查不到就說查不到；查到的內容可以直接變成修正意見。</a:t>
+              <a:t>助手有據才答：法條、決定書、本案卷證，查不到就說查不到；查到的，一鍵變成修正意見。</a:t>
             </a:r>
           </a:p>
         </p:txBody>
@@ -13454,7 +13454,7 @@
                 </a:solidFill>
                 <a:latin typeface="Microsoft JhengHei"/>
               </a:rPr>
-              <a:t>數據飛輪：公開的只有決定書，卷證要自己累積</a:t>
+              <a:t>數據飛輪：決定書人人有，卷證只能自己攢</a:t>
             </a:r>
           </a:p>
         </p:txBody>
@@ -13649,7 +13649,7 @@
                 </a:solidFill>
                 <a:latin typeface="Microsoft JhengHei"/>
               </a:rPr>
-              <a:t>為什麼輸入拿不到</a:t>
+              <a:t>為什麼只能自己累積</a:t>
             </a:r>
           </a:p>
         </p:txBody>
@@ -13686,7 +13686,7 @@
               </a:rPr>
               <a:t>・訴願法 §58 III／IV：答辯書只存在於機關、受理機關卷內、訴願人手上，沒有公開機制
 ・訴願法 §49、§75 II：卷宗閱覽限訴願人、參加人、代理人
-・所以決定書到處都是、答辯書一份難求——這是制度設計的結果，不是錯覺</a:t>
+・決定書到處都是，答辯書一份難求——制度使然。</a:t>
             </a:r>
           </a:p>
         </p:txBody>
@@ -13809,7 +13809,7 @@
                 </a:solidFill>
                 <a:latin typeface="Microsoft JhengHei"/>
               </a:rPr>
-              <a:t>案件進行中補件也一樣：跟助手說「補這份」，系統只辨識新檔、只重算受影響的步驟，畫面立即更新</a:t>
+              <a:t>中途補件走同一條路：一句「補這份」，只認新檔、只重算牽動的步驟。</a:t>
             </a:r>
           </a:p>
         </p:txBody>
@@ -14294,7 +14294,7 @@
                 </a:solidFill>
                 <a:latin typeface="Microsoft JhengHei"/>
               </a:rPr>
-              <a:t>存入案件庫</a:t>
+              <a:t>入庫</a:t>
             </a:r>
           </a:p>
         </p:txBody>
@@ -15091,7 +15091,7 @@
                 </a:solidFill>
                 <a:latin typeface="Microsoft JhengHei"/>
               </a:rPr>
-              <a:t>看五項結果</a:t>
+              <a:t>看分析</a:t>
             </a:r>
           </a:p>
         </p:txBody>
@@ -15587,7 +15587,7 @@
                 </a:solidFill>
                 <a:latin typeface="Microsoft JhengHei"/>
               </a:rPr>
-              <a:t>示範案例：廢棄物清理法亂丟煙蒂案，20 頁卷宗＋影片 — 90 秒分類、2 分鐘出五項結果</a:t>
+              <a:t>示範案例：亂丟煙蒂案（廢清法）。20 頁卷宗加一段影片，90 秒分好類，2 分鐘出分析。</a:t>
             </a:r>
           </a:p>
         </p:txBody>
@@ -15728,7 +15728,7 @@
                 </a:solidFill>
                 <a:latin typeface="Microsoft JhengHei"/>
               </a:rPr>
-              <a:t>07 ／ 附帶的便利</a:t>
+              <a:t>07 ／ 順手做到的事</a:t>
             </a:r>
           </a:p>
         </p:txBody>
@@ -15763,7 +15763,7 @@
                 </a:solidFill>
                 <a:latin typeface="Microsoft JhengHei"/>
               </a:rPr>
-              <a:t>卷宗不必先整理，系統自己分類</a:t>
+              <a:t>卷宗照原樣丟進來就好</a:t>
             </a:r>
           </a:p>
         </p:txBody>
@@ -16316,7 +16316,7 @@
                 </a:solidFill>
                 <a:latin typeface="Microsoft JhengHei"/>
               </a:rPr>
-              <a:t>亂檔名 20 份全部分對</a:t>
+              <a:t>20 份亂檔名，20 份分對</a:t>
             </a:r>
           </a:p>
         </p:txBody>
@@ -16555,7 +16555,7 @@
                 </a:solidFill>
                 <a:latin typeface="Microsoft JhengHei"/>
               </a:rPr>
-              <a:t>承辦人不必先整理檔名或格式，系統看內容分類；分錯了在畫面上改，會留下紀錄。</a:t>
+              <a:t>不用改檔名、不用轉格式；分錯了點一下就改，改動有紀錄。</a:t>
             </a:r>
           </a:p>
         </p:txBody>
@@ -16731,7 +16731,7 @@
                 </a:solidFill>
                 <a:latin typeface="Microsoft JhengHei"/>
               </a:rPr>
-              <a:t>一台 EC2 ＋ Bedrock、S3、DynamoDB，全在允許清單內</a:t>
+              <a:t>一台 EC2，三個 AWS 服務</a:t>
             </a:r>
           </a:p>
         </p:txBody>
@@ -16874,6 +16874,41 @@
           </a:prstGeom>
         </p:spPr>
       </p:pic>
+      <p:sp>
+        <p:nvSpPr>
+          <p:cNvPr id="10" name="TextBox 9"/>
+          <p:cNvSpPr txBox="1"/>
+          <p:nvPr/>
+        </p:nvSpPr>
+        <p:spPr>
+          <a:xfrm>
+            <a:off x="7863840" y="384048"/>
+            <a:ext cx="3657600" cy="274320"/>
+          </a:xfrm>
+          <a:prstGeom prst="rect">
+            <a:avLst/>
+          </a:prstGeom>
+          <a:noFill/>
+        </p:spPr>
+        <p:txBody>
+          <a:bodyPr wrap="square" anchor="t" lIns="45720" rIns="45720" tIns="27432" bIns="27432">
+            <a:spAutoFit/>
+          </a:bodyPr>
+          <a:lstStyle/>
+          <a:p>
+            <a:pPr algn="r"/>
+            <a:r>
+              <a:rPr sz="1100" b="0">
+                <a:solidFill>
+                  <a:srgbClr val="8A93A0"/>
+                </a:solidFill>
+                <a:latin typeface="Microsoft JhengHei"/>
+              </a:rPr>
+              <a:t>全部在競賽允許清單內</a:t>
+            </a:r>
+          </a:p>
+        </p:txBody>
+      </p:sp>
     </p:spTree>
   </p:cSld>
   <p:clrMapOvr>

--- a/docs/提案/提案簡報-訴願智審臺.pptx
+++ b/docs/提案/提案簡報-訴願智審臺.pptx
@@ -3412,7 +3412,7 @@
                 </a:solidFill>
                 <a:latin typeface="Microsoft JhengHei"/>
               </a:rPr>
-              <a:t>例行的比對交給 AI，證據攤在眼前，決定仍在承辦人手上。</a:t>
+              <a:t>比對交給 AI，證據留給眼睛，判斷留給承辦人。</a:t>
             </a:r>
           </a:p>
         </p:txBody>
@@ -9316,7 +9316,7 @@
                 </a:solidFill>
                 <a:latin typeface="Microsoft JhengHei"/>
               </a:rPr>
-              <a:t>輔助，不取代</a:t>
+              <a:t>輔助判斷，不代為決定</a:t>
             </a:r>
           </a:p>
         </p:txBody>
@@ -9450,7 +9450,7 @@
                 </a:solidFill>
                 <a:latin typeface="Microsoft JhengHei"/>
               </a:rPr>
-              <a:t>每一步看得見</a:t>
+              <a:t>每一步透明，每一步可修</a:t>
             </a:r>
           </a:p>
         </p:txBody>
@@ -9584,7 +9584,7 @@
                 </a:solidFill>
                 <a:latin typeface="Microsoft JhengHei"/>
               </a:rPr>
-              <a:t>改，就改對的那一步</a:t>
+              <a:t>修正可提、可查、可追</a:t>
             </a:r>
           </a:p>
         </p:txBody>
@@ -9894,7 +9894,7 @@
                 </a:solidFill>
                 <a:latin typeface="Microsoft JhengHei"/>
               </a:rPr>
-              <a:t>輔助，不取代</a:t>
+              <a:t>輔助判斷，不代為決定</a:t>
             </a:r>
           </a:p>
         </p:txBody>

--- a/docs/提案/提案簡報-訴願智審臺.pptx
+++ b/docs/提案/提案簡報-訴願智審臺.pptx
@@ -3425,6 +3425,41 @@
         </p:nvSpPr>
         <p:spPr>
           <a:xfrm>
+            <a:off x="914400" y="5440680"/>
+            <a:ext cx="9144000" cy="365760"/>
+          </a:xfrm>
+          <a:prstGeom prst="rect">
+            <a:avLst/>
+          </a:prstGeom>
+          <a:noFill/>
+        </p:spPr>
+        <p:txBody>
+          <a:bodyPr wrap="square" anchor="t" lIns="45720" rIns="45720" tIns="27432" bIns="27432">
+            <a:spAutoFit/>
+          </a:bodyPr>
+          <a:lstStyle/>
+          <a:p>
+            <a:pPr algn="l"/>
+            <a:r>
+              <a:rPr sz="1500" b="1">
+                <a:solidFill>
+                  <a:srgbClr val="E6EDF5"/>
+                </a:solidFill>
+                <a:latin typeface="Microsoft JhengHei"/>
+              </a:rPr>
+              <a:t>WISXXXX 親友見面會　｜　Roy ／ Kevin</a:t>
+            </a:r>
+          </a:p>
+        </p:txBody>
+      </p:sp>
+      <p:sp>
+        <p:nvSpPr>
+          <p:cNvPr id="11" name="TextBox 10"/>
+          <p:cNvSpPr txBox="1"/>
+          <p:nvPr/>
+        </p:nvSpPr>
+        <p:spPr>
+          <a:xfrm>
             <a:off x="914400" y="5943600"/>
             <a:ext cx="9144000" cy="365760"/>
           </a:xfrm>
@@ -9294,8 +9329,8 @@
         </p:nvSpPr>
         <p:spPr>
           <a:xfrm>
-            <a:off x="1965960" y="1874519"/>
-            <a:ext cx="3931920" cy="1417320"/>
+            <a:off x="1965960" y="2011680"/>
+            <a:ext cx="3931920" cy="731520"/>
           </a:xfrm>
           <a:prstGeom prst="rect">
             <a:avLst/>
@@ -9310,12 +9345,47 @@
           <a:p>
             <a:pPr algn="l"/>
             <a:r>
-              <a:rPr sz="2800" b="1">
+              <a:rPr sz="2600" b="1">
                 <a:solidFill>
                   <a:srgbClr val="16304F"/>
                 </a:solidFill>
                 <a:latin typeface="Microsoft JhengHei"/>
               </a:rPr>
+              <a:t>審卷流程自動化</a:t>
+            </a:r>
+          </a:p>
+        </p:txBody>
+      </p:sp>
+      <p:sp>
+        <p:nvSpPr>
+          <p:cNvPr id="12" name="TextBox 11"/>
+          <p:cNvSpPr txBox="1"/>
+          <p:nvPr/>
+        </p:nvSpPr>
+        <p:spPr>
+          <a:xfrm>
+            <a:off x="1965960" y="2743200"/>
+            <a:ext cx="3931920" cy="457200"/>
+          </a:xfrm>
+          <a:prstGeom prst="rect">
+            <a:avLst/>
+          </a:prstGeom>
+          <a:noFill/>
+        </p:spPr>
+        <p:txBody>
+          <a:bodyPr wrap="square" anchor="t" lIns="45720" rIns="45720" tIns="27432" bIns="27432">
+            <a:spAutoFit/>
+          </a:bodyPr>
+          <a:lstStyle/>
+          <a:p>
+            <a:pPr algn="l"/>
+            <a:r>
+              <a:rPr sz="1400" b="0">
+                <a:solidFill>
+                  <a:srgbClr val="8A5A00"/>
+                </a:solidFill>
+                <a:latin typeface="Microsoft JhengHei"/>
+              </a:rPr>
               <a:t>輔助判斷，不代為決定</a:t>
             </a:r>
           </a:p>
@@ -9323,7 +9393,7 @@
       </p:sp>
       <p:sp>
         <p:nvSpPr>
-          <p:cNvPr id="12" name="Rounded Rectangle 11"/>
+          <p:cNvPr id="13" name="Rounded Rectangle 12"/>
           <p:cNvSpPr/>
           <p:nvPr/>
         </p:nvSpPr>
@@ -9369,7 +9439,7 @@
       </p:sp>
       <p:sp>
         <p:nvSpPr>
-          <p:cNvPr id="13" name="Oval 12"/>
+          <p:cNvPr id="14" name="Oval 13"/>
           <p:cNvSpPr/>
           <p:nvPr/>
         </p:nvSpPr>
@@ -9422,7 +9492,7 @@
       </p:sp>
       <p:sp>
         <p:nvSpPr>
-          <p:cNvPr id="14" name="TextBox 13"/>
+          <p:cNvPr id="15" name="TextBox 14"/>
           <p:cNvSpPr txBox="1"/>
           <p:nvPr/>
         </p:nvSpPr>
@@ -9444,7 +9514,7 @@
           <a:p>
             <a:pPr algn="l"/>
             <a:r>
-              <a:rPr sz="2800" b="1">
+              <a:rPr sz="2600" b="1">
                 <a:solidFill>
                   <a:srgbClr val="16304F"/>
                 </a:solidFill>
@@ -9457,7 +9527,7 @@
       </p:sp>
       <p:sp>
         <p:nvSpPr>
-          <p:cNvPr id="15" name="Rounded Rectangle 14"/>
+          <p:cNvPr id="16" name="Rounded Rectangle 15"/>
           <p:cNvSpPr/>
           <p:nvPr/>
         </p:nvSpPr>
@@ -9503,7 +9573,7 @@
       </p:sp>
       <p:sp>
         <p:nvSpPr>
-          <p:cNvPr id="16" name="Oval 15"/>
+          <p:cNvPr id="17" name="Oval 16"/>
           <p:cNvSpPr/>
           <p:nvPr/>
         </p:nvSpPr>
@@ -9556,7 +9626,7 @@
       </p:sp>
       <p:sp>
         <p:nvSpPr>
-          <p:cNvPr id="17" name="TextBox 16"/>
+          <p:cNvPr id="18" name="TextBox 17"/>
           <p:cNvSpPr txBox="1"/>
           <p:nvPr/>
         </p:nvSpPr>
@@ -9578,7 +9648,7 @@
           <a:p>
             <a:pPr algn="l"/>
             <a:r>
-              <a:rPr sz="2800" b="1">
+              <a:rPr sz="2600" b="1">
                 <a:solidFill>
                   <a:srgbClr val="16304F"/>
                 </a:solidFill>
@@ -9591,7 +9661,7 @@
       </p:sp>
       <p:sp>
         <p:nvSpPr>
-          <p:cNvPr id="18" name="Rounded Rectangle 17"/>
+          <p:cNvPr id="19" name="Rounded Rectangle 18"/>
           <p:cNvSpPr/>
           <p:nvPr/>
         </p:nvSpPr>
@@ -9637,7 +9707,7 @@
       </p:sp>
       <p:sp>
         <p:nvSpPr>
-          <p:cNvPr id="19" name="Oval 18"/>
+          <p:cNvPr id="20" name="Oval 19"/>
           <p:cNvSpPr/>
           <p:nvPr/>
         </p:nvSpPr>
@@ -9690,7 +9760,7 @@
       </p:sp>
       <p:sp>
         <p:nvSpPr>
-          <p:cNvPr id="20" name="TextBox 19"/>
+          <p:cNvPr id="21" name="TextBox 20"/>
           <p:cNvSpPr txBox="1"/>
           <p:nvPr/>
         </p:nvSpPr>
@@ -9712,7 +9782,7 @@
           <a:p>
             <a:pPr algn="l"/>
             <a:r>
-              <a:rPr sz="2800" b="1">
+              <a:rPr sz="2600" b="1">
                 <a:solidFill>
                   <a:srgbClr val="16304F"/>
                 </a:solidFill>
@@ -9894,7 +9964,7 @@
                 </a:solidFill>
                 <a:latin typeface="Microsoft JhengHei"/>
               </a:rPr>
-              <a:t>輔助判斷，不代為決定</a:t>
+              <a:t>把審卷的例行工作自動化，承辦人只做判斷</a:t>
             </a:r>
           </a:p>
         </p:txBody>
@@ -10015,22 +10085,90 @@
       </p:sp>
       <p:sp>
         <p:nvSpPr>
-          <p:cNvPr id="9" name="Rounded Rectangle 8"/>
+          <p:cNvPr id="9" name="TextBox 8"/>
+          <p:cNvSpPr txBox="1"/>
+          <p:nvPr/>
+        </p:nvSpPr>
+        <p:spPr>
+          <a:xfrm>
+            <a:off x="640080" y="1207008"/>
+            <a:ext cx="7315200" cy="365760"/>
+          </a:xfrm>
+          <a:prstGeom prst="rect">
+            <a:avLst/>
+          </a:prstGeom>
+          <a:noFill/>
+        </p:spPr>
+        <p:txBody>
+          <a:bodyPr wrap="square" anchor="t" lIns="45720" rIns="45720" tIns="27432" bIns="27432">
+            <a:spAutoFit/>
+          </a:bodyPr>
+          <a:lstStyle/>
+          <a:p>
+            <a:pPr algn="l"/>
+            <a:r>
+              <a:rPr sz="1500" b="0">
+                <a:solidFill>
+                  <a:srgbClr val="8A5A00"/>
+                </a:solidFill>
+                <a:latin typeface="Microsoft JhengHei"/>
+              </a:rPr>
+              <a:t>輔助判斷，不代為決定</a:t>
+            </a:r>
+          </a:p>
+        </p:txBody>
+      </p:sp>
+      <p:sp>
+        <p:nvSpPr>
+          <p:cNvPr id="10" name="TextBox 9"/>
+          <p:cNvSpPr txBox="1"/>
+          <p:nvPr/>
+        </p:nvSpPr>
+        <p:spPr>
+          <a:xfrm>
+            <a:off x="2148840" y="1783080"/>
+            <a:ext cx="1874519" cy="365760"/>
+          </a:xfrm>
+          <a:prstGeom prst="rect">
+            <a:avLst/>
+          </a:prstGeom>
+          <a:noFill/>
+        </p:spPr>
+        <p:txBody>
+          <a:bodyPr wrap="square" anchor="t" lIns="45720" rIns="45720" tIns="27432" bIns="27432">
+            <a:spAutoFit/>
+          </a:bodyPr>
+          <a:lstStyle/>
+          <a:p>
+            <a:pPr algn="ctr"/>
+            <a:r>
+              <a:rPr sz="1250" b="1">
+                <a:solidFill>
+                  <a:srgbClr val="8A93A0"/>
+                </a:solidFill>
+                <a:latin typeface="Microsoft JhengHei"/>
+              </a:rPr>
+              <a:t>讀卷・比對</a:t>
+            </a:r>
+          </a:p>
+        </p:txBody>
+      </p:sp>
+      <p:sp>
+        <p:nvSpPr>
+          <p:cNvPr id="11" name="Rectangle 10"/>
           <p:cNvSpPr/>
           <p:nvPr/>
         </p:nvSpPr>
         <p:spPr>
           <a:xfrm>
-            <a:off x="640080" y="1508760"/>
-            <a:ext cx="5303520" cy="4480560"/>
-          </a:xfrm>
-          <a:prstGeom prst="roundRect">
-            <a:avLst>
-              <a:gd name="adj" fmla="val 6000"/>
-            </a:avLst>
-          </a:prstGeom>
-          <a:solidFill>
-            <a:srgbClr val="F4F6F9"/>
+            <a:off x="2148840" y="2148840"/>
+            <a:ext cx="1874519" cy="18288"/>
+          </a:xfrm>
+          <a:prstGeom prst="rect">
+            <a:avLst/>
+          </a:prstGeom>
+          <a:solidFill>
+            <a:srgbClr val="E6EAF0"/>
           </a:solidFill>
           <a:ln>
             <a:noFill/>
@@ -10061,14 +10199,14 @@
       </p:sp>
       <p:sp>
         <p:nvSpPr>
-          <p:cNvPr id="10" name="TextBox 9"/>
-          <p:cNvSpPr txBox="1"/>
-          <p:nvPr/>
-        </p:nvSpPr>
-        <p:spPr>
-          <a:xfrm>
-            <a:off x="914400" y="1737360"/>
-            <a:ext cx="4846320" cy="457200"/>
+          <p:cNvPr id="12" name="TextBox 11"/>
+          <p:cNvSpPr txBox="1"/>
+          <p:nvPr/>
+        </p:nvSpPr>
+        <p:spPr>
+          <a:xfrm>
+            <a:off x="4133087" y="1783080"/>
+            <a:ext cx="1874519" cy="365760"/>
           </a:xfrm>
           <a:prstGeom prst="rect">
             <a:avLst/>
@@ -10081,72 +10219,35 @@
           </a:bodyPr>
           <a:lstStyle/>
           <a:p>
-            <a:pPr algn="l"/>
-            <a:r>
-              <a:rPr sz="2200" b="1">
-                <a:solidFill>
-                  <a:srgbClr val="5B6573"/>
-                </a:solidFill>
-                <a:latin typeface="Microsoft JhengHei"/>
-              </a:rPr>
-              <a:t>✕  AI 只給一個結論</a:t>
-            </a:r>
-          </a:p>
-        </p:txBody>
-      </p:sp>
-      <p:sp>
-        <p:nvSpPr>
-          <p:cNvPr id="11" name="TextBox 10"/>
-          <p:cNvSpPr txBox="1"/>
-          <p:nvPr/>
-        </p:nvSpPr>
-        <p:spPr>
-          <a:xfrm>
-            <a:off x="914400" y="2240280"/>
-            <a:ext cx="4846320" cy="822960"/>
-          </a:xfrm>
-          <a:prstGeom prst="rect">
-            <a:avLst/>
-          </a:prstGeom>
-          <a:noFill/>
-        </p:spPr>
-        <p:txBody>
-          <a:bodyPr wrap="square" anchor="t" lIns="45720" rIns="45720" tIns="27432" bIns="27432">
-            <a:spAutoFit/>
-          </a:bodyPr>
-          <a:lstStyle/>
-          <a:p>
-            <a:pPr algn="l"/>
-            <a:r>
-              <a:rPr sz="1450" b="0">
-                <a:solidFill>
-                  <a:srgbClr val="5B6573"/>
-                </a:solidFill>
-                <a:latin typeface="Microsoft JhengHei"/>
-              </a:rPr>
-              <a:t>「本案應駁回。」——信也不是，不信也不是。</a:t>
-            </a:r>
-          </a:p>
-        </p:txBody>
-      </p:sp>
-      <p:sp>
-        <p:nvSpPr>
-          <p:cNvPr id="12" name="Rounded Rectangle 11"/>
+            <a:pPr algn="ctr"/>
+            <a:r>
+              <a:rPr sz="1250" b="1">
+                <a:solidFill>
+                  <a:srgbClr val="8A93A0"/>
+                </a:solidFill>
+                <a:latin typeface="Microsoft JhengHei"/>
+              </a:rPr>
+              <a:t>查法條・函釋</a:t>
+            </a:r>
+          </a:p>
+        </p:txBody>
+      </p:sp>
+      <p:sp>
+        <p:nvSpPr>
+          <p:cNvPr id="13" name="Rectangle 12"/>
           <p:cNvSpPr/>
           <p:nvPr/>
         </p:nvSpPr>
         <p:spPr>
           <a:xfrm>
-            <a:off x="1188720" y="3931920"/>
-            <a:ext cx="4206240" cy="1097280"/>
-          </a:xfrm>
-          <a:prstGeom prst="roundRect">
-            <a:avLst>
-              <a:gd name="adj" fmla="val 8000"/>
-            </a:avLst>
-          </a:prstGeom>
-          <a:solidFill>
-            <a:srgbClr val="DDE3EA"/>
+            <a:off x="4133087" y="2148840"/>
+            <a:ext cx="1874519" cy="18288"/>
+          </a:xfrm>
+          <a:prstGeom prst="rect">
+            <a:avLst/>
+          </a:prstGeom>
+          <a:solidFill>
+            <a:srgbClr val="E6EAF0"/>
           </a:solidFill>
           <a:ln>
             <a:noFill/>
@@ -10177,49 +10278,14 @@
       </p:sp>
       <p:sp>
         <p:nvSpPr>
-          <p:cNvPr id="13" name="TextBox 12"/>
-          <p:cNvSpPr txBox="1"/>
-          <p:nvPr/>
-        </p:nvSpPr>
-        <p:spPr>
-          <a:xfrm>
-            <a:off x="1188720" y="3931920"/>
-            <a:ext cx="4206240" cy="1097280"/>
-          </a:xfrm>
-          <a:prstGeom prst="rect">
-            <a:avLst/>
-          </a:prstGeom>
-          <a:noFill/>
-        </p:spPr>
-        <p:txBody>
-          <a:bodyPr wrap="square" anchor="ctr" lIns="45720" rIns="45720" tIns="27432" bIns="27432">
-            <a:spAutoFit/>
-          </a:bodyPr>
-          <a:lstStyle/>
-          <a:p>
-            <a:pPr algn="ctr"/>
-            <a:r>
-              <a:rPr sz="2200" b="1">
-                <a:solidFill>
-                  <a:srgbClr val="5B6573"/>
-                </a:solidFill>
-                <a:latin typeface="Microsoft JhengHei"/>
-              </a:rPr>
-              <a:t>駁回</a:t>
-            </a:r>
-          </a:p>
-        </p:txBody>
-      </p:sp>
-      <p:sp>
-        <p:nvSpPr>
           <p:cNvPr id="14" name="TextBox 13"/>
           <p:cNvSpPr txBox="1"/>
           <p:nvPr/>
         </p:nvSpPr>
         <p:spPr>
           <a:xfrm>
-            <a:off x="1188720" y="5074920"/>
-            <a:ext cx="4206240" cy="365760"/>
+            <a:off x="6117336" y="1783080"/>
+            <a:ext cx="1874519" cy="365760"/>
           </a:xfrm>
           <a:prstGeom prst="rect">
             <a:avLst/>
@@ -10234,35 +10300,33 @@
           <a:p>
             <a:pPr algn="ctr"/>
             <a:r>
-              <a:rPr sz="1100" b="0">
+              <a:rPr sz="1250" b="1">
                 <a:solidFill>
                   <a:srgbClr val="8A93A0"/>
                 </a:solidFill>
                 <a:latin typeface="Microsoft JhengHei"/>
               </a:rPr>
-              <a:t>黑盒</a:t>
-            </a:r>
-          </a:p>
-        </p:txBody>
-      </p:sp>
-      <p:sp>
-        <p:nvSpPr>
-          <p:cNvPr id="15" name="Rounded Rectangle 14"/>
+              <a:t>找相似案例</a:t>
+            </a:r>
+          </a:p>
+        </p:txBody>
+      </p:sp>
+      <p:sp>
+        <p:nvSpPr>
+          <p:cNvPr id="15" name="Rectangle 14"/>
           <p:cNvSpPr/>
           <p:nvPr/>
         </p:nvSpPr>
         <p:spPr>
           <a:xfrm>
-            <a:off x="6263640" y="1508760"/>
-            <a:ext cx="5303520" cy="4480560"/>
-          </a:xfrm>
-          <a:prstGeom prst="roundRect">
-            <a:avLst>
-              <a:gd name="adj" fmla="val 6000"/>
-            </a:avLst>
-          </a:prstGeom>
-          <a:solidFill>
-            <a:srgbClr val="16304F"/>
+            <a:off x="6117336" y="2148840"/>
+            <a:ext cx="1874519" cy="18288"/>
+          </a:xfrm>
+          <a:prstGeom prst="rect">
+            <a:avLst/>
+          </a:prstGeom>
+          <a:solidFill>
+            <a:srgbClr val="E6EAF0"/>
           </a:solidFill>
           <a:ln>
             <a:noFill/>
@@ -10299,8 +10363,8 @@
         </p:nvSpPr>
         <p:spPr>
           <a:xfrm>
-            <a:off x="6537960" y="1737360"/>
-            <a:ext cx="4846320" cy="457200"/>
+            <a:off x="8101583" y="1783080"/>
+            <a:ext cx="1874519" cy="365760"/>
           </a:xfrm>
           <a:prstGeom prst="rect">
             <a:avLst/>
@@ -10313,72 +10377,35 @@
           </a:bodyPr>
           <a:lstStyle/>
           <a:p>
-            <a:pPr algn="l"/>
-            <a:r>
-              <a:rPr sz="2200" b="1">
-                <a:solidFill>
-                  <a:srgbClr val="FFFFFF"/>
-                </a:solidFill>
-                <a:latin typeface="Microsoft JhengHei"/>
-              </a:rPr>
-              <a:t>✓  AI 把選項和證據攤在眼前</a:t>
-            </a:r>
-          </a:p>
-        </p:txBody>
-      </p:sp>
-      <p:sp>
-        <p:nvSpPr>
-          <p:cNvPr id="17" name="TextBox 16"/>
-          <p:cNvSpPr txBox="1"/>
-          <p:nvPr/>
-        </p:nvSpPr>
-        <p:spPr>
-          <a:xfrm>
-            <a:off x="6537960" y="2240280"/>
-            <a:ext cx="4846320" cy="914400"/>
-          </a:xfrm>
-          <a:prstGeom prst="rect">
-            <a:avLst/>
-          </a:prstGeom>
-          <a:noFill/>
-        </p:spPr>
-        <p:txBody>
-          <a:bodyPr wrap="square" anchor="t" lIns="45720" rIns="45720" tIns="27432" bIns="27432">
-            <a:spAutoFit/>
-          </a:bodyPr>
-          <a:lstStyle/>
-          <a:p>
-            <a:pPr algn="l"/>
-            <a:r>
-              <a:rPr sz="1450" b="0">
-                <a:solidFill>
-                  <a:srgbClr val="E6EDF5"/>
-                </a:solidFill>
-                <a:latin typeface="Microsoft JhengHei"/>
-              </a:rPr>
-              <a:t>每個爭點：AI 怎麼認、憑什麼認、卷證在哪一頁；採信哪一方會有什麼後果——都寫清楚，然後交給承辦人。</a:t>
-            </a:r>
-          </a:p>
-        </p:txBody>
-      </p:sp>
-      <p:sp>
-        <p:nvSpPr>
-          <p:cNvPr id="18" name="Rounded Rectangle 17"/>
+            <a:pPr algn="ctr"/>
+            <a:r>
+              <a:rPr sz="1250" b="1">
+                <a:solidFill>
+                  <a:srgbClr val="8A93A0"/>
+                </a:solidFill>
+                <a:latin typeface="Microsoft JhengHei"/>
+              </a:rPr>
+              <a:t>撰擬草稿</a:t>
+            </a:r>
+          </a:p>
+        </p:txBody>
+      </p:sp>
+      <p:sp>
+        <p:nvSpPr>
+          <p:cNvPr id="17" name="Rectangle 16"/>
           <p:cNvSpPr/>
           <p:nvPr/>
         </p:nvSpPr>
         <p:spPr>
           <a:xfrm>
-            <a:off x="6537960" y="3520440"/>
-            <a:ext cx="4754880" cy="457200"/>
-          </a:xfrm>
-          <a:prstGeom prst="roundRect">
-            <a:avLst>
-              <a:gd name="adj" fmla="val 8000"/>
-            </a:avLst>
-          </a:prstGeom>
-          <a:solidFill>
-            <a:srgbClr val="24466F"/>
+            <a:off x="8101583" y="2148840"/>
+            <a:ext cx="1874519" cy="18288"/>
+          </a:xfrm>
+          <a:prstGeom prst="rect">
+            <a:avLst/>
+          </a:prstGeom>
+          <a:solidFill>
+            <a:srgbClr val="E6EAF0"/>
           </a:solidFill>
           <a:ln>
             <a:noFill/>
@@ -10409,57 +10436,55 @@
       </p:sp>
       <p:sp>
         <p:nvSpPr>
-          <p:cNvPr id="19" name="TextBox 18"/>
-          <p:cNvSpPr txBox="1"/>
-          <p:nvPr/>
-        </p:nvSpPr>
-        <p:spPr>
-          <a:xfrm>
-            <a:off x="6629400" y="3520440"/>
-            <a:ext cx="4572000" cy="457200"/>
-          </a:xfrm>
-          <a:prstGeom prst="rect">
-            <a:avLst/>
-          </a:prstGeom>
-          <a:noFill/>
-        </p:spPr>
-        <p:txBody>
-          <a:bodyPr wrap="square" anchor="ctr" lIns="45720" rIns="45720" tIns="27432" bIns="27432">
-            <a:spAutoFit/>
-          </a:bodyPr>
-          <a:lstStyle/>
-          <a:p>
-            <a:pPr algn="l"/>
-            <a:r>
-              <a:rPr sz="1250" b="0">
-                <a:solidFill>
-                  <a:srgbClr val="FFFFFF"/>
-                </a:solidFill>
-                <a:latin typeface="Microsoft JhengHei"/>
-              </a:rPr>
-              <a:t>爭點 1　採信機關　→ 送達證書 p.2「本人簽收」</a:t>
-            </a:r>
-          </a:p>
-        </p:txBody>
-      </p:sp>
-      <p:sp>
-        <p:nvSpPr>
-          <p:cNvPr id="20" name="Rounded Rectangle 19"/>
+          <p:cNvPr id="18" name="TextBox 17"/>
+          <p:cNvSpPr txBox="1"/>
+          <p:nvPr/>
+        </p:nvSpPr>
+        <p:spPr>
+          <a:xfrm>
+            <a:off x="10085832" y="1783080"/>
+            <a:ext cx="1874519" cy="365760"/>
+          </a:xfrm>
+          <a:prstGeom prst="rect">
+            <a:avLst/>
+          </a:prstGeom>
+          <a:noFill/>
+        </p:spPr>
+        <p:txBody>
+          <a:bodyPr wrap="square" anchor="t" lIns="45720" rIns="45720" tIns="27432" bIns="27432">
+            <a:spAutoFit/>
+          </a:bodyPr>
+          <a:lstStyle/>
+          <a:p>
+            <a:pPr algn="ctr"/>
+            <a:r>
+              <a:rPr sz="1250" b="1">
+                <a:solidFill>
+                  <a:srgbClr val="8A93A0"/>
+                </a:solidFill>
+                <a:latin typeface="Microsoft JhengHei"/>
+              </a:rPr>
+              <a:t>審核・決定</a:t>
+            </a:r>
+          </a:p>
+        </p:txBody>
+      </p:sp>
+      <p:sp>
+        <p:nvSpPr>
+          <p:cNvPr id="19" name="Rectangle 18"/>
           <p:cNvSpPr/>
           <p:nvPr/>
         </p:nvSpPr>
         <p:spPr>
           <a:xfrm>
-            <a:off x="6537960" y="4087368"/>
-            <a:ext cx="4754880" cy="457200"/>
-          </a:xfrm>
-          <a:prstGeom prst="roundRect">
-            <a:avLst>
-              <a:gd name="adj" fmla="val 8000"/>
-            </a:avLst>
-          </a:prstGeom>
-          <a:solidFill>
-            <a:srgbClr val="24466F"/>
+            <a:off x="10085832" y="2148840"/>
+            <a:ext cx="1874519" cy="18288"/>
+          </a:xfrm>
+          <a:prstGeom prst="rect">
+            <a:avLst/>
+          </a:prstGeom>
+          <a:solidFill>
+            <a:srgbClr val="E6EAF0"/>
           </a:solidFill>
           <a:ln>
             <a:noFill/>
@@ -10490,14 +10515,14 @@
       </p:sp>
       <p:sp>
         <p:nvSpPr>
-          <p:cNvPr id="21" name="TextBox 20"/>
-          <p:cNvSpPr txBox="1"/>
-          <p:nvPr/>
-        </p:nvSpPr>
-        <p:spPr>
-          <a:xfrm>
-            <a:off x="6629400" y="4087368"/>
-            <a:ext cx="4572000" cy="457200"/>
+          <p:cNvPr id="20" name="TextBox 19"/>
+          <p:cNvSpPr txBox="1"/>
+          <p:nvPr/>
+        </p:nvSpPr>
+        <p:spPr>
+          <a:xfrm>
+            <a:off x="640080" y="2331720"/>
+            <a:ext cx="1463040" cy="1188720"/>
           </a:xfrm>
           <a:prstGeom prst="rect">
             <a:avLst/>
@@ -10512,27 +10537,27 @@
           <a:p>
             <a:pPr algn="l"/>
             <a:r>
-              <a:rPr sz="1250" b="0">
-                <a:solidFill>
-                  <a:srgbClr val="FFFFFF"/>
-                </a:solidFill>
-                <a:latin typeface="Microsoft JhengHei"/>
-              </a:rPr>
-              <a:t>爭點 2　採信訴願人 → 影片 00:14「未見拋擲」</a:t>
-            </a:r>
-          </a:p>
-        </p:txBody>
-      </p:sp>
-      <p:sp>
-        <p:nvSpPr>
-          <p:cNvPr id="22" name="Rounded Rectangle 21"/>
+              <a:rPr sz="1800" b="1">
+                <a:solidFill>
+                  <a:srgbClr val="16304F"/>
+                </a:solidFill>
+                <a:latin typeface="Microsoft JhengHei"/>
+              </a:rPr>
+              <a:t>現在</a:t>
+            </a:r>
+          </a:p>
+        </p:txBody>
+      </p:sp>
+      <p:sp>
+        <p:nvSpPr>
+          <p:cNvPr id="21" name="Rounded Rectangle 20"/>
           <p:cNvSpPr/>
           <p:nvPr/>
         </p:nvSpPr>
         <p:spPr>
           <a:xfrm>
-            <a:off x="6537960" y="4654296"/>
-            <a:ext cx="4754880" cy="457200"/>
+            <a:off x="2148840" y="2331720"/>
+            <a:ext cx="1874519" cy="1188720"/>
           </a:xfrm>
           <a:prstGeom prst="roundRect">
             <a:avLst>
@@ -10540,7 +10565,7 @@
             </a:avLst>
           </a:prstGeom>
           <a:solidFill>
-            <a:srgbClr val="D98E04"/>
+            <a:srgbClr val="F4F6F9"/>
           </a:solidFill>
           <a:ln>
             <a:noFill/>
@@ -10571,14 +10596,14 @@
       </p:sp>
       <p:sp>
         <p:nvSpPr>
-          <p:cNvPr id="23" name="TextBox 22"/>
-          <p:cNvSpPr txBox="1"/>
-          <p:nvPr/>
-        </p:nvSpPr>
-        <p:spPr>
-          <a:xfrm>
-            <a:off x="6629400" y="4654296"/>
-            <a:ext cx="4572000" cy="457200"/>
+          <p:cNvPr id="22" name="TextBox 21"/>
+          <p:cNvSpPr txBox="1"/>
+          <p:nvPr/>
+        </p:nvSpPr>
+        <p:spPr>
+          <a:xfrm>
+            <a:off x="2148840" y="2331720"/>
+            <a:ext cx="1874519" cy="1188720"/>
           </a:xfrm>
           <a:prstGeom prst="rect">
             <a:avLst/>
@@ -10591,15 +10616,902 @@
           </a:bodyPr>
           <a:lstStyle/>
           <a:p>
+            <a:pPr algn="ctr"/>
+            <a:r>
+              <a:rPr sz="2000" b="1">
+                <a:solidFill>
+                  <a:srgbClr val="8A93A0"/>
+                </a:solidFill>
+                <a:latin typeface="Microsoft JhengHei"/>
+              </a:rPr>
+              <a:t>人工</a:t>
+            </a:r>
+          </a:p>
+        </p:txBody>
+      </p:sp>
+      <p:sp>
+        <p:nvSpPr>
+          <p:cNvPr id="23" name="Rounded Rectangle 22"/>
+          <p:cNvSpPr/>
+          <p:nvPr/>
+        </p:nvSpPr>
+        <p:spPr>
+          <a:xfrm>
+            <a:off x="4133087" y="2331720"/>
+            <a:ext cx="1874519" cy="1188720"/>
+          </a:xfrm>
+          <a:prstGeom prst="roundRect">
+            <a:avLst>
+              <a:gd name="adj" fmla="val 8000"/>
+            </a:avLst>
+          </a:prstGeom>
+          <a:solidFill>
+            <a:srgbClr val="F4F6F9"/>
+          </a:solidFill>
+          <a:ln>
+            <a:noFill/>
+          </a:ln>
+          <a:effectLst/>
+        </p:spPr>
+        <p:style>
+          <a:lnRef idx="1">
+            <a:schemeClr val="accent1"/>
+          </a:lnRef>
+          <a:fillRef idx="3">
+            <a:schemeClr val="accent1"/>
+          </a:fillRef>
+          <a:effectRef idx="2">
+            <a:schemeClr val="accent1"/>
+          </a:effectRef>
+          <a:fontRef idx="minor">
+            <a:schemeClr val="lt1"/>
+          </a:fontRef>
+        </p:style>
+        <p:txBody>
+          <a:bodyPr rtlCol="0" anchor="ctr"/>
+          <a:lstStyle/>
+          <a:p>
+            <a:pPr algn="ctr"/>
+          </a:p>
+        </p:txBody>
+      </p:sp>
+      <p:sp>
+        <p:nvSpPr>
+          <p:cNvPr id="24" name="TextBox 23"/>
+          <p:cNvSpPr txBox="1"/>
+          <p:nvPr/>
+        </p:nvSpPr>
+        <p:spPr>
+          <a:xfrm>
+            <a:off x="4133087" y="2331720"/>
+            <a:ext cx="1874519" cy="1188720"/>
+          </a:xfrm>
+          <a:prstGeom prst="rect">
+            <a:avLst/>
+          </a:prstGeom>
+          <a:noFill/>
+        </p:spPr>
+        <p:txBody>
+          <a:bodyPr wrap="square" anchor="ctr" lIns="45720" rIns="45720" tIns="27432" bIns="27432">
+            <a:spAutoFit/>
+          </a:bodyPr>
+          <a:lstStyle/>
+          <a:p>
+            <a:pPr algn="ctr"/>
+            <a:r>
+              <a:rPr sz="2000" b="1">
+                <a:solidFill>
+                  <a:srgbClr val="8A93A0"/>
+                </a:solidFill>
+                <a:latin typeface="Microsoft JhengHei"/>
+              </a:rPr>
+              <a:t>人工</a:t>
+            </a:r>
+          </a:p>
+        </p:txBody>
+      </p:sp>
+      <p:sp>
+        <p:nvSpPr>
+          <p:cNvPr id="25" name="Rounded Rectangle 24"/>
+          <p:cNvSpPr/>
+          <p:nvPr/>
+        </p:nvSpPr>
+        <p:spPr>
+          <a:xfrm>
+            <a:off x="6117336" y="2331720"/>
+            <a:ext cx="1874519" cy="1188720"/>
+          </a:xfrm>
+          <a:prstGeom prst="roundRect">
+            <a:avLst>
+              <a:gd name="adj" fmla="val 8000"/>
+            </a:avLst>
+          </a:prstGeom>
+          <a:solidFill>
+            <a:srgbClr val="F4F6F9"/>
+          </a:solidFill>
+          <a:ln>
+            <a:noFill/>
+          </a:ln>
+          <a:effectLst/>
+        </p:spPr>
+        <p:style>
+          <a:lnRef idx="1">
+            <a:schemeClr val="accent1"/>
+          </a:lnRef>
+          <a:fillRef idx="3">
+            <a:schemeClr val="accent1"/>
+          </a:fillRef>
+          <a:effectRef idx="2">
+            <a:schemeClr val="accent1"/>
+          </a:effectRef>
+          <a:fontRef idx="minor">
+            <a:schemeClr val="lt1"/>
+          </a:fontRef>
+        </p:style>
+        <p:txBody>
+          <a:bodyPr rtlCol="0" anchor="ctr"/>
+          <a:lstStyle/>
+          <a:p>
+            <a:pPr algn="ctr"/>
+          </a:p>
+        </p:txBody>
+      </p:sp>
+      <p:sp>
+        <p:nvSpPr>
+          <p:cNvPr id="26" name="TextBox 25"/>
+          <p:cNvSpPr txBox="1"/>
+          <p:nvPr/>
+        </p:nvSpPr>
+        <p:spPr>
+          <a:xfrm>
+            <a:off x="6117336" y="2331720"/>
+            <a:ext cx="1874519" cy="1188720"/>
+          </a:xfrm>
+          <a:prstGeom prst="rect">
+            <a:avLst/>
+          </a:prstGeom>
+          <a:noFill/>
+        </p:spPr>
+        <p:txBody>
+          <a:bodyPr wrap="square" anchor="ctr" lIns="45720" rIns="45720" tIns="27432" bIns="27432">
+            <a:spAutoFit/>
+          </a:bodyPr>
+          <a:lstStyle/>
+          <a:p>
+            <a:pPr algn="ctr"/>
+            <a:r>
+              <a:rPr sz="2000" b="1">
+                <a:solidFill>
+                  <a:srgbClr val="8A93A0"/>
+                </a:solidFill>
+                <a:latin typeface="Microsoft JhengHei"/>
+              </a:rPr>
+              <a:t>人工</a:t>
+            </a:r>
+          </a:p>
+        </p:txBody>
+      </p:sp>
+      <p:sp>
+        <p:nvSpPr>
+          <p:cNvPr id="27" name="Rounded Rectangle 26"/>
+          <p:cNvSpPr/>
+          <p:nvPr/>
+        </p:nvSpPr>
+        <p:spPr>
+          <a:xfrm>
+            <a:off x="8101583" y="2331720"/>
+            <a:ext cx="1874519" cy="1188720"/>
+          </a:xfrm>
+          <a:prstGeom prst="roundRect">
+            <a:avLst>
+              <a:gd name="adj" fmla="val 8000"/>
+            </a:avLst>
+          </a:prstGeom>
+          <a:solidFill>
+            <a:srgbClr val="F4F6F9"/>
+          </a:solidFill>
+          <a:ln>
+            <a:noFill/>
+          </a:ln>
+          <a:effectLst/>
+        </p:spPr>
+        <p:style>
+          <a:lnRef idx="1">
+            <a:schemeClr val="accent1"/>
+          </a:lnRef>
+          <a:fillRef idx="3">
+            <a:schemeClr val="accent1"/>
+          </a:fillRef>
+          <a:effectRef idx="2">
+            <a:schemeClr val="accent1"/>
+          </a:effectRef>
+          <a:fontRef idx="minor">
+            <a:schemeClr val="lt1"/>
+          </a:fontRef>
+        </p:style>
+        <p:txBody>
+          <a:bodyPr rtlCol="0" anchor="ctr"/>
+          <a:lstStyle/>
+          <a:p>
+            <a:pPr algn="ctr"/>
+          </a:p>
+        </p:txBody>
+      </p:sp>
+      <p:sp>
+        <p:nvSpPr>
+          <p:cNvPr id="28" name="TextBox 27"/>
+          <p:cNvSpPr txBox="1"/>
+          <p:nvPr/>
+        </p:nvSpPr>
+        <p:spPr>
+          <a:xfrm>
+            <a:off x="8101583" y="2331720"/>
+            <a:ext cx="1874519" cy="1188720"/>
+          </a:xfrm>
+          <a:prstGeom prst="rect">
+            <a:avLst/>
+          </a:prstGeom>
+          <a:noFill/>
+        </p:spPr>
+        <p:txBody>
+          <a:bodyPr wrap="square" anchor="ctr" lIns="45720" rIns="45720" tIns="27432" bIns="27432">
+            <a:spAutoFit/>
+          </a:bodyPr>
+          <a:lstStyle/>
+          <a:p>
+            <a:pPr algn="ctr"/>
+            <a:r>
+              <a:rPr sz="2000" b="1">
+                <a:solidFill>
+                  <a:srgbClr val="8A93A0"/>
+                </a:solidFill>
+                <a:latin typeface="Microsoft JhengHei"/>
+              </a:rPr>
+              <a:t>人工</a:t>
+            </a:r>
+          </a:p>
+        </p:txBody>
+      </p:sp>
+      <p:sp>
+        <p:nvSpPr>
+          <p:cNvPr id="29" name="Rounded Rectangle 28"/>
+          <p:cNvSpPr/>
+          <p:nvPr/>
+        </p:nvSpPr>
+        <p:spPr>
+          <a:xfrm>
+            <a:off x="10085832" y="2331720"/>
+            <a:ext cx="1874519" cy="1188720"/>
+          </a:xfrm>
+          <a:prstGeom prst="roundRect">
+            <a:avLst>
+              <a:gd name="adj" fmla="val 8000"/>
+            </a:avLst>
+          </a:prstGeom>
+          <a:solidFill>
+            <a:srgbClr val="F4F6F9"/>
+          </a:solidFill>
+          <a:ln>
+            <a:noFill/>
+          </a:ln>
+          <a:effectLst/>
+        </p:spPr>
+        <p:style>
+          <a:lnRef idx="1">
+            <a:schemeClr val="accent1"/>
+          </a:lnRef>
+          <a:fillRef idx="3">
+            <a:schemeClr val="accent1"/>
+          </a:fillRef>
+          <a:effectRef idx="2">
+            <a:schemeClr val="accent1"/>
+          </a:effectRef>
+          <a:fontRef idx="minor">
+            <a:schemeClr val="lt1"/>
+          </a:fontRef>
+        </p:style>
+        <p:txBody>
+          <a:bodyPr rtlCol="0" anchor="ctr"/>
+          <a:lstStyle/>
+          <a:p>
+            <a:pPr algn="ctr"/>
+          </a:p>
+        </p:txBody>
+      </p:sp>
+      <p:sp>
+        <p:nvSpPr>
+          <p:cNvPr id="30" name="TextBox 29"/>
+          <p:cNvSpPr txBox="1"/>
+          <p:nvPr/>
+        </p:nvSpPr>
+        <p:spPr>
+          <a:xfrm>
+            <a:off x="10085832" y="2331720"/>
+            <a:ext cx="1874519" cy="1188720"/>
+          </a:xfrm>
+          <a:prstGeom prst="rect">
+            <a:avLst/>
+          </a:prstGeom>
+          <a:noFill/>
+        </p:spPr>
+        <p:txBody>
+          <a:bodyPr wrap="square" anchor="ctr" lIns="45720" rIns="45720" tIns="27432" bIns="27432">
+            <a:spAutoFit/>
+          </a:bodyPr>
+          <a:lstStyle/>
+          <a:p>
+            <a:pPr algn="ctr"/>
+            <a:r>
+              <a:rPr sz="2000" b="1">
+                <a:solidFill>
+                  <a:srgbClr val="8A93A0"/>
+                </a:solidFill>
+                <a:latin typeface="Microsoft JhengHei"/>
+              </a:rPr>
+              <a:t>人工</a:t>
+            </a:r>
+          </a:p>
+        </p:txBody>
+      </p:sp>
+      <p:sp>
+        <p:nvSpPr>
+          <p:cNvPr id="31" name="TextBox 30"/>
+          <p:cNvSpPr txBox="1"/>
+          <p:nvPr/>
+        </p:nvSpPr>
+        <p:spPr>
+          <a:xfrm>
+            <a:off x="640080" y="3749039"/>
+            <a:ext cx="1463040" cy="1188720"/>
+          </a:xfrm>
+          <a:prstGeom prst="rect">
+            <a:avLst/>
+          </a:prstGeom>
+          <a:noFill/>
+        </p:spPr>
+        <p:txBody>
+          <a:bodyPr wrap="square" anchor="ctr" lIns="45720" rIns="45720" tIns="27432" bIns="27432">
+            <a:spAutoFit/>
+          </a:bodyPr>
+          <a:lstStyle/>
+          <a:p>
             <a:pPr algn="l"/>
             <a:r>
-              <a:rPr sz="1250" b="1">
+              <a:rPr sz="1800" b="1">
                 <a:solidFill>
                   <a:srgbClr val="16304F"/>
                 </a:solidFill>
                 <a:latin typeface="Microsoft JhengHei"/>
               </a:rPr>
-              <a:t>承辦人點頭，才進草稿</a:t>
+              <a:t>訴願智審臺</a:t>
+            </a:r>
+          </a:p>
+        </p:txBody>
+      </p:sp>
+      <p:sp>
+        <p:nvSpPr>
+          <p:cNvPr id="32" name="Rounded Rectangle 31"/>
+          <p:cNvSpPr/>
+          <p:nvPr/>
+        </p:nvSpPr>
+        <p:spPr>
+          <a:xfrm>
+            <a:off x="2148840" y="3749039"/>
+            <a:ext cx="1874519" cy="1188720"/>
+          </a:xfrm>
+          <a:prstGeom prst="roundRect">
+            <a:avLst>
+              <a:gd name="adj" fmla="val 8000"/>
+            </a:avLst>
+          </a:prstGeom>
+          <a:solidFill>
+            <a:srgbClr val="16304F"/>
+          </a:solidFill>
+          <a:ln>
+            <a:noFill/>
+          </a:ln>
+          <a:effectLst/>
+        </p:spPr>
+        <p:style>
+          <a:lnRef idx="1">
+            <a:schemeClr val="accent1"/>
+          </a:lnRef>
+          <a:fillRef idx="3">
+            <a:schemeClr val="accent1"/>
+          </a:fillRef>
+          <a:effectRef idx="2">
+            <a:schemeClr val="accent1"/>
+          </a:effectRef>
+          <a:fontRef idx="minor">
+            <a:schemeClr val="lt1"/>
+          </a:fontRef>
+        </p:style>
+        <p:txBody>
+          <a:bodyPr rtlCol="0" anchor="ctr"/>
+          <a:lstStyle/>
+          <a:p>
+            <a:pPr algn="ctr"/>
+          </a:p>
+        </p:txBody>
+      </p:sp>
+      <p:sp>
+        <p:nvSpPr>
+          <p:cNvPr id="33" name="TextBox 32"/>
+          <p:cNvSpPr txBox="1"/>
+          <p:nvPr/>
+        </p:nvSpPr>
+        <p:spPr>
+          <a:xfrm>
+            <a:off x="2148840" y="3749039"/>
+            <a:ext cx="1874519" cy="1188720"/>
+          </a:xfrm>
+          <a:prstGeom prst="rect">
+            <a:avLst/>
+          </a:prstGeom>
+          <a:noFill/>
+        </p:spPr>
+        <p:txBody>
+          <a:bodyPr wrap="square" anchor="ctr" lIns="45720" rIns="45720" tIns="27432" bIns="27432">
+            <a:spAutoFit/>
+          </a:bodyPr>
+          <a:lstStyle/>
+          <a:p>
+            <a:pPr algn="ctr"/>
+            <a:r>
+              <a:rPr sz="2000" b="1">
+                <a:solidFill>
+                  <a:srgbClr val="FFFFFF"/>
+                </a:solidFill>
+                <a:latin typeface="Microsoft JhengHei"/>
+              </a:rPr>
+              <a:t>AI</a:t>
+            </a:r>
+          </a:p>
+        </p:txBody>
+      </p:sp>
+      <p:sp>
+        <p:nvSpPr>
+          <p:cNvPr id="34" name="Rounded Rectangle 33"/>
+          <p:cNvSpPr/>
+          <p:nvPr/>
+        </p:nvSpPr>
+        <p:spPr>
+          <a:xfrm>
+            <a:off x="4133087" y="3749039"/>
+            <a:ext cx="1874519" cy="1188720"/>
+          </a:xfrm>
+          <a:prstGeom prst="roundRect">
+            <a:avLst>
+              <a:gd name="adj" fmla="val 8000"/>
+            </a:avLst>
+          </a:prstGeom>
+          <a:solidFill>
+            <a:srgbClr val="16304F"/>
+          </a:solidFill>
+          <a:ln>
+            <a:noFill/>
+          </a:ln>
+          <a:effectLst/>
+        </p:spPr>
+        <p:style>
+          <a:lnRef idx="1">
+            <a:schemeClr val="accent1"/>
+          </a:lnRef>
+          <a:fillRef idx="3">
+            <a:schemeClr val="accent1"/>
+          </a:fillRef>
+          <a:effectRef idx="2">
+            <a:schemeClr val="accent1"/>
+          </a:effectRef>
+          <a:fontRef idx="minor">
+            <a:schemeClr val="lt1"/>
+          </a:fontRef>
+        </p:style>
+        <p:txBody>
+          <a:bodyPr rtlCol="0" anchor="ctr"/>
+          <a:lstStyle/>
+          <a:p>
+            <a:pPr algn="ctr"/>
+          </a:p>
+        </p:txBody>
+      </p:sp>
+      <p:sp>
+        <p:nvSpPr>
+          <p:cNvPr id="35" name="TextBox 34"/>
+          <p:cNvSpPr txBox="1"/>
+          <p:nvPr/>
+        </p:nvSpPr>
+        <p:spPr>
+          <a:xfrm>
+            <a:off x="4133087" y="3749039"/>
+            <a:ext cx="1874519" cy="1188720"/>
+          </a:xfrm>
+          <a:prstGeom prst="rect">
+            <a:avLst/>
+          </a:prstGeom>
+          <a:noFill/>
+        </p:spPr>
+        <p:txBody>
+          <a:bodyPr wrap="square" anchor="ctr" lIns="45720" rIns="45720" tIns="27432" bIns="27432">
+            <a:spAutoFit/>
+          </a:bodyPr>
+          <a:lstStyle/>
+          <a:p>
+            <a:pPr algn="ctr"/>
+            <a:r>
+              <a:rPr sz="2000" b="1">
+                <a:solidFill>
+                  <a:srgbClr val="FFFFFF"/>
+                </a:solidFill>
+                <a:latin typeface="Microsoft JhengHei"/>
+              </a:rPr>
+              <a:t>AI</a:t>
+            </a:r>
+          </a:p>
+        </p:txBody>
+      </p:sp>
+      <p:sp>
+        <p:nvSpPr>
+          <p:cNvPr id="36" name="Rounded Rectangle 35"/>
+          <p:cNvSpPr/>
+          <p:nvPr/>
+        </p:nvSpPr>
+        <p:spPr>
+          <a:xfrm>
+            <a:off x="6117336" y="3749039"/>
+            <a:ext cx="1874519" cy="1188720"/>
+          </a:xfrm>
+          <a:prstGeom prst="roundRect">
+            <a:avLst>
+              <a:gd name="adj" fmla="val 8000"/>
+            </a:avLst>
+          </a:prstGeom>
+          <a:solidFill>
+            <a:srgbClr val="16304F"/>
+          </a:solidFill>
+          <a:ln>
+            <a:noFill/>
+          </a:ln>
+          <a:effectLst/>
+        </p:spPr>
+        <p:style>
+          <a:lnRef idx="1">
+            <a:schemeClr val="accent1"/>
+          </a:lnRef>
+          <a:fillRef idx="3">
+            <a:schemeClr val="accent1"/>
+          </a:fillRef>
+          <a:effectRef idx="2">
+            <a:schemeClr val="accent1"/>
+          </a:effectRef>
+          <a:fontRef idx="minor">
+            <a:schemeClr val="lt1"/>
+          </a:fontRef>
+        </p:style>
+        <p:txBody>
+          <a:bodyPr rtlCol="0" anchor="ctr"/>
+          <a:lstStyle/>
+          <a:p>
+            <a:pPr algn="ctr"/>
+          </a:p>
+        </p:txBody>
+      </p:sp>
+      <p:sp>
+        <p:nvSpPr>
+          <p:cNvPr id="37" name="TextBox 36"/>
+          <p:cNvSpPr txBox="1"/>
+          <p:nvPr/>
+        </p:nvSpPr>
+        <p:spPr>
+          <a:xfrm>
+            <a:off x="6117336" y="3749039"/>
+            <a:ext cx="1874519" cy="1188720"/>
+          </a:xfrm>
+          <a:prstGeom prst="rect">
+            <a:avLst/>
+          </a:prstGeom>
+          <a:noFill/>
+        </p:spPr>
+        <p:txBody>
+          <a:bodyPr wrap="square" anchor="ctr" lIns="45720" rIns="45720" tIns="27432" bIns="27432">
+            <a:spAutoFit/>
+          </a:bodyPr>
+          <a:lstStyle/>
+          <a:p>
+            <a:pPr algn="ctr"/>
+            <a:r>
+              <a:rPr sz="2000" b="1">
+                <a:solidFill>
+                  <a:srgbClr val="FFFFFF"/>
+                </a:solidFill>
+                <a:latin typeface="Microsoft JhengHei"/>
+              </a:rPr>
+              <a:t>AI</a:t>
+            </a:r>
+          </a:p>
+        </p:txBody>
+      </p:sp>
+      <p:sp>
+        <p:nvSpPr>
+          <p:cNvPr id="38" name="Rounded Rectangle 37"/>
+          <p:cNvSpPr/>
+          <p:nvPr/>
+        </p:nvSpPr>
+        <p:spPr>
+          <a:xfrm>
+            <a:off x="8101583" y="3749039"/>
+            <a:ext cx="1874519" cy="1188720"/>
+          </a:xfrm>
+          <a:prstGeom prst="roundRect">
+            <a:avLst>
+              <a:gd name="adj" fmla="val 8000"/>
+            </a:avLst>
+          </a:prstGeom>
+          <a:solidFill>
+            <a:srgbClr val="16304F"/>
+          </a:solidFill>
+          <a:ln>
+            <a:noFill/>
+          </a:ln>
+          <a:effectLst/>
+        </p:spPr>
+        <p:style>
+          <a:lnRef idx="1">
+            <a:schemeClr val="accent1"/>
+          </a:lnRef>
+          <a:fillRef idx="3">
+            <a:schemeClr val="accent1"/>
+          </a:fillRef>
+          <a:effectRef idx="2">
+            <a:schemeClr val="accent1"/>
+          </a:effectRef>
+          <a:fontRef idx="minor">
+            <a:schemeClr val="lt1"/>
+          </a:fontRef>
+        </p:style>
+        <p:txBody>
+          <a:bodyPr rtlCol="0" anchor="ctr"/>
+          <a:lstStyle/>
+          <a:p>
+            <a:pPr algn="ctr"/>
+          </a:p>
+        </p:txBody>
+      </p:sp>
+      <p:sp>
+        <p:nvSpPr>
+          <p:cNvPr id="39" name="TextBox 38"/>
+          <p:cNvSpPr txBox="1"/>
+          <p:nvPr/>
+        </p:nvSpPr>
+        <p:spPr>
+          <a:xfrm>
+            <a:off x="8101583" y="3749039"/>
+            <a:ext cx="1874519" cy="1188720"/>
+          </a:xfrm>
+          <a:prstGeom prst="rect">
+            <a:avLst/>
+          </a:prstGeom>
+          <a:noFill/>
+        </p:spPr>
+        <p:txBody>
+          <a:bodyPr wrap="square" anchor="ctr" lIns="45720" rIns="45720" tIns="27432" bIns="27432">
+            <a:spAutoFit/>
+          </a:bodyPr>
+          <a:lstStyle/>
+          <a:p>
+            <a:pPr algn="ctr"/>
+            <a:r>
+              <a:rPr sz="2000" b="1">
+                <a:solidFill>
+                  <a:srgbClr val="FFFFFF"/>
+                </a:solidFill>
+                <a:latin typeface="Microsoft JhengHei"/>
+              </a:rPr>
+              <a:t>AI</a:t>
+            </a:r>
+          </a:p>
+        </p:txBody>
+      </p:sp>
+      <p:sp>
+        <p:nvSpPr>
+          <p:cNvPr id="40" name="Rounded Rectangle 39"/>
+          <p:cNvSpPr/>
+          <p:nvPr/>
+        </p:nvSpPr>
+        <p:spPr>
+          <a:xfrm>
+            <a:off x="10085832" y="3749039"/>
+            <a:ext cx="1874519" cy="1188720"/>
+          </a:xfrm>
+          <a:prstGeom prst="roundRect">
+            <a:avLst>
+              <a:gd name="adj" fmla="val 8000"/>
+            </a:avLst>
+          </a:prstGeom>
+          <a:solidFill>
+            <a:srgbClr val="D98E04"/>
+          </a:solidFill>
+          <a:ln>
+            <a:noFill/>
+          </a:ln>
+          <a:effectLst/>
+        </p:spPr>
+        <p:style>
+          <a:lnRef idx="1">
+            <a:schemeClr val="accent1"/>
+          </a:lnRef>
+          <a:fillRef idx="3">
+            <a:schemeClr val="accent1"/>
+          </a:fillRef>
+          <a:effectRef idx="2">
+            <a:schemeClr val="accent1"/>
+          </a:effectRef>
+          <a:fontRef idx="minor">
+            <a:schemeClr val="lt1"/>
+          </a:fontRef>
+        </p:style>
+        <p:txBody>
+          <a:bodyPr rtlCol="0" anchor="ctr"/>
+          <a:lstStyle/>
+          <a:p>
+            <a:pPr algn="ctr"/>
+          </a:p>
+        </p:txBody>
+      </p:sp>
+      <p:sp>
+        <p:nvSpPr>
+          <p:cNvPr id="41" name="TextBox 40"/>
+          <p:cNvSpPr txBox="1"/>
+          <p:nvPr/>
+        </p:nvSpPr>
+        <p:spPr>
+          <a:xfrm>
+            <a:off x="10085832" y="3749039"/>
+            <a:ext cx="1874519" cy="1188720"/>
+          </a:xfrm>
+          <a:prstGeom prst="rect">
+            <a:avLst/>
+          </a:prstGeom>
+          <a:noFill/>
+        </p:spPr>
+        <p:txBody>
+          <a:bodyPr wrap="square" anchor="ctr" lIns="45720" rIns="45720" tIns="27432" bIns="27432">
+            <a:spAutoFit/>
+          </a:bodyPr>
+          <a:lstStyle/>
+          <a:p>
+            <a:pPr algn="ctr"/>
+            <a:r>
+              <a:rPr sz="2000" b="1">
+                <a:solidFill>
+                  <a:srgbClr val="16304F"/>
+                </a:solidFill>
+                <a:latin typeface="Microsoft JhengHei"/>
+              </a:rPr>
+              <a:t>承辦人</a:t>
+            </a:r>
+          </a:p>
+        </p:txBody>
+      </p:sp>
+      <p:sp>
+        <p:nvSpPr>
+          <p:cNvPr id="42" name="Rectangle 41"/>
+          <p:cNvSpPr/>
+          <p:nvPr/>
+        </p:nvSpPr>
+        <p:spPr>
+          <a:xfrm>
+            <a:off x="640080" y="5486400"/>
+            <a:ext cx="10908792" cy="566928"/>
+          </a:xfrm>
+          <a:prstGeom prst="rect">
+            <a:avLst/>
+          </a:prstGeom>
+          <a:solidFill>
+            <a:srgbClr val="FFF8EA"/>
+          </a:solidFill>
+          <a:ln>
+            <a:noFill/>
+          </a:ln>
+          <a:effectLst/>
+        </p:spPr>
+        <p:style>
+          <a:lnRef idx="1">
+            <a:schemeClr val="accent1"/>
+          </a:lnRef>
+          <a:fillRef idx="3">
+            <a:schemeClr val="accent1"/>
+          </a:fillRef>
+          <a:effectRef idx="2">
+            <a:schemeClr val="accent1"/>
+          </a:effectRef>
+          <a:fontRef idx="minor">
+            <a:schemeClr val="lt1"/>
+          </a:fontRef>
+        </p:style>
+        <p:txBody>
+          <a:bodyPr rtlCol="0" anchor="ctr"/>
+          <a:lstStyle/>
+          <a:p>
+            <a:pPr algn="ctr"/>
+          </a:p>
+        </p:txBody>
+      </p:sp>
+      <p:sp>
+        <p:nvSpPr>
+          <p:cNvPr id="43" name="Rectangle 42"/>
+          <p:cNvSpPr/>
+          <p:nvPr/>
+        </p:nvSpPr>
+        <p:spPr>
+          <a:xfrm>
+            <a:off x="640080" y="5486400"/>
+            <a:ext cx="64008" cy="566928"/>
+          </a:xfrm>
+          <a:prstGeom prst="rect">
+            <a:avLst/>
+          </a:prstGeom>
+          <a:solidFill>
+            <a:srgbClr val="D98E04"/>
+          </a:solidFill>
+          <a:ln>
+            <a:noFill/>
+          </a:ln>
+          <a:effectLst/>
+        </p:spPr>
+        <p:style>
+          <a:lnRef idx="1">
+            <a:schemeClr val="accent1"/>
+          </a:lnRef>
+          <a:fillRef idx="3">
+            <a:schemeClr val="accent1"/>
+          </a:fillRef>
+          <a:effectRef idx="2">
+            <a:schemeClr val="accent1"/>
+          </a:effectRef>
+          <a:fontRef idx="minor">
+            <a:schemeClr val="lt1"/>
+          </a:fontRef>
+        </p:style>
+        <p:txBody>
+          <a:bodyPr rtlCol="0" anchor="ctr"/>
+          <a:lstStyle/>
+          <a:p>
+            <a:pPr algn="ctr"/>
+          </a:p>
+        </p:txBody>
+      </p:sp>
+      <p:sp>
+        <p:nvSpPr>
+          <p:cNvPr id="44" name="TextBox 43"/>
+          <p:cNvSpPr txBox="1"/>
+          <p:nvPr/>
+        </p:nvSpPr>
+        <p:spPr>
+          <a:xfrm>
+            <a:off x="822960" y="5504688"/>
+            <a:ext cx="10607040" cy="548640"/>
+          </a:xfrm>
+          <a:prstGeom prst="rect">
+            <a:avLst/>
+          </a:prstGeom>
+          <a:noFill/>
+        </p:spPr>
+        <p:txBody>
+          <a:bodyPr wrap="square" anchor="ctr" lIns="45720" rIns="45720" tIns="27432" bIns="27432">
+            <a:spAutoFit/>
+          </a:bodyPr>
+          <a:lstStyle/>
+          <a:p>
+            <a:pPr algn="l"/>
+            <a:r>
+              <a:rPr sz="1350" b="0">
+                <a:solidFill>
+                  <a:srgbClr val="334455"/>
+                </a:solidFill>
+                <a:latin typeface="Microsoft JhengHei"/>
+              </a:rPr>
+              <a:t>承辦人的時間，從逐字撰擬，移到判斷與修正；每個爭點附認定、依據、卷證頁碼，採信哪一方會有什麼後果都寫清楚。</a:t>
             </a:r>
           </a:p>
         </p:txBody>
@@ -10950,23 +11862,23 @@
         </p:nvSpPr>
         <p:spPr>
           <a:xfrm>
-            <a:off x="640080" y="1664208"/>
-            <a:ext cx="1481328" cy="457200"/>
-          </a:xfrm>
-          <a:prstGeom prst="rect">
-            <a:avLst/>
-          </a:prstGeom>
-          <a:noFill/>
-        </p:spPr>
-        <p:txBody>
-          <a:bodyPr wrap="square" anchor="t" lIns="45720" rIns="45720" tIns="27432" bIns="27432">
-            <a:spAutoFit/>
-          </a:bodyPr>
-          <a:lstStyle/>
-          <a:p>
-            <a:pPr algn="ctr"/>
-            <a:r>
-              <a:rPr sz="1450" b="1">
+            <a:off x="640080" y="1554480"/>
+            <a:ext cx="1481328" cy="1234440"/>
+          </a:xfrm>
+          <a:prstGeom prst="rect">
+            <a:avLst/>
+          </a:prstGeom>
+          <a:noFill/>
+        </p:spPr>
+        <p:txBody>
+          <a:bodyPr wrap="square" anchor="ctr" lIns="45720" rIns="45720" tIns="27432" bIns="27432">
+            <a:spAutoFit/>
+          </a:bodyPr>
+          <a:lstStyle/>
+          <a:p>
+            <a:pPr algn="ctr"/>
+            <a:r>
+              <a:rPr sz="1500" b="1">
                 <a:solidFill>
                   <a:srgbClr val="16304F"/>
                 </a:solidFill>
@@ -10980,87 +11892,6 @@
       <p:sp>
         <p:nvSpPr>
           <p:cNvPr id="11" name="Rounded Rectangle 10"/>
-          <p:cNvSpPr/>
-          <p:nvPr/>
-        </p:nvSpPr>
-        <p:spPr>
-          <a:xfrm>
-            <a:off x="822959" y="2212848"/>
-            <a:ext cx="1115568" cy="365760"/>
-          </a:xfrm>
-          <a:prstGeom prst="roundRect">
-            <a:avLst>
-              <a:gd name="adj" fmla="val 30000"/>
-            </a:avLst>
-          </a:prstGeom>
-          <a:solidFill>
-            <a:srgbClr val="FFF2D6"/>
-          </a:solidFill>
-          <a:ln>
-            <a:noFill/>
-          </a:ln>
-          <a:effectLst/>
-        </p:spPr>
-        <p:style>
-          <a:lnRef idx="1">
-            <a:schemeClr val="accent1"/>
-          </a:lnRef>
-          <a:fillRef idx="3">
-            <a:schemeClr val="accent1"/>
-          </a:fillRef>
-          <a:effectRef idx="2">
-            <a:schemeClr val="accent1"/>
-          </a:effectRef>
-          <a:fontRef idx="minor">
-            <a:schemeClr val="lt1"/>
-          </a:fontRef>
-        </p:style>
-        <p:txBody>
-          <a:bodyPr rtlCol="0" anchor="ctr"/>
-          <a:lstStyle/>
-          <a:p>
-            <a:pPr algn="ctr"/>
-          </a:p>
-        </p:txBody>
-      </p:sp>
-      <p:sp>
-        <p:nvSpPr>
-          <p:cNvPr id="12" name="TextBox 11"/>
-          <p:cNvSpPr txBox="1"/>
-          <p:nvPr/>
-        </p:nvSpPr>
-        <p:spPr>
-          <a:xfrm>
-            <a:off x="822959" y="2212848"/>
-            <a:ext cx="1115568" cy="365760"/>
-          </a:xfrm>
-          <a:prstGeom prst="rect">
-            <a:avLst/>
-          </a:prstGeom>
-          <a:noFill/>
-        </p:spPr>
-        <p:txBody>
-          <a:bodyPr wrap="square" anchor="ctr" lIns="45720" rIns="45720" tIns="27432" bIns="27432">
-            <a:spAutoFit/>
-          </a:bodyPr>
-          <a:lstStyle/>
-          <a:p>
-            <a:pPr algn="ctr"/>
-            <a:r>
-              <a:rPr sz="1100" b="1">
-                <a:solidFill>
-                  <a:srgbClr val="B36F00"/>
-                </a:solidFill>
-                <a:latin typeface="Microsoft JhengHei"/>
-              </a:rPr>
-              <a:t>AI ×1</a:t>
-            </a:r>
-          </a:p>
-        </p:txBody>
-      </p:sp>
-      <p:sp>
-        <p:nvSpPr>
-          <p:cNvPr id="13" name="Rounded Rectangle 12"/>
           <p:cNvSpPr/>
           <p:nvPr/>
         </p:nvSpPr>
@@ -11108,29 +11939,29 @@
       </p:sp>
       <p:sp>
         <p:nvSpPr>
-          <p:cNvPr id="14" name="TextBox 13"/>
-          <p:cNvSpPr txBox="1"/>
-          <p:nvPr/>
-        </p:nvSpPr>
-        <p:spPr>
-          <a:xfrm>
-            <a:off x="2203704" y="1664208"/>
-            <a:ext cx="1481328" cy="457200"/>
-          </a:xfrm>
-          <a:prstGeom prst="rect">
-            <a:avLst/>
-          </a:prstGeom>
-          <a:noFill/>
-        </p:spPr>
-        <p:txBody>
-          <a:bodyPr wrap="square" anchor="t" lIns="45720" rIns="45720" tIns="27432" bIns="27432">
-            <a:spAutoFit/>
-          </a:bodyPr>
-          <a:lstStyle/>
-          <a:p>
-            <a:pPr algn="ctr"/>
-            <a:r>
-              <a:rPr sz="1450" b="1">
+          <p:cNvPr id="12" name="TextBox 11"/>
+          <p:cNvSpPr txBox="1"/>
+          <p:nvPr/>
+        </p:nvSpPr>
+        <p:spPr>
+          <a:xfrm>
+            <a:off x="2203704" y="1554480"/>
+            <a:ext cx="1481328" cy="1234440"/>
+          </a:xfrm>
+          <a:prstGeom prst="rect">
+            <a:avLst/>
+          </a:prstGeom>
+          <a:noFill/>
+        </p:spPr>
+        <p:txBody>
+          <a:bodyPr wrap="square" anchor="ctr" lIns="45720" rIns="45720" tIns="27432" bIns="27432">
+            <a:spAutoFit/>
+          </a:bodyPr>
+          <a:lstStyle/>
+          <a:p>
+            <a:pPr algn="ctr"/>
+            <a:r>
+              <a:rPr sz="1500" b="1">
                 <a:solidFill>
                   <a:srgbClr val="16304F"/>
                 </a:solidFill>
@@ -11143,88 +11974,7 @@
       </p:sp>
       <p:sp>
         <p:nvSpPr>
-          <p:cNvPr id="15" name="Rounded Rectangle 14"/>
-          <p:cNvSpPr/>
-          <p:nvPr/>
-        </p:nvSpPr>
-        <p:spPr>
-          <a:xfrm>
-            <a:off x="2386584" y="2212848"/>
-            <a:ext cx="1115568" cy="365760"/>
-          </a:xfrm>
-          <a:prstGeom prst="roundRect">
-            <a:avLst>
-              <a:gd name="adj" fmla="val 30000"/>
-            </a:avLst>
-          </a:prstGeom>
-          <a:solidFill>
-            <a:srgbClr val="E0F0E2"/>
-          </a:solidFill>
-          <a:ln>
-            <a:noFill/>
-          </a:ln>
-          <a:effectLst/>
-        </p:spPr>
-        <p:style>
-          <a:lnRef idx="1">
-            <a:schemeClr val="accent1"/>
-          </a:lnRef>
-          <a:fillRef idx="3">
-            <a:schemeClr val="accent1"/>
-          </a:fillRef>
-          <a:effectRef idx="2">
-            <a:schemeClr val="accent1"/>
-          </a:effectRef>
-          <a:fontRef idx="minor">
-            <a:schemeClr val="lt1"/>
-          </a:fontRef>
-        </p:style>
-        <p:txBody>
-          <a:bodyPr rtlCol="0" anchor="ctr"/>
-          <a:lstStyle/>
-          <a:p>
-            <a:pPr algn="ctr"/>
-          </a:p>
-        </p:txBody>
-      </p:sp>
-      <p:sp>
-        <p:nvSpPr>
-          <p:cNvPr id="16" name="TextBox 15"/>
-          <p:cNvSpPr txBox="1"/>
-          <p:nvPr/>
-        </p:nvSpPr>
-        <p:spPr>
-          <a:xfrm>
-            <a:off x="2386584" y="2212848"/>
-            <a:ext cx="1115568" cy="365760"/>
-          </a:xfrm>
-          <a:prstGeom prst="rect">
-            <a:avLst/>
-          </a:prstGeom>
-          <a:noFill/>
-        </p:spPr>
-        <p:txBody>
-          <a:bodyPr wrap="square" anchor="ctr" lIns="45720" rIns="45720" tIns="27432" bIns="27432">
-            <a:spAutoFit/>
-          </a:bodyPr>
-          <a:lstStyle/>
-          <a:p>
-            <a:pPr algn="ctr"/>
-            <a:r>
-              <a:rPr sz="1100" b="1">
-                <a:solidFill>
-                  <a:srgbClr val="2E7D32"/>
-                </a:solidFill>
-                <a:latin typeface="Microsoft JhengHei"/>
-              </a:rPr>
-              <a:t>程式</a:t>
-            </a:r>
-          </a:p>
-        </p:txBody>
-      </p:sp>
-      <p:sp>
-        <p:nvSpPr>
-          <p:cNvPr id="17" name="Rounded Rectangle 16"/>
+          <p:cNvPr id="13" name="Rounded Rectangle 12"/>
           <p:cNvSpPr/>
           <p:nvPr/>
         </p:nvSpPr>
@@ -11272,29 +12022,29 @@
       </p:sp>
       <p:sp>
         <p:nvSpPr>
-          <p:cNvPr id="18" name="TextBox 17"/>
-          <p:cNvSpPr txBox="1"/>
-          <p:nvPr/>
-        </p:nvSpPr>
-        <p:spPr>
-          <a:xfrm>
-            <a:off x="3767328" y="1664208"/>
-            <a:ext cx="1481328" cy="457200"/>
-          </a:xfrm>
-          <a:prstGeom prst="rect">
-            <a:avLst/>
-          </a:prstGeom>
-          <a:noFill/>
-        </p:spPr>
-        <p:txBody>
-          <a:bodyPr wrap="square" anchor="t" lIns="45720" rIns="45720" tIns="27432" bIns="27432">
-            <a:spAutoFit/>
-          </a:bodyPr>
-          <a:lstStyle/>
-          <a:p>
-            <a:pPr algn="ctr"/>
-            <a:r>
-              <a:rPr sz="1450" b="1">
+          <p:cNvPr id="14" name="TextBox 13"/>
+          <p:cNvSpPr txBox="1"/>
+          <p:nvPr/>
+        </p:nvSpPr>
+        <p:spPr>
+          <a:xfrm>
+            <a:off x="3767328" y="1554480"/>
+            <a:ext cx="1481328" cy="1234440"/>
+          </a:xfrm>
+          <a:prstGeom prst="rect">
+            <a:avLst/>
+          </a:prstGeom>
+          <a:noFill/>
+        </p:spPr>
+        <p:txBody>
+          <a:bodyPr wrap="square" anchor="ctr" lIns="45720" rIns="45720" tIns="27432" bIns="27432">
+            <a:spAutoFit/>
+          </a:bodyPr>
+          <a:lstStyle/>
+          <a:p>
+            <a:pPr algn="ctr"/>
+            <a:r>
+              <a:rPr sz="1500" b="1">
                 <a:solidFill>
                   <a:srgbClr val="16304F"/>
                 </a:solidFill>
@@ -11307,88 +12057,7 @@
       </p:sp>
       <p:sp>
         <p:nvSpPr>
-          <p:cNvPr id="19" name="Rounded Rectangle 18"/>
-          <p:cNvSpPr/>
-          <p:nvPr/>
-        </p:nvSpPr>
-        <p:spPr>
-          <a:xfrm>
-            <a:off x="3950208" y="2212848"/>
-            <a:ext cx="1115568" cy="365760"/>
-          </a:xfrm>
-          <a:prstGeom prst="roundRect">
-            <a:avLst>
-              <a:gd name="adj" fmla="val 30000"/>
-            </a:avLst>
-          </a:prstGeom>
-          <a:solidFill>
-            <a:srgbClr val="FFF2D6"/>
-          </a:solidFill>
-          <a:ln>
-            <a:noFill/>
-          </a:ln>
-          <a:effectLst/>
-        </p:spPr>
-        <p:style>
-          <a:lnRef idx="1">
-            <a:schemeClr val="accent1"/>
-          </a:lnRef>
-          <a:fillRef idx="3">
-            <a:schemeClr val="accent1"/>
-          </a:fillRef>
-          <a:effectRef idx="2">
-            <a:schemeClr val="accent1"/>
-          </a:effectRef>
-          <a:fontRef idx="minor">
-            <a:schemeClr val="lt1"/>
-          </a:fontRef>
-        </p:style>
-        <p:txBody>
-          <a:bodyPr rtlCol="0" anchor="ctr"/>
-          <a:lstStyle/>
-          <a:p>
-            <a:pPr algn="ctr"/>
-          </a:p>
-        </p:txBody>
-      </p:sp>
-      <p:sp>
-        <p:nvSpPr>
-          <p:cNvPr id="20" name="TextBox 19"/>
-          <p:cNvSpPr txBox="1"/>
-          <p:nvPr/>
-        </p:nvSpPr>
-        <p:spPr>
-          <a:xfrm>
-            <a:off x="3950208" y="2212848"/>
-            <a:ext cx="1115568" cy="365760"/>
-          </a:xfrm>
-          <a:prstGeom prst="rect">
-            <a:avLst/>
-          </a:prstGeom>
-          <a:noFill/>
-        </p:spPr>
-        <p:txBody>
-          <a:bodyPr wrap="square" anchor="ctr" lIns="45720" rIns="45720" tIns="27432" bIns="27432">
-            <a:spAutoFit/>
-          </a:bodyPr>
-          <a:lstStyle/>
-          <a:p>
-            <a:pPr algn="ctr"/>
-            <a:r>
-              <a:rPr sz="1100" b="1">
-                <a:solidFill>
-                  <a:srgbClr val="B36F00"/>
-                </a:solidFill>
-                <a:latin typeface="Microsoft JhengHei"/>
-              </a:rPr>
-              <a:t>AI ×1</a:t>
-            </a:r>
-          </a:p>
-        </p:txBody>
-      </p:sp>
-      <p:sp>
-        <p:nvSpPr>
-          <p:cNvPr id="21" name="Rounded Rectangle 20"/>
+          <p:cNvPr id="15" name="Rounded Rectangle 14"/>
           <p:cNvSpPr/>
           <p:nvPr/>
         </p:nvSpPr>
@@ -11436,29 +12105,29 @@
       </p:sp>
       <p:sp>
         <p:nvSpPr>
-          <p:cNvPr id="22" name="TextBox 21"/>
-          <p:cNvSpPr txBox="1"/>
-          <p:nvPr/>
-        </p:nvSpPr>
-        <p:spPr>
-          <a:xfrm>
-            <a:off x="5330952" y="1664208"/>
-            <a:ext cx="1481328" cy="457200"/>
-          </a:xfrm>
-          <a:prstGeom prst="rect">
-            <a:avLst/>
-          </a:prstGeom>
-          <a:noFill/>
-        </p:spPr>
-        <p:txBody>
-          <a:bodyPr wrap="square" anchor="t" lIns="45720" rIns="45720" tIns="27432" bIns="27432">
-            <a:spAutoFit/>
-          </a:bodyPr>
-          <a:lstStyle/>
-          <a:p>
-            <a:pPr algn="ctr"/>
-            <a:r>
-              <a:rPr sz="1450" b="1">
+          <p:cNvPr id="16" name="TextBox 15"/>
+          <p:cNvSpPr txBox="1"/>
+          <p:nvPr/>
+        </p:nvSpPr>
+        <p:spPr>
+          <a:xfrm>
+            <a:off x="5330952" y="1554480"/>
+            <a:ext cx="1481328" cy="1234440"/>
+          </a:xfrm>
+          <a:prstGeom prst="rect">
+            <a:avLst/>
+          </a:prstGeom>
+          <a:noFill/>
+        </p:spPr>
+        <p:txBody>
+          <a:bodyPr wrap="square" anchor="ctr" lIns="45720" rIns="45720" tIns="27432" bIns="27432">
+            <a:spAutoFit/>
+          </a:bodyPr>
+          <a:lstStyle/>
+          <a:p>
+            <a:pPr algn="ctr"/>
+            <a:r>
+              <a:rPr sz="1500" b="1">
                 <a:solidFill>
                   <a:srgbClr val="16304F"/>
                 </a:solidFill>
@@ -11471,88 +12140,7 @@
       </p:sp>
       <p:sp>
         <p:nvSpPr>
-          <p:cNvPr id="23" name="Rounded Rectangle 22"/>
-          <p:cNvSpPr/>
-          <p:nvPr/>
-        </p:nvSpPr>
-        <p:spPr>
-          <a:xfrm>
-            <a:off x="5513832" y="2212848"/>
-            <a:ext cx="1115568" cy="365760"/>
-          </a:xfrm>
-          <a:prstGeom prst="roundRect">
-            <a:avLst>
-              <a:gd name="adj" fmla="val 30000"/>
-            </a:avLst>
-          </a:prstGeom>
-          <a:solidFill>
-            <a:srgbClr val="FFF2D6"/>
-          </a:solidFill>
-          <a:ln>
-            <a:noFill/>
-          </a:ln>
-          <a:effectLst/>
-        </p:spPr>
-        <p:style>
-          <a:lnRef idx="1">
-            <a:schemeClr val="accent1"/>
-          </a:lnRef>
-          <a:fillRef idx="3">
-            <a:schemeClr val="accent1"/>
-          </a:fillRef>
-          <a:effectRef idx="2">
-            <a:schemeClr val="accent1"/>
-          </a:effectRef>
-          <a:fontRef idx="minor">
-            <a:schemeClr val="lt1"/>
-          </a:fontRef>
-        </p:style>
-        <p:txBody>
-          <a:bodyPr rtlCol="0" anchor="ctr"/>
-          <a:lstStyle/>
-          <a:p>
-            <a:pPr algn="ctr"/>
-          </a:p>
-        </p:txBody>
-      </p:sp>
-      <p:sp>
-        <p:nvSpPr>
-          <p:cNvPr id="24" name="TextBox 23"/>
-          <p:cNvSpPr txBox="1"/>
-          <p:nvPr/>
-        </p:nvSpPr>
-        <p:spPr>
-          <a:xfrm>
-            <a:off x="5513832" y="2212848"/>
-            <a:ext cx="1115568" cy="365760"/>
-          </a:xfrm>
-          <a:prstGeom prst="rect">
-            <a:avLst/>
-          </a:prstGeom>
-          <a:noFill/>
-        </p:spPr>
-        <p:txBody>
-          <a:bodyPr wrap="square" anchor="ctr" lIns="45720" rIns="45720" tIns="27432" bIns="27432">
-            <a:spAutoFit/>
-          </a:bodyPr>
-          <a:lstStyle/>
-          <a:p>
-            <a:pPr algn="ctr"/>
-            <a:r>
-              <a:rPr sz="1100" b="1">
-                <a:solidFill>
-                  <a:srgbClr val="B36F00"/>
-                </a:solidFill>
-                <a:latin typeface="Microsoft JhengHei"/>
-              </a:rPr>
-              <a:t>檢索＋AI ×1</a:t>
-            </a:r>
-          </a:p>
-        </p:txBody>
-      </p:sp>
-      <p:sp>
-        <p:nvSpPr>
-          <p:cNvPr id="25" name="Rounded Rectangle 24"/>
+          <p:cNvPr id="17" name="Rounded Rectangle 16"/>
           <p:cNvSpPr/>
           <p:nvPr/>
         </p:nvSpPr>
@@ -11600,29 +12188,29 @@
       </p:sp>
       <p:sp>
         <p:nvSpPr>
-          <p:cNvPr id="26" name="TextBox 25"/>
-          <p:cNvSpPr txBox="1"/>
-          <p:nvPr/>
-        </p:nvSpPr>
-        <p:spPr>
-          <a:xfrm>
-            <a:off x="6894576" y="1664208"/>
-            <a:ext cx="1481328" cy="457200"/>
-          </a:xfrm>
-          <a:prstGeom prst="rect">
-            <a:avLst/>
-          </a:prstGeom>
-          <a:noFill/>
-        </p:spPr>
-        <p:txBody>
-          <a:bodyPr wrap="square" anchor="t" lIns="45720" rIns="45720" tIns="27432" bIns="27432">
-            <a:spAutoFit/>
-          </a:bodyPr>
-          <a:lstStyle/>
-          <a:p>
-            <a:pPr algn="ctr"/>
-            <a:r>
-              <a:rPr sz="1450" b="1">
+          <p:cNvPr id="18" name="TextBox 17"/>
+          <p:cNvSpPr txBox="1"/>
+          <p:nvPr/>
+        </p:nvSpPr>
+        <p:spPr>
+          <a:xfrm>
+            <a:off x="6894576" y="1554480"/>
+            <a:ext cx="1481328" cy="1234440"/>
+          </a:xfrm>
+          <a:prstGeom prst="rect">
+            <a:avLst/>
+          </a:prstGeom>
+          <a:noFill/>
+        </p:spPr>
+        <p:txBody>
+          <a:bodyPr wrap="square" anchor="ctr" lIns="45720" rIns="45720" tIns="27432" bIns="27432">
+            <a:spAutoFit/>
+          </a:bodyPr>
+          <a:lstStyle/>
+          <a:p>
+            <a:pPr algn="ctr"/>
+            <a:r>
+              <a:rPr sz="1500" b="1">
                 <a:solidFill>
                   <a:srgbClr val="16304F"/>
                 </a:solidFill>
@@ -11635,88 +12223,7 @@
       </p:sp>
       <p:sp>
         <p:nvSpPr>
-          <p:cNvPr id="27" name="Rounded Rectangle 26"/>
-          <p:cNvSpPr/>
-          <p:nvPr/>
-        </p:nvSpPr>
-        <p:spPr>
-          <a:xfrm>
-            <a:off x="7077456" y="2212848"/>
-            <a:ext cx="1115568" cy="365760"/>
-          </a:xfrm>
-          <a:prstGeom prst="roundRect">
-            <a:avLst>
-              <a:gd name="adj" fmla="val 30000"/>
-            </a:avLst>
-          </a:prstGeom>
-          <a:solidFill>
-            <a:srgbClr val="FFF2D6"/>
-          </a:solidFill>
-          <a:ln>
-            <a:noFill/>
-          </a:ln>
-          <a:effectLst/>
-        </p:spPr>
-        <p:style>
-          <a:lnRef idx="1">
-            <a:schemeClr val="accent1"/>
-          </a:lnRef>
-          <a:fillRef idx="3">
-            <a:schemeClr val="accent1"/>
-          </a:fillRef>
-          <a:effectRef idx="2">
-            <a:schemeClr val="accent1"/>
-          </a:effectRef>
-          <a:fontRef idx="minor">
-            <a:schemeClr val="lt1"/>
-          </a:fontRef>
-        </p:style>
-        <p:txBody>
-          <a:bodyPr rtlCol="0" anchor="ctr"/>
-          <a:lstStyle/>
-          <a:p>
-            <a:pPr algn="ctr"/>
-          </a:p>
-        </p:txBody>
-      </p:sp>
-      <p:sp>
-        <p:nvSpPr>
-          <p:cNvPr id="28" name="TextBox 27"/>
-          <p:cNvSpPr txBox="1"/>
-          <p:nvPr/>
-        </p:nvSpPr>
-        <p:spPr>
-          <a:xfrm>
-            <a:off x="7077456" y="2212848"/>
-            <a:ext cx="1115568" cy="365760"/>
-          </a:xfrm>
-          <a:prstGeom prst="rect">
-            <a:avLst/>
-          </a:prstGeom>
-          <a:noFill/>
-        </p:spPr>
-        <p:txBody>
-          <a:bodyPr wrap="square" anchor="ctr" lIns="45720" rIns="45720" tIns="27432" bIns="27432">
-            <a:spAutoFit/>
-          </a:bodyPr>
-          <a:lstStyle/>
-          <a:p>
-            <a:pPr algn="ctr"/>
-            <a:r>
-              <a:rPr sz="1100" b="1">
-                <a:solidFill>
-                  <a:srgbClr val="B36F00"/>
-                </a:solidFill>
-                <a:latin typeface="Microsoft JhengHei"/>
-              </a:rPr>
-              <a:t>檢索＋AI ×1</a:t>
-            </a:r>
-          </a:p>
-        </p:txBody>
-      </p:sp>
-      <p:sp>
-        <p:nvSpPr>
-          <p:cNvPr id="29" name="Rounded Rectangle 28"/>
+          <p:cNvPr id="19" name="Rounded Rectangle 18"/>
           <p:cNvSpPr/>
           <p:nvPr/>
         </p:nvSpPr>
@@ -11764,29 +12271,29 @@
       </p:sp>
       <p:sp>
         <p:nvSpPr>
-          <p:cNvPr id="30" name="TextBox 29"/>
-          <p:cNvSpPr txBox="1"/>
-          <p:nvPr/>
-        </p:nvSpPr>
-        <p:spPr>
-          <a:xfrm>
-            <a:off x="8458200" y="1664208"/>
-            <a:ext cx="1481328" cy="457200"/>
-          </a:xfrm>
-          <a:prstGeom prst="rect">
-            <a:avLst/>
-          </a:prstGeom>
-          <a:noFill/>
-        </p:spPr>
-        <p:txBody>
-          <a:bodyPr wrap="square" anchor="t" lIns="45720" rIns="45720" tIns="27432" bIns="27432">
-            <a:spAutoFit/>
-          </a:bodyPr>
-          <a:lstStyle/>
-          <a:p>
-            <a:pPr algn="ctr"/>
-            <a:r>
-              <a:rPr sz="1450" b="1">
+          <p:cNvPr id="20" name="TextBox 19"/>
+          <p:cNvSpPr txBox="1"/>
+          <p:nvPr/>
+        </p:nvSpPr>
+        <p:spPr>
+          <a:xfrm>
+            <a:off x="8458200" y="1554480"/>
+            <a:ext cx="1481328" cy="1234440"/>
+          </a:xfrm>
+          <a:prstGeom prst="rect">
+            <a:avLst/>
+          </a:prstGeom>
+          <a:noFill/>
+        </p:spPr>
+        <p:txBody>
+          <a:bodyPr wrap="square" anchor="ctr" lIns="45720" rIns="45720" tIns="27432" bIns="27432">
+            <a:spAutoFit/>
+          </a:bodyPr>
+          <a:lstStyle/>
+          <a:p>
+            <a:pPr algn="ctr"/>
+            <a:r>
+              <a:rPr sz="1500" b="1">
                 <a:solidFill>
                   <a:srgbClr val="16304F"/>
                 </a:solidFill>
@@ -11799,88 +12306,7 @@
       </p:sp>
       <p:sp>
         <p:nvSpPr>
-          <p:cNvPr id="31" name="Rounded Rectangle 30"/>
-          <p:cNvSpPr/>
-          <p:nvPr/>
-        </p:nvSpPr>
-        <p:spPr>
-          <a:xfrm>
-            <a:off x="8641080" y="2212848"/>
-            <a:ext cx="1115568" cy="365760"/>
-          </a:xfrm>
-          <a:prstGeom prst="roundRect">
-            <a:avLst>
-              <a:gd name="adj" fmla="val 30000"/>
-            </a:avLst>
-          </a:prstGeom>
-          <a:solidFill>
-            <a:srgbClr val="FFF2D6"/>
-          </a:solidFill>
-          <a:ln>
-            <a:noFill/>
-          </a:ln>
-          <a:effectLst/>
-        </p:spPr>
-        <p:style>
-          <a:lnRef idx="1">
-            <a:schemeClr val="accent1"/>
-          </a:lnRef>
-          <a:fillRef idx="3">
-            <a:schemeClr val="accent1"/>
-          </a:fillRef>
-          <a:effectRef idx="2">
-            <a:schemeClr val="accent1"/>
-          </a:effectRef>
-          <a:fontRef idx="minor">
-            <a:schemeClr val="lt1"/>
-          </a:fontRef>
-        </p:style>
-        <p:txBody>
-          <a:bodyPr rtlCol="0" anchor="ctr"/>
-          <a:lstStyle/>
-          <a:p>
-            <a:pPr algn="ctr"/>
-          </a:p>
-        </p:txBody>
-      </p:sp>
-      <p:sp>
-        <p:nvSpPr>
-          <p:cNvPr id="32" name="TextBox 31"/>
-          <p:cNvSpPr txBox="1"/>
-          <p:nvPr/>
-        </p:nvSpPr>
-        <p:spPr>
-          <a:xfrm>
-            <a:off x="8641080" y="2212848"/>
-            <a:ext cx="1115568" cy="365760"/>
-          </a:xfrm>
-          <a:prstGeom prst="rect">
-            <a:avLst/>
-          </a:prstGeom>
-          <a:noFill/>
-        </p:spPr>
-        <p:txBody>
-          <a:bodyPr wrap="square" anchor="ctr" lIns="45720" rIns="45720" tIns="27432" bIns="27432">
-            <a:spAutoFit/>
-          </a:bodyPr>
-          <a:lstStyle/>
-          <a:p>
-            <a:pPr algn="ctr"/>
-            <a:r>
-              <a:rPr sz="1100" b="1">
-                <a:solidFill>
-                  <a:srgbClr val="B36F00"/>
-                </a:solidFill>
-                <a:latin typeface="Microsoft JhengHei"/>
-              </a:rPr>
-              <a:t>AI ×1</a:t>
-            </a:r>
-          </a:p>
-        </p:txBody>
-      </p:sp>
-      <p:sp>
-        <p:nvSpPr>
-          <p:cNvPr id="33" name="Rounded Rectangle 32"/>
+          <p:cNvPr id="21" name="Rounded Rectangle 20"/>
           <p:cNvSpPr/>
           <p:nvPr/>
         </p:nvSpPr>
@@ -11928,29 +12354,29 @@
       </p:sp>
       <p:sp>
         <p:nvSpPr>
-          <p:cNvPr id="34" name="TextBox 33"/>
-          <p:cNvSpPr txBox="1"/>
-          <p:nvPr/>
-        </p:nvSpPr>
-        <p:spPr>
-          <a:xfrm>
-            <a:off x="10021824" y="1664208"/>
-            <a:ext cx="1481328" cy="457200"/>
-          </a:xfrm>
-          <a:prstGeom prst="rect">
-            <a:avLst/>
-          </a:prstGeom>
-          <a:noFill/>
-        </p:spPr>
-        <p:txBody>
-          <a:bodyPr wrap="square" anchor="t" lIns="45720" rIns="45720" tIns="27432" bIns="27432">
-            <a:spAutoFit/>
-          </a:bodyPr>
-          <a:lstStyle/>
-          <a:p>
-            <a:pPr algn="ctr"/>
-            <a:r>
-              <a:rPr sz="1450" b="1">
+          <p:cNvPr id="22" name="TextBox 21"/>
+          <p:cNvSpPr txBox="1"/>
+          <p:nvPr/>
+        </p:nvSpPr>
+        <p:spPr>
+          <a:xfrm>
+            <a:off x="10021824" y="1554480"/>
+            <a:ext cx="1481328" cy="1234440"/>
+          </a:xfrm>
+          <a:prstGeom prst="rect">
+            <a:avLst/>
+          </a:prstGeom>
+          <a:noFill/>
+        </p:spPr>
+        <p:txBody>
+          <a:bodyPr wrap="square" anchor="ctr" lIns="45720" rIns="45720" tIns="27432" bIns="27432">
+            <a:spAutoFit/>
+          </a:bodyPr>
+          <a:lstStyle/>
+          <a:p>
+            <a:pPr algn="ctr"/>
+            <a:r>
+              <a:rPr sz="1500" b="1">
                 <a:solidFill>
                   <a:srgbClr val="16304F"/>
                 </a:solidFill>
@@ -11963,88 +12389,7 @@
       </p:sp>
       <p:sp>
         <p:nvSpPr>
-          <p:cNvPr id="35" name="Rounded Rectangle 34"/>
-          <p:cNvSpPr/>
-          <p:nvPr/>
-        </p:nvSpPr>
-        <p:spPr>
-          <a:xfrm>
-            <a:off x="10204703" y="2212848"/>
-            <a:ext cx="1115568" cy="365760"/>
-          </a:xfrm>
-          <a:prstGeom prst="roundRect">
-            <a:avLst>
-              <a:gd name="adj" fmla="val 30000"/>
-            </a:avLst>
-          </a:prstGeom>
-          <a:solidFill>
-            <a:srgbClr val="FFF2D6"/>
-          </a:solidFill>
-          <a:ln>
-            <a:noFill/>
-          </a:ln>
-          <a:effectLst/>
-        </p:spPr>
-        <p:style>
-          <a:lnRef idx="1">
-            <a:schemeClr val="accent1"/>
-          </a:lnRef>
-          <a:fillRef idx="3">
-            <a:schemeClr val="accent1"/>
-          </a:fillRef>
-          <a:effectRef idx="2">
-            <a:schemeClr val="accent1"/>
-          </a:effectRef>
-          <a:fontRef idx="minor">
-            <a:schemeClr val="lt1"/>
-          </a:fontRef>
-        </p:style>
-        <p:txBody>
-          <a:bodyPr rtlCol="0" anchor="ctr"/>
-          <a:lstStyle/>
-          <a:p>
-            <a:pPr algn="ctr"/>
-          </a:p>
-        </p:txBody>
-      </p:sp>
-      <p:sp>
-        <p:nvSpPr>
-          <p:cNvPr id="36" name="TextBox 35"/>
-          <p:cNvSpPr txBox="1"/>
-          <p:nvPr/>
-        </p:nvSpPr>
-        <p:spPr>
-          <a:xfrm>
-            <a:off x="10204703" y="2212848"/>
-            <a:ext cx="1115568" cy="365760"/>
-          </a:xfrm>
-          <a:prstGeom prst="rect">
-            <a:avLst/>
-          </a:prstGeom>
-          <a:noFill/>
-        </p:spPr>
-        <p:txBody>
-          <a:bodyPr wrap="square" anchor="ctr" lIns="45720" rIns="45720" tIns="27432" bIns="27432">
-            <a:spAutoFit/>
-          </a:bodyPr>
-          <a:lstStyle/>
-          <a:p>
-            <a:pPr algn="ctr"/>
-            <a:r>
-              <a:rPr sz="1100" b="1">
-                <a:solidFill>
-                  <a:srgbClr val="B36F00"/>
-                </a:solidFill>
-                <a:latin typeface="Microsoft JhengHei"/>
-              </a:rPr>
-              <a:t>局部重算</a:t>
-            </a:r>
-          </a:p>
-        </p:txBody>
-      </p:sp>
-      <p:sp>
-        <p:nvSpPr>
-          <p:cNvPr id="37" name="TextBox 36"/>
+          <p:cNvPr id="23" name="TextBox 22"/>
           <p:cNvSpPr txBox="1"/>
           <p:nvPr/>
         </p:nvSpPr>
@@ -12079,7 +12424,7 @@
       </p:sp>
       <p:sp>
         <p:nvSpPr>
-          <p:cNvPr id="38" name="TextBox 37"/>
+          <p:cNvPr id="24" name="TextBox 23"/>
           <p:cNvSpPr txBox="1"/>
           <p:nvPr/>
         </p:nvSpPr>
@@ -12114,7 +12459,7 @@
       </p:sp>
       <p:sp>
         <p:nvSpPr>
-          <p:cNvPr id="39" name="TextBox 38"/>
+          <p:cNvPr id="25" name="TextBox 24"/>
           <p:cNvSpPr txBox="1"/>
           <p:nvPr/>
         </p:nvSpPr>
@@ -12149,7 +12494,7 @@
       </p:sp>
       <p:sp>
         <p:nvSpPr>
-          <p:cNvPr id="40" name="TextBox 39"/>
+          <p:cNvPr id="26" name="TextBox 25"/>
           <p:cNvSpPr txBox="1"/>
           <p:nvPr/>
         </p:nvSpPr>

--- a/docs/提案/提案簡報-訴願智審臺.pptx
+++ b/docs/提案/提案簡報-訴願智審臺.pptx
@@ -3447,7 +3447,7 @@
                 </a:solidFill>
                 <a:latin typeface="Microsoft JhengHei"/>
               </a:rPr>
-              <a:t>WISXXXX 親友見面會　｜　Roy ／ Kevin</a:t>
+              <a:t>WISXXXX 親友見面會　｜　Kevin ／ Roy</a:t>
             </a:r>
           </a:p>
         </p:txBody>
@@ -9351,7 +9351,7 @@
                 </a:solidFill>
                 <a:latin typeface="Microsoft JhengHei"/>
               </a:rPr>
-              <a:t>審卷流程自動化</a:t>
+              <a:t>減少查找，專注判斷</a:t>
             </a:r>
           </a:p>
         </p:txBody>
@@ -9964,7 +9964,7 @@
                 </a:solidFill>
                 <a:latin typeface="Microsoft JhengHei"/>
               </a:rPr>
-              <a:t>把審卷的例行工作自動化，承辦人只做判斷</a:t>
+              <a:t>繁瑣的交給系統，判斷的留給承辦人</a:t>
             </a:r>
           </a:p>
         </p:txBody>
@@ -10113,7 +10113,7 @@
                 </a:solidFill>
                 <a:latin typeface="Microsoft JhengHei"/>
               </a:rPr>
-              <a:t>輔助判斷，不代為決定</a:t>
+              <a:t>讀卷比對、查法條函釋、找相似案例、擬草稿，四件事系統先做；輔助判斷，不代為決定</a:t>
             </a:r>
           </a:p>
         </p:txBody>

--- a/docs/提案/提案簡報-訴願智審臺.pptx
+++ b/docs/提案/提案簡報-訴願智審臺.pptx
@@ -9329,8 +9329,8 @@
         </p:nvSpPr>
         <p:spPr>
           <a:xfrm>
-            <a:off x="1965960" y="2011680"/>
-            <a:ext cx="3931920" cy="731520"/>
+            <a:off x="1965960" y="1874519"/>
+            <a:ext cx="3931920" cy="1417320"/>
           </a:xfrm>
           <a:prstGeom prst="rect">
             <a:avLst/>
@@ -9358,42 +9358,7 @@
       </p:sp>
       <p:sp>
         <p:nvSpPr>
-          <p:cNvPr id="12" name="TextBox 11"/>
-          <p:cNvSpPr txBox="1"/>
-          <p:nvPr/>
-        </p:nvSpPr>
-        <p:spPr>
-          <a:xfrm>
-            <a:off x="1965960" y="2743200"/>
-            <a:ext cx="3931920" cy="457200"/>
-          </a:xfrm>
-          <a:prstGeom prst="rect">
-            <a:avLst/>
-          </a:prstGeom>
-          <a:noFill/>
-        </p:spPr>
-        <p:txBody>
-          <a:bodyPr wrap="square" anchor="t" lIns="45720" rIns="45720" tIns="27432" bIns="27432">
-            <a:spAutoFit/>
-          </a:bodyPr>
-          <a:lstStyle/>
-          <a:p>
-            <a:pPr algn="l"/>
-            <a:r>
-              <a:rPr sz="1400" b="0">
-                <a:solidFill>
-                  <a:srgbClr val="8A5A00"/>
-                </a:solidFill>
-                <a:latin typeface="Microsoft JhengHei"/>
-              </a:rPr>
-              <a:t>輔助判斷，不代為決定</a:t>
-            </a:r>
-          </a:p>
-        </p:txBody>
-      </p:sp>
-      <p:sp>
-        <p:nvSpPr>
-          <p:cNvPr id="13" name="Rounded Rectangle 12"/>
+          <p:cNvPr id="12" name="Rounded Rectangle 11"/>
           <p:cNvSpPr/>
           <p:nvPr/>
         </p:nvSpPr>
@@ -9439,7 +9404,7 @@
       </p:sp>
       <p:sp>
         <p:nvSpPr>
-          <p:cNvPr id="14" name="Oval 13"/>
+          <p:cNvPr id="13" name="Oval 12"/>
           <p:cNvSpPr/>
           <p:nvPr/>
         </p:nvSpPr>
@@ -9492,7 +9457,7 @@
       </p:sp>
       <p:sp>
         <p:nvSpPr>
-          <p:cNvPr id="15" name="TextBox 14"/>
+          <p:cNvPr id="14" name="TextBox 13"/>
           <p:cNvSpPr txBox="1"/>
           <p:nvPr/>
         </p:nvSpPr>
@@ -9527,7 +9492,7 @@
       </p:sp>
       <p:sp>
         <p:nvSpPr>
-          <p:cNvPr id="16" name="Rounded Rectangle 15"/>
+          <p:cNvPr id="15" name="Rounded Rectangle 14"/>
           <p:cNvSpPr/>
           <p:nvPr/>
         </p:nvSpPr>
@@ -9573,7 +9538,7 @@
       </p:sp>
       <p:sp>
         <p:nvSpPr>
-          <p:cNvPr id="17" name="Oval 16"/>
+          <p:cNvPr id="16" name="Oval 15"/>
           <p:cNvSpPr/>
           <p:nvPr/>
         </p:nvSpPr>
@@ -9626,7 +9591,7 @@
       </p:sp>
       <p:sp>
         <p:nvSpPr>
-          <p:cNvPr id="18" name="TextBox 17"/>
+          <p:cNvPr id="17" name="TextBox 16"/>
           <p:cNvSpPr txBox="1"/>
           <p:nvPr/>
         </p:nvSpPr>
@@ -9661,7 +9626,7 @@
       </p:sp>
       <p:sp>
         <p:nvSpPr>
-          <p:cNvPr id="19" name="Rounded Rectangle 18"/>
+          <p:cNvPr id="18" name="Rounded Rectangle 17"/>
           <p:cNvSpPr/>
           <p:nvPr/>
         </p:nvSpPr>
@@ -9707,7 +9672,7 @@
       </p:sp>
       <p:sp>
         <p:nvSpPr>
-          <p:cNvPr id="20" name="Oval 19"/>
+          <p:cNvPr id="19" name="Oval 18"/>
           <p:cNvSpPr/>
           <p:nvPr/>
         </p:nvSpPr>
@@ -9760,7 +9725,7 @@
       </p:sp>
       <p:sp>
         <p:nvSpPr>
-          <p:cNvPr id="21" name="TextBox 20"/>
+          <p:cNvPr id="20" name="TextBox 19"/>
           <p:cNvSpPr txBox="1"/>
           <p:nvPr/>
         </p:nvSpPr>
@@ -9788,7 +9753,7 @@
                 </a:solidFill>
                 <a:latin typeface="Microsoft JhengHei"/>
               </a:rPr>
-              <a:t>數據飛輪：法規庫／案件庫</a:t>
+              <a:t>數據飛輪：案件庫／法規庫</a:t>
             </a:r>
           </a:p>
         </p:txBody>
@@ -10113,7 +10078,7 @@
                 </a:solidFill>
                 <a:latin typeface="Microsoft JhengHei"/>
               </a:rPr>
-              <a:t>讀卷比對、查法條函釋、找相似案例、擬草稿，四件事系統先做；輔助判斷，不代為決定</a:t>
+              <a:t>讀卷比對、查法條函釋、找相似案例、擬草稿，四件事系統先做</a:t>
             </a:r>
           </a:p>
         </p:txBody>

--- a/docs/提案/提案簡報-訴願智審臺.pptx
+++ b/docs/提案/提案簡報-訴願智審臺.pptx
@@ -3953,7 +3953,7 @@
                 </a:solidFill>
                 <a:latin typeface="Microsoft JhengHei"/>
               </a:rPr>
-              <a:t>01 ／ 數據飛輪</a:t>
+              <a:t>01 ／ 破題</a:t>
             </a:r>
           </a:p>
         </p:txBody>
@@ -3988,7 +3988,7 @@
                 </a:solidFill>
                 <a:latin typeface="Microsoft JhengHei"/>
               </a:rPr>
-              <a:t>數據飛輪：決定書人人有，卷證只能自己攢</a:t>
+              <a:t>四個前提，缺一不可</a:t>
             </a:r>
           </a:p>
         </p:txBody>
@@ -4116,7 +4116,7 @@
         <p:spPr>
           <a:xfrm>
             <a:off x="640080" y="1508760"/>
-            <a:ext cx="5029200" cy="2651760"/>
+            <a:ext cx="5394960" cy="2148840"/>
           </a:xfrm>
           <a:prstGeom prst="roundRect">
             <a:avLst>
@@ -4155,289 +4155,14 @@
       </p:sp>
       <p:sp>
         <p:nvSpPr>
-          <p:cNvPr id="10" name="TextBox 9"/>
-          <p:cNvSpPr txBox="1"/>
-          <p:nvPr/>
-        </p:nvSpPr>
-        <p:spPr>
-          <a:xfrm>
-            <a:off x="868680" y="1645920"/>
-            <a:ext cx="4572000" cy="365760"/>
-          </a:xfrm>
-          <a:prstGeom prst="rect">
-            <a:avLst/>
-          </a:prstGeom>
-          <a:noFill/>
-        </p:spPr>
-        <p:txBody>
-          <a:bodyPr wrap="square" anchor="t" lIns="45720" rIns="45720" tIns="27432" bIns="27432">
-            <a:spAutoFit/>
-          </a:bodyPr>
-          <a:lstStyle/>
-          <a:p>
-            <a:pPr algn="l"/>
-            <a:r>
-              <a:rPr sz="1500" b="1">
-                <a:solidFill>
-                  <a:srgbClr val="16304F"/>
-                </a:solidFill>
-                <a:latin typeface="Microsoft JhengHei"/>
-              </a:rPr>
-              <a:t>為什麼只能自己累積</a:t>
-            </a:r>
-          </a:p>
-        </p:txBody>
-      </p:sp>
-      <p:sp>
-        <p:nvSpPr>
-          <p:cNvPr id="11" name="TextBox 10"/>
-          <p:cNvSpPr txBox="1"/>
-          <p:nvPr/>
-        </p:nvSpPr>
-        <p:spPr>
-          <a:xfrm>
-            <a:off x="868680" y="2057400"/>
-            <a:ext cx="4572000" cy="2103120"/>
-          </a:xfrm>
-          <a:prstGeom prst="rect">
-            <a:avLst/>
-          </a:prstGeom>
-          <a:noFill/>
-        </p:spPr>
-        <p:txBody>
-          <a:bodyPr wrap="square" anchor="t" lIns="45720" rIns="45720" tIns="27432" bIns="27432">
-            <a:spAutoFit/>
-          </a:bodyPr>
-          <a:lstStyle/>
-          <a:p>
-            <a:pPr algn="l"/>
-            <a:r>
-              <a:rPr sz="1200" b="0">
-                <a:solidFill>
-                  <a:srgbClr val="334455"/>
-                </a:solidFill>
-                <a:latin typeface="Microsoft JhengHei"/>
-              </a:rPr>
-              <a:t>・訴願法 §58 III／IV：答辯書只存在於機關、受理機關卷內、訴願人手上，沒有公開機制
-・訴願法 §49、§75 II：卷宗閱覽限訴願人、參加人、代理人
-・決定書到處都是，答辯書一份難求——制度使然。</a:t>
-            </a:r>
-          </a:p>
-        </p:txBody>
-      </p:sp>
-      <p:sp>
-        <p:nvSpPr>
-          <p:cNvPr id="12" name="Rectangle 11"/>
+          <p:cNvPr id="10" name="Oval 9"/>
           <p:cNvSpPr/>
           <p:nvPr/>
         </p:nvSpPr>
         <p:spPr>
           <a:xfrm>
-            <a:off x="640080" y="4343400"/>
-            <a:ext cx="5029200" cy="1143000"/>
-          </a:xfrm>
-          <a:prstGeom prst="rect">
-            <a:avLst/>
-          </a:prstGeom>
-          <a:solidFill>
-            <a:srgbClr val="FFF8EA"/>
-          </a:solidFill>
-          <a:ln>
-            <a:noFill/>
-          </a:ln>
-          <a:effectLst/>
-        </p:spPr>
-        <p:style>
-          <a:lnRef idx="1">
-            <a:schemeClr val="accent1"/>
-          </a:lnRef>
-          <a:fillRef idx="3">
-            <a:schemeClr val="accent1"/>
-          </a:fillRef>
-          <a:effectRef idx="2">
-            <a:schemeClr val="accent1"/>
-          </a:effectRef>
-          <a:fontRef idx="minor">
-            <a:schemeClr val="lt1"/>
-          </a:fontRef>
-        </p:style>
-        <p:txBody>
-          <a:bodyPr rtlCol="0" anchor="ctr"/>
-          <a:lstStyle/>
-          <a:p>
-            <a:pPr algn="ctr"/>
-          </a:p>
-        </p:txBody>
-      </p:sp>
-      <p:sp>
-        <p:nvSpPr>
-          <p:cNvPr id="13" name="Rectangle 12"/>
-          <p:cNvSpPr/>
-          <p:nvPr/>
-        </p:nvSpPr>
-        <p:spPr>
-          <a:xfrm>
-            <a:off x="640080" y="4343400"/>
-            <a:ext cx="64008" cy="1143000"/>
-          </a:xfrm>
-          <a:prstGeom prst="rect">
-            <a:avLst/>
-          </a:prstGeom>
-          <a:solidFill>
-            <a:srgbClr val="D98E04"/>
-          </a:solidFill>
-          <a:ln>
-            <a:noFill/>
-          </a:ln>
-          <a:effectLst/>
-        </p:spPr>
-        <p:style>
-          <a:lnRef idx="1">
-            <a:schemeClr val="accent1"/>
-          </a:lnRef>
-          <a:fillRef idx="3">
-            <a:schemeClr val="accent1"/>
-          </a:fillRef>
-          <a:effectRef idx="2">
-            <a:schemeClr val="accent1"/>
-          </a:effectRef>
-          <a:fontRef idx="minor">
-            <a:schemeClr val="lt1"/>
-          </a:fontRef>
-        </p:style>
-        <p:txBody>
-          <a:bodyPr rtlCol="0" anchor="ctr"/>
-          <a:lstStyle/>
-          <a:p>
-            <a:pPr algn="ctr"/>
-          </a:p>
-        </p:txBody>
-      </p:sp>
-      <p:sp>
-        <p:nvSpPr>
-          <p:cNvPr id="14" name="TextBox 13"/>
-          <p:cNvSpPr txBox="1"/>
-          <p:nvPr/>
-        </p:nvSpPr>
-        <p:spPr>
-          <a:xfrm>
-            <a:off x="822960" y="4370832"/>
-            <a:ext cx="4754880" cy="1097280"/>
-          </a:xfrm>
-          <a:prstGeom prst="rect">
-            <a:avLst/>
-          </a:prstGeom>
-          <a:noFill/>
-        </p:spPr>
-        <p:txBody>
-          <a:bodyPr wrap="square" anchor="ctr" lIns="45720" rIns="45720" tIns="27432" bIns="27432">
-            <a:spAutoFit/>
-          </a:bodyPr>
-          <a:lstStyle/>
-          <a:p>
-            <a:pPr algn="l"/>
-            <a:r>
-              <a:rPr sz="1200" b="0">
-                <a:solidFill>
-                  <a:srgbClr val="334455"/>
-                </a:solidFill>
-                <a:latin typeface="Microsoft JhengHei"/>
-              </a:rPr>
-              <a:t>中途補件走同一條路：一句「補這份」，只認新檔、只重算牽動的步驟。</a:t>
-            </a:r>
-          </a:p>
-        </p:txBody>
-      </p:sp>
-      <p:sp>
-        <p:nvSpPr>
-          <p:cNvPr id="15" name="Oval 14"/>
-          <p:cNvSpPr/>
-          <p:nvPr/>
-        </p:nvSpPr>
-        <p:spPr>
-          <a:xfrm>
-            <a:off x="7360919" y="2103120"/>
-            <a:ext cx="2834640" cy="2834640"/>
-          </a:xfrm>
-          <a:prstGeom prst="ellipse">
-            <a:avLst/>
-          </a:prstGeom>
-          <a:noFill/>
-          <a:ln w="50800">
-            <a:solidFill>
-              <a:srgbClr val="D98E04"/>
-            </a:solidFill>
-            <a:prstDash val="dash"/>
-          </a:ln>
-          <a:effectLst/>
-        </p:spPr>
-        <p:style>
-          <a:lnRef idx="1">
-            <a:schemeClr val="accent1"/>
-          </a:lnRef>
-          <a:fillRef idx="3">
-            <a:schemeClr val="accent1"/>
-          </a:fillRef>
-          <a:effectRef idx="2">
-            <a:schemeClr val="accent1"/>
-          </a:effectRef>
-          <a:fontRef idx="minor">
-            <a:schemeClr val="lt1"/>
-          </a:fontRef>
-        </p:style>
-        <p:txBody>
-          <a:bodyPr rtlCol="0" anchor="ctr"/>
-          <a:lstStyle/>
-          <a:p>
-            <a:pPr algn="ctr"/>
-          </a:p>
-        </p:txBody>
-      </p:sp>
-      <p:sp>
-        <p:nvSpPr>
-          <p:cNvPr id="16" name="TextBox 15"/>
-          <p:cNvSpPr txBox="1"/>
-          <p:nvPr/>
-        </p:nvSpPr>
-        <p:spPr>
-          <a:xfrm>
-            <a:off x="7863840" y="3246120"/>
-            <a:ext cx="1828800" cy="548640"/>
-          </a:xfrm>
-          <a:prstGeom prst="rect">
-            <a:avLst/>
-          </a:prstGeom>
-          <a:noFill/>
-        </p:spPr>
-        <p:txBody>
-          <a:bodyPr wrap="square" anchor="ctr" lIns="45720" rIns="45720" tIns="27432" bIns="27432">
-            <a:spAutoFit/>
-          </a:bodyPr>
-          <a:lstStyle/>
-          <a:p>
-            <a:pPr algn="ctr"/>
-            <a:r>
-              <a:rPr sz="1800" b="1">
-                <a:solidFill>
-                  <a:srgbClr val="D98E04"/>
-                </a:solidFill>
-                <a:latin typeface="Microsoft JhengHei"/>
-              </a:rPr>
-              <a:t>越用越準</a:t>
-            </a:r>
-          </a:p>
-        </p:txBody>
-      </p:sp>
-      <p:sp>
-        <p:nvSpPr>
-          <p:cNvPr id="17" name="Oval 16"/>
-          <p:cNvSpPr/>
-          <p:nvPr/>
-        </p:nvSpPr>
-        <p:spPr>
-          <a:xfrm>
-            <a:off x="8366760" y="1691639"/>
-            <a:ext cx="822960" cy="822960"/>
+            <a:off x="960119" y="2194560"/>
+            <a:ext cx="777240" cy="777240"/>
           </a:xfrm>
           <a:prstGeom prst="ellipse">
             <a:avLst/>
@@ -4470,27 +4195,27 @@
           <a:p>
             <a:pPr algn="ctr"/>
             <a:r>
-              <a:rPr sz="1400" b="1">
+              <a:rPr sz="2600" b="1">
                 <a:solidFill>
                   <a:srgbClr val="FFFFFF"/>
                 </a:solidFill>
                 <a:latin typeface="Microsoft JhengHei"/>
               </a:rPr>
-              <a:t>辦案</a:t>
-            </a:r>
-          </a:p>
-        </p:txBody>
-      </p:sp>
-      <p:sp>
-        <p:nvSpPr>
-          <p:cNvPr id="18" name="TextBox 17"/>
+              <a:t>1</a:t>
+            </a:r>
+          </a:p>
+        </p:txBody>
+      </p:sp>
+      <p:sp>
+        <p:nvSpPr>
+          <p:cNvPr id="11" name="TextBox 10"/>
           <p:cNvSpPr txBox="1"/>
           <p:nvPr/>
         </p:nvSpPr>
         <p:spPr>
           <a:xfrm>
-            <a:off x="7772400" y="868679"/>
-            <a:ext cx="2011680" cy="457200"/>
+            <a:off x="1965960" y="1874519"/>
+            <a:ext cx="3931920" cy="1417320"/>
           </a:xfrm>
           <a:prstGeom prst="rect">
             <a:avLst/>
@@ -4503,29 +4228,75 @@
           </a:bodyPr>
           <a:lstStyle/>
           <a:p>
-            <a:pPr algn="ctr"/>
-            <a:r>
-              <a:rPr sz="1050" b="0">
-                <a:solidFill>
-                  <a:srgbClr val="334455"/>
-                </a:solidFill>
-                <a:latin typeface="Microsoft JhengHei"/>
-              </a:rPr>
-              <a:t>承辦人上傳卷宗、答辯書</a:t>
-            </a:r>
-          </a:p>
-        </p:txBody>
-      </p:sp>
-      <p:sp>
-        <p:nvSpPr>
-          <p:cNvPr id="19" name="Oval 18"/>
+            <a:pPr algn="l"/>
+            <a:r>
+              <a:rPr sz="2600" b="1">
+                <a:solidFill>
+                  <a:srgbClr val="16304F"/>
+                </a:solidFill>
+                <a:latin typeface="Microsoft JhengHei"/>
+              </a:rPr>
+              <a:t>減少查找，專注判斷</a:t>
+            </a:r>
+          </a:p>
+        </p:txBody>
+      </p:sp>
+      <p:sp>
+        <p:nvSpPr>
+          <p:cNvPr id="12" name="Rounded Rectangle 11"/>
           <p:cNvSpPr/>
           <p:nvPr/>
         </p:nvSpPr>
         <p:spPr>
           <a:xfrm>
-            <a:off x="9714711" y="2670984"/>
-            <a:ext cx="822960" cy="822960"/>
+            <a:off x="6172200" y="1508760"/>
+            <a:ext cx="5394960" cy="2148840"/>
+          </a:xfrm>
+          <a:prstGeom prst="roundRect">
+            <a:avLst>
+              <a:gd name="adj" fmla="val 8000"/>
+            </a:avLst>
+          </a:prstGeom>
+          <a:solidFill>
+            <a:srgbClr val="F4F6F9"/>
+          </a:solidFill>
+          <a:ln>
+            <a:noFill/>
+          </a:ln>
+          <a:effectLst/>
+        </p:spPr>
+        <p:style>
+          <a:lnRef idx="1">
+            <a:schemeClr val="accent1"/>
+          </a:lnRef>
+          <a:fillRef idx="3">
+            <a:schemeClr val="accent1"/>
+          </a:fillRef>
+          <a:effectRef idx="2">
+            <a:schemeClr val="accent1"/>
+          </a:effectRef>
+          <a:fontRef idx="minor">
+            <a:schemeClr val="lt1"/>
+          </a:fontRef>
+        </p:style>
+        <p:txBody>
+          <a:bodyPr rtlCol="0" anchor="ctr"/>
+          <a:lstStyle/>
+          <a:p>
+            <a:pPr algn="ctr"/>
+          </a:p>
+        </p:txBody>
+      </p:sp>
+      <p:sp>
+        <p:nvSpPr>
+          <p:cNvPr id="13" name="Oval 12"/>
+          <p:cNvSpPr/>
+          <p:nvPr/>
+        </p:nvSpPr>
+        <p:spPr>
+          <a:xfrm>
+            <a:off x="6492240" y="2194560"/>
+            <a:ext cx="777240" cy="777240"/>
           </a:xfrm>
           <a:prstGeom prst="ellipse">
             <a:avLst/>
@@ -4558,27 +4329,27 @@
           <a:p>
             <a:pPr algn="ctr"/>
             <a:r>
-              <a:rPr sz="1400" b="1">
+              <a:rPr sz="2600" b="1">
                 <a:solidFill>
                   <a:srgbClr val="FFFFFF"/>
                 </a:solidFill>
                 <a:latin typeface="Microsoft JhengHei"/>
               </a:rPr>
-              <a:t>分類</a:t>
-            </a:r>
-          </a:p>
-        </p:txBody>
-      </p:sp>
-      <p:sp>
-        <p:nvSpPr>
-          <p:cNvPr id="20" name="TextBox 19"/>
+              <a:t>2</a:t>
+            </a:r>
+          </a:p>
+        </p:txBody>
+      </p:sp>
+      <p:sp>
+        <p:nvSpPr>
+          <p:cNvPr id="14" name="TextBox 13"/>
           <p:cNvSpPr txBox="1"/>
           <p:nvPr/>
         </p:nvSpPr>
         <p:spPr>
           <a:xfrm>
-            <a:off x="10076962" y="2543042"/>
-            <a:ext cx="2011680" cy="457200"/>
+            <a:off x="7498079" y="1874519"/>
+            <a:ext cx="3931920" cy="1417320"/>
           </a:xfrm>
           <a:prstGeom prst="rect">
             <a:avLst/>
@@ -4593,27 +4364,73 @@
           <a:p>
             <a:pPr algn="l"/>
             <a:r>
-              <a:rPr sz="1050" b="0">
-                <a:solidFill>
-                  <a:srgbClr val="334455"/>
-                </a:solidFill>
-                <a:latin typeface="Microsoft JhengHei"/>
-              </a:rPr>
-              <a:t>27 類文件，自動命名</a:t>
-            </a:r>
-          </a:p>
-        </p:txBody>
-      </p:sp>
-      <p:sp>
-        <p:nvSpPr>
-          <p:cNvPr id="21" name="Oval 20"/>
+              <a:rPr sz="2600" b="1">
+                <a:solidFill>
+                  <a:srgbClr val="16304F"/>
+                </a:solidFill>
+                <a:latin typeface="Microsoft JhengHei"/>
+              </a:rPr>
+              <a:t>每一步透明，每一步可修</a:t>
+            </a:r>
+          </a:p>
+        </p:txBody>
+      </p:sp>
+      <p:sp>
+        <p:nvSpPr>
+          <p:cNvPr id="15" name="Rounded Rectangle 14"/>
           <p:cNvSpPr/>
           <p:nvPr/>
         </p:nvSpPr>
         <p:spPr>
           <a:xfrm>
-            <a:off x="9199839" y="4255595"/>
-            <a:ext cx="822960" cy="822960"/>
+            <a:off x="640080" y="3840479"/>
+            <a:ext cx="5394960" cy="2148840"/>
+          </a:xfrm>
+          <a:prstGeom prst="roundRect">
+            <a:avLst>
+              <a:gd name="adj" fmla="val 8000"/>
+            </a:avLst>
+          </a:prstGeom>
+          <a:solidFill>
+            <a:srgbClr val="F4F6F9"/>
+          </a:solidFill>
+          <a:ln>
+            <a:noFill/>
+          </a:ln>
+          <a:effectLst/>
+        </p:spPr>
+        <p:style>
+          <a:lnRef idx="1">
+            <a:schemeClr val="accent1"/>
+          </a:lnRef>
+          <a:fillRef idx="3">
+            <a:schemeClr val="accent1"/>
+          </a:fillRef>
+          <a:effectRef idx="2">
+            <a:schemeClr val="accent1"/>
+          </a:effectRef>
+          <a:fontRef idx="minor">
+            <a:schemeClr val="lt1"/>
+          </a:fontRef>
+        </p:style>
+        <p:txBody>
+          <a:bodyPr rtlCol="0" anchor="ctr"/>
+          <a:lstStyle/>
+          <a:p>
+            <a:pPr algn="ctr"/>
+          </a:p>
+        </p:txBody>
+      </p:sp>
+      <p:sp>
+        <p:nvSpPr>
+          <p:cNvPr id="16" name="Oval 15"/>
+          <p:cNvSpPr/>
+          <p:nvPr/>
+        </p:nvSpPr>
+        <p:spPr>
+          <a:xfrm>
+            <a:off x="960119" y="4526279"/>
+            <a:ext cx="777240" cy="777240"/>
           </a:xfrm>
           <a:prstGeom prst="ellipse">
             <a:avLst/>
@@ -4646,27 +4463,27 @@
           <a:p>
             <a:pPr algn="ctr"/>
             <a:r>
-              <a:rPr sz="1400" b="1">
+              <a:rPr sz="2600" b="1">
                 <a:solidFill>
                   <a:srgbClr val="FFFFFF"/>
                 </a:solidFill>
                 <a:latin typeface="Microsoft JhengHei"/>
               </a:rPr>
-              <a:t>分析</a:t>
-            </a:r>
-          </a:p>
-        </p:txBody>
-      </p:sp>
-      <p:sp>
-        <p:nvSpPr>
-          <p:cNvPr id="22" name="TextBox 21"/>
+              <a:t>3</a:t>
+            </a:r>
+          </a:p>
+        </p:txBody>
+      </p:sp>
+      <p:sp>
+        <p:nvSpPr>
+          <p:cNvPr id="17" name="TextBox 16"/>
           <p:cNvSpPr txBox="1"/>
           <p:nvPr/>
         </p:nvSpPr>
         <p:spPr>
           <a:xfrm>
-            <a:off x="9196697" y="5252217"/>
-            <a:ext cx="2011680" cy="457200"/>
+            <a:off x="1965960" y="4206240"/>
+            <a:ext cx="3931920" cy="1417320"/>
           </a:xfrm>
           <a:prstGeom prst="rect">
             <a:avLst/>
@@ -4681,27 +4498,73 @@
           <a:p>
             <a:pPr algn="l"/>
             <a:r>
-              <a:rPr sz="1050" b="0">
-                <a:solidFill>
-                  <a:srgbClr val="334455"/>
-                </a:solidFill>
-                <a:latin typeface="Microsoft JhengHei"/>
-              </a:rPr>
-              <a:t>查法規庫、找相似案例、寫草稿</a:t>
-            </a:r>
-          </a:p>
-        </p:txBody>
-      </p:sp>
-      <p:sp>
-        <p:nvSpPr>
-          <p:cNvPr id="23" name="Oval 22"/>
+              <a:rPr sz="2600" b="1">
+                <a:solidFill>
+                  <a:srgbClr val="16304F"/>
+                </a:solidFill>
+                <a:latin typeface="Microsoft JhengHei"/>
+              </a:rPr>
+              <a:t>修正可提、可查、可追</a:t>
+            </a:r>
+          </a:p>
+        </p:txBody>
+      </p:sp>
+      <p:sp>
+        <p:nvSpPr>
+          <p:cNvPr id="18" name="Rounded Rectangle 17"/>
           <p:cNvSpPr/>
           <p:nvPr/>
         </p:nvSpPr>
         <p:spPr>
           <a:xfrm>
-            <a:off x="7533680" y="4255595"/>
-            <a:ext cx="822960" cy="822960"/>
+            <a:off x="6172200" y="3840479"/>
+            <a:ext cx="5394960" cy="2148840"/>
+          </a:xfrm>
+          <a:prstGeom prst="roundRect">
+            <a:avLst>
+              <a:gd name="adj" fmla="val 8000"/>
+            </a:avLst>
+          </a:prstGeom>
+          <a:solidFill>
+            <a:srgbClr val="F4F6F9"/>
+          </a:solidFill>
+          <a:ln>
+            <a:noFill/>
+          </a:ln>
+          <a:effectLst/>
+        </p:spPr>
+        <p:style>
+          <a:lnRef idx="1">
+            <a:schemeClr val="accent1"/>
+          </a:lnRef>
+          <a:fillRef idx="3">
+            <a:schemeClr val="accent1"/>
+          </a:fillRef>
+          <a:effectRef idx="2">
+            <a:schemeClr val="accent1"/>
+          </a:effectRef>
+          <a:fontRef idx="minor">
+            <a:schemeClr val="lt1"/>
+          </a:fontRef>
+        </p:style>
+        <p:txBody>
+          <a:bodyPr rtlCol="0" anchor="ctr"/>
+          <a:lstStyle/>
+          <a:p>
+            <a:pPr algn="ctr"/>
+          </a:p>
+        </p:txBody>
+      </p:sp>
+      <p:sp>
+        <p:nvSpPr>
+          <p:cNvPr id="19" name="Oval 18"/>
+          <p:cNvSpPr/>
+          <p:nvPr/>
+        </p:nvSpPr>
+        <p:spPr>
+          <a:xfrm>
+            <a:off x="6492240" y="4526279"/>
+            <a:ext cx="777240" cy="777240"/>
           </a:xfrm>
           <a:prstGeom prst="ellipse">
             <a:avLst/>
@@ -4734,27 +4597,27 @@
           <a:p>
             <a:pPr algn="ctr"/>
             <a:r>
-              <a:rPr sz="1400" b="1">
+              <a:rPr sz="2600" b="1">
                 <a:solidFill>
                   <a:srgbClr val="FFFFFF"/>
                 </a:solidFill>
                 <a:latin typeface="Microsoft JhengHei"/>
               </a:rPr>
-              <a:t>修正</a:t>
-            </a:r>
-          </a:p>
-        </p:txBody>
-      </p:sp>
-      <p:sp>
-        <p:nvSpPr>
-          <p:cNvPr id="24" name="TextBox 23"/>
+              <a:t>4</a:t>
+            </a:r>
+          </a:p>
+        </p:txBody>
+      </p:sp>
+      <p:sp>
+        <p:nvSpPr>
+          <p:cNvPr id="20" name="TextBox 19"/>
           <p:cNvSpPr txBox="1"/>
           <p:nvPr/>
         </p:nvSpPr>
         <p:spPr>
           <a:xfrm>
-            <a:off x="6348102" y="5252217"/>
-            <a:ext cx="2011680" cy="457200"/>
+            <a:off x="7498079" y="4206240"/>
+            <a:ext cx="3931920" cy="1417320"/>
           </a:xfrm>
           <a:prstGeom prst="rect">
             <a:avLst/>
@@ -4767,103 +4630,15 @@
           </a:bodyPr>
           <a:lstStyle/>
           <a:p>
-            <a:pPr algn="r"/>
-            <a:r>
-              <a:rPr sz="1050" b="0">
-                <a:solidFill>
-                  <a:srgbClr val="334455"/>
-                </a:solidFill>
-                <a:latin typeface="Microsoft JhengHei"/>
-              </a:rPr>
-              <a:t>承辦人確認或修改</a:t>
-            </a:r>
-          </a:p>
-        </p:txBody>
-      </p:sp>
-      <p:sp>
-        <p:nvSpPr>
-          <p:cNvPr id="25" name="Oval 24"/>
-          <p:cNvSpPr/>
-          <p:nvPr/>
-        </p:nvSpPr>
-        <p:spPr>
-          <a:xfrm>
-            <a:off x="7018808" y="2670984"/>
-            <a:ext cx="822960" cy="822960"/>
-          </a:xfrm>
-          <a:prstGeom prst="ellipse">
-            <a:avLst/>
-          </a:prstGeom>
-          <a:solidFill>
-            <a:srgbClr val="16304F"/>
-          </a:solidFill>
-          <a:ln>
-            <a:noFill/>
-          </a:ln>
-          <a:effectLst/>
-        </p:spPr>
-        <p:style>
-          <a:lnRef idx="1">
-            <a:schemeClr val="accent1"/>
-          </a:lnRef>
-          <a:fillRef idx="3">
-            <a:schemeClr val="accent1"/>
-          </a:fillRef>
-          <a:effectRef idx="2">
-            <a:schemeClr val="accent1"/>
-          </a:effectRef>
-          <a:fontRef idx="minor">
-            <a:schemeClr val="lt1"/>
-          </a:fontRef>
-        </p:style>
-        <p:txBody>
-          <a:bodyPr rtlCol="0" anchor="ctr" lIns="0" rIns="0" tIns="0" bIns="0"/>
-          <a:lstStyle/>
-          <a:p>
-            <a:pPr algn="ctr"/>
-            <a:r>
-              <a:rPr sz="1400" b="1">
-                <a:solidFill>
-                  <a:srgbClr val="FFFFFF"/>
-                </a:solidFill>
-                <a:latin typeface="Microsoft JhengHei"/>
-              </a:rPr>
-              <a:t>入庫</a:t>
-            </a:r>
-          </a:p>
-        </p:txBody>
-      </p:sp>
-      <p:sp>
-        <p:nvSpPr>
-          <p:cNvPr id="26" name="TextBox 25"/>
-          <p:cNvSpPr txBox="1"/>
-          <p:nvPr/>
-        </p:nvSpPr>
-        <p:spPr>
-          <a:xfrm>
-            <a:off x="5467837" y="2543042"/>
-            <a:ext cx="2011680" cy="457200"/>
-          </a:xfrm>
-          <a:prstGeom prst="rect">
-            <a:avLst/>
-          </a:prstGeom>
-          <a:noFill/>
-        </p:spPr>
-        <p:txBody>
-          <a:bodyPr wrap="square" anchor="ctr" lIns="45720" rIns="45720" tIns="27432" bIns="27432">
-            <a:spAutoFit/>
-          </a:bodyPr>
-          <a:lstStyle/>
-          <a:p>
-            <a:pPr algn="r"/>
-            <a:r>
-              <a:rPr sz="1050" b="0">
-                <a:solidFill>
-                  <a:srgbClr val="334455"/>
-                </a:solidFill>
-                <a:latin typeface="Microsoft JhengHei"/>
-              </a:rPr>
-              <a:t>下一案的相似案例＋法規版本更新</a:t>
+            <a:pPr algn="l"/>
+            <a:r>
+              <a:rPr sz="2600" b="1">
+                <a:solidFill>
+                  <a:srgbClr val="16304F"/>
+                </a:solidFill>
+                <a:latin typeface="Microsoft JhengHei"/>
+              </a:rPr>
+              <a:t>數據飛輪：案件庫／法規庫</a:t>
             </a:r>
           </a:p>
         </p:txBody>

--- a/docs/提案/提案簡報-訴願智審臺.pptx
+++ b/docs/提案/提案簡報-訴願智審臺.pptx
@@ -15,6 +15,7 @@
     <p:sldId id="263" r:id="rId14"/>
     <p:sldId id="264" r:id="rId15"/>
     <p:sldId id="265" r:id="rId16"/>
+    <p:sldId id="266" r:id="rId17"/>
   </p:sldIdLst>
   <p:sldSz cx="12191695" cy="6858000" type="screen4x3"/>
   <p:notesSz cx="6858000" cy="9144000"/>
@@ -3510,6 +3511,2079 @@
         <p:spPr>
           <a:xfrm>
             <a:off x="0" y="0"/>
+            <a:ext cx="9509760" cy="73152"/>
+          </a:xfrm>
+          <a:prstGeom prst="rect">
+            <a:avLst/>
+          </a:prstGeom>
+          <a:solidFill>
+            <a:srgbClr val="16304F"/>
+          </a:solidFill>
+          <a:ln>
+            <a:noFill/>
+          </a:ln>
+          <a:effectLst/>
+        </p:spPr>
+        <p:style>
+          <a:lnRef idx="1">
+            <a:schemeClr val="accent1"/>
+          </a:lnRef>
+          <a:fillRef idx="3">
+            <a:schemeClr val="accent1"/>
+          </a:fillRef>
+          <a:effectRef idx="2">
+            <a:schemeClr val="accent1"/>
+          </a:effectRef>
+          <a:fontRef idx="minor">
+            <a:schemeClr val="lt1"/>
+          </a:fontRef>
+        </p:style>
+        <p:txBody>
+          <a:bodyPr rtlCol="0" anchor="ctr"/>
+          <a:lstStyle/>
+          <a:p>
+            <a:pPr algn="ctr"/>
+          </a:p>
+        </p:txBody>
+      </p:sp>
+      <p:sp>
+        <p:nvSpPr>
+          <p:cNvPr id="3" name="Rectangle 2"/>
+          <p:cNvSpPr/>
+          <p:nvPr/>
+        </p:nvSpPr>
+        <p:spPr>
+          <a:xfrm>
+            <a:off x="9509760" y="0"/>
+            <a:ext cx="2681935" cy="73152"/>
+          </a:xfrm>
+          <a:prstGeom prst="rect">
+            <a:avLst/>
+          </a:prstGeom>
+          <a:solidFill>
+            <a:srgbClr val="D98E04"/>
+          </a:solidFill>
+          <a:ln>
+            <a:noFill/>
+          </a:ln>
+          <a:effectLst/>
+        </p:spPr>
+        <p:style>
+          <a:lnRef idx="1">
+            <a:schemeClr val="accent1"/>
+          </a:lnRef>
+          <a:fillRef idx="3">
+            <a:schemeClr val="accent1"/>
+          </a:fillRef>
+          <a:effectRef idx="2">
+            <a:schemeClr val="accent1"/>
+          </a:effectRef>
+          <a:fontRef idx="minor">
+            <a:schemeClr val="lt1"/>
+          </a:fontRef>
+        </p:style>
+        <p:txBody>
+          <a:bodyPr rtlCol="0" anchor="ctr"/>
+          <a:lstStyle/>
+          <a:p>
+            <a:pPr algn="ctr"/>
+          </a:p>
+        </p:txBody>
+      </p:sp>
+      <p:sp>
+        <p:nvSpPr>
+          <p:cNvPr id="4" name="TextBox 3"/>
+          <p:cNvSpPr txBox="1"/>
+          <p:nvPr/>
+        </p:nvSpPr>
+        <p:spPr>
+          <a:xfrm>
+            <a:off x="640080" y="384048"/>
+            <a:ext cx="7315200" cy="274320"/>
+          </a:xfrm>
+          <a:prstGeom prst="rect">
+            <a:avLst/>
+          </a:prstGeom>
+          <a:noFill/>
+        </p:spPr>
+        <p:txBody>
+          <a:bodyPr wrap="square" anchor="t" lIns="45720" rIns="45720" tIns="27432" bIns="27432">
+            <a:spAutoFit/>
+          </a:bodyPr>
+          <a:lstStyle/>
+          <a:p>
+            <a:pPr algn="l"/>
+            <a:r>
+              <a:rPr sz="1100" b="1">
+                <a:solidFill>
+                  <a:srgbClr val="D98E04"/>
+                </a:solidFill>
+                <a:latin typeface="Microsoft JhengHei"/>
+              </a:rPr>
+              <a:t>09 ／ 完成度與評分</a:t>
+            </a:r>
+          </a:p>
+        </p:txBody>
+      </p:sp>
+      <p:sp>
+        <p:nvSpPr>
+          <p:cNvPr id="5" name="TextBox 4"/>
+          <p:cNvSpPr txBox="1"/>
+          <p:nvPr/>
+        </p:nvSpPr>
+        <p:spPr>
+          <a:xfrm>
+            <a:off x="640080" y="603504"/>
+            <a:ext cx="10972800" cy="731520"/>
+          </a:xfrm>
+          <a:prstGeom prst="rect">
+            <a:avLst/>
+          </a:prstGeom>
+          <a:noFill/>
+        </p:spPr>
+        <p:txBody>
+          <a:bodyPr wrap="square" anchor="t" lIns="45720" rIns="45720" tIns="27432" bIns="27432">
+            <a:spAutoFit/>
+          </a:bodyPr>
+          <a:lstStyle/>
+          <a:p>
+            <a:pPr algn="l"/>
+            <a:r>
+              <a:rPr sz="2800" b="1">
+                <a:solidFill>
+                  <a:srgbClr val="16304F"/>
+                </a:solidFill>
+                <a:latin typeface="Microsoft JhengHei"/>
+              </a:rPr>
+              <a:t>今天做到哪裡</a:t>
+            </a:r>
+          </a:p>
+        </p:txBody>
+      </p:sp>
+      <p:sp>
+        <p:nvSpPr>
+          <p:cNvPr id="6" name="Rectangle 5"/>
+          <p:cNvSpPr/>
+          <p:nvPr/>
+        </p:nvSpPr>
+        <p:spPr>
+          <a:xfrm>
+            <a:off x="640080" y="6400800"/>
+            <a:ext cx="10908792" cy="9144"/>
+          </a:xfrm>
+          <a:prstGeom prst="rect">
+            <a:avLst/>
+          </a:prstGeom>
+          <a:solidFill>
+            <a:srgbClr val="E6EAF0"/>
+          </a:solidFill>
+          <a:ln>
+            <a:noFill/>
+          </a:ln>
+          <a:effectLst/>
+        </p:spPr>
+        <p:style>
+          <a:lnRef idx="1">
+            <a:schemeClr val="accent1"/>
+          </a:lnRef>
+          <a:fillRef idx="3">
+            <a:schemeClr val="accent1"/>
+          </a:fillRef>
+          <a:effectRef idx="2">
+            <a:schemeClr val="accent1"/>
+          </a:effectRef>
+          <a:fontRef idx="minor">
+            <a:schemeClr val="lt1"/>
+          </a:fontRef>
+        </p:style>
+        <p:txBody>
+          <a:bodyPr rtlCol="0" anchor="ctr"/>
+          <a:lstStyle/>
+          <a:p>
+            <a:pPr algn="ctr"/>
+          </a:p>
+        </p:txBody>
+      </p:sp>
+      <p:sp>
+        <p:nvSpPr>
+          <p:cNvPr id="7" name="TextBox 6"/>
+          <p:cNvSpPr txBox="1"/>
+          <p:nvPr/>
+        </p:nvSpPr>
+        <p:spPr>
+          <a:xfrm>
+            <a:off x="640080" y="6428232"/>
+            <a:ext cx="7315200" cy="274320"/>
+          </a:xfrm>
+          <a:prstGeom prst="rect">
+            <a:avLst/>
+          </a:prstGeom>
+          <a:noFill/>
+        </p:spPr>
+        <p:txBody>
+          <a:bodyPr wrap="square" anchor="t" lIns="45720" rIns="45720" tIns="27432" bIns="27432">
+            <a:spAutoFit/>
+          </a:bodyPr>
+          <a:lstStyle/>
+          <a:p>
+            <a:pPr algn="l"/>
+            <a:r>
+              <a:rPr sz="950" b="0">
+                <a:solidFill>
+                  <a:srgbClr val="8A93A0"/>
+                </a:solidFill>
+                <a:latin typeface="Microsoft JhengHei"/>
+              </a:rPr>
+              <a:t>訴願智審臺 ｜ 2026 新北市 AI 智慧城市黑客松・法制局組</a:t>
+            </a:r>
+          </a:p>
+        </p:txBody>
+      </p:sp>
+      <p:sp>
+        <p:nvSpPr>
+          <p:cNvPr id="8" name="TextBox 7"/>
+          <p:cNvSpPr txBox="1"/>
+          <p:nvPr/>
+        </p:nvSpPr>
+        <p:spPr>
+          <a:xfrm>
+            <a:off x="10607040" y="6428232"/>
+            <a:ext cx="941832" cy="274320"/>
+          </a:xfrm>
+          <a:prstGeom prst="rect">
+            <a:avLst/>
+          </a:prstGeom>
+          <a:noFill/>
+        </p:spPr>
+        <p:txBody>
+          <a:bodyPr wrap="square" anchor="t" lIns="45720" rIns="45720" tIns="27432" bIns="27432">
+            <a:spAutoFit/>
+          </a:bodyPr>
+          <a:lstStyle/>
+          <a:p>
+            <a:pPr algn="r"/>
+            <a:r>
+              <a:rPr sz="950" b="0">
+                <a:solidFill>
+                  <a:srgbClr val="8A93A0"/>
+                </a:solidFill>
+                <a:latin typeface="Microsoft JhengHei"/>
+              </a:rPr>
+              <a:t>10 / 11</a:t>
+            </a:r>
+          </a:p>
+        </p:txBody>
+      </p:sp>
+      <p:sp>
+        <p:nvSpPr>
+          <p:cNvPr id="9" name="Oval 8"/>
+          <p:cNvSpPr/>
+          <p:nvPr/>
+        </p:nvSpPr>
+        <p:spPr>
+          <a:xfrm>
+            <a:off x="640080" y="1691639"/>
+            <a:ext cx="228600" cy="228600"/>
+          </a:xfrm>
+          <a:prstGeom prst="ellipse">
+            <a:avLst/>
+          </a:prstGeom>
+          <a:solidFill>
+            <a:srgbClr val="2E7D32"/>
+          </a:solidFill>
+          <a:ln>
+            <a:noFill/>
+          </a:ln>
+          <a:effectLst/>
+        </p:spPr>
+        <p:style>
+          <a:lnRef idx="1">
+            <a:schemeClr val="accent1"/>
+          </a:lnRef>
+          <a:fillRef idx="3">
+            <a:schemeClr val="accent1"/>
+          </a:fillRef>
+          <a:effectRef idx="2">
+            <a:schemeClr val="accent1"/>
+          </a:effectRef>
+          <a:fontRef idx="minor">
+            <a:schemeClr val="lt1"/>
+          </a:fontRef>
+        </p:style>
+        <p:txBody>
+          <a:bodyPr rtlCol="0" anchor="ctr" lIns="0" rIns="0" tIns="0" bIns="0"/>
+          <a:lstStyle/>
+          <a:p>
+            <a:pPr algn="ctr"/>
+            <a:r>
+              <a:rPr sz="1300" b="1">
+                <a:solidFill>
+                  <a:srgbClr val="FFFFFF"/>
+                </a:solidFill>
+                <a:latin typeface="Microsoft JhengHei"/>
+              </a:rPr>
+              <a:t/>
+            </a:r>
+          </a:p>
+        </p:txBody>
+      </p:sp>
+      <p:sp>
+        <p:nvSpPr>
+          <p:cNvPr id="10" name="TextBox 9"/>
+          <p:cNvSpPr txBox="1"/>
+          <p:nvPr/>
+        </p:nvSpPr>
+        <p:spPr>
+          <a:xfrm>
+            <a:off x="1005840" y="1554480"/>
+            <a:ext cx="4389120" cy="502920"/>
+          </a:xfrm>
+          <a:prstGeom prst="rect">
+            <a:avLst/>
+          </a:prstGeom>
+          <a:noFill/>
+        </p:spPr>
+        <p:txBody>
+          <a:bodyPr wrap="square" anchor="ctr" lIns="45720" rIns="45720" tIns="27432" bIns="27432">
+            <a:spAutoFit/>
+          </a:bodyPr>
+          <a:lstStyle/>
+          <a:p>
+            <a:pPr algn="l"/>
+            <a:r>
+              <a:rPr sz="1500" b="0">
+                <a:solidFill>
+                  <a:srgbClr val="16304F"/>
+                </a:solidFill>
+                <a:latin typeface="Microsoft JhengHei"/>
+              </a:rPr>
+              <a:t>卷證分類</a:t>
+            </a:r>
+          </a:p>
+        </p:txBody>
+      </p:sp>
+      <p:sp>
+        <p:nvSpPr>
+          <p:cNvPr id="11" name="Rectangle 10"/>
+          <p:cNvSpPr/>
+          <p:nvPr/>
+        </p:nvSpPr>
+        <p:spPr>
+          <a:xfrm>
+            <a:off x="640080" y="2029967"/>
+            <a:ext cx="4754880" cy="9144"/>
+          </a:xfrm>
+          <a:prstGeom prst="rect">
+            <a:avLst/>
+          </a:prstGeom>
+          <a:solidFill>
+            <a:srgbClr val="E6EAF0"/>
+          </a:solidFill>
+          <a:ln>
+            <a:noFill/>
+          </a:ln>
+          <a:effectLst/>
+        </p:spPr>
+        <p:style>
+          <a:lnRef idx="1">
+            <a:schemeClr val="accent1"/>
+          </a:lnRef>
+          <a:fillRef idx="3">
+            <a:schemeClr val="accent1"/>
+          </a:fillRef>
+          <a:effectRef idx="2">
+            <a:schemeClr val="accent1"/>
+          </a:effectRef>
+          <a:fontRef idx="minor">
+            <a:schemeClr val="lt1"/>
+          </a:fontRef>
+        </p:style>
+        <p:txBody>
+          <a:bodyPr rtlCol="0" anchor="ctr"/>
+          <a:lstStyle/>
+          <a:p>
+            <a:pPr algn="ctr"/>
+          </a:p>
+        </p:txBody>
+      </p:sp>
+      <p:sp>
+        <p:nvSpPr>
+          <p:cNvPr id="12" name="Oval 11"/>
+          <p:cNvSpPr/>
+          <p:nvPr/>
+        </p:nvSpPr>
+        <p:spPr>
+          <a:xfrm>
+            <a:off x="640080" y="2194560"/>
+            <a:ext cx="228600" cy="228600"/>
+          </a:xfrm>
+          <a:prstGeom prst="ellipse">
+            <a:avLst/>
+          </a:prstGeom>
+          <a:solidFill>
+            <a:srgbClr val="2E7D32"/>
+          </a:solidFill>
+          <a:ln>
+            <a:noFill/>
+          </a:ln>
+          <a:effectLst/>
+        </p:spPr>
+        <p:style>
+          <a:lnRef idx="1">
+            <a:schemeClr val="accent1"/>
+          </a:lnRef>
+          <a:fillRef idx="3">
+            <a:schemeClr val="accent1"/>
+          </a:fillRef>
+          <a:effectRef idx="2">
+            <a:schemeClr val="accent1"/>
+          </a:effectRef>
+          <a:fontRef idx="minor">
+            <a:schemeClr val="lt1"/>
+          </a:fontRef>
+        </p:style>
+        <p:txBody>
+          <a:bodyPr rtlCol="0" anchor="ctr" lIns="0" rIns="0" tIns="0" bIns="0"/>
+          <a:lstStyle/>
+          <a:p>
+            <a:pPr algn="ctr"/>
+            <a:r>
+              <a:rPr sz="1300" b="1">
+                <a:solidFill>
+                  <a:srgbClr val="FFFFFF"/>
+                </a:solidFill>
+                <a:latin typeface="Microsoft JhengHei"/>
+              </a:rPr>
+              <a:t/>
+            </a:r>
+          </a:p>
+        </p:txBody>
+      </p:sp>
+      <p:sp>
+        <p:nvSpPr>
+          <p:cNvPr id="13" name="TextBox 12"/>
+          <p:cNvSpPr txBox="1"/>
+          <p:nvPr/>
+        </p:nvSpPr>
+        <p:spPr>
+          <a:xfrm>
+            <a:off x="1005840" y="2057400"/>
+            <a:ext cx="4389120" cy="502920"/>
+          </a:xfrm>
+          <a:prstGeom prst="rect">
+            <a:avLst/>
+          </a:prstGeom>
+          <a:noFill/>
+        </p:spPr>
+        <p:txBody>
+          <a:bodyPr wrap="square" anchor="ctr" lIns="45720" rIns="45720" tIns="27432" bIns="27432">
+            <a:spAutoFit/>
+          </a:bodyPr>
+          <a:lstStyle/>
+          <a:p>
+            <a:pPr algn="l"/>
+            <a:r>
+              <a:rPr sz="1500" b="0">
+                <a:solidFill>
+                  <a:srgbClr val="16304F"/>
+                </a:solidFill>
+                <a:latin typeface="Microsoft JhengHei"/>
+              </a:rPr>
+              <a:t>五項分析</a:t>
+            </a:r>
+          </a:p>
+        </p:txBody>
+      </p:sp>
+      <p:sp>
+        <p:nvSpPr>
+          <p:cNvPr id="14" name="Rectangle 13"/>
+          <p:cNvSpPr/>
+          <p:nvPr/>
+        </p:nvSpPr>
+        <p:spPr>
+          <a:xfrm>
+            <a:off x="640080" y="2532888"/>
+            <a:ext cx="4754880" cy="9144"/>
+          </a:xfrm>
+          <a:prstGeom prst="rect">
+            <a:avLst/>
+          </a:prstGeom>
+          <a:solidFill>
+            <a:srgbClr val="E6EAF0"/>
+          </a:solidFill>
+          <a:ln>
+            <a:noFill/>
+          </a:ln>
+          <a:effectLst/>
+        </p:spPr>
+        <p:style>
+          <a:lnRef idx="1">
+            <a:schemeClr val="accent1"/>
+          </a:lnRef>
+          <a:fillRef idx="3">
+            <a:schemeClr val="accent1"/>
+          </a:fillRef>
+          <a:effectRef idx="2">
+            <a:schemeClr val="accent1"/>
+          </a:effectRef>
+          <a:fontRef idx="minor">
+            <a:schemeClr val="lt1"/>
+          </a:fontRef>
+        </p:style>
+        <p:txBody>
+          <a:bodyPr rtlCol="0" anchor="ctr"/>
+          <a:lstStyle/>
+          <a:p>
+            <a:pPr algn="ctr"/>
+          </a:p>
+        </p:txBody>
+      </p:sp>
+      <p:sp>
+        <p:nvSpPr>
+          <p:cNvPr id="15" name="Oval 14"/>
+          <p:cNvSpPr/>
+          <p:nvPr/>
+        </p:nvSpPr>
+        <p:spPr>
+          <a:xfrm>
+            <a:off x="640080" y="2697479"/>
+            <a:ext cx="228600" cy="228600"/>
+          </a:xfrm>
+          <a:prstGeom prst="ellipse">
+            <a:avLst/>
+          </a:prstGeom>
+          <a:solidFill>
+            <a:srgbClr val="2E7D32"/>
+          </a:solidFill>
+          <a:ln>
+            <a:noFill/>
+          </a:ln>
+          <a:effectLst/>
+        </p:spPr>
+        <p:style>
+          <a:lnRef idx="1">
+            <a:schemeClr val="accent1"/>
+          </a:lnRef>
+          <a:fillRef idx="3">
+            <a:schemeClr val="accent1"/>
+          </a:fillRef>
+          <a:effectRef idx="2">
+            <a:schemeClr val="accent1"/>
+          </a:effectRef>
+          <a:fontRef idx="minor">
+            <a:schemeClr val="lt1"/>
+          </a:fontRef>
+        </p:style>
+        <p:txBody>
+          <a:bodyPr rtlCol="0" anchor="ctr" lIns="0" rIns="0" tIns="0" bIns="0"/>
+          <a:lstStyle/>
+          <a:p>
+            <a:pPr algn="ctr"/>
+            <a:r>
+              <a:rPr sz="1300" b="1">
+                <a:solidFill>
+                  <a:srgbClr val="FFFFFF"/>
+                </a:solidFill>
+                <a:latin typeface="Microsoft JhengHei"/>
+              </a:rPr>
+              <a:t/>
+            </a:r>
+          </a:p>
+        </p:txBody>
+      </p:sp>
+      <p:sp>
+        <p:nvSpPr>
+          <p:cNvPr id="16" name="TextBox 15"/>
+          <p:cNvSpPr txBox="1"/>
+          <p:nvPr/>
+        </p:nvSpPr>
+        <p:spPr>
+          <a:xfrm>
+            <a:off x="1005840" y="2560320"/>
+            <a:ext cx="4389120" cy="502920"/>
+          </a:xfrm>
+          <a:prstGeom prst="rect">
+            <a:avLst/>
+          </a:prstGeom>
+          <a:noFill/>
+        </p:spPr>
+        <p:txBody>
+          <a:bodyPr wrap="square" anchor="ctr" lIns="45720" rIns="45720" tIns="27432" bIns="27432">
+            <a:spAutoFit/>
+          </a:bodyPr>
+          <a:lstStyle/>
+          <a:p>
+            <a:pPr algn="l"/>
+            <a:r>
+              <a:rPr sz="1500" b="0">
+                <a:solidFill>
+                  <a:srgbClr val="16304F"/>
+                </a:solidFill>
+                <a:latin typeface="Microsoft JhengHei"/>
+              </a:rPr>
+              <a:t>修正 → 確認 → 局部重算</a:t>
+            </a:r>
+          </a:p>
+        </p:txBody>
+      </p:sp>
+      <p:sp>
+        <p:nvSpPr>
+          <p:cNvPr id="17" name="Rectangle 16"/>
+          <p:cNvSpPr/>
+          <p:nvPr/>
+        </p:nvSpPr>
+        <p:spPr>
+          <a:xfrm>
+            <a:off x="640080" y="3035808"/>
+            <a:ext cx="4754880" cy="9144"/>
+          </a:xfrm>
+          <a:prstGeom prst="rect">
+            <a:avLst/>
+          </a:prstGeom>
+          <a:solidFill>
+            <a:srgbClr val="E6EAF0"/>
+          </a:solidFill>
+          <a:ln>
+            <a:noFill/>
+          </a:ln>
+          <a:effectLst/>
+        </p:spPr>
+        <p:style>
+          <a:lnRef idx="1">
+            <a:schemeClr val="accent1"/>
+          </a:lnRef>
+          <a:fillRef idx="3">
+            <a:schemeClr val="accent1"/>
+          </a:fillRef>
+          <a:effectRef idx="2">
+            <a:schemeClr val="accent1"/>
+          </a:effectRef>
+          <a:fontRef idx="minor">
+            <a:schemeClr val="lt1"/>
+          </a:fontRef>
+        </p:style>
+        <p:txBody>
+          <a:bodyPr rtlCol="0" anchor="ctr"/>
+          <a:lstStyle/>
+          <a:p>
+            <a:pPr algn="ctr"/>
+          </a:p>
+        </p:txBody>
+      </p:sp>
+      <p:sp>
+        <p:nvSpPr>
+          <p:cNvPr id="18" name="Oval 17"/>
+          <p:cNvSpPr/>
+          <p:nvPr/>
+        </p:nvSpPr>
+        <p:spPr>
+          <a:xfrm>
+            <a:off x="640080" y="3200400"/>
+            <a:ext cx="228600" cy="228600"/>
+          </a:xfrm>
+          <a:prstGeom prst="ellipse">
+            <a:avLst/>
+          </a:prstGeom>
+          <a:solidFill>
+            <a:srgbClr val="2E7D32"/>
+          </a:solidFill>
+          <a:ln>
+            <a:noFill/>
+          </a:ln>
+          <a:effectLst/>
+        </p:spPr>
+        <p:style>
+          <a:lnRef idx="1">
+            <a:schemeClr val="accent1"/>
+          </a:lnRef>
+          <a:fillRef idx="3">
+            <a:schemeClr val="accent1"/>
+          </a:fillRef>
+          <a:effectRef idx="2">
+            <a:schemeClr val="accent1"/>
+          </a:effectRef>
+          <a:fontRef idx="minor">
+            <a:schemeClr val="lt1"/>
+          </a:fontRef>
+        </p:style>
+        <p:txBody>
+          <a:bodyPr rtlCol="0" anchor="ctr" lIns="0" rIns="0" tIns="0" bIns="0"/>
+          <a:lstStyle/>
+          <a:p>
+            <a:pPr algn="ctr"/>
+            <a:r>
+              <a:rPr sz="1300" b="1">
+                <a:solidFill>
+                  <a:srgbClr val="FFFFFF"/>
+                </a:solidFill>
+                <a:latin typeface="Microsoft JhengHei"/>
+              </a:rPr>
+              <a:t/>
+            </a:r>
+          </a:p>
+        </p:txBody>
+      </p:sp>
+      <p:sp>
+        <p:nvSpPr>
+          <p:cNvPr id="19" name="TextBox 18"/>
+          <p:cNvSpPr txBox="1"/>
+          <p:nvPr/>
+        </p:nvSpPr>
+        <p:spPr>
+          <a:xfrm>
+            <a:off x="1005840" y="3063240"/>
+            <a:ext cx="4389120" cy="502920"/>
+          </a:xfrm>
+          <a:prstGeom prst="rect">
+            <a:avLst/>
+          </a:prstGeom>
+          <a:noFill/>
+        </p:spPr>
+        <p:txBody>
+          <a:bodyPr wrap="square" anchor="ctr" lIns="45720" rIns="45720" tIns="27432" bIns="27432">
+            <a:spAutoFit/>
+          </a:bodyPr>
+          <a:lstStyle/>
+          <a:p>
+            <a:pPr algn="l"/>
+            <a:r>
+              <a:rPr sz="1500" b="0">
+                <a:solidFill>
+                  <a:srgbClr val="16304F"/>
+                </a:solidFill>
+                <a:latin typeface="Microsoft JhengHei"/>
+              </a:rPr>
+              <a:t>法規庫同步</a:t>
+            </a:r>
+          </a:p>
+        </p:txBody>
+      </p:sp>
+      <p:sp>
+        <p:nvSpPr>
+          <p:cNvPr id="20" name="Rectangle 19"/>
+          <p:cNvSpPr/>
+          <p:nvPr/>
+        </p:nvSpPr>
+        <p:spPr>
+          <a:xfrm>
+            <a:off x="640080" y="3538728"/>
+            <a:ext cx="4754880" cy="9144"/>
+          </a:xfrm>
+          <a:prstGeom prst="rect">
+            <a:avLst/>
+          </a:prstGeom>
+          <a:solidFill>
+            <a:srgbClr val="E6EAF0"/>
+          </a:solidFill>
+          <a:ln>
+            <a:noFill/>
+          </a:ln>
+          <a:effectLst/>
+        </p:spPr>
+        <p:style>
+          <a:lnRef idx="1">
+            <a:schemeClr val="accent1"/>
+          </a:lnRef>
+          <a:fillRef idx="3">
+            <a:schemeClr val="accent1"/>
+          </a:fillRef>
+          <a:effectRef idx="2">
+            <a:schemeClr val="accent1"/>
+          </a:effectRef>
+          <a:fontRef idx="minor">
+            <a:schemeClr val="lt1"/>
+          </a:fontRef>
+        </p:style>
+        <p:txBody>
+          <a:bodyPr rtlCol="0" anchor="ctr"/>
+          <a:lstStyle/>
+          <a:p>
+            <a:pPr algn="ctr"/>
+          </a:p>
+        </p:txBody>
+      </p:sp>
+      <p:sp>
+        <p:nvSpPr>
+          <p:cNvPr id="21" name="Oval 20"/>
+          <p:cNvSpPr/>
+          <p:nvPr/>
+        </p:nvSpPr>
+        <p:spPr>
+          <a:xfrm>
+            <a:off x="640080" y="3703320"/>
+            <a:ext cx="228600" cy="228600"/>
+          </a:xfrm>
+          <a:prstGeom prst="ellipse">
+            <a:avLst/>
+          </a:prstGeom>
+          <a:solidFill>
+            <a:srgbClr val="2E7D32"/>
+          </a:solidFill>
+          <a:ln>
+            <a:noFill/>
+          </a:ln>
+          <a:effectLst/>
+        </p:spPr>
+        <p:style>
+          <a:lnRef idx="1">
+            <a:schemeClr val="accent1"/>
+          </a:lnRef>
+          <a:fillRef idx="3">
+            <a:schemeClr val="accent1"/>
+          </a:fillRef>
+          <a:effectRef idx="2">
+            <a:schemeClr val="accent1"/>
+          </a:effectRef>
+          <a:fontRef idx="minor">
+            <a:schemeClr val="lt1"/>
+          </a:fontRef>
+        </p:style>
+        <p:txBody>
+          <a:bodyPr rtlCol="0" anchor="ctr" lIns="0" rIns="0" tIns="0" bIns="0"/>
+          <a:lstStyle/>
+          <a:p>
+            <a:pPr algn="ctr"/>
+            <a:r>
+              <a:rPr sz="1300" b="1">
+                <a:solidFill>
+                  <a:srgbClr val="FFFFFF"/>
+                </a:solidFill>
+                <a:latin typeface="Microsoft JhengHei"/>
+              </a:rPr>
+              <a:t/>
+            </a:r>
+          </a:p>
+        </p:txBody>
+      </p:sp>
+      <p:sp>
+        <p:nvSpPr>
+          <p:cNvPr id="22" name="TextBox 21"/>
+          <p:cNvSpPr txBox="1"/>
+          <p:nvPr/>
+        </p:nvSpPr>
+        <p:spPr>
+          <a:xfrm>
+            <a:off x="1005840" y="3566160"/>
+            <a:ext cx="4389120" cy="502920"/>
+          </a:xfrm>
+          <a:prstGeom prst="rect">
+            <a:avLst/>
+          </a:prstGeom>
+          <a:noFill/>
+        </p:spPr>
+        <p:txBody>
+          <a:bodyPr wrap="square" anchor="ctr" lIns="45720" rIns="45720" tIns="27432" bIns="27432">
+            <a:spAutoFit/>
+          </a:bodyPr>
+          <a:lstStyle/>
+          <a:p>
+            <a:pPr algn="l"/>
+            <a:r>
+              <a:rPr sz="1500" b="0">
+                <a:solidFill>
+                  <a:srgbClr val="16304F"/>
+                </a:solidFill>
+                <a:latin typeface="Microsoft JhengHei"/>
+              </a:rPr>
+              <a:t>畫面全部連到線上系統</a:t>
+            </a:r>
+          </a:p>
+        </p:txBody>
+      </p:sp>
+      <p:sp>
+        <p:nvSpPr>
+          <p:cNvPr id="23" name="Rectangle 22"/>
+          <p:cNvSpPr/>
+          <p:nvPr/>
+        </p:nvSpPr>
+        <p:spPr>
+          <a:xfrm>
+            <a:off x="640080" y="4041648"/>
+            <a:ext cx="4754880" cy="9144"/>
+          </a:xfrm>
+          <a:prstGeom prst="rect">
+            <a:avLst/>
+          </a:prstGeom>
+          <a:solidFill>
+            <a:srgbClr val="E6EAF0"/>
+          </a:solidFill>
+          <a:ln>
+            <a:noFill/>
+          </a:ln>
+          <a:effectLst/>
+        </p:spPr>
+        <p:style>
+          <a:lnRef idx="1">
+            <a:schemeClr val="accent1"/>
+          </a:lnRef>
+          <a:fillRef idx="3">
+            <a:schemeClr val="accent1"/>
+          </a:fillRef>
+          <a:effectRef idx="2">
+            <a:schemeClr val="accent1"/>
+          </a:effectRef>
+          <a:fontRef idx="minor">
+            <a:schemeClr val="lt1"/>
+          </a:fontRef>
+        </p:style>
+        <p:txBody>
+          <a:bodyPr rtlCol="0" anchor="ctr"/>
+          <a:lstStyle/>
+          <a:p>
+            <a:pPr algn="ctr"/>
+          </a:p>
+        </p:txBody>
+      </p:sp>
+      <p:sp>
+        <p:nvSpPr>
+          <p:cNvPr id="24" name="Oval 23"/>
+          <p:cNvSpPr/>
+          <p:nvPr/>
+        </p:nvSpPr>
+        <p:spPr>
+          <a:xfrm>
+            <a:off x="640080" y="4206240"/>
+            <a:ext cx="228600" cy="228600"/>
+          </a:xfrm>
+          <a:prstGeom prst="ellipse">
+            <a:avLst/>
+          </a:prstGeom>
+          <a:solidFill>
+            <a:srgbClr val="2E7D32"/>
+          </a:solidFill>
+          <a:ln>
+            <a:noFill/>
+          </a:ln>
+          <a:effectLst/>
+        </p:spPr>
+        <p:style>
+          <a:lnRef idx="1">
+            <a:schemeClr val="accent1"/>
+          </a:lnRef>
+          <a:fillRef idx="3">
+            <a:schemeClr val="accent1"/>
+          </a:fillRef>
+          <a:effectRef idx="2">
+            <a:schemeClr val="accent1"/>
+          </a:effectRef>
+          <a:fontRef idx="minor">
+            <a:schemeClr val="lt1"/>
+          </a:fontRef>
+        </p:style>
+        <p:txBody>
+          <a:bodyPr rtlCol="0" anchor="ctr" lIns="0" rIns="0" tIns="0" bIns="0"/>
+          <a:lstStyle/>
+          <a:p>
+            <a:pPr algn="ctr"/>
+            <a:r>
+              <a:rPr sz="1300" b="1">
+                <a:solidFill>
+                  <a:srgbClr val="FFFFFF"/>
+                </a:solidFill>
+                <a:latin typeface="Microsoft JhengHei"/>
+              </a:rPr>
+              <a:t/>
+            </a:r>
+          </a:p>
+        </p:txBody>
+      </p:sp>
+      <p:sp>
+        <p:nvSpPr>
+          <p:cNvPr id="25" name="TextBox 24"/>
+          <p:cNvSpPr txBox="1"/>
+          <p:nvPr/>
+        </p:nvSpPr>
+        <p:spPr>
+          <a:xfrm>
+            <a:off x="1005840" y="4069080"/>
+            <a:ext cx="4389120" cy="502920"/>
+          </a:xfrm>
+          <a:prstGeom prst="rect">
+            <a:avLst/>
+          </a:prstGeom>
+          <a:noFill/>
+        </p:spPr>
+        <p:txBody>
+          <a:bodyPr wrap="square" anchor="ctr" lIns="45720" rIns="45720" tIns="27432" bIns="27432">
+            <a:spAutoFit/>
+          </a:bodyPr>
+          <a:lstStyle/>
+          <a:p>
+            <a:pPr algn="l"/>
+            <a:r>
+              <a:rPr sz="1500" b="0">
+                <a:solidFill>
+                  <a:srgbClr val="16304F"/>
+                </a:solidFill>
+                <a:latin typeface="Microsoft JhengHei"/>
+              </a:rPr>
+              <a:t>自動化測試 52 個</a:t>
+            </a:r>
+          </a:p>
+        </p:txBody>
+      </p:sp>
+      <p:sp>
+        <p:nvSpPr>
+          <p:cNvPr id="26" name="Rectangle 25"/>
+          <p:cNvSpPr/>
+          <p:nvPr/>
+        </p:nvSpPr>
+        <p:spPr>
+          <a:xfrm>
+            <a:off x="640080" y="4544568"/>
+            <a:ext cx="4754880" cy="9144"/>
+          </a:xfrm>
+          <a:prstGeom prst="rect">
+            <a:avLst/>
+          </a:prstGeom>
+          <a:solidFill>
+            <a:srgbClr val="E6EAF0"/>
+          </a:solidFill>
+          <a:ln>
+            <a:noFill/>
+          </a:ln>
+          <a:effectLst/>
+        </p:spPr>
+        <p:style>
+          <a:lnRef idx="1">
+            <a:schemeClr val="accent1"/>
+          </a:lnRef>
+          <a:fillRef idx="3">
+            <a:schemeClr val="accent1"/>
+          </a:fillRef>
+          <a:effectRef idx="2">
+            <a:schemeClr val="accent1"/>
+          </a:effectRef>
+          <a:fontRef idx="minor">
+            <a:schemeClr val="lt1"/>
+          </a:fontRef>
+        </p:style>
+        <p:txBody>
+          <a:bodyPr rtlCol="0" anchor="ctr"/>
+          <a:lstStyle/>
+          <a:p>
+            <a:pPr algn="ctr"/>
+          </a:p>
+        </p:txBody>
+      </p:sp>
+      <p:sp>
+        <p:nvSpPr>
+          <p:cNvPr id="27" name="Oval 26"/>
+          <p:cNvSpPr/>
+          <p:nvPr/>
+        </p:nvSpPr>
+        <p:spPr>
+          <a:xfrm>
+            <a:off x="640080" y="4709160"/>
+            <a:ext cx="228600" cy="228600"/>
+          </a:xfrm>
+          <a:prstGeom prst="ellipse">
+            <a:avLst/>
+          </a:prstGeom>
+          <a:solidFill>
+            <a:srgbClr val="D98E04"/>
+          </a:solidFill>
+          <a:ln>
+            <a:noFill/>
+          </a:ln>
+          <a:effectLst/>
+        </p:spPr>
+        <p:style>
+          <a:lnRef idx="1">
+            <a:schemeClr val="accent1"/>
+          </a:lnRef>
+          <a:fillRef idx="3">
+            <a:schemeClr val="accent1"/>
+          </a:fillRef>
+          <a:effectRef idx="2">
+            <a:schemeClr val="accent1"/>
+          </a:effectRef>
+          <a:fontRef idx="minor">
+            <a:schemeClr val="lt1"/>
+          </a:fontRef>
+        </p:style>
+        <p:txBody>
+          <a:bodyPr rtlCol="0" anchor="ctr" lIns="0" rIns="0" tIns="0" bIns="0"/>
+          <a:lstStyle/>
+          <a:p>
+            <a:pPr algn="ctr"/>
+            <a:r>
+              <a:rPr sz="1300" b="1">
+                <a:solidFill>
+                  <a:srgbClr val="FFFFFF"/>
+                </a:solidFill>
+                <a:latin typeface="Microsoft JhengHei"/>
+              </a:rPr>
+              <a:t/>
+            </a:r>
+          </a:p>
+        </p:txBody>
+      </p:sp>
+      <p:sp>
+        <p:nvSpPr>
+          <p:cNvPr id="28" name="TextBox 27"/>
+          <p:cNvSpPr txBox="1"/>
+          <p:nvPr/>
+        </p:nvSpPr>
+        <p:spPr>
+          <a:xfrm>
+            <a:off x="1005840" y="4572000"/>
+            <a:ext cx="4389120" cy="502920"/>
+          </a:xfrm>
+          <a:prstGeom prst="rect">
+            <a:avLst/>
+          </a:prstGeom>
+          <a:noFill/>
+        </p:spPr>
+        <p:txBody>
+          <a:bodyPr wrap="square" anchor="ctr" lIns="45720" rIns="45720" tIns="27432" bIns="27432">
+            <a:spAutoFit/>
+          </a:bodyPr>
+          <a:lstStyle/>
+          <a:p>
+            <a:pPr algn="l"/>
+            <a:r>
+              <a:rPr sz="1500" b="0">
+                <a:solidFill>
+                  <a:srgbClr val="16304F"/>
+                </a:solidFill>
+                <a:latin typeface="Microsoft JhengHei"/>
+              </a:rPr>
+              <a:t>補件辨識</a:t>
+            </a:r>
+          </a:p>
+        </p:txBody>
+      </p:sp>
+      <p:sp>
+        <p:nvSpPr>
+          <p:cNvPr id="29" name="Rectangle 28"/>
+          <p:cNvSpPr/>
+          <p:nvPr/>
+        </p:nvSpPr>
+        <p:spPr>
+          <a:xfrm>
+            <a:off x="640080" y="5047488"/>
+            <a:ext cx="4754880" cy="9144"/>
+          </a:xfrm>
+          <a:prstGeom prst="rect">
+            <a:avLst/>
+          </a:prstGeom>
+          <a:solidFill>
+            <a:srgbClr val="E6EAF0"/>
+          </a:solidFill>
+          <a:ln>
+            <a:noFill/>
+          </a:ln>
+          <a:effectLst/>
+        </p:spPr>
+        <p:style>
+          <a:lnRef idx="1">
+            <a:schemeClr val="accent1"/>
+          </a:lnRef>
+          <a:fillRef idx="3">
+            <a:schemeClr val="accent1"/>
+          </a:fillRef>
+          <a:effectRef idx="2">
+            <a:schemeClr val="accent1"/>
+          </a:effectRef>
+          <a:fontRef idx="minor">
+            <a:schemeClr val="lt1"/>
+          </a:fontRef>
+        </p:style>
+        <p:txBody>
+          <a:bodyPr rtlCol="0" anchor="ctr"/>
+          <a:lstStyle/>
+          <a:p>
+            <a:pPr algn="ctr"/>
+          </a:p>
+        </p:txBody>
+      </p:sp>
+      <p:sp>
+        <p:nvSpPr>
+          <p:cNvPr id="30" name="Oval 29"/>
+          <p:cNvSpPr/>
+          <p:nvPr/>
+        </p:nvSpPr>
+        <p:spPr>
+          <a:xfrm>
+            <a:off x="640080" y="5212080"/>
+            <a:ext cx="228600" cy="228600"/>
+          </a:xfrm>
+          <a:prstGeom prst="ellipse">
+            <a:avLst/>
+          </a:prstGeom>
+          <a:solidFill>
+            <a:srgbClr val="C5CDD8"/>
+          </a:solidFill>
+          <a:ln>
+            <a:noFill/>
+          </a:ln>
+          <a:effectLst/>
+        </p:spPr>
+        <p:style>
+          <a:lnRef idx="1">
+            <a:schemeClr val="accent1"/>
+          </a:lnRef>
+          <a:fillRef idx="3">
+            <a:schemeClr val="accent1"/>
+          </a:fillRef>
+          <a:effectRef idx="2">
+            <a:schemeClr val="accent1"/>
+          </a:effectRef>
+          <a:fontRef idx="minor">
+            <a:schemeClr val="lt1"/>
+          </a:fontRef>
+        </p:style>
+        <p:txBody>
+          <a:bodyPr rtlCol="0" anchor="ctr" lIns="0" rIns="0" tIns="0" bIns="0"/>
+          <a:lstStyle/>
+          <a:p>
+            <a:pPr algn="ctr"/>
+            <a:r>
+              <a:rPr sz="1300" b="1">
+                <a:solidFill>
+                  <a:srgbClr val="FFFFFF"/>
+                </a:solidFill>
+                <a:latin typeface="Microsoft JhengHei"/>
+              </a:rPr>
+              <a:t/>
+            </a:r>
+          </a:p>
+        </p:txBody>
+      </p:sp>
+      <p:sp>
+        <p:nvSpPr>
+          <p:cNvPr id="31" name="TextBox 30"/>
+          <p:cNvSpPr txBox="1"/>
+          <p:nvPr/>
+        </p:nvSpPr>
+        <p:spPr>
+          <a:xfrm>
+            <a:off x="1005840" y="5074920"/>
+            <a:ext cx="4389120" cy="502920"/>
+          </a:xfrm>
+          <a:prstGeom prst="rect">
+            <a:avLst/>
+          </a:prstGeom>
+          <a:noFill/>
+        </p:spPr>
+        <p:txBody>
+          <a:bodyPr wrap="square" anchor="ctr" lIns="45720" rIns="45720" tIns="27432" bIns="27432">
+            <a:spAutoFit/>
+          </a:bodyPr>
+          <a:lstStyle/>
+          <a:p>
+            <a:pPr algn="l"/>
+            <a:r>
+              <a:rPr sz="1500" b="0">
+                <a:solidFill>
+                  <a:srgbClr val="16304F"/>
+                </a:solidFill>
+                <a:latin typeface="Microsoft JhengHei"/>
+              </a:rPr>
+              <a:t>登入／HTTPS</a:t>
+            </a:r>
+          </a:p>
+        </p:txBody>
+      </p:sp>
+      <p:sp>
+        <p:nvSpPr>
+          <p:cNvPr id="32" name="Rectangle 31"/>
+          <p:cNvSpPr/>
+          <p:nvPr/>
+        </p:nvSpPr>
+        <p:spPr>
+          <a:xfrm>
+            <a:off x="640080" y="5550408"/>
+            <a:ext cx="4754880" cy="9144"/>
+          </a:xfrm>
+          <a:prstGeom prst="rect">
+            <a:avLst/>
+          </a:prstGeom>
+          <a:solidFill>
+            <a:srgbClr val="E6EAF0"/>
+          </a:solidFill>
+          <a:ln>
+            <a:noFill/>
+          </a:ln>
+          <a:effectLst/>
+        </p:spPr>
+        <p:style>
+          <a:lnRef idx="1">
+            <a:schemeClr val="accent1"/>
+          </a:lnRef>
+          <a:fillRef idx="3">
+            <a:schemeClr val="accent1"/>
+          </a:fillRef>
+          <a:effectRef idx="2">
+            <a:schemeClr val="accent1"/>
+          </a:effectRef>
+          <a:fontRef idx="minor">
+            <a:schemeClr val="lt1"/>
+          </a:fontRef>
+        </p:style>
+        <p:txBody>
+          <a:bodyPr rtlCol="0" anchor="ctr"/>
+          <a:lstStyle/>
+          <a:p>
+            <a:pPr algn="ctr"/>
+          </a:p>
+        </p:txBody>
+      </p:sp>
+      <p:sp>
+        <p:nvSpPr>
+          <p:cNvPr id="33" name="Rounded Rectangle 32"/>
+          <p:cNvSpPr/>
+          <p:nvPr/>
+        </p:nvSpPr>
+        <p:spPr>
+          <a:xfrm>
+            <a:off x="5943600" y="1554480"/>
+            <a:ext cx="2697480" cy="1691640"/>
+          </a:xfrm>
+          <a:prstGeom prst="roundRect">
+            <a:avLst>
+              <a:gd name="adj" fmla="val 8000"/>
+            </a:avLst>
+          </a:prstGeom>
+          <a:solidFill>
+            <a:srgbClr val="F4F6F9"/>
+          </a:solidFill>
+          <a:ln>
+            <a:noFill/>
+          </a:ln>
+          <a:effectLst/>
+        </p:spPr>
+        <p:style>
+          <a:lnRef idx="1">
+            <a:schemeClr val="accent1"/>
+          </a:lnRef>
+          <a:fillRef idx="3">
+            <a:schemeClr val="accent1"/>
+          </a:fillRef>
+          <a:effectRef idx="2">
+            <a:schemeClr val="accent1"/>
+          </a:effectRef>
+          <a:fontRef idx="minor">
+            <a:schemeClr val="lt1"/>
+          </a:fontRef>
+        </p:style>
+        <p:txBody>
+          <a:bodyPr rtlCol="0" anchor="ctr"/>
+          <a:lstStyle/>
+          <a:p>
+            <a:pPr algn="ctr"/>
+          </a:p>
+        </p:txBody>
+      </p:sp>
+      <p:sp>
+        <p:nvSpPr>
+          <p:cNvPr id="34" name="TextBox 33"/>
+          <p:cNvSpPr txBox="1"/>
+          <p:nvPr/>
+        </p:nvSpPr>
+        <p:spPr>
+          <a:xfrm>
+            <a:off x="6108192" y="1664207"/>
+            <a:ext cx="2377440" cy="640080"/>
+          </a:xfrm>
+          <a:prstGeom prst="rect">
+            <a:avLst/>
+          </a:prstGeom>
+          <a:noFill/>
+        </p:spPr>
+        <p:txBody>
+          <a:bodyPr wrap="square" anchor="t" lIns="45720" rIns="45720" tIns="27432" bIns="27432">
+            <a:spAutoFit/>
+          </a:bodyPr>
+          <a:lstStyle/>
+          <a:p>
+            <a:pPr algn="l"/>
+            <a:r>
+              <a:rPr sz="3000" b="1">
+                <a:solidFill>
+                  <a:srgbClr val="16304F"/>
+                </a:solidFill>
+                <a:latin typeface="Microsoft JhengHei"/>
+              </a:rPr>
+              <a:t>20%</a:t>
+            </a:r>
+          </a:p>
+        </p:txBody>
+      </p:sp>
+      <p:sp>
+        <p:nvSpPr>
+          <p:cNvPr id="35" name="TextBox 34"/>
+          <p:cNvSpPr txBox="1"/>
+          <p:nvPr/>
+        </p:nvSpPr>
+        <p:spPr>
+          <a:xfrm>
+            <a:off x="6108192" y="2286000"/>
+            <a:ext cx="2377440" cy="365760"/>
+          </a:xfrm>
+          <a:prstGeom prst="rect">
+            <a:avLst/>
+          </a:prstGeom>
+          <a:noFill/>
+        </p:spPr>
+        <p:txBody>
+          <a:bodyPr wrap="square" anchor="t" lIns="45720" rIns="45720" tIns="27432" bIns="27432">
+            <a:spAutoFit/>
+          </a:bodyPr>
+          <a:lstStyle/>
+          <a:p>
+            <a:pPr algn="l"/>
+            <a:r>
+              <a:rPr sz="1400" b="1">
+                <a:solidFill>
+                  <a:srgbClr val="16304F"/>
+                </a:solidFill>
+                <a:latin typeface="Microsoft JhengHei"/>
+              </a:rPr>
+              <a:t>技術可行性</a:t>
+            </a:r>
+          </a:p>
+        </p:txBody>
+      </p:sp>
+      <p:sp>
+        <p:nvSpPr>
+          <p:cNvPr id="36" name="TextBox 35"/>
+          <p:cNvSpPr txBox="1"/>
+          <p:nvPr/>
+        </p:nvSpPr>
+        <p:spPr>
+          <a:xfrm>
+            <a:off x="6108192" y="2633472"/>
+            <a:ext cx="2377440" cy="548640"/>
+          </a:xfrm>
+          <a:prstGeom prst="rect">
+            <a:avLst/>
+          </a:prstGeom>
+          <a:noFill/>
+        </p:spPr>
+        <p:txBody>
+          <a:bodyPr wrap="square" anchor="t" lIns="45720" rIns="45720" tIns="27432" bIns="27432">
+            <a:spAutoFit/>
+          </a:bodyPr>
+          <a:lstStyle/>
+          <a:p>
+            <a:pPr algn="l"/>
+            <a:r>
+              <a:rPr sz="1050" b="0">
+                <a:solidFill>
+                  <a:srgbClr val="334455"/>
+                </a:solidFill>
+                <a:latin typeface="Microsoft JhengHei"/>
+              </a:rPr>
+              <a:t>允許清單內；呼叫頻率限制下固定流程</a:t>
+            </a:r>
+          </a:p>
+        </p:txBody>
+      </p:sp>
+      <p:sp>
+        <p:nvSpPr>
+          <p:cNvPr id="37" name="Rounded Rectangle 36"/>
+          <p:cNvSpPr/>
+          <p:nvPr/>
+        </p:nvSpPr>
+        <p:spPr>
+          <a:xfrm>
+            <a:off x="8778240" y="1554480"/>
+            <a:ext cx="2697480" cy="1691640"/>
+          </a:xfrm>
+          <a:prstGeom prst="roundRect">
+            <a:avLst>
+              <a:gd name="adj" fmla="val 8000"/>
+            </a:avLst>
+          </a:prstGeom>
+          <a:solidFill>
+            <a:srgbClr val="F4F6F9"/>
+          </a:solidFill>
+          <a:ln>
+            <a:noFill/>
+          </a:ln>
+          <a:effectLst/>
+        </p:spPr>
+        <p:style>
+          <a:lnRef idx="1">
+            <a:schemeClr val="accent1"/>
+          </a:lnRef>
+          <a:fillRef idx="3">
+            <a:schemeClr val="accent1"/>
+          </a:fillRef>
+          <a:effectRef idx="2">
+            <a:schemeClr val="accent1"/>
+          </a:effectRef>
+          <a:fontRef idx="minor">
+            <a:schemeClr val="lt1"/>
+          </a:fontRef>
+        </p:style>
+        <p:txBody>
+          <a:bodyPr rtlCol="0" anchor="ctr"/>
+          <a:lstStyle/>
+          <a:p>
+            <a:pPr algn="ctr"/>
+          </a:p>
+        </p:txBody>
+      </p:sp>
+      <p:sp>
+        <p:nvSpPr>
+          <p:cNvPr id="38" name="TextBox 37"/>
+          <p:cNvSpPr txBox="1"/>
+          <p:nvPr/>
+        </p:nvSpPr>
+        <p:spPr>
+          <a:xfrm>
+            <a:off x="8942832" y="1664207"/>
+            <a:ext cx="2377440" cy="640080"/>
+          </a:xfrm>
+          <a:prstGeom prst="rect">
+            <a:avLst/>
+          </a:prstGeom>
+          <a:noFill/>
+        </p:spPr>
+        <p:txBody>
+          <a:bodyPr wrap="square" anchor="t" lIns="45720" rIns="45720" tIns="27432" bIns="27432">
+            <a:spAutoFit/>
+          </a:bodyPr>
+          <a:lstStyle/>
+          <a:p>
+            <a:pPr algn="l"/>
+            <a:r>
+              <a:rPr sz="3000" b="1">
+                <a:solidFill>
+                  <a:srgbClr val="16304F"/>
+                </a:solidFill>
+                <a:latin typeface="Microsoft JhengHei"/>
+              </a:rPr>
+              <a:t>25%</a:t>
+            </a:r>
+          </a:p>
+        </p:txBody>
+      </p:sp>
+      <p:sp>
+        <p:nvSpPr>
+          <p:cNvPr id="39" name="TextBox 38"/>
+          <p:cNvSpPr txBox="1"/>
+          <p:nvPr/>
+        </p:nvSpPr>
+        <p:spPr>
+          <a:xfrm>
+            <a:off x="8942832" y="2286000"/>
+            <a:ext cx="2377440" cy="365760"/>
+          </a:xfrm>
+          <a:prstGeom prst="rect">
+            <a:avLst/>
+          </a:prstGeom>
+          <a:noFill/>
+        </p:spPr>
+        <p:txBody>
+          <a:bodyPr wrap="square" anchor="t" lIns="45720" rIns="45720" tIns="27432" bIns="27432">
+            <a:spAutoFit/>
+          </a:bodyPr>
+          <a:lstStyle/>
+          <a:p>
+            <a:pPr algn="l"/>
+            <a:r>
+              <a:rPr sz="1400" b="1">
+                <a:solidFill>
+                  <a:srgbClr val="16304F"/>
+                </a:solidFill>
+                <a:latin typeface="Microsoft JhengHei"/>
+              </a:rPr>
+              <a:t>完成度</a:t>
+            </a:r>
+          </a:p>
+        </p:txBody>
+      </p:sp>
+      <p:sp>
+        <p:nvSpPr>
+          <p:cNvPr id="40" name="TextBox 39"/>
+          <p:cNvSpPr txBox="1"/>
+          <p:nvPr/>
+        </p:nvSpPr>
+        <p:spPr>
+          <a:xfrm>
+            <a:off x="8942832" y="2633472"/>
+            <a:ext cx="2377440" cy="548640"/>
+          </a:xfrm>
+          <a:prstGeom prst="rect">
+            <a:avLst/>
+          </a:prstGeom>
+          <a:noFill/>
+        </p:spPr>
+        <p:txBody>
+          <a:bodyPr wrap="square" anchor="t" lIns="45720" rIns="45720" tIns="27432" bIns="27432">
+            <a:spAutoFit/>
+          </a:bodyPr>
+          <a:lstStyle/>
+          <a:p>
+            <a:pPr algn="l"/>
+            <a:r>
+              <a:rPr sz="1050" b="0">
+                <a:solidFill>
+                  <a:srgbClr val="334455"/>
+                </a:solidFill>
+                <a:latin typeface="Microsoft JhengHei"/>
+              </a:rPr>
+              <a:t>Live Demo 走完整流程；52 個測試</a:t>
+            </a:r>
+          </a:p>
+        </p:txBody>
+      </p:sp>
+      <p:sp>
+        <p:nvSpPr>
+          <p:cNvPr id="41" name="Rounded Rectangle 40"/>
+          <p:cNvSpPr/>
+          <p:nvPr/>
+        </p:nvSpPr>
+        <p:spPr>
+          <a:xfrm>
+            <a:off x="5943600" y="3383280"/>
+            <a:ext cx="2697480" cy="1691640"/>
+          </a:xfrm>
+          <a:prstGeom prst="roundRect">
+            <a:avLst>
+              <a:gd name="adj" fmla="val 8000"/>
+            </a:avLst>
+          </a:prstGeom>
+          <a:solidFill>
+            <a:srgbClr val="F4F6F9"/>
+          </a:solidFill>
+          <a:ln>
+            <a:noFill/>
+          </a:ln>
+          <a:effectLst/>
+        </p:spPr>
+        <p:style>
+          <a:lnRef idx="1">
+            <a:schemeClr val="accent1"/>
+          </a:lnRef>
+          <a:fillRef idx="3">
+            <a:schemeClr val="accent1"/>
+          </a:fillRef>
+          <a:effectRef idx="2">
+            <a:schemeClr val="accent1"/>
+          </a:effectRef>
+          <a:fontRef idx="minor">
+            <a:schemeClr val="lt1"/>
+          </a:fontRef>
+        </p:style>
+        <p:txBody>
+          <a:bodyPr rtlCol="0" anchor="ctr"/>
+          <a:lstStyle/>
+          <a:p>
+            <a:pPr algn="ctr"/>
+          </a:p>
+        </p:txBody>
+      </p:sp>
+      <p:sp>
+        <p:nvSpPr>
+          <p:cNvPr id="42" name="TextBox 41"/>
+          <p:cNvSpPr txBox="1"/>
+          <p:nvPr/>
+        </p:nvSpPr>
+        <p:spPr>
+          <a:xfrm>
+            <a:off x="6108192" y="3493008"/>
+            <a:ext cx="2377440" cy="640080"/>
+          </a:xfrm>
+          <a:prstGeom prst="rect">
+            <a:avLst/>
+          </a:prstGeom>
+          <a:noFill/>
+        </p:spPr>
+        <p:txBody>
+          <a:bodyPr wrap="square" anchor="t" lIns="45720" rIns="45720" tIns="27432" bIns="27432">
+            <a:spAutoFit/>
+          </a:bodyPr>
+          <a:lstStyle/>
+          <a:p>
+            <a:pPr algn="l"/>
+            <a:r>
+              <a:rPr sz="3000" b="1">
+                <a:solidFill>
+                  <a:srgbClr val="16304F"/>
+                </a:solidFill>
+                <a:latin typeface="Microsoft JhengHei"/>
+              </a:rPr>
+              <a:t>30%</a:t>
+            </a:r>
+          </a:p>
+        </p:txBody>
+      </p:sp>
+      <p:sp>
+        <p:nvSpPr>
+          <p:cNvPr id="43" name="TextBox 42"/>
+          <p:cNvSpPr txBox="1"/>
+          <p:nvPr/>
+        </p:nvSpPr>
+        <p:spPr>
+          <a:xfrm>
+            <a:off x="6108192" y="4114800"/>
+            <a:ext cx="2377440" cy="365760"/>
+          </a:xfrm>
+          <a:prstGeom prst="rect">
+            <a:avLst/>
+          </a:prstGeom>
+          <a:noFill/>
+        </p:spPr>
+        <p:txBody>
+          <a:bodyPr wrap="square" anchor="t" lIns="45720" rIns="45720" tIns="27432" bIns="27432">
+            <a:spAutoFit/>
+          </a:bodyPr>
+          <a:lstStyle/>
+          <a:p>
+            <a:pPr algn="l"/>
+            <a:r>
+              <a:rPr sz="1400" b="1">
+                <a:solidFill>
+                  <a:srgbClr val="16304F"/>
+                </a:solidFill>
+                <a:latin typeface="Microsoft JhengHei"/>
+              </a:rPr>
+              <a:t>資料應用性</a:t>
+            </a:r>
+          </a:p>
+        </p:txBody>
+      </p:sp>
+      <p:sp>
+        <p:nvSpPr>
+          <p:cNvPr id="44" name="TextBox 43"/>
+          <p:cNvSpPr txBox="1"/>
+          <p:nvPr/>
+        </p:nvSpPr>
+        <p:spPr>
+          <a:xfrm>
+            <a:off x="6108192" y="4462272"/>
+            <a:ext cx="2377440" cy="548640"/>
+          </a:xfrm>
+          <a:prstGeom prst="rect">
+            <a:avLst/>
+          </a:prstGeom>
+          <a:noFill/>
+        </p:spPr>
+        <p:txBody>
+          <a:bodyPr wrap="square" anchor="t" lIns="45720" rIns="45720" tIns="27432" bIns="27432">
+            <a:spAutoFit/>
+          </a:bodyPr>
+          <a:lstStyle/>
+          <a:p>
+            <a:pPr algn="l"/>
+            <a:r>
+              <a:rPr sz="1050" b="0">
+                <a:solidFill>
+                  <a:srgbClr val="334455"/>
+                </a:solidFill>
+                <a:latin typeface="Microsoft JhengHei"/>
+              </a:rPr>
+              <a:t>101 份讀完再設計；三套考題</a:t>
+            </a:r>
+          </a:p>
+        </p:txBody>
+      </p:sp>
+      <p:sp>
+        <p:nvSpPr>
+          <p:cNvPr id="45" name="Rounded Rectangle 44"/>
+          <p:cNvSpPr/>
+          <p:nvPr/>
+        </p:nvSpPr>
+        <p:spPr>
+          <a:xfrm>
+            <a:off x="8778240" y="3383280"/>
+            <a:ext cx="2697480" cy="1691640"/>
+          </a:xfrm>
+          <a:prstGeom prst="roundRect">
+            <a:avLst>
+              <a:gd name="adj" fmla="val 8000"/>
+            </a:avLst>
+          </a:prstGeom>
+          <a:solidFill>
+            <a:srgbClr val="F4F6F9"/>
+          </a:solidFill>
+          <a:ln>
+            <a:noFill/>
+          </a:ln>
+          <a:effectLst/>
+        </p:spPr>
+        <p:style>
+          <a:lnRef idx="1">
+            <a:schemeClr val="accent1"/>
+          </a:lnRef>
+          <a:fillRef idx="3">
+            <a:schemeClr val="accent1"/>
+          </a:fillRef>
+          <a:effectRef idx="2">
+            <a:schemeClr val="accent1"/>
+          </a:effectRef>
+          <a:fontRef idx="minor">
+            <a:schemeClr val="lt1"/>
+          </a:fontRef>
+        </p:style>
+        <p:txBody>
+          <a:bodyPr rtlCol="0" anchor="ctr"/>
+          <a:lstStyle/>
+          <a:p>
+            <a:pPr algn="ctr"/>
+          </a:p>
+        </p:txBody>
+      </p:sp>
+      <p:sp>
+        <p:nvSpPr>
+          <p:cNvPr id="46" name="TextBox 45"/>
+          <p:cNvSpPr txBox="1"/>
+          <p:nvPr/>
+        </p:nvSpPr>
+        <p:spPr>
+          <a:xfrm>
+            <a:off x="8942832" y="3493008"/>
+            <a:ext cx="2377440" cy="640080"/>
+          </a:xfrm>
+          <a:prstGeom prst="rect">
+            <a:avLst/>
+          </a:prstGeom>
+          <a:noFill/>
+        </p:spPr>
+        <p:txBody>
+          <a:bodyPr wrap="square" anchor="t" lIns="45720" rIns="45720" tIns="27432" bIns="27432">
+            <a:spAutoFit/>
+          </a:bodyPr>
+          <a:lstStyle/>
+          <a:p>
+            <a:pPr algn="l"/>
+            <a:r>
+              <a:rPr sz="3000" b="1">
+                <a:solidFill>
+                  <a:srgbClr val="16304F"/>
+                </a:solidFill>
+                <a:latin typeface="Microsoft JhengHei"/>
+              </a:rPr>
+              <a:t>25%</a:t>
+            </a:r>
+          </a:p>
+        </p:txBody>
+      </p:sp>
+      <p:sp>
+        <p:nvSpPr>
+          <p:cNvPr id="47" name="TextBox 46"/>
+          <p:cNvSpPr txBox="1"/>
+          <p:nvPr/>
+        </p:nvSpPr>
+        <p:spPr>
+          <a:xfrm>
+            <a:off x="8942832" y="4114800"/>
+            <a:ext cx="2377440" cy="365760"/>
+          </a:xfrm>
+          <a:prstGeom prst="rect">
+            <a:avLst/>
+          </a:prstGeom>
+          <a:noFill/>
+        </p:spPr>
+        <p:txBody>
+          <a:bodyPr wrap="square" anchor="t" lIns="45720" rIns="45720" tIns="27432" bIns="27432">
+            <a:spAutoFit/>
+          </a:bodyPr>
+          <a:lstStyle/>
+          <a:p>
+            <a:pPr algn="l"/>
+            <a:r>
+              <a:rPr sz="1400" b="1">
+                <a:solidFill>
+                  <a:srgbClr val="16304F"/>
+                </a:solidFill>
+                <a:latin typeface="Microsoft JhengHei"/>
+              </a:rPr>
+              <a:t>主題契合度</a:t>
+            </a:r>
+          </a:p>
+        </p:txBody>
+      </p:sp>
+      <p:sp>
+        <p:nvSpPr>
+          <p:cNvPr id="48" name="TextBox 47"/>
+          <p:cNvSpPr txBox="1"/>
+          <p:nvPr/>
+        </p:nvSpPr>
+        <p:spPr>
+          <a:xfrm>
+            <a:off x="8942832" y="4462272"/>
+            <a:ext cx="2377440" cy="548640"/>
+          </a:xfrm>
+          <a:prstGeom prst="rect">
+            <a:avLst/>
+          </a:prstGeom>
+          <a:noFill/>
+        </p:spPr>
+        <p:txBody>
+          <a:bodyPr wrap="square" anchor="t" lIns="45720" rIns="45720" tIns="27432" bIns="27432">
+            <a:spAutoFit/>
+          </a:bodyPr>
+          <a:lstStyle/>
+          <a:p>
+            <a:pPr algn="l"/>
+            <a:r>
+              <a:rPr sz="1050" b="0">
+                <a:solidFill>
+                  <a:srgbClr val="334455"/>
+                </a:solidFill>
+                <a:latin typeface="Microsoft JhengHei"/>
+              </a:rPr>
+              <a:t>四大功能對應；輔助不取代</a:t>
+            </a:r>
+          </a:p>
+        </p:txBody>
+      </p:sp>
+      <p:sp>
+        <p:nvSpPr>
+          <p:cNvPr id="49" name="Rectangle 48"/>
+          <p:cNvSpPr/>
+          <p:nvPr/>
+        </p:nvSpPr>
+        <p:spPr>
+          <a:xfrm>
+            <a:off x="640080" y="5623560"/>
+            <a:ext cx="10908792" cy="566928"/>
+          </a:xfrm>
+          <a:prstGeom prst="rect">
+            <a:avLst/>
+          </a:prstGeom>
+          <a:solidFill>
+            <a:srgbClr val="FFF8EA"/>
+          </a:solidFill>
+          <a:ln>
+            <a:noFill/>
+          </a:ln>
+          <a:effectLst/>
+        </p:spPr>
+        <p:style>
+          <a:lnRef idx="1">
+            <a:schemeClr val="accent1"/>
+          </a:lnRef>
+          <a:fillRef idx="3">
+            <a:schemeClr val="accent1"/>
+          </a:fillRef>
+          <a:effectRef idx="2">
+            <a:schemeClr val="accent1"/>
+          </a:effectRef>
+          <a:fontRef idx="minor">
+            <a:schemeClr val="lt1"/>
+          </a:fontRef>
+        </p:style>
+        <p:txBody>
+          <a:bodyPr rtlCol="0" anchor="ctr"/>
+          <a:lstStyle/>
+          <a:p>
+            <a:pPr algn="ctr"/>
+          </a:p>
+        </p:txBody>
+      </p:sp>
+      <p:sp>
+        <p:nvSpPr>
+          <p:cNvPr id="50" name="Rectangle 49"/>
+          <p:cNvSpPr/>
+          <p:nvPr/>
+        </p:nvSpPr>
+        <p:spPr>
+          <a:xfrm>
+            <a:off x="640080" y="5623560"/>
+            <a:ext cx="64008" cy="566928"/>
+          </a:xfrm>
+          <a:prstGeom prst="rect">
+            <a:avLst/>
+          </a:prstGeom>
+          <a:solidFill>
+            <a:srgbClr val="D98E04"/>
+          </a:solidFill>
+          <a:ln>
+            <a:noFill/>
+          </a:ln>
+          <a:effectLst/>
+        </p:spPr>
+        <p:style>
+          <a:lnRef idx="1">
+            <a:schemeClr val="accent1"/>
+          </a:lnRef>
+          <a:fillRef idx="3">
+            <a:schemeClr val="accent1"/>
+          </a:fillRef>
+          <a:effectRef idx="2">
+            <a:schemeClr val="accent1"/>
+          </a:effectRef>
+          <a:fontRef idx="minor">
+            <a:schemeClr val="lt1"/>
+          </a:fontRef>
+        </p:style>
+        <p:txBody>
+          <a:bodyPr rtlCol="0" anchor="ctr"/>
+          <a:lstStyle/>
+          <a:p>
+            <a:pPr algn="ctr"/>
+          </a:p>
+        </p:txBody>
+      </p:sp>
+      <p:sp>
+        <p:nvSpPr>
+          <p:cNvPr id="51" name="TextBox 50"/>
+          <p:cNvSpPr txBox="1"/>
+          <p:nvPr/>
+        </p:nvSpPr>
+        <p:spPr>
+          <a:xfrm>
+            <a:off x="822960" y="5641848"/>
+            <a:ext cx="10607040" cy="548640"/>
+          </a:xfrm>
+          <a:prstGeom prst="rect">
+            <a:avLst/>
+          </a:prstGeom>
+          <a:noFill/>
+        </p:spPr>
+        <p:txBody>
+          <a:bodyPr wrap="square" anchor="ctr" lIns="45720" rIns="45720" tIns="27432" bIns="27432">
+            <a:spAutoFit/>
+          </a:bodyPr>
+          <a:lstStyle/>
+          <a:p>
+            <a:pPr algn="l"/>
+            <a:r>
+              <a:rPr sz="1350" b="0">
+                <a:solidFill>
+                  <a:srgbClr val="334455"/>
+                </a:solidFill>
+                <a:latin typeface="Microsoft JhengHei"/>
+              </a:rPr>
+              <a:t>Live Demo　http://100.20.156.38/　— 所有畫面都是線上現跑的</a:t>
+            </a:r>
+          </a:p>
+        </p:txBody>
+      </p:sp>
+    </p:spTree>
+  </p:cSld>
+  <p:clrMapOvr>
+    <a:masterClrMapping/>
+  </p:clrMapOvr>
+</p:sld>
+</file>
+
+<file path=ppt/slides/slide11.xml><?xml version="1.0" encoding="utf-8"?>
+<p:sld xmlns:a="http://schemas.openxmlformats.org/drawingml/2006/main" xmlns:p="http://schemas.openxmlformats.org/presentationml/2006/main" xmlns:r="http://schemas.openxmlformats.org/officeDocument/2006/relationships">
+  <p:cSld>
+    <p:spTree>
+      <p:nvGrpSpPr>
+        <p:cNvPr id="1" name=""/>
+        <p:cNvGrpSpPr/>
+        <p:nvPr/>
+      </p:nvGrpSpPr>
+      <p:grpSpPr/>
+      <p:sp>
+        <p:nvSpPr>
+          <p:cNvPr id="2" name="Rectangle 1"/>
+          <p:cNvSpPr/>
+          <p:nvPr/>
+        </p:nvSpPr>
+        <p:spPr>
+          <a:xfrm>
+            <a:off x="0" y="0"/>
             <a:ext cx="12191695" cy="6858000"/>
           </a:xfrm>
           <a:prstGeom prst="rect">
@@ -4102,7 +6176,7 @@
                 </a:solidFill>
                 <a:latin typeface="Microsoft JhengHei"/>
               </a:rPr>
-              <a:t>2 / 10</a:t>
+              <a:t>2 / 11</a:t>
             </a:r>
           </a:p>
         </p:txBody>
@@ -4928,7 +7002,7 @@
                 </a:solidFill>
                 <a:latin typeface="Microsoft JhengHei"/>
               </a:rPr>
-              <a:t>3 / 10</a:t>
+              <a:t>3 / 11</a:t>
             </a:r>
           </a:p>
         </p:txBody>
@@ -6186,7 +8260,7 @@
                 </a:solidFill>
                 <a:latin typeface="Microsoft JhengHei"/>
               </a:rPr>
-              <a:t>4 / 10</a:t>
+              <a:t>4 / 11</a:t>
             </a:r>
           </a:p>
         </p:txBody>
@@ -7005,7 +9079,7 @@
                 </a:solidFill>
                 <a:latin typeface="Microsoft JhengHei"/>
               </a:rPr>
-              <a:t>04 ／ AWS 架構</a:t>
+              <a:t>04 ／ 每一步透明</a:t>
             </a:r>
           </a:p>
         </p:txBody>
@@ -7040,7 +9114,7 @@
                 </a:solidFill>
                 <a:latin typeface="Microsoft JhengHei"/>
               </a:rPr>
-              <a:t>一台 EC2，三個 AWS 服務</a:t>
+              <a:t>固定七個步驟，哪一步錯就修哪一步</a:t>
             </a:r>
           </a:p>
         </p:txBody>
@@ -7154,35 +9228,59 @@
                 </a:solidFill>
                 <a:latin typeface="Microsoft JhengHei"/>
               </a:rPr>
-              <a:t>5 / 10</a:t>
-            </a:r>
-          </a:p>
-        </p:txBody>
-      </p:sp>
-      <p:pic>
-        <p:nvPicPr>
-          <p:cNvPr id="9" name="Picture 8" descr="aws-architecture.png"/>
-          <p:cNvPicPr>
-            <a:picLocks noChangeAspect="1"/>
-          </p:cNvPicPr>
-          <p:nvPr/>
-        </p:nvPicPr>
-        <p:blipFill>
-          <a:blip r:embed="rId2"/>
-          <a:stretch>
-            <a:fillRect/>
-          </a:stretch>
-        </p:blipFill>
-        <p:spPr>
-          <a:xfrm>
-            <a:off x="868680" y="1417320"/>
-            <a:ext cx="10424160" cy="4894823"/>
-          </a:xfrm>
-          <a:prstGeom prst="rect">
-            <a:avLst/>
-          </a:prstGeom>
-        </p:spPr>
-      </p:pic>
+              <a:t>5 / 11</a:t>
+            </a:r>
+          </a:p>
+        </p:txBody>
+      </p:sp>
+      <p:sp>
+        <p:nvSpPr>
+          <p:cNvPr id="9" name="Rounded Rectangle 8"/>
+          <p:cNvSpPr/>
+          <p:nvPr/>
+        </p:nvSpPr>
+        <p:spPr>
+          <a:xfrm>
+            <a:off x="640080" y="1554480"/>
+            <a:ext cx="1481328" cy="1234440"/>
+          </a:xfrm>
+          <a:prstGeom prst="roundRect">
+            <a:avLst>
+              <a:gd name="adj" fmla="val 8000"/>
+            </a:avLst>
+          </a:prstGeom>
+          <a:solidFill>
+            <a:srgbClr val="FFFFFF"/>
+          </a:solidFill>
+          <a:ln w="19050">
+            <a:solidFill>
+              <a:srgbClr val="DDE3EA"/>
+            </a:solidFill>
+          </a:ln>
+          <a:effectLst/>
+        </p:spPr>
+        <p:style>
+          <a:lnRef idx="1">
+            <a:schemeClr val="accent1"/>
+          </a:lnRef>
+          <a:fillRef idx="3">
+            <a:schemeClr val="accent1"/>
+          </a:fillRef>
+          <a:effectRef idx="2">
+            <a:schemeClr val="accent1"/>
+          </a:effectRef>
+          <a:fontRef idx="minor">
+            <a:schemeClr val="lt1"/>
+          </a:fontRef>
+        </p:style>
+        <p:txBody>
+          <a:bodyPr rtlCol="0" anchor="ctr"/>
+          <a:lstStyle/>
+          <a:p>
+            <a:pPr algn="ctr"/>
+          </a:p>
+        </p:txBody>
+      </p:sp>
       <p:sp>
         <p:nvSpPr>
           <p:cNvPr id="10" name="TextBox 9"/>
@@ -7191,8 +9289,576 @@
         </p:nvSpPr>
         <p:spPr>
           <a:xfrm>
-            <a:off x="7863840" y="384048"/>
-            <a:ext cx="3657600" cy="274320"/>
+            <a:off x="640080" y="1554480"/>
+            <a:ext cx="1481328" cy="1234440"/>
+          </a:xfrm>
+          <a:prstGeom prst="rect">
+            <a:avLst/>
+          </a:prstGeom>
+          <a:noFill/>
+        </p:spPr>
+        <p:txBody>
+          <a:bodyPr wrap="square" anchor="ctr" lIns="45720" rIns="45720" tIns="27432" bIns="27432">
+            <a:spAutoFit/>
+          </a:bodyPr>
+          <a:lstStyle/>
+          <a:p>
+            <a:pPr algn="ctr"/>
+            <a:r>
+              <a:rPr sz="1500" b="1">
+                <a:solidFill>
+                  <a:srgbClr val="16304F"/>
+                </a:solidFill>
+                <a:latin typeface="Microsoft JhengHei"/>
+              </a:rPr>
+              <a:t>讀出基本資料</a:t>
+            </a:r>
+          </a:p>
+        </p:txBody>
+      </p:sp>
+      <p:sp>
+        <p:nvSpPr>
+          <p:cNvPr id="11" name="Rounded Rectangle 10"/>
+          <p:cNvSpPr/>
+          <p:nvPr/>
+        </p:nvSpPr>
+        <p:spPr>
+          <a:xfrm>
+            <a:off x="2203704" y="1554480"/>
+            <a:ext cx="1481328" cy="1234440"/>
+          </a:xfrm>
+          <a:prstGeom prst="roundRect">
+            <a:avLst>
+              <a:gd name="adj" fmla="val 8000"/>
+            </a:avLst>
+          </a:prstGeom>
+          <a:solidFill>
+            <a:srgbClr val="F2F8F3"/>
+          </a:solidFill>
+          <a:ln w="19050">
+            <a:solidFill>
+              <a:srgbClr val="2E7D32"/>
+            </a:solidFill>
+          </a:ln>
+          <a:effectLst/>
+        </p:spPr>
+        <p:style>
+          <a:lnRef idx="1">
+            <a:schemeClr val="accent1"/>
+          </a:lnRef>
+          <a:fillRef idx="3">
+            <a:schemeClr val="accent1"/>
+          </a:fillRef>
+          <a:effectRef idx="2">
+            <a:schemeClr val="accent1"/>
+          </a:effectRef>
+          <a:fontRef idx="minor">
+            <a:schemeClr val="lt1"/>
+          </a:fontRef>
+        </p:style>
+        <p:txBody>
+          <a:bodyPr rtlCol="0" anchor="ctr"/>
+          <a:lstStyle/>
+          <a:p>
+            <a:pPr algn="ctr"/>
+          </a:p>
+        </p:txBody>
+      </p:sp>
+      <p:sp>
+        <p:nvSpPr>
+          <p:cNvPr id="12" name="TextBox 11"/>
+          <p:cNvSpPr txBox="1"/>
+          <p:nvPr/>
+        </p:nvSpPr>
+        <p:spPr>
+          <a:xfrm>
+            <a:off x="2203704" y="1554480"/>
+            <a:ext cx="1481328" cy="1234440"/>
+          </a:xfrm>
+          <a:prstGeom prst="rect">
+            <a:avLst/>
+          </a:prstGeom>
+          <a:noFill/>
+        </p:spPr>
+        <p:txBody>
+          <a:bodyPr wrap="square" anchor="ctr" lIns="45720" rIns="45720" tIns="27432" bIns="27432">
+            <a:spAutoFit/>
+          </a:bodyPr>
+          <a:lstStyle/>
+          <a:p>
+            <a:pPr algn="ctr"/>
+            <a:r>
+              <a:rPr sz="1500" b="1">
+                <a:solidFill>
+                  <a:srgbClr val="16304F"/>
+                </a:solidFill>
+                <a:latin typeface="Microsoft JhengHei"/>
+              </a:rPr>
+              <a:t>期間・程序</a:t>
+            </a:r>
+          </a:p>
+        </p:txBody>
+      </p:sp>
+      <p:sp>
+        <p:nvSpPr>
+          <p:cNvPr id="13" name="Rounded Rectangle 12"/>
+          <p:cNvSpPr/>
+          <p:nvPr/>
+        </p:nvSpPr>
+        <p:spPr>
+          <a:xfrm>
+            <a:off x="3767328" y="1554480"/>
+            <a:ext cx="1481328" cy="1234440"/>
+          </a:xfrm>
+          <a:prstGeom prst="roundRect">
+            <a:avLst>
+              <a:gd name="adj" fmla="val 8000"/>
+            </a:avLst>
+          </a:prstGeom>
+          <a:solidFill>
+            <a:srgbClr val="FFFFFF"/>
+          </a:solidFill>
+          <a:ln w="19050">
+            <a:solidFill>
+              <a:srgbClr val="DDE3EA"/>
+            </a:solidFill>
+          </a:ln>
+          <a:effectLst/>
+        </p:spPr>
+        <p:style>
+          <a:lnRef idx="1">
+            <a:schemeClr val="accent1"/>
+          </a:lnRef>
+          <a:fillRef idx="3">
+            <a:schemeClr val="accent1"/>
+          </a:fillRef>
+          <a:effectRef idx="2">
+            <a:schemeClr val="accent1"/>
+          </a:effectRef>
+          <a:fontRef idx="minor">
+            <a:schemeClr val="lt1"/>
+          </a:fontRef>
+        </p:style>
+        <p:txBody>
+          <a:bodyPr rtlCol="0" anchor="ctr"/>
+          <a:lstStyle/>
+          <a:p>
+            <a:pPr algn="ctr"/>
+          </a:p>
+        </p:txBody>
+      </p:sp>
+      <p:sp>
+        <p:nvSpPr>
+          <p:cNvPr id="14" name="TextBox 13"/>
+          <p:cNvSpPr txBox="1"/>
+          <p:nvPr/>
+        </p:nvSpPr>
+        <p:spPr>
+          <a:xfrm>
+            <a:off x="3767328" y="1554480"/>
+            <a:ext cx="1481328" cy="1234440"/>
+          </a:xfrm>
+          <a:prstGeom prst="rect">
+            <a:avLst/>
+          </a:prstGeom>
+          <a:noFill/>
+        </p:spPr>
+        <p:txBody>
+          <a:bodyPr wrap="square" anchor="ctr" lIns="45720" rIns="45720" tIns="27432" bIns="27432">
+            <a:spAutoFit/>
+          </a:bodyPr>
+          <a:lstStyle/>
+          <a:p>
+            <a:pPr algn="ctr"/>
+            <a:r>
+              <a:rPr sz="1500" b="1">
+                <a:solidFill>
+                  <a:srgbClr val="16304F"/>
+                </a:solidFill>
+                <a:latin typeface="Microsoft JhengHei"/>
+              </a:rPr>
+              <a:t>整理爭點</a:t>
+            </a:r>
+          </a:p>
+        </p:txBody>
+      </p:sp>
+      <p:sp>
+        <p:nvSpPr>
+          <p:cNvPr id="15" name="Rounded Rectangle 14"/>
+          <p:cNvSpPr/>
+          <p:nvPr/>
+        </p:nvSpPr>
+        <p:spPr>
+          <a:xfrm>
+            <a:off x="5330952" y="1554480"/>
+            <a:ext cx="1481328" cy="1234440"/>
+          </a:xfrm>
+          <a:prstGeom prst="roundRect">
+            <a:avLst>
+              <a:gd name="adj" fmla="val 8000"/>
+            </a:avLst>
+          </a:prstGeom>
+          <a:solidFill>
+            <a:srgbClr val="FFFFFF"/>
+          </a:solidFill>
+          <a:ln w="19050">
+            <a:solidFill>
+              <a:srgbClr val="DDE3EA"/>
+            </a:solidFill>
+          </a:ln>
+          <a:effectLst/>
+        </p:spPr>
+        <p:style>
+          <a:lnRef idx="1">
+            <a:schemeClr val="accent1"/>
+          </a:lnRef>
+          <a:fillRef idx="3">
+            <a:schemeClr val="accent1"/>
+          </a:fillRef>
+          <a:effectRef idx="2">
+            <a:schemeClr val="accent1"/>
+          </a:effectRef>
+          <a:fontRef idx="minor">
+            <a:schemeClr val="lt1"/>
+          </a:fontRef>
+        </p:style>
+        <p:txBody>
+          <a:bodyPr rtlCol="0" anchor="ctr"/>
+          <a:lstStyle/>
+          <a:p>
+            <a:pPr algn="ctr"/>
+          </a:p>
+        </p:txBody>
+      </p:sp>
+      <p:sp>
+        <p:nvSpPr>
+          <p:cNvPr id="16" name="TextBox 15"/>
+          <p:cNvSpPr txBox="1"/>
+          <p:nvPr/>
+        </p:nvSpPr>
+        <p:spPr>
+          <a:xfrm>
+            <a:off x="5330952" y="1554480"/>
+            <a:ext cx="1481328" cy="1234440"/>
+          </a:xfrm>
+          <a:prstGeom prst="rect">
+            <a:avLst/>
+          </a:prstGeom>
+          <a:noFill/>
+        </p:spPr>
+        <p:txBody>
+          <a:bodyPr wrap="square" anchor="ctr" lIns="45720" rIns="45720" tIns="27432" bIns="27432">
+            <a:spAutoFit/>
+          </a:bodyPr>
+          <a:lstStyle/>
+          <a:p>
+            <a:pPr algn="ctr"/>
+            <a:r>
+              <a:rPr sz="1500" b="1">
+                <a:solidFill>
+                  <a:srgbClr val="16304F"/>
+                </a:solidFill>
+                <a:latin typeface="Microsoft JhengHei"/>
+              </a:rPr>
+              <a:t>找法規</a:t>
+            </a:r>
+          </a:p>
+        </p:txBody>
+      </p:sp>
+      <p:sp>
+        <p:nvSpPr>
+          <p:cNvPr id="17" name="Rounded Rectangle 16"/>
+          <p:cNvSpPr/>
+          <p:nvPr/>
+        </p:nvSpPr>
+        <p:spPr>
+          <a:xfrm>
+            <a:off x="6894576" y="1554480"/>
+            <a:ext cx="1481328" cy="1234440"/>
+          </a:xfrm>
+          <a:prstGeom prst="roundRect">
+            <a:avLst>
+              <a:gd name="adj" fmla="val 8000"/>
+            </a:avLst>
+          </a:prstGeom>
+          <a:solidFill>
+            <a:srgbClr val="FFFFFF"/>
+          </a:solidFill>
+          <a:ln w="19050">
+            <a:solidFill>
+              <a:srgbClr val="DDE3EA"/>
+            </a:solidFill>
+          </a:ln>
+          <a:effectLst/>
+        </p:spPr>
+        <p:style>
+          <a:lnRef idx="1">
+            <a:schemeClr val="accent1"/>
+          </a:lnRef>
+          <a:fillRef idx="3">
+            <a:schemeClr val="accent1"/>
+          </a:fillRef>
+          <a:effectRef idx="2">
+            <a:schemeClr val="accent1"/>
+          </a:effectRef>
+          <a:fontRef idx="minor">
+            <a:schemeClr val="lt1"/>
+          </a:fontRef>
+        </p:style>
+        <p:txBody>
+          <a:bodyPr rtlCol="0" anchor="ctr"/>
+          <a:lstStyle/>
+          <a:p>
+            <a:pPr algn="ctr"/>
+          </a:p>
+        </p:txBody>
+      </p:sp>
+      <p:sp>
+        <p:nvSpPr>
+          <p:cNvPr id="18" name="TextBox 17"/>
+          <p:cNvSpPr txBox="1"/>
+          <p:nvPr/>
+        </p:nvSpPr>
+        <p:spPr>
+          <a:xfrm>
+            <a:off x="6894576" y="1554480"/>
+            <a:ext cx="1481328" cy="1234440"/>
+          </a:xfrm>
+          <a:prstGeom prst="rect">
+            <a:avLst/>
+          </a:prstGeom>
+          <a:noFill/>
+        </p:spPr>
+        <p:txBody>
+          <a:bodyPr wrap="square" anchor="ctr" lIns="45720" rIns="45720" tIns="27432" bIns="27432">
+            <a:spAutoFit/>
+          </a:bodyPr>
+          <a:lstStyle/>
+          <a:p>
+            <a:pPr algn="ctr"/>
+            <a:r>
+              <a:rPr sz="1500" b="1">
+                <a:solidFill>
+                  <a:srgbClr val="16304F"/>
+                </a:solidFill>
+                <a:latin typeface="Microsoft JhengHei"/>
+              </a:rPr>
+              <a:t>找相似案例</a:t>
+            </a:r>
+          </a:p>
+        </p:txBody>
+      </p:sp>
+      <p:sp>
+        <p:nvSpPr>
+          <p:cNvPr id="19" name="Rounded Rectangle 18"/>
+          <p:cNvSpPr/>
+          <p:nvPr/>
+        </p:nvSpPr>
+        <p:spPr>
+          <a:xfrm>
+            <a:off x="8458200" y="1554480"/>
+            <a:ext cx="1481328" cy="1234440"/>
+          </a:xfrm>
+          <a:prstGeom prst="roundRect">
+            <a:avLst>
+              <a:gd name="adj" fmla="val 8000"/>
+            </a:avLst>
+          </a:prstGeom>
+          <a:solidFill>
+            <a:srgbClr val="FFFFFF"/>
+          </a:solidFill>
+          <a:ln w="19050">
+            <a:solidFill>
+              <a:srgbClr val="DDE3EA"/>
+            </a:solidFill>
+          </a:ln>
+          <a:effectLst/>
+        </p:spPr>
+        <p:style>
+          <a:lnRef idx="1">
+            <a:schemeClr val="accent1"/>
+          </a:lnRef>
+          <a:fillRef idx="3">
+            <a:schemeClr val="accent1"/>
+          </a:fillRef>
+          <a:effectRef idx="2">
+            <a:schemeClr val="accent1"/>
+          </a:effectRef>
+          <a:fontRef idx="minor">
+            <a:schemeClr val="lt1"/>
+          </a:fontRef>
+        </p:style>
+        <p:txBody>
+          <a:bodyPr rtlCol="0" anchor="ctr"/>
+          <a:lstStyle/>
+          <a:p>
+            <a:pPr algn="ctr"/>
+          </a:p>
+        </p:txBody>
+      </p:sp>
+      <p:sp>
+        <p:nvSpPr>
+          <p:cNvPr id="20" name="TextBox 19"/>
+          <p:cNvSpPr txBox="1"/>
+          <p:nvPr/>
+        </p:nvSpPr>
+        <p:spPr>
+          <a:xfrm>
+            <a:off x="8458200" y="1554480"/>
+            <a:ext cx="1481328" cy="1234440"/>
+          </a:xfrm>
+          <a:prstGeom prst="rect">
+            <a:avLst/>
+          </a:prstGeom>
+          <a:noFill/>
+        </p:spPr>
+        <p:txBody>
+          <a:bodyPr wrap="square" anchor="ctr" lIns="45720" rIns="45720" tIns="27432" bIns="27432">
+            <a:spAutoFit/>
+          </a:bodyPr>
+          <a:lstStyle/>
+          <a:p>
+            <a:pPr algn="ctr"/>
+            <a:r>
+              <a:rPr sz="1500" b="1">
+                <a:solidFill>
+                  <a:srgbClr val="16304F"/>
+                </a:solidFill>
+                <a:latin typeface="Microsoft JhengHei"/>
+              </a:rPr>
+              <a:t>寫草稿</a:t>
+            </a:r>
+          </a:p>
+        </p:txBody>
+      </p:sp>
+      <p:sp>
+        <p:nvSpPr>
+          <p:cNvPr id="21" name="Rounded Rectangle 20"/>
+          <p:cNvSpPr/>
+          <p:nvPr/>
+        </p:nvSpPr>
+        <p:spPr>
+          <a:xfrm>
+            <a:off x="10021824" y="1554480"/>
+            <a:ext cx="1481328" cy="1234440"/>
+          </a:xfrm>
+          <a:prstGeom prst="roundRect">
+            <a:avLst>
+              <a:gd name="adj" fmla="val 8000"/>
+            </a:avLst>
+          </a:prstGeom>
+          <a:solidFill>
+            <a:srgbClr val="FFFFFF"/>
+          </a:solidFill>
+          <a:ln w="19050">
+            <a:solidFill>
+              <a:srgbClr val="DDE3EA"/>
+            </a:solidFill>
+          </a:ln>
+          <a:effectLst/>
+        </p:spPr>
+        <p:style>
+          <a:lnRef idx="1">
+            <a:schemeClr val="accent1"/>
+          </a:lnRef>
+          <a:fillRef idx="3">
+            <a:schemeClr val="accent1"/>
+          </a:fillRef>
+          <a:effectRef idx="2">
+            <a:schemeClr val="accent1"/>
+          </a:effectRef>
+          <a:fontRef idx="minor">
+            <a:schemeClr val="lt1"/>
+          </a:fontRef>
+        </p:style>
+        <p:txBody>
+          <a:bodyPr rtlCol="0" anchor="ctr"/>
+          <a:lstStyle/>
+          <a:p>
+            <a:pPr algn="ctr"/>
+          </a:p>
+        </p:txBody>
+      </p:sp>
+      <p:sp>
+        <p:nvSpPr>
+          <p:cNvPr id="22" name="TextBox 21"/>
+          <p:cNvSpPr txBox="1"/>
+          <p:nvPr/>
+        </p:nvSpPr>
+        <p:spPr>
+          <a:xfrm>
+            <a:off x="10021824" y="1554480"/>
+            <a:ext cx="1481328" cy="1234440"/>
+          </a:xfrm>
+          <a:prstGeom prst="rect">
+            <a:avLst/>
+          </a:prstGeom>
+          <a:noFill/>
+        </p:spPr>
+        <p:txBody>
+          <a:bodyPr wrap="square" anchor="ctr" lIns="45720" rIns="45720" tIns="27432" bIns="27432">
+            <a:spAutoFit/>
+          </a:bodyPr>
+          <a:lstStyle/>
+          <a:p>
+            <a:pPr algn="ctr"/>
+            <a:r>
+              <a:rPr sz="1500" b="1">
+                <a:solidFill>
+                  <a:srgbClr val="16304F"/>
+                </a:solidFill>
+                <a:latin typeface="Microsoft JhengHei"/>
+              </a:rPr>
+              <a:t>承辦人修正</a:t>
+            </a:r>
+          </a:p>
+        </p:txBody>
+      </p:sp>
+      <p:sp>
+        <p:nvSpPr>
+          <p:cNvPr id="23" name="TextBox 22"/>
+          <p:cNvSpPr txBox="1"/>
+          <p:nvPr/>
+        </p:nvSpPr>
+        <p:spPr>
+          <a:xfrm>
+            <a:off x="640080" y="3200400"/>
+            <a:ext cx="2103120" cy="1463040"/>
+          </a:xfrm>
+          <a:prstGeom prst="rect">
+            <a:avLst/>
+          </a:prstGeom>
+          <a:noFill/>
+        </p:spPr>
+        <p:txBody>
+          <a:bodyPr wrap="square" anchor="ctr" lIns="45720" rIns="45720" tIns="27432" bIns="27432">
+            <a:spAutoFit/>
+          </a:bodyPr>
+          <a:lstStyle/>
+          <a:p>
+            <a:pPr algn="l"/>
+            <a:r>
+              <a:rPr sz="9600" b="1">
+                <a:solidFill>
+                  <a:srgbClr val="16304F"/>
+                </a:solidFill>
+                <a:latin typeface="Microsoft JhengHei"/>
+              </a:rPr>
+              <a:t>6</a:t>
+            </a:r>
+          </a:p>
+        </p:txBody>
+      </p:sp>
+      <p:sp>
+        <p:nvSpPr>
+          <p:cNvPr id="24" name="TextBox 23"/>
+          <p:cNvSpPr txBox="1"/>
+          <p:nvPr/>
+        </p:nvSpPr>
+        <p:spPr>
+          <a:xfrm>
+            <a:off x="2743200" y="3977639"/>
+            <a:ext cx="2560320" cy="548640"/>
           </a:xfrm>
           <a:prstGeom prst="rect">
             <a:avLst/>
@@ -7205,15 +9871,85 @@
           </a:bodyPr>
           <a:lstStyle/>
           <a:p>
-            <a:pPr algn="r"/>
-            <a:r>
-              <a:rPr sz="1100" b="0">
-                <a:solidFill>
-                  <a:srgbClr val="8A93A0"/>
-                </a:solidFill>
-                <a:latin typeface="Microsoft JhengHei"/>
-              </a:rPr>
-              <a:t>全部在競賽允許清單內</a:t>
+            <a:pPr algn="l"/>
+            <a:r>
+              <a:rPr sz="1800" b="0">
+                <a:solidFill>
+                  <a:srgbClr val="5B6573"/>
+                </a:solidFill>
+                <a:latin typeface="Microsoft JhengHei"/>
+              </a:rPr>
+              <a:t>次 AI・約 2 分鐘</a:t>
+            </a:r>
+          </a:p>
+        </p:txBody>
+      </p:sp>
+      <p:sp>
+        <p:nvSpPr>
+          <p:cNvPr id="25" name="TextBox 24"/>
+          <p:cNvSpPr txBox="1"/>
+          <p:nvPr/>
+        </p:nvSpPr>
+        <p:spPr>
+          <a:xfrm>
+            <a:off x="5486400" y="3291840"/>
+            <a:ext cx="6035040" cy="914400"/>
+          </a:xfrm>
+          <a:prstGeom prst="rect">
+            <a:avLst/>
+          </a:prstGeom>
+          <a:noFill/>
+        </p:spPr>
+        <p:txBody>
+          <a:bodyPr wrap="square" anchor="t" lIns="45720" rIns="45720" tIns="27432" bIns="27432">
+            <a:spAutoFit/>
+          </a:bodyPr>
+          <a:lstStyle/>
+          <a:p>
+            <a:pPr algn="l"/>
+            <a:r>
+              <a:rPr sz="1800" b="0">
+                <a:solidFill>
+                  <a:srgbClr val="334455"/>
+                </a:solidFill>
+                <a:latin typeface="Microsoft JhengHei"/>
+              </a:rPr>
+              <a:t>步驟固定，結果留底。錯在哪一步，就修那一步；每個結論都指得出卷證和條號。</a:t>
+            </a:r>
+          </a:p>
+        </p:txBody>
+      </p:sp>
+      <p:sp>
+        <p:nvSpPr>
+          <p:cNvPr id="26" name="TextBox 25"/>
+          <p:cNvSpPr txBox="1"/>
+          <p:nvPr/>
+        </p:nvSpPr>
+        <p:spPr>
+          <a:xfrm>
+            <a:off x="5486400" y="4297680"/>
+            <a:ext cx="6035040" cy="731520"/>
+          </a:xfrm>
+          <a:prstGeom prst="rect">
+            <a:avLst/>
+          </a:prstGeom>
+          <a:noFill/>
+        </p:spPr>
+        <p:txBody>
+          <a:bodyPr wrap="square" anchor="t" lIns="45720" rIns="45720" tIns="27432" bIns="27432">
+            <a:spAutoFit/>
+          </a:bodyPr>
+          <a:lstStyle/>
+          <a:p>
+            <a:pPr algn="l"/>
+            <a:r>
+              <a:rPr sz="1800" b="1">
+                <a:solidFill>
+                  <a:srgbClr val="2E7D32"/>
+                </a:solidFill>
+                <a:latin typeface="Microsoft JhengHei"/>
+              </a:rPr>
+              <a:t>期間怎麼算、該不該受理，是法條說了算，不是 AI 猜——這一步交給程式。</a:t>
             </a:r>
           </a:p>
         </p:txBody>
@@ -7354,7 +10090,7 @@
                 </a:solidFill>
                 <a:latin typeface="Microsoft JhengHei"/>
               </a:rPr>
-              <a:t>05 ／ 可信度</a:t>
+              <a:t>05 ／ AWS 架構</a:t>
             </a:r>
           </a:p>
         </p:txBody>
@@ -7389,7 +10125,7 @@
                 </a:solidFill>
                 <a:latin typeface="Microsoft JhengHei"/>
               </a:rPr>
-              <a:t>AI 會犯的四種錯，四道關卡</a:t>
+              <a:t>一台 EC2，三個 AWS 服務</a:t>
             </a:r>
           </a:p>
         </p:txBody>
@@ -7503,120 +10239,45 @@
                 </a:solidFill>
                 <a:latin typeface="Microsoft JhengHei"/>
               </a:rPr>
-              <a:t>6 / 10</a:t>
-            </a:r>
-          </a:p>
-        </p:txBody>
-      </p:sp>
-      <p:sp>
-        <p:nvSpPr>
-          <p:cNvPr id="9" name="Rounded Rectangle 8"/>
-          <p:cNvSpPr/>
-          <p:nvPr/>
-        </p:nvSpPr>
-        <p:spPr>
-          <a:xfrm>
-            <a:off x="640080" y="1554480"/>
-            <a:ext cx="2606040" cy="3840480"/>
-          </a:xfrm>
-          <a:prstGeom prst="roundRect">
-            <a:avLst>
-              <a:gd name="adj" fmla="val 8000"/>
-            </a:avLst>
-          </a:prstGeom>
-          <a:solidFill>
-            <a:srgbClr val="F4F6F9"/>
-          </a:solidFill>
-          <a:ln>
-            <a:noFill/>
-          </a:ln>
-          <a:effectLst/>
-        </p:spPr>
-        <p:style>
-          <a:lnRef idx="1">
-            <a:schemeClr val="accent1"/>
-          </a:lnRef>
-          <a:fillRef idx="3">
-            <a:schemeClr val="accent1"/>
-          </a:fillRef>
-          <a:effectRef idx="2">
-            <a:schemeClr val="accent1"/>
-          </a:effectRef>
-          <a:fontRef idx="minor">
-            <a:schemeClr val="lt1"/>
-          </a:fontRef>
-        </p:style>
-        <p:txBody>
-          <a:bodyPr rtlCol="0" anchor="ctr"/>
-          <a:lstStyle/>
-          <a:p>
-            <a:pPr algn="ctr"/>
-          </a:p>
-        </p:txBody>
-      </p:sp>
-      <p:sp>
-        <p:nvSpPr>
-          <p:cNvPr id="10" name="Oval 9"/>
-          <p:cNvSpPr/>
-          <p:nvPr/>
-        </p:nvSpPr>
-        <p:spPr>
-          <a:xfrm>
-            <a:off x="1508760" y="1828800"/>
-            <a:ext cx="868680" cy="868680"/>
-          </a:xfrm>
-          <a:prstGeom prst="ellipse">
-            <a:avLst/>
-          </a:prstGeom>
-          <a:solidFill>
-            <a:srgbClr val="16304F"/>
-          </a:solidFill>
-          <a:ln>
-            <a:noFill/>
-          </a:ln>
-          <a:effectLst/>
-        </p:spPr>
-        <p:style>
-          <a:lnRef idx="1">
-            <a:schemeClr val="accent1"/>
-          </a:lnRef>
-          <a:fillRef idx="3">
-            <a:schemeClr val="accent1"/>
-          </a:fillRef>
-          <a:effectRef idx="2">
-            <a:schemeClr val="accent1"/>
-          </a:effectRef>
-          <a:fontRef idx="minor">
-            <a:schemeClr val="lt1"/>
-          </a:fontRef>
-        </p:style>
-        <p:txBody>
-          <a:bodyPr rtlCol="0" anchor="ctr" lIns="0" rIns="0" tIns="0" bIns="0"/>
-          <a:lstStyle/>
-          <a:p>
-            <a:pPr algn="ctr"/>
-            <a:r>
-              <a:rPr sz="2600" b="1">
-                <a:solidFill>
-                  <a:srgbClr val="FFFFFF"/>
-                </a:solidFill>
-                <a:latin typeface="Microsoft JhengHei"/>
-              </a:rPr>
-              <a:t>1</a:t>
-            </a:r>
-          </a:p>
-        </p:txBody>
-      </p:sp>
-      <p:sp>
-        <p:nvSpPr>
-          <p:cNvPr id="11" name="TextBox 10"/>
+              <a:t>6 / 11</a:t>
+            </a:r>
+          </a:p>
+        </p:txBody>
+      </p:sp>
+      <p:pic>
+        <p:nvPicPr>
+          <p:cNvPr id="9" name="Picture 8" descr="aws-architecture.png"/>
+          <p:cNvPicPr>
+            <a:picLocks noChangeAspect="1"/>
+          </p:cNvPicPr>
+          <p:nvPr/>
+        </p:nvPicPr>
+        <p:blipFill>
+          <a:blip r:embed="rId2"/>
+          <a:stretch>
+            <a:fillRect/>
+          </a:stretch>
+        </p:blipFill>
+        <p:spPr>
+          <a:xfrm>
+            <a:off x="868680" y="1417320"/>
+            <a:ext cx="10424160" cy="4894823"/>
+          </a:xfrm>
+          <a:prstGeom prst="rect">
+            <a:avLst/>
+          </a:prstGeom>
+        </p:spPr>
+      </p:pic>
+      <p:sp>
+        <p:nvSpPr>
+          <p:cNvPr id="10" name="TextBox 9"/>
           <p:cNvSpPr txBox="1"/>
           <p:nvPr/>
         </p:nvSpPr>
         <p:spPr>
           <a:xfrm>
-            <a:off x="777240" y="2880360"/>
-            <a:ext cx="2331720" cy="457200"/>
+            <a:off x="7863840" y="384048"/>
+            <a:ext cx="3657600" cy="274320"/>
           </a:xfrm>
           <a:prstGeom prst="rect">
             <a:avLst/>
@@ -7629,557 +10290,15 @@
           </a:bodyPr>
           <a:lstStyle/>
           <a:p>
-            <a:pPr algn="ctr"/>
-            <a:r>
-              <a:rPr sz="1800" b="1">
-                <a:solidFill>
-                  <a:srgbClr val="16304F"/>
-                </a:solidFill>
-                <a:latin typeface="Microsoft JhengHei"/>
-              </a:rPr>
-              <a:t>捏造條號</a:t>
-            </a:r>
-          </a:p>
-        </p:txBody>
-      </p:sp>
-      <p:sp>
-        <p:nvSpPr>
-          <p:cNvPr id="12" name="TextBox 11"/>
-          <p:cNvSpPr txBox="1"/>
-          <p:nvPr/>
-        </p:nvSpPr>
-        <p:spPr>
-          <a:xfrm>
-            <a:off x="822959" y="3383280"/>
-            <a:ext cx="2240280" cy="1828800"/>
-          </a:xfrm>
-          <a:prstGeom prst="rect">
-            <a:avLst/>
-          </a:prstGeom>
-          <a:noFill/>
-        </p:spPr>
-        <p:txBody>
-          <a:bodyPr wrap="square" anchor="t" lIns="45720" rIns="45720" tIns="27432" bIns="27432">
-            <a:spAutoFit/>
-          </a:bodyPr>
-          <a:lstStyle/>
-          <a:p>
-            <a:pPr algn="ctr"/>
-            <a:r>
-              <a:rPr sz="1350" b="0">
-                <a:solidFill>
-                  <a:srgbClr val="334455"/>
-                </a:solidFill>
-                <a:latin typeface="Microsoft JhengHei"/>
-              </a:rPr>
-              <a:t>11 部法規逐條比對；查無就標「未收錄」</a:t>
-            </a:r>
-          </a:p>
-        </p:txBody>
-      </p:sp>
-      <p:sp>
-        <p:nvSpPr>
-          <p:cNvPr id="13" name="Rounded Rectangle 12"/>
-          <p:cNvSpPr/>
-          <p:nvPr/>
-        </p:nvSpPr>
-        <p:spPr>
-          <a:xfrm>
-            <a:off x="3401568" y="1554480"/>
-            <a:ext cx="2606040" cy="3840480"/>
-          </a:xfrm>
-          <a:prstGeom prst="roundRect">
-            <a:avLst>
-              <a:gd name="adj" fmla="val 8000"/>
-            </a:avLst>
-          </a:prstGeom>
-          <a:solidFill>
-            <a:srgbClr val="F4F6F9"/>
-          </a:solidFill>
-          <a:ln>
-            <a:noFill/>
-          </a:ln>
-          <a:effectLst/>
-        </p:spPr>
-        <p:style>
-          <a:lnRef idx="1">
-            <a:schemeClr val="accent1"/>
-          </a:lnRef>
-          <a:fillRef idx="3">
-            <a:schemeClr val="accent1"/>
-          </a:fillRef>
-          <a:effectRef idx="2">
-            <a:schemeClr val="accent1"/>
-          </a:effectRef>
-          <a:fontRef idx="minor">
-            <a:schemeClr val="lt1"/>
-          </a:fontRef>
-        </p:style>
-        <p:txBody>
-          <a:bodyPr rtlCol="0" anchor="ctr"/>
-          <a:lstStyle/>
-          <a:p>
-            <a:pPr algn="ctr"/>
-          </a:p>
-        </p:txBody>
-      </p:sp>
-      <p:sp>
-        <p:nvSpPr>
-          <p:cNvPr id="14" name="Oval 13"/>
-          <p:cNvSpPr/>
-          <p:nvPr/>
-        </p:nvSpPr>
-        <p:spPr>
-          <a:xfrm>
-            <a:off x="4270248" y="1828800"/>
-            <a:ext cx="868680" cy="868680"/>
-          </a:xfrm>
-          <a:prstGeom prst="ellipse">
-            <a:avLst/>
-          </a:prstGeom>
-          <a:solidFill>
-            <a:srgbClr val="16304F"/>
-          </a:solidFill>
-          <a:ln>
-            <a:noFill/>
-          </a:ln>
-          <a:effectLst/>
-        </p:spPr>
-        <p:style>
-          <a:lnRef idx="1">
-            <a:schemeClr val="accent1"/>
-          </a:lnRef>
-          <a:fillRef idx="3">
-            <a:schemeClr val="accent1"/>
-          </a:fillRef>
-          <a:effectRef idx="2">
-            <a:schemeClr val="accent1"/>
-          </a:effectRef>
-          <a:fontRef idx="minor">
-            <a:schemeClr val="lt1"/>
-          </a:fontRef>
-        </p:style>
-        <p:txBody>
-          <a:bodyPr rtlCol="0" anchor="ctr" lIns="0" rIns="0" tIns="0" bIns="0"/>
-          <a:lstStyle/>
-          <a:p>
-            <a:pPr algn="ctr"/>
-            <a:r>
-              <a:rPr sz="2600" b="1">
-                <a:solidFill>
-                  <a:srgbClr val="FFFFFF"/>
-                </a:solidFill>
-                <a:latin typeface="Microsoft JhengHei"/>
-              </a:rPr>
-              <a:t>2</a:t>
-            </a:r>
-          </a:p>
-        </p:txBody>
-      </p:sp>
-      <p:sp>
-        <p:nvSpPr>
-          <p:cNvPr id="15" name="TextBox 14"/>
-          <p:cNvSpPr txBox="1"/>
-          <p:nvPr/>
-        </p:nvSpPr>
-        <p:spPr>
-          <a:xfrm>
-            <a:off x="3538727" y="2880360"/>
-            <a:ext cx="2331720" cy="457200"/>
-          </a:xfrm>
-          <a:prstGeom prst="rect">
-            <a:avLst/>
-          </a:prstGeom>
-          <a:noFill/>
-        </p:spPr>
-        <p:txBody>
-          <a:bodyPr wrap="square" anchor="t" lIns="45720" rIns="45720" tIns="27432" bIns="27432">
-            <a:spAutoFit/>
-          </a:bodyPr>
-          <a:lstStyle/>
-          <a:p>
-            <a:pPr algn="ctr"/>
-            <a:r>
-              <a:rPr sz="1800" b="1">
-                <a:solidFill>
-                  <a:srgbClr val="16304F"/>
-                </a:solidFill>
-                <a:latin typeface="Microsoft JhengHei"/>
-              </a:rPr>
-              <a:t>引文對不上卷證</a:t>
-            </a:r>
-          </a:p>
-        </p:txBody>
-      </p:sp>
-      <p:sp>
-        <p:nvSpPr>
-          <p:cNvPr id="16" name="TextBox 15"/>
-          <p:cNvSpPr txBox="1"/>
-          <p:nvPr/>
-        </p:nvSpPr>
-        <p:spPr>
-          <a:xfrm>
-            <a:off x="3584448" y="3383280"/>
-            <a:ext cx="2240280" cy="1828800"/>
-          </a:xfrm>
-          <a:prstGeom prst="rect">
-            <a:avLst/>
-          </a:prstGeom>
-          <a:noFill/>
-        </p:spPr>
-        <p:txBody>
-          <a:bodyPr wrap="square" anchor="t" lIns="45720" rIns="45720" tIns="27432" bIns="27432">
-            <a:spAutoFit/>
-          </a:bodyPr>
-          <a:lstStyle/>
-          <a:p>
-            <a:pPr algn="ctr"/>
-            <a:r>
-              <a:rPr sz="1350" b="0">
-                <a:solidFill>
-                  <a:srgbClr val="334455"/>
-                </a:solidFill>
-                <a:latin typeface="Microsoft JhengHei"/>
-              </a:rPr>
-              <a:t>每句引文回查原文；查不到就標示為未驗證</a:t>
-            </a:r>
-          </a:p>
-        </p:txBody>
-      </p:sp>
-      <p:sp>
-        <p:nvSpPr>
-          <p:cNvPr id="17" name="Rounded Rectangle 16"/>
-          <p:cNvSpPr/>
-          <p:nvPr/>
-        </p:nvSpPr>
-        <p:spPr>
-          <a:xfrm>
-            <a:off x="6163056" y="1554480"/>
-            <a:ext cx="2606040" cy="3840480"/>
-          </a:xfrm>
-          <a:prstGeom prst="roundRect">
-            <a:avLst>
-              <a:gd name="adj" fmla="val 8000"/>
-            </a:avLst>
-          </a:prstGeom>
-          <a:solidFill>
-            <a:srgbClr val="F4F6F9"/>
-          </a:solidFill>
-          <a:ln>
-            <a:noFill/>
-          </a:ln>
-          <a:effectLst/>
-        </p:spPr>
-        <p:style>
-          <a:lnRef idx="1">
-            <a:schemeClr val="accent1"/>
-          </a:lnRef>
-          <a:fillRef idx="3">
-            <a:schemeClr val="accent1"/>
-          </a:fillRef>
-          <a:effectRef idx="2">
-            <a:schemeClr val="accent1"/>
-          </a:effectRef>
-          <a:fontRef idx="minor">
-            <a:schemeClr val="lt1"/>
-          </a:fontRef>
-        </p:style>
-        <p:txBody>
-          <a:bodyPr rtlCol="0" anchor="ctr"/>
-          <a:lstStyle/>
-          <a:p>
-            <a:pPr algn="ctr"/>
-          </a:p>
-        </p:txBody>
-      </p:sp>
-      <p:sp>
-        <p:nvSpPr>
-          <p:cNvPr id="18" name="Oval 17"/>
-          <p:cNvSpPr/>
-          <p:nvPr/>
-        </p:nvSpPr>
-        <p:spPr>
-          <a:xfrm>
-            <a:off x="7031736" y="1828800"/>
-            <a:ext cx="868680" cy="868680"/>
-          </a:xfrm>
-          <a:prstGeom prst="ellipse">
-            <a:avLst/>
-          </a:prstGeom>
-          <a:solidFill>
-            <a:srgbClr val="16304F"/>
-          </a:solidFill>
-          <a:ln>
-            <a:noFill/>
-          </a:ln>
-          <a:effectLst/>
-        </p:spPr>
-        <p:style>
-          <a:lnRef idx="1">
-            <a:schemeClr val="accent1"/>
-          </a:lnRef>
-          <a:fillRef idx="3">
-            <a:schemeClr val="accent1"/>
-          </a:fillRef>
-          <a:effectRef idx="2">
-            <a:schemeClr val="accent1"/>
-          </a:effectRef>
-          <a:fontRef idx="minor">
-            <a:schemeClr val="lt1"/>
-          </a:fontRef>
-        </p:style>
-        <p:txBody>
-          <a:bodyPr rtlCol="0" anchor="ctr" lIns="0" rIns="0" tIns="0" bIns="0"/>
-          <a:lstStyle/>
-          <a:p>
-            <a:pPr algn="ctr"/>
-            <a:r>
-              <a:rPr sz="2600" b="1">
-                <a:solidFill>
-                  <a:srgbClr val="FFFFFF"/>
-                </a:solidFill>
-                <a:latin typeface="Microsoft JhengHei"/>
-              </a:rPr>
-              <a:t>3</a:t>
-            </a:r>
-          </a:p>
-        </p:txBody>
-      </p:sp>
-      <p:sp>
-        <p:nvSpPr>
-          <p:cNvPr id="19" name="TextBox 18"/>
-          <p:cNvSpPr txBox="1"/>
-          <p:nvPr/>
-        </p:nvSpPr>
-        <p:spPr>
-          <a:xfrm>
-            <a:off x="6300216" y="2880360"/>
-            <a:ext cx="2331720" cy="457200"/>
-          </a:xfrm>
-          <a:prstGeom prst="rect">
-            <a:avLst/>
-          </a:prstGeom>
-          <a:noFill/>
-        </p:spPr>
-        <p:txBody>
-          <a:bodyPr wrap="square" anchor="t" lIns="45720" rIns="45720" tIns="27432" bIns="27432">
-            <a:spAutoFit/>
-          </a:bodyPr>
-          <a:lstStyle/>
-          <a:p>
-            <a:pPr algn="ctr"/>
-            <a:r>
-              <a:rPr sz="1800" b="1">
-                <a:solidFill>
-                  <a:srgbClr val="16304F"/>
-                </a:solidFill>
-                <a:latin typeface="Microsoft JhengHei"/>
-              </a:rPr>
-              <a:t>引到過期法規</a:t>
-            </a:r>
-          </a:p>
-        </p:txBody>
-      </p:sp>
-      <p:sp>
-        <p:nvSpPr>
-          <p:cNvPr id="20" name="TextBox 19"/>
-          <p:cNvSpPr txBox="1"/>
-          <p:nvPr/>
-        </p:nvSpPr>
-        <p:spPr>
-          <a:xfrm>
-            <a:off x="6345936" y="3383280"/>
-            <a:ext cx="2240280" cy="1828800"/>
-          </a:xfrm>
-          <a:prstGeom prst="rect">
-            <a:avLst/>
-          </a:prstGeom>
-          <a:noFill/>
-        </p:spPr>
-        <p:txBody>
-          <a:bodyPr wrap="square" anchor="t" lIns="45720" rIns="45720" tIns="27432" bIns="27432">
-            <a:spAutoFit/>
-          </a:bodyPr>
-          <a:lstStyle/>
-          <a:p>
-            <a:pPr algn="ctr"/>
-            <a:r>
-              <a:rPr sz="1350" b="0">
-                <a:solidFill>
-                  <a:srgbClr val="334455"/>
-                </a:solidFill>
-                <a:latin typeface="Microsoft JhengHei"/>
-              </a:rPr>
-              <a:t>行為時／裁處時／決定時三個時點比對，修正過就提示</a:t>
-            </a:r>
-          </a:p>
-        </p:txBody>
-      </p:sp>
-      <p:sp>
-        <p:nvSpPr>
-          <p:cNvPr id="21" name="Rounded Rectangle 20"/>
-          <p:cNvSpPr/>
-          <p:nvPr/>
-        </p:nvSpPr>
-        <p:spPr>
-          <a:xfrm>
-            <a:off x="8924544" y="1554480"/>
-            <a:ext cx="2606040" cy="3840480"/>
-          </a:xfrm>
-          <a:prstGeom prst="roundRect">
-            <a:avLst>
-              <a:gd name="adj" fmla="val 8000"/>
-            </a:avLst>
-          </a:prstGeom>
-          <a:solidFill>
-            <a:srgbClr val="F4F6F9"/>
-          </a:solidFill>
-          <a:ln>
-            <a:noFill/>
-          </a:ln>
-          <a:effectLst/>
-        </p:spPr>
-        <p:style>
-          <a:lnRef idx="1">
-            <a:schemeClr val="accent1"/>
-          </a:lnRef>
-          <a:fillRef idx="3">
-            <a:schemeClr val="accent1"/>
-          </a:fillRef>
-          <a:effectRef idx="2">
-            <a:schemeClr val="accent1"/>
-          </a:effectRef>
-          <a:fontRef idx="minor">
-            <a:schemeClr val="lt1"/>
-          </a:fontRef>
-        </p:style>
-        <p:txBody>
-          <a:bodyPr rtlCol="0" anchor="ctr"/>
-          <a:lstStyle/>
-          <a:p>
-            <a:pPr algn="ctr"/>
-          </a:p>
-        </p:txBody>
-      </p:sp>
-      <p:sp>
-        <p:nvSpPr>
-          <p:cNvPr id="22" name="Oval 21"/>
-          <p:cNvSpPr/>
-          <p:nvPr/>
-        </p:nvSpPr>
-        <p:spPr>
-          <a:xfrm>
-            <a:off x="9793224" y="1828800"/>
-            <a:ext cx="868680" cy="868680"/>
-          </a:xfrm>
-          <a:prstGeom prst="ellipse">
-            <a:avLst/>
-          </a:prstGeom>
-          <a:solidFill>
-            <a:srgbClr val="16304F"/>
-          </a:solidFill>
-          <a:ln>
-            <a:noFill/>
-          </a:ln>
-          <a:effectLst/>
-        </p:spPr>
-        <p:style>
-          <a:lnRef idx="1">
-            <a:schemeClr val="accent1"/>
-          </a:lnRef>
-          <a:fillRef idx="3">
-            <a:schemeClr val="accent1"/>
-          </a:fillRef>
-          <a:effectRef idx="2">
-            <a:schemeClr val="accent1"/>
-          </a:effectRef>
-          <a:fontRef idx="minor">
-            <a:schemeClr val="lt1"/>
-          </a:fontRef>
-        </p:style>
-        <p:txBody>
-          <a:bodyPr rtlCol="0" anchor="ctr" lIns="0" rIns="0" tIns="0" bIns="0"/>
-          <a:lstStyle/>
-          <a:p>
-            <a:pPr algn="ctr"/>
-            <a:r>
-              <a:rPr sz="2600" b="1">
-                <a:solidFill>
-                  <a:srgbClr val="FFFFFF"/>
-                </a:solidFill>
-                <a:latin typeface="Microsoft JhengHei"/>
-              </a:rPr>
-              <a:t>4</a:t>
-            </a:r>
-          </a:p>
-        </p:txBody>
-      </p:sp>
-      <p:sp>
-        <p:nvSpPr>
-          <p:cNvPr id="23" name="TextBox 22"/>
-          <p:cNvSpPr txBox="1"/>
-          <p:nvPr/>
-        </p:nvSpPr>
-        <p:spPr>
-          <a:xfrm>
-            <a:off x="9061704" y="2880360"/>
-            <a:ext cx="2331720" cy="457200"/>
-          </a:xfrm>
-          <a:prstGeom prst="rect">
-            <a:avLst/>
-          </a:prstGeom>
-          <a:noFill/>
-        </p:spPr>
-        <p:txBody>
-          <a:bodyPr wrap="square" anchor="t" lIns="45720" rIns="45720" tIns="27432" bIns="27432">
-            <a:spAutoFit/>
-          </a:bodyPr>
-          <a:lstStyle/>
-          <a:p>
-            <a:pPr algn="ctr"/>
-            <a:r>
-              <a:rPr sz="1800" b="1">
-                <a:solidFill>
-                  <a:srgbClr val="16304F"/>
-                </a:solidFill>
-                <a:latin typeface="Microsoft JhengHei"/>
-              </a:rPr>
-              <a:t>誤判程序結論</a:t>
-            </a:r>
-          </a:p>
-        </p:txBody>
-      </p:sp>
-      <p:sp>
-        <p:nvSpPr>
-          <p:cNvPr id="24" name="TextBox 23"/>
-          <p:cNvSpPr txBox="1"/>
-          <p:nvPr/>
-        </p:nvSpPr>
-        <p:spPr>
-          <a:xfrm>
-            <a:off x="9107424" y="3383280"/>
-            <a:ext cx="2240280" cy="1828800"/>
-          </a:xfrm>
-          <a:prstGeom prst="rect">
-            <a:avLst/>
-          </a:prstGeom>
-          <a:noFill/>
-        </p:spPr>
-        <p:txBody>
-          <a:bodyPr wrap="square" anchor="t" lIns="45720" rIns="45720" tIns="27432" bIns="27432">
-            <a:spAutoFit/>
-          </a:bodyPr>
-          <a:lstStyle/>
-          <a:p>
-            <a:pPr algn="ctr"/>
-            <a:r>
-              <a:rPr sz="1350" b="0">
-                <a:solidFill>
-                  <a:srgbClr val="334455"/>
-                </a:solidFill>
-                <a:latin typeface="Microsoft JhengHei"/>
-              </a:rPr>
-              <a:t>不受理／駁回／撤銷由程式決定，AI 只寫理由</a:t>
+            <a:pPr algn="r"/>
+            <a:r>
+              <a:rPr sz="1100" b="0">
+                <a:solidFill>
+                  <a:srgbClr val="8A93A0"/>
+                </a:solidFill>
+                <a:latin typeface="Microsoft JhengHei"/>
+              </a:rPr>
+              <a:t>全部在競賽允許清單內</a:t>
             </a:r>
           </a:p>
         </p:txBody>
@@ -8320,7 +10439,7 @@
                 </a:solidFill>
                 <a:latin typeface="Microsoft JhengHei"/>
               </a:rPr>
-              <a:t>06 ／ 資料應用</a:t>
+              <a:t>06 ／ 可信度</a:t>
             </a:r>
           </a:p>
         </p:txBody>
@@ -8355,7 +10474,7 @@
                 </a:solidFill>
                 <a:latin typeface="Microsoft JhengHei"/>
               </a:rPr>
-              <a:t>先把 101 份決定書讀完，才決定系統怎麼設計</a:t>
+              <a:t>AI 會犯的四種錯，四道關卡</a:t>
             </a:r>
           </a:p>
         </p:txBody>
@@ -8469,28 +10588,70 @@
                 </a:solidFill>
                 <a:latin typeface="Microsoft JhengHei"/>
               </a:rPr>
-              <a:t>7 / 10</a:t>
-            </a:r>
-          </a:p>
-        </p:txBody>
-      </p:sp>
-      <p:sp>
-        <p:nvSpPr>
-          <p:cNvPr id="9" name="Block Arc 8"/>
+              <a:t>7 / 11</a:t>
+            </a:r>
+          </a:p>
+        </p:txBody>
+      </p:sp>
+      <p:sp>
+        <p:nvSpPr>
+          <p:cNvPr id="9" name="Rounded Rectangle 8"/>
           <p:cNvSpPr/>
           <p:nvPr/>
         </p:nvSpPr>
         <p:spPr>
           <a:xfrm>
-            <a:off x="822960" y="1600200"/>
-            <a:ext cx="3566160" cy="3566160"/>
-          </a:xfrm>
-          <a:prstGeom prst="blockArc">
+            <a:off x="640080" y="1554480"/>
+            <a:ext cx="2606040" cy="3840480"/>
+          </a:xfrm>
+          <a:prstGeom prst="roundRect">
             <a:avLst>
-              <a:gd name="adj1" fmla="val -9000000"/>
-              <a:gd name="adj2" fmla="val 15840000"/>
-              <a:gd name="adj3" fmla="val 20000"/>
+              <a:gd name="adj" fmla="val 8000"/>
             </a:avLst>
+          </a:prstGeom>
+          <a:solidFill>
+            <a:srgbClr val="F4F6F9"/>
+          </a:solidFill>
+          <a:ln>
+            <a:noFill/>
+          </a:ln>
+          <a:effectLst/>
+        </p:spPr>
+        <p:style>
+          <a:lnRef idx="1">
+            <a:schemeClr val="accent1"/>
+          </a:lnRef>
+          <a:fillRef idx="3">
+            <a:schemeClr val="accent1"/>
+          </a:fillRef>
+          <a:effectRef idx="2">
+            <a:schemeClr val="accent1"/>
+          </a:effectRef>
+          <a:fontRef idx="minor">
+            <a:schemeClr val="lt1"/>
+          </a:fontRef>
+        </p:style>
+        <p:txBody>
+          <a:bodyPr rtlCol="0" anchor="ctr"/>
+          <a:lstStyle/>
+          <a:p>
+            <a:pPr algn="ctr"/>
+          </a:p>
+        </p:txBody>
+      </p:sp>
+      <p:sp>
+        <p:nvSpPr>
+          <p:cNvPr id="10" name="Oval 9"/>
+          <p:cNvSpPr/>
+          <p:nvPr/>
+        </p:nvSpPr>
+        <p:spPr>
+          <a:xfrm>
+            <a:off x="1508760" y="1828800"/>
+            <a:ext cx="868680" cy="868680"/>
+          </a:xfrm>
+          <a:prstGeom prst="ellipse">
+            <a:avLst/>
           </a:prstGeom>
           <a:solidFill>
             <a:srgbClr val="16304F"/>
@@ -8515,106 +10676,54 @@
           </a:fontRef>
         </p:style>
         <p:txBody>
-          <a:bodyPr rtlCol="0" anchor="ctr"/>
-          <a:lstStyle/>
-          <a:p>
-            <a:pPr algn="ctr"/>
-          </a:p>
-        </p:txBody>
-      </p:sp>
-      <p:sp>
-        <p:nvSpPr>
-          <p:cNvPr id="10" name="Block Arc 9"/>
-          <p:cNvSpPr/>
-          <p:nvPr/>
-        </p:nvSpPr>
-        <p:spPr>
-          <a:xfrm>
-            <a:off x="822960" y="1600200"/>
-            <a:ext cx="3566160" cy="3566160"/>
-          </a:xfrm>
-          <a:prstGeom prst="blockArc">
-            <a:avLst>
-              <a:gd name="adj1" fmla="val 15840000"/>
-              <a:gd name="adj2" fmla="val 21240000"/>
-              <a:gd name="adj3" fmla="val 20000"/>
-            </a:avLst>
-          </a:prstGeom>
-          <a:solidFill>
-            <a:srgbClr val="D98E04"/>
-          </a:solidFill>
-          <a:ln>
-            <a:noFill/>
-          </a:ln>
-          <a:effectLst/>
-        </p:spPr>
-        <p:style>
-          <a:lnRef idx="1">
-            <a:schemeClr val="accent1"/>
-          </a:lnRef>
-          <a:fillRef idx="3">
-            <a:schemeClr val="accent1"/>
-          </a:fillRef>
-          <a:effectRef idx="2">
-            <a:schemeClr val="accent1"/>
-          </a:effectRef>
-          <a:fontRef idx="minor">
-            <a:schemeClr val="lt1"/>
-          </a:fontRef>
-        </p:style>
-        <p:txBody>
-          <a:bodyPr rtlCol="0" anchor="ctr"/>
-          <a:lstStyle/>
-          <a:p>
-            <a:pPr algn="ctr"/>
-          </a:p>
-        </p:txBody>
-      </p:sp>
-      <p:sp>
-        <p:nvSpPr>
-          <p:cNvPr id="11" name="Block Arc 10"/>
-          <p:cNvSpPr/>
-          <p:nvPr/>
-        </p:nvSpPr>
-        <p:spPr>
-          <a:xfrm>
-            <a:off x="822960" y="1600200"/>
-            <a:ext cx="3566160" cy="3566160"/>
-          </a:xfrm>
-          <a:prstGeom prst="blockArc">
-            <a:avLst>
-              <a:gd name="adj1" fmla="val 21240000"/>
-              <a:gd name="adj2" fmla="val 26639999"/>
-              <a:gd name="adj3" fmla="val 20000"/>
-            </a:avLst>
-          </a:prstGeom>
-          <a:solidFill>
-            <a:srgbClr val="2E7D32"/>
-          </a:solidFill>
-          <a:ln>
-            <a:noFill/>
-          </a:ln>
-          <a:effectLst/>
-        </p:spPr>
-        <p:style>
-          <a:lnRef idx="1">
-            <a:schemeClr val="accent1"/>
-          </a:lnRef>
-          <a:fillRef idx="3">
-            <a:schemeClr val="accent1"/>
-          </a:fillRef>
-          <a:effectRef idx="2">
-            <a:schemeClr val="accent1"/>
-          </a:effectRef>
-          <a:fontRef idx="minor">
-            <a:schemeClr val="lt1"/>
-          </a:fontRef>
-        </p:style>
-        <p:txBody>
-          <a:bodyPr rtlCol="0" anchor="ctr"/>
-          <a:lstStyle/>
-          <a:p>
-            <a:pPr algn="ctr"/>
+          <a:bodyPr rtlCol="0" anchor="ctr" lIns="0" rIns="0" tIns="0" bIns="0"/>
+          <a:lstStyle/>
+          <a:p>
+            <a:pPr algn="ctr"/>
+            <a:r>
+              <a:rPr sz="2600" b="1">
+                <a:solidFill>
+                  <a:srgbClr val="FFFFFF"/>
+                </a:solidFill>
+                <a:latin typeface="Microsoft JhengHei"/>
+              </a:rPr>
+              <a:t>1</a:t>
+            </a:r>
+          </a:p>
+        </p:txBody>
+      </p:sp>
+      <p:sp>
+        <p:nvSpPr>
+          <p:cNvPr id="11" name="TextBox 10"/>
+          <p:cNvSpPr txBox="1"/>
+          <p:nvPr/>
+        </p:nvSpPr>
+        <p:spPr>
+          <a:xfrm>
+            <a:off x="777240" y="2880360"/>
+            <a:ext cx="2331720" cy="457200"/>
+          </a:xfrm>
+          <a:prstGeom prst="rect">
+            <a:avLst/>
+          </a:prstGeom>
+          <a:noFill/>
+        </p:spPr>
+        <p:txBody>
+          <a:bodyPr wrap="square" anchor="t" lIns="45720" rIns="45720" tIns="27432" bIns="27432">
+            <a:spAutoFit/>
+          </a:bodyPr>
+          <a:lstStyle/>
+          <a:p>
+            <a:pPr algn="ctr"/>
+            <a:r>
+              <a:rPr sz="1800" b="1">
+                <a:solidFill>
+                  <a:srgbClr val="16304F"/>
+                </a:solidFill>
+                <a:latin typeface="Microsoft JhengHei"/>
+              </a:rPr>
+              <a:t>捏造條號</a:t>
+            </a:r>
           </a:p>
         </p:txBody>
       </p:sp>
@@ -8626,8 +10735,8 @@
         </p:nvSpPr>
         <p:spPr>
           <a:xfrm>
-            <a:off x="822960" y="2743200"/>
-            <a:ext cx="3566160" cy="822960"/>
+            <a:off x="822959" y="3383280"/>
+            <a:ext cx="2240280" cy="1828800"/>
           </a:xfrm>
           <a:prstGeom prst="rect">
             <a:avLst/>
@@ -8642,167 +10751,27 @@
           <a:p>
             <a:pPr algn="ctr"/>
             <a:r>
-              <a:rPr sz="4400" b="1">
-                <a:solidFill>
-                  <a:srgbClr val="16304F"/>
-                </a:solidFill>
-                <a:latin typeface="Microsoft JhengHei"/>
-              </a:rPr>
-              <a:t>69%</a:t>
-            </a:r>
-          </a:p>
-        </p:txBody>
-      </p:sp>
-      <p:sp>
-        <p:nvSpPr>
-          <p:cNvPr id="13" name="TextBox 12"/>
-          <p:cNvSpPr txBox="1"/>
-          <p:nvPr/>
-        </p:nvSpPr>
-        <p:spPr>
-          <a:xfrm>
-            <a:off x="822960" y="3520440"/>
-            <a:ext cx="3566160" cy="365760"/>
-          </a:xfrm>
-          <a:prstGeom prst="rect">
-            <a:avLst/>
-          </a:prstGeom>
-          <a:noFill/>
-        </p:spPr>
-        <p:txBody>
-          <a:bodyPr wrap="square" anchor="t" lIns="45720" rIns="45720" tIns="27432" bIns="27432">
-            <a:spAutoFit/>
-          </a:bodyPr>
-          <a:lstStyle/>
-          <a:p>
-            <a:pPr algn="ctr"/>
-            <a:r>
-              <a:rPr sz="1400" b="0">
-                <a:solidFill>
-                  <a:srgbClr val="5B6573"/>
-                </a:solidFill>
-                <a:latin typeface="Microsoft JhengHei"/>
-              </a:rPr>
-              <a:t>不受理</a:t>
-            </a:r>
-          </a:p>
-        </p:txBody>
-      </p:sp>
-      <p:sp>
-        <p:nvSpPr>
-          <p:cNvPr id="14" name="TextBox 13"/>
-          <p:cNvSpPr txBox="1"/>
-          <p:nvPr/>
-        </p:nvSpPr>
-        <p:spPr>
-          <a:xfrm>
-            <a:off x="822960" y="3840480"/>
-            <a:ext cx="3566160" cy="365760"/>
-          </a:xfrm>
-          <a:prstGeom prst="rect">
-            <a:avLst/>
-          </a:prstGeom>
-          <a:noFill/>
-        </p:spPr>
-        <p:txBody>
-          <a:bodyPr wrap="square" anchor="t" lIns="45720" rIns="45720" tIns="27432" bIns="27432">
-            <a:spAutoFit/>
-          </a:bodyPr>
-          <a:lstStyle/>
-          <a:p>
-            <a:pPr algn="ctr"/>
-            <a:r>
-              <a:rPr sz="1100" b="0">
-                <a:solidFill>
-                  <a:srgbClr val="8A93A0"/>
-                </a:solidFill>
-                <a:latin typeface="Microsoft JhengHei"/>
-              </a:rPr>
-              <a:t>駁回 15%・撤銷 15%</a:t>
-            </a:r>
-          </a:p>
-        </p:txBody>
-      </p:sp>
-      <p:sp>
-        <p:nvSpPr>
-          <p:cNvPr id="15" name="TextBox 14"/>
-          <p:cNvSpPr txBox="1"/>
-          <p:nvPr/>
-        </p:nvSpPr>
-        <p:spPr>
-          <a:xfrm>
-            <a:off x="4846320" y="1737360"/>
-            <a:ext cx="6675120" cy="1097280"/>
-          </a:xfrm>
-          <a:prstGeom prst="rect">
-            <a:avLst/>
-          </a:prstGeom>
-          <a:noFill/>
-        </p:spPr>
-        <p:txBody>
-          <a:bodyPr wrap="square" anchor="t" lIns="45720" rIns="45720" tIns="27432" bIns="27432">
-            <a:spAutoFit/>
-          </a:bodyPr>
-          <a:lstStyle/>
-          <a:p>
-            <a:pPr algn="l"/>
-            <a:r>
-              <a:rPr sz="2400" b="1">
-                <a:solidFill>
-                  <a:srgbClr val="16304F"/>
-                </a:solidFill>
-                <a:latin typeface="Microsoft JhengHei"/>
-              </a:rPr>
-              <a:t>七成案子在程序就結束了。</a:t>
-            </a:r>
-          </a:p>
-        </p:txBody>
-      </p:sp>
-      <p:sp>
-        <p:nvSpPr>
-          <p:cNvPr id="16" name="TextBox 15"/>
-          <p:cNvSpPr txBox="1"/>
-          <p:nvPr/>
-        </p:nvSpPr>
-        <p:spPr>
-          <a:xfrm>
-            <a:off x="4846320" y="2880360"/>
-            <a:ext cx="6675120" cy="822960"/>
-          </a:xfrm>
-          <a:prstGeom prst="rect">
-            <a:avLst/>
-          </a:prstGeom>
-          <a:noFill/>
-        </p:spPr>
-        <p:txBody>
-          <a:bodyPr wrap="square" anchor="t" lIns="45720" rIns="45720" tIns="27432" bIns="27432">
-            <a:spAutoFit/>
-          </a:bodyPr>
-          <a:lstStyle/>
-          <a:p>
-            <a:pPr algn="l"/>
-            <a:r>
-              <a:rPr sz="1500" b="0">
-                <a:solidFill>
-                  <a:srgbClr val="5B6573"/>
-                </a:solidFill>
-                <a:latin typeface="Microsoft JhengHei"/>
-              </a:rPr>
-              <a:t>所以期間交給程式算；不受理的案子，草稿一個字都不碰實體。</a:t>
-            </a:r>
-          </a:p>
-        </p:txBody>
-      </p:sp>
-      <p:sp>
-        <p:nvSpPr>
-          <p:cNvPr id="17" name="Rounded Rectangle 16"/>
+              <a:rPr sz="1350" b="0">
+                <a:solidFill>
+                  <a:srgbClr val="334455"/>
+                </a:solidFill>
+                <a:latin typeface="Microsoft JhengHei"/>
+              </a:rPr>
+              <a:t>11 部法規逐條比對；查無就標「未收錄」</a:t>
+            </a:r>
+          </a:p>
+        </p:txBody>
+      </p:sp>
+      <p:sp>
+        <p:nvSpPr>
+          <p:cNvPr id="13" name="Rounded Rectangle 12"/>
           <p:cNvSpPr/>
           <p:nvPr/>
         </p:nvSpPr>
         <p:spPr>
           <a:xfrm>
-            <a:off x="4846320" y="4023360"/>
-            <a:ext cx="2103120" cy="914400"/>
+            <a:off x="3401568" y="1554480"/>
+            <a:ext cx="2606040" cy="3840480"/>
           </a:xfrm>
           <a:prstGeom prst="roundRect">
             <a:avLst>
@@ -8841,14 +10810,67 @@
       </p:sp>
       <p:sp>
         <p:nvSpPr>
-          <p:cNvPr id="18" name="TextBox 17"/>
+          <p:cNvPr id="14" name="Oval 13"/>
+          <p:cNvSpPr/>
+          <p:nvPr/>
+        </p:nvSpPr>
+        <p:spPr>
+          <a:xfrm>
+            <a:off x="4270248" y="1828800"/>
+            <a:ext cx="868680" cy="868680"/>
+          </a:xfrm>
+          <a:prstGeom prst="ellipse">
+            <a:avLst/>
+          </a:prstGeom>
+          <a:solidFill>
+            <a:srgbClr val="16304F"/>
+          </a:solidFill>
+          <a:ln>
+            <a:noFill/>
+          </a:ln>
+          <a:effectLst/>
+        </p:spPr>
+        <p:style>
+          <a:lnRef idx="1">
+            <a:schemeClr val="accent1"/>
+          </a:lnRef>
+          <a:fillRef idx="3">
+            <a:schemeClr val="accent1"/>
+          </a:fillRef>
+          <a:effectRef idx="2">
+            <a:schemeClr val="accent1"/>
+          </a:effectRef>
+          <a:fontRef idx="minor">
+            <a:schemeClr val="lt1"/>
+          </a:fontRef>
+        </p:style>
+        <p:txBody>
+          <a:bodyPr rtlCol="0" anchor="ctr" lIns="0" rIns="0" tIns="0" bIns="0"/>
+          <a:lstStyle/>
+          <a:p>
+            <a:pPr algn="ctr"/>
+            <a:r>
+              <a:rPr sz="2600" b="1">
+                <a:solidFill>
+                  <a:srgbClr val="FFFFFF"/>
+                </a:solidFill>
+                <a:latin typeface="Microsoft JhengHei"/>
+              </a:rPr>
+              <a:t>2</a:t>
+            </a:r>
+          </a:p>
+        </p:txBody>
+      </p:sp>
+      <p:sp>
+        <p:nvSpPr>
+          <p:cNvPr id="15" name="TextBox 14"/>
           <p:cNvSpPr txBox="1"/>
           <p:nvPr/>
         </p:nvSpPr>
         <p:spPr>
           <a:xfrm>
-            <a:off x="4956048" y="4050791"/>
-            <a:ext cx="1920240" cy="457200"/>
+            <a:off x="3538727" y="2880360"/>
+            <a:ext cx="2331720" cy="457200"/>
           </a:xfrm>
           <a:prstGeom prst="rect">
             <a:avLst/>
@@ -8861,29 +10883,29 @@
           </a:bodyPr>
           <a:lstStyle/>
           <a:p>
-            <a:pPr algn="l"/>
-            <a:r>
-              <a:rPr sz="1400" b="1">
+            <a:pPr algn="ctr"/>
+            <a:r>
+              <a:rPr sz="1800" b="1">
                 <a:solidFill>
                   <a:srgbClr val="16304F"/>
                 </a:solidFill>
                 <a:latin typeface="Microsoft JhengHei"/>
               </a:rPr>
-              <a:t>法規 11 部</a:t>
-            </a:r>
-          </a:p>
-        </p:txBody>
-      </p:sp>
-      <p:sp>
-        <p:nvSpPr>
-          <p:cNvPr id="19" name="TextBox 18"/>
+              <a:t>引文對不上卷證</a:t>
+            </a:r>
+          </a:p>
+        </p:txBody>
+      </p:sp>
+      <p:sp>
+        <p:nvSpPr>
+          <p:cNvPr id="16" name="TextBox 15"/>
           <p:cNvSpPr txBox="1"/>
           <p:nvPr/>
         </p:nvSpPr>
         <p:spPr>
           <a:xfrm>
-            <a:off x="4956048" y="4480560"/>
-            <a:ext cx="1920240" cy="365760"/>
+            <a:off x="3584448" y="3383280"/>
+            <a:ext cx="2240280" cy="1828800"/>
           </a:xfrm>
           <a:prstGeom prst="rect">
             <a:avLst/>
@@ -8896,29 +10918,29 @@
           </a:bodyPr>
           <a:lstStyle/>
           <a:p>
-            <a:pPr algn="l"/>
-            <a:r>
-              <a:rPr sz="1050" b="0">
-                <a:solidFill>
-                  <a:srgbClr val="5B6573"/>
-                </a:solidFill>
-                <a:latin typeface="Microsoft JhengHei"/>
-              </a:rPr>
-              <a:t>逐條比對＋知識庫</a:t>
-            </a:r>
-          </a:p>
-        </p:txBody>
-      </p:sp>
-      <p:sp>
-        <p:nvSpPr>
-          <p:cNvPr id="20" name="Rounded Rectangle 19"/>
+            <a:pPr algn="ctr"/>
+            <a:r>
+              <a:rPr sz="1350" b="0">
+                <a:solidFill>
+                  <a:srgbClr val="334455"/>
+                </a:solidFill>
+                <a:latin typeface="Microsoft JhengHei"/>
+              </a:rPr>
+              <a:t>每句引文回查原文；查不到就標示為未驗證</a:t>
+            </a:r>
+          </a:p>
+        </p:txBody>
+      </p:sp>
+      <p:sp>
+        <p:nvSpPr>
+          <p:cNvPr id="17" name="Rounded Rectangle 16"/>
           <p:cNvSpPr/>
           <p:nvPr/>
         </p:nvSpPr>
         <p:spPr>
           <a:xfrm>
-            <a:off x="7086600" y="4023360"/>
-            <a:ext cx="2103120" cy="914400"/>
+            <a:off x="6163056" y="1554480"/>
+            <a:ext cx="2606040" cy="3840480"/>
           </a:xfrm>
           <a:prstGeom prst="roundRect">
             <a:avLst>
@@ -8957,14 +10979,67 @@
       </p:sp>
       <p:sp>
         <p:nvSpPr>
-          <p:cNvPr id="21" name="TextBox 20"/>
+          <p:cNvPr id="18" name="Oval 17"/>
+          <p:cNvSpPr/>
+          <p:nvPr/>
+        </p:nvSpPr>
+        <p:spPr>
+          <a:xfrm>
+            <a:off x="7031736" y="1828800"/>
+            <a:ext cx="868680" cy="868680"/>
+          </a:xfrm>
+          <a:prstGeom prst="ellipse">
+            <a:avLst/>
+          </a:prstGeom>
+          <a:solidFill>
+            <a:srgbClr val="16304F"/>
+          </a:solidFill>
+          <a:ln>
+            <a:noFill/>
+          </a:ln>
+          <a:effectLst/>
+        </p:spPr>
+        <p:style>
+          <a:lnRef idx="1">
+            <a:schemeClr val="accent1"/>
+          </a:lnRef>
+          <a:fillRef idx="3">
+            <a:schemeClr val="accent1"/>
+          </a:fillRef>
+          <a:effectRef idx="2">
+            <a:schemeClr val="accent1"/>
+          </a:effectRef>
+          <a:fontRef idx="minor">
+            <a:schemeClr val="lt1"/>
+          </a:fontRef>
+        </p:style>
+        <p:txBody>
+          <a:bodyPr rtlCol="0" anchor="ctr" lIns="0" rIns="0" tIns="0" bIns="0"/>
+          <a:lstStyle/>
+          <a:p>
+            <a:pPr algn="ctr"/>
+            <a:r>
+              <a:rPr sz="2600" b="1">
+                <a:solidFill>
+                  <a:srgbClr val="FFFFFF"/>
+                </a:solidFill>
+                <a:latin typeface="Microsoft JhengHei"/>
+              </a:rPr>
+              <a:t>3</a:t>
+            </a:r>
+          </a:p>
+        </p:txBody>
+      </p:sp>
+      <p:sp>
+        <p:nvSpPr>
+          <p:cNvPr id="19" name="TextBox 18"/>
           <p:cNvSpPr txBox="1"/>
           <p:nvPr/>
         </p:nvSpPr>
         <p:spPr>
           <a:xfrm>
-            <a:off x="7196328" y="4050791"/>
-            <a:ext cx="1920240" cy="457200"/>
+            <a:off x="6300216" y="2880360"/>
+            <a:ext cx="2331720" cy="457200"/>
           </a:xfrm>
           <a:prstGeom prst="rect">
             <a:avLst/>
@@ -8977,29 +11052,29 @@
           </a:bodyPr>
           <a:lstStyle/>
           <a:p>
-            <a:pPr algn="l"/>
-            <a:r>
-              <a:rPr sz="1400" b="1">
+            <a:pPr algn="ctr"/>
+            <a:r>
+              <a:rPr sz="1800" b="1">
                 <a:solidFill>
                   <a:srgbClr val="16304F"/>
                 </a:solidFill>
                 <a:latin typeface="Microsoft JhengHei"/>
               </a:rPr>
-              <a:t>判解 19・函釋 10</a:t>
-            </a:r>
-          </a:p>
-        </p:txBody>
-      </p:sp>
-      <p:sp>
-        <p:nvSpPr>
-          <p:cNvPr id="22" name="TextBox 21"/>
+              <a:t>引到過期法規</a:t>
+            </a:r>
+          </a:p>
+        </p:txBody>
+      </p:sp>
+      <p:sp>
+        <p:nvSpPr>
+          <p:cNvPr id="20" name="TextBox 19"/>
           <p:cNvSpPr txBox="1"/>
           <p:nvPr/>
         </p:nvSpPr>
         <p:spPr>
           <a:xfrm>
-            <a:off x="7196328" y="4480560"/>
-            <a:ext cx="1920240" cy="365760"/>
+            <a:off x="6345936" y="3383280"/>
+            <a:ext cx="2240280" cy="1828800"/>
           </a:xfrm>
           <a:prstGeom prst="rect">
             <a:avLst/>
@@ -9012,29 +11087,29 @@
           </a:bodyPr>
           <a:lstStyle/>
           <a:p>
-            <a:pPr algn="l"/>
-            <a:r>
-              <a:rPr sz="1050" b="0">
-                <a:solidFill>
-                  <a:srgbClr val="5B6573"/>
-                </a:solidFill>
-                <a:latin typeface="Microsoft JhengHei"/>
-              </a:rPr>
-              <a:t>進知識庫並標註類型</a:t>
-            </a:r>
-          </a:p>
-        </p:txBody>
-      </p:sp>
-      <p:sp>
-        <p:nvSpPr>
-          <p:cNvPr id="23" name="Rounded Rectangle 22"/>
+            <a:pPr algn="ctr"/>
+            <a:r>
+              <a:rPr sz="1350" b="0">
+                <a:solidFill>
+                  <a:srgbClr val="334455"/>
+                </a:solidFill>
+                <a:latin typeface="Microsoft JhengHei"/>
+              </a:rPr>
+              <a:t>行為時／裁處時／決定時三個時點比對，修正過就提示</a:t>
+            </a:r>
+          </a:p>
+        </p:txBody>
+      </p:sp>
+      <p:sp>
+        <p:nvSpPr>
+          <p:cNvPr id="21" name="Rounded Rectangle 20"/>
           <p:cNvSpPr/>
           <p:nvPr/>
         </p:nvSpPr>
         <p:spPr>
           <a:xfrm>
-            <a:off x="9326880" y="4023360"/>
-            <a:ext cx="2103120" cy="914400"/>
+            <a:off x="8924544" y="1554480"/>
+            <a:ext cx="2606040" cy="3840480"/>
           </a:xfrm>
           <a:prstGeom prst="roundRect">
             <a:avLst>
@@ -9073,14 +11148,102 @@
       </p:sp>
       <p:sp>
         <p:nvSpPr>
+          <p:cNvPr id="22" name="Oval 21"/>
+          <p:cNvSpPr/>
+          <p:nvPr/>
+        </p:nvSpPr>
+        <p:spPr>
+          <a:xfrm>
+            <a:off x="9793224" y="1828800"/>
+            <a:ext cx="868680" cy="868680"/>
+          </a:xfrm>
+          <a:prstGeom prst="ellipse">
+            <a:avLst/>
+          </a:prstGeom>
+          <a:solidFill>
+            <a:srgbClr val="16304F"/>
+          </a:solidFill>
+          <a:ln>
+            <a:noFill/>
+          </a:ln>
+          <a:effectLst/>
+        </p:spPr>
+        <p:style>
+          <a:lnRef idx="1">
+            <a:schemeClr val="accent1"/>
+          </a:lnRef>
+          <a:fillRef idx="3">
+            <a:schemeClr val="accent1"/>
+          </a:fillRef>
+          <a:effectRef idx="2">
+            <a:schemeClr val="accent1"/>
+          </a:effectRef>
+          <a:fontRef idx="minor">
+            <a:schemeClr val="lt1"/>
+          </a:fontRef>
+        </p:style>
+        <p:txBody>
+          <a:bodyPr rtlCol="0" anchor="ctr" lIns="0" rIns="0" tIns="0" bIns="0"/>
+          <a:lstStyle/>
+          <a:p>
+            <a:pPr algn="ctr"/>
+            <a:r>
+              <a:rPr sz="2600" b="1">
+                <a:solidFill>
+                  <a:srgbClr val="FFFFFF"/>
+                </a:solidFill>
+                <a:latin typeface="Microsoft JhengHei"/>
+              </a:rPr>
+              <a:t>4</a:t>
+            </a:r>
+          </a:p>
+        </p:txBody>
+      </p:sp>
+      <p:sp>
+        <p:nvSpPr>
+          <p:cNvPr id="23" name="TextBox 22"/>
+          <p:cNvSpPr txBox="1"/>
+          <p:nvPr/>
+        </p:nvSpPr>
+        <p:spPr>
+          <a:xfrm>
+            <a:off x="9061704" y="2880360"/>
+            <a:ext cx="2331720" cy="457200"/>
+          </a:xfrm>
+          <a:prstGeom prst="rect">
+            <a:avLst/>
+          </a:prstGeom>
+          <a:noFill/>
+        </p:spPr>
+        <p:txBody>
+          <a:bodyPr wrap="square" anchor="t" lIns="45720" rIns="45720" tIns="27432" bIns="27432">
+            <a:spAutoFit/>
+          </a:bodyPr>
+          <a:lstStyle/>
+          <a:p>
+            <a:pPr algn="ctr"/>
+            <a:r>
+              <a:rPr sz="1800" b="1">
+                <a:solidFill>
+                  <a:srgbClr val="16304F"/>
+                </a:solidFill>
+                <a:latin typeface="Microsoft JhengHei"/>
+              </a:rPr>
+              <a:t>誤判程序結論</a:t>
+            </a:r>
+          </a:p>
+        </p:txBody>
+      </p:sp>
+      <p:sp>
+        <p:nvSpPr>
           <p:cNvPr id="24" name="TextBox 23"/>
           <p:cNvSpPr txBox="1"/>
           <p:nvPr/>
         </p:nvSpPr>
         <p:spPr>
           <a:xfrm>
-            <a:off x="9436607" y="4050791"/>
-            <a:ext cx="1920240" cy="457200"/>
+            <a:off x="9107424" y="3383280"/>
+            <a:ext cx="2240280" cy="1828800"/>
           </a:xfrm>
           <a:prstGeom prst="rect">
             <a:avLst/>
@@ -9093,50 +11256,15 @@
           </a:bodyPr>
           <a:lstStyle/>
           <a:p>
-            <a:pPr algn="l"/>
-            <a:r>
-              <a:rPr sz="1400" b="1">
-                <a:solidFill>
-                  <a:srgbClr val="16304F"/>
-                </a:solidFill>
-                <a:latin typeface="Microsoft JhengHei"/>
-              </a:rPr>
-              <a:t>自行補 3 個缺口</a:t>
-            </a:r>
-          </a:p>
-        </p:txBody>
-      </p:sp>
-      <p:sp>
-        <p:nvSpPr>
-          <p:cNvPr id="25" name="TextBox 24"/>
-          <p:cNvSpPr txBox="1"/>
-          <p:nvPr/>
-        </p:nvSpPr>
-        <p:spPr>
-          <a:xfrm>
-            <a:off x="9436607" y="4480560"/>
-            <a:ext cx="1920240" cy="365760"/>
-          </a:xfrm>
-          <a:prstGeom prst="rect">
-            <a:avLst/>
-          </a:prstGeom>
-          <a:noFill/>
-        </p:spPr>
-        <p:txBody>
-          <a:bodyPr wrap="square" anchor="t" lIns="45720" rIns="45720" tIns="27432" bIns="27432">
-            <a:spAutoFit/>
-          </a:bodyPr>
-          <a:lstStyle/>
-          <a:p>
-            <a:pPr algn="l"/>
-            <a:r>
-              <a:rPr sz="1050" b="0">
-                <a:solidFill>
-                  <a:srgbClr val="5B6573"/>
-                </a:solidFill>
-                <a:latin typeface="Microsoft JhengHei"/>
-              </a:rPr>
-              <a:t>政資法・洗錢判準・空污</a:t>
+            <a:pPr algn="ctr"/>
+            <a:r>
+              <a:rPr sz="1350" b="0">
+                <a:solidFill>
+                  <a:srgbClr val="334455"/>
+                </a:solidFill>
+                <a:latin typeface="Microsoft JhengHei"/>
+              </a:rPr>
+              <a:t>不受理／駁回／撤銷由程式決定，AI 只寫理由</a:t>
             </a:r>
           </a:p>
         </p:txBody>
@@ -9312,7 +11440,7 @@
                 </a:solidFill>
                 <a:latin typeface="Microsoft JhengHei"/>
               </a:rPr>
-              <a:t>拿不到答辯書和卷宗，就自己出三套考題</a:t>
+              <a:t>先把 101 份決定書讀完，才決定系統怎麼設計</a:t>
             </a:r>
           </a:p>
         </p:txBody>
@@ -9426,143 +11554,27 @@
                 </a:solidFill>
                 <a:latin typeface="Microsoft JhengHei"/>
               </a:rPr>
-              <a:t>8 / 10</a:t>
-            </a:r>
-          </a:p>
-        </p:txBody>
-      </p:sp>
-      <p:sp>
-        <p:nvSpPr>
-          <p:cNvPr id="9" name="Rounded Rectangle 8"/>
+              <a:t>8 / 11</a:t>
+            </a:r>
+          </a:p>
+        </p:txBody>
+      </p:sp>
+      <p:sp>
+        <p:nvSpPr>
+          <p:cNvPr id="9" name="Block Arc 8"/>
           <p:cNvSpPr/>
           <p:nvPr/>
         </p:nvSpPr>
         <p:spPr>
           <a:xfrm>
-            <a:off x="640080" y="1554480"/>
-            <a:ext cx="3520440" cy="3840480"/>
-          </a:xfrm>
-          <a:prstGeom prst="roundRect">
+            <a:off x="822960" y="1600200"/>
+            <a:ext cx="3566160" cy="3566160"/>
+          </a:xfrm>
+          <a:prstGeom prst="blockArc">
             <a:avLst>
-              <a:gd name="adj" fmla="val 8000"/>
-            </a:avLst>
-          </a:prstGeom>
-          <a:solidFill>
-            <a:srgbClr val="FFFFFF"/>
-          </a:solidFill>
-          <a:ln w="19050">
-            <a:solidFill>
-              <a:srgbClr val="DDE3EA"/>
-            </a:solidFill>
-          </a:ln>
-          <a:effectLst/>
-        </p:spPr>
-        <p:style>
-          <a:lnRef idx="1">
-            <a:schemeClr val="accent1"/>
-          </a:lnRef>
-          <a:fillRef idx="3">
-            <a:schemeClr val="accent1"/>
-          </a:fillRef>
-          <a:effectRef idx="2">
-            <a:schemeClr val="accent1"/>
-          </a:effectRef>
-          <a:fontRef idx="minor">
-            <a:schemeClr val="lt1"/>
-          </a:fontRef>
-        </p:style>
-        <p:txBody>
-          <a:bodyPr rtlCol="0" anchor="ctr"/>
-          <a:lstStyle/>
-          <a:p>
-            <a:pPr algn="ctr"/>
-          </a:p>
-        </p:txBody>
-      </p:sp>
-      <p:sp>
-        <p:nvSpPr>
-          <p:cNvPr id="10" name="TextBox 9"/>
-          <p:cNvSpPr txBox="1"/>
-          <p:nvPr/>
-        </p:nvSpPr>
-        <p:spPr>
-          <a:xfrm>
-            <a:off x="841247" y="1691640"/>
-            <a:ext cx="3108960" cy="320040"/>
-          </a:xfrm>
-          <a:prstGeom prst="rect">
-            <a:avLst/>
-          </a:prstGeom>
-          <a:noFill/>
-        </p:spPr>
-        <p:txBody>
-          <a:bodyPr wrap="square" anchor="t" lIns="45720" rIns="45720" tIns="27432" bIns="27432">
-            <a:spAutoFit/>
-          </a:bodyPr>
-          <a:lstStyle/>
-          <a:p>
-            <a:pPr algn="l"/>
-            <a:r>
-              <a:rPr sz="1050" b="1">
-                <a:solidFill>
-                  <a:srgbClr val="D98E04"/>
-                </a:solidFill>
-                <a:latin typeface="Microsoft JhengHei"/>
-              </a:rPr>
-              <a:t>CASE 01 ／ 建築法</a:t>
-            </a:r>
-          </a:p>
-        </p:txBody>
-      </p:sp>
-      <p:sp>
-        <p:nvSpPr>
-          <p:cNvPr id="11" name="TextBox 10"/>
-          <p:cNvSpPr txBox="1"/>
-          <p:nvPr/>
-        </p:nvSpPr>
-        <p:spPr>
-          <a:xfrm>
-            <a:off x="841247" y="2011680"/>
-            <a:ext cx="3108960" cy="502920"/>
-          </a:xfrm>
-          <a:prstGeom prst="rect">
-            <a:avLst/>
-          </a:prstGeom>
-          <a:noFill/>
-        </p:spPr>
-        <p:txBody>
-          <a:bodyPr wrap="square" anchor="t" lIns="45720" rIns="45720" tIns="27432" bIns="27432">
-            <a:spAutoFit/>
-          </a:bodyPr>
-          <a:lstStyle/>
-          <a:p>
-            <a:pPr algn="l"/>
-            <a:r>
-              <a:rPr sz="2000" b="1">
-                <a:solidFill>
-                  <a:srgbClr val="16304F"/>
-                </a:solidFill>
-                <a:latin typeface="Microsoft JhengHei"/>
-              </a:rPr>
-              <a:t>訴願人遲了 7 天</a:t>
-            </a:r>
-          </a:p>
-        </p:txBody>
-      </p:sp>
-      <p:sp>
-        <p:nvSpPr>
-          <p:cNvPr id="12" name="Rounded Rectangle 11"/>
-          <p:cNvSpPr/>
-          <p:nvPr/>
-        </p:nvSpPr>
-        <p:spPr>
-          <a:xfrm>
-            <a:off x="841247" y="2606040"/>
-            <a:ext cx="1188720" cy="411480"/>
-          </a:xfrm>
-          <a:prstGeom prst="roundRect">
-            <a:avLst>
-              <a:gd name="adj" fmla="val 8000"/>
+              <a:gd name="adj1" fmla="val -9000000"/>
+              <a:gd name="adj2" fmla="val 15840000"/>
+              <a:gd name="adj3" fmla="val 20000"/>
             </a:avLst>
           </a:prstGeom>
           <a:solidFill>
@@ -9597,599 +11609,21 @@
       </p:sp>
       <p:sp>
         <p:nvSpPr>
-          <p:cNvPr id="13" name="TextBox 12"/>
-          <p:cNvSpPr txBox="1"/>
-          <p:nvPr/>
-        </p:nvSpPr>
-        <p:spPr>
-          <a:xfrm>
-            <a:off x="841247" y="2606040"/>
-            <a:ext cx="1188720" cy="411480"/>
-          </a:xfrm>
-          <a:prstGeom prst="rect">
-            <a:avLst/>
-          </a:prstGeom>
-          <a:noFill/>
-        </p:spPr>
-        <p:txBody>
-          <a:bodyPr wrap="square" anchor="ctr" lIns="45720" rIns="45720" tIns="27432" bIns="27432">
-            <a:spAutoFit/>
-          </a:bodyPr>
-          <a:lstStyle/>
-          <a:p>
-            <a:pPr algn="ctr"/>
-            <a:r>
-              <a:rPr sz="1500" b="1">
-                <a:solidFill>
-                  <a:srgbClr val="FFFFFF"/>
-                </a:solidFill>
-                <a:latin typeface="Microsoft JhengHei"/>
-              </a:rPr>
-              <a:t>不受理</a:t>
-            </a:r>
-          </a:p>
-        </p:txBody>
-      </p:sp>
-      <p:sp>
-        <p:nvSpPr>
-          <p:cNvPr id="14" name="TextBox 13"/>
-          <p:cNvSpPr txBox="1"/>
-          <p:nvPr/>
-        </p:nvSpPr>
-        <p:spPr>
-          <a:xfrm>
-            <a:off x="841247" y="3154680"/>
-            <a:ext cx="3108960" cy="2103120"/>
-          </a:xfrm>
-          <a:prstGeom prst="rect">
-            <a:avLst/>
-          </a:prstGeom>
-          <a:noFill/>
-        </p:spPr>
-        <p:txBody>
-          <a:bodyPr wrap="square" anchor="t" lIns="45720" rIns="45720" tIns="27432" bIns="27432">
-            <a:spAutoFit/>
-          </a:bodyPr>
-          <a:lstStyle/>
-          <a:p>
-            <a:pPr algn="l"/>
-            <a:r>
-              <a:rPr sz="1350" b="0">
-                <a:solidFill>
-                  <a:srgbClr val="334455"/>
-                </a:solidFill>
-                <a:latin typeface="Microsoft JhengHei"/>
-              </a:rPr>
-              <a:t>卷宗塞滿實質理由和照片當干擾；正確答案仍是程序不受理，不能寫任何實質認定。</a:t>
-            </a:r>
-          </a:p>
-        </p:txBody>
-      </p:sp>
-      <p:sp>
-        <p:nvSpPr>
-          <p:cNvPr id="15" name="Rounded Rectangle 14"/>
+          <p:cNvPr id="10" name="Block Arc 9"/>
           <p:cNvSpPr/>
           <p:nvPr/>
         </p:nvSpPr>
         <p:spPr>
           <a:xfrm>
-            <a:off x="4325112" y="1554480"/>
-            <a:ext cx="3520440" cy="3840480"/>
-          </a:xfrm>
-          <a:prstGeom prst="roundRect">
+            <a:off x="822960" y="1600200"/>
+            <a:ext cx="3566160" cy="3566160"/>
+          </a:xfrm>
+          <a:prstGeom prst="blockArc">
             <a:avLst>
-              <a:gd name="adj" fmla="val 8000"/>
+              <a:gd name="adj1" fmla="val 15840000"/>
+              <a:gd name="adj2" fmla="val 21240000"/>
+              <a:gd name="adj3" fmla="val 20000"/>
             </a:avLst>
-          </a:prstGeom>
-          <a:solidFill>
-            <a:srgbClr val="FFFFFF"/>
-          </a:solidFill>
-          <a:ln w="19050">
-            <a:solidFill>
-              <a:srgbClr val="DDE3EA"/>
-            </a:solidFill>
-          </a:ln>
-          <a:effectLst/>
-        </p:spPr>
-        <p:style>
-          <a:lnRef idx="1">
-            <a:schemeClr val="accent1"/>
-          </a:lnRef>
-          <a:fillRef idx="3">
-            <a:schemeClr val="accent1"/>
-          </a:fillRef>
-          <a:effectRef idx="2">
-            <a:schemeClr val="accent1"/>
-          </a:effectRef>
-          <a:fontRef idx="minor">
-            <a:schemeClr val="lt1"/>
-          </a:fontRef>
-        </p:style>
-        <p:txBody>
-          <a:bodyPr rtlCol="0" anchor="ctr"/>
-          <a:lstStyle/>
-          <a:p>
-            <a:pPr algn="ctr"/>
-          </a:p>
-        </p:txBody>
-      </p:sp>
-      <p:sp>
-        <p:nvSpPr>
-          <p:cNvPr id="16" name="TextBox 15"/>
-          <p:cNvSpPr txBox="1"/>
-          <p:nvPr/>
-        </p:nvSpPr>
-        <p:spPr>
-          <a:xfrm>
-            <a:off x="4526280" y="1691640"/>
-            <a:ext cx="3108960" cy="320040"/>
-          </a:xfrm>
-          <a:prstGeom prst="rect">
-            <a:avLst/>
-          </a:prstGeom>
-          <a:noFill/>
-        </p:spPr>
-        <p:txBody>
-          <a:bodyPr wrap="square" anchor="t" lIns="45720" rIns="45720" tIns="27432" bIns="27432">
-            <a:spAutoFit/>
-          </a:bodyPr>
-          <a:lstStyle/>
-          <a:p>
-            <a:pPr algn="l"/>
-            <a:r>
-              <a:rPr sz="1050" b="1">
-                <a:solidFill>
-                  <a:srgbClr val="D98E04"/>
-                </a:solidFill>
-                <a:latin typeface="Microsoft JhengHei"/>
-              </a:rPr>
-              <a:t>CASE 02 ／ 廢清法</a:t>
-            </a:r>
-          </a:p>
-        </p:txBody>
-      </p:sp>
-      <p:sp>
-        <p:nvSpPr>
-          <p:cNvPr id="17" name="TextBox 16"/>
-          <p:cNvSpPr txBox="1"/>
-          <p:nvPr/>
-        </p:nvSpPr>
-        <p:spPr>
-          <a:xfrm>
-            <a:off x="4526280" y="2011680"/>
-            <a:ext cx="3108960" cy="502920"/>
-          </a:xfrm>
-          <a:prstGeom prst="rect">
-            <a:avLst/>
-          </a:prstGeom>
-          <a:noFill/>
-        </p:spPr>
-        <p:txBody>
-          <a:bodyPr wrap="square" anchor="t" lIns="45720" rIns="45720" tIns="27432" bIns="27432">
-            <a:spAutoFit/>
-          </a:bodyPr>
-          <a:lstStyle/>
-          <a:p>
-            <a:pPr algn="l"/>
-            <a:r>
-              <a:rPr sz="2000" b="1">
-                <a:solidFill>
-                  <a:srgbClr val="16304F"/>
-                </a:solidFill>
-                <a:latin typeface="Microsoft JhengHei"/>
-              </a:rPr>
-              <a:t>亂丟煙蒂，說沒丟</a:t>
-            </a:r>
-          </a:p>
-        </p:txBody>
-      </p:sp>
-      <p:sp>
-        <p:nvSpPr>
-          <p:cNvPr id="18" name="Rounded Rectangle 17"/>
-          <p:cNvSpPr/>
-          <p:nvPr/>
-        </p:nvSpPr>
-        <p:spPr>
-          <a:xfrm>
-            <a:off x="4526280" y="2606040"/>
-            <a:ext cx="1188720" cy="411480"/>
-          </a:xfrm>
-          <a:prstGeom prst="roundRect">
-            <a:avLst>
-              <a:gd name="adj" fmla="val 8000"/>
-            </a:avLst>
-          </a:prstGeom>
-          <a:solidFill>
-            <a:srgbClr val="16304F"/>
-          </a:solidFill>
-          <a:ln>
-            <a:noFill/>
-          </a:ln>
-          <a:effectLst/>
-        </p:spPr>
-        <p:style>
-          <a:lnRef idx="1">
-            <a:schemeClr val="accent1"/>
-          </a:lnRef>
-          <a:fillRef idx="3">
-            <a:schemeClr val="accent1"/>
-          </a:fillRef>
-          <a:effectRef idx="2">
-            <a:schemeClr val="accent1"/>
-          </a:effectRef>
-          <a:fontRef idx="minor">
-            <a:schemeClr val="lt1"/>
-          </a:fontRef>
-        </p:style>
-        <p:txBody>
-          <a:bodyPr rtlCol="0" anchor="ctr"/>
-          <a:lstStyle/>
-          <a:p>
-            <a:pPr algn="ctr"/>
-          </a:p>
-        </p:txBody>
-      </p:sp>
-      <p:sp>
-        <p:nvSpPr>
-          <p:cNvPr id="19" name="TextBox 18"/>
-          <p:cNvSpPr txBox="1"/>
-          <p:nvPr/>
-        </p:nvSpPr>
-        <p:spPr>
-          <a:xfrm>
-            <a:off x="4526280" y="2606040"/>
-            <a:ext cx="1188720" cy="411480"/>
-          </a:xfrm>
-          <a:prstGeom prst="rect">
-            <a:avLst/>
-          </a:prstGeom>
-          <a:noFill/>
-        </p:spPr>
-        <p:txBody>
-          <a:bodyPr wrap="square" anchor="ctr" lIns="45720" rIns="45720" tIns="27432" bIns="27432">
-            <a:spAutoFit/>
-          </a:bodyPr>
-          <a:lstStyle/>
-          <a:p>
-            <a:pPr algn="ctr"/>
-            <a:r>
-              <a:rPr sz="1500" b="1">
-                <a:solidFill>
-                  <a:srgbClr val="FFFFFF"/>
-                </a:solidFill>
-                <a:latin typeface="Microsoft JhengHei"/>
-              </a:rPr>
-              <a:t>駁回</a:t>
-            </a:r>
-          </a:p>
-        </p:txBody>
-      </p:sp>
-      <p:sp>
-        <p:nvSpPr>
-          <p:cNvPr id="20" name="TextBox 19"/>
-          <p:cNvSpPr txBox="1"/>
-          <p:nvPr/>
-        </p:nvSpPr>
-        <p:spPr>
-          <a:xfrm>
-            <a:off x="4526280" y="3154680"/>
-            <a:ext cx="3108960" cy="2103120"/>
-          </a:xfrm>
-          <a:prstGeom prst="rect">
-            <a:avLst/>
-          </a:prstGeom>
-          <a:noFill/>
-        </p:spPr>
-        <p:txBody>
-          <a:bodyPr wrap="square" anchor="t" lIns="45720" rIns="45720" tIns="27432" bIns="27432">
-            <a:spAutoFit/>
-          </a:bodyPr>
-          <a:lstStyle/>
-          <a:p>
-            <a:pPr algn="l"/>
-            <a:r>
-              <a:rPr sz="1350" b="0">
-                <a:solidFill>
-                  <a:srgbClr val="334455"/>
-                </a:solidFill>
-                <a:latin typeface="Microsoft JhengHei"/>
-              </a:rPr>
-              <a:t>影片 00:14 拋擲、00:19 煙蒂還在；訴願書寫的收受日和送達證書差 2 天，要以證書為準。</a:t>
-            </a:r>
-          </a:p>
-        </p:txBody>
-      </p:sp>
-      <p:sp>
-        <p:nvSpPr>
-          <p:cNvPr id="21" name="Rounded Rectangle 20"/>
-          <p:cNvSpPr/>
-          <p:nvPr/>
-        </p:nvSpPr>
-        <p:spPr>
-          <a:xfrm>
-            <a:off x="8010144" y="1554480"/>
-            <a:ext cx="3520440" cy="3840480"/>
-          </a:xfrm>
-          <a:prstGeom prst="roundRect">
-            <a:avLst>
-              <a:gd name="adj" fmla="val 8000"/>
-            </a:avLst>
-          </a:prstGeom>
-          <a:solidFill>
-            <a:srgbClr val="FFFFFF"/>
-          </a:solidFill>
-          <a:ln w="19050">
-            <a:solidFill>
-              <a:srgbClr val="DDE3EA"/>
-            </a:solidFill>
-          </a:ln>
-          <a:effectLst/>
-        </p:spPr>
-        <p:style>
-          <a:lnRef idx="1">
-            <a:schemeClr val="accent1"/>
-          </a:lnRef>
-          <a:fillRef idx="3">
-            <a:schemeClr val="accent1"/>
-          </a:fillRef>
-          <a:effectRef idx="2">
-            <a:schemeClr val="accent1"/>
-          </a:effectRef>
-          <a:fontRef idx="minor">
-            <a:schemeClr val="lt1"/>
-          </a:fontRef>
-        </p:style>
-        <p:txBody>
-          <a:bodyPr rtlCol="0" anchor="ctr"/>
-          <a:lstStyle/>
-          <a:p>
-            <a:pPr algn="ctr"/>
-          </a:p>
-        </p:txBody>
-      </p:sp>
-      <p:sp>
-        <p:nvSpPr>
-          <p:cNvPr id="22" name="TextBox 21"/>
-          <p:cNvSpPr txBox="1"/>
-          <p:nvPr/>
-        </p:nvSpPr>
-        <p:spPr>
-          <a:xfrm>
-            <a:off x="8211312" y="1691640"/>
-            <a:ext cx="3108960" cy="320040"/>
-          </a:xfrm>
-          <a:prstGeom prst="rect">
-            <a:avLst/>
-          </a:prstGeom>
-          <a:noFill/>
-        </p:spPr>
-        <p:txBody>
-          <a:bodyPr wrap="square" anchor="t" lIns="45720" rIns="45720" tIns="27432" bIns="27432">
-            <a:spAutoFit/>
-          </a:bodyPr>
-          <a:lstStyle/>
-          <a:p>
-            <a:pPr algn="l"/>
-            <a:r>
-              <a:rPr sz="1050" b="1">
-                <a:solidFill>
-                  <a:srgbClr val="D98E04"/>
-                </a:solidFill>
-                <a:latin typeface="Microsoft JhengHei"/>
-              </a:rPr>
-              <a:t>CASE 03 ／ 建築法</a:t>
-            </a:r>
-          </a:p>
-        </p:txBody>
-      </p:sp>
-      <p:sp>
-        <p:nvSpPr>
-          <p:cNvPr id="23" name="TextBox 22"/>
-          <p:cNvSpPr txBox="1"/>
-          <p:nvPr/>
-        </p:nvSpPr>
-        <p:spPr>
-          <a:xfrm>
-            <a:off x="8211312" y="2011680"/>
-            <a:ext cx="3108960" cy="502920"/>
-          </a:xfrm>
-          <a:prstGeom prst="rect">
-            <a:avLst/>
-          </a:prstGeom>
-          <a:noFill/>
-        </p:spPr>
-        <p:txBody>
-          <a:bodyPr wrap="square" anchor="t" lIns="45720" rIns="45720" tIns="27432" bIns="27432">
-            <a:spAutoFit/>
-          </a:bodyPr>
-          <a:lstStyle/>
-          <a:p>
-            <a:pPr algn="l"/>
-            <a:r>
-              <a:rPr sz="2000" b="1">
-                <a:solidFill>
-                  <a:srgbClr val="16304F"/>
-                </a:solidFill>
-                <a:latin typeface="Microsoft JhengHei"/>
-              </a:rPr>
-              <a:t>政府遲了 26 天才罰</a:t>
-            </a:r>
-          </a:p>
-        </p:txBody>
-      </p:sp>
-      <p:sp>
-        <p:nvSpPr>
-          <p:cNvPr id="24" name="Rounded Rectangle 23"/>
-          <p:cNvSpPr/>
-          <p:nvPr/>
-        </p:nvSpPr>
-        <p:spPr>
-          <a:xfrm>
-            <a:off x="8211312" y="2606040"/>
-            <a:ext cx="1188720" cy="411480"/>
-          </a:xfrm>
-          <a:prstGeom prst="roundRect">
-            <a:avLst>
-              <a:gd name="adj" fmla="val 8000"/>
-            </a:avLst>
-          </a:prstGeom>
-          <a:solidFill>
-            <a:srgbClr val="16304F"/>
-          </a:solidFill>
-          <a:ln>
-            <a:noFill/>
-          </a:ln>
-          <a:effectLst/>
-        </p:spPr>
-        <p:style>
-          <a:lnRef idx="1">
-            <a:schemeClr val="accent1"/>
-          </a:lnRef>
-          <a:fillRef idx="3">
-            <a:schemeClr val="accent1"/>
-          </a:fillRef>
-          <a:effectRef idx="2">
-            <a:schemeClr val="accent1"/>
-          </a:effectRef>
-          <a:fontRef idx="minor">
-            <a:schemeClr val="lt1"/>
-          </a:fontRef>
-        </p:style>
-        <p:txBody>
-          <a:bodyPr rtlCol="0" anchor="ctr"/>
-          <a:lstStyle/>
-          <a:p>
-            <a:pPr algn="ctr"/>
-          </a:p>
-        </p:txBody>
-      </p:sp>
-      <p:sp>
-        <p:nvSpPr>
-          <p:cNvPr id="25" name="TextBox 24"/>
-          <p:cNvSpPr txBox="1"/>
-          <p:nvPr/>
-        </p:nvSpPr>
-        <p:spPr>
-          <a:xfrm>
-            <a:off x="8211312" y="2606040"/>
-            <a:ext cx="1188720" cy="411480"/>
-          </a:xfrm>
-          <a:prstGeom prst="rect">
-            <a:avLst/>
-          </a:prstGeom>
-          <a:noFill/>
-        </p:spPr>
-        <p:txBody>
-          <a:bodyPr wrap="square" anchor="ctr" lIns="45720" rIns="45720" tIns="27432" bIns="27432">
-            <a:spAutoFit/>
-          </a:bodyPr>
-          <a:lstStyle/>
-          <a:p>
-            <a:pPr algn="ctr"/>
-            <a:r>
-              <a:rPr sz="1500" b="1">
-                <a:solidFill>
-                  <a:srgbClr val="FFFFFF"/>
-                </a:solidFill>
-                <a:latin typeface="Microsoft JhengHei"/>
-              </a:rPr>
-              <a:t>撤銷</a:t>
-            </a:r>
-          </a:p>
-        </p:txBody>
-      </p:sp>
-      <p:sp>
-        <p:nvSpPr>
-          <p:cNvPr id="26" name="TextBox 25"/>
-          <p:cNvSpPr txBox="1"/>
-          <p:nvPr/>
-        </p:nvSpPr>
-        <p:spPr>
-          <a:xfrm>
-            <a:off x="8211312" y="3154680"/>
-            <a:ext cx="3108960" cy="2103120"/>
-          </a:xfrm>
-          <a:prstGeom prst="rect">
-            <a:avLst/>
-          </a:prstGeom>
-          <a:noFill/>
-        </p:spPr>
-        <p:txBody>
-          <a:bodyPr wrap="square" anchor="t" lIns="45720" rIns="45720" tIns="27432" bIns="27432">
-            <a:spAutoFit/>
-          </a:bodyPr>
-          <a:lstStyle/>
-          <a:p>
-            <a:pPr algn="l"/>
-            <a:r>
-              <a:rPr sz="1350" b="0">
-                <a:solidFill>
-                  <a:srgbClr val="334455"/>
-                </a:solidFill>
-                <a:latin typeface="Microsoft JhengHei"/>
-              </a:rPr>
-              <a:t>簽證不實證據很強，但三年裁處權時效已過；答辯書迴避不答，系統必須自行從卷內算出時效。</a:t>
-            </a:r>
-          </a:p>
-        </p:txBody>
-      </p:sp>
-      <p:sp>
-        <p:nvSpPr>
-          <p:cNvPr id="27" name="Rectangle 26"/>
-          <p:cNvSpPr/>
-          <p:nvPr/>
-        </p:nvSpPr>
-        <p:spPr>
-          <a:xfrm>
-            <a:off x="640080" y="5623560"/>
-            <a:ext cx="10908792" cy="566928"/>
-          </a:xfrm>
-          <a:prstGeom prst="rect">
-            <a:avLst/>
-          </a:prstGeom>
-          <a:solidFill>
-            <a:srgbClr val="FFF8EA"/>
-          </a:solidFill>
-          <a:ln>
-            <a:noFill/>
-          </a:ln>
-          <a:effectLst/>
-        </p:spPr>
-        <p:style>
-          <a:lnRef idx="1">
-            <a:schemeClr val="accent1"/>
-          </a:lnRef>
-          <a:fillRef idx="3">
-            <a:schemeClr val="accent1"/>
-          </a:fillRef>
-          <a:effectRef idx="2">
-            <a:schemeClr val="accent1"/>
-          </a:effectRef>
-          <a:fontRef idx="minor">
-            <a:schemeClr val="lt1"/>
-          </a:fontRef>
-        </p:style>
-        <p:txBody>
-          <a:bodyPr rtlCol="0" anchor="ctr"/>
-          <a:lstStyle/>
-          <a:p>
-            <a:pPr algn="ctr"/>
-          </a:p>
-        </p:txBody>
-      </p:sp>
-      <p:sp>
-        <p:nvSpPr>
-          <p:cNvPr id="28" name="Rectangle 27"/>
-          <p:cNvSpPr/>
-          <p:nvPr/>
-        </p:nvSpPr>
-        <p:spPr>
-          <a:xfrm>
-            <a:off x="640080" y="5623560"/>
-            <a:ext cx="64008" cy="566928"/>
-          </a:xfrm>
-          <a:prstGeom prst="rect">
-            <a:avLst/>
           </a:prstGeom>
           <a:solidFill>
             <a:srgbClr val="D98E04"/>
@@ -10223,14 +11657,62 @@
       </p:sp>
       <p:sp>
         <p:nvSpPr>
-          <p:cNvPr id="29" name="TextBox 28"/>
+          <p:cNvPr id="11" name="Block Arc 10"/>
+          <p:cNvSpPr/>
+          <p:nvPr/>
+        </p:nvSpPr>
+        <p:spPr>
+          <a:xfrm>
+            <a:off x="822960" y="1600200"/>
+            <a:ext cx="3566160" cy="3566160"/>
+          </a:xfrm>
+          <a:prstGeom prst="blockArc">
+            <a:avLst>
+              <a:gd name="adj1" fmla="val 21240000"/>
+              <a:gd name="adj2" fmla="val 26639999"/>
+              <a:gd name="adj3" fmla="val 20000"/>
+            </a:avLst>
+          </a:prstGeom>
+          <a:solidFill>
+            <a:srgbClr val="2E7D32"/>
+          </a:solidFill>
+          <a:ln>
+            <a:noFill/>
+          </a:ln>
+          <a:effectLst/>
+        </p:spPr>
+        <p:style>
+          <a:lnRef idx="1">
+            <a:schemeClr val="accent1"/>
+          </a:lnRef>
+          <a:fillRef idx="3">
+            <a:schemeClr val="accent1"/>
+          </a:fillRef>
+          <a:effectRef idx="2">
+            <a:schemeClr val="accent1"/>
+          </a:effectRef>
+          <a:fontRef idx="minor">
+            <a:schemeClr val="lt1"/>
+          </a:fontRef>
+        </p:style>
+        <p:txBody>
+          <a:bodyPr rtlCol="0" anchor="ctr"/>
+          <a:lstStyle/>
+          <a:p>
+            <a:pPr algn="ctr"/>
+          </a:p>
+        </p:txBody>
+      </p:sp>
+      <p:sp>
+        <p:nvSpPr>
+          <p:cNvPr id="12" name="TextBox 11"/>
           <p:cNvSpPr txBox="1"/>
           <p:nvPr/>
         </p:nvSpPr>
         <p:spPr>
           <a:xfrm>
-            <a:off x="822960" y="5641848"/>
-            <a:ext cx="10607040" cy="548640"/>
+            <a:off x="822960" y="2743200"/>
+            <a:ext cx="3566160" cy="822960"/>
           </a:xfrm>
           <a:prstGeom prst="rect">
             <a:avLst/>
@@ -10238,20 +11720,508 @@
           <a:noFill/>
         </p:spPr>
         <p:txBody>
-          <a:bodyPr wrap="square" anchor="ctr" lIns="45720" rIns="45720" tIns="27432" bIns="27432">
+          <a:bodyPr wrap="square" anchor="t" lIns="45720" rIns="45720" tIns="27432" bIns="27432">
             <a:spAutoFit/>
           </a:bodyPr>
           <a:lstStyle/>
           <a:p>
+            <a:pPr algn="ctr"/>
+            <a:r>
+              <a:rPr sz="4400" b="1">
+                <a:solidFill>
+                  <a:srgbClr val="16304F"/>
+                </a:solidFill>
+                <a:latin typeface="Microsoft JhengHei"/>
+              </a:rPr>
+              <a:t>69%</a:t>
+            </a:r>
+          </a:p>
+        </p:txBody>
+      </p:sp>
+      <p:sp>
+        <p:nvSpPr>
+          <p:cNvPr id="13" name="TextBox 12"/>
+          <p:cNvSpPr txBox="1"/>
+          <p:nvPr/>
+        </p:nvSpPr>
+        <p:spPr>
+          <a:xfrm>
+            <a:off x="822960" y="3520440"/>
+            <a:ext cx="3566160" cy="365760"/>
+          </a:xfrm>
+          <a:prstGeom prst="rect">
+            <a:avLst/>
+          </a:prstGeom>
+          <a:noFill/>
+        </p:spPr>
+        <p:txBody>
+          <a:bodyPr wrap="square" anchor="t" lIns="45720" rIns="45720" tIns="27432" bIns="27432">
+            <a:spAutoFit/>
+          </a:bodyPr>
+          <a:lstStyle/>
+          <a:p>
+            <a:pPr algn="ctr"/>
+            <a:r>
+              <a:rPr sz="1400" b="0">
+                <a:solidFill>
+                  <a:srgbClr val="5B6573"/>
+                </a:solidFill>
+                <a:latin typeface="Microsoft JhengHei"/>
+              </a:rPr>
+              <a:t>不受理</a:t>
+            </a:r>
+          </a:p>
+        </p:txBody>
+      </p:sp>
+      <p:sp>
+        <p:nvSpPr>
+          <p:cNvPr id="14" name="TextBox 13"/>
+          <p:cNvSpPr txBox="1"/>
+          <p:nvPr/>
+        </p:nvSpPr>
+        <p:spPr>
+          <a:xfrm>
+            <a:off x="822960" y="3840480"/>
+            <a:ext cx="3566160" cy="365760"/>
+          </a:xfrm>
+          <a:prstGeom prst="rect">
+            <a:avLst/>
+          </a:prstGeom>
+          <a:noFill/>
+        </p:spPr>
+        <p:txBody>
+          <a:bodyPr wrap="square" anchor="t" lIns="45720" rIns="45720" tIns="27432" bIns="27432">
+            <a:spAutoFit/>
+          </a:bodyPr>
+          <a:lstStyle/>
+          <a:p>
+            <a:pPr algn="ctr"/>
+            <a:r>
+              <a:rPr sz="1100" b="0">
+                <a:solidFill>
+                  <a:srgbClr val="8A93A0"/>
+                </a:solidFill>
+                <a:latin typeface="Microsoft JhengHei"/>
+              </a:rPr>
+              <a:t>駁回 15%・撤銷 15%</a:t>
+            </a:r>
+          </a:p>
+        </p:txBody>
+      </p:sp>
+      <p:sp>
+        <p:nvSpPr>
+          <p:cNvPr id="15" name="TextBox 14"/>
+          <p:cNvSpPr txBox="1"/>
+          <p:nvPr/>
+        </p:nvSpPr>
+        <p:spPr>
+          <a:xfrm>
+            <a:off x="4846320" y="1737360"/>
+            <a:ext cx="6675120" cy="1097280"/>
+          </a:xfrm>
+          <a:prstGeom prst="rect">
+            <a:avLst/>
+          </a:prstGeom>
+          <a:noFill/>
+        </p:spPr>
+        <p:txBody>
+          <a:bodyPr wrap="square" anchor="t" lIns="45720" rIns="45720" tIns="27432" bIns="27432">
+            <a:spAutoFit/>
+          </a:bodyPr>
+          <a:lstStyle/>
+          <a:p>
             <a:pPr algn="l"/>
             <a:r>
-              <a:rPr sz="1350" b="0">
-                <a:solidFill>
-                  <a:srgbClr val="334455"/>
-                </a:solidFill>
-                <a:latin typeface="Microsoft JhengHei"/>
-              </a:rPr>
-              <a:t>每案 30 頁真實格式卷宗（掃描、手寫、系統截圖、影片）；對應決定書從知識庫排除，系統不能「認出答案」。</a:t>
+              <a:rPr sz="2400" b="1">
+                <a:solidFill>
+                  <a:srgbClr val="16304F"/>
+                </a:solidFill>
+                <a:latin typeface="Microsoft JhengHei"/>
+              </a:rPr>
+              <a:t>七成案子在程序就結束了。</a:t>
+            </a:r>
+          </a:p>
+        </p:txBody>
+      </p:sp>
+      <p:sp>
+        <p:nvSpPr>
+          <p:cNvPr id="16" name="TextBox 15"/>
+          <p:cNvSpPr txBox="1"/>
+          <p:nvPr/>
+        </p:nvSpPr>
+        <p:spPr>
+          <a:xfrm>
+            <a:off x="4846320" y="2880360"/>
+            <a:ext cx="6675120" cy="822960"/>
+          </a:xfrm>
+          <a:prstGeom prst="rect">
+            <a:avLst/>
+          </a:prstGeom>
+          <a:noFill/>
+        </p:spPr>
+        <p:txBody>
+          <a:bodyPr wrap="square" anchor="t" lIns="45720" rIns="45720" tIns="27432" bIns="27432">
+            <a:spAutoFit/>
+          </a:bodyPr>
+          <a:lstStyle/>
+          <a:p>
+            <a:pPr algn="l"/>
+            <a:r>
+              <a:rPr sz="1500" b="0">
+                <a:solidFill>
+                  <a:srgbClr val="5B6573"/>
+                </a:solidFill>
+                <a:latin typeface="Microsoft JhengHei"/>
+              </a:rPr>
+              <a:t>所以期間交給程式算；不受理的案子，草稿一個字都不碰實體。</a:t>
+            </a:r>
+          </a:p>
+        </p:txBody>
+      </p:sp>
+      <p:sp>
+        <p:nvSpPr>
+          <p:cNvPr id="17" name="Rounded Rectangle 16"/>
+          <p:cNvSpPr/>
+          <p:nvPr/>
+        </p:nvSpPr>
+        <p:spPr>
+          <a:xfrm>
+            <a:off x="4846320" y="4023360"/>
+            <a:ext cx="2103120" cy="914400"/>
+          </a:xfrm>
+          <a:prstGeom prst="roundRect">
+            <a:avLst>
+              <a:gd name="adj" fmla="val 8000"/>
+            </a:avLst>
+          </a:prstGeom>
+          <a:solidFill>
+            <a:srgbClr val="F4F6F9"/>
+          </a:solidFill>
+          <a:ln>
+            <a:noFill/>
+          </a:ln>
+          <a:effectLst/>
+        </p:spPr>
+        <p:style>
+          <a:lnRef idx="1">
+            <a:schemeClr val="accent1"/>
+          </a:lnRef>
+          <a:fillRef idx="3">
+            <a:schemeClr val="accent1"/>
+          </a:fillRef>
+          <a:effectRef idx="2">
+            <a:schemeClr val="accent1"/>
+          </a:effectRef>
+          <a:fontRef idx="minor">
+            <a:schemeClr val="lt1"/>
+          </a:fontRef>
+        </p:style>
+        <p:txBody>
+          <a:bodyPr rtlCol="0" anchor="ctr"/>
+          <a:lstStyle/>
+          <a:p>
+            <a:pPr algn="ctr"/>
+          </a:p>
+        </p:txBody>
+      </p:sp>
+      <p:sp>
+        <p:nvSpPr>
+          <p:cNvPr id="18" name="TextBox 17"/>
+          <p:cNvSpPr txBox="1"/>
+          <p:nvPr/>
+        </p:nvSpPr>
+        <p:spPr>
+          <a:xfrm>
+            <a:off x="4956048" y="4050791"/>
+            <a:ext cx="1920240" cy="457200"/>
+          </a:xfrm>
+          <a:prstGeom prst="rect">
+            <a:avLst/>
+          </a:prstGeom>
+          <a:noFill/>
+        </p:spPr>
+        <p:txBody>
+          <a:bodyPr wrap="square" anchor="t" lIns="45720" rIns="45720" tIns="27432" bIns="27432">
+            <a:spAutoFit/>
+          </a:bodyPr>
+          <a:lstStyle/>
+          <a:p>
+            <a:pPr algn="l"/>
+            <a:r>
+              <a:rPr sz="1400" b="1">
+                <a:solidFill>
+                  <a:srgbClr val="16304F"/>
+                </a:solidFill>
+                <a:latin typeface="Microsoft JhengHei"/>
+              </a:rPr>
+              <a:t>法規 11 部</a:t>
+            </a:r>
+          </a:p>
+        </p:txBody>
+      </p:sp>
+      <p:sp>
+        <p:nvSpPr>
+          <p:cNvPr id="19" name="TextBox 18"/>
+          <p:cNvSpPr txBox="1"/>
+          <p:nvPr/>
+        </p:nvSpPr>
+        <p:spPr>
+          <a:xfrm>
+            <a:off x="4956048" y="4480560"/>
+            <a:ext cx="1920240" cy="365760"/>
+          </a:xfrm>
+          <a:prstGeom prst="rect">
+            <a:avLst/>
+          </a:prstGeom>
+          <a:noFill/>
+        </p:spPr>
+        <p:txBody>
+          <a:bodyPr wrap="square" anchor="t" lIns="45720" rIns="45720" tIns="27432" bIns="27432">
+            <a:spAutoFit/>
+          </a:bodyPr>
+          <a:lstStyle/>
+          <a:p>
+            <a:pPr algn="l"/>
+            <a:r>
+              <a:rPr sz="1050" b="0">
+                <a:solidFill>
+                  <a:srgbClr val="5B6573"/>
+                </a:solidFill>
+                <a:latin typeface="Microsoft JhengHei"/>
+              </a:rPr>
+              <a:t>逐條比對＋知識庫</a:t>
+            </a:r>
+          </a:p>
+        </p:txBody>
+      </p:sp>
+      <p:sp>
+        <p:nvSpPr>
+          <p:cNvPr id="20" name="Rounded Rectangle 19"/>
+          <p:cNvSpPr/>
+          <p:nvPr/>
+        </p:nvSpPr>
+        <p:spPr>
+          <a:xfrm>
+            <a:off x="7086600" y="4023360"/>
+            <a:ext cx="2103120" cy="914400"/>
+          </a:xfrm>
+          <a:prstGeom prst="roundRect">
+            <a:avLst>
+              <a:gd name="adj" fmla="val 8000"/>
+            </a:avLst>
+          </a:prstGeom>
+          <a:solidFill>
+            <a:srgbClr val="F4F6F9"/>
+          </a:solidFill>
+          <a:ln>
+            <a:noFill/>
+          </a:ln>
+          <a:effectLst/>
+        </p:spPr>
+        <p:style>
+          <a:lnRef idx="1">
+            <a:schemeClr val="accent1"/>
+          </a:lnRef>
+          <a:fillRef idx="3">
+            <a:schemeClr val="accent1"/>
+          </a:fillRef>
+          <a:effectRef idx="2">
+            <a:schemeClr val="accent1"/>
+          </a:effectRef>
+          <a:fontRef idx="minor">
+            <a:schemeClr val="lt1"/>
+          </a:fontRef>
+        </p:style>
+        <p:txBody>
+          <a:bodyPr rtlCol="0" anchor="ctr"/>
+          <a:lstStyle/>
+          <a:p>
+            <a:pPr algn="ctr"/>
+          </a:p>
+        </p:txBody>
+      </p:sp>
+      <p:sp>
+        <p:nvSpPr>
+          <p:cNvPr id="21" name="TextBox 20"/>
+          <p:cNvSpPr txBox="1"/>
+          <p:nvPr/>
+        </p:nvSpPr>
+        <p:spPr>
+          <a:xfrm>
+            <a:off x="7196328" y="4050791"/>
+            <a:ext cx="1920240" cy="457200"/>
+          </a:xfrm>
+          <a:prstGeom prst="rect">
+            <a:avLst/>
+          </a:prstGeom>
+          <a:noFill/>
+        </p:spPr>
+        <p:txBody>
+          <a:bodyPr wrap="square" anchor="t" lIns="45720" rIns="45720" tIns="27432" bIns="27432">
+            <a:spAutoFit/>
+          </a:bodyPr>
+          <a:lstStyle/>
+          <a:p>
+            <a:pPr algn="l"/>
+            <a:r>
+              <a:rPr sz="1400" b="1">
+                <a:solidFill>
+                  <a:srgbClr val="16304F"/>
+                </a:solidFill>
+                <a:latin typeface="Microsoft JhengHei"/>
+              </a:rPr>
+              <a:t>判解 19・函釋 10</a:t>
+            </a:r>
+          </a:p>
+        </p:txBody>
+      </p:sp>
+      <p:sp>
+        <p:nvSpPr>
+          <p:cNvPr id="22" name="TextBox 21"/>
+          <p:cNvSpPr txBox="1"/>
+          <p:nvPr/>
+        </p:nvSpPr>
+        <p:spPr>
+          <a:xfrm>
+            <a:off x="7196328" y="4480560"/>
+            <a:ext cx="1920240" cy="365760"/>
+          </a:xfrm>
+          <a:prstGeom prst="rect">
+            <a:avLst/>
+          </a:prstGeom>
+          <a:noFill/>
+        </p:spPr>
+        <p:txBody>
+          <a:bodyPr wrap="square" anchor="t" lIns="45720" rIns="45720" tIns="27432" bIns="27432">
+            <a:spAutoFit/>
+          </a:bodyPr>
+          <a:lstStyle/>
+          <a:p>
+            <a:pPr algn="l"/>
+            <a:r>
+              <a:rPr sz="1050" b="0">
+                <a:solidFill>
+                  <a:srgbClr val="5B6573"/>
+                </a:solidFill>
+                <a:latin typeface="Microsoft JhengHei"/>
+              </a:rPr>
+              <a:t>進知識庫並標註類型</a:t>
+            </a:r>
+          </a:p>
+        </p:txBody>
+      </p:sp>
+      <p:sp>
+        <p:nvSpPr>
+          <p:cNvPr id="23" name="Rounded Rectangle 22"/>
+          <p:cNvSpPr/>
+          <p:nvPr/>
+        </p:nvSpPr>
+        <p:spPr>
+          <a:xfrm>
+            <a:off x="9326880" y="4023360"/>
+            <a:ext cx="2103120" cy="914400"/>
+          </a:xfrm>
+          <a:prstGeom prst="roundRect">
+            <a:avLst>
+              <a:gd name="adj" fmla="val 8000"/>
+            </a:avLst>
+          </a:prstGeom>
+          <a:solidFill>
+            <a:srgbClr val="F4F6F9"/>
+          </a:solidFill>
+          <a:ln>
+            <a:noFill/>
+          </a:ln>
+          <a:effectLst/>
+        </p:spPr>
+        <p:style>
+          <a:lnRef idx="1">
+            <a:schemeClr val="accent1"/>
+          </a:lnRef>
+          <a:fillRef idx="3">
+            <a:schemeClr val="accent1"/>
+          </a:fillRef>
+          <a:effectRef idx="2">
+            <a:schemeClr val="accent1"/>
+          </a:effectRef>
+          <a:fontRef idx="minor">
+            <a:schemeClr val="lt1"/>
+          </a:fontRef>
+        </p:style>
+        <p:txBody>
+          <a:bodyPr rtlCol="0" anchor="ctr"/>
+          <a:lstStyle/>
+          <a:p>
+            <a:pPr algn="ctr"/>
+          </a:p>
+        </p:txBody>
+      </p:sp>
+      <p:sp>
+        <p:nvSpPr>
+          <p:cNvPr id="24" name="TextBox 23"/>
+          <p:cNvSpPr txBox="1"/>
+          <p:nvPr/>
+        </p:nvSpPr>
+        <p:spPr>
+          <a:xfrm>
+            <a:off x="9436607" y="4050791"/>
+            <a:ext cx="1920240" cy="457200"/>
+          </a:xfrm>
+          <a:prstGeom prst="rect">
+            <a:avLst/>
+          </a:prstGeom>
+          <a:noFill/>
+        </p:spPr>
+        <p:txBody>
+          <a:bodyPr wrap="square" anchor="t" lIns="45720" rIns="45720" tIns="27432" bIns="27432">
+            <a:spAutoFit/>
+          </a:bodyPr>
+          <a:lstStyle/>
+          <a:p>
+            <a:pPr algn="l"/>
+            <a:r>
+              <a:rPr sz="1400" b="1">
+                <a:solidFill>
+                  <a:srgbClr val="16304F"/>
+                </a:solidFill>
+                <a:latin typeface="Microsoft JhengHei"/>
+              </a:rPr>
+              <a:t>自行補 3 個缺口</a:t>
+            </a:r>
+          </a:p>
+        </p:txBody>
+      </p:sp>
+      <p:sp>
+        <p:nvSpPr>
+          <p:cNvPr id="25" name="TextBox 24"/>
+          <p:cNvSpPr txBox="1"/>
+          <p:nvPr/>
+        </p:nvSpPr>
+        <p:spPr>
+          <a:xfrm>
+            <a:off x="9436607" y="4480560"/>
+            <a:ext cx="1920240" cy="365760"/>
+          </a:xfrm>
+          <a:prstGeom prst="rect">
+            <a:avLst/>
+          </a:prstGeom>
+          <a:noFill/>
+        </p:spPr>
+        <p:txBody>
+          <a:bodyPr wrap="square" anchor="t" lIns="45720" rIns="45720" tIns="27432" bIns="27432">
+            <a:spAutoFit/>
+          </a:bodyPr>
+          <a:lstStyle/>
+          <a:p>
+            <a:pPr algn="l"/>
+            <a:r>
+              <a:rPr sz="1050" b="0">
+                <a:solidFill>
+                  <a:srgbClr val="5B6573"/>
+                </a:solidFill>
+                <a:latin typeface="Microsoft JhengHei"/>
+              </a:rPr>
+              <a:t>政資法・洗錢判準・空污</a:t>
             </a:r>
           </a:p>
         </p:txBody>
@@ -10392,7 +12362,7 @@
                 </a:solidFill>
                 <a:latin typeface="Microsoft JhengHei"/>
               </a:rPr>
-              <a:t>08 ／ 完成度與評分</a:t>
+              <a:t>08 ／ 資料應用</a:t>
             </a:r>
           </a:p>
         </p:txBody>
@@ -10427,7 +12397,7 @@
                 </a:solidFill>
                 <a:latin typeface="Microsoft JhengHei"/>
               </a:rPr>
-              <a:t>今天做到哪裡</a:t>
+              <a:t>拿不到答辯書和卷宗，就自己出三套考題</a:t>
             </a:r>
           </a:p>
         </p:txBody>
@@ -10541,27 +12511,147 @@
                 </a:solidFill>
                 <a:latin typeface="Microsoft JhengHei"/>
               </a:rPr>
-              <a:t>9 / 10</a:t>
-            </a:r>
-          </a:p>
-        </p:txBody>
-      </p:sp>
-      <p:sp>
-        <p:nvSpPr>
-          <p:cNvPr id="9" name="Oval 8"/>
+              <a:t>9 / 11</a:t>
+            </a:r>
+          </a:p>
+        </p:txBody>
+      </p:sp>
+      <p:sp>
+        <p:nvSpPr>
+          <p:cNvPr id="9" name="Rounded Rectangle 8"/>
           <p:cNvSpPr/>
           <p:nvPr/>
         </p:nvSpPr>
         <p:spPr>
           <a:xfrm>
-            <a:off x="640080" y="1691639"/>
-            <a:ext cx="228600" cy="228600"/>
-          </a:xfrm>
-          <a:prstGeom prst="ellipse">
-            <a:avLst/>
+            <a:off x="640080" y="1554480"/>
+            <a:ext cx="3520440" cy="3840480"/>
+          </a:xfrm>
+          <a:prstGeom prst="roundRect">
+            <a:avLst>
+              <a:gd name="adj" fmla="val 8000"/>
+            </a:avLst>
           </a:prstGeom>
           <a:solidFill>
-            <a:srgbClr val="2E7D32"/>
+            <a:srgbClr val="FFFFFF"/>
+          </a:solidFill>
+          <a:ln w="19050">
+            <a:solidFill>
+              <a:srgbClr val="DDE3EA"/>
+            </a:solidFill>
+          </a:ln>
+          <a:effectLst/>
+        </p:spPr>
+        <p:style>
+          <a:lnRef idx="1">
+            <a:schemeClr val="accent1"/>
+          </a:lnRef>
+          <a:fillRef idx="3">
+            <a:schemeClr val="accent1"/>
+          </a:fillRef>
+          <a:effectRef idx="2">
+            <a:schemeClr val="accent1"/>
+          </a:effectRef>
+          <a:fontRef idx="minor">
+            <a:schemeClr val="lt1"/>
+          </a:fontRef>
+        </p:style>
+        <p:txBody>
+          <a:bodyPr rtlCol="0" anchor="ctr"/>
+          <a:lstStyle/>
+          <a:p>
+            <a:pPr algn="ctr"/>
+          </a:p>
+        </p:txBody>
+      </p:sp>
+      <p:sp>
+        <p:nvSpPr>
+          <p:cNvPr id="10" name="TextBox 9"/>
+          <p:cNvSpPr txBox="1"/>
+          <p:nvPr/>
+        </p:nvSpPr>
+        <p:spPr>
+          <a:xfrm>
+            <a:off x="841247" y="1691640"/>
+            <a:ext cx="3108960" cy="320040"/>
+          </a:xfrm>
+          <a:prstGeom prst="rect">
+            <a:avLst/>
+          </a:prstGeom>
+          <a:noFill/>
+        </p:spPr>
+        <p:txBody>
+          <a:bodyPr wrap="square" anchor="t" lIns="45720" rIns="45720" tIns="27432" bIns="27432">
+            <a:spAutoFit/>
+          </a:bodyPr>
+          <a:lstStyle/>
+          <a:p>
+            <a:pPr algn="l"/>
+            <a:r>
+              <a:rPr sz="1050" b="1">
+                <a:solidFill>
+                  <a:srgbClr val="D98E04"/>
+                </a:solidFill>
+                <a:latin typeface="Microsoft JhengHei"/>
+              </a:rPr>
+              <a:t>CASE 01 ／ 建築法</a:t>
+            </a:r>
+          </a:p>
+        </p:txBody>
+      </p:sp>
+      <p:sp>
+        <p:nvSpPr>
+          <p:cNvPr id="11" name="TextBox 10"/>
+          <p:cNvSpPr txBox="1"/>
+          <p:nvPr/>
+        </p:nvSpPr>
+        <p:spPr>
+          <a:xfrm>
+            <a:off x="841247" y="2011680"/>
+            <a:ext cx="3108960" cy="502920"/>
+          </a:xfrm>
+          <a:prstGeom prst="rect">
+            <a:avLst/>
+          </a:prstGeom>
+          <a:noFill/>
+        </p:spPr>
+        <p:txBody>
+          <a:bodyPr wrap="square" anchor="t" lIns="45720" rIns="45720" tIns="27432" bIns="27432">
+            <a:spAutoFit/>
+          </a:bodyPr>
+          <a:lstStyle/>
+          <a:p>
+            <a:pPr algn="l"/>
+            <a:r>
+              <a:rPr sz="2000" b="1">
+                <a:solidFill>
+                  <a:srgbClr val="16304F"/>
+                </a:solidFill>
+                <a:latin typeface="Microsoft JhengHei"/>
+              </a:rPr>
+              <a:t>訴願人遲了 7 天</a:t>
+            </a:r>
+          </a:p>
+        </p:txBody>
+      </p:sp>
+      <p:sp>
+        <p:nvSpPr>
+          <p:cNvPr id="12" name="Rounded Rectangle 11"/>
+          <p:cNvSpPr/>
+          <p:nvPr/>
+        </p:nvSpPr>
+        <p:spPr>
+          <a:xfrm>
+            <a:off x="841247" y="2606040"/>
+            <a:ext cx="1188720" cy="411480"/>
+          </a:xfrm>
+          <a:prstGeom prst="roundRect">
+            <a:avLst>
+              <a:gd name="adj" fmla="val 8000"/>
+            </a:avLst>
+          </a:prstGeom>
+          <a:solidFill>
+            <a:srgbClr val="16304F"/>
           </a:solidFill>
           <a:ln>
             <a:noFill/>
@@ -10583,32 +12673,23 @@
           </a:fontRef>
         </p:style>
         <p:txBody>
-          <a:bodyPr rtlCol="0" anchor="ctr" lIns="0" rIns="0" tIns="0" bIns="0"/>
-          <a:lstStyle/>
-          <a:p>
-            <a:pPr algn="ctr"/>
-            <a:r>
-              <a:rPr sz="1300" b="1">
-                <a:solidFill>
-                  <a:srgbClr val="FFFFFF"/>
-                </a:solidFill>
-                <a:latin typeface="Microsoft JhengHei"/>
-              </a:rPr>
-              <a:t/>
-            </a:r>
-          </a:p>
-        </p:txBody>
-      </p:sp>
-      <p:sp>
-        <p:nvSpPr>
-          <p:cNvPr id="10" name="TextBox 9"/>
+          <a:bodyPr rtlCol="0" anchor="ctr"/>
+          <a:lstStyle/>
+          <a:p>
+            <a:pPr algn="ctr"/>
+          </a:p>
+        </p:txBody>
+      </p:sp>
+      <p:sp>
+        <p:nvSpPr>
+          <p:cNvPr id="13" name="TextBox 12"/>
           <p:cNvSpPr txBox="1"/>
           <p:nvPr/>
         </p:nvSpPr>
         <p:spPr>
           <a:xfrm>
-            <a:off x="1005840" y="1554480"/>
-            <a:ext cx="4389120" cy="502920"/>
+            <a:off x="841247" y="2606040"/>
+            <a:ext cx="1188720" cy="411480"/>
           </a:xfrm>
           <a:prstGeom prst="rect">
             <a:avLst/>
@@ -10621,35 +12702,190 @@
           </a:bodyPr>
           <a:lstStyle/>
           <a:p>
+            <a:pPr algn="ctr"/>
+            <a:r>
+              <a:rPr sz="1500" b="1">
+                <a:solidFill>
+                  <a:srgbClr val="FFFFFF"/>
+                </a:solidFill>
+                <a:latin typeface="Microsoft JhengHei"/>
+              </a:rPr>
+              <a:t>不受理</a:t>
+            </a:r>
+          </a:p>
+        </p:txBody>
+      </p:sp>
+      <p:sp>
+        <p:nvSpPr>
+          <p:cNvPr id="14" name="TextBox 13"/>
+          <p:cNvSpPr txBox="1"/>
+          <p:nvPr/>
+        </p:nvSpPr>
+        <p:spPr>
+          <a:xfrm>
+            <a:off x="841247" y="3154680"/>
+            <a:ext cx="3108960" cy="2103120"/>
+          </a:xfrm>
+          <a:prstGeom prst="rect">
+            <a:avLst/>
+          </a:prstGeom>
+          <a:noFill/>
+        </p:spPr>
+        <p:txBody>
+          <a:bodyPr wrap="square" anchor="t" lIns="45720" rIns="45720" tIns="27432" bIns="27432">
+            <a:spAutoFit/>
+          </a:bodyPr>
+          <a:lstStyle/>
+          <a:p>
             <a:pPr algn="l"/>
             <a:r>
-              <a:rPr sz="1500" b="0">
+              <a:rPr sz="1350" b="0">
+                <a:solidFill>
+                  <a:srgbClr val="334455"/>
+                </a:solidFill>
+                <a:latin typeface="Microsoft JhengHei"/>
+              </a:rPr>
+              <a:t>卷宗塞滿實質理由和照片當干擾；正確答案仍是程序不受理，不能寫任何實質認定。</a:t>
+            </a:r>
+          </a:p>
+        </p:txBody>
+      </p:sp>
+      <p:sp>
+        <p:nvSpPr>
+          <p:cNvPr id="15" name="Rounded Rectangle 14"/>
+          <p:cNvSpPr/>
+          <p:nvPr/>
+        </p:nvSpPr>
+        <p:spPr>
+          <a:xfrm>
+            <a:off x="4325112" y="1554480"/>
+            <a:ext cx="3520440" cy="3840480"/>
+          </a:xfrm>
+          <a:prstGeom prst="roundRect">
+            <a:avLst>
+              <a:gd name="adj" fmla="val 8000"/>
+            </a:avLst>
+          </a:prstGeom>
+          <a:solidFill>
+            <a:srgbClr val="FFFFFF"/>
+          </a:solidFill>
+          <a:ln w="19050">
+            <a:solidFill>
+              <a:srgbClr val="DDE3EA"/>
+            </a:solidFill>
+          </a:ln>
+          <a:effectLst/>
+        </p:spPr>
+        <p:style>
+          <a:lnRef idx="1">
+            <a:schemeClr val="accent1"/>
+          </a:lnRef>
+          <a:fillRef idx="3">
+            <a:schemeClr val="accent1"/>
+          </a:fillRef>
+          <a:effectRef idx="2">
+            <a:schemeClr val="accent1"/>
+          </a:effectRef>
+          <a:fontRef idx="minor">
+            <a:schemeClr val="lt1"/>
+          </a:fontRef>
+        </p:style>
+        <p:txBody>
+          <a:bodyPr rtlCol="0" anchor="ctr"/>
+          <a:lstStyle/>
+          <a:p>
+            <a:pPr algn="ctr"/>
+          </a:p>
+        </p:txBody>
+      </p:sp>
+      <p:sp>
+        <p:nvSpPr>
+          <p:cNvPr id="16" name="TextBox 15"/>
+          <p:cNvSpPr txBox="1"/>
+          <p:nvPr/>
+        </p:nvSpPr>
+        <p:spPr>
+          <a:xfrm>
+            <a:off x="4526280" y="1691640"/>
+            <a:ext cx="3108960" cy="320040"/>
+          </a:xfrm>
+          <a:prstGeom prst="rect">
+            <a:avLst/>
+          </a:prstGeom>
+          <a:noFill/>
+        </p:spPr>
+        <p:txBody>
+          <a:bodyPr wrap="square" anchor="t" lIns="45720" rIns="45720" tIns="27432" bIns="27432">
+            <a:spAutoFit/>
+          </a:bodyPr>
+          <a:lstStyle/>
+          <a:p>
+            <a:pPr algn="l"/>
+            <a:r>
+              <a:rPr sz="1050" b="1">
+                <a:solidFill>
+                  <a:srgbClr val="D98E04"/>
+                </a:solidFill>
+                <a:latin typeface="Microsoft JhengHei"/>
+              </a:rPr>
+              <a:t>CASE 02 ／ 廢清法</a:t>
+            </a:r>
+          </a:p>
+        </p:txBody>
+      </p:sp>
+      <p:sp>
+        <p:nvSpPr>
+          <p:cNvPr id="17" name="TextBox 16"/>
+          <p:cNvSpPr txBox="1"/>
+          <p:nvPr/>
+        </p:nvSpPr>
+        <p:spPr>
+          <a:xfrm>
+            <a:off x="4526280" y="2011680"/>
+            <a:ext cx="3108960" cy="502920"/>
+          </a:xfrm>
+          <a:prstGeom prst="rect">
+            <a:avLst/>
+          </a:prstGeom>
+          <a:noFill/>
+        </p:spPr>
+        <p:txBody>
+          <a:bodyPr wrap="square" anchor="t" lIns="45720" rIns="45720" tIns="27432" bIns="27432">
+            <a:spAutoFit/>
+          </a:bodyPr>
+          <a:lstStyle/>
+          <a:p>
+            <a:pPr algn="l"/>
+            <a:r>
+              <a:rPr sz="2000" b="1">
                 <a:solidFill>
                   <a:srgbClr val="16304F"/>
                 </a:solidFill>
                 <a:latin typeface="Microsoft JhengHei"/>
               </a:rPr>
-              <a:t>卷證分類</a:t>
-            </a:r>
-          </a:p>
-        </p:txBody>
-      </p:sp>
-      <p:sp>
-        <p:nvSpPr>
-          <p:cNvPr id="11" name="Rectangle 10"/>
+              <a:t>亂丟煙蒂，說沒丟</a:t>
+            </a:r>
+          </a:p>
+        </p:txBody>
+      </p:sp>
+      <p:sp>
+        <p:nvSpPr>
+          <p:cNvPr id="18" name="Rounded Rectangle 17"/>
           <p:cNvSpPr/>
           <p:nvPr/>
         </p:nvSpPr>
         <p:spPr>
           <a:xfrm>
-            <a:off x="640080" y="2029967"/>
-            <a:ext cx="4754880" cy="9144"/>
-          </a:xfrm>
-          <a:prstGeom prst="rect">
-            <a:avLst/>
+            <a:off x="4526280" y="2606040"/>
+            <a:ext cx="1188720" cy="411480"/>
+          </a:xfrm>
+          <a:prstGeom prst="roundRect">
+            <a:avLst>
+              <a:gd name="adj" fmla="val 8000"/>
+            </a:avLst>
           </a:prstGeom>
           <a:solidFill>
-            <a:srgbClr val="E6EAF0"/>
+            <a:srgbClr val="16304F"/>
           </a:solidFill>
           <a:ln>
             <a:noFill/>
@@ -10680,20 +12916,210 @@
       </p:sp>
       <p:sp>
         <p:nvSpPr>
-          <p:cNvPr id="12" name="Oval 11"/>
+          <p:cNvPr id="19" name="TextBox 18"/>
+          <p:cNvSpPr txBox="1"/>
+          <p:nvPr/>
+        </p:nvSpPr>
+        <p:spPr>
+          <a:xfrm>
+            <a:off x="4526280" y="2606040"/>
+            <a:ext cx="1188720" cy="411480"/>
+          </a:xfrm>
+          <a:prstGeom prst="rect">
+            <a:avLst/>
+          </a:prstGeom>
+          <a:noFill/>
+        </p:spPr>
+        <p:txBody>
+          <a:bodyPr wrap="square" anchor="ctr" lIns="45720" rIns="45720" tIns="27432" bIns="27432">
+            <a:spAutoFit/>
+          </a:bodyPr>
+          <a:lstStyle/>
+          <a:p>
+            <a:pPr algn="ctr"/>
+            <a:r>
+              <a:rPr sz="1500" b="1">
+                <a:solidFill>
+                  <a:srgbClr val="FFFFFF"/>
+                </a:solidFill>
+                <a:latin typeface="Microsoft JhengHei"/>
+              </a:rPr>
+              <a:t>駁回</a:t>
+            </a:r>
+          </a:p>
+        </p:txBody>
+      </p:sp>
+      <p:sp>
+        <p:nvSpPr>
+          <p:cNvPr id="20" name="TextBox 19"/>
+          <p:cNvSpPr txBox="1"/>
+          <p:nvPr/>
+        </p:nvSpPr>
+        <p:spPr>
+          <a:xfrm>
+            <a:off x="4526280" y="3154680"/>
+            <a:ext cx="3108960" cy="2103120"/>
+          </a:xfrm>
+          <a:prstGeom prst="rect">
+            <a:avLst/>
+          </a:prstGeom>
+          <a:noFill/>
+        </p:spPr>
+        <p:txBody>
+          <a:bodyPr wrap="square" anchor="t" lIns="45720" rIns="45720" tIns="27432" bIns="27432">
+            <a:spAutoFit/>
+          </a:bodyPr>
+          <a:lstStyle/>
+          <a:p>
+            <a:pPr algn="l"/>
+            <a:r>
+              <a:rPr sz="1350" b="0">
+                <a:solidFill>
+                  <a:srgbClr val="334455"/>
+                </a:solidFill>
+                <a:latin typeface="Microsoft JhengHei"/>
+              </a:rPr>
+              <a:t>影片 00:14 拋擲、00:19 煙蒂還在；訴願書寫的收受日和送達證書差 2 天，要以證書為準。</a:t>
+            </a:r>
+          </a:p>
+        </p:txBody>
+      </p:sp>
+      <p:sp>
+        <p:nvSpPr>
+          <p:cNvPr id="21" name="Rounded Rectangle 20"/>
           <p:cNvSpPr/>
           <p:nvPr/>
         </p:nvSpPr>
         <p:spPr>
           <a:xfrm>
-            <a:off x="640080" y="2194560"/>
-            <a:ext cx="228600" cy="228600"/>
-          </a:xfrm>
-          <a:prstGeom prst="ellipse">
-            <a:avLst/>
+            <a:off x="8010144" y="1554480"/>
+            <a:ext cx="3520440" cy="3840480"/>
+          </a:xfrm>
+          <a:prstGeom prst="roundRect">
+            <a:avLst>
+              <a:gd name="adj" fmla="val 8000"/>
+            </a:avLst>
           </a:prstGeom>
           <a:solidFill>
-            <a:srgbClr val="2E7D32"/>
+            <a:srgbClr val="FFFFFF"/>
+          </a:solidFill>
+          <a:ln w="19050">
+            <a:solidFill>
+              <a:srgbClr val="DDE3EA"/>
+            </a:solidFill>
+          </a:ln>
+          <a:effectLst/>
+        </p:spPr>
+        <p:style>
+          <a:lnRef idx="1">
+            <a:schemeClr val="accent1"/>
+          </a:lnRef>
+          <a:fillRef idx="3">
+            <a:schemeClr val="accent1"/>
+          </a:fillRef>
+          <a:effectRef idx="2">
+            <a:schemeClr val="accent1"/>
+          </a:effectRef>
+          <a:fontRef idx="minor">
+            <a:schemeClr val="lt1"/>
+          </a:fontRef>
+        </p:style>
+        <p:txBody>
+          <a:bodyPr rtlCol="0" anchor="ctr"/>
+          <a:lstStyle/>
+          <a:p>
+            <a:pPr algn="ctr"/>
+          </a:p>
+        </p:txBody>
+      </p:sp>
+      <p:sp>
+        <p:nvSpPr>
+          <p:cNvPr id="22" name="TextBox 21"/>
+          <p:cNvSpPr txBox="1"/>
+          <p:nvPr/>
+        </p:nvSpPr>
+        <p:spPr>
+          <a:xfrm>
+            <a:off x="8211312" y="1691640"/>
+            <a:ext cx="3108960" cy="320040"/>
+          </a:xfrm>
+          <a:prstGeom prst="rect">
+            <a:avLst/>
+          </a:prstGeom>
+          <a:noFill/>
+        </p:spPr>
+        <p:txBody>
+          <a:bodyPr wrap="square" anchor="t" lIns="45720" rIns="45720" tIns="27432" bIns="27432">
+            <a:spAutoFit/>
+          </a:bodyPr>
+          <a:lstStyle/>
+          <a:p>
+            <a:pPr algn="l"/>
+            <a:r>
+              <a:rPr sz="1050" b="1">
+                <a:solidFill>
+                  <a:srgbClr val="D98E04"/>
+                </a:solidFill>
+                <a:latin typeface="Microsoft JhengHei"/>
+              </a:rPr>
+              <a:t>CASE 03 ／ 建築法</a:t>
+            </a:r>
+          </a:p>
+        </p:txBody>
+      </p:sp>
+      <p:sp>
+        <p:nvSpPr>
+          <p:cNvPr id="23" name="TextBox 22"/>
+          <p:cNvSpPr txBox="1"/>
+          <p:nvPr/>
+        </p:nvSpPr>
+        <p:spPr>
+          <a:xfrm>
+            <a:off x="8211312" y="2011680"/>
+            <a:ext cx="3108960" cy="502920"/>
+          </a:xfrm>
+          <a:prstGeom prst="rect">
+            <a:avLst/>
+          </a:prstGeom>
+          <a:noFill/>
+        </p:spPr>
+        <p:txBody>
+          <a:bodyPr wrap="square" anchor="t" lIns="45720" rIns="45720" tIns="27432" bIns="27432">
+            <a:spAutoFit/>
+          </a:bodyPr>
+          <a:lstStyle/>
+          <a:p>
+            <a:pPr algn="l"/>
+            <a:r>
+              <a:rPr sz="2000" b="1">
+                <a:solidFill>
+                  <a:srgbClr val="16304F"/>
+                </a:solidFill>
+                <a:latin typeface="Microsoft JhengHei"/>
+              </a:rPr>
+              <a:t>政府遲了 26 天才罰</a:t>
+            </a:r>
+          </a:p>
+        </p:txBody>
+      </p:sp>
+      <p:sp>
+        <p:nvSpPr>
+          <p:cNvPr id="24" name="Rounded Rectangle 23"/>
+          <p:cNvSpPr/>
+          <p:nvPr/>
+        </p:nvSpPr>
+        <p:spPr>
+          <a:xfrm>
+            <a:off x="8211312" y="2606040"/>
+            <a:ext cx="1188720" cy="411480"/>
+          </a:xfrm>
+          <a:prstGeom prst="roundRect">
+            <a:avLst>
+              <a:gd name="adj" fmla="val 8000"/>
+            </a:avLst>
+          </a:prstGeom>
+          <a:solidFill>
+            <a:srgbClr val="16304F"/>
           </a:solidFill>
           <a:ln>
             <a:noFill/>
@@ -10715,32 +13141,23 @@
           </a:fontRef>
         </p:style>
         <p:txBody>
-          <a:bodyPr rtlCol="0" anchor="ctr" lIns="0" rIns="0" tIns="0" bIns="0"/>
-          <a:lstStyle/>
-          <a:p>
-            <a:pPr algn="ctr"/>
-            <a:r>
-              <a:rPr sz="1300" b="1">
-                <a:solidFill>
-                  <a:srgbClr val="FFFFFF"/>
-                </a:solidFill>
-                <a:latin typeface="Microsoft JhengHei"/>
-              </a:rPr>
-              <a:t/>
-            </a:r>
-          </a:p>
-        </p:txBody>
-      </p:sp>
-      <p:sp>
-        <p:nvSpPr>
-          <p:cNvPr id="13" name="TextBox 12"/>
+          <a:bodyPr rtlCol="0" anchor="ctr"/>
+          <a:lstStyle/>
+          <a:p>
+            <a:pPr algn="ctr"/>
+          </a:p>
+        </p:txBody>
+      </p:sp>
+      <p:sp>
+        <p:nvSpPr>
+          <p:cNvPr id="25" name="TextBox 24"/>
           <p:cNvSpPr txBox="1"/>
           <p:nvPr/>
         </p:nvSpPr>
         <p:spPr>
           <a:xfrm>
-            <a:off x="1005840" y="2057400"/>
-            <a:ext cx="4389120" cy="502920"/>
+            <a:off x="8211312" y="2606040"/>
+            <a:ext cx="1188720" cy="411480"/>
           </a:xfrm>
           <a:prstGeom prst="rect">
             <a:avLst/>
@@ -10753,35 +13170,70 @@
           </a:bodyPr>
           <a:lstStyle/>
           <a:p>
+            <a:pPr algn="ctr"/>
+            <a:r>
+              <a:rPr sz="1500" b="1">
+                <a:solidFill>
+                  <a:srgbClr val="FFFFFF"/>
+                </a:solidFill>
+                <a:latin typeface="Microsoft JhengHei"/>
+              </a:rPr>
+              <a:t>撤銷</a:t>
+            </a:r>
+          </a:p>
+        </p:txBody>
+      </p:sp>
+      <p:sp>
+        <p:nvSpPr>
+          <p:cNvPr id="26" name="TextBox 25"/>
+          <p:cNvSpPr txBox="1"/>
+          <p:nvPr/>
+        </p:nvSpPr>
+        <p:spPr>
+          <a:xfrm>
+            <a:off x="8211312" y="3154680"/>
+            <a:ext cx="3108960" cy="2103120"/>
+          </a:xfrm>
+          <a:prstGeom prst="rect">
+            <a:avLst/>
+          </a:prstGeom>
+          <a:noFill/>
+        </p:spPr>
+        <p:txBody>
+          <a:bodyPr wrap="square" anchor="t" lIns="45720" rIns="45720" tIns="27432" bIns="27432">
+            <a:spAutoFit/>
+          </a:bodyPr>
+          <a:lstStyle/>
+          <a:p>
             <a:pPr algn="l"/>
             <a:r>
-              <a:rPr sz="1500" b="0">
-                <a:solidFill>
-                  <a:srgbClr val="16304F"/>
-                </a:solidFill>
-                <a:latin typeface="Microsoft JhengHei"/>
-              </a:rPr>
-              <a:t>五項分析</a:t>
-            </a:r>
-          </a:p>
-        </p:txBody>
-      </p:sp>
-      <p:sp>
-        <p:nvSpPr>
-          <p:cNvPr id="14" name="Rectangle 13"/>
+              <a:rPr sz="1350" b="0">
+                <a:solidFill>
+                  <a:srgbClr val="334455"/>
+                </a:solidFill>
+                <a:latin typeface="Microsoft JhengHei"/>
+              </a:rPr>
+              <a:t>簽證不實證據很強，但三年裁處權時效已過；答辯書迴避不答，系統必須自行從卷內算出時效。</a:t>
+            </a:r>
+          </a:p>
+        </p:txBody>
+      </p:sp>
+      <p:sp>
+        <p:nvSpPr>
+          <p:cNvPr id="27" name="Rectangle 26"/>
           <p:cNvSpPr/>
           <p:nvPr/>
         </p:nvSpPr>
         <p:spPr>
           <a:xfrm>
-            <a:off x="640080" y="2532888"/>
-            <a:ext cx="4754880" cy="9144"/>
+            <a:off x="640080" y="5623560"/>
+            <a:ext cx="10908792" cy="566928"/>
           </a:xfrm>
           <a:prstGeom prst="rect">
             <a:avLst/>
           </a:prstGeom>
           <a:solidFill>
-            <a:srgbClr val="E6EAF0"/>
+            <a:srgbClr val="FFF8EA"/>
           </a:solidFill>
           <a:ln>
             <a:noFill/>
@@ -10812,544 +13264,16 @@
       </p:sp>
       <p:sp>
         <p:nvSpPr>
-          <p:cNvPr id="15" name="Oval 14"/>
+          <p:cNvPr id="28" name="Rectangle 27"/>
           <p:cNvSpPr/>
           <p:nvPr/>
         </p:nvSpPr>
         <p:spPr>
           <a:xfrm>
-            <a:off x="640080" y="2697479"/>
-            <a:ext cx="228600" cy="228600"/>
-          </a:xfrm>
-          <a:prstGeom prst="ellipse">
-            <a:avLst/>
-          </a:prstGeom>
-          <a:solidFill>
-            <a:srgbClr val="2E7D32"/>
-          </a:solidFill>
-          <a:ln>
-            <a:noFill/>
-          </a:ln>
-          <a:effectLst/>
-        </p:spPr>
-        <p:style>
-          <a:lnRef idx="1">
-            <a:schemeClr val="accent1"/>
-          </a:lnRef>
-          <a:fillRef idx="3">
-            <a:schemeClr val="accent1"/>
-          </a:fillRef>
-          <a:effectRef idx="2">
-            <a:schemeClr val="accent1"/>
-          </a:effectRef>
-          <a:fontRef idx="minor">
-            <a:schemeClr val="lt1"/>
-          </a:fontRef>
-        </p:style>
-        <p:txBody>
-          <a:bodyPr rtlCol="0" anchor="ctr" lIns="0" rIns="0" tIns="0" bIns="0"/>
-          <a:lstStyle/>
-          <a:p>
-            <a:pPr algn="ctr"/>
-            <a:r>
-              <a:rPr sz="1300" b="1">
-                <a:solidFill>
-                  <a:srgbClr val="FFFFFF"/>
-                </a:solidFill>
-                <a:latin typeface="Microsoft JhengHei"/>
-              </a:rPr>
-              <a:t/>
-            </a:r>
-          </a:p>
-        </p:txBody>
-      </p:sp>
-      <p:sp>
-        <p:nvSpPr>
-          <p:cNvPr id="16" name="TextBox 15"/>
-          <p:cNvSpPr txBox="1"/>
-          <p:nvPr/>
-        </p:nvSpPr>
-        <p:spPr>
-          <a:xfrm>
-            <a:off x="1005840" y="2560320"/>
-            <a:ext cx="4389120" cy="502920"/>
-          </a:xfrm>
-          <a:prstGeom prst="rect">
-            <a:avLst/>
-          </a:prstGeom>
-          <a:noFill/>
-        </p:spPr>
-        <p:txBody>
-          <a:bodyPr wrap="square" anchor="ctr" lIns="45720" rIns="45720" tIns="27432" bIns="27432">
-            <a:spAutoFit/>
-          </a:bodyPr>
-          <a:lstStyle/>
-          <a:p>
-            <a:pPr algn="l"/>
-            <a:r>
-              <a:rPr sz="1500" b="0">
-                <a:solidFill>
-                  <a:srgbClr val="16304F"/>
-                </a:solidFill>
-                <a:latin typeface="Microsoft JhengHei"/>
-              </a:rPr>
-              <a:t>修正 → 確認 → 局部重算</a:t>
-            </a:r>
-          </a:p>
-        </p:txBody>
-      </p:sp>
-      <p:sp>
-        <p:nvSpPr>
-          <p:cNvPr id="17" name="Rectangle 16"/>
-          <p:cNvSpPr/>
-          <p:nvPr/>
-        </p:nvSpPr>
-        <p:spPr>
-          <a:xfrm>
-            <a:off x="640080" y="3035808"/>
-            <a:ext cx="4754880" cy="9144"/>
-          </a:xfrm>
-          <a:prstGeom prst="rect">
-            <a:avLst/>
-          </a:prstGeom>
-          <a:solidFill>
-            <a:srgbClr val="E6EAF0"/>
-          </a:solidFill>
-          <a:ln>
-            <a:noFill/>
-          </a:ln>
-          <a:effectLst/>
-        </p:spPr>
-        <p:style>
-          <a:lnRef idx="1">
-            <a:schemeClr val="accent1"/>
-          </a:lnRef>
-          <a:fillRef idx="3">
-            <a:schemeClr val="accent1"/>
-          </a:fillRef>
-          <a:effectRef idx="2">
-            <a:schemeClr val="accent1"/>
-          </a:effectRef>
-          <a:fontRef idx="minor">
-            <a:schemeClr val="lt1"/>
-          </a:fontRef>
-        </p:style>
-        <p:txBody>
-          <a:bodyPr rtlCol="0" anchor="ctr"/>
-          <a:lstStyle/>
-          <a:p>
-            <a:pPr algn="ctr"/>
-          </a:p>
-        </p:txBody>
-      </p:sp>
-      <p:sp>
-        <p:nvSpPr>
-          <p:cNvPr id="18" name="Oval 17"/>
-          <p:cNvSpPr/>
-          <p:nvPr/>
-        </p:nvSpPr>
-        <p:spPr>
-          <a:xfrm>
-            <a:off x="640080" y="3200400"/>
-            <a:ext cx="228600" cy="228600"/>
-          </a:xfrm>
-          <a:prstGeom prst="ellipse">
-            <a:avLst/>
-          </a:prstGeom>
-          <a:solidFill>
-            <a:srgbClr val="2E7D32"/>
-          </a:solidFill>
-          <a:ln>
-            <a:noFill/>
-          </a:ln>
-          <a:effectLst/>
-        </p:spPr>
-        <p:style>
-          <a:lnRef idx="1">
-            <a:schemeClr val="accent1"/>
-          </a:lnRef>
-          <a:fillRef idx="3">
-            <a:schemeClr val="accent1"/>
-          </a:fillRef>
-          <a:effectRef idx="2">
-            <a:schemeClr val="accent1"/>
-          </a:effectRef>
-          <a:fontRef idx="minor">
-            <a:schemeClr val="lt1"/>
-          </a:fontRef>
-        </p:style>
-        <p:txBody>
-          <a:bodyPr rtlCol="0" anchor="ctr" lIns="0" rIns="0" tIns="0" bIns="0"/>
-          <a:lstStyle/>
-          <a:p>
-            <a:pPr algn="ctr"/>
-            <a:r>
-              <a:rPr sz="1300" b="1">
-                <a:solidFill>
-                  <a:srgbClr val="FFFFFF"/>
-                </a:solidFill>
-                <a:latin typeface="Microsoft JhengHei"/>
-              </a:rPr>
-              <a:t/>
-            </a:r>
-          </a:p>
-        </p:txBody>
-      </p:sp>
-      <p:sp>
-        <p:nvSpPr>
-          <p:cNvPr id="19" name="TextBox 18"/>
-          <p:cNvSpPr txBox="1"/>
-          <p:nvPr/>
-        </p:nvSpPr>
-        <p:spPr>
-          <a:xfrm>
-            <a:off x="1005840" y="3063240"/>
-            <a:ext cx="4389120" cy="502920"/>
-          </a:xfrm>
-          <a:prstGeom prst="rect">
-            <a:avLst/>
-          </a:prstGeom>
-          <a:noFill/>
-        </p:spPr>
-        <p:txBody>
-          <a:bodyPr wrap="square" anchor="ctr" lIns="45720" rIns="45720" tIns="27432" bIns="27432">
-            <a:spAutoFit/>
-          </a:bodyPr>
-          <a:lstStyle/>
-          <a:p>
-            <a:pPr algn="l"/>
-            <a:r>
-              <a:rPr sz="1500" b="0">
-                <a:solidFill>
-                  <a:srgbClr val="16304F"/>
-                </a:solidFill>
-                <a:latin typeface="Microsoft JhengHei"/>
-              </a:rPr>
-              <a:t>法規庫同步</a:t>
-            </a:r>
-          </a:p>
-        </p:txBody>
-      </p:sp>
-      <p:sp>
-        <p:nvSpPr>
-          <p:cNvPr id="20" name="Rectangle 19"/>
-          <p:cNvSpPr/>
-          <p:nvPr/>
-        </p:nvSpPr>
-        <p:spPr>
-          <a:xfrm>
-            <a:off x="640080" y="3538728"/>
-            <a:ext cx="4754880" cy="9144"/>
-          </a:xfrm>
-          <a:prstGeom prst="rect">
-            <a:avLst/>
-          </a:prstGeom>
-          <a:solidFill>
-            <a:srgbClr val="E6EAF0"/>
-          </a:solidFill>
-          <a:ln>
-            <a:noFill/>
-          </a:ln>
-          <a:effectLst/>
-        </p:spPr>
-        <p:style>
-          <a:lnRef idx="1">
-            <a:schemeClr val="accent1"/>
-          </a:lnRef>
-          <a:fillRef idx="3">
-            <a:schemeClr val="accent1"/>
-          </a:fillRef>
-          <a:effectRef idx="2">
-            <a:schemeClr val="accent1"/>
-          </a:effectRef>
-          <a:fontRef idx="minor">
-            <a:schemeClr val="lt1"/>
-          </a:fontRef>
-        </p:style>
-        <p:txBody>
-          <a:bodyPr rtlCol="0" anchor="ctr"/>
-          <a:lstStyle/>
-          <a:p>
-            <a:pPr algn="ctr"/>
-          </a:p>
-        </p:txBody>
-      </p:sp>
-      <p:sp>
-        <p:nvSpPr>
-          <p:cNvPr id="21" name="Oval 20"/>
-          <p:cNvSpPr/>
-          <p:nvPr/>
-        </p:nvSpPr>
-        <p:spPr>
-          <a:xfrm>
-            <a:off x="640080" y="3703320"/>
-            <a:ext cx="228600" cy="228600"/>
-          </a:xfrm>
-          <a:prstGeom prst="ellipse">
-            <a:avLst/>
-          </a:prstGeom>
-          <a:solidFill>
-            <a:srgbClr val="2E7D32"/>
-          </a:solidFill>
-          <a:ln>
-            <a:noFill/>
-          </a:ln>
-          <a:effectLst/>
-        </p:spPr>
-        <p:style>
-          <a:lnRef idx="1">
-            <a:schemeClr val="accent1"/>
-          </a:lnRef>
-          <a:fillRef idx="3">
-            <a:schemeClr val="accent1"/>
-          </a:fillRef>
-          <a:effectRef idx="2">
-            <a:schemeClr val="accent1"/>
-          </a:effectRef>
-          <a:fontRef idx="minor">
-            <a:schemeClr val="lt1"/>
-          </a:fontRef>
-        </p:style>
-        <p:txBody>
-          <a:bodyPr rtlCol="0" anchor="ctr" lIns="0" rIns="0" tIns="0" bIns="0"/>
-          <a:lstStyle/>
-          <a:p>
-            <a:pPr algn="ctr"/>
-            <a:r>
-              <a:rPr sz="1300" b="1">
-                <a:solidFill>
-                  <a:srgbClr val="FFFFFF"/>
-                </a:solidFill>
-                <a:latin typeface="Microsoft JhengHei"/>
-              </a:rPr>
-              <a:t/>
-            </a:r>
-          </a:p>
-        </p:txBody>
-      </p:sp>
-      <p:sp>
-        <p:nvSpPr>
-          <p:cNvPr id="22" name="TextBox 21"/>
-          <p:cNvSpPr txBox="1"/>
-          <p:nvPr/>
-        </p:nvSpPr>
-        <p:spPr>
-          <a:xfrm>
-            <a:off x="1005840" y="3566160"/>
-            <a:ext cx="4389120" cy="502920"/>
-          </a:xfrm>
-          <a:prstGeom prst="rect">
-            <a:avLst/>
-          </a:prstGeom>
-          <a:noFill/>
-        </p:spPr>
-        <p:txBody>
-          <a:bodyPr wrap="square" anchor="ctr" lIns="45720" rIns="45720" tIns="27432" bIns="27432">
-            <a:spAutoFit/>
-          </a:bodyPr>
-          <a:lstStyle/>
-          <a:p>
-            <a:pPr algn="l"/>
-            <a:r>
-              <a:rPr sz="1500" b="0">
-                <a:solidFill>
-                  <a:srgbClr val="16304F"/>
-                </a:solidFill>
-                <a:latin typeface="Microsoft JhengHei"/>
-              </a:rPr>
-              <a:t>畫面全部連到線上系統</a:t>
-            </a:r>
-          </a:p>
-        </p:txBody>
-      </p:sp>
-      <p:sp>
-        <p:nvSpPr>
-          <p:cNvPr id="23" name="Rectangle 22"/>
-          <p:cNvSpPr/>
-          <p:nvPr/>
-        </p:nvSpPr>
-        <p:spPr>
-          <a:xfrm>
-            <a:off x="640080" y="4041648"/>
-            <a:ext cx="4754880" cy="9144"/>
-          </a:xfrm>
-          <a:prstGeom prst="rect">
-            <a:avLst/>
-          </a:prstGeom>
-          <a:solidFill>
-            <a:srgbClr val="E6EAF0"/>
-          </a:solidFill>
-          <a:ln>
-            <a:noFill/>
-          </a:ln>
-          <a:effectLst/>
-        </p:spPr>
-        <p:style>
-          <a:lnRef idx="1">
-            <a:schemeClr val="accent1"/>
-          </a:lnRef>
-          <a:fillRef idx="3">
-            <a:schemeClr val="accent1"/>
-          </a:fillRef>
-          <a:effectRef idx="2">
-            <a:schemeClr val="accent1"/>
-          </a:effectRef>
-          <a:fontRef idx="minor">
-            <a:schemeClr val="lt1"/>
-          </a:fontRef>
-        </p:style>
-        <p:txBody>
-          <a:bodyPr rtlCol="0" anchor="ctr"/>
-          <a:lstStyle/>
-          <a:p>
-            <a:pPr algn="ctr"/>
-          </a:p>
-        </p:txBody>
-      </p:sp>
-      <p:sp>
-        <p:nvSpPr>
-          <p:cNvPr id="24" name="Oval 23"/>
-          <p:cNvSpPr/>
-          <p:nvPr/>
-        </p:nvSpPr>
-        <p:spPr>
-          <a:xfrm>
-            <a:off x="640080" y="4206240"/>
-            <a:ext cx="228600" cy="228600"/>
-          </a:xfrm>
-          <a:prstGeom prst="ellipse">
-            <a:avLst/>
-          </a:prstGeom>
-          <a:solidFill>
-            <a:srgbClr val="2E7D32"/>
-          </a:solidFill>
-          <a:ln>
-            <a:noFill/>
-          </a:ln>
-          <a:effectLst/>
-        </p:spPr>
-        <p:style>
-          <a:lnRef idx="1">
-            <a:schemeClr val="accent1"/>
-          </a:lnRef>
-          <a:fillRef idx="3">
-            <a:schemeClr val="accent1"/>
-          </a:fillRef>
-          <a:effectRef idx="2">
-            <a:schemeClr val="accent1"/>
-          </a:effectRef>
-          <a:fontRef idx="minor">
-            <a:schemeClr val="lt1"/>
-          </a:fontRef>
-        </p:style>
-        <p:txBody>
-          <a:bodyPr rtlCol="0" anchor="ctr" lIns="0" rIns="0" tIns="0" bIns="0"/>
-          <a:lstStyle/>
-          <a:p>
-            <a:pPr algn="ctr"/>
-            <a:r>
-              <a:rPr sz="1300" b="1">
-                <a:solidFill>
-                  <a:srgbClr val="FFFFFF"/>
-                </a:solidFill>
-                <a:latin typeface="Microsoft JhengHei"/>
-              </a:rPr>
-              <a:t/>
-            </a:r>
-          </a:p>
-        </p:txBody>
-      </p:sp>
-      <p:sp>
-        <p:nvSpPr>
-          <p:cNvPr id="25" name="TextBox 24"/>
-          <p:cNvSpPr txBox="1"/>
-          <p:nvPr/>
-        </p:nvSpPr>
-        <p:spPr>
-          <a:xfrm>
-            <a:off x="1005840" y="4069080"/>
-            <a:ext cx="4389120" cy="502920"/>
-          </a:xfrm>
-          <a:prstGeom prst="rect">
-            <a:avLst/>
-          </a:prstGeom>
-          <a:noFill/>
-        </p:spPr>
-        <p:txBody>
-          <a:bodyPr wrap="square" anchor="ctr" lIns="45720" rIns="45720" tIns="27432" bIns="27432">
-            <a:spAutoFit/>
-          </a:bodyPr>
-          <a:lstStyle/>
-          <a:p>
-            <a:pPr algn="l"/>
-            <a:r>
-              <a:rPr sz="1500" b="0">
-                <a:solidFill>
-                  <a:srgbClr val="16304F"/>
-                </a:solidFill>
-                <a:latin typeface="Microsoft JhengHei"/>
-              </a:rPr>
-              <a:t>自動化測試 52 個</a:t>
-            </a:r>
-          </a:p>
-        </p:txBody>
-      </p:sp>
-      <p:sp>
-        <p:nvSpPr>
-          <p:cNvPr id="26" name="Rectangle 25"/>
-          <p:cNvSpPr/>
-          <p:nvPr/>
-        </p:nvSpPr>
-        <p:spPr>
-          <a:xfrm>
-            <a:off x="640080" y="4544568"/>
-            <a:ext cx="4754880" cy="9144"/>
-          </a:xfrm>
-          <a:prstGeom prst="rect">
-            <a:avLst/>
-          </a:prstGeom>
-          <a:solidFill>
-            <a:srgbClr val="E6EAF0"/>
-          </a:solidFill>
-          <a:ln>
-            <a:noFill/>
-          </a:ln>
-          <a:effectLst/>
-        </p:spPr>
-        <p:style>
-          <a:lnRef idx="1">
-            <a:schemeClr val="accent1"/>
-          </a:lnRef>
-          <a:fillRef idx="3">
-            <a:schemeClr val="accent1"/>
-          </a:fillRef>
-          <a:effectRef idx="2">
-            <a:schemeClr val="accent1"/>
-          </a:effectRef>
-          <a:fontRef idx="minor">
-            <a:schemeClr val="lt1"/>
-          </a:fontRef>
-        </p:style>
-        <p:txBody>
-          <a:bodyPr rtlCol="0" anchor="ctr"/>
-          <a:lstStyle/>
-          <a:p>
-            <a:pPr algn="ctr"/>
-          </a:p>
-        </p:txBody>
-      </p:sp>
-      <p:sp>
-        <p:nvSpPr>
-          <p:cNvPr id="27" name="Oval 26"/>
-          <p:cNvSpPr/>
-          <p:nvPr/>
-        </p:nvSpPr>
-        <p:spPr>
-          <a:xfrm>
-            <a:off x="640080" y="4709160"/>
-            <a:ext cx="228600" cy="228600"/>
-          </a:xfrm>
-          <a:prstGeom prst="ellipse">
+            <a:off x="640080" y="5623560"/>
+            <a:ext cx="64008" cy="566928"/>
+          </a:xfrm>
+          <a:prstGeom prst="rect">
             <a:avLst/>
           </a:prstGeom>
           <a:solidFill>
@@ -11375,32 +13299,23 @@
           </a:fontRef>
         </p:style>
         <p:txBody>
-          <a:bodyPr rtlCol="0" anchor="ctr" lIns="0" rIns="0" tIns="0" bIns="0"/>
-          <a:lstStyle/>
-          <a:p>
-            <a:pPr algn="ctr"/>
-            <a:r>
-              <a:rPr sz="1300" b="1">
-                <a:solidFill>
-                  <a:srgbClr val="FFFFFF"/>
-                </a:solidFill>
-                <a:latin typeface="Microsoft JhengHei"/>
-              </a:rPr>
-              <a:t/>
-            </a:r>
-          </a:p>
-        </p:txBody>
-      </p:sp>
-      <p:sp>
-        <p:nvSpPr>
-          <p:cNvPr id="28" name="TextBox 27"/>
+          <a:bodyPr rtlCol="0" anchor="ctr"/>
+          <a:lstStyle/>
+          <a:p>
+            <a:pPr algn="ctr"/>
+          </a:p>
+        </p:txBody>
+      </p:sp>
+      <p:sp>
+        <p:nvSpPr>
+          <p:cNvPr id="29" name="TextBox 28"/>
           <p:cNvSpPr txBox="1"/>
           <p:nvPr/>
         </p:nvSpPr>
         <p:spPr>
           <a:xfrm>
-            <a:off x="1005840" y="4572000"/>
-            <a:ext cx="4389120" cy="502920"/>
+            <a:off x="822960" y="5641848"/>
+            <a:ext cx="10607040" cy="548640"/>
           </a:xfrm>
           <a:prstGeom prst="rect">
             <a:avLst/>
@@ -11415,916 +13330,13 @@
           <a:p>
             <a:pPr algn="l"/>
             <a:r>
-              <a:rPr sz="1500" b="0">
-                <a:solidFill>
-                  <a:srgbClr val="16304F"/>
-                </a:solidFill>
-                <a:latin typeface="Microsoft JhengHei"/>
-              </a:rPr>
-              <a:t>補件辨識</a:t>
-            </a:r>
-          </a:p>
-        </p:txBody>
-      </p:sp>
-      <p:sp>
-        <p:nvSpPr>
-          <p:cNvPr id="29" name="Rectangle 28"/>
-          <p:cNvSpPr/>
-          <p:nvPr/>
-        </p:nvSpPr>
-        <p:spPr>
-          <a:xfrm>
-            <a:off x="640080" y="5047488"/>
-            <a:ext cx="4754880" cy="9144"/>
-          </a:xfrm>
-          <a:prstGeom prst="rect">
-            <a:avLst/>
-          </a:prstGeom>
-          <a:solidFill>
-            <a:srgbClr val="E6EAF0"/>
-          </a:solidFill>
-          <a:ln>
-            <a:noFill/>
-          </a:ln>
-          <a:effectLst/>
-        </p:spPr>
-        <p:style>
-          <a:lnRef idx="1">
-            <a:schemeClr val="accent1"/>
-          </a:lnRef>
-          <a:fillRef idx="3">
-            <a:schemeClr val="accent1"/>
-          </a:fillRef>
-          <a:effectRef idx="2">
-            <a:schemeClr val="accent1"/>
-          </a:effectRef>
-          <a:fontRef idx="minor">
-            <a:schemeClr val="lt1"/>
-          </a:fontRef>
-        </p:style>
-        <p:txBody>
-          <a:bodyPr rtlCol="0" anchor="ctr"/>
-          <a:lstStyle/>
-          <a:p>
-            <a:pPr algn="ctr"/>
-          </a:p>
-        </p:txBody>
-      </p:sp>
-      <p:sp>
-        <p:nvSpPr>
-          <p:cNvPr id="30" name="Oval 29"/>
-          <p:cNvSpPr/>
-          <p:nvPr/>
-        </p:nvSpPr>
-        <p:spPr>
-          <a:xfrm>
-            <a:off x="640080" y="5212080"/>
-            <a:ext cx="228600" cy="228600"/>
-          </a:xfrm>
-          <a:prstGeom prst="ellipse">
-            <a:avLst/>
-          </a:prstGeom>
-          <a:solidFill>
-            <a:srgbClr val="C5CDD8"/>
-          </a:solidFill>
-          <a:ln>
-            <a:noFill/>
-          </a:ln>
-          <a:effectLst/>
-        </p:spPr>
-        <p:style>
-          <a:lnRef idx="1">
-            <a:schemeClr val="accent1"/>
-          </a:lnRef>
-          <a:fillRef idx="3">
-            <a:schemeClr val="accent1"/>
-          </a:fillRef>
-          <a:effectRef idx="2">
-            <a:schemeClr val="accent1"/>
-          </a:effectRef>
-          <a:fontRef idx="minor">
-            <a:schemeClr val="lt1"/>
-          </a:fontRef>
-        </p:style>
-        <p:txBody>
-          <a:bodyPr rtlCol="0" anchor="ctr" lIns="0" rIns="0" tIns="0" bIns="0"/>
-          <a:lstStyle/>
-          <a:p>
-            <a:pPr algn="ctr"/>
-            <a:r>
-              <a:rPr sz="1300" b="1">
-                <a:solidFill>
-                  <a:srgbClr val="FFFFFF"/>
-                </a:solidFill>
-                <a:latin typeface="Microsoft JhengHei"/>
-              </a:rPr>
-              <a:t/>
-            </a:r>
-          </a:p>
-        </p:txBody>
-      </p:sp>
-      <p:sp>
-        <p:nvSpPr>
-          <p:cNvPr id="31" name="TextBox 30"/>
-          <p:cNvSpPr txBox="1"/>
-          <p:nvPr/>
-        </p:nvSpPr>
-        <p:spPr>
-          <a:xfrm>
-            <a:off x="1005840" y="5074920"/>
-            <a:ext cx="4389120" cy="502920"/>
-          </a:xfrm>
-          <a:prstGeom prst="rect">
-            <a:avLst/>
-          </a:prstGeom>
-          <a:noFill/>
-        </p:spPr>
-        <p:txBody>
-          <a:bodyPr wrap="square" anchor="ctr" lIns="45720" rIns="45720" tIns="27432" bIns="27432">
-            <a:spAutoFit/>
-          </a:bodyPr>
-          <a:lstStyle/>
-          <a:p>
-            <a:pPr algn="l"/>
-            <a:r>
-              <a:rPr sz="1500" b="0">
-                <a:solidFill>
-                  <a:srgbClr val="16304F"/>
-                </a:solidFill>
-                <a:latin typeface="Microsoft JhengHei"/>
-              </a:rPr>
-              <a:t>登入／HTTPS</a:t>
-            </a:r>
-          </a:p>
-        </p:txBody>
-      </p:sp>
-      <p:sp>
-        <p:nvSpPr>
-          <p:cNvPr id="32" name="Rectangle 31"/>
-          <p:cNvSpPr/>
-          <p:nvPr/>
-        </p:nvSpPr>
-        <p:spPr>
-          <a:xfrm>
-            <a:off x="640080" y="5550408"/>
-            <a:ext cx="4754880" cy="9144"/>
-          </a:xfrm>
-          <a:prstGeom prst="rect">
-            <a:avLst/>
-          </a:prstGeom>
-          <a:solidFill>
-            <a:srgbClr val="E6EAF0"/>
-          </a:solidFill>
-          <a:ln>
-            <a:noFill/>
-          </a:ln>
-          <a:effectLst/>
-        </p:spPr>
-        <p:style>
-          <a:lnRef idx="1">
-            <a:schemeClr val="accent1"/>
-          </a:lnRef>
-          <a:fillRef idx="3">
-            <a:schemeClr val="accent1"/>
-          </a:fillRef>
-          <a:effectRef idx="2">
-            <a:schemeClr val="accent1"/>
-          </a:effectRef>
-          <a:fontRef idx="minor">
-            <a:schemeClr val="lt1"/>
-          </a:fontRef>
-        </p:style>
-        <p:txBody>
-          <a:bodyPr rtlCol="0" anchor="ctr"/>
-          <a:lstStyle/>
-          <a:p>
-            <a:pPr algn="ctr"/>
-          </a:p>
-        </p:txBody>
-      </p:sp>
-      <p:sp>
-        <p:nvSpPr>
-          <p:cNvPr id="33" name="Rounded Rectangle 32"/>
-          <p:cNvSpPr/>
-          <p:nvPr/>
-        </p:nvSpPr>
-        <p:spPr>
-          <a:xfrm>
-            <a:off x="5943600" y="1554480"/>
-            <a:ext cx="2697480" cy="1691640"/>
-          </a:xfrm>
-          <a:prstGeom prst="roundRect">
-            <a:avLst>
-              <a:gd name="adj" fmla="val 8000"/>
-            </a:avLst>
-          </a:prstGeom>
-          <a:solidFill>
-            <a:srgbClr val="F4F6F9"/>
-          </a:solidFill>
-          <a:ln>
-            <a:noFill/>
-          </a:ln>
-          <a:effectLst/>
-        </p:spPr>
-        <p:style>
-          <a:lnRef idx="1">
-            <a:schemeClr val="accent1"/>
-          </a:lnRef>
-          <a:fillRef idx="3">
-            <a:schemeClr val="accent1"/>
-          </a:fillRef>
-          <a:effectRef idx="2">
-            <a:schemeClr val="accent1"/>
-          </a:effectRef>
-          <a:fontRef idx="minor">
-            <a:schemeClr val="lt1"/>
-          </a:fontRef>
-        </p:style>
-        <p:txBody>
-          <a:bodyPr rtlCol="0" anchor="ctr"/>
-          <a:lstStyle/>
-          <a:p>
-            <a:pPr algn="ctr"/>
-          </a:p>
-        </p:txBody>
-      </p:sp>
-      <p:sp>
-        <p:nvSpPr>
-          <p:cNvPr id="34" name="TextBox 33"/>
-          <p:cNvSpPr txBox="1"/>
-          <p:nvPr/>
-        </p:nvSpPr>
-        <p:spPr>
-          <a:xfrm>
-            <a:off x="6108192" y="1664207"/>
-            <a:ext cx="2377440" cy="640080"/>
-          </a:xfrm>
-          <a:prstGeom prst="rect">
-            <a:avLst/>
-          </a:prstGeom>
-          <a:noFill/>
-        </p:spPr>
-        <p:txBody>
-          <a:bodyPr wrap="square" anchor="t" lIns="45720" rIns="45720" tIns="27432" bIns="27432">
-            <a:spAutoFit/>
-          </a:bodyPr>
-          <a:lstStyle/>
-          <a:p>
-            <a:pPr algn="l"/>
-            <a:r>
-              <a:rPr sz="3000" b="1">
-                <a:solidFill>
-                  <a:srgbClr val="16304F"/>
-                </a:solidFill>
-                <a:latin typeface="Microsoft JhengHei"/>
-              </a:rPr>
-              <a:t>20%</a:t>
-            </a:r>
-          </a:p>
-        </p:txBody>
-      </p:sp>
-      <p:sp>
-        <p:nvSpPr>
-          <p:cNvPr id="35" name="TextBox 34"/>
-          <p:cNvSpPr txBox="1"/>
-          <p:nvPr/>
-        </p:nvSpPr>
-        <p:spPr>
-          <a:xfrm>
-            <a:off x="6108192" y="2286000"/>
-            <a:ext cx="2377440" cy="365760"/>
-          </a:xfrm>
-          <a:prstGeom prst="rect">
-            <a:avLst/>
-          </a:prstGeom>
-          <a:noFill/>
-        </p:spPr>
-        <p:txBody>
-          <a:bodyPr wrap="square" anchor="t" lIns="45720" rIns="45720" tIns="27432" bIns="27432">
-            <a:spAutoFit/>
-          </a:bodyPr>
-          <a:lstStyle/>
-          <a:p>
-            <a:pPr algn="l"/>
-            <a:r>
-              <a:rPr sz="1400" b="1">
-                <a:solidFill>
-                  <a:srgbClr val="16304F"/>
-                </a:solidFill>
-                <a:latin typeface="Microsoft JhengHei"/>
-              </a:rPr>
-              <a:t>技術可行性</a:t>
-            </a:r>
-          </a:p>
-        </p:txBody>
-      </p:sp>
-      <p:sp>
-        <p:nvSpPr>
-          <p:cNvPr id="36" name="TextBox 35"/>
-          <p:cNvSpPr txBox="1"/>
-          <p:nvPr/>
-        </p:nvSpPr>
-        <p:spPr>
-          <a:xfrm>
-            <a:off x="6108192" y="2633472"/>
-            <a:ext cx="2377440" cy="548640"/>
-          </a:xfrm>
-          <a:prstGeom prst="rect">
-            <a:avLst/>
-          </a:prstGeom>
-          <a:noFill/>
-        </p:spPr>
-        <p:txBody>
-          <a:bodyPr wrap="square" anchor="t" lIns="45720" rIns="45720" tIns="27432" bIns="27432">
-            <a:spAutoFit/>
-          </a:bodyPr>
-          <a:lstStyle/>
-          <a:p>
-            <a:pPr algn="l"/>
-            <a:r>
-              <a:rPr sz="1050" b="0">
+              <a:rPr sz="1350" b="0">
                 <a:solidFill>
                   <a:srgbClr val="334455"/>
                 </a:solidFill>
                 <a:latin typeface="Microsoft JhengHei"/>
               </a:rPr>
-              <a:t>允許清單內；呼叫頻率限制下固定流程</a:t>
-            </a:r>
-          </a:p>
-        </p:txBody>
-      </p:sp>
-      <p:sp>
-        <p:nvSpPr>
-          <p:cNvPr id="37" name="Rounded Rectangle 36"/>
-          <p:cNvSpPr/>
-          <p:nvPr/>
-        </p:nvSpPr>
-        <p:spPr>
-          <a:xfrm>
-            <a:off x="8778240" y="1554480"/>
-            <a:ext cx="2697480" cy="1691640"/>
-          </a:xfrm>
-          <a:prstGeom prst="roundRect">
-            <a:avLst>
-              <a:gd name="adj" fmla="val 8000"/>
-            </a:avLst>
-          </a:prstGeom>
-          <a:solidFill>
-            <a:srgbClr val="F4F6F9"/>
-          </a:solidFill>
-          <a:ln>
-            <a:noFill/>
-          </a:ln>
-          <a:effectLst/>
-        </p:spPr>
-        <p:style>
-          <a:lnRef idx="1">
-            <a:schemeClr val="accent1"/>
-          </a:lnRef>
-          <a:fillRef idx="3">
-            <a:schemeClr val="accent1"/>
-          </a:fillRef>
-          <a:effectRef idx="2">
-            <a:schemeClr val="accent1"/>
-          </a:effectRef>
-          <a:fontRef idx="minor">
-            <a:schemeClr val="lt1"/>
-          </a:fontRef>
-        </p:style>
-        <p:txBody>
-          <a:bodyPr rtlCol="0" anchor="ctr"/>
-          <a:lstStyle/>
-          <a:p>
-            <a:pPr algn="ctr"/>
-          </a:p>
-        </p:txBody>
-      </p:sp>
-      <p:sp>
-        <p:nvSpPr>
-          <p:cNvPr id="38" name="TextBox 37"/>
-          <p:cNvSpPr txBox="1"/>
-          <p:nvPr/>
-        </p:nvSpPr>
-        <p:spPr>
-          <a:xfrm>
-            <a:off x="8942832" y="1664207"/>
-            <a:ext cx="2377440" cy="640080"/>
-          </a:xfrm>
-          <a:prstGeom prst="rect">
-            <a:avLst/>
-          </a:prstGeom>
-          <a:noFill/>
-        </p:spPr>
-        <p:txBody>
-          <a:bodyPr wrap="square" anchor="t" lIns="45720" rIns="45720" tIns="27432" bIns="27432">
-            <a:spAutoFit/>
-          </a:bodyPr>
-          <a:lstStyle/>
-          <a:p>
-            <a:pPr algn="l"/>
-            <a:r>
-              <a:rPr sz="3000" b="1">
-                <a:solidFill>
-                  <a:srgbClr val="16304F"/>
-                </a:solidFill>
-                <a:latin typeface="Microsoft JhengHei"/>
-              </a:rPr>
-              <a:t>25%</a:t>
-            </a:r>
-          </a:p>
-        </p:txBody>
-      </p:sp>
-      <p:sp>
-        <p:nvSpPr>
-          <p:cNvPr id="39" name="TextBox 38"/>
-          <p:cNvSpPr txBox="1"/>
-          <p:nvPr/>
-        </p:nvSpPr>
-        <p:spPr>
-          <a:xfrm>
-            <a:off x="8942832" y="2286000"/>
-            <a:ext cx="2377440" cy="365760"/>
-          </a:xfrm>
-          <a:prstGeom prst="rect">
-            <a:avLst/>
-          </a:prstGeom>
-          <a:noFill/>
-        </p:spPr>
-        <p:txBody>
-          <a:bodyPr wrap="square" anchor="t" lIns="45720" rIns="45720" tIns="27432" bIns="27432">
-            <a:spAutoFit/>
-          </a:bodyPr>
-          <a:lstStyle/>
-          <a:p>
-            <a:pPr algn="l"/>
-            <a:r>
-              <a:rPr sz="1400" b="1">
-                <a:solidFill>
-                  <a:srgbClr val="16304F"/>
-                </a:solidFill>
-                <a:latin typeface="Microsoft JhengHei"/>
-              </a:rPr>
-              <a:t>完成度</a:t>
-            </a:r>
-          </a:p>
-        </p:txBody>
-      </p:sp>
-      <p:sp>
-        <p:nvSpPr>
-          <p:cNvPr id="40" name="TextBox 39"/>
-          <p:cNvSpPr txBox="1"/>
-          <p:nvPr/>
-        </p:nvSpPr>
-        <p:spPr>
-          <a:xfrm>
-            <a:off x="8942832" y="2633472"/>
-            <a:ext cx="2377440" cy="548640"/>
-          </a:xfrm>
-          <a:prstGeom prst="rect">
-            <a:avLst/>
-          </a:prstGeom>
-          <a:noFill/>
-        </p:spPr>
-        <p:txBody>
-          <a:bodyPr wrap="square" anchor="t" lIns="45720" rIns="45720" tIns="27432" bIns="27432">
-            <a:spAutoFit/>
-          </a:bodyPr>
-          <a:lstStyle/>
-          <a:p>
-            <a:pPr algn="l"/>
-            <a:r>
-              <a:rPr sz="1050" b="0">
-                <a:solidFill>
-                  <a:srgbClr val="334455"/>
-                </a:solidFill>
-                <a:latin typeface="Microsoft JhengHei"/>
-              </a:rPr>
-              <a:t>Live Demo 走完整流程；52 個測試</a:t>
-            </a:r>
-          </a:p>
-        </p:txBody>
-      </p:sp>
-      <p:sp>
-        <p:nvSpPr>
-          <p:cNvPr id="41" name="Rounded Rectangle 40"/>
-          <p:cNvSpPr/>
-          <p:nvPr/>
-        </p:nvSpPr>
-        <p:spPr>
-          <a:xfrm>
-            <a:off x="5943600" y="3383280"/>
-            <a:ext cx="2697480" cy="1691640"/>
-          </a:xfrm>
-          <a:prstGeom prst="roundRect">
-            <a:avLst>
-              <a:gd name="adj" fmla="val 8000"/>
-            </a:avLst>
-          </a:prstGeom>
-          <a:solidFill>
-            <a:srgbClr val="F4F6F9"/>
-          </a:solidFill>
-          <a:ln>
-            <a:noFill/>
-          </a:ln>
-          <a:effectLst/>
-        </p:spPr>
-        <p:style>
-          <a:lnRef idx="1">
-            <a:schemeClr val="accent1"/>
-          </a:lnRef>
-          <a:fillRef idx="3">
-            <a:schemeClr val="accent1"/>
-          </a:fillRef>
-          <a:effectRef idx="2">
-            <a:schemeClr val="accent1"/>
-          </a:effectRef>
-          <a:fontRef idx="minor">
-            <a:schemeClr val="lt1"/>
-          </a:fontRef>
-        </p:style>
-        <p:txBody>
-          <a:bodyPr rtlCol="0" anchor="ctr"/>
-          <a:lstStyle/>
-          <a:p>
-            <a:pPr algn="ctr"/>
-          </a:p>
-        </p:txBody>
-      </p:sp>
-      <p:sp>
-        <p:nvSpPr>
-          <p:cNvPr id="42" name="TextBox 41"/>
-          <p:cNvSpPr txBox="1"/>
-          <p:nvPr/>
-        </p:nvSpPr>
-        <p:spPr>
-          <a:xfrm>
-            <a:off x="6108192" y="3493008"/>
-            <a:ext cx="2377440" cy="640080"/>
-          </a:xfrm>
-          <a:prstGeom prst="rect">
-            <a:avLst/>
-          </a:prstGeom>
-          <a:noFill/>
-        </p:spPr>
-        <p:txBody>
-          <a:bodyPr wrap="square" anchor="t" lIns="45720" rIns="45720" tIns="27432" bIns="27432">
-            <a:spAutoFit/>
-          </a:bodyPr>
-          <a:lstStyle/>
-          <a:p>
-            <a:pPr algn="l"/>
-            <a:r>
-              <a:rPr sz="3000" b="1">
-                <a:solidFill>
-                  <a:srgbClr val="16304F"/>
-                </a:solidFill>
-                <a:latin typeface="Microsoft JhengHei"/>
-              </a:rPr>
-              <a:t>30%</a:t>
-            </a:r>
-          </a:p>
-        </p:txBody>
-      </p:sp>
-      <p:sp>
-        <p:nvSpPr>
-          <p:cNvPr id="43" name="TextBox 42"/>
-          <p:cNvSpPr txBox="1"/>
-          <p:nvPr/>
-        </p:nvSpPr>
-        <p:spPr>
-          <a:xfrm>
-            <a:off x="6108192" y="4114800"/>
-            <a:ext cx="2377440" cy="365760"/>
-          </a:xfrm>
-          <a:prstGeom prst="rect">
-            <a:avLst/>
-          </a:prstGeom>
-          <a:noFill/>
-        </p:spPr>
-        <p:txBody>
-          <a:bodyPr wrap="square" anchor="t" lIns="45720" rIns="45720" tIns="27432" bIns="27432">
-            <a:spAutoFit/>
-          </a:bodyPr>
-          <a:lstStyle/>
-          <a:p>
-            <a:pPr algn="l"/>
-            <a:r>
-              <a:rPr sz="1400" b="1">
-                <a:solidFill>
-                  <a:srgbClr val="16304F"/>
-                </a:solidFill>
-                <a:latin typeface="Microsoft JhengHei"/>
-              </a:rPr>
-              <a:t>資料應用性</a:t>
-            </a:r>
-          </a:p>
-        </p:txBody>
-      </p:sp>
-      <p:sp>
-        <p:nvSpPr>
-          <p:cNvPr id="44" name="TextBox 43"/>
-          <p:cNvSpPr txBox="1"/>
-          <p:nvPr/>
-        </p:nvSpPr>
-        <p:spPr>
-          <a:xfrm>
-            <a:off x="6108192" y="4462272"/>
-            <a:ext cx="2377440" cy="548640"/>
-          </a:xfrm>
-          <a:prstGeom prst="rect">
-            <a:avLst/>
-          </a:prstGeom>
-          <a:noFill/>
-        </p:spPr>
-        <p:txBody>
-          <a:bodyPr wrap="square" anchor="t" lIns="45720" rIns="45720" tIns="27432" bIns="27432">
-            <a:spAutoFit/>
-          </a:bodyPr>
-          <a:lstStyle/>
-          <a:p>
-            <a:pPr algn="l"/>
-            <a:r>
-              <a:rPr sz="1050" b="0">
-                <a:solidFill>
-                  <a:srgbClr val="334455"/>
-                </a:solidFill>
-                <a:latin typeface="Microsoft JhengHei"/>
-              </a:rPr>
-              <a:t>101 份讀完再設計；三套考題</a:t>
-            </a:r>
-          </a:p>
-        </p:txBody>
-      </p:sp>
-      <p:sp>
-        <p:nvSpPr>
-          <p:cNvPr id="45" name="Rounded Rectangle 44"/>
-          <p:cNvSpPr/>
-          <p:nvPr/>
-        </p:nvSpPr>
-        <p:spPr>
-          <a:xfrm>
-            <a:off x="8778240" y="3383280"/>
-            <a:ext cx="2697480" cy="1691640"/>
-          </a:xfrm>
-          <a:prstGeom prst="roundRect">
-            <a:avLst>
-              <a:gd name="adj" fmla="val 8000"/>
-            </a:avLst>
-          </a:prstGeom>
-          <a:solidFill>
-            <a:srgbClr val="F4F6F9"/>
-          </a:solidFill>
-          <a:ln>
-            <a:noFill/>
-          </a:ln>
-          <a:effectLst/>
-        </p:spPr>
-        <p:style>
-          <a:lnRef idx="1">
-            <a:schemeClr val="accent1"/>
-          </a:lnRef>
-          <a:fillRef idx="3">
-            <a:schemeClr val="accent1"/>
-          </a:fillRef>
-          <a:effectRef idx="2">
-            <a:schemeClr val="accent1"/>
-          </a:effectRef>
-          <a:fontRef idx="minor">
-            <a:schemeClr val="lt1"/>
-          </a:fontRef>
-        </p:style>
-        <p:txBody>
-          <a:bodyPr rtlCol="0" anchor="ctr"/>
-          <a:lstStyle/>
-          <a:p>
-            <a:pPr algn="ctr"/>
-          </a:p>
-        </p:txBody>
-      </p:sp>
-      <p:sp>
-        <p:nvSpPr>
-          <p:cNvPr id="46" name="TextBox 45"/>
-          <p:cNvSpPr txBox="1"/>
-          <p:nvPr/>
-        </p:nvSpPr>
-        <p:spPr>
-          <a:xfrm>
-            <a:off x="8942832" y="3493008"/>
-            <a:ext cx="2377440" cy="640080"/>
-          </a:xfrm>
-          <a:prstGeom prst="rect">
-            <a:avLst/>
-          </a:prstGeom>
-          <a:noFill/>
-        </p:spPr>
-        <p:txBody>
-          <a:bodyPr wrap="square" anchor="t" lIns="45720" rIns="45720" tIns="27432" bIns="27432">
-            <a:spAutoFit/>
-          </a:bodyPr>
-          <a:lstStyle/>
-          <a:p>
-            <a:pPr algn="l"/>
-            <a:r>
-              <a:rPr sz="3000" b="1">
-                <a:solidFill>
-                  <a:srgbClr val="16304F"/>
-                </a:solidFill>
-                <a:latin typeface="Microsoft JhengHei"/>
-              </a:rPr>
-              <a:t>25%</a:t>
-            </a:r>
-          </a:p>
-        </p:txBody>
-      </p:sp>
-      <p:sp>
-        <p:nvSpPr>
-          <p:cNvPr id="47" name="TextBox 46"/>
-          <p:cNvSpPr txBox="1"/>
-          <p:nvPr/>
-        </p:nvSpPr>
-        <p:spPr>
-          <a:xfrm>
-            <a:off x="8942832" y="4114800"/>
-            <a:ext cx="2377440" cy="365760"/>
-          </a:xfrm>
-          <a:prstGeom prst="rect">
-            <a:avLst/>
-          </a:prstGeom>
-          <a:noFill/>
-        </p:spPr>
-        <p:txBody>
-          <a:bodyPr wrap="square" anchor="t" lIns="45720" rIns="45720" tIns="27432" bIns="27432">
-            <a:spAutoFit/>
-          </a:bodyPr>
-          <a:lstStyle/>
-          <a:p>
-            <a:pPr algn="l"/>
-            <a:r>
-              <a:rPr sz="1400" b="1">
-                <a:solidFill>
-                  <a:srgbClr val="16304F"/>
-                </a:solidFill>
-                <a:latin typeface="Microsoft JhengHei"/>
-              </a:rPr>
-              <a:t>主題契合度</a:t>
-            </a:r>
-          </a:p>
-        </p:txBody>
-      </p:sp>
-      <p:sp>
-        <p:nvSpPr>
-          <p:cNvPr id="48" name="TextBox 47"/>
-          <p:cNvSpPr txBox="1"/>
-          <p:nvPr/>
-        </p:nvSpPr>
-        <p:spPr>
-          <a:xfrm>
-            <a:off x="8942832" y="4462272"/>
-            <a:ext cx="2377440" cy="548640"/>
-          </a:xfrm>
-          <a:prstGeom prst="rect">
-            <a:avLst/>
-          </a:prstGeom>
-          <a:noFill/>
-        </p:spPr>
-        <p:txBody>
-          <a:bodyPr wrap="square" anchor="t" lIns="45720" rIns="45720" tIns="27432" bIns="27432">
-            <a:spAutoFit/>
-          </a:bodyPr>
-          <a:lstStyle/>
-          <a:p>
-            <a:pPr algn="l"/>
-            <a:r>
-              <a:rPr sz="1050" b="0">
-                <a:solidFill>
-                  <a:srgbClr val="334455"/>
-                </a:solidFill>
-                <a:latin typeface="Microsoft JhengHei"/>
-              </a:rPr>
-              <a:t>四大功能對應；輔助不取代</a:t>
-            </a:r>
-          </a:p>
-        </p:txBody>
-      </p:sp>
-      <p:sp>
-        <p:nvSpPr>
-          <p:cNvPr id="49" name="Rectangle 48"/>
-          <p:cNvSpPr/>
-          <p:nvPr/>
-        </p:nvSpPr>
-        <p:spPr>
-          <a:xfrm>
-            <a:off x="640080" y="5623560"/>
-            <a:ext cx="10908792" cy="566928"/>
-          </a:xfrm>
-          <a:prstGeom prst="rect">
-            <a:avLst/>
-          </a:prstGeom>
-          <a:solidFill>
-            <a:srgbClr val="FFF8EA"/>
-          </a:solidFill>
-          <a:ln>
-            <a:noFill/>
-          </a:ln>
-          <a:effectLst/>
-        </p:spPr>
-        <p:style>
-          <a:lnRef idx="1">
-            <a:schemeClr val="accent1"/>
-          </a:lnRef>
-          <a:fillRef idx="3">
-            <a:schemeClr val="accent1"/>
-          </a:fillRef>
-          <a:effectRef idx="2">
-            <a:schemeClr val="accent1"/>
-          </a:effectRef>
-          <a:fontRef idx="minor">
-            <a:schemeClr val="lt1"/>
-          </a:fontRef>
-        </p:style>
-        <p:txBody>
-          <a:bodyPr rtlCol="0" anchor="ctr"/>
-          <a:lstStyle/>
-          <a:p>
-            <a:pPr algn="ctr"/>
-          </a:p>
-        </p:txBody>
-      </p:sp>
-      <p:sp>
-        <p:nvSpPr>
-          <p:cNvPr id="50" name="Rectangle 49"/>
-          <p:cNvSpPr/>
-          <p:nvPr/>
-        </p:nvSpPr>
-        <p:spPr>
-          <a:xfrm>
-            <a:off x="640080" y="5623560"/>
-            <a:ext cx="64008" cy="566928"/>
-          </a:xfrm>
-          <a:prstGeom prst="rect">
-            <a:avLst/>
-          </a:prstGeom>
-          <a:solidFill>
-            <a:srgbClr val="D98E04"/>
-          </a:solidFill>
-          <a:ln>
-            <a:noFill/>
-          </a:ln>
-          <a:effectLst/>
-        </p:spPr>
-        <p:style>
-          <a:lnRef idx="1">
-            <a:schemeClr val="accent1"/>
-          </a:lnRef>
-          <a:fillRef idx="3">
-            <a:schemeClr val="accent1"/>
-          </a:fillRef>
-          <a:effectRef idx="2">
-            <a:schemeClr val="accent1"/>
-          </a:effectRef>
-          <a:fontRef idx="minor">
-            <a:schemeClr val="lt1"/>
-          </a:fontRef>
-        </p:style>
-        <p:txBody>
-          <a:bodyPr rtlCol="0" anchor="ctr"/>
-          <a:lstStyle/>
-          <a:p>
-            <a:pPr algn="ctr"/>
-          </a:p>
-        </p:txBody>
-      </p:sp>
-      <p:sp>
-        <p:nvSpPr>
-          <p:cNvPr id="51" name="TextBox 50"/>
-          <p:cNvSpPr txBox="1"/>
-          <p:nvPr/>
-        </p:nvSpPr>
-        <p:spPr>
-          <a:xfrm>
-            <a:off x="822960" y="5641848"/>
-            <a:ext cx="10607040" cy="548640"/>
-          </a:xfrm>
-          <a:prstGeom prst="rect">
-            <a:avLst/>
-          </a:prstGeom>
-          <a:noFill/>
-        </p:spPr>
-        <p:txBody>
-          <a:bodyPr wrap="square" anchor="ctr" lIns="45720" rIns="45720" tIns="27432" bIns="27432">
-            <a:spAutoFit/>
-          </a:bodyPr>
-          <a:lstStyle/>
-          <a:p>
-            <a:pPr algn="l"/>
-            <a:r>
-              <a:rPr sz="1350" b="0">
-                <a:solidFill>
-                  <a:srgbClr val="334455"/>
-                </a:solidFill>
-                <a:latin typeface="Microsoft JhengHei"/>
-              </a:rPr>
-              <a:t>Live Demo　http://100.20.156.38/　— 所有畫面都是線上現跑的</a:t>
+              <a:t>每案 30 頁真實格式卷宗（掃描、手寫、系統截圖、影片）；對應決定書從知識庫排除，系統不能「認出答案」。</a:t>
             </a:r>
           </a:p>
         </p:txBody>

--- a/docs/提案/提案簡報-訴願智審臺.pptx
+++ b/docs/提案/提案簡報-訴願智審臺.pptx
@@ -6444,7 +6444,7 @@
                 </a:solidFill>
                 <a:latin typeface="Microsoft JhengHei"/>
               </a:rPr>
-              <a:t>每一步透明，每一步可修</a:t>
+              <a:t>每一步透明</a:t>
             </a:r>
           </a:p>
         </p:txBody>
@@ -9114,7 +9114,7 @@
                 </a:solidFill>
                 <a:latin typeface="Microsoft JhengHei"/>
               </a:rPr>
-              <a:t>固定七個步驟，哪一步錯就修哪一步</a:t>
+              <a:t>固定七個步驟</a:t>
             </a:r>
           </a:p>
         </p:txBody>

--- a/docs/提案/提案簡報-訴願智審臺.pptx
+++ b/docs/提案/提案簡報-訴願智審臺.pptx
@@ -14,8 +14,6 @@
     <p:sldId id="262" r:id="rId13"/>
     <p:sldId id="263" r:id="rId14"/>
     <p:sldId id="264" r:id="rId15"/>
-    <p:sldId id="265" r:id="rId16"/>
-    <p:sldId id="266" r:id="rId17"/>
   </p:sldIdLst>
   <p:sldSz cx="12191695" cy="6858000" type="screen4x3"/>
   <p:notesSz cx="6858000" cy="9144000"/>
@@ -3492,2413 +3490,6 @@
 </p:sld>
 </file>
 
-<file path=ppt/slides/slide10.xml><?xml version="1.0" encoding="utf-8"?>
-<p:sld xmlns:a="http://schemas.openxmlformats.org/drawingml/2006/main" xmlns:p="http://schemas.openxmlformats.org/presentationml/2006/main" xmlns:r="http://schemas.openxmlformats.org/officeDocument/2006/relationships">
-  <p:cSld>
-    <p:spTree>
-      <p:nvGrpSpPr>
-        <p:cNvPr id="1" name=""/>
-        <p:cNvGrpSpPr/>
-        <p:nvPr/>
-      </p:nvGrpSpPr>
-      <p:grpSpPr/>
-      <p:sp>
-        <p:nvSpPr>
-          <p:cNvPr id="2" name="Rectangle 1"/>
-          <p:cNvSpPr/>
-          <p:nvPr/>
-        </p:nvSpPr>
-        <p:spPr>
-          <a:xfrm>
-            <a:off x="0" y="0"/>
-            <a:ext cx="9509760" cy="73152"/>
-          </a:xfrm>
-          <a:prstGeom prst="rect">
-            <a:avLst/>
-          </a:prstGeom>
-          <a:solidFill>
-            <a:srgbClr val="16304F"/>
-          </a:solidFill>
-          <a:ln>
-            <a:noFill/>
-          </a:ln>
-          <a:effectLst/>
-        </p:spPr>
-        <p:style>
-          <a:lnRef idx="1">
-            <a:schemeClr val="accent1"/>
-          </a:lnRef>
-          <a:fillRef idx="3">
-            <a:schemeClr val="accent1"/>
-          </a:fillRef>
-          <a:effectRef idx="2">
-            <a:schemeClr val="accent1"/>
-          </a:effectRef>
-          <a:fontRef idx="minor">
-            <a:schemeClr val="lt1"/>
-          </a:fontRef>
-        </p:style>
-        <p:txBody>
-          <a:bodyPr rtlCol="0" anchor="ctr"/>
-          <a:lstStyle/>
-          <a:p>
-            <a:pPr algn="ctr"/>
-          </a:p>
-        </p:txBody>
-      </p:sp>
-      <p:sp>
-        <p:nvSpPr>
-          <p:cNvPr id="3" name="Rectangle 2"/>
-          <p:cNvSpPr/>
-          <p:nvPr/>
-        </p:nvSpPr>
-        <p:spPr>
-          <a:xfrm>
-            <a:off x="9509760" y="0"/>
-            <a:ext cx="2681935" cy="73152"/>
-          </a:xfrm>
-          <a:prstGeom prst="rect">
-            <a:avLst/>
-          </a:prstGeom>
-          <a:solidFill>
-            <a:srgbClr val="D98E04"/>
-          </a:solidFill>
-          <a:ln>
-            <a:noFill/>
-          </a:ln>
-          <a:effectLst/>
-        </p:spPr>
-        <p:style>
-          <a:lnRef idx="1">
-            <a:schemeClr val="accent1"/>
-          </a:lnRef>
-          <a:fillRef idx="3">
-            <a:schemeClr val="accent1"/>
-          </a:fillRef>
-          <a:effectRef idx="2">
-            <a:schemeClr val="accent1"/>
-          </a:effectRef>
-          <a:fontRef idx="minor">
-            <a:schemeClr val="lt1"/>
-          </a:fontRef>
-        </p:style>
-        <p:txBody>
-          <a:bodyPr rtlCol="0" anchor="ctr"/>
-          <a:lstStyle/>
-          <a:p>
-            <a:pPr algn="ctr"/>
-          </a:p>
-        </p:txBody>
-      </p:sp>
-      <p:sp>
-        <p:nvSpPr>
-          <p:cNvPr id="4" name="TextBox 3"/>
-          <p:cNvSpPr txBox="1"/>
-          <p:nvPr/>
-        </p:nvSpPr>
-        <p:spPr>
-          <a:xfrm>
-            <a:off x="640080" y="384048"/>
-            <a:ext cx="7315200" cy="274320"/>
-          </a:xfrm>
-          <a:prstGeom prst="rect">
-            <a:avLst/>
-          </a:prstGeom>
-          <a:noFill/>
-        </p:spPr>
-        <p:txBody>
-          <a:bodyPr wrap="square" anchor="t" lIns="45720" rIns="45720" tIns="27432" bIns="27432">
-            <a:spAutoFit/>
-          </a:bodyPr>
-          <a:lstStyle/>
-          <a:p>
-            <a:pPr algn="l"/>
-            <a:r>
-              <a:rPr sz="1100" b="1">
-                <a:solidFill>
-                  <a:srgbClr val="D98E04"/>
-                </a:solidFill>
-                <a:latin typeface="Microsoft JhengHei"/>
-              </a:rPr>
-              <a:t>09 ／ 完成度與評分</a:t>
-            </a:r>
-          </a:p>
-        </p:txBody>
-      </p:sp>
-      <p:sp>
-        <p:nvSpPr>
-          <p:cNvPr id="5" name="TextBox 4"/>
-          <p:cNvSpPr txBox="1"/>
-          <p:nvPr/>
-        </p:nvSpPr>
-        <p:spPr>
-          <a:xfrm>
-            <a:off x="640080" y="603504"/>
-            <a:ext cx="10972800" cy="731520"/>
-          </a:xfrm>
-          <a:prstGeom prst="rect">
-            <a:avLst/>
-          </a:prstGeom>
-          <a:noFill/>
-        </p:spPr>
-        <p:txBody>
-          <a:bodyPr wrap="square" anchor="t" lIns="45720" rIns="45720" tIns="27432" bIns="27432">
-            <a:spAutoFit/>
-          </a:bodyPr>
-          <a:lstStyle/>
-          <a:p>
-            <a:pPr algn="l"/>
-            <a:r>
-              <a:rPr sz="2800" b="1">
-                <a:solidFill>
-                  <a:srgbClr val="16304F"/>
-                </a:solidFill>
-                <a:latin typeface="Microsoft JhengHei"/>
-              </a:rPr>
-              <a:t>今天做到哪裡</a:t>
-            </a:r>
-          </a:p>
-        </p:txBody>
-      </p:sp>
-      <p:sp>
-        <p:nvSpPr>
-          <p:cNvPr id="6" name="Rectangle 5"/>
-          <p:cNvSpPr/>
-          <p:nvPr/>
-        </p:nvSpPr>
-        <p:spPr>
-          <a:xfrm>
-            <a:off x="640080" y="6400800"/>
-            <a:ext cx="10908792" cy="9144"/>
-          </a:xfrm>
-          <a:prstGeom prst="rect">
-            <a:avLst/>
-          </a:prstGeom>
-          <a:solidFill>
-            <a:srgbClr val="E6EAF0"/>
-          </a:solidFill>
-          <a:ln>
-            <a:noFill/>
-          </a:ln>
-          <a:effectLst/>
-        </p:spPr>
-        <p:style>
-          <a:lnRef idx="1">
-            <a:schemeClr val="accent1"/>
-          </a:lnRef>
-          <a:fillRef idx="3">
-            <a:schemeClr val="accent1"/>
-          </a:fillRef>
-          <a:effectRef idx="2">
-            <a:schemeClr val="accent1"/>
-          </a:effectRef>
-          <a:fontRef idx="minor">
-            <a:schemeClr val="lt1"/>
-          </a:fontRef>
-        </p:style>
-        <p:txBody>
-          <a:bodyPr rtlCol="0" anchor="ctr"/>
-          <a:lstStyle/>
-          <a:p>
-            <a:pPr algn="ctr"/>
-          </a:p>
-        </p:txBody>
-      </p:sp>
-      <p:sp>
-        <p:nvSpPr>
-          <p:cNvPr id="7" name="TextBox 6"/>
-          <p:cNvSpPr txBox="1"/>
-          <p:nvPr/>
-        </p:nvSpPr>
-        <p:spPr>
-          <a:xfrm>
-            <a:off x="640080" y="6428232"/>
-            <a:ext cx="7315200" cy="274320"/>
-          </a:xfrm>
-          <a:prstGeom prst="rect">
-            <a:avLst/>
-          </a:prstGeom>
-          <a:noFill/>
-        </p:spPr>
-        <p:txBody>
-          <a:bodyPr wrap="square" anchor="t" lIns="45720" rIns="45720" tIns="27432" bIns="27432">
-            <a:spAutoFit/>
-          </a:bodyPr>
-          <a:lstStyle/>
-          <a:p>
-            <a:pPr algn="l"/>
-            <a:r>
-              <a:rPr sz="950" b="0">
-                <a:solidFill>
-                  <a:srgbClr val="8A93A0"/>
-                </a:solidFill>
-                <a:latin typeface="Microsoft JhengHei"/>
-              </a:rPr>
-              <a:t>訴願智審臺 ｜ 2026 新北市 AI 智慧城市黑客松・法制局組</a:t>
-            </a:r>
-          </a:p>
-        </p:txBody>
-      </p:sp>
-      <p:sp>
-        <p:nvSpPr>
-          <p:cNvPr id="8" name="TextBox 7"/>
-          <p:cNvSpPr txBox="1"/>
-          <p:nvPr/>
-        </p:nvSpPr>
-        <p:spPr>
-          <a:xfrm>
-            <a:off x="10607040" y="6428232"/>
-            <a:ext cx="941832" cy="274320"/>
-          </a:xfrm>
-          <a:prstGeom prst="rect">
-            <a:avLst/>
-          </a:prstGeom>
-          <a:noFill/>
-        </p:spPr>
-        <p:txBody>
-          <a:bodyPr wrap="square" anchor="t" lIns="45720" rIns="45720" tIns="27432" bIns="27432">
-            <a:spAutoFit/>
-          </a:bodyPr>
-          <a:lstStyle/>
-          <a:p>
-            <a:pPr algn="r"/>
-            <a:r>
-              <a:rPr sz="950" b="0">
-                <a:solidFill>
-                  <a:srgbClr val="8A93A0"/>
-                </a:solidFill>
-                <a:latin typeface="Microsoft JhengHei"/>
-              </a:rPr>
-              <a:t>10 / 11</a:t>
-            </a:r>
-          </a:p>
-        </p:txBody>
-      </p:sp>
-      <p:sp>
-        <p:nvSpPr>
-          <p:cNvPr id="9" name="Oval 8"/>
-          <p:cNvSpPr/>
-          <p:nvPr/>
-        </p:nvSpPr>
-        <p:spPr>
-          <a:xfrm>
-            <a:off x="640080" y="1691639"/>
-            <a:ext cx="228600" cy="228600"/>
-          </a:xfrm>
-          <a:prstGeom prst="ellipse">
-            <a:avLst/>
-          </a:prstGeom>
-          <a:solidFill>
-            <a:srgbClr val="2E7D32"/>
-          </a:solidFill>
-          <a:ln>
-            <a:noFill/>
-          </a:ln>
-          <a:effectLst/>
-        </p:spPr>
-        <p:style>
-          <a:lnRef idx="1">
-            <a:schemeClr val="accent1"/>
-          </a:lnRef>
-          <a:fillRef idx="3">
-            <a:schemeClr val="accent1"/>
-          </a:fillRef>
-          <a:effectRef idx="2">
-            <a:schemeClr val="accent1"/>
-          </a:effectRef>
-          <a:fontRef idx="minor">
-            <a:schemeClr val="lt1"/>
-          </a:fontRef>
-        </p:style>
-        <p:txBody>
-          <a:bodyPr rtlCol="0" anchor="ctr" lIns="0" rIns="0" tIns="0" bIns="0"/>
-          <a:lstStyle/>
-          <a:p>
-            <a:pPr algn="ctr"/>
-            <a:r>
-              <a:rPr sz="1300" b="1">
-                <a:solidFill>
-                  <a:srgbClr val="FFFFFF"/>
-                </a:solidFill>
-                <a:latin typeface="Microsoft JhengHei"/>
-              </a:rPr>
-              <a:t/>
-            </a:r>
-          </a:p>
-        </p:txBody>
-      </p:sp>
-      <p:sp>
-        <p:nvSpPr>
-          <p:cNvPr id="10" name="TextBox 9"/>
-          <p:cNvSpPr txBox="1"/>
-          <p:nvPr/>
-        </p:nvSpPr>
-        <p:spPr>
-          <a:xfrm>
-            <a:off x="1005840" y="1554480"/>
-            <a:ext cx="4389120" cy="502920"/>
-          </a:xfrm>
-          <a:prstGeom prst="rect">
-            <a:avLst/>
-          </a:prstGeom>
-          <a:noFill/>
-        </p:spPr>
-        <p:txBody>
-          <a:bodyPr wrap="square" anchor="ctr" lIns="45720" rIns="45720" tIns="27432" bIns="27432">
-            <a:spAutoFit/>
-          </a:bodyPr>
-          <a:lstStyle/>
-          <a:p>
-            <a:pPr algn="l"/>
-            <a:r>
-              <a:rPr sz="1500" b="0">
-                <a:solidFill>
-                  <a:srgbClr val="16304F"/>
-                </a:solidFill>
-                <a:latin typeface="Microsoft JhengHei"/>
-              </a:rPr>
-              <a:t>卷證分類</a:t>
-            </a:r>
-          </a:p>
-        </p:txBody>
-      </p:sp>
-      <p:sp>
-        <p:nvSpPr>
-          <p:cNvPr id="11" name="Rectangle 10"/>
-          <p:cNvSpPr/>
-          <p:nvPr/>
-        </p:nvSpPr>
-        <p:spPr>
-          <a:xfrm>
-            <a:off x="640080" y="2029967"/>
-            <a:ext cx="4754880" cy="9144"/>
-          </a:xfrm>
-          <a:prstGeom prst="rect">
-            <a:avLst/>
-          </a:prstGeom>
-          <a:solidFill>
-            <a:srgbClr val="E6EAF0"/>
-          </a:solidFill>
-          <a:ln>
-            <a:noFill/>
-          </a:ln>
-          <a:effectLst/>
-        </p:spPr>
-        <p:style>
-          <a:lnRef idx="1">
-            <a:schemeClr val="accent1"/>
-          </a:lnRef>
-          <a:fillRef idx="3">
-            <a:schemeClr val="accent1"/>
-          </a:fillRef>
-          <a:effectRef idx="2">
-            <a:schemeClr val="accent1"/>
-          </a:effectRef>
-          <a:fontRef idx="minor">
-            <a:schemeClr val="lt1"/>
-          </a:fontRef>
-        </p:style>
-        <p:txBody>
-          <a:bodyPr rtlCol="0" anchor="ctr"/>
-          <a:lstStyle/>
-          <a:p>
-            <a:pPr algn="ctr"/>
-          </a:p>
-        </p:txBody>
-      </p:sp>
-      <p:sp>
-        <p:nvSpPr>
-          <p:cNvPr id="12" name="Oval 11"/>
-          <p:cNvSpPr/>
-          <p:nvPr/>
-        </p:nvSpPr>
-        <p:spPr>
-          <a:xfrm>
-            <a:off x="640080" y="2194560"/>
-            <a:ext cx="228600" cy="228600"/>
-          </a:xfrm>
-          <a:prstGeom prst="ellipse">
-            <a:avLst/>
-          </a:prstGeom>
-          <a:solidFill>
-            <a:srgbClr val="2E7D32"/>
-          </a:solidFill>
-          <a:ln>
-            <a:noFill/>
-          </a:ln>
-          <a:effectLst/>
-        </p:spPr>
-        <p:style>
-          <a:lnRef idx="1">
-            <a:schemeClr val="accent1"/>
-          </a:lnRef>
-          <a:fillRef idx="3">
-            <a:schemeClr val="accent1"/>
-          </a:fillRef>
-          <a:effectRef idx="2">
-            <a:schemeClr val="accent1"/>
-          </a:effectRef>
-          <a:fontRef idx="minor">
-            <a:schemeClr val="lt1"/>
-          </a:fontRef>
-        </p:style>
-        <p:txBody>
-          <a:bodyPr rtlCol="0" anchor="ctr" lIns="0" rIns="0" tIns="0" bIns="0"/>
-          <a:lstStyle/>
-          <a:p>
-            <a:pPr algn="ctr"/>
-            <a:r>
-              <a:rPr sz="1300" b="1">
-                <a:solidFill>
-                  <a:srgbClr val="FFFFFF"/>
-                </a:solidFill>
-                <a:latin typeface="Microsoft JhengHei"/>
-              </a:rPr>
-              <a:t/>
-            </a:r>
-          </a:p>
-        </p:txBody>
-      </p:sp>
-      <p:sp>
-        <p:nvSpPr>
-          <p:cNvPr id="13" name="TextBox 12"/>
-          <p:cNvSpPr txBox="1"/>
-          <p:nvPr/>
-        </p:nvSpPr>
-        <p:spPr>
-          <a:xfrm>
-            <a:off x="1005840" y="2057400"/>
-            <a:ext cx="4389120" cy="502920"/>
-          </a:xfrm>
-          <a:prstGeom prst="rect">
-            <a:avLst/>
-          </a:prstGeom>
-          <a:noFill/>
-        </p:spPr>
-        <p:txBody>
-          <a:bodyPr wrap="square" anchor="ctr" lIns="45720" rIns="45720" tIns="27432" bIns="27432">
-            <a:spAutoFit/>
-          </a:bodyPr>
-          <a:lstStyle/>
-          <a:p>
-            <a:pPr algn="l"/>
-            <a:r>
-              <a:rPr sz="1500" b="0">
-                <a:solidFill>
-                  <a:srgbClr val="16304F"/>
-                </a:solidFill>
-                <a:latin typeface="Microsoft JhengHei"/>
-              </a:rPr>
-              <a:t>五項分析</a:t>
-            </a:r>
-          </a:p>
-        </p:txBody>
-      </p:sp>
-      <p:sp>
-        <p:nvSpPr>
-          <p:cNvPr id="14" name="Rectangle 13"/>
-          <p:cNvSpPr/>
-          <p:nvPr/>
-        </p:nvSpPr>
-        <p:spPr>
-          <a:xfrm>
-            <a:off x="640080" y="2532888"/>
-            <a:ext cx="4754880" cy="9144"/>
-          </a:xfrm>
-          <a:prstGeom prst="rect">
-            <a:avLst/>
-          </a:prstGeom>
-          <a:solidFill>
-            <a:srgbClr val="E6EAF0"/>
-          </a:solidFill>
-          <a:ln>
-            <a:noFill/>
-          </a:ln>
-          <a:effectLst/>
-        </p:spPr>
-        <p:style>
-          <a:lnRef idx="1">
-            <a:schemeClr val="accent1"/>
-          </a:lnRef>
-          <a:fillRef idx="3">
-            <a:schemeClr val="accent1"/>
-          </a:fillRef>
-          <a:effectRef idx="2">
-            <a:schemeClr val="accent1"/>
-          </a:effectRef>
-          <a:fontRef idx="minor">
-            <a:schemeClr val="lt1"/>
-          </a:fontRef>
-        </p:style>
-        <p:txBody>
-          <a:bodyPr rtlCol="0" anchor="ctr"/>
-          <a:lstStyle/>
-          <a:p>
-            <a:pPr algn="ctr"/>
-          </a:p>
-        </p:txBody>
-      </p:sp>
-      <p:sp>
-        <p:nvSpPr>
-          <p:cNvPr id="15" name="Oval 14"/>
-          <p:cNvSpPr/>
-          <p:nvPr/>
-        </p:nvSpPr>
-        <p:spPr>
-          <a:xfrm>
-            <a:off x="640080" y="2697479"/>
-            <a:ext cx="228600" cy="228600"/>
-          </a:xfrm>
-          <a:prstGeom prst="ellipse">
-            <a:avLst/>
-          </a:prstGeom>
-          <a:solidFill>
-            <a:srgbClr val="2E7D32"/>
-          </a:solidFill>
-          <a:ln>
-            <a:noFill/>
-          </a:ln>
-          <a:effectLst/>
-        </p:spPr>
-        <p:style>
-          <a:lnRef idx="1">
-            <a:schemeClr val="accent1"/>
-          </a:lnRef>
-          <a:fillRef idx="3">
-            <a:schemeClr val="accent1"/>
-          </a:fillRef>
-          <a:effectRef idx="2">
-            <a:schemeClr val="accent1"/>
-          </a:effectRef>
-          <a:fontRef idx="minor">
-            <a:schemeClr val="lt1"/>
-          </a:fontRef>
-        </p:style>
-        <p:txBody>
-          <a:bodyPr rtlCol="0" anchor="ctr" lIns="0" rIns="0" tIns="0" bIns="0"/>
-          <a:lstStyle/>
-          <a:p>
-            <a:pPr algn="ctr"/>
-            <a:r>
-              <a:rPr sz="1300" b="1">
-                <a:solidFill>
-                  <a:srgbClr val="FFFFFF"/>
-                </a:solidFill>
-                <a:latin typeface="Microsoft JhengHei"/>
-              </a:rPr>
-              <a:t/>
-            </a:r>
-          </a:p>
-        </p:txBody>
-      </p:sp>
-      <p:sp>
-        <p:nvSpPr>
-          <p:cNvPr id="16" name="TextBox 15"/>
-          <p:cNvSpPr txBox="1"/>
-          <p:nvPr/>
-        </p:nvSpPr>
-        <p:spPr>
-          <a:xfrm>
-            <a:off x="1005840" y="2560320"/>
-            <a:ext cx="4389120" cy="502920"/>
-          </a:xfrm>
-          <a:prstGeom prst="rect">
-            <a:avLst/>
-          </a:prstGeom>
-          <a:noFill/>
-        </p:spPr>
-        <p:txBody>
-          <a:bodyPr wrap="square" anchor="ctr" lIns="45720" rIns="45720" tIns="27432" bIns="27432">
-            <a:spAutoFit/>
-          </a:bodyPr>
-          <a:lstStyle/>
-          <a:p>
-            <a:pPr algn="l"/>
-            <a:r>
-              <a:rPr sz="1500" b="0">
-                <a:solidFill>
-                  <a:srgbClr val="16304F"/>
-                </a:solidFill>
-                <a:latin typeface="Microsoft JhengHei"/>
-              </a:rPr>
-              <a:t>修正 → 確認 → 局部重算</a:t>
-            </a:r>
-          </a:p>
-        </p:txBody>
-      </p:sp>
-      <p:sp>
-        <p:nvSpPr>
-          <p:cNvPr id="17" name="Rectangle 16"/>
-          <p:cNvSpPr/>
-          <p:nvPr/>
-        </p:nvSpPr>
-        <p:spPr>
-          <a:xfrm>
-            <a:off x="640080" y="3035808"/>
-            <a:ext cx="4754880" cy="9144"/>
-          </a:xfrm>
-          <a:prstGeom prst="rect">
-            <a:avLst/>
-          </a:prstGeom>
-          <a:solidFill>
-            <a:srgbClr val="E6EAF0"/>
-          </a:solidFill>
-          <a:ln>
-            <a:noFill/>
-          </a:ln>
-          <a:effectLst/>
-        </p:spPr>
-        <p:style>
-          <a:lnRef idx="1">
-            <a:schemeClr val="accent1"/>
-          </a:lnRef>
-          <a:fillRef idx="3">
-            <a:schemeClr val="accent1"/>
-          </a:fillRef>
-          <a:effectRef idx="2">
-            <a:schemeClr val="accent1"/>
-          </a:effectRef>
-          <a:fontRef idx="minor">
-            <a:schemeClr val="lt1"/>
-          </a:fontRef>
-        </p:style>
-        <p:txBody>
-          <a:bodyPr rtlCol="0" anchor="ctr"/>
-          <a:lstStyle/>
-          <a:p>
-            <a:pPr algn="ctr"/>
-          </a:p>
-        </p:txBody>
-      </p:sp>
-      <p:sp>
-        <p:nvSpPr>
-          <p:cNvPr id="18" name="Oval 17"/>
-          <p:cNvSpPr/>
-          <p:nvPr/>
-        </p:nvSpPr>
-        <p:spPr>
-          <a:xfrm>
-            <a:off x="640080" y="3200400"/>
-            <a:ext cx="228600" cy="228600"/>
-          </a:xfrm>
-          <a:prstGeom prst="ellipse">
-            <a:avLst/>
-          </a:prstGeom>
-          <a:solidFill>
-            <a:srgbClr val="2E7D32"/>
-          </a:solidFill>
-          <a:ln>
-            <a:noFill/>
-          </a:ln>
-          <a:effectLst/>
-        </p:spPr>
-        <p:style>
-          <a:lnRef idx="1">
-            <a:schemeClr val="accent1"/>
-          </a:lnRef>
-          <a:fillRef idx="3">
-            <a:schemeClr val="accent1"/>
-          </a:fillRef>
-          <a:effectRef idx="2">
-            <a:schemeClr val="accent1"/>
-          </a:effectRef>
-          <a:fontRef idx="minor">
-            <a:schemeClr val="lt1"/>
-          </a:fontRef>
-        </p:style>
-        <p:txBody>
-          <a:bodyPr rtlCol="0" anchor="ctr" lIns="0" rIns="0" tIns="0" bIns="0"/>
-          <a:lstStyle/>
-          <a:p>
-            <a:pPr algn="ctr"/>
-            <a:r>
-              <a:rPr sz="1300" b="1">
-                <a:solidFill>
-                  <a:srgbClr val="FFFFFF"/>
-                </a:solidFill>
-                <a:latin typeface="Microsoft JhengHei"/>
-              </a:rPr>
-              <a:t/>
-            </a:r>
-          </a:p>
-        </p:txBody>
-      </p:sp>
-      <p:sp>
-        <p:nvSpPr>
-          <p:cNvPr id="19" name="TextBox 18"/>
-          <p:cNvSpPr txBox="1"/>
-          <p:nvPr/>
-        </p:nvSpPr>
-        <p:spPr>
-          <a:xfrm>
-            <a:off x="1005840" y="3063240"/>
-            <a:ext cx="4389120" cy="502920"/>
-          </a:xfrm>
-          <a:prstGeom prst="rect">
-            <a:avLst/>
-          </a:prstGeom>
-          <a:noFill/>
-        </p:spPr>
-        <p:txBody>
-          <a:bodyPr wrap="square" anchor="ctr" lIns="45720" rIns="45720" tIns="27432" bIns="27432">
-            <a:spAutoFit/>
-          </a:bodyPr>
-          <a:lstStyle/>
-          <a:p>
-            <a:pPr algn="l"/>
-            <a:r>
-              <a:rPr sz="1500" b="0">
-                <a:solidFill>
-                  <a:srgbClr val="16304F"/>
-                </a:solidFill>
-                <a:latin typeface="Microsoft JhengHei"/>
-              </a:rPr>
-              <a:t>法規庫同步</a:t>
-            </a:r>
-          </a:p>
-        </p:txBody>
-      </p:sp>
-      <p:sp>
-        <p:nvSpPr>
-          <p:cNvPr id="20" name="Rectangle 19"/>
-          <p:cNvSpPr/>
-          <p:nvPr/>
-        </p:nvSpPr>
-        <p:spPr>
-          <a:xfrm>
-            <a:off x="640080" y="3538728"/>
-            <a:ext cx="4754880" cy="9144"/>
-          </a:xfrm>
-          <a:prstGeom prst="rect">
-            <a:avLst/>
-          </a:prstGeom>
-          <a:solidFill>
-            <a:srgbClr val="E6EAF0"/>
-          </a:solidFill>
-          <a:ln>
-            <a:noFill/>
-          </a:ln>
-          <a:effectLst/>
-        </p:spPr>
-        <p:style>
-          <a:lnRef idx="1">
-            <a:schemeClr val="accent1"/>
-          </a:lnRef>
-          <a:fillRef idx="3">
-            <a:schemeClr val="accent1"/>
-          </a:fillRef>
-          <a:effectRef idx="2">
-            <a:schemeClr val="accent1"/>
-          </a:effectRef>
-          <a:fontRef idx="minor">
-            <a:schemeClr val="lt1"/>
-          </a:fontRef>
-        </p:style>
-        <p:txBody>
-          <a:bodyPr rtlCol="0" anchor="ctr"/>
-          <a:lstStyle/>
-          <a:p>
-            <a:pPr algn="ctr"/>
-          </a:p>
-        </p:txBody>
-      </p:sp>
-      <p:sp>
-        <p:nvSpPr>
-          <p:cNvPr id="21" name="Oval 20"/>
-          <p:cNvSpPr/>
-          <p:nvPr/>
-        </p:nvSpPr>
-        <p:spPr>
-          <a:xfrm>
-            <a:off x="640080" y="3703320"/>
-            <a:ext cx="228600" cy="228600"/>
-          </a:xfrm>
-          <a:prstGeom prst="ellipse">
-            <a:avLst/>
-          </a:prstGeom>
-          <a:solidFill>
-            <a:srgbClr val="2E7D32"/>
-          </a:solidFill>
-          <a:ln>
-            <a:noFill/>
-          </a:ln>
-          <a:effectLst/>
-        </p:spPr>
-        <p:style>
-          <a:lnRef idx="1">
-            <a:schemeClr val="accent1"/>
-          </a:lnRef>
-          <a:fillRef idx="3">
-            <a:schemeClr val="accent1"/>
-          </a:fillRef>
-          <a:effectRef idx="2">
-            <a:schemeClr val="accent1"/>
-          </a:effectRef>
-          <a:fontRef idx="minor">
-            <a:schemeClr val="lt1"/>
-          </a:fontRef>
-        </p:style>
-        <p:txBody>
-          <a:bodyPr rtlCol="0" anchor="ctr" lIns="0" rIns="0" tIns="0" bIns="0"/>
-          <a:lstStyle/>
-          <a:p>
-            <a:pPr algn="ctr"/>
-            <a:r>
-              <a:rPr sz="1300" b="1">
-                <a:solidFill>
-                  <a:srgbClr val="FFFFFF"/>
-                </a:solidFill>
-                <a:latin typeface="Microsoft JhengHei"/>
-              </a:rPr>
-              <a:t/>
-            </a:r>
-          </a:p>
-        </p:txBody>
-      </p:sp>
-      <p:sp>
-        <p:nvSpPr>
-          <p:cNvPr id="22" name="TextBox 21"/>
-          <p:cNvSpPr txBox="1"/>
-          <p:nvPr/>
-        </p:nvSpPr>
-        <p:spPr>
-          <a:xfrm>
-            <a:off x="1005840" y="3566160"/>
-            <a:ext cx="4389120" cy="502920"/>
-          </a:xfrm>
-          <a:prstGeom prst="rect">
-            <a:avLst/>
-          </a:prstGeom>
-          <a:noFill/>
-        </p:spPr>
-        <p:txBody>
-          <a:bodyPr wrap="square" anchor="ctr" lIns="45720" rIns="45720" tIns="27432" bIns="27432">
-            <a:spAutoFit/>
-          </a:bodyPr>
-          <a:lstStyle/>
-          <a:p>
-            <a:pPr algn="l"/>
-            <a:r>
-              <a:rPr sz="1500" b="0">
-                <a:solidFill>
-                  <a:srgbClr val="16304F"/>
-                </a:solidFill>
-                <a:latin typeface="Microsoft JhengHei"/>
-              </a:rPr>
-              <a:t>畫面全部連到線上系統</a:t>
-            </a:r>
-          </a:p>
-        </p:txBody>
-      </p:sp>
-      <p:sp>
-        <p:nvSpPr>
-          <p:cNvPr id="23" name="Rectangle 22"/>
-          <p:cNvSpPr/>
-          <p:nvPr/>
-        </p:nvSpPr>
-        <p:spPr>
-          <a:xfrm>
-            <a:off x="640080" y="4041648"/>
-            <a:ext cx="4754880" cy="9144"/>
-          </a:xfrm>
-          <a:prstGeom prst="rect">
-            <a:avLst/>
-          </a:prstGeom>
-          <a:solidFill>
-            <a:srgbClr val="E6EAF0"/>
-          </a:solidFill>
-          <a:ln>
-            <a:noFill/>
-          </a:ln>
-          <a:effectLst/>
-        </p:spPr>
-        <p:style>
-          <a:lnRef idx="1">
-            <a:schemeClr val="accent1"/>
-          </a:lnRef>
-          <a:fillRef idx="3">
-            <a:schemeClr val="accent1"/>
-          </a:fillRef>
-          <a:effectRef idx="2">
-            <a:schemeClr val="accent1"/>
-          </a:effectRef>
-          <a:fontRef idx="minor">
-            <a:schemeClr val="lt1"/>
-          </a:fontRef>
-        </p:style>
-        <p:txBody>
-          <a:bodyPr rtlCol="0" anchor="ctr"/>
-          <a:lstStyle/>
-          <a:p>
-            <a:pPr algn="ctr"/>
-          </a:p>
-        </p:txBody>
-      </p:sp>
-      <p:sp>
-        <p:nvSpPr>
-          <p:cNvPr id="24" name="Oval 23"/>
-          <p:cNvSpPr/>
-          <p:nvPr/>
-        </p:nvSpPr>
-        <p:spPr>
-          <a:xfrm>
-            <a:off x="640080" y="4206240"/>
-            <a:ext cx="228600" cy="228600"/>
-          </a:xfrm>
-          <a:prstGeom prst="ellipse">
-            <a:avLst/>
-          </a:prstGeom>
-          <a:solidFill>
-            <a:srgbClr val="2E7D32"/>
-          </a:solidFill>
-          <a:ln>
-            <a:noFill/>
-          </a:ln>
-          <a:effectLst/>
-        </p:spPr>
-        <p:style>
-          <a:lnRef idx="1">
-            <a:schemeClr val="accent1"/>
-          </a:lnRef>
-          <a:fillRef idx="3">
-            <a:schemeClr val="accent1"/>
-          </a:fillRef>
-          <a:effectRef idx="2">
-            <a:schemeClr val="accent1"/>
-          </a:effectRef>
-          <a:fontRef idx="minor">
-            <a:schemeClr val="lt1"/>
-          </a:fontRef>
-        </p:style>
-        <p:txBody>
-          <a:bodyPr rtlCol="0" anchor="ctr" lIns="0" rIns="0" tIns="0" bIns="0"/>
-          <a:lstStyle/>
-          <a:p>
-            <a:pPr algn="ctr"/>
-            <a:r>
-              <a:rPr sz="1300" b="1">
-                <a:solidFill>
-                  <a:srgbClr val="FFFFFF"/>
-                </a:solidFill>
-                <a:latin typeface="Microsoft JhengHei"/>
-              </a:rPr>
-              <a:t/>
-            </a:r>
-          </a:p>
-        </p:txBody>
-      </p:sp>
-      <p:sp>
-        <p:nvSpPr>
-          <p:cNvPr id="25" name="TextBox 24"/>
-          <p:cNvSpPr txBox="1"/>
-          <p:nvPr/>
-        </p:nvSpPr>
-        <p:spPr>
-          <a:xfrm>
-            <a:off x="1005840" y="4069080"/>
-            <a:ext cx="4389120" cy="502920"/>
-          </a:xfrm>
-          <a:prstGeom prst="rect">
-            <a:avLst/>
-          </a:prstGeom>
-          <a:noFill/>
-        </p:spPr>
-        <p:txBody>
-          <a:bodyPr wrap="square" anchor="ctr" lIns="45720" rIns="45720" tIns="27432" bIns="27432">
-            <a:spAutoFit/>
-          </a:bodyPr>
-          <a:lstStyle/>
-          <a:p>
-            <a:pPr algn="l"/>
-            <a:r>
-              <a:rPr sz="1500" b="0">
-                <a:solidFill>
-                  <a:srgbClr val="16304F"/>
-                </a:solidFill>
-                <a:latin typeface="Microsoft JhengHei"/>
-              </a:rPr>
-              <a:t>自動化測試 52 個</a:t>
-            </a:r>
-          </a:p>
-        </p:txBody>
-      </p:sp>
-      <p:sp>
-        <p:nvSpPr>
-          <p:cNvPr id="26" name="Rectangle 25"/>
-          <p:cNvSpPr/>
-          <p:nvPr/>
-        </p:nvSpPr>
-        <p:spPr>
-          <a:xfrm>
-            <a:off x="640080" y="4544568"/>
-            <a:ext cx="4754880" cy="9144"/>
-          </a:xfrm>
-          <a:prstGeom prst="rect">
-            <a:avLst/>
-          </a:prstGeom>
-          <a:solidFill>
-            <a:srgbClr val="E6EAF0"/>
-          </a:solidFill>
-          <a:ln>
-            <a:noFill/>
-          </a:ln>
-          <a:effectLst/>
-        </p:spPr>
-        <p:style>
-          <a:lnRef idx="1">
-            <a:schemeClr val="accent1"/>
-          </a:lnRef>
-          <a:fillRef idx="3">
-            <a:schemeClr val="accent1"/>
-          </a:fillRef>
-          <a:effectRef idx="2">
-            <a:schemeClr val="accent1"/>
-          </a:effectRef>
-          <a:fontRef idx="minor">
-            <a:schemeClr val="lt1"/>
-          </a:fontRef>
-        </p:style>
-        <p:txBody>
-          <a:bodyPr rtlCol="0" anchor="ctr"/>
-          <a:lstStyle/>
-          <a:p>
-            <a:pPr algn="ctr"/>
-          </a:p>
-        </p:txBody>
-      </p:sp>
-      <p:sp>
-        <p:nvSpPr>
-          <p:cNvPr id="27" name="Oval 26"/>
-          <p:cNvSpPr/>
-          <p:nvPr/>
-        </p:nvSpPr>
-        <p:spPr>
-          <a:xfrm>
-            <a:off x="640080" y="4709160"/>
-            <a:ext cx="228600" cy="228600"/>
-          </a:xfrm>
-          <a:prstGeom prst="ellipse">
-            <a:avLst/>
-          </a:prstGeom>
-          <a:solidFill>
-            <a:srgbClr val="D98E04"/>
-          </a:solidFill>
-          <a:ln>
-            <a:noFill/>
-          </a:ln>
-          <a:effectLst/>
-        </p:spPr>
-        <p:style>
-          <a:lnRef idx="1">
-            <a:schemeClr val="accent1"/>
-          </a:lnRef>
-          <a:fillRef idx="3">
-            <a:schemeClr val="accent1"/>
-          </a:fillRef>
-          <a:effectRef idx="2">
-            <a:schemeClr val="accent1"/>
-          </a:effectRef>
-          <a:fontRef idx="minor">
-            <a:schemeClr val="lt1"/>
-          </a:fontRef>
-        </p:style>
-        <p:txBody>
-          <a:bodyPr rtlCol="0" anchor="ctr" lIns="0" rIns="0" tIns="0" bIns="0"/>
-          <a:lstStyle/>
-          <a:p>
-            <a:pPr algn="ctr"/>
-            <a:r>
-              <a:rPr sz="1300" b="1">
-                <a:solidFill>
-                  <a:srgbClr val="FFFFFF"/>
-                </a:solidFill>
-                <a:latin typeface="Microsoft JhengHei"/>
-              </a:rPr>
-              <a:t/>
-            </a:r>
-          </a:p>
-        </p:txBody>
-      </p:sp>
-      <p:sp>
-        <p:nvSpPr>
-          <p:cNvPr id="28" name="TextBox 27"/>
-          <p:cNvSpPr txBox="1"/>
-          <p:nvPr/>
-        </p:nvSpPr>
-        <p:spPr>
-          <a:xfrm>
-            <a:off x="1005840" y="4572000"/>
-            <a:ext cx="4389120" cy="502920"/>
-          </a:xfrm>
-          <a:prstGeom prst="rect">
-            <a:avLst/>
-          </a:prstGeom>
-          <a:noFill/>
-        </p:spPr>
-        <p:txBody>
-          <a:bodyPr wrap="square" anchor="ctr" lIns="45720" rIns="45720" tIns="27432" bIns="27432">
-            <a:spAutoFit/>
-          </a:bodyPr>
-          <a:lstStyle/>
-          <a:p>
-            <a:pPr algn="l"/>
-            <a:r>
-              <a:rPr sz="1500" b="0">
-                <a:solidFill>
-                  <a:srgbClr val="16304F"/>
-                </a:solidFill>
-                <a:latin typeface="Microsoft JhengHei"/>
-              </a:rPr>
-              <a:t>補件辨識</a:t>
-            </a:r>
-          </a:p>
-        </p:txBody>
-      </p:sp>
-      <p:sp>
-        <p:nvSpPr>
-          <p:cNvPr id="29" name="Rectangle 28"/>
-          <p:cNvSpPr/>
-          <p:nvPr/>
-        </p:nvSpPr>
-        <p:spPr>
-          <a:xfrm>
-            <a:off x="640080" y="5047488"/>
-            <a:ext cx="4754880" cy="9144"/>
-          </a:xfrm>
-          <a:prstGeom prst="rect">
-            <a:avLst/>
-          </a:prstGeom>
-          <a:solidFill>
-            <a:srgbClr val="E6EAF0"/>
-          </a:solidFill>
-          <a:ln>
-            <a:noFill/>
-          </a:ln>
-          <a:effectLst/>
-        </p:spPr>
-        <p:style>
-          <a:lnRef idx="1">
-            <a:schemeClr val="accent1"/>
-          </a:lnRef>
-          <a:fillRef idx="3">
-            <a:schemeClr val="accent1"/>
-          </a:fillRef>
-          <a:effectRef idx="2">
-            <a:schemeClr val="accent1"/>
-          </a:effectRef>
-          <a:fontRef idx="minor">
-            <a:schemeClr val="lt1"/>
-          </a:fontRef>
-        </p:style>
-        <p:txBody>
-          <a:bodyPr rtlCol="0" anchor="ctr"/>
-          <a:lstStyle/>
-          <a:p>
-            <a:pPr algn="ctr"/>
-          </a:p>
-        </p:txBody>
-      </p:sp>
-      <p:sp>
-        <p:nvSpPr>
-          <p:cNvPr id="30" name="Oval 29"/>
-          <p:cNvSpPr/>
-          <p:nvPr/>
-        </p:nvSpPr>
-        <p:spPr>
-          <a:xfrm>
-            <a:off x="640080" y="5212080"/>
-            <a:ext cx="228600" cy="228600"/>
-          </a:xfrm>
-          <a:prstGeom prst="ellipse">
-            <a:avLst/>
-          </a:prstGeom>
-          <a:solidFill>
-            <a:srgbClr val="C5CDD8"/>
-          </a:solidFill>
-          <a:ln>
-            <a:noFill/>
-          </a:ln>
-          <a:effectLst/>
-        </p:spPr>
-        <p:style>
-          <a:lnRef idx="1">
-            <a:schemeClr val="accent1"/>
-          </a:lnRef>
-          <a:fillRef idx="3">
-            <a:schemeClr val="accent1"/>
-          </a:fillRef>
-          <a:effectRef idx="2">
-            <a:schemeClr val="accent1"/>
-          </a:effectRef>
-          <a:fontRef idx="minor">
-            <a:schemeClr val="lt1"/>
-          </a:fontRef>
-        </p:style>
-        <p:txBody>
-          <a:bodyPr rtlCol="0" anchor="ctr" lIns="0" rIns="0" tIns="0" bIns="0"/>
-          <a:lstStyle/>
-          <a:p>
-            <a:pPr algn="ctr"/>
-            <a:r>
-              <a:rPr sz="1300" b="1">
-                <a:solidFill>
-                  <a:srgbClr val="FFFFFF"/>
-                </a:solidFill>
-                <a:latin typeface="Microsoft JhengHei"/>
-              </a:rPr>
-              <a:t/>
-            </a:r>
-          </a:p>
-        </p:txBody>
-      </p:sp>
-      <p:sp>
-        <p:nvSpPr>
-          <p:cNvPr id="31" name="TextBox 30"/>
-          <p:cNvSpPr txBox="1"/>
-          <p:nvPr/>
-        </p:nvSpPr>
-        <p:spPr>
-          <a:xfrm>
-            <a:off x="1005840" y="5074920"/>
-            <a:ext cx="4389120" cy="502920"/>
-          </a:xfrm>
-          <a:prstGeom prst="rect">
-            <a:avLst/>
-          </a:prstGeom>
-          <a:noFill/>
-        </p:spPr>
-        <p:txBody>
-          <a:bodyPr wrap="square" anchor="ctr" lIns="45720" rIns="45720" tIns="27432" bIns="27432">
-            <a:spAutoFit/>
-          </a:bodyPr>
-          <a:lstStyle/>
-          <a:p>
-            <a:pPr algn="l"/>
-            <a:r>
-              <a:rPr sz="1500" b="0">
-                <a:solidFill>
-                  <a:srgbClr val="16304F"/>
-                </a:solidFill>
-                <a:latin typeface="Microsoft JhengHei"/>
-              </a:rPr>
-              <a:t>登入／HTTPS</a:t>
-            </a:r>
-          </a:p>
-        </p:txBody>
-      </p:sp>
-      <p:sp>
-        <p:nvSpPr>
-          <p:cNvPr id="32" name="Rectangle 31"/>
-          <p:cNvSpPr/>
-          <p:nvPr/>
-        </p:nvSpPr>
-        <p:spPr>
-          <a:xfrm>
-            <a:off x="640080" y="5550408"/>
-            <a:ext cx="4754880" cy="9144"/>
-          </a:xfrm>
-          <a:prstGeom prst="rect">
-            <a:avLst/>
-          </a:prstGeom>
-          <a:solidFill>
-            <a:srgbClr val="E6EAF0"/>
-          </a:solidFill>
-          <a:ln>
-            <a:noFill/>
-          </a:ln>
-          <a:effectLst/>
-        </p:spPr>
-        <p:style>
-          <a:lnRef idx="1">
-            <a:schemeClr val="accent1"/>
-          </a:lnRef>
-          <a:fillRef idx="3">
-            <a:schemeClr val="accent1"/>
-          </a:fillRef>
-          <a:effectRef idx="2">
-            <a:schemeClr val="accent1"/>
-          </a:effectRef>
-          <a:fontRef idx="minor">
-            <a:schemeClr val="lt1"/>
-          </a:fontRef>
-        </p:style>
-        <p:txBody>
-          <a:bodyPr rtlCol="0" anchor="ctr"/>
-          <a:lstStyle/>
-          <a:p>
-            <a:pPr algn="ctr"/>
-          </a:p>
-        </p:txBody>
-      </p:sp>
-      <p:sp>
-        <p:nvSpPr>
-          <p:cNvPr id="33" name="Rounded Rectangle 32"/>
-          <p:cNvSpPr/>
-          <p:nvPr/>
-        </p:nvSpPr>
-        <p:spPr>
-          <a:xfrm>
-            <a:off x="5943600" y="1554480"/>
-            <a:ext cx="2697480" cy="1691640"/>
-          </a:xfrm>
-          <a:prstGeom prst="roundRect">
-            <a:avLst>
-              <a:gd name="adj" fmla="val 8000"/>
-            </a:avLst>
-          </a:prstGeom>
-          <a:solidFill>
-            <a:srgbClr val="F4F6F9"/>
-          </a:solidFill>
-          <a:ln>
-            <a:noFill/>
-          </a:ln>
-          <a:effectLst/>
-        </p:spPr>
-        <p:style>
-          <a:lnRef idx="1">
-            <a:schemeClr val="accent1"/>
-          </a:lnRef>
-          <a:fillRef idx="3">
-            <a:schemeClr val="accent1"/>
-          </a:fillRef>
-          <a:effectRef idx="2">
-            <a:schemeClr val="accent1"/>
-          </a:effectRef>
-          <a:fontRef idx="minor">
-            <a:schemeClr val="lt1"/>
-          </a:fontRef>
-        </p:style>
-        <p:txBody>
-          <a:bodyPr rtlCol="0" anchor="ctr"/>
-          <a:lstStyle/>
-          <a:p>
-            <a:pPr algn="ctr"/>
-          </a:p>
-        </p:txBody>
-      </p:sp>
-      <p:sp>
-        <p:nvSpPr>
-          <p:cNvPr id="34" name="TextBox 33"/>
-          <p:cNvSpPr txBox="1"/>
-          <p:nvPr/>
-        </p:nvSpPr>
-        <p:spPr>
-          <a:xfrm>
-            <a:off x="6108192" y="1664207"/>
-            <a:ext cx="2377440" cy="640080"/>
-          </a:xfrm>
-          <a:prstGeom prst="rect">
-            <a:avLst/>
-          </a:prstGeom>
-          <a:noFill/>
-        </p:spPr>
-        <p:txBody>
-          <a:bodyPr wrap="square" anchor="t" lIns="45720" rIns="45720" tIns="27432" bIns="27432">
-            <a:spAutoFit/>
-          </a:bodyPr>
-          <a:lstStyle/>
-          <a:p>
-            <a:pPr algn="l"/>
-            <a:r>
-              <a:rPr sz="3000" b="1">
-                <a:solidFill>
-                  <a:srgbClr val="16304F"/>
-                </a:solidFill>
-                <a:latin typeface="Microsoft JhengHei"/>
-              </a:rPr>
-              <a:t>20%</a:t>
-            </a:r>
-          </a:p>
-        </p:txBody>
-      </p:sp>
-      <p:sp>
-        <p:nvSpPr>
-          <p:cNvPr id="35" name="TextBox 34"/>
-          <p:cNvSpPr txBox="1"/>
-          <p:nvPr/>
-        </p:nvSpPr>
-        <p:spPr>
-          <a:xfrm>
-            <a:off x="6108192" y="2286000"/>
-            <a:ext cx="2377440" cy="365760"/>
-          </a:xfrm>
-          <a:prstGeom prst="rect">
-            <a:avLst/>
-          </a:prstGeom>
-          <a:noFill/>
-        </p:spPr>
-        <p:txBody>
-          <a:bodyPr wrap="square" anchor="t" lIns="45720" rIns="45720" tIns="27432" bIns="27432">
-            <a:spAutoFit/>
-          </a:bodyPr>
-          <a:lstStyle/>
-          <a:p>
-            <a:pPr algn="l"/>
-            <a:r>
-              <a:rPr sz="1400" b="1">
-                <a:solidFill>
-                  <a:srgbClr val="16304F"/>
-                </a:solidFill>
-                <a:latin typeface="Microsoft JhengHei"/>
-              </a:rPr>
-              <a:t>技術可行性</a:t>
-            </a:r>
-          </a:p>
-        </p:txBody>
-      </p:sp>
-      <p:sp>
-        <p:nvSpPr>
-          <p:cNvPr id="36" name="TextBox 35"/>
-          <p:cNvSpPr txBox="1"/>
-          <p:nvPr/>
-        </p:nvSpPr>
-        <p:spPr>
-          <a:xfrm>
-            <a:off x="6108192" y="2633472"/>
-            <a:ext cx="2377440" cy="548640"/>
-          </a:xfrm>
-          <a:prstGeom prst="rect">
-            <a:avLst/>
-          </a:prstGeom>
-          <a:noFill/>
-        </p:spPr>
-        <p:txBody>
-          <a:bodyPr wrap="square" anchor="t" lIns="45720" rIns="45720" tIns="27432" bIns="27432">
-            <a:spAutoFit/>
-          </a:bodyPr>
-          <a:lstStyle/>
-          <a:p>
-            <a:pPr algn="l"/>
-            <a:r>
-              <a:rPr sz="1050" b="0">
-                <a:solidFill>
-                  <a:srgbClr val="334455"/>
-                </a:solidFill>
-                <a:latin typeface="Microsoft JhengHei"/>
-              </a:rPr>
-              <a:t>允許清單內；呼叫頻率限制下固定流程</a:t>
-            </a:r>
-          </a:p>
-        </p:txBody>
-      </p:sp>
-      <p:sp>
-        <p:nvSpPr>
-          <p:cNvPr id="37" name="Rounded Rectangle 36"/>
-          <p:cNvSpPr/>
-          <p:nvPr/>
-        </p:nvSpPr>
-        <p:spPr>
-          <a:xfrm>
-            <a:off x="8778240" y="1554480"/>
-            <a:ext cx="2697480" cy="1691640"/>
-          </a:xfrm>
-          <a:prstGeom prst="roundRect">
-            <a:avLst>
-              <a:gd name="adj" fmla="val 8000"/>
-            </a:avLst>
-          </a:prstGeom>
-          <a:solidFill>
-            <a:srgbClr val="F4F6F9"/>
-          </a:solidFill>
-          <a:ln>
-            <a:noFill/>
-          </a:ln>
-          <a:effectLst/>
-        </p:spPr>
-        <p:style>
-          <a:lnRef idx="1">
-            <a:schemeClr val="accent1"/>
-          </a:lnRef>
-          <a:fillRef idx="3">
-            <a:schemeClr val="accent1"/>
-          </a:fillRef>
-          <a:effectRef idx="2">
-            <a:schemeClr val="accent1"/>
-          </a:effectRef>
-          <a:fontRef idx="minor">
-            <a:schemeClr val="lt1"/>
-          </a:fontRef>
-        </p:style>
-        <p:txBody>
-          <a:bodyPr rtlCol="0" anchor="ctr"/>
-          <a:lstStyle/>
-          <a:p>
-            <a:pPr algn="ctr"/>
-          </a:p>
-        </p:txBody>
-      </p:sp>
-      <p:sp>
-        <p:nvSpPr>
-          <p:cNvPr id="38" name="TextBox 37"/>
-          <p:cNvSpPr txBox="1"/>
-          <p:nvPr/>
-        </p:nvSpPr>
-        <p:spPr>
-          <a:xfrm>
-            <a:off x="8942832" y="1664207"/>
-            <a:ext cx="2377440" cy="640080"/>
-          </a:xfrm>
-          <a:prstGeom prst="rect">
-            <a:avLst/>
-          </a:prstGeom>
-          <a:noFill/>
-        </p:spPr>
-        <p:txBody>
-          <a:bodyPr wrap="square" anchor="t" lIns="45720" rIns="45720" tIns="27432" bIns="27432">
-            <a:spAutoFit/>
-          </a:bodyPr>
-          <a:lstStyle/>
-          <a:p>
-            <a:pPr algn="l"/>
-            <a:r>
-              <a:rPr sz="3000" b="1">
-                <a:solidFill>
-                  <a:srgbClr val="16304F"/>
-                </a:solidFill>
-                <a:latin typeface="Microsoft JhengHei"/>
-              </a:rPr>
-              <a:t>25%</a:t>
-            </a:r>
-          </a:p>
-        </p:txBody>
-      </p:sp>
-      <p:sp>
-        <p:nvSpPr>
-          <p:cNvPr id="39" name="TextBox 38"/>
-          <p:cNvSpPr txBox="1"/>
-          <p:nvPr/>
-        </p:nvSpPr>
-        <p:spPr>
-          <a:xfrm>
-            <a:off x="8942832" y="2286000"/>
-            <a:ext cx="2377440" cy="365760"/>
-          </a:xfrm>
-          <a:prstGeom prst="rect">
-            <a:avLst/>
-          </a:prstGeom>
-          <a:noFill/>
-        </p:spPr>
-        <p:txBody>
-          <a:bodyPr wrap="square" anchor="t" lIns="45720" rIns="45720" tIns="27432" bIns="27432">
-            <a:spAutoFit/>
-          </a:bodyPr>
-          <a:lstStyle/>
-          <a:p>
-            <a:pPr algn="l"/>
-            <a:r>
-              <a:rPr sz="1400" b="1">
-                <a:solidFill>
-                  <a:srgbClr val="16304F"/>
-                </a:solidFill>
-                <a:latin typeface="Microsoft JhengHei"/>
-              </a:rPr>
-              <a:t>完成度</a:t>
-            </a:r>
-          </a:p>
-        </p:txBody>
-      </p:sp>
-      <p:sp>
-        <p:nvSpPr>
-          <p:cNvPr id="40" name="TextBox 39"/>
-          <p:cNvSpPr txBox="1"/>
-          <p:nvPr/>
-        </p:nvSpPr>
-        <p:spPr>
-          <a:xfrm>
-            <a:off x="8942832" y="2633472"/>
-            <a:ext cx="2377440" cy="548640"/>
-          </a:xfrm>
-          <a:prstGeom prst="rect">
-            <a:avLst/>
-          </a:prstGeom>
-          <a:noFill/>
-        </p:spPr>
-        <p:txBody>
-          <a:bodyPr wrap="square" anchor="t" lIns="45720" rIns="45720" tIns="27432" bIns="27432">
-            <a:spAutoFit/>
-          </a:bodyPr>
-          <a:lstStyle/>
-          <a:p>
-            <a:pPr algn="l"/>
-            <a:r>
-              <a:rPr sz="1050" b="0">
-                <a:solidFill>
-                  <a:srgbClr val="334455"/>
-                </a:solidFill>
-                <a:latin typeface="Microsoft JhengHei"/>
-              </a:rPr>
-              <a:t>Live Demo 走完整流程；52 個測試</a:t>
-            </a:r>
-          </a:p>
-        </p:txBody>
-      </p:sp>
-      <p:sp>
-        <p:nvSpPr>
-          <p:cNvPr id="41" name="Rounded Rectangle 40"/>
-          <p:cNvSpPr/>
-          <p:nvPr/>
-        </p:nvSpPr>
-        <p:spPr>
-          <a:xfrm>
-            <a:off x="5943600" y="3383280"/>
-            <a:ext cx="2697480" cy="1691640"/>
-          </a:xfrm>
-          <a:prstGeom prst="roundRect">
-            <a:avLst>
-              <a:gd name="adj" fmla="val 8000"/>
-            </a:avLst>
-          </a:prstGeom>
-          <a:solidFill>
-            <a:srgbClr val="F4F6F9"/>
-          </a:solidFill>
-          <a:ln>
-            <a:noFill/>
-          </a:ln>
-          <a:effectLst/>
-        </p:spPr>
-        <p:style>
-          <a:lnRef idx="1">
-            <a:schemeClr val="accent1"/>
-          </a:lnRef>
-          <a:fillRef idx="3">
-            <a:schemeClr val="accent1"/>
-          </a:fillRef>
-          <a:effectRef idx="2">
-            <a:schemeClr val="accent1"/>
-          </a:effectRef>
-          <a:fontRef idx="minor">
-            <a:schemeClr val="lt1"/>
-          </a:fontRef>
-        </p:style>
-        <p:txBody>
-          <a:bodyPr rtlCol="0" anchor="ctr"/>
-          <a:lstStyle/>
-          <a:p>
-            <a:pPr algn="ctr"/>
-          </a:p>
-        </p:txBody>
-      </p:sp>
-      <p:sp>
-        <p:nvSpPr>
-          <p:cNvPr id="42" name="TextBox 41"/>
-          <p:cNvSpPr txBox="1"/>
-          <p:nvPr/>
-        </p:nvSpPr>
-        <p:spPr>
-          <a:xfrm>
-            <a:off x="6108192" y="3493008"/>
-            <a:ext cx="2377440" cy="640080"/>
-          </a:xfrm>
-          <a:prstGeom prst="rect">
-            <a:avLst/>
-          </a:prstGeom>
-          <a:noFill/>
-        </p:spPr>
-        <p:txBody>
-          <a:bodyPr wrap="square" anchor="t" lIns="45720" rIns="45720" tIns="27432" bIns="27432">
-            <a:spAutoFit/>
-          </a:bodyPr>
-          <a:lstStyle/>
-          <a:p>
-            <a:pPr algn="l"/>
-            <a:r>
-              <a:rPr sz="3000" b="1">
-                <a:solidFill>
-                  <a:srgbClr val="16304F"/>
-                </a:solidFill>
-                <a:latin typeface="Microsoft JhengHei"/>
-              </a:rPr>
-              <a:t>30%</a:t>
-            </a:r>
-          </a:p>
-        </p:txBody>
-      </p:sp>
-      <p:sp>
-        <p:nvSpPr>
-          <p:cNvPr id="43" name="TextBox 42"/>
-          <p:cNvSpPr txBox="1"/>
-          <p:nvPr/>
-        </p:nvSpPr>
-        <p:spPr>
-          <a:xfrm>
-            <a:off x="6108192" y="4114800"/>
-            <a:ext cx="2377440" cy="365760"/>
-          </a:xfrm>
-          <a:prstGeom prst="rect">
-            <a:avLst/>
-          </a:prstGeom>
-          <a:noFill/>
-        </p:spPr>
-        <p:txBody>
-          <a:bodyPr wrap="square" anchor="t" lIns="45720" rIns="45720" tIns="27432" bIns="27432">
-            <a:spAutoFit/>
-          </a:bodyPr>
-          <a:lstStyle/>
-          <a:p>
-            <a:pPr algn="l"/>
-            <a:r>
-              <a:rPr sz="1400" b="1">
-                <a:solidFill>
-                  <a:srgbClr val="16304F"/>
-                </a:solidFill>
-                <a:latin typeface="Microsoft JhengHei"/>
-              </a:rPr>
-              <a:t>資料應用性</a:t>
-            </a:r>
-          </a:p>
-        </p:txBody>
-      </p:sp>
-      <p:sp>
-        <p:nvSpPr>
-          <p:cNvPr id="44" name="TextBox 43"/>
-          <p:cNvSpPr txBox="1"/>
-          <p:nvPr/>
-        </p:nvSpPr>
-        <p:spPr>
-          <a:xfrm>
-            <a:off x="6108192" y="4462272"/>
-            <a:ext cx="2377440" cy="548640"/>
-          </a:xfrm>
-          <a:prstGeom prst="rect">
-            <a:avLst/>
-          </a:prstGeom>
-          <a:noFill/>
-        </p:spPr>
-        <p:txBody>
-          <a:bodyPr wrap="square" anchor="t" lIns="45720" rIns="45720" tIns="27432" bIns="27432">
-            <a:spAutoFit/>
-          </a:bodyPr>
-          <a:lstStyle/>
-          <a:p>
-            <a:pPr algn="l"/>
-            <a:r>
-              <a:rPr sz="1050" b="0">
-                <a:solidFill>
-                  <a:srgbClr val="334455"/>
-                </a:solidFill>
-                <a:latin typeface="Microsoft JhengHei"/>
-              </a:rPr>
-              <a:t>101 份讀完再設計；三套考題</a:t>
-            </a:r>
-          </a:p>
-        </p:txBody>
-      </p:sp>
-      <p:sp>
-        <p:nvSpPr>
-          <p:cNvPr id="45" name="Rounded Rectangle 44"/>
-          <p:cNvSpPr/>
-          <p:nvPr/>
-        </p:nvSpPr>
-        <p:spPr>
-          <a:xfrm>
-            <a:off x="8778240" y="3383280"/>
-            <a:ext cx="2697480" cy="1691640"/>
-          </a:xfrm>
-          <a:prstGeom prst="roundRect">
-            <a:avLst>
-              <a:gd name="adj" fmla="val 8000"/>
-            </a:avLst>
-          </a:prstGeom>
-          <a:solidFill>
-            <a:srgbClr val="F4F6F9"/>
-          </a:solidFill>
-          <a:ln>
-            <a:noFill/>
-          </a:ln>
-          <a:effectLst/>
-        </p:spPr>
-        <p:style>
-          <a:lnRef idx="1">
-            <a:schemeClr val="accent1"/>
-          </a:lnRef>
-          <a:fillRef idx="3">
-            <a:schemeClr val="accent1"/>
-          </a:fillRef>
-          <a:effectRef idx="2">
-            <a:schemeClr val="accent1"/>
-          </a:effectRef>
-          <a:fontRef idx="minor">
-            <a:schemeClr val="lt1"/>
-          </a:fontRef>
-        </p:style>
-        <p:txBody>
-          <a:bodyPr rtlCol="0" anchor="ctr"/>
-          <a:lstStyle/>
-          <a:p>
-            <a:pPr algn="ctr"/>
-          </a:p>
-        </p:txBody>
-      </p:sp>
-      <p:sp>
-        <p:nvSpPr>
-          <p:cNvPr id="46" name="TextBox 45"/>
-          <p:cNvSpPr txBox="1"/>
-          <p:nvPr/>
-        </p:nvSpPr>
-        <p:spPr>
-          <a:xfrm>
-            <a:off x="8942832" y="3493008"/>
-            <a:ext cx="2377440" cy="640080"/>
-          </a:xfrm>
-          <a:prstGeom prst="rect">
-            <a:avLst/>
-          </a:prstGeom>
-          <a:noFill/>
-        </p:spPr>
-        <p:txBody>
-          <a:bodyPr wrap="square" anchor="t" lIns="45720" rIns="45720" tIns="27432" bIns="27432">
-            <a:spAutoFit/>
-          </a:bodyPr>
-          <a:lstStyle/>
-          <a:p>
-            <a:pPr algn="l"/>
-            <a:r>
-              <a:rPr sz="3000" b="1">
-                <a:solidFill>
-                  <a:srgbClr val="16304F"/>
-                </a:solidFill>
-                <a:latin typeface="Microsoft JhengHei"/>
-              </a:rPr>
-              <a:t>25%</a:t>
-            </a:r>
-          </a:p>
-        </p:txBody>
-      </p:sp>
-      <p:sp>
-        <p:nvSpPr>
-          <p:cNvPr id="47" name="TextBox 46"/>
-          <p:cNvSpPr txBox="1"/>
-          <p:nvPr/>
-        </p:nvSpPr>
-        <p:spPr>
-          <a:xfrm>
-            <a:off x="8942832" y="4114800"/>
-            <a:ext cx="2377440" cy="365760"/>
-          </a:xfrm>
-          <a:prstGeom prst="rect">
-            <a:avLst/>
-          </a:prstGeom>
-          <a:noFill/>
-        </p:spPr>
-        <p:txBody>
-          <a:bodyPr wrap="square" anchor="t" lIns="45720" rIns="45720" tIns="27432" bIns="27432">
-            <a:spAutoFit/>
-          </a:bodyPr>
-          <a:lstStyle/>
-          <a:p>
-            <a:pPr algn="l"/>
-            <a:r>
-              <a:rPr sz="1400" b="1">
-                <a:solidFill>
-                  <a:srgbClr val="16304F"/>
-                </a:solidFill>
-                <a:latin typeface="Microsoft JhengHei"/>
-              </a:rPr>
-              <a:t>主題契合度</a:t>
-            </a:r>
-          </a:p>
-        </p:txBody>
-      </p:sp>
-      <p:sp>
-        <p:nvSpPr>
-          <p:cNvPr id="48" name="TextBox 47"/>
-          <p:cNvSpPr txBox="1"/>
-          <p:nvPr/>
-        </p:nvSpPr>
-        <p:spPr>
-          <a:xfrm>
-            <a:off x="8942832" y="4462272"/>
-            <a:ext cx="2377440" cy="548640"/>
-          </a:xfrm>
-          <a:prstGeom prst="rect">
-            <a:avLst/>
-          </a:prstGeom>
-          <a:noFill/>
-        </p:spPr>
-        <p:txBody>
-          <a:bodyPr wrap="square" anchor="t" lIns="45720" rIns="45720" tIns="27432" bIns="27432">
-            <a:spAutoFit/>
-          </a:bodyPr>
-          <a:lstStyle/>
-          <a:p>
-            <a:pPr algn="l"/>
-            <a:r>
-              <a:rPr sz="1050" b="0">
-                <a:solidFill>
-                  <a:srgbClr val="334455"/>
-                </a:solidFill>
-                <a:latin typeface="Microsoft JhengHei"/>
-              </a:rPr>
-              <a:t>四大功能對應；輔助不取代</a:t>
-            </a:r>
-          </a:p>
-        </p:txBody>
-      </p:sp>
-      <p:sp>
-        <p:nvSpPr>
-          <p:cNvPr id="49" name="Rectangle 48"/>
-          <p:cNvSpPr/>
-          <p:nvPr/>
-        </p:nvSpPr>
-        <p:spPr>
-          <a:xfrm>
-            <a:off x="640080" y="5623560"/>
-            <a:ext cx="10908792" cy="566928"/>
-          </a:xfrm>
-          <a:prstGeom prst="rect">
-            <a:avLst/>
-          </a:prstGeom>
-          <a:solidFill>
-            <a:srgbClr val="FFF8EA"/>
-          </a:solidFill>
-          <a:ln>
-            <a:noFill/>
-          </a:ln>
-          <a:effectLst/>
-        </p:spPr>
-        <p:style>
-          <a:lnRef idx="1">
-            <a:schemeClr val="accent1"/>
-          </a:lnRef>
-          <a:fillRef idx="3">
-            <a:schemeClr val="accent1"/>
-          </a:fillRef>
-          <a:effectRef idx="2">
-            <a:schemeClr val="accent1"/>
-          </a:effectRef>
-          <a:fontRef idx="minor">
-            <a:schemeClr val="lt1"/>
-          </a:fontRef>
-        </p:style>
-        <p:txBody>
-          <a:bodyPr rtlCol="0" anchor="ctr"/>
-          <a:lstStyle/>
-          <a:p>
-            <a:pPr algn="ctr"/>
-          </a:p>
-        </p:txBody>
-      </p:sp>
-      <p:sp>
-        <p:nvSpPr>
-          <p:cNvPr id="50" name="Rectangle 49"/>
-          <p:cNvSpPr/>
-          <p:nvPr/>
-        </p:nvSpPr>
-        <p:spPr>
-          <a:xfrm>
-            <a:off x="640080" y="5623560"/>
-            <a:ext cx="64008" cy="566928"/>
-          </a:xfrm>
-          <a:prstGeom prst="rect">
-            <a:avLst/>
-          </a:prstGeom>
-          <a:solidFill>
-            <a:srgbClr val="D98E04"/>
-          </a:solidFill>
-          <a:ln>
-            <a:noFill/>
-          </a:ln>
-          <a:effectLst/>
-        </p:spPr>
-        <p:style>
-          <a:lnRef idx="1">
-            <a:schemeClr val="accent1"/>
-          </a:lnRef>
-          <a:fillRef idx="3">
-            <a:schemeClr val="accent1"/>
-          </a:fillRef>
-          <a:effectRef idx="2">
-            <a:schemeClr val="accent1"/>
-          </a:effectRef>
-          <a:fontRef idx="minor">
-            <a:schemeClr val="lt1"/>
-          </a:fontRef>
-        </p:style>
-        <p:txBody>
-          <a:bodyPr rtlCol="0" anchor="ctr"/>
-          <a:lstStyle/>
-          <a:p>
-            <a:pPr algn="ctr"/>
-          </a:p>
-        </p:txBody>
-      </p:sp>
-      <p:sp>
-        <p:nvSpPr>
-          <p:cNvPr id="51" name="TextBox 50"/>
-          <p:cNvSpPr txBox="1"/>
-          <p:nvPr/>
-        </p:nvSpPr>
-        <p:spPr>
-          <a:xfrm>
-            <a:off x="822960" y="5641848"/>
-            <a:ext cx="10607040" cy="548640"/>
-          </a:xfrm>
-          <a:prstGeom prst="rect">
-            <a:avLst/>
-          </a:prstGeom>
-          <a:noFill/>
-        </p:spPr>
-        <p:txBody>
-          <a:bodyPr wrap="square" anchor="ctr" lIns="45720" rIns="45720" tIns="27432" bIns="27432">
-            <a:spAutoFit/>
-          </a:bodyPr>
-          <a:lstStyle/>
-          <a:p>
-            <a:pPr algn="l"/>
-            <a:r>
-              <a:rPr sz="1350" b="0">
-                <a:solidFill>
-                  <a:srgbClr val="334455"/>
-                </a:solidFill>
-                <a:latin typeface="Microsoft JhengHei"/>
-              </a:rPr>
-              <a:t>Live Demo　http://100.20.156.38/　— 所有畫面都是線上現跑的</a:t>
-            </a:r>
-          </a:p>
-        </p:txBody>
-      </p:sp>
-    </p:spTree>
-  </p:cSld>
-  <p:clrMapOvr>
-    <a:masterClrMapping/>
-  </p:clrMapOvr>
-</p:sld>
-</file>
-
-<file path=ppt/slides/slide11.xml><?xml version="1.0" encoding="utf-8"?>
-<p:sld xmlns:a="http://schemas.openxmlformats.org/drawingml/2006/main" xmlns:p="http://schemas.openxmlformats.org/presentationml/2006/main" xmlns:r="http://schemas.openxmlformats.org/officeDocument/2006/relationships">
-  <p:cSld>
-    <p:spTree>
-      <p:nvGrpSpPr>
-        <p:cNvPr id="1" name=""/>
-        <p:cNvGrpSpPr/>
-        <p:nvPr/>
-      </p:nvGrpSpPr>
-      <p:grpSpPr/>
-      <p:sp>
-        <p:nvSpPr>
-          <p:cNvPr id="2" name="Rectangle 1"/>
-          <p:cNvSpPr/>
-          <p:nvPr/>
-        </p:nvSpPr>
-        <p:spPr>
-          <a:xfrm>
-            <a:off x="0" y="0"/>
-            <a:ext cx="12191695" cy="6858000"/>
-          </a:xfrm>
-          <a:prstGeom prst="rect">
-            <a:avLst/>
-          </a:prstGeom>
-          <a:solidFill>
-            <a:srgbClr val="16304F"/>
-          </a:solidFill>
-          <a:ln>
-            <a:noFill/>
-          </a:ln>
-          <a:effectLst/>
-        </p:spPr>
-        <p:style>
-          <a:lnRef idx="1">
-            <a:schemeClr val="accent1"/>
-          </a:lnRef>
-          <a:fillRef idx="3">
-            <a:schemeClr val="accent1"/>
-          </a:fillRef>
-          <a:effectRef idx="2">
-            <a:schemeClr val="accent1"/>
-          </a:effectRef>
-          <a:fontRef idx="minor">
-            <a:schemeClr val="lt1"/>
-          </a:fontRef>
-        </p:style>
-        <p:txBody>
-          <a:bodyPr rtlCol="0" anchor="ctr"/>
-          <a:lstStyle/>
-          <a:p>
-            <a:pPr algn="ctr"/>
-          </a:p>
-        </p:txBody>
-      </p:sp>
-      <p:sp>
-        <p:nvSpPr>
-          <p:cNvPr id="3" name="Rectangle 2"/>
-          <p:cNvSpPr/>
-          <p:nvPr/>
-        </p:nvSpPr>
-        <p:spPr>
-          <a:xfrm>
-            <a:off x="0" y="0"/>
-            <a:ext cx="91440" cy="6858000"/>
-          </a:xfrm>
-          <a:prstGeom prst="rect">
-            <a:avLst/>
-          </a:prstGeom>
-          <a:solidFill>
-            <a:srgbClr val="D98E04"/>
-          </a:solidFill>
-          <a:ln>
-            <a:noFill/>
-          </a:ln>
-          <a:effectLst/>
-        </p:spPr>
-        <p:style>
-          <a:lnRef idx="1">
-            <a:schemeClr val="accent1"/>
-          </a:lnRef>
-          <a:fillRef idx="3">
-            <a:schemeClr val="accent1"/>
-          </a:fillRef>
-          <a:effectRef idx="2">
-            <a:schemeClr val="accent1"/>
-          </a:effectRef>
-          <a:fontRef idx="minor">
-            <a:schemeClr val="lt1"/>
-          </a:fontRef>
-        </p:style>
-        <p:txBody>
-          <a:bodyPr rtlCol="0" anchor="ctr"/>
-          <a:lstStyle/>
-          <a:p>
-            <a:pPr algn="ctr"/>
-          </a:p>
-        </p:txBody>
-      </p:sp>
-      <p:sp>
-        <p:nvSpPr>
-          <p:cNvPr id="4" name="Oval 3"/>
-          <p:cNvSpPr/>
-          <p:nvPr/>
-        </p:nvSpPr>
-        <p:spPr>
-          <a:xfrm>
-            <a:off x="9326880" y="-1645920"/>
-            <a:ext cx="5120640" cy="5120640"/>
-          </a:xfrm>
-          <a:prstGeom prst="ellipse">
-            <a:avLst/>
-          </a:prstGeom>
-          <a:solidFill>
-            <a:srgbClr val="1E3F68"/>
-          </a:solidFill>
-          <a:ln>
-            <a:noFill/>
-          </a:ln>
-          <a:effectLst/>
-        </p:spPr>
-        <p:style>
-          <a:lnRef idx="1">
-            <a:schemeClr val="accent1"/>
-          </a:lnRef>
-          <a:fillRef idx="3">
-            <a:schemeClr val="accent1"/>
-          </a:fillRef>
-          <a:effectRef idx="2">
-            <a:schemeClr val="accent1"/>
-          </a:effectRef>
-          <a:fontRef idx="minor">
-            <a:schemeClr val="lt1"/>
-          </a:fontRef>
-        </p:style>
-        <p:txBody>
-          <a:bodyPr rtlCol="0" anchor="ctr"/>
-          <a:lstStyle/>
-          <a:p>
-            <a:pPr algn="ctr"/>
-          </a:p>
-        </p:txBody>
-      </p:sp>
-      <p:sp>
-        <p:nvSpPr>
-          <p:cNvPr id="5" name="TextBox 4"/>
-          <p:cNvSpPr txBox="1"/>
-          <p:nvPr/>
-        </p:nvSpPr>
-        <p:spPr>
-          <a:xfrm>
-            <a:off x="914400" y="2103120"/>
-            <a:ext cx="10058400" cy="365760"/>
-          </a:xfrm>
-          <a:prstGeom prst="rect">
-            <a:avLst/>
-          </a:prstGeom>
-          <a:noFill/>
-        </p:spPr>
-        <p:txBody>
-          <a:bodyPr wrap="square" anchor="t" lIns="45720" rIns="45720" tIns="27432" bIns="27432">
-            <a:spAutoFit/>
-          </a:bodyPr>
-          <a:lstStyle/>
-          <a:p>
-            <a:pPr algn="l"/>
-            <a:r>
-              <a:rPr sz="1200" b="1">
-                <a:solidFill>
-                  <a:srgbClr val="F2B544"/>
-                </a:solidFill>
-                <a:latin typeface="Microsoft JhengHei"/>
-              </a:rPr>
-              <a:t>2026 新北市 AI 智慧城市黑客松 ｜ 法制局組</a:t>
-            </a:r>
-          </a:p>
-        </p:txBody>
-      </p:sp>
-      <p:sp>
-        <p:nvSpPr>
-          <p:cNvPr id="6" name="TextBox 5"/>
-          <p:cNvSpPr txBox="1"/>
-          <p:nvPr/>
-        </p:nvSpPr>
-        <p:spPr>
-          <a:xfrm>
-            <a:off x="914400" y="2514600"/>
-            <a:ext cx="10515600" cy="1280160"/>
-          </a:xfrm>
-          <a:prstGeom prst="rect">
-            <a:avLst/>
-          </a:prstGeom>
-          <a:noFill/>
-        </p:spPr>
-        <p:txBody>
-          <a:bodyPr wrap="square" anchor="t" lIns="45720" rIns="45720" tIns="27432" bIns="27432">
-            <a:spAutoFit/>
-          </a:bodyPr>
-          <a:lstStyle/>
-          <a:p>
-            <a:pPr algn="l"/>
-            <a:r>
-              <a:rPr sz="5400" b="1">
-                <a:solidFill>
-                  <a:srgbClr val="FFFFFF"/>
-                </a:solidFill>
-                <a:latin typeface="Microsoft JhengHei"/>
-              </a:rPr>
-              <a:t>謝謝，請指教</a:t>
-            </a:r>
-          </a:p>
-        </p:txBody>
-      </p:sp>
-      <p:sp>
-        <p:nvSpPr>
-          <p:cNvPr id="7" name="TextBox 6"/>
-          <p:cNvSpPr txBox="1"/>
-          <p:nvPr/>
-        </p:nvSpPr>
-        <p:spPr>
-          <a:xfrm>
-            <a:off x="914400" y="3794760"/>
-            <a:ext cx="10515600" cy="548640"/>
-          </a:xfrm>
-          <a:prstGeom prst="rect">
-            <a:avLst/>
-          </a:prstGeom>
-          <a:noFill/>
-        </p:spPr>
-        <p:txBody>
-          <a:bodyPr wrap="square" anchor="t" lIns="45720" rIns="45720" tIns="27432" bIns="27432">
-            <a:spAutoFit/>
-          </a:bodyPr>
-          <a:lstStyle/>
-          <a:p>
-            <a:pPr algn="l"/>
-            <a:r>
-              <a:rPr sz="2100" b="0">
-                <a:solidFill>
-                  <a:srgbClr val="C9D6E6"/>
-                </a:solidFill>
-                <a:latin typeface="Microsoft JhengHei"/>
-              </a:rPr>
-              <a:t>接下來：補件、法規自動更新、洗錢與空污案型</a:t>
-            </a:r>
-          </a:p>
-        </p:txBody>
-      </p:sp>
-      <p:sp>
-        <p:nvSpPr>
-          <p:cNvPr id="8" name="Rectangle 7"/>
-          <p:cNvSpPr/>
-          <p:nvPr/>
-        </p:nvSpPr>
-        <p:spPr>
-          <a:xfrm>
-            <a:off x="914400" y="4480560"/>
-            <a:ext cx="45720" cy="685800"/>
-          </a:xfrm>
-          <a:prstGeom prst="rect">
-            <a:avLst/>
-          </a:prstGeom>
-          <a:solidFill>
-            <a:srgbClr val="D98E04"/>
-          </a:solidFill>
-          <a:ln>
-            <a:noFill/>
-          </a:ln>
-          <a:effectLst/>
-        </p:spPr>
-        <p:style>
-          <a:lnRef idx="1">
-            <a:schemeClr val="accent1"/>
-          </a:lnRef>
-          <a:fillRef idx="3">
-            <a:schemeClr val="accent1"/>
-          </a:fillRef>
-          <a:effectRef idx="2">
-            <a:schemeClr val="accent1"/>
-          </a:effectRef>
-          <a:fontRef idx="minor">
-            <a:schemeClr val="lt1"/>
-          </a:fontRef>
-        </p:style>
-        <p:txBody>
-          <a:bodyPr rtlCol="0" anchor="ctr"/>
-          <a:lstStyle/>
-          <a:p>
-            <a:pPr algn="ctr"/>
-          </a:p>
-        </p:txBody>
-      </p:sp>
-      <p:sp>
-        <p:nvSpPr>
-          <p:cNvPr id="9" name="TextBox 8"/>
-          <p:cNvSpPr txBox="1"/>
-          <p:nvPr/>
-        </p:nvSpPr>
-        <p:spPr>
-          <a:xfrm>
-            <a:off x="1051560" y="4434840"/>
-            <a:ext cx="9144000" cy="822960"/>
-          </a:xfrm>
-          <a:prstGeom prst="rect">
-            <a:avLst/>
-          </a:prstGeom>
-          <a:noFill/>
-        </p:spPr>
-        <p:txBody>
-          <a:bodyPr wrap="square" anchor="t" lIns="45720" rIns="45720" tIns="27432" bIns="27432">
-            <a:spAutoFit/>
-          </a:bodyPr>
-          <a:lstStyle/>
-          <a:p>
-            <a:pPr algn="l"/>
-            <a:r>
-              <a:rPr sz="1700" b="0">
-                <a:solidFill>
-                  <a:srgbClr val="E6EDF5"/>
-                </a:solidFill>
-                <a:latin typeface="Microsoft JhengHei"/>
-              </a:rPr>
-              <a:t>Live Demo　http://100.20.156.38/　　GitHub　完整原始碼＋三套考題</a:t>
-            </a:r>
-          </a:p>
-        </p:txBody>
-      </p:sp>
-    </p:spTree>
-  </p:cSld>
-  <p:clrMapOvr>
-    <a:masterClrMapping/>
-  </p:clrMapOvr>
-</p:sld>
-</file>
-
 <file path=ppt/slides/slide2.xml><?xml version="1.0" encoding="utf-8"?>
 <p:sld xmlns:a="http://schemas.openxmlformats.org/drawingml/2006/main" xmlns:p="http://schemas.openxmlformats.org/presentationml/2006/main" xmlns:r="http://schemas.openxmlformats.org/officeDocument/2006/relationships">
   <p:cSld>
@@ -6176,7 +3767,7 @@
                 </a:solidFill>
                 <a:latin typeface="Microsoft JhengHei"/>
               </a:rPr>
-              <a:t>2 / 11</a:t>
+              <a:t>2 / 9</a:t>
             </a:r>
           </a:p>
         </p:txBody>
@@ -6310,7 +3901,7 @@
                 </a:solidFill>
                 <a:latin typeface="Microsoft JhengHei"/>
               </a:rPr>
-              <a:t>減少查找，專注判斷</a:t>
+              <a:t>整合工作流，專注判斷</a:t>
             </a:r>
           </a:p>
         </p:txBody>
@@ -7002,7 +4593,7 @@
                 </a:solidFill>
                 <a:latin typeface="Microsoft JhengHei"/>
               </a:rPr>
-              <a:t>3 / 11</a:t>
+              <a:t>3 / 9</a:t>
             </a:r>
           </a:p>
         </p:txBody>
@@ -8260,7 +5851,7 @@
                 </a:solidFill>
                 <a:latin typeface="Microsoft JhengHei"/>
               </a:rPr>
-              <a:t>4 / 11</a:t>
+              <a:t>4 / 9</a:t>
             </a:r>
           </a:p>
         </p:txBody>
@@ -9228,7 +6819,7 @@
                 </a:solidFill>
                 <a:latin typeface="Microsoft JhengHei"/>
               </a:rPr>
-              <a:t>5 / 11</a:t>
+              <a:t>5 / 9</a:t>
             </a:r>
           </a:p>
         </p:txBody>
@@ -9241,8 +6832,8 @@
         </p:nvSpPr>
         <p:spPr>
           <a:xfrm>
-            <a:off x="640080" y="1554480"/>
-            <a:ext cx="1481328" cy="1234440"/>
+            <a:off x="640080" y="1463040"/>
+            <a:ext cx="1481328" cy="3017520"/>
           </a:xfrm>
           <a:prstGeom prst="roundRect">
             <a:avLst>
@@ -9283,14 +6874,67 @@
       </p:sp>
       <p:sp>
         <p:nvSpPr>
-          <p:cNvPr id="10" name="TextBox 9"/>
+          <p:cNvPr id="10" name="Oval 9"/>
+          <p:cNvSpPr/>
+          <p:nvPr/>
+        </p:nvSpPr>
+        <p:spPr>
+          <a:xfrm>
+            <a:off x="749808" y="1572768"/>
+            <a:ext cx="292608" cy="292608"/>
+          </a:xfrm>
+          <a:prstGeom prst="ellipse">
+            <a:avLst/>
+          </a:prstGeom>
+          <a:solidFill>
+            <a:srgbClr val="16304F"/>
+          </a:solidFill>
+          <a:ln>
+            <a:noFill/>
+          </a:ln>
+          <a:effectLst/>
+        </p:spPr>
+        <p:style>
+          <a:lnRef idx="1">
+            <a:schemeClr val="accent1"/>
+          </a:lnRef>
+          <a:fillRef idx="3">
+            <a:schemeClr val="accent1"/>
+          </a:fillRef>
+          <a:effectRef idx="2">
+            <a:schemeClr val="accent1"/>
+          </a:effectRef>
+          <a:fontRef idx="minor">
+            <a:schemeClr val="lt1"/>
+          </a:fontRef>
+        </p:style>
+        <p:txBody>
+          <a:bodyPr rtlCol="0" anchor="ctr" lIns="0" rIns="0" tIns="0" bIns="0"/>
+          <a:lstStyle/>
+          <a:p>
+            <a:pPr algn="ctr"/>
+            <a:r>
+              <a:rPr sz="1100" b="1">
+                <a:solidFill>
+                  <a:srgbClr val="FFFFFF"/>
+                </a:solidFill>
+                <a:latin typeface="Microsoft JhengHei"/>
+              </a:rPr>
+              <a:t>1</a:t>
+            </a:r>
+          </a:p>
+        </p:txBody>
+      </p:sp>
+      <p:sp>
+        <p:nvSpPr>
+          <p:cNvPr id="11" name="TextBox 10"/>
           <p:cNvSpPr txBox="1"/>
           <p:nvPr/>
         </p:nvSpPr>
         <p:spPr>
           <a:xfrm>
-            <a:off x="640080" y="1554480"/>
-            <a:ext cx="1481328" cy="1234440"/>
+            <a:off x="713231" y="1920240"/>
+            <a:ext cx="1353312" cy="411480"/>
           </a:xfrm>
           <a:prstGeom prst="rect">
             <a:avLst/>
@@ -9298,34 +6942,148 @@
           <a:noFill/>
         </p:spPr>
         <p:txBody>
-          <a:bodyPr wrap="square" anchor="ctr" lIns="45720" rIns="45720" tIns="27432" bIns="27432">
+          <a:bodyPr wrap="square" anchor="t" lIns="45720" rIns="45720" tIns="27432" bIns="27432">
             <a:spAutoFit/>
           </a:bodyPr>
           <a:lstStyle/>
           <a:p>
+            <a:pPr algn="l"/>
+            <a:r>
+              <a:rPr sz="1350" b="1">
+                <a:solidFill>
+                  <a:srgbClr val="16304F"/>
+                </a:solidFill>
+                <a:latin typeface="Microsoft JhengHei"/>
+              </a:rPr>
+              <a:t>讀出基本資料</a:t>
+            </a:r>
+          </a:p>
+        </p:txBody>
+      </p:sp>
+      <p:sp>
+        <p:nvSpPr>
+          <p:cNvPr id="12" name="TextBox 11"/>
+          <p:cNvSpPr txBox="1"/>
+          <p:nvPr/>
+        </p:nvSpPr>
+        <p:spPr>
+          <a:xfrm>
+            <a:off x="713231" y="2331720"/>
+            <a:ext cx="1353312" cy="731520"/>
+          </a:xfrm>
+          <a:prstGeom prst="rect">
+            <a:avLst/>
+          </a:prstGeom>
+          <a:noFill/>
+        </p:spPr>
+        <p:txBody>
+          <a:bodyPr wrap="square" anchor="t" lIns="45720" rIns="45720" tIns="27432" bIns="27432">
+            <a:spAutoFit/>
+          </a:bodyPr>
+          <a:lstStyle/>
+          <a:p>
+            <a:pPr algn="l"/>
+            <a:r>
+              <a:rPr sz="1100" b="0">
+                <a:solidFill>
+                  <a:srgbClr val="0F2038"/>
+                </a:solidFill>
+                <a:latin typeface="Microsoft JhengHei"/>
+              </a:rPr>
+              <a:t>當事人、處分文號、日期</a:t>
+            </a:r>
+          </a:p>
+        </p:txBody>
+      </p:sp>
+      <p:sp>
+        <p:nvSpPr>
+          <p:cNvPr id="13" name="Rectangle 12"/>
+          <p:cNvSpPr/>
+          <p:nvPr/>
+        </p:nvSpPr>
+        <p:spPr>
+          <a:xfrm>
+            <a:off x="749808" y="3291840"/>
+            <a:ext cx="1261872" cy="9144"/>
+          </a:xfrm>
+          <a:prstGeom prst="rect">
+            <a:avLst/>
+          </a:prstGeom>
+          <a:solidFill>
+            <a:srgbClr val="E6EAF0"/>
+          </a:solidFill>
+          <a:ln>
+            <a:noFill/>
+          </a:ln>
+          <a:effectLst/>
+        </p:spPr>
+        <p:style>
+          <a:lnRef idx="1">
+            <a:schemeClr val="accent1"/>
+          </a:lnRef>
+          <a:fillRef idx="3">
+            <a:schemeClr val="accent1"/>
+          </a:fillRef>
+          <a:effectRef idx="2">
+            <a:schemeClr val="accent1"/>
+          </a:effectRef>
+          <a:fontRef idx="minor">
+            <a:schemeClr val="lt1"/>
+          </a:fontRef>
+        </p:style>
+        <p:txBody>
+          <a:bodyPr rtlCol="0" anchor="ctr"/>
+          <a:lstStyle/>
+          <a:p>
             <a:pPr algn="ctr"/>
-            <a:r>
-              <a:rPr sz="1500" b="1">
-                <a:solidFill>
-                  <a:srgbClr val="16304F"/>
-                </a:solidFill>
-                <a:latin typeface="Microsoft JhengHei"/>
-              </a:rPr>
-              <a:t>讀出基本資料</a:t>
-            </a:r>
-          </a:p>
-        </p:txBody>
-      </p:sp>
-      <p:sp>
-        <p:nvSpPr>
-          <p:cNvPr id="11" name="Rounded Rectangle 10"/>
+          </a:p>
+        </p:txBody>
+      </p:sp>
+      <p:sp>
+        <p:nvSpPr>
+          <p:cNvPr id="14" name="TextBox 13"/>
+          <p:cNvSpPr txBox="1"/>
+          <p:nvPr/>
+        </p:nvSpPr>
+        <p:spPr>
+          <a:xfrm>
+            <a:off x="713231" y="3364992"/>
+            <a:ext cx="1353312" cy="1005840"/>
+          </a:xfrm>
+          <a:prstGeom prst="rect">
+            <a:avLst/>
+          </a:prstGeom>
+          <a:noFill/>
+        </p:spPr>
+        <p:txBody>
+          <a:bodyPr wrap="square" anchor="t" lIns="45720" rIns="45720" tIns="27432" bIns="27432">
+            <a:spAutoFit/>
+          </a:bodyPr>
+          <a:lstStyle/>
+          <a:p>
+            <a:pPr algn="l"/>
+            <a:r>
+              <a:rPr sz="1000" b="0">
+                <a:solidFill>
+                  <a:srgbClr val="8A93A0"/>
+                </a:solidFill>
+                <a:latin typeface="Microsoft JhengHei"/>
+              </a:rPr>
+              <a:t>依據 訴願書、處分書</a:t>
+            </a:r>
+          </a:p>
+        </p:txBody>
+      </p:sp>
+      <p:sp>
+        <p:nvSpPr>
+          <p:cNvPr id="15" name="Rounded Rectangle 14"/>
           <p:cNvSpPr/>
           <p:nvPr/>
         </p:nvSpPr>
         <p:spPr>
           <a:xfrm>
-            <a:off x="2203704" y="1554480"/>
-            <a:ext cx="1481328" cy="1234440"/>
+            <a:off x="2203704" y="1463040"/>
+            <a:ext cx="1481328" cy="3017520"/>
           </a:xfrm>
           <a:prstGeom prst="roundRect">
             <a:avLst>
@@ -9366,14 +7124,67 @@
       </p:sp>
       <p:sp>
         <p:nvSpPr>
-          <p:cNvPr id="12" name="TextBox 11"/>
+          <p:cNvPr id="16" name="Oval 15"/>
+          <p:cNvSpPr/>
+          <p:nvPr/>
+        </p:nvSpPr>
+        <p:spPr>
+          <a:xfrm>
+            <a:off x="2313432" y="1572768"/>
+            <a:ext cx="292608" cy="292608"/>
+          </a:xfrm>
+          <a:prstGeom prst="ellipse">
+            <a:avLst/>
+          </a:prstGeom>
+          <a:solidFill>
+            <a:srgbClr val="2E7D32"/>
+          </a:solidFill>
+          <a:ln>
+            <a:noFill/>
+          </a:ln>
+          <a:effectLst/>
+        </p:spPr>
+        <p:style>
+          <a:lnRef idx="1">
+            <a:schemeClr val="accent1"/>
+          </a:lnRef>
+          <a:fillRef idx="3">
+            <a:schemeClr val="accent1"/>
+          </a:fillRef>
+          <a:effectRef idx="2">
+            <a:schemeClr val="accent1"/>
+          </a:effectRef>
+          <a:fontRef idx="minor">
+            <a:schemeClr val="lt1"/>
+          </a:fontRef>
+        </p:style>
+        <p:txBody>
+          <a:bodyPr rtlCol="0" anchor="ctr" lIns="0" rIns="0" tIns="0" bIns="0"/>
+          <a:lstStyle/>
+          <a:p>
+            <a:pPr algn="ctr"/>
+            <a:r>
+              <a:rPr sz="1100" b="1">
+                <a:solidFill>
+                  <a:srgbClr val="FFFFFF"/>
+                </a:solidFill>
+                <a:latin typeface="Microsoft JhengHei"/>
+              </a:rPr>
+              <a:t>2</a:t>
+            </a:r>
+          </a:p>
+        </p:txBody>
+      </p:sp>
+      <p:sp>
+        <p:nvSpPr>
+          <p:cNvPr id="17" name="TextBox 16"/>
           <p:cNvSpPr txBox="1"/>
           <p:nvPr/>
         </p:nvSpPr>
         <p:spPr>
           <a:xfrm>
-            <a:off x="2203704" y="1554480"/>
-            <a:ext cx="1481328" cy="1234440"/>
+            <a:off x="2276856" y="1920240"/>
+            <a:ext cx="1353312" cy="411480"/>
           </a:xfrm>
           <a:prstGeom prst="rect">
             <a:avLst/>
@@ -9381,34 +7192,148 @@
           <a:noFill/>
         </p:spPr>
         <p:txBody>
-          <a:bodyPr wrap="square" anchor="ctr" lIns="45720" rIns="45720" tIns="27432" bIns="27432">
+          <a:bodyPr wrap="square" anchor="t" lIns="45720" rIns="45720" tIns="27432" bIns="27432">
             <a:spAutoFit/>
           </a:bodyPr>
           <a:lstStyle/>
           <a:p>
+            <a:pPr algn="l"/>
+            <a:r>
+              <a:rPr sz="1350" b="1">
+                <a:solidFill>
+                  <a:srgbClr val="16304F"/>
+                </a:solidFill>
+                <a:latin typeface="Microsoft JhengHei"/>
+              </a:rPr>
+              <a:t>期間・程序</a:t>
+            </a:r>
+          </a:p>
+        </p:txBody>
+      </p:sp>
+      <p:sp>
+        <p:nvSpPr>
+          <p:cNvPr id="18" name="TextBox 17"/>
+          <p:cNvSpPr txBox="1"/>
+          <p:nvPr/>
+        </p:nvSpPr>
+        <p:spPr>
+          <a:xfrm>
+            <a:off x="2276856" y="2331720"/>
+            <a:ext cx="1353312" cy="731520"/>
+          </a:xfrm>
+          <a:prstGeom prst="rect">
+            <a:avLst/>
+          </a:prstGeom>
+          <a:noFill/>
+        </p:spPr>
+        <p:txBody>
+          <a:bodyPr wrap="square" anchor="t" lIns="45720" rIns="45720" tIns="27432" bIns="27432">
+            <a:spAutoFit/>
+          </a:bodyPr>
+          <a:lstStyle/>
+          <a:p>
+            <a:pPr algn="l"/>
+            <a:r>
+              <a:rPr sz="1100" b="0">
+                <a:solidFill>
+                  <a:srgbClr val="0F2038"/>
+                </a:solidFill>
+                <a:latin typeface="Microsoft JhengHei"/>
+              </a:rPr>
+              <a:t>屆滿日、八款檢核</a:t>
+            </a:r>
+          </a:p>
+        </p:txBody>
+      </p:sp>
+      <p:sp>
+        <p:nvSpPr>
+          <p:cNvPr id="19" name="Rectangle 18"/>
+          <p:cNvSpPr/>
+          <p:nvPr/>
+        </p:nvSpPr>
+        <p:spPr>
+          <a:xfrm>
+            <a:off x="2313432" y="3291840"/>
+            <a:ext cx="1261872" cy="9144"/>
+          </a:xfrm>
+          <a:prstGeom prst="rect">
+            <a:avLst/>
+          </a:prstGeom>
+          <a:solidFill>
+            <a:srgbClr val="E6EAF0"/>
+          </a:solidFill>
+          <a:ln>
+            <a:noFill/>
+          </a:ln>
+          <a:effectLst/>
+        </p:spPr>
+        <p:style>
+          <a:lnRef idx="1">
+            <a:schemeClr val="accent1"/>
+          </a:lnRef>
+          <a:fillRef idx="3">
+            <a:schemeClr val="accent1"/>
+          </a:fillRef>
+          <a:effectRef idx="2">
+            <a:schemeClr val="accent1"/>
+          </a:effectRef>
+          <a:fontRef idx="minor">
+            <a:schemeClr val="lt1"/>
+          </a:fontRef>
+        </p:style>
+        <p:txBody>
+          <a:bodyPr rtlCol="0" anchor="ctr"/>
+          <a:lstStyle/>
+          <a:p>
             <a:pPr algn="ctr"/>
-            <a:r>
-              <a:rPr sz="1500" b="1">
-                <a:solidFill>
-                  <a:srgbClr val="16304F"/>
-                </a:solidFill>
-                <a:latin typeface="Microsoft JhengHei"/>
-              </a:rPr>
-              <a:t>期間・程序</a:t>
-            </a:r>
-          </a:p>
-        </p:txBody>
-      </p:sp>
-      <p:sp>
-        <p:nvSpPr>
-          <p:cNvPr id="13" name="Rounded Rectangle 12"/>
+          </a:p>
+        </p:txBody>
+      </p:sp>
+      <p:sp>
+        <p:nvSpPr>
+          <p:cNvPr id="20" name="TextBox 19"/>
+          <p:cNvSpPr txBox="1"/>
+          <p:nvPr/>
+        </p:nvSpPr>
+        <p:spPr>
+          <a:xfrm>
+            <a:off x="2276856" y="3364992"/>
+            <a:ext cx="1353312" cy="1005840"/>
+          </a:xfrm>
+          <a:prstGeom prst="rect">
+            <a:avLst/>
+          </a:prstGeom>
+          <a:noFill/>
+        </p:spPr>
+        <p:txBody>
+          <a:bodyPr wrap="square" anchor="t" lIns="45720" rIns="45720" tIns="27432" bIns="27432">
+            <a:spAutoFit/>
+          </a:bodyPr>
+          <a:lstStyle/>
+          <a:p>
+            <a:pPr algn="l"/>
+            <a:r>
+              <a:rPr sz="1000" b="0">
+                <a:solidFill>
+                  <a:srgbClr val="8A93A0"/>
+                </a:solidFill>
+                <a:latin typeface="Microsoft JhengHei"/>
+              </a:rPr>
+              <a:t>依據 送達證書（程式計算）</a:t>
+            </a:r>
+          </a:p>
+        </p:txBody>
+      </p:sp>
+      <p:sp>
+        <p:nvSpPr>
+          <p:cNvPr id="21" name="Rounded Rectangle 20"/>
           <p:cNvSpPr/>
           <p:nvPr/>
         </p:nvSpPr>
         <p:spPr>
           <a:xfrm>
-            <a:off x="3767328" y="1554480"/>
-            <a:ext cx="1481328" cy="1234440"/>
+            <a:off x="3767328" y="1463040"/>
+            <a:ext cx="1481328" cy="3017520"/>
           </a:xfrm>
           <a:prstGeom prst="roundRect">
             <a:avLst>
@@ -9449,14 +7374,67 @@
       </p:sp>
       <p:sp>
         <p:nvSpPr>
-          <p:cNvPr id="14" name="TextBox 13"/>
+          <p:cNvPr id="22" name="Oval 21"/>
+          <p:cNvSpPr/>
+          <p:nvPr/>
+        </p:nvSpPr>
+        <p:spPr>
+          <a:xfrm>
+            <a:off x="3877056" y="1572768"/>
+            <a:ext cx="292608" cy="292608"/>
+          </a:xfrm>
+          <a:prstGeom prst="ellipse">
+            <a:avLst/>
+          </a:prstGeom>
+          <a:solidFill>
+            <a:srgbClr val="16304F"/>
+          </a:solidFill>
+          <a:ln>
+            <a:noFill/>
+          </a:ln>
+          <a:effectLst/>
+        </p:spPr>
+        <p:style>
+          <a:lnRef idx="1">
+            <a:schemeClr val="accent1"/>
+          </a:lnRef>
+          <a:fillRef idx="3">
+            <a:schemeClr val="accent1"/>
+          </a:fillRef>
+          <a:effectRef idx="2">
+            <a:schemeClr val="accent1"/>
+          </a:effectRef>
+          <a:fontRef idx="minor">
+            <a:schemeClr val="lt1"/>
+          </a:fontRef>
+        </p:style>
+        <p:txBody>
+          <a:bodyPr rtlCol="0" anchor="ctr" lIns="0" rIns="0" tIns="0" bIns="0"/>
+          <a:lstStyle/>
+          <a:p>
+            <a:pPr algn="ctr"/>
+            <a:r>
+              <a:rPr sz="1100" b="1">
+                <a:solidFill>
+                  <a:srgbClr val="FFFFFF"/>
+                </a:solidFill>
+                <a:latin typeface="Microsoft JhengHei"/>
+              </a:rPr>
+              <a:t>3</a:t>
+            </a:r>
+          </a:p>
+        </p:txBody>
+      </p:sp>
+      <p:sp>
+        <p:nvSpPr>
+          <p:cNvPr id="23" name="TextBox 22"/>
           <p:cNvSpPr txBox="1"/>
           <p:nvPr/>
         </p:nvSpPr>
         <p:spPr>
           <a:xfrm>
-            <a:off x="3767328" y="1554480"/>
-            <a:ext cx="1481328" cy="1234440"/>
+            <a:off x="3840480" y="1920240"/>
+            <a:ext cx="1353312" cy="411480"/>
           </a:xfrm>
           <a:prstGeom prst="rect">
             <a:avLst/>
@@ -9464,34 +7442,148 @@
           <a:noFill/>
         </p:spPr>
         <p:txBody>
-          <a:bodyPr wrap="square" anchor="ctr" lIns="45720" rIns="45720" tIns="27432" bIns="27432">
+          <a:bodyPr wrap="square" anchor="t" lIns="45720" rIns="45720" tIns="27432" bIns="27432">
             <a:spAutoFit/>
           </a:bodyPr>
           <a:lstStyle/>
           <a:p>
+            <a:pPr algn="l"/>
+            <a:r>
+              <a:rPr sz="1350" b="1">
+                <a:solidFill>
+                  <a:srgbClr val="16304F"/>
+                </a:solidFill>
+                <a:latin typeface="Microsoft JhengHei"/>
+              </a:rPr>
+              <a:t>整理爭點</a:t>
+            </a:r>
+          </a:p>
+        </p:txBody>
+      </p:sp>
+      <p:sp>
+        <p:nvSpPr>
+          <p:cNvPr id="24" name="TextBox 23"/>
+          <p:cNvSpPr txBox="1"/>
+          <p:nvPr/>
+        </p:nvSpPr>
+        <p:spPr>
+          <a:xfrm>
+            <a:off x="3840480" y="2331720"/>
+            <a:ext cx="1353312" cy="731520"/>
+          </a:xfrm>
+          <a:prstGeom prst="rect">
+            <a:avLst/>
+          </a:prstGeom>
+          <a:noFill/>
+        </p:spPr>
+        <p:txBody>
+          <a:bodyPr wrap="square" anchor="t" lIns="45720" rIns="45720" tIns="27432" bIns="27432">
+            <a:spAutoFit/>
+          </a:bodyPr>
+          <a:lstStyle/>
+          <a:p>
+            <a:pPr algn="l"/>
+            <a:r>
+              <a:rPr sz="1100" b="0">
+                <a:solidFill>
+                  <a:srgbClr val="0F2038"/>
+                </a:solidFill>
+                <a:latin typeface="Microsoft JhengHei"/>
+              </a:rPr>
+              <a:t>爭點＋AI 認定＋依據</a:t>
+            </a:r>
+          </a:p>
+        </p:txBody>
+      </p:sp>
+      <p:sp>
+        <p:nvSpPr>
+          <p:cNvPr id="25" name="Rectangle 24"/>
+          <p:cNvSpPr/>
+          <p:nvPr/>
+        </p:nvSpPr>
+        <p:spPr>
+          <a:xfrm>
+            <a:off x="3877056" y="3291840"/>
+            <a:ext cx="1261872" cy="9144"/>
+          </a:xfrm>
+          <a:prstGeom prst="rect">
+            <a:avLst/>
+          </a:prstGeom>
+          <a:solidFill>
+            <a:srgbClr val="E6EAF0"/>
+          </a:solidFill>
+          <a:ln>
+            <a:noFill/>
+          </a:ln>
+          <a:effectLst/>
+        </p:spPr>
+        <p:style>
+          <a:lnRef idx="1">
+            <a:schemeClr val="accent1"/>
+          </a:lnRef>
+          <a:fillRef idx="3">
+            <a:schemeClr val="accent1"/>
+          </a:fillRef>
+          <a:effectRef idx="2">
+            <a:schemeClr val="accent1"/>
+          </a:effectRef>
+          <a:fontRef idx="minor">
+            <a:schemeClr val="lt1"/>
+          </a:fontRef>
+        </p:style>
+        <p:txBody>
+          <a:bodyPr rtlCol="0" anchor="ctr"/>
+          <a:lstStyle/>
+          <a:p>
             <a:pPr algn="ctr"/>
-            <a:r>
-              <a:rPr sz="1500" b="1">
-                <a:solidFill>
-                  <a:srgbClr val="16304F"/>
-                </a:solidFill>
-                <a:latin typeface="Microsoft JhengHei"/>
-              </a:rPr>
-              <a:t>整理爭點</a:t>
-            </a:r>
-          </a:p>
-        </p:txBody>
-      </p:sp>
-      <p:sp>
-        <p:nvSpPr>
-          <p:cNvPr id="15" name="Rounded Rectangle 14"/>
+          </a:p>
+        </p:txBody>
+      </p:sp>
+      <p:sp>
+        <p:nvSpPr>
+          <p:cNvPr id="26" name="TextBox 25"/>
+          <p:cNvSpPr txBox="1"/>
+          <p:nvPr/>
+        </p:nvSpPr>
+        <p:spPr>
+          <a:xfrm>
+            <a:off x="3840480" y="3364992"/>
+            <a:ext cx="1353312" cy="1005840"/>
+          </a:xfrm>
+          <a:prstGeom prst="rect">
+            <a:avLst/>
+          </a:prstGeom>
+          <a:noFill/>
+        </p:spPr>
+        <p:txBody>
+          <a:bodyPr wrap="square" anchor="t" lIns="45720" rIns="45720" tIns="27432" bIns="27432">
+            <a:spAutoFit/>
+          </a:bodyPr>
+          <a:lstStyle/>
+          <a:p>
+            <a:pPr algn="l"/>
+            <a:r>
+              <a:rPr sz="1000" b="0">
+                <a:solidFill>
+                  <a:srgbClr val="8A93A0"/>
+                </a:solidFill>
+                <a:latin typeface="Microsoft JhengHei"/>
+              </a:rPr>
+              <a:t>依據 訴願書 vs 答辯書 vs 卷證</a:t>
+            </a:r>
+          </a:p>
+        </p:txBody>
+      </p:sp>
+      <p:sp>
+        <p:nvSpPr>
+          <p:cNvPr id="27" name="Rounded Rectangle 26"/>
           <p:cNvSpPr/>
           <p:nvPr/>
         </p:nvSpPr>
         <p:spPr>
           <a:xfrm>
-            <a:off x="5330952" y="1554480"/>
-            <a:ext cx="1481328" cy="1234440"/>
+            <a:off x="5330952" y="1463040"/>
+            <a:ext cx="1481328" cy="3017520"/>
           </a:xfrm>
           <a:prstGeom prst="roundRect">
             <a:avLst>
@@ -9532,14 +7624,67 @@
       </p:sp>
       <p:sp>
         <p:nvSpPr>
-          <p:cNvPr id="16" name="TextBox 15"/>
+          <p:cNvPr id="28" name="Oval 27"/>
+          <p:cNvSpPr/>
+          <p:nvPr/>
+        </p:nvSpPr>
+        <p:spPr>
+          <a:xfrm>
+            <a:off x="5440680" y="1572768"/>
+            <a:ext cx="292608" cy="292608"/>
+          </a:xfrm>
+          <a:prstGeom prst="ellipse">
+            <a:avLst/>
+          </a:prstGeom>
+          <a:solidFill>
+            <a:srgbClr val="16304F"/>
+          </a:solidFill>
+          <a:ln>
+            <a:noFill/>
+          </a:ln>
+          <a:effectLst/>
+        </p:spPr>
+        <p:style>
+          <a:lnRef idx="1">
+            <a:schemeClr val="accent1"/>
+          </a:lnRef>
+          <a:fillRef idx="3">
+            <a:schemeClr val="accent1"/>
+          </a:fillRef>
+          <a:effectRef idx="2">
+            <a:schemeClr val="accent1"/>
+          </a:effectRef>
+          <a:fontRef idx="minor">
+            <a:schemeClr val="lt1"/>
+          </a:fontRef>
+        </p:style>
+        <p:txBody>
+          <a:bodyPr rtlCol="0" anchor="ctr" lIns="0" rIns="0" tIns="0" bIns="0"/>
+          <a:lstStyle/>
+          <a:p>
+            <a:pPr algn="ctr"/>
+            <a:r>
+              <a:rPr sz="1100" b="1">
+                <a:solidFill>
+                  <a:srgbClr val="FFFFFF"/>
+                </a:solidFill>
+                <a:latin typeface="Microsoft JhengHei"/>
+              </a:rPr>
+              <a:t>4</a:t>
+            </a:r>
+          </a:p>
+        </p:txBody>
+      </p:sp>
+      <p:sp>
+        <p:nvSpPr>
+          <p:cNvPr id="29" name="TextBox 28"/>
           <p:cNvSpPr txBox="1"/>
           <p:nvPr/>
         </p:nvSpPr>
         <p:spPr>
           <a:xfrm>
-            <a:off x="5330952" y="1554480"/>
-            <a:ext cx="1481328" cy="1234440"/>
+            <a:off x="5404104" y="1920240"/>
+            <a:ext cx="1353312" cy="411480"/>
           </a:xfrm>
           <a:prstGeom prst="rect">
             <a:avLst/>
@@ -9547,34 +7692,148 @@
           <a:noFill/>
         </p:spPr>
         <p:txBody>
-          <a:bodyPr wrap="square" anchor="ctr" lIns="45720" rIns="45720" tIns="27432" bIns="27432">
+          <a:bodyPr wrap="square" anchor="t" lIns="45720" rIns="45720" tIns="27432" bIns="27432">
             <a:spAutoFit/>
           </a:bodyPr>
           <a:lstStyle/>
           <a:p>
+            <a:pPr algn="l"/>
+            <a:r>
+              <a:rPr sz="1350" b="1">
+                <a:solidFill>
+                  <a:srgbClr val="16304F"/>
+                </a:solidFill>
+                <a:latin typeface="Microsoft JhengHei"/>
+              </a:rPr>
+              <a:t>找法規</a:t>
+            </a:r>
+          </a:p>
+        </p:txBody>
+      </p:sp>
+      <p:sp>
+        <p:nvSpPr>
+          <p:cNvPr id="30" name="TextBox 29"/>
+          <p:cNvSpPr txBox="1"/>
+          <p:nvPr/>
+        </p:nvSpPr>
+        <p:spPr>
+          <a:xfrm>
+            <a:off x="5404104" y="2331720"/>
+            <a:ext cx="1353312" cy="731520"/>
+          </a:xfrm>
+          <a:prstGeom prst="rect">
+            <a:avLst/>
+          </a:prstGeom>
+          <a:noFill/>
+        </p:spPr>
+        <p:txBody>
+          <a:bodyPr wrap="square" anchor="t" lIns="45720" rIns="45720" tIns="27432" bIns="27432">
+            <a:spAutoFit/>
+          </a:bodyPr>
+          <a:lstStyle/>
+          <a:p>
+            <a:pPr algn="l"/>
+            <a:r>
+              <a:rPr sz="1100" b="0">
+                <a:solidFill>
+                  <a:srgbClr val="0F2038"/>
+                </a:solidFill>
+                <a:latin typeface="Microsoft JhengHei"/>
+              </a:rPr>
+              <a:t>條文＋版本狀態</a:t>
+            </a:r>
+          </a:p>
+        </p:txBody>
+      </p:sp>
+      <p:sp>
+        <p:nvSpPr>
+          <p:cNvPr id="31" name="Rectangle 30"/>
+          <p:cNvSpPr/>
+          <p:nvPr/>
+        </p:nvSpPr>
+        <p:spPr>
+          <a:xfrm>
+            <a:off x="5440680" y="3291840"/>
+            <a:ext cx="1261872" cy="9144"/>
+          </a:xfrm>
+          <a:prstGeom prst="rect">
+            <a:avLst/>
+          </a:prstGeom>
+          <a:solidFill>
+            <a:srgbClr val="E6EAF0"/>
+          </a:solidFill>
+          <a:ln>
+            <a:noFill/>
+          </a:ln>
+          <a:effectLst/>
+        </p:spPr>
+        <p:style>
+          <a:lnRef idx="1">
+            <a:schemeClr val="accent1"/>
+          </a:lnRef>
+          <a:fillRef idx="3">
+            <a:schemeClr val="accent1"/>
+          </a:fillRef>
+          <a:effectRef idx="2">
+            <a:schemeClr val="accent1"/>
+          </a:effectRef>
+          <a:fontRef idx="minor">
+            <a:schemeClr val="lt1"/>
+          </a:fontRef>
+        </p:style>
+        <p:txBody>
+          <a:bodyPr rtlCol="0" anchor="ctr"/>
+          <a:lstStyle/>
+          <a:p>
             <a:pPr algn="ctr"/>
-            <a:r>
-              <a:rPr sz="1500" b="1">
-                <a:solidFill>
-                  <a:srgbClr val="16304F"/>
-                </a:solidFill>
-                <a:latin typeface="Microsoft JhengHei"/>
-              </a:rPr>
-              <a:t>找法規</a:t>
-            </a:r>
-          </a:p>
-        </p:txBody>
-      </p:sp>
-      <p:sp>
-        <p:nvSpPr>
-          <p:cNvPr id="17" name="Rounded Rectangle 16"/>
+          </a:p>
+        </p:txBody>
+      </p:sp>
+      <p:sp>
+        <p:nvSpPr>
+          <p:cNvPr id="32" name="TextBox 31"/>
+          <p:cNvSpPr txBox="1"/>
+          <p:nvPr/>
+        </p:nvSpPr>
+        <p:spPr>
+          <a:xfrm>
+            <a:off x="5404104" y="3364992"/>
+            <a:ext cx="1353312" cy="1005840"/>
+          </a:xfrm>
+          <a:prstGeom prst="rect">
+            <a:avLst/>
+          </a:prstGeom>
+          <a:noFill/>
+        </p:spPr>
+        <p:txBody>
+          <a:bodyPr wrap="square" anchor="t" lIns="45720" rIns="45720" tIns="27432" bIns="27432">
+            <a:spAutoFit/>
+          </a:bodyPr>
+          <a:lstStyle/>
+          <a:p>
+            <a:pPr algn="l"/>
+            <a:r>
+              <a:rPr sz="1000" b="0">
+                <a:solidFill>
+                  <a:srgbClr val="8A93A0"/>
+                </a:solidFill>
+                <a:latin typeface="Microsoft JhengHei"/>
+              </a:rPr>
+              <a:t>依據 法規庫</a:t>
+            </a:r>
+          </a:p>
+        </p:txBody>
+      </p:sp>
+      <p:sp>
+        <p:nvSpPr>
+          <p:cNvPr id="33" name="Rounded Rectangle 32"/>
           <p:cNvSpPr/>
           <p:nvPr/>
         </p:nvSpPr>
         <p:spPr>
           <a:xfrm>
-            <a:off x="6894576" y="1554480"/>
-            <a:ext cx="1481328" cy="1234440"/>
+            <a:off x="6894576" y="1463040"/>
+            <a:ext cx="1481328" cy="3017520"/>
           </a:xfrm>
           <a:prstGeom prst="roundRect">
             <a:avLst>
@@ -9615,14 +7874,67 @@
       </p:sp>
       <p:sp>
         <p:nvSpPr>
-          <p:cNvPr id="18" name="TextBox 17"/>
+          <p:cNvPr id="34" name="Oval 33"/>
+          <p:cNvSpPr/>
+          <p:nvPr/>
+        </p:nvSpPr>
+        <p:spPr>
+          <a:xfrm>
+            <a:off x="7004304" y="1572768"/>
+            <a:ext cx="292608" cy="292608"/>
+          </a:xfrm>
+          <a:prstGeom prst="ellipse">
+            <a:avLst/>
+          </a:prstGeom>
+          <a:solidFill>
+            <a:srgbClr val="16304F"/>
+          </a:solidFill>
+          <a:ln>
+            <a:noFill/>
+          </a:ln>
+          <a:effectLst/>
+        </p:spPr>
+        <p:style>
+          <a:lnRef idx="1">
+            <a:schemeClr val="accent1"/>
+          </a:lnRef>
+          <a:fillRef idx="3">
+            <a:schemeClr val="accent1"/>
+          </a:fillRef>
+          <a:effectRef idx="2">
+            <a:schemeClr val="accent1"/>
+          </a:effectRef>
+          <a:fontRef idx="minor">
+            <a:schemeClr val="lt1"/>
+          </a:fontRef>
+        </p:style>
+        <p:txBody>
+          <a:bodyPr rtlCol="0" anchor="ctr" lIns="0" rIns="0" tIns="0" bIns="0"/>
+          <a:lstStyle/>
+          <a:p>
+            <a:pPr algn="ctr"/>
+            <a:r>
+              <a:rPr sz="1100" b="1">
+                <a:solidFill>
+                  <a:srgbClr val="FFFFFF"/>
+                </a:solidFill>
+                <a:latin typeface="Microsoft JhengHei"/>
+              </a:rPr>
+              <a:t>5</a:t>
+            </a:r>
+          </a:p>
+        </p:txBody>
+      </p:sp>
+      <p:sp>
+        <p:nvSpPr>
+          <p:cNvPr id="35" name="TextBox 34"/>
           <p:cNvSpPr txBox="1"/>
           <p:nvPr/>
         </p:nvSpPr>
         <p:spPr>
           <a:xfrm>
-            <a:off x="6894576" y="1554480"/>
-            <a:ext cx="1481328" cy="1234440"/>
+            <a:off x="6967728" y="1920240"/>
+            <a:ext cx="1353312" cy="411480"/>
           </a:xfrm>
           <a:prstGeom prst="rect">
             <a:avLst/>
@@ -9630,34 +7942,148 @@
           <a:noFill/>
         </p:spPr>
         <p:txBody>
-          <a:bodyPr wrap="square" anchor="ctr" lIns="45720" rIns="45720" tIns="27432" bIns="27432">
+          <a:bodyPr wrap="square" anchor="t" lIns="45720" rIns="45720" tIns="27432" bIns="27432">
             <a:spAutoFit/>
           </a:bodyPr>
           <a:lstStyle/>
           <a:p>
+            <a:pPr algn="l"/>
+            <a:r>
+              <a:rPr sz="1350" b="1">
+                <a:solidFill>
+                  <a:srgbClr val="16304F"/>
+                </a:solidFill>
+                <a:latin typeface="Microsoft JhengHei"/>
+              </a:rPr>
+              <a:t>找相似案例</a:t>
+            </a:r>
+          </a:p>
+        </p:txBody>
+      </p:sp>
+      <p:sp>
+        <p:nvSpPr>
+          <p:cNvPr id="36" name="TextBox 35"/>
+          <p:cNvSpPr txBox="1"/>
+          <p:nvPr/>
+        </p:nvSpPr>
+        <p:spPr>
+          <a:xfrm>
+            <a:off x="6967728" y="2331720"/>
+            <a:ext cx="1353312" cy="731520"/>
+          </a:xfrm>
+          <a:prstGeom prst="rect">
+            <a:avLst/>
+          </a:prstGeom>
+          <a:noFill/>
+        </p:spPr>
+        <p:txBody>
+          <a:bodyPr wrap="square" anchor="t" lIns="45720" rIns="45720" tIns="27432" bIns="27432">
+            <a:spAutoFit/>
+          </a:bodyPr>
+          <a:lstStyle/>
+          <a:p>
+            <a:pPr algn="l"/>
+            <a:r>
+              <a:rPr sz="1100" b="0">
+                <a:solidFill>
+                  <a:srgbClr val="0F2038"/>
+                </a:solidFill>
+                <a:latin typeface="Microsoft JhengHei"/>
+              </a:rPr>
+              <a:t>3–5 案＋可借用段落</a:t>
+            </a:r>
+          </a:p>
+        </p:txBody>
+      </p:sp>
+      <p:sp>
+        <p:nvSpPr>
+          <p:cNvPr id="37" name="Rectangle 36"/>
+          <p:cNvSpPr/>
+          <p:nvPr/>
+        </p:nvSpPr>
+        <p:spPr>
+          <a:xfrm>
+            <a:off x="7004304" y="3291840"/>
+            <a:ext cx="1261872" cy="9144"/>
+          </a:xfrm>
+          <a:prstGeom prst="rect">
+            <a:avLst/>
+          </a:prstGeom>
+          <a:solidFill>
+            <a:srgbClr val="E6EAF0"/>
+          </a:solidFill>
+          <a:ln>
+            <a:noFill/>
+          </a:ln>
+          <a:effectLst/>
+        </p:spPr>
+        <p:style>
+          <a:lnRef idx="1">
+            <a:schemeClr val="accent1"/>
+          </a:lnRef>
+          <a:fillRef idx="3">
+            <a:schemeClr val="accent1"/>
+          </a:fillRef>
+          <a:effectRef idx="2">
+            <a:schemeClr val="accent1"/>
+          </a:effectRef>
+          <a:fontRef idx="minor">
+            <a:schemeClr val="lt1"/>
+          </a:fontRef>
+        </p:style>
+        <p:txBody>
+          <a:bodyPr rtlCol="0" anchor="ctr"/>
+          <a:lstStyle/>
+          <a:p>
             <a:pPr algn="ctr"/>
-            <a:r>
-              <a:rPr sz="1500" b="1">
-                <a:solidFill>
-                  <a:srgbClr val="16304F"/>
-                </a:solidFill>
-                <a:latin typeface="Microsoft JhengHei"/>
-              </a:rPr>
-              <a:t>找相似案例</a:t>
-            </a:r>
-          </a:p>
-        </p:txBody>
-      </p:sp>
-      <p:sp>
-        <p:nvSpPr>
-          <p:cNvPr id="19" name="Rounded Rectangle 18"/>
+          </a:p>
+        </p:txBody>
+      </p:sp>
+      <p:sp>
+        <p:nvSpPr>
+          <p:cNvPr id="38" name="TextBox 37"/>
+          <p:cNvSpPr txBox="1"/>
+          <p:nvPr/>
+        </p:nvSpPr>
+        <p:spPr>
+          <a:xfrm>
+            <a:off x="6967728" y="3364992"/>
+            <a:ext cx="1353312" cy="1005840"/>
+          </a:xfrm>
+          <a:prstGeom prst="rect">
+            <a:avLst/>
+          </a:prstGeom>
+          <a:noFill/>
+        </p:spPr>
+        <p:txBody>
+          <a:bodyPr wrap="square" anchor="t" lIns="45720" rIns="45720" tIns="27432" bIns="27432">
+            <a:spAutoFit/>
+          </a:bodyPr>
+          <a:lstStyle/>
+          <a:p>
+            <a:pPr algn="l"/>
+            <a:r>
+              <a:rPr sz="1000" b="0">
+                <a:solidFill>
+                  <a:srgbClr val="8A93A0"/>
+                </a:solidFill>
+                <a:latin typeface="Microsoft JhengHei"/>
+              </a:rPr>
+              <a:t>依據 案件庫</a:t>
+            </a:r>
+          </a:p>
+        </p:txBody>
+      </p:sp>
+      <p:sp>
+        <p:nvSpPr>
+          <p:cNvPr id="39" name="Rounded Rectangle 38"/>
           <p:cNvSpPr/>
           <p:nvPr/>
         </p:nvSpPr>
         <p:spPr>
           <a:xfrm>
-            <a:off x="8458200" y="1554480"/>
-            <a:ext cx="1481328" cy="1234440"/>
+            <a:off x="8458200" y="1463040"/>
+            <a:ext cx="1481328" cy="3017520"/>
           </a:xfrm>
           <a:prstGeom prst="roundRect">
             <a:avLst>
@@ -9698,14 +8124,67 @@
       </p:sp>
       <p:sp>
         <p:nvSpPr>
-          <p:cNvPr id="20" name="TextBox 19"/>
+          <p:cNvPr id="40" name="Oval 39"/>
+          <p:cNvSpPr/>
+          <p:nvPr/>
+        </p:nvSpPr>
+        <p:spPr>
+          <a:xfrm>
+            <a:off x="8567928" y="1572768"/>
+            <a:ext cx="292608" cy="292608"/>
+          </a:xfrm>
+          <a:prstGeom prst="ellipse">
+            <a:avLst/>
+          </a:prstGeom>
+          <a:solidFill>
+            <a:srgbClr val="16304F"/>
+          </a:solidFill>
+          <a:ln>
+            <a:noFill/>
+          </a:ln>
+          <a:effectLst/>
+        </p:spPr>
+        <p:style>
+          <a:lnRef idx="1">
+            <a:schemeClr val="accent1"/>
+          </a:lnRef>
+          <a:fillRef idx="3">
+            <a:schemeClr val="accent1"/>
+          </a:fillRef>
+          <a:effectRef idx="2">
+            <a:schemeClr val="accent1"/>
+          </a:effectRef>
+          <a:fontRef idx="minor">
+            <a:schemeClr val="lt1"/>
+          </a:fontRef>
+        </p:style>
+        <p:txBody>
+          <a:bodyPr rtlCol="0" anchor="ctr" lIns="0" rIns="0" tIns="0" bIns="0"/>
+          <a:lstStyle/>
+          <a:p>
+            <a:pPr algn="ctr"/>
+            <a:r>
+              <a:rPr sz="1100" b="1">
+                <a:solidFill>
+                  <a:srgbClr val="FFFFFF"/>
+                </a:solidFill>
+                <a:latin typeface="Microsoft JhengHei"/>
+              </a:rPr>
+              <a:t>6</a:t>
+            </a:r>
+          </a:p>
+        </p:txBody>
+      </p:sp>
+      <p:sp>
+        <p:nvSpPr>
+          <p:cNvPr id="41" name="TextBox 40"/>
           <p:cNvSpPr txBox="1"/>
           <p:nvPr/>
         </p:nvSpPr>
         <p:spPr>
           <a:xfrm>
-            <a:off x="8458200" y="1554480"/>
-            <a:ext cx="1481328" cy="1234440"/>
+            <a:off x="8531352" y="1920240"/>
+            <a:ext cx="1353312" cy="411480"/>
           </a:xfrm>
           <a:prstGeom prst="rect">
             <a:avLst/>
@@ -9713,34 +8192,148 @@
           <a:noFill/>
         </p:spPr>
         <p:txBody>
-          <a:bodyPr wrap="square" anchor="ctr" lIns="45720" rIns="45720" tIns="27432" bIns="27432">
+          <a:bodyPr wrap="square" anchor="t" lIns="45720" rIns="45720" tIns="27432" bIns="27432">
             <a:spAutoFit/>
           </a:bodyPr>
           <a:lstStyle/>
           <a:p>
+            <a:pPr algn="l"/>
+            <a:r>
+              <a:rPr sz="1350" b="1">
+                <a:solidFill>
+                  <a:srgbClr val="16304F"/>
+                </a:solidFill>
+                <a:latin typeface="Microsoft JhengHei"/>
+              </a:rPr>
+              <a:t>寫草稿</a:t>
+            </a:r>
+          </a:p>
+        </p:txBody>
+      </p:sp>
+      <p:sp>
+        <p:nvSpPr>
+          <p:cNvPr id="42" name="TextBox 41"/>
+          <p:cNvSpPr txBox="1"/>
+          <p:nvPr/>
+        </p:nvSpPr>
+        <p:spPr>
+          <a:xfrm>
+            <a:off x="8531352" y="2331720"/>
+            <a:ext cx="1353312" cy="731520"/>
+          </a:xfrm>
+          <a:prstGeom prst="rect">
+            <a:avLst/>
+          </a:prstGeom>
+          <a:noFill/>
+        </p:spPr>
+        <p:txBody>
+          <a:bodyPr wrap="square" anchor="t" lIns="45720" rIns="45720" tIns="27432" bIns="27432">
+            <a:spAutoFit/>
+          </a:bodyPr>
+          <a:lstStyle/>
+          <a:p>
+            <a:pPr algn="l"/>
+            <a:r>
+              <a:rPr sz="1100" b="0">
+                <a:solidFill>
+                  <a:srgbClr val="0F2038"/>
+                </a:solidFill>
+                <a:latin typeface="Microsoft JhengHei"/>
+              </a:rPr>
+              <a:t>主文・事實・理由</a:t>
+            </a:r>
+          </a:p>
+        </p:txBody>
+      </p:sp>
+      <p:sp>
+        <p:nvSpPr>
+          <p:cNvPr id="43" name="Rectangle 42"/>
+          <p:cNvSpPr/>
+          <p:nvPr/>
+        </p:nvSpPr>
+        <p:spPr>
+          <a:xfrm>
+            <a:off x="8567928" y="3291840"/>
+            <a:ext cx="1261872" cy="9144"/>
+          </a:xfrm>
+          <a:prstGeom prst="rect">
+            <a:avLst/>
+          </a:prstGeom>
+          <a:solidFill>
+            <a:srgbClr val="E6EAF0"/>
+          </a:solidFill>
+          <a:ln>
+            <a:noFill/>
+          </a:ln>
+          <a:effectLst/>
+        </p:spPr>
+        <p:style>
+          <a:lnRef idx="1">
+            <a:schemeClr val="accent1"/>
+          </a:lnRef>
+          <a:fillRef idx="3">
+            <a:schemeClr val="accent1"/>
+          </a:fillRef>
+          <a:effectRef idx="2">
+            <a:schemeClr val="accent1"/>
+          </a:effectRef>
+          <a:fontRef idx="minor">
+            <a:schemeClr val="lt1"/>
+          </a:fontRef>
+        </p:style>
+        <p:txBody>
+          <a:bodyPr rtlCol="0" anchor="ctr"/>
+          <a:lstStyle/>
+          <a:p>
             <a:pPr algn="ctr"/>
-            <a:r>
-              <a:rPr sz="1500" b="1">
-                <a:solidFill>
-                  <a:srgbClr val="16304F"/>
-                </a:solidFill>
-                <a:latin typeface="Microsoft JhengHei"/>
-              </a:rPr>
-              <a:t>寫草稿</a:t>
-            </a:r>
-          </a:p>
-        </p:txBody>
-      </p:sp>
-      <p:sp>
-        <p:nvSpPr>
-          <p:cNvPr id="21" name="Rounded Rectangle 20"/>
+          </a:p>
+        </p:txBody>
+      </p:sp>
+      <p:sp>
+        <p:nvSpPr>
+          <p:cNvPr id="44" name="TextBox 43"/>
+          <p:cNvSpPr txBox="1"/>
+          <p:nvPr/>
+        </p:nvSpPr>
+        <p:spPr>
+          <a:xfrm>
+            <a:off x="8531352" y="3364992"/>
+            <a:ext cx="1353312" cy="1005840"/>
+          </a:xfrm>
+          <a:prstGeom prst="rect">
+            <a:avLst/>
+          </a:prstGeom>
+          <a:noFill/>
+        </p:spPr>
+        <p:txBody>
+          <a:bodyPr wrap="square" anchor="t" lIns="45720" rIns="45720" tIns="27432" bIns="27432">
+            <a:spAutoFit/>
+          </a:bodyPr>
+          <a:lstStyle/>
+          <a:p>
+            <a:pPr algn="l"/>
+            <a:r>
+              <a:rPr sz="1000" b="0">
+                <a:solidFill>
+                  <a:srgbClr val="8A93A0"/>
+                </a:solidFill>
+                <a:latin typeface="Microsoft JhengHei"/>
+              </a:rPr>
+              <a:t>依據 相似決定書理由段</a:t>
+            </a:r>
+          </a:p>
+        </p:txBody>
+      </p:sp>
+      <p:sp>
+        <p:nvSpPr>
+          <p:cNvPr id="45" name="Rounded Rectangle 44"/>
           <p:cNvSpPr/>
           <p:nvPr/>
         </p:nvSpPr>
         <p:spPr>
           <a:xfrm>
-            <a:off x="10021824" y="1554480"/>
-            <a:ext cx="1481328" cy="1234440"/>
+            <a:off x="10021824" y="1463040"/>
+            <a:ext cx="1481328" cy="3017520"/>
           </a:xfrm>
           <a:prstGeom prst="roundRect">
             <a:avLst>
@@ -9781,14 +8374,262 @@
       </p:sp>
       <p:sp>
         <p:nvSpPr>
-          <p:cNvPr id="22" name="TextBox 21"/>
+          <p:cNvPr id="46" name="Oval 45"/>
+          <p:cNvSpPr/>
+          <p:nvPr/>
+        </p:nvSpPr>
+        <p:spPr>
+          <a:xfrm>
+            <a:off x="10131551" y="1572768"/>
+            <a:ext cx="292608" cy="292608"/>
+          </a:xfrm>
+          <a:prstGeom prst="ellipse">
+            <a:avLst/>
+          </a:prstGeom>
+          <a:solidFill>
+            <a:srgbClr val="16304F"/>
+          </a:solidFill>
+          <a:ln>
+            <a:noFill/>
+          </a:ln>
+          <a:effectLst/>
+        </p:spPr>
+        <p:style>
+          <a:lnRef idx="1">
+            <a:schemeClr val="accent1"/>
+          </a:lnRef>
+          <a:fillRef idx="3">
+            <a:schemeClr val="accent1"/>
+          </a:fillRef>
+          <a:effectRef idx="2">
+            <a:schemeClr val="accent1"/>
+          </a:effectRef>
+          <a:fontRef idx="minor">
+            <a:schemeClr val="lt1"/>
+          </a:fontRef>
+        </p:style>
+        <p:txBody>
+          <a:bodyPr rtlCol="0" anchor="ctr" lIns="0" rIns="0" tIns="0" bIns="0"/>
+          <a:lstStyle/>
+          <a:p>
+            <a:pPr algn="ctr"/>
+            <a:r>
+              <a:rPr sz="1100" b="1">
+                <a:solidFill>
+                  <a:srgbClr val="FFFFFF"/>
+                </a:solidFill>
+                <a:latin typeface="Microsoft JhengHei"/>
+              </a:rPr>
+              <a:t>7</a:t>
+            </a:r>
+          </a:p>
+        </p:txBody>
+      </p:sp>
+      <p:sp>
+        <p:nvSpPr>
+          <p:cNvPr id="47" name="TextBox 46"/>
           <p:cNvSpPr txBox="1"/>
           <p:nvPr/>
         </p:nvSpPr>
         <p:spPr>
           <a:xfrm>
-            <a:off x="10021824" y="1554480"/>
-            <a:ext cx="1481328" cy="1234440"/>
+            <a:off x="10094976" y="1920240"/>
+            <a:ext cx="1353312" cy="411480"/>
+          </a:xfrm>
+          <a:prstGeom prst="rect">
+            <a:avLst/>
+          </a:prstGeom>
+          <a:noFill/>
+        </p:spPr>
+        <p:txBody>
+          <a:bodyPr wrap="square" anchor="t" lIns="45720" rIns="45720" tIns="27432" bIns="27432">
+            <a:spAutoFit/>
+          </a:bodyPr>
+          <a:lstStyle/>
+          <a:p>
+            <a:pPr algn="l"/>
+            <a:r>
+              <a:rPr sz="1350" b="1">
+                <a:solidFill>
+                  <a:srgbClr val="16304F"/>
+                </a:solidFill>
+                <a:latin typeface="Microsoft JhengHei"/>
+              </a:rPr>
+              <a:t>承辦人修正</a:t>
+            </a:r>
+          </a:p>
+        </p:txBody>
+      </p:sp>
+      <p:sp>
+        <p:nvSpPr>
+          <p:cNvPr id="48" name="TextBox 47"/>
+          <p:cNvSpPr txBox="1"/>
+          <p:nvPr/>
+        </p:nvSpPr>
+        <p:spPr>
+          <a:xfrm>
+            <a:off x="10094976" y="2331720"/>
+            <a:ext cx="1353312" cy="731520"/>
+          </a:xfrm>
+          <a:prstGeom prst="rect">
+            <a:avLst/>
+          </a:prstGeom>
+          <a:noFill/>
+        </p:spPr>
+        <p:txBody>
+          <a:bodyPr wrap="square" anchor="t" lIns="45720" rIns="45720" tIns="27432" bIns="27432">
+            <a:spAutoFit/>
+          </a:bodyPr>
+          <a:lstStyle/>
+          <a:p>
+            <a:pPr algn="l"/>
+            <a:r>
+              <a:rPr sz="1100" b="0">
+                <a:solidFill>
+                  <a:srgbClr val="0F2038"/>
+                </a:solidFill>
+                <a:latin typeface="Microsoft JhengHei"/>
+              </a:rPr>
+              <a:t>草稿 v2</a:t>
+            </a:r>
+          </a:p>
+        </p:txBody>
+      </p:sp>
+      <p:sp>
+        <p:nvSpPr>
+          <p:cNvPr id="49" name="Rectangle 48"/>
+          <p:cNvSpPr/>
+          <p:nvPr/>
+        </p:nvSpPr>
+        <p:spPr>
+          <a:xfrm>
+            <a:off x="10131551" y="3291840"/>
+            <a:ext cx="1261872" cy="9144"/>
+          </a:xfrm>
+          <a:prstGeom prst="rect">
+            <a:avLst/>
+          </a:prstGeom>
+          <a:solidFill>
+            <a:srgbClr val="E6EAF0"/>
+          </a:solidFill>
+          <a:ln>
+            <a:noFill/>
+          </a:ln>
+          <a:effectLst/>
+        </p:spPr>
+        <p:style>
+          <a:lnRef idx="1">
+            <a:schemeClr val="accent1"/>
+          </a:lnRef>
+          <a:fillRef idx="3">
+            <a:schemeClr val="accent1"/>
+          </a:fillRef>
+          <a:effectRef idx="2">
+            <a:schemeClr val="accent1"/>
+          </a:effectRef>
+          <a:fontRef idx="minor">
+            <a:schemeClr val="lt1"/>
+          </a:fontRef>
+        </p:style>
+        <p:txBody>
+          <a:bodyPr rtlCol="0" anchor="ctr"/>
+          <a:lstStyle/>
+          <a:p>
+            <a:pPr algn="ctr"/>
+          </a:p>
+        </p:txBody>
+      </p:sp>
+      <p:sp>
+        <p:nvSpPr>
+          <p:cNvPr id="50" name="TextBox 49"/>
+          <p:cNvSpPr txBox="1"/>
+          <p:nvPr/>
+        </p:nvSpPr>
+        <p:spPr>
+          <a:xfrm>
+            <a:off x="10094976" y="3364992"/>
+            <a:ext cx="1353312" cy="1005840"/>
+          </a:xfrm>
+          <a:prstGeom prst="rect">
+            <a:avLst/>
+          </a:prstGeom>
+          <a:noFill/>
+        </p:spPr>
+        <p:txBody>
+          <a:bodyPr wrap="square" anchor="t" lIns="45720" rIns="45720" tIns="27432" bIns="27432">
+            <a:spAutoFit/>
+          </a:bodyPr>
+          <a:lstStyle/>
+          <a:p>
+            <a:pPr algn="l"/>
+            <a:r>
+              <a:rPr sz="1000" b="0">
+                <a:solidFill>
+                  <a:srgbClr val="8A93A0"/>
+                </a:solidFill>
+                <a:latin typeface="Microsoft JhengHei"/>
+              </a:rPr>
+              <a:t>依據 承辦人意見，只重算受影響步驟</a:t>
+            </a:r>
+          </a:p>
+        </p:txBody>
+      </p:sp>
+      <p:sp>
+        <p:nvSpPr>
+          <p:cNvPr id="51" name="Rounded Rectangle 50"/>
+          <p:cNvSpPr/>
+          <p:nvPr/>
+        </p:nvSpPr>
+        <p:spPr>
+          <a:xfrm>
+            <a:off x="640080" y="4800600"/>
+            <a:ext cx="3520440" cy="1234440"/>
+          </a:xfrm>
+          <a:prstGeom prst="roundRect">
+            <a:avLst>
+              <a:gd name="adj" fmla="val 8000"/>
+            </a:avLst>
+          </a:prstGeom>
+          <a:solidFill>
+            <a:srgbClr val="F4F6F9"/>
+          </a:solidFill>
+          <a:ln>
+            <a:noFill/>
+          </a:ln>
+          <a:effectLst/>
+        </p:spPr>
+        <p:style>
+          <a:lnRef idx="1">
+            <a:schemeClr val="accent1"/>
+          </a:lnRef>
+          <a:fillRef idx="3">
+            <a:schemeClr val="accent1"/>
+          </a:fillRef>
+          <a:effectRef idx="2">
+            <a:schemeClr val="accent1"/>
+          </a:effectRef>
+          <a:fontRef idx="minor">
+            <a:schemeClr val="lt1"/>
+          </a:fontRef>
+        </p:style>
+        <p:txBody>
+          <a:bodyPr rtlCol="0" anchor="ctr"/>
+          <a:lstStyle/>
+          <a:p>
+            <a:pPr algn="ctr"/>
+          </a:p>
+        </p:txBody>
+      </p:sp>
+      <p:sp>
+        <p:nvSpPr>
+          <p:cNvPr id="52" name="TextBox 51"/>
+          <p:cNvSpPr txBox="1"/>
+          <p:nvPr/>
+        </p:nvSpPr>
+        <p:spPr>
+          <a:xfrm>
+            <a:off x="822959" y="4846320"/>
+            <a:ext cx="1371600" cy="1143000"/>
           </a:xfrm>
           <a:prstGeom prst="rect">
             <a:avLst/>
@@ -9801,29 +8642,29 @@
           </a:bodyPr>
           <a:lstStyle/>
           <a:p>
-            <a:pPr algn="ctr"/>
-            <a:r>
-              <a:rPr sz="1500" b="1">
+            <a:pPr algn="l"/>
+            <a:r>
+              <a:rPr sz="1800" b="1">
                 <a:solidFill>
                   <a:srgbClr val="16304F"/>
                 </a:solidFill>
                 <a:latin typeface="Microsoft JhengHei"/>
               </a:rPr>
-              <a:t>承辦人修正</a:t>
-            </a:r>
-          </a:p>
-        </p:txBody>
-      </p:sp>
-      <p:sp>
-        <p:nvSpPr>
-          <p:cNvPr id="23" name="TextBox 22"/>
+              <a:t>結果留底</a:t>
+            </a:r>
+          </a:p>
+        </p:txBody>
+      </p:sp>
+      <p:sp>
+        <p:nvSpPr>
+          <p:cNvPr id="53" name="TextBox 52"/>
           <p:cNvSpPr txBox="1"/>
           <p:nvPr/>
         </p:nvSpPr>
         <p:spPr>
           <a:xfrm>
-            <a:off x="640080" y="3200400"/>
-            <a:ext cx="2103120" cy="1463040"/>
+            <a:off x="2194560" y="4846320"/>
+            <a:ext cx="1828800" cy="1143000"/>
           </a:xfrm>
           <a:prstGeom prst="rect">
             <a:avLst/>
@@ -9838,27 +8679,73 @@
           <a:p>
             <a:pPr algn="l"/>
             <a:r>
-              <a:rPr sz="9600" b="1">
-                <a:solidFill>
-                  <a:srgbClr val="16304F"/>
-                </a:solidFill>
-                <a:latin typeface="Microsoft JhengHei"/>
-              </a:rPr>
-              <a:t>6</a:t>
-            </a:r>
-          </a:p>
-        </p:txBody>
-      </p:sp>
-      <p:sp>
-        <p:nvSpPr>
-          <p:cNvPr id="24" name="TextBox 23"/>
+              <a:rPr sz="1150" b="0">
+                <a:solidFill>
+                  <a:srgbClr val="334455"/>
+                </a:solidFill>
+                <a:latin typeface="Microsoft JhengHei"/>
+              </a:rPr>
+              <a:t>每一步的產出都保存，隨時回看</a:t>
+            </a:r>
+          </a:p>
+        </p:txBody>
+      </p:sp>
+      <p:sp>
+        <p:nvSpPr>
+          <p:cNvPr id="54" name="Rounded Rectangle 53"/>
+          <p:cNvSpPr/>
+          <p:nvPr/>
+        </p:nvSpPr>
+        <p:spPr>
+          <a:xfrm>
+            <a:off x="4325112" y="4800600"/>
+            <a:ext cx="3520440" cy="1234440"/>
+          </a:xfrm>
+          <a:prstGeom prst="roundRect">
+            <a:avLst>
+              <a:gd name="adj" fmla="val 8000"/>
+            </a:avLst>
+          </a:prstGeom>
+          <a:solidFill>
+            <a:srgbClr val="F4F6F9"/>
+          </a:solidFill>
+          <a:ln>
+            <a:noFill/>
+          </a:ln>
+          <a:effectLst/>
+        </p:spPr>
+        <p:style>
+          <a:lnRef idx="1">
+            <a:schemeClr val="accent1"/>
+          </a:lnRef>
+          <a:fillRef idx="3">
+            <a:schemeClr val="accent1"/>
+          </a:fillRef>
+          <a:effectRef idx="2">
+            <a:schemeClr val="accent1"/>
+          </a:effectRef>
+          <a:fontRef idx="minor">
+            <a:schemeClr val="lt1"/>
+          </a:fontRef>
+        </p:style>
+        <p:txBody>
+          <a:bodyPr rtlCol="0" anchor="ctr"/>
+          <a:lstStyle/>
+          <a:p>
+            <a:pPr algn="ctr"/>
+          </a:p>
+        </p:txBody>
+      </p:sp>
+      <p:sp>
+        <p:nvSpPr>
+          <p:cNvPr id="55" name="TextBox 54"/>
           <p:cNvSpPr txBox="1"/>
           <p:nvPr/>
         </p:nvSpPr>
         <p:spPr>
           <a:xfrm>
-            <a:off x="2743200" y="3977639"/>
-            <a:ext cx="2560320" cy="548640"/>
+            <a:off x="4507992" y="4846320"/>
+            <a:ext cx="1371600" cy="1143000"/>
           </a:xfrm>
           <a:prstGeom prst="rect">
             <a:avLst/>
@@ -9866,34 +8753,34 @@
           <a:noFill/>
         </p:spPr>
         <p:txBody>
-          <a:bodyPr wrap="square" anchor="t" lIns="45720" rIns="45720" tIns="27432" bIns="27432">
+          <a:bodyPr wrap="square" anchor="ctr" lIns="45720" rIns="45720" tIns="27432" bIns="27432">
             <a:spAutoFit/>
           </a:bodyPr>
           <a:lstStyle/>
           <a:p>
             <a:pPr algn="l"/>
             <a:r>
-              <a:rPr sz="1800" b="0">
-                <a:solidFill>
-                  <a:srgbClr val="5B6573"/>
-                </a:solidFill>
-                <a:latin typeface="Microsoft JhengHei"/>
-              </a:rPr>
-              <a:t>次 AI・約 2 分鐘</a:t>
-            </a:r>
-          </a:p>
-        </p:txBody>
-      </p:sp>
-      <p:sp>
-        <p:nvSpPr>
-          <p:cNvPr id="25" name="TextBox 24"/>
+              <a:rPr sz="1800" b="1">
+                <a:solidFill>
+                  <a:srgbClr val="16304F"/>
+                </a:solidFill>
+                <a:latin typeface="Microsoft JhengHei"/>
+              </a:rPr>
+              <a:t>可溯源</a:t>
+            </a:r>
+          </a:p>
+        </p:txBody>
+      </p:sp>
+      <p:sp>
+        <p:nvSpPr>
+          <p:cNvPr id="56" name="TextBox 55"/>
           <p:cNvSpPr txBox="1"/>
           <p:nvPr/>
         </p:nvSpPr>
         <p:spPr>
           <a:xfrm>
-            <a:off x="5486400" y="3291840"/>
-            <a:ext cx="6035040" cy="914400"/>
+            <a:off x="5879592" y="4846320"/>
+            <a:ext cx="1828800" cy="1143000"/>
           </a:xfrm>
           <a:prstGeom prst="rect">
             <a:avLst/>
@@ -9901,34 +8788,80 @@
           <a:noFill/>
         </p:spPr>
         <p:txBody>
-          <a:bodyPr wrap="square" anchor="t" lIns="45720" rIns="45720" tIns="27432" bIns="27432">
+          <a:bodyPr wrap="square" anchor="ctr" lIns="45720" rIns="45720" tIns="27432" bIns="27432">
             <a:spAutoFit/>
           </a:bodyPr>
           <a:lstStyle/>
           <a:p>
             <a:pPr algn="l"/>
             <a:r>
-              <a:rPr sz="1800" b="0">
+              <a:rPr sz="1150" b="0">
                 <a:solidFill>
                   <a:srgbClr val="334455"/>
                 </a:solidFill>
                 <a:latin typeface="Microsoft JhengHei"/>
               </a:rPr>
-              <a:t>步驟固定，結果留底。錯在哪一步，就修那一步；每個結論都指得出卷證和條號。</a:t>
-            </a:r>
-          </a:p>
-        </p:txBody>
-      </p:sp>
-      <p:sp>
-        <p:nvSpPr>
-          <p:cNvPr id="26" name="TextBox 25"/>
+              <a:t>每個結論指得出卷證頁碼與條號</a:t>
+            </a:r>
+          </a:p>
+        </p:txBody>
+      </p:sp>
+      <p:sp>
+        <p:nvSpPr>
+          <p:cNvPr id="57" name="Rounded Rectangle 56"/>
+          <p:cNvSpPr/>
+          <p:nvPr/>
+        </p:nvSpPr>
+        <p:spPr>
+          <a:xfrm>
+            <a:off x="8010144" y="4800600"/>
+            <a:ext cx="3520440" cy="1234440"/>
+          </a:xfrm>
+          <a:prstGeom prst="roundRect">
+            <a:avLst>
+              <a:gd name="adj" fmla="val 8000"/>
+            </a:avLst>
+          </a:prstGeom>
+          <a:solidFill>
+            <a:srgbClr val="F4F6F9"/>
+          </a:solidFill>
+          <a:ln>
+            <a:noFill/>
+          </a:ln>
+          <a:effectLst/>
+        </p:spPr>
+        <p:style>
+          <a:lnRef idx="1">
+            <a:schemeClr val="accent1"/>
+          </a:lnRef>
+          <a:fillRef idx="3">
+            <a:schemeClr val="accent1"/>
+          </a:fillRef>
+          <a:effectRef idx="2">
+            <a:schemeClr val="accent1"/>
+          </a:effectRef>
+          <a:fontRef idx="minor">
+            <a:schemeClr val="lt1"/>
+          </a:fontRef>
+        </p:style>
+        <p:txBody>
+          <a:bodyPr rtlCol="0" anchor="ctr"/>
+          <a:lstStyle/>
+          <a:p>
+            <a:pPr algn="ctr"/>
+          </a:p>
+        </p:txBody>
+      </p:sp>
+      <p:sp>
+        <p:nvSpPr>
+          <p:cNvPr id="58" name="TextBox 57"/>
           <p:cNvSpPr txBox="1"/>
           <p:nvPr/>
         </p:nvSpPr>
         <p:spPr>
           <a:xfrm>
-            <a:off x="5486400" y="4297680"/>
-            <a:ext cx="6035040" cy="731520"/>
+            <a:off x="8193023" y="4846320"/>
+            <a:ext cx="1371600" cy="1143000"/>
           </a:xfrm>
           <a:prstGeom prst="rect">
             <a:avLst/>
@@ -9936,7 +8869,7 @@
           <a:noFill/>
         </p:spPr>
         <p:txBody>
-          <a:bodyPr wrap="square" anchor="t" lIns="45720" rIns="45720" tIns="27432" bIns="27432">
+          <a:bodyPr wrap="square" anchor="ctr" lIns="45720" rIns="45720" tIns="27432" bIns="27432">
             <a:spAutoFit/>
           </a:bodyPr>
           <a:lstStyle/>
@@ -9945,11 +8878,46 @@
             <a:r>
               <a:rPr sz="1800" b="1">
                 <a:solidFill>
-                  <a:srgbClr val="2E7D32"/>
-                </a:solidFill>
-                <a:latin typeface="Microsoft JhengHei"/>
-              </a:rPr>
-              <a:t>期間怎麼算、該不該受理，是法條說了算，不是 AI 猜——這一步交給程式。</a:t>
+                  <a:srgbClr val="16304F"/>
+                </a:solidFill>
+                <a:latin typeface="Microsoft JhengHei"/>
+              </a:rPr>
+              <a:t>局部重算</a:t>
+            </a:r>
+          </a:p>
+        </p:txBody>
+      </p:sp>
+      <p:sp>
+        <p:nvSpPr>
+          <p:cNvPr id="59" name="TextBox 58"/>
+          <p:cNvSpPr txBox="1"/>
+          <p:nvPr/>
+        </p:nvSpPr>
+        <p:spPr>
+          <a:xfrm>
+            <a:off x="9564624" y="4846320"/>
+            <a:ext cx="1828800" cy="1143000"/>
+          </a:xfrm>
+          <a:prstGeom prst="rect">
+            <a:avLst/>
+          </a:prstGeom>
+          <a:noFill/>
+        </p:spPr>
+        <p:txBody>
+          <a:bodyPr wrap="square" anchor="ctr" lIns="45720" rIns="45720" tIns="27432" bIns="27432">
+            <a:spAutoFit/>
+          </a:bodyPr>
+          <a:lstStyle/>
+          <a:p>
+            <a:pPr algn="l"/>
+            <a:r>
+              <a:rPr sz="1150" b="0">
+                <a:solidFill>
+                  <a:srgbClr val="334455"/>
+                </a:solidFill>
+                <a:latin typeface="Microsoft JhengHei"/>
+              </a:rPr>
+              <a:t>錯在哪一步，只修那一步</a:t>
             </a:r>
           </a:p>
         </p:txBody>
@@ -10239,7 +9207,7 @@
                 </a:solidFill>
                 <a:latin typeface="Microsoft JhengHei"/>
               </a:rPr>
-              <a:t>6 / 11</a:t>
+              <a:t>6 / 9</a:t>
             </a:r>
           </a:p>
         </p:txBody>
@@ -10439,7 +9407,7 @@
                 </a:solidFill>
                 <a:latin typeface="Microsoft JhengHei"/>
               </a:rPr>
-              <a:t>06 ／ 可信度</a:t>
+              <a:t>06 ／ 資料應用</a:t>
             </a:r>
           </a:p>
         </p:txBody>
@@ -10474,7 +9442,7 @@
                 </a:solidFill>
                 <a:latin typeface="Microsoft JhengHei"/>
               </a:rPr>
-              <a:t>AI 會犯的四種錯，四道關卡</a:t>
+              <a:t>拿不到答辯書和卷宗，就自己出三套考題</a:t>
             </a:r>
           </a:p>
         </p:txBody>
@@ -10588,7 +9556,7 @@
                 </a:solidFill>
                 <a:latin typeface="Microsoft JhengHei"/>
               </a:rPr>
-              <a:t>7 / 11</a:t>
+              <a:t>7 / 9</a:t>
             </a:r>
           </a:p>
         </p:txBody>
@@ -10602,7 +9570,7 @@
         <p:spPr>
           <a:xfrm>
             <a:off x="640080" y="1554480"/>
-            <a:ext cx="2606040" cy="3840480"/>
+            <a:ext cx="3520440" cy="3840480"/>
           </a:xfrm>
           <a:prstGeom prst="roundRect">
             <a:avLst>
@@ -10610,10 +9578,12 @@
             </a:avLst>
           </a:prstGeom>
           <a:solidFill>
-            <a:srgbClr val="F4F6F9"/>
+            <a:srgbClr val="FFFFFF"/>
           </a:solidFill>
-          <a:ln>
-            <a:noFill/>
+          <a:ln w="19050">
+            <a:solidFill>
+              <a:srgbClr val="DDE3EA"/>
+            </a:solidFill>
           </a:ln>
           <a:effectLst/>
         </p:spPr>
@@ -10641,17 +9611,89 @@
       </p:sp>
       <p:sp>
         <p:nvSpPr>
-          <p:cNvPr id="10" name="Oval 9"/>
+          <p:cNvPr id="10" name="TextBox 9"/>
+          <p:cNvSpPr txBox="1"/>
+          <p:nvPr/>
+        </p:nvSpPr>
+        <p:spPr>
+          <a:xfrm>
+            <a:off x="841247" y="1691640"/>
+            <a:ext cx="3108960" cy="320040"/>
+          </a:xfrm>
+          <a:prstGeom prst="rect">
+            <a:avLst/>
+          </a:prstGeom>
+          <a:noFill/>
+        </p:spPr>
+        <p:txBody>
+          <a:bodyPr wrap="square" anchor="t" lIns="45720" rIns="45720" tIns="27432" bIns="27432">
+            <a:spAutoFit/>
+          </a:bodyPr>
+          <a:lstStyle/>
+          <a:p>
+            <a:pPr algn="l"/>
+            <a:r>
+              <a:rPr sz="1050" b="1">
+                <a:solidFill>
+                  <a:srgbClr val="D98E04"/>
+                </a:solidFill>
+                <a:latin typeface="Microsoft JhengHei"/>
+              </a:rPr>
+              <a:t>CASE 01 ／ 建築法</a:t>
+            </a:r>
+          </a:p>
+        </p:txBody>
+      </p:sp>
+      <p:sp>
+        <p:nvSpPr>
+          <p:cNvPr id="11" name="TextBox 10"/>
+          <p:cNvSpPr txBox="1"/>
+          <p:nvPr/>
+        </p:nvSpPr>
+        <p:spPr>
+          <a:xfrm>
+            <a:off x="841247" y="2011680"/>
+            <a:ext cx="3108960" cy="502920"/>
+          </a:xfrm>
+          <a:prstGeom prst="rect">
+            <a:avLst/>
+          </a:prstGeom>
+          <a:noFill/>
+        </p:spPr>
+        <p:txBody>
+          <a:bodyPr wrap="square" anchor="t" lIns="45720" rIns="45720" tIns="27432" bIns="27432">
+            <a:spAutoFit/>
+          </a:bodyPr>
+          <a:lstStyle/>
+          <a:p>
+            <a:pPr algn="l"/>
+            <a:r>
+              <a:rPr sz="2000" b="1">
+                <a:solidFill>
+                  <a:srgbClr val="16304F"/>
+                </a:solidFill>
+                <a:latin typeface="Microsoft JhengHei"/>
+              </a:rPr>
+              <a:t>訴願人遲了 7 天</a:t>
+            </a:r>
+          </a:p>
+        </p:txBody>
+      </p:sp>
+      <p:sp>
+        <p:nvSpPr>
+          <p:cNvPr id="12" name="Rounded Rectangle 11"/>
           <p:cNvSpPr/>
           <p:nvPr/>
         </p:nvSpPr>
         <p:spPr>
           <a:xfrm>
-            <a:off x="1508760" y="1828800"/>
-            <a:ext cx="868680" cy="868680"/>
-          </a:xfrm>
-          <a:prstGeom prst="ellipse">
-            <a:avLst/>
+            <a:off x="841247" y="2606040"/>
+            <a:ext cx="1188720" cy="411480"/>
+          </a:xfrm>
+          <a:prstGeom prst="roundRect">
+            <a:avLst>
+              <a:gd name="adj" fmla="val 8000"/>
+            </a:avLst>
           </a:prstGeom>
           <a:solidFill>
             <a:srgbClr val="16304F"/>
@@ -10676,32 +9718,58 @@
           </a:fontRef>
         </p:style>
         <p:txBody>
-          <a:bodyPr rtlCol="0" anchor="ctr" lIns="0" rIns="0" tIns="0" bIns="0"/>
+          <a:bodyPr rtlCol="0" anchor="ctr"/>
           <a:lstStyle/>
           <a:p>
             <a:pPr algn="ctr"/>
-            <a:r>
-              <a:rPr sz="2600" b="1">
+          </a:p>
+        </p:txBody>
+      </p:sp>
+      <p:sp>
+        <p:nvSpPr>
+          <p:cNvPr id="13" name="TextBox 12"/>
+          <p:cNvSpPr txBox="1"/>
+          <p:nvPr/>
+        </p:nvSpPr>
+        <p:spPr>
+          <a:xfrm>
+            <a:off x="841247" y="2606040"/>
+            <a:ext cx="1188720" cy="411480"/>
+          </a:xfrm>
+          <a:prstGeom prst="rect">
+            <a:avLst/>
+          </a:prstGeom>
+          <a:noFill/>
+        </p:spPr>
+        <p:txBody>
+          <a:bodyPr wrap="square" anchor="ctr" lIns="45720" rIns="45720" tIns="27432" bIns="27432">
+            <a:spAutoFit/>
+          </a:bodyPr>
+          <a:lstStyle/>
+          <a:p>
+            <a:pPr algn="ctr"/>
+            <a:r>
+              <a:rPr sz="1500" b="1">
                 <a:solidFill>
                   <a:srgbClr val="FFFFFF"/>
                 </a:solidFill>
                 <a:latin typeface="Microsoft JhengHei"/>
               </a:rPr>
-              <a:t>1</a:t>
-            </a:r>
-          </a:p>
-        </p:txBody>
-      </p:sp>
-      <p:sp>
-        <p:nvSpPr>
-          <p:cNvPr id="11" name="TextBox 10"/>
+              <a:t>不受理</a:t>
+            </a:r>
+          </a:p>
+        </p:txBody>
+      </p:sp>
+      <p:sp>
+        <p:nvSpPr>
+          <p:cNvPr id="14" name="TextBox 13"/>
           <p:cNvSpPr txBox="1"/>
           <p:nvPr/>
         </p:nvSpPr>
         <p:spPr>
           <a:xfrm>
-            <a:off x="777240" y="2880360"/>
-            <a:ext cx="2331720" cy="457200"/>
+            <a:off x="841247" y="3154680"/>
+            <a:ext cx="3108960" cy="2103120"/>
           </a:xfrm>
           <a:prstGeom prst="rect">
             <a:avLst/>
@@ -10714,42 +9782,7 @@
           </a:bodyPr>
           <a:lstStyle/>
           <a:p>
-            <a:pPr algn="ctr"/>
-            <a:r>
-              <a:rPr sz="1800" b="1">
-                <a:solidFill>
-                  <a:srgbClr val="16304F"/>
-                </a:solidFill>
-                <a:latin typeface="Microsoft JhengHei"/>
-              </a:rPr>
-              <a:t>捏造條號</a:t>
-            </a:r>
-          </a:p>
-        </p:txBody>
-      </p:sp>
-      <p:sp>
-        <p:nvSpPr>
-          <p:cNvPr id="12" name="TextBox 11"/>
-          <p:cNvSpPr txBox="1"/>
-          <p:nvPr/>
-        </p:nvSpPr>
-        <p:spPr>
-          <a:xfrm>
-            <a:off x="822959" y="3383280"/>
-            <a:ext cx="2240280" cy="1828800"/>
-          </a:xfrm>
-          <a:prstGeom prst="rect">
-            <a:avLst/>
-          </a:prstGeom>
-          <a:noFill/>
-        </p:spPr>
-        <p:txBody>
-          <a:bodyPr wrap="square" anchor="t" lIns="45720" rIns="45720" tIns="27432" bIns="27432">
-            <a:spAutoFit/>
-          </a:bodyPr>
-          <a:lstStyle/>
-          <a:p>
-            <a:pPr algn="ctr"/>
+            <a:pPr algn="l"/>
             <a:r>
               <a:rPr sz="1350" b="0">
                 <a:solidFill>
@@ -10757,21 +9790,21 @@
                 </a:solidFill>
                 <a:latin typeface="Microsoft JhengHei"/>
               </a:rPr>
-              <a:t>11 部法規逐條比對；查無就標「未收錄」</a:t>
-            </a:r>
-          </a:p>
-        </p:txBody>
-      </p:sp>
-      <p:sp>
-        <p:nvSpPr>
-          <p:cNvPr id="13" name="Rounded Rectangle 12"/>
+              <a:t>卷宗塞滿實質理由和照片當干擾；正確答案仍是程序不受理，不能寫任何實質認定。</a:t>
+            </a:r>
+          </a:p>
+        </p:txBody>
+      </p:sp>
+      <p:sp>
+        <p:nvSpPr>
+          <p:cNvPr id="15" name="Rounded Rectangle 14"/>
           <p:cNvSpPr/>
           <p:nvPr/>
         </p:nvSpPr>
         <p:spPr>
           <a:xfrm>
-            <a:off x="3401568" y="1554480"/>
-            <a:ext cx="2606040" cy="3840480"/>
+            <a:off x="4325112" y="1554480"/>
+            <a:ext cx="3520440" cy="3840480"/>
           </a:xfrm>
           <a:prstGeom prst="roundRect">
             <a:avLst>
@@ -10779,10 +9812,12 @@
             </a:avLst>
           </a:prstGeom>
           <a:solidFill>
-            <a:srgbClr val="F4F6F9"/>
+            <a:srgbClr val="FFFFFF"/>
           </a:solidFill>
-          <a:ln>
-            <a:noFill/>
+          <a:ln w="19050">
+            <a:solidFill>
+              <a:srgbClr val="DDE3EA"/>
+            </a:solidFill>
           </a:ln>
           <a:effectLst/>
         </p:spPr>
@@ -10810,17 +9845,89 @@
       </p:sp>
       <p:sp>
         <p:nvSpPr>
-          <p:cNvPr id="14" name="Oval 13"/>
+          <p:cNvPr id="16" name="TextBox 15"/>
+          <p:cNvSpPr txBox="1"/>
+          <p:nvPr/>
+        </p:nvSpPr>
+        <p:spPr>
+          <a:xfrm>
+            <a:off x="4526280" y="1691640"/>
+            <a:ext cx="3108960" cy="320040"/>
+          </a:xfrm>
+          <a:prstGeom prst="rect">
+            <a:avLst/>
+          </a:prstGeom>
+          <a:noFill/>
+        </p:spPr>
+        <p:txBody>
+          <a:bodyPr wrap="square" anchor="t" lIns="45720" rIns="45720" tIns="27432" bIns="27432">
+            <a:spAutoFit/>
+          </a:bodyPr>
+          <a:lstStyle/>
+          <a:p>
+            <a:pPr algn="l"/>
+            <a:r>
+              <a:rPr sz="1050" b="1">
+                <a:solidFill>
+                  <a:srgbClr val="D98E04"/>
+                </a:solidFill>
+                <a:latin typeface="Microsoft JhengHei"/>
+              </a:rPr>
+              <a:t>CASE 02 ／ 廢清法</a:t>
+            </a:r>
+          </a:p>
+        </p:txBody>
+      </p:sp>
+      <p:sp>
+        <p:nvSpPr>
+          <p:cNvPr id="17" name="TextBox 16"/>
+          <p:cNvSpPr txBox="1"/>
+          <p:nvPr/>
+        </p:nvSpPr>
+        <p:spPr>
+          <a:xfrm>
+            <a:off x="4526280" y="2011680"/>
+            <a:ext cx="3108960" cy="502920"/>
+          </a:xfrm>
+          <a:prstGeom prst="rect">
+            <a:avLst/>
+          </a:prstGeom>
+          <a:noFill/>
+        </p:spPr>
+        <p:txBody>
+          <a:bodyPr wrap="square" anchor="t" lIns="45720" rIns="45720" tIns="27432" bIns="27432">
+            <a:spAutoFit/>
+          </a:bodyPr>
+          <a:lstStyle/>
+          <a:p>
+            <a:pPr algn="l"/>
+            <a:r>
+              <a:rPr sz="2000" b="1">
+                <a:solidFill>
+                  <a:srgbClr val="16304F"/>
+                </a:solidFill>
+                <a:latin typeface="Microsoft JhengHei"/>
+              </a:rPr>
+              <a:t>亂丟煙蒂，說沒丟</a:t>
+            </a:r>
+          </a:p>
+        </p:txBody>
+      </p:sp>
+      <p:sp>
+        <p:nvSpPr>
+          <p:cNvPr id="18" name="Rounded Rectangle 17"/>
           <p:cNvSpPr/>
           <p:nvPr/>
         </p:nvSpPr>
         <p:spPr>
           <a:xfrm>
-            <a:off x="4270248" y="1828800"/>
-            <a:ext cx="868680" cy="868680"/>
-          </a:xfrm>
-          <a:prstGeom prst="ellipse">
-            <a:avLst/>
+            <a:off x="4526280" y="2606040"/>
+            <a:ext cx="1188720" cy="411480"/>
+          </a:xfrm>
+          <a:prstGeom prst="roundRect">
+            <a:avLst>
+              <a:gd name="adj" fmla="val 8000"/>
+            </a:avLst>
           </a:prstGeom>
           <a:solidFill>
             <a:srgbClr val="16304F"/>
@@ -10845,32 +9952,58 @@
           </a:fontRef>
         </p:style>
         <p:txBody>
-          <a:bodyPr rtlCol="0" anchor="ctr" lIns="0" rIns="0" tIns="0" bIns="0"/>
+          <a:bodyPr rtlCol="0" anchor="ctr"/>
           <a:lstStyle/>
           <a:p>
             <a:pPr algn="ctr"/>
-            <a:r>
-              <a:rPr sz="2600" b="1">
+          </a:p>
+        </p:txBody>
+      </p:sp>
+      <p:sp>
+        <p:nvSpPr>
+          <p:cNvPr id="19" name="TextBox 18"/>
+          <p:cNvSpPr txBox="1"/>
+          <p:nvPr/>
+        </p:nvSpPr>
+        <p:spPr>
+          <a:xfrm>
+            <a:off x="4526280" y="2606040"/>
+            <a:ext cx="1188720" cy="411480"/>
+          </a:xfrm>
+          <a:prstGeom prst="rect">
+            <a:avLst/>
+          </a:prstGeom>
+          <a:noFill/>
+        </p:spPr>
+        <p:txBody>
+          <a:bodyPr wrap="square" anchor="ctr" lIns="45720" rIns="45720" tIns="27432" bIns="27432">
+            <a:spAutoFit/>
+          </a:bodyPr>
+          <a:lstStyle/>
+          <a:p>
+            <a:pPr algn="ctr"/>
+            <a:r>
+              <a:rPr sz="1500" b="1">
                 <a:solidFill>
                   <a:srgbClr val="FFFFFF"/>
                 </a:solidFill>
                 <a:latin typeface="Microsoft JhengHei"/>
               </a:rPr>
-              <a:t>2</a:t>
-            </a:r>
-          </a:p>
-        </p:txBody>
-      </p:sp>
-      <p:sp>
-        <p:nvSpPr>
-          <p:cNvPr id="15" name="TextBox 14"/>
+              <a:t>駁回</a:t>
+            </a:r>
+          </a:p>
+        </p:txBody>
+      </p:sp>
+      <p:sp>
+        <p:nvSpPr>
+          <p:cNvPr id="20" name="TextBox 19"/>
           <p:cNvSpPr txBox="1"/>
           <p:nvPr/>
         </p:nvSpPr>
         <p:spPr>
           <a:xfrm>
-            <a:off x="3538727" y="2880360"/>
-            <a:ext cx="2331720" cy="457200"/>
+            <a:off x="4526280" y="3154680"/>
+            <a:ext cx="3108960" cy="2103120"/>
           </a:xfrm>
           <a:prstGeom prst="rect">
             <a:avLst/>
@@ -10883,42 +10016,7 @@
           </a:bodyPr>
           <a:lstStyle/>
           <a:p>
-            <a:pPr algn="ctr"/>
-            <a:r>
-              <a:rPr sz="1800" b="1">
-                <a:solidFill>
-                  <a:srgbClr val="16304F"/>
-                </a:solidFill>
-                <a:latin typeface="Microsoft JhengHei"/>
-              </a:rPr>
-              <a:t>引文對不上卷證</a:t>
-            </a:r>
-          </a:p>
-        </p:txBody>
-      </p:sp>
-      <p:sp>
-        <p:nvSpPr>
-          <p:cNvPr id="16" name="TextBox 15"/>
-          <p:cNvSpPr txBox="1"/>
-          <p:nvPr/>
-        </p:nvSpPr>
-        <p:spPr>
-          <a:xfrm>
-            <a:off x="3584448" y="3383280"/>
-            <a:ext cx="2240280" cy="1828800"/>
-          </a:xfrm>
-          <a:prstGeom prst="rect">
-            <a:avLst/>
-          </a:prstGeom>
-          <a:noFill/>
-        </p:spPr>
-        <p:txBody>
-          <a:bodyPr wrap="square" anchor="t" lIns="45720" rIns="45720" tIns="27432" bIns="27432">
-            <a:spAutoFit/>
-          </a:bodyPr>
-          <a:lstStyle/>
-          <a:p>
-            <a:pPr algn="ctr"/>
+            <a:pPr algn="l"/>
             <a:r>
               <a:rPr sz="1350" b="0">
                 <a:solidFill>
@@ -10926,21 +10024,21 @@
                 </a:solidFill>
                 <a:latin typeface="Microsoft JhengHei"/>
               </a:rPr>
-              <a:t>每句引文回查原文；查不到就標示為未驗證</a:t>
-            </a:r>
-          </a:p>
-        </p:txBody>
-      </p:sp>
-      <p:sp>
-        <p:nvSpPr>
-          <p:cNvPr id="17" name="Rounded Rectangle 16"/>
+              <a:t>影片 00:14 拋擲、00:19 煙蒂還在；訴願書寫的收受日和送達證書差 2 天，要以證書為準。</a:t>
+            </a:r>
+          </a:p>
+        </p:txBody>
+      </p:sp>
+      <p:sp>
+        <p:nvSpPr>
+          <p:cNvPr id="21" name="Rounded Rectangle 20"/>
           <p:cNvSpPr/>
           <p:nvPr/>
         </p:nvSpPr>
         <p:spPr>
           <a:xfrm>
-            <a:off x="6163056" y="1554480"/>
-            <a:ext cx="2606040" cy="3840480"/>
+            <a:off x="8010144" y="1554480"/>
+            <a:ext cx="3520440" cy="3840480"/>
           </a:xfrm>
           <a:prstGeom prst="roundRect">
             <a:avLst>
@@ -10948,10 +10046,12 @@
             </a:avLst>
           </a:prstGeom>
           <a:solidFill>
-            <a:srgbClr val="F4F6F9"/>
+            <a:srgbClr val="FFFFFF"/>
           </a:solidFill>
-          <a:ln>
-            <a:noFill/>
+          <a:ln w="19050">
+            <a:solidFill>
+              <a:srgbClr val="DDE3EA"/>
+            </a:solidFill>
           </a:ln>
           <a:effectLst/>
         </p:spPr>
@@ -10979,17 +10079,89 @@
       </p:sp>
       <p:sp>
         <p:nvSpPr>
-          <p:cNvPr id="18" name="Oval 17"/>
+          <p:cNvPr id="22" name="TextBox 21"/>
+          <p:cNvSpPr txBox="1"/>
+          <p:nvPr/>
+        </p:nvSpPr>
+        <p:spPr>
+          <a:xfrm>
+            <a:off x="8211312" y="1691640"/>
+            <a:ext cx="3108960" cy="320040"/>
+          </a:xfrm>
+          <a:prstGeom prst="rect">
+            <a:avLst/>
+          </a:prstGeom>
+          <a:noFill/>
+        </p:spPr>
+        <p:txBody>
+          <a:bodyPr wrap="square" anchor="t" lIns="45720" rIns="45720" tIns="27432" bIns="27432">
+            <a:spAutoFit/>
+          </a:bodyPr>
+          <a:lstStyle/>
+          <a:p>
+            <a:pPr algn="l"/>
+            <a:r>
+              <a:rPr sz="1050" b="1">
+                <a:solidFill>
+                  <a:srgbClr val="D98E04"/>
+                </a:solidFill>
+                <a:latin typeface="Microsoft JhengHei"/>
+              </a:rPr>
+              <a:t>CASE 03 ／ 建築法</a:t>
+            </a:r>
+          </a:p>
+        </p:txBody>
+      </p:sp>
+      <p:sp>
+        <p:nvSpPr>
+          <p:cNvPr id="23" name="TextBox 22"/>
+          <p:cNvSpPr txBox="1"/>
+          <p:nvPr/>
+        </p:nvSpPr>
+        <p:spPr>
+          <a:xfrm>
+            <a:off x="8211312" y="2011680"/>
+            <a:ext cx="3108960" cy="502920"/>
+          </a:xfrm>
+          <a:prstGeom prst="rect">
+            <a:avLst/>
+          </a:prstGeom>
+          <a:noFill/>
+        </p:spPr>
+        <p:txBody>
+          <a:bodyPr wrap="square" anchor="t" lIns="45720" rIns="45720" tIns="27432" bIns="27432">
+            <a:spAutoFit/>
+          </a:bodyPr>
+          <a:lstStyle/>
+          <a:p>
+            <a:pPr algn="l"/>
+            <a:r>
+              <a:rPr sz="2000" b="1">
+                <a:solidFill>
+                  <a:srgbClr val="16304F"/>
+                </a:solidFill>
+                <a:latin typeface="Microsoft JhengHei"/>
+              </a:rPr>
+              <a:t>政府遲了 26 天才罰</a:t>
+            </a:r>
+          </a:p>
+        </p:txBody>
+      </p:sp>
+      <p:sp>
+        <p:nvSpPr>
+          <p:cNvPr id="24" name="Rounded Rectangle 23"/>
           <p:cNvSpPr/>
           <p:nvPr/>
         </p:nvSpPr>
         <p:spPr>
           <a:xfrm>
-            <a:off x="7031736" y="1828800"/>
-            <a:ext cx="868680" cy="868680"/>
-          </a:xfrm>
-          <a:prstGeom prst="ellipse">
-            <a:avLst/>
+            <a:off x="8211312" y="2606040"/>
+            <a:ext cx="1188720" cy="411480"/>
+          </a:xfrm>
+          <a:prstGeom prst="roundRect">
+            <a:avLst>
+              <a:gd name="adj" fmla="val 8000"/>
+            </a:avLst>
           </a:prstGeom>
           <a:solidFill>
             <a:srgbClr val="16304F"/>
@@ -11014,32 +10186,58 @@
           </a:fontRef>
         </p:style>
         <p:txBody>
-          <a:bodyPr rtlCol="0" anchor="ctr" lIns="0" rIns="0" tIns="0" bIns="0"/>
+          <a:bodyPr rtlCol="0" anchor="ctr"/>
           <a:lstStyle/>
           <a:p>
             <a:pPr algn="ctr"/>
-            <a:r>
-              <a:rPr sz="2600" b="1">
+          </a:p>
+        </p:txBody>
+      </p:sp>
+      <p:sp>
+        <p:nvSpPr>
+          <p:cNvPr id="25" name="TextBox 24"/>
+          <p:cNvSpPr txBox="1"/>
+          <p:nvPr/>
+        </p:nvSpPr>
+        <p:spPr>
+          <a:xfrm>
+            <a:off x="8211312" y="2606040"/>
+            <a:ext cx="1188720" cy="411480"/>
+          </a:xfrm>
+          <a:prstGeom prst="rect">
+            <a:avLst/>
+          </a:prstGeom>
+          <a:noFill/>
+        </p:spPr>
+        <p:txBody>
+          <a:bodyPr wrap="square" anchor="ctr" lIns="45720" rIns="45720" tIns="27432" bIns="27432">
+            <a:spAutoFit/>
+          </a:bodyPr>
+          <a:lstStyle/>
+          <a:p>
+            <a:pPr algn="ctr"/>
+            <a:r>
+              <a:rPr sz="1500" b="1">
                 <a:solidFill>
                   <a:srgbClr val="FFFFFF"/>
                 </a:solidFill>
                 <a:latin typeface="Microsoft JhengHei"/>
               </a:rPr>
-              <a:t>3</a:t>
-            </a:r>
-          </a:p>
-        </p:txBody>
-      </p:sp>
-      <p:sp>
-        <p:nvSpPr>
-          <p:cNvPr id="19" name="TextBox 18"/>
+              <a:t>撤銷</a:t>
+            </a:r>
+          </a:p>
+        </p:txBody>
+      </p:sp>
+      <p:sp>
+        <p:nvSpPr>
+          <p:cNvPr id="26" name="TextBox 25"/>
           <p:cNvSpPr txBox="1"/>
           <p:nvPr/>
         </p:nvSpPr>
         <p:spPr>
           <a:xfrm>
-            <a:off x="6300216" y="2880360"/>
-            <a:ext cx="2331720" cy="457200"/>
+            <a:off x="8211312" y="3154680"/>
+            <a:ext cx="3108960" cy="2103120"/>
           </a:xfrm>
           <a:prstGeom prst="rect">
             <a:avLst/>
@@ -11052,42 +10250,7 @@
           </a:bodyPr>
           <a:lstStyle/>
           <a:p>
-            <a:pPr algn="ctr"/>
-            <a:r>
-              <a:rPr sz="1800" b="1">
-                <a:solidFill>
-                  <a:srgbClr val="16304F"/>
-                </a:solidFill>
-                <a:latin typeface="Microsoft JhengHei"/>
-              </a:rPr>
-              <a:t>引到過期法規</a:t>
-            </a:r>
-          </a:p>
-        </p:txBody>
-      </p:sp>
-      <p:sp>
-        <p:nvSpPr>
-          <p:cNvPr id="20" name="TextBox 19"/>
-          <p:cNvSpPr txBox="1"/>
-          <p:nvPr/>
-        </p:nvSpPr>
-        <p:spPr>
-          <a:xfrm>
-            <a:off x="6345936" y="3383280"/>
-            <a:ext cx="2240280" cy="1828800"/>
-          </a:xfrm>
-          <a:prstGeom prst="rect">
-            <a:avLst/>
-          </a:prstGeom>
-          <a:noFill/>
-        </p:spPr>
-        <p:txBody>
-          <a:bodyPr wrap="square" anchor="t" lIns="45720" rIns="45720" tIns="27432" bIns="27432">
-            <a:spAutoFit/>
-          </a:bodyPr>
-          <a:lstStyle/>
-          <a:p>
-            <a:pPr algn="ctr"/>
+            <a:pPr algn="l"/>
             <a:r>
               <a:rPr sz="1350" b="0">
                 <a:solidFill>
@@ -11095,29 +10258,27 @@
                 </a:solidFill>
                 <a:latin typeface="Microsoft JhengHei"/>
               </a:rPr>
-              <a:t>行為時／裁處時／決定時三個時點比對，修正過就提示</a:t>
-            </a:r>
-          </a:p>
-        </p:txBody>
-      </p:sp>
-      <p:sp>
-        <p:nvSpPr>
-          <p:cNvPr id="21" name="Rounded Rectangle 20"/>
+              <a:t>簽證不實證據很強，但三年裁處權時效已過；答辯書迴避不答，系統必須自行從卷內算出時效。</a:t>
+            </a:r>
+          </a:p>
+        </p:txBody>
+      </p:sp>
+      <p:sp>
+        <p:nvSpPr>
+          <p:cNvPr id="27" name="Rectangle 26"/>
           <p:cNvSpPr/>
           <p:nvPr/>
         </p:nvSpPr>
         <p:spPr>
           <a:xfrm>
-            <a:off x="8924544" y="1554480"/>
-            <a:ext cx="2606040" cy="3840480"/>
-          </a:xfrm>
-          <a:prstGeom prst="roundRect">
-            <a:avLst>
-              <a:gd name="adj" fmla="val 8000"/>
-            </a:avLst>
+            <a:off x="640080" y="5623560"/>
+            <a:ext cx="10908792" cy="566928"/>
+          </a:xfrm>
+          <a:prstGeom prst="rect">
+            <a:avLst/>
           </a:prstGeom>
           <a:solidFill>
-            <a:srgbClr val="F4F6F9"/>
+            <a:srgbClr val="FFF8EA"/>
           </a:solidFill>
           <a:ln>
             <a:noFill/>
@@ -11148,20 +10309,20 @@
       </p:sp>
       <p:sp>
         <p:nvSpPr>
-          <p:cNvPr id="22" name="Oval 21"/>
+          <p:cNvPr id="28" name="Rectangle 27"/>
           <p:cNvSpPr/>
           <p:nvPr/>
         </p:nvSpPr>
         <p:spPr>
           <a:xfrm>
-            <a:off x="9793224" y="1828800"/>
-            <a:ext cx="868680" cy="868680"/>
-          </a:xfrm>
-          <a:prstGeom prst="ellipse">
+            <a:off x="640080" y="5623560"/>
+            <a:ext cx="64008" cy="566928"/>
+          </a:xfrm>
+          <a:prstGeom prst="rect">
             <a:avLst/>
           </a:prstGeom>
           <a:solidFill>
-            <a:srgbClr val="16304F"/>
+            <a:srgbClr val="D98E04"/>
           </a:solidFill>
           <a:ln>
             <a:noFill/>
@@ -11183,32 +10344,23 @@
           </a:fontRef>
         </p:style>
         <p:txBody>
-          <a:bodyPr rtlCol="0" anchor="ctr" lIns="0" rIns="0" tIns="0" bIns="0"/>
+          <a:bodyPr rtlCol="0" anchor="ctr"/>
           <a:lstStyle/>
           <a:p>
             <a:pPr algn="ctr"/>
-            <a:r>
-              <a:rPr sz="2600" b="1">
-                <a:solidFill>
-                  <a:srgbClr val="FFFFFF"/>
-                </a:solidFill>
-                <a:latin typeface="Microsoft JhengHei"/>
-              </a:rPr>
-              <a:t>4</a:t>
-            </a:r>
-          </a:p>
-        </p:txBody>
-      </p:sp>
-      <p:sp>
-        <p:nvSpPr>
-          <p:cNvPr id="23" name="TextBox 22"/>
+          </a:p>
+        </p:txBody>
+      </p:sp>
+      <p:sp>
+        <p:nvSpPr>
+          <p:cNvPr id="29" name="TextBox 28"/>
           <p:cNvSpPr txBox="1"/>
           <p:nvPr/>
         </p:nvSpPr>
         <p:spPr>
           <a:xfrm>
-            <a:off x="9061704" y="2880360"/>
-            <a:ext cx="2331720" cy="457200"/>
+            <a:off x="822960" y="5641848"/>
+            <a:ext cx="10607040" cy="548640"/>
           </a:xfrm>
           <a:prstGeom prst="rect">
             <a:avLst/>
@@ -11216,47 +10368,12 @@
           <a:noFill/>
         </p:spPr>
         <p:txBody>
-          <a:bodyPr wrap="square" anchor="t" lIns="45720" rIns="45720" tIns="27432" bIns="27432">
+          <a:bodyPr wrap="square" anchor="ctr" lIns="45720" rIns="45720" tIns="27432" bIns="27432">
             <a:spAutoFit/>
           </a:bodyPr>
           <a:lstStyle/>
           <a:p>
-            <a:pPr algn="ctr"/>
-            <a:r>
-              <a:rPr sz="1800" b="1">
-                <a:solidFill>
-                  <a:srgbClr val="16304F"/>
-                </a:solidFill>
-                <a:latin typeface="Microsoft JhengHei"/>
-              </a:rPr>
-              <a:t>誤判程序結論</a:t>
-            </a:r>
-          </a:p>
-        </p:txBody>
-      </p:sp>
-      <p:sp>
-        <p:nvSpPr>
-          <p:cNvPr id="24" name="TextBox 23"/>
-          <p:cNvSpPr txBox="1"/>
-          <p:nvPr/>
-        </p:nvSpPr>
-        <p:spPr>
-          <a:xfrm>
-            <a:off x="9107424" y="3383280"/>
-            <a:ext cx="2240280" cy="1828800"/>
-          </a:xfrm>
-          <a:prstGeom prst="rect">
-            <a:avLst/>
-          </a:prstGeom>
-          <a:noFill/>
-        </p:spPr>
-        <p:txBody>
-          <a:bodyPr wrap="square" anchor="t" lIns="45720" rIns="45720" tIns="27432" bIns="27432">
-            <a:spAutoFit/>
-          </a:bodyPr>
-          <a:lstStyle/>
-          <a:p>
-            <a:pPr algn="ctr"/>
+            <a:pPr algn="l"/>
             <a:r>
               <a:rPr sz="1350" b="0">
                 <a:solidFill>
@@ -11264,7 +10381,7 @@
                 </a:solidFill>
                 <a:latin typeface="Microsoft JhengHei"/>
               </a:rPr>
-              <a:t>不受理／駁回／撤銷由程式決定，AI 只寫理由</a:t>
+              <a:t>每案 30 頁真實格式卷宗（掃描、手寫、系統截圖、影片）；對應決定書從知識庫排除，系統不能「認出答案」。</a:t>
             </a:r>
           </a:p>
         </p:txBody>
@@ -11405,7 +10522,7 @@
                 </a:solidFill>
                 <a:latin typeface="Microsoft JhengHei"/>
               </a:rPr>
-              <a:t>07 ／ 資料應用</a:t>
+              <a:t>07 ／ 完成度與評分</a:t>
             </a:r>
           </a:p>
         </p:txBody>
@@ -11440,7 +10557,7 @@
                 </a:solidFill>
                 <a:latin typeface="Microsoft JhengHei"/>
               </a:rPr>
-              <a:t>先把 101 份決定書讀完，才決定系統怎麼設計</a:t>
+              <a:t>今天做到哪裡</a:t>
             </a:r>
           </a:p>
         </p:txBody>
@@ -11554,31 +10671,27 @@
                 </a:solidFill>
                 <a:latin typeface="Microsoft JhengHei"/>
               </a:rPr>
-              <a:t>8 / 11</a:t>
-            </a:r>
-          </a:p>
-        </p:txBody>
-      </p:sp>
-      <p:sp>
-        <p:nvSpPr>
-          <p:cNvPr id="9" name="Block Arc 8"/>
+              <a:t>8 / 9</a:t>
+            </a:r>
+          </a:p>
+        </p:txBody>
+      </p:sp>
+      <p:sp>
+        <p:nvSpPr>
+          <p:cNvPr id="9" name="Oval 8"/>
           <p:cNvSpPr/>
           <p:nvPr/>
         </p:nvSpPr>
         <p:spPr>
           <a:xfrm>
-            <a:off x="822960" y="1600200"/>
-            <a:ext cx="3566160" cy="3566160"/>
-          </a:xfrm>
-          <a:prstGeom prst="blockArc">
-            <a:avLst>
-              <a:gd name="adj1" fmla="val -9000000"/>
-              <a:gd name="adj2" fmla="val 15840000"/>
-              <a:gd name="adj3" fmla="val 20000"/>
-            </a:avLst>
+            <a:off x="640080" y="1691639"/>
+            <a:ext cx="228600" cy="228600"/>
+          </a:xfrm>
+          <a:prstGeom prst="ellipse">
+            <a:avLst/>
           </a:prstGeom>
           <a:solidFill>
-            <a:srgbClr val="16304F"/>
+            <a:srgbClr val="2E7D32"/>
           </a:solidFill>
           <a:ln>
             <a:noFill/>
@@ -11600,6 +10713,94 @@
           </a:fontRef>
         </p:style>
         <p:txBody>
+          <a:bodyPr rtlCol="0" anchor="ctr" lIns="0" rIns="0" tIns="0" bIns="0"/>
+          <a:lstStyle/>
+          <a:p>
+            <a:pPr algn="ctr"/>
+            <a:r>
+              <a:rPr sz="1300" b="1">
+                <a:solidFill>
+                  <a:srgbClr val="FFFFFF"/>
+                </a:solidFill>
+                <a:latin typeface="Microsoft JhengHei"/>
+              </a:rPr>
+              <a:t/>
+            </a:r>
+          </a:p>
+        </p:txBody>
+      </p:sp>
+      <p:sp>
+        <p:nvSpPr>
+          <p:cNvPr id="10" name="TextBox 9"/>
+          <p:cNvSpPr txBox="1"/>
+          <p:nvPr/>
+        </p:nvSpPr>
+        <p:spPr>
+          <a:xfrm>
+            <a:off x="1005840" y="1554480"/>
+            <a:ext cx="4389120" cy="502920"/>
+          </a:xfrm>
+          <a:prstGeom prst="rect">
+            <a:avLst/>
+          </a:prstGeom>
+          <a:noFill/>
+        </p:spPr>
+        <p:txBody>
+          <a:bodyPr wrap="square" anchor="ctr" lIns="45720" rIns="45720" tIns="27432" bIns="27432">
+            <a:spAutoFit/>
+          </a:bodyPr>
+          <a:lstStyle/>
+          <a:p>
+            <a:pPr algn="l"/>
+            <a:r>
+              <a:rPr sz="1500" b="0">
+                <a:solidFill>
+                  <a:srgbClr val="16304F"/>
+                </a:solidFill>
+                <a:latin typeface="Microsoft JhengHei"/>
+              </a:rPr>
+              <a:t>卷證分類</a:t>
+            </a:r>
+          </a:p>
+        </p:txBody>
+      </p:sp>
+      <p:sp>
+        <p:nvSpPr>
+          <p:cNvPr id="11" name="Rectangle 10"/>
+          <p:cNvSpPr/>
+          <p:nvPr/>
+        </p:nvSpPr>
+        <p:spPr>
+          <a:xfrm>
+            <a:off x="640080" y="2029967"/>
+            <a:ext cx="4754880" cy="9144"/>
+          </a:xfrm>
+          <a:prstGeom prst="rect">
+            <a:avLst/>
+          </a:prstGeom>
+          <a:solidFill>
+            <a:srgbClr val="E6EAF0"/>
+          </a:solidFill>
+          <a:ln>
+            <a:noFill/>
+          </a:ln>
+          <a:effectLst/>
+        </p:spPr>
+        <p:style>
+          <a:lnRef idx="1">
+            <a:schemeClr val="accent1"/>
+          </a:lnRef>
+          <a:fillRef idx="3">
+            <a:schemeClr val="accent1"/>
+          </a:fillRef>
+          <a:effectRef idx="2">
+            <a:schemeClr val="accent1"/>
+          </a:effectRef>
+          <a:fontRef idx="minor">
+            <a:schemeClr val="lt1"/>
+          </a:fontRef>
+        </p:style>
+        <p:txBody>
           <a:bodyPr rtlCol="0" anchor="ctr"/>
           <a:lstStyle/>
           <a:p>
@@ -11609,21 +10810,677 @@
       </p:sp>
       <p:sp>
         <p:nvSpPr>
-          <p:cNvPr id="10" name="Block Arc 9"/>
+          <p:cNvPr id="12" name="Oval 11"/>
           <p:cNvSpPr/>
           <p:nvPr/>
         </p:nvSpPr>
         <p:spPr>
           <a:xfrm>
-            <a:off x="822960" y="1600200"/>
-            <a:ext cx="3566160" cy="3566160"/>
-          </a:xfrm>
-          <a:prstGeom prst="blockArc">
-            <a:avLst>
-              <a:gd name="adj1" fmla="val 15840000"/>
-              <a:gd name="adj2" fmla="val 21240000"/>
-              <a:gd name="adj3" fmla="val 20000"/>
-            </a:avLst>
+            <a:off x="640080" y="2194560"/>
+            <a:ext cx="228600" cy="228600"/>
+          </a:xfrm>
+          <a:prstGeom prst="ellipse">
+            <a:avLst/>
+          </a:prstGeom>
+          <a:solidFill>
+            <a:srgbClr val="2E7D32"/>
+          </a:solidFill>
+          <a:ln>
+            <a:noFill/>
+          </a:ln>
+          <a:effectLst/>
+        </p:spPr>
+        <p:style>
+          <a:lnRef idx="1">
+            <a:schemeClr val="accent1"/>
+          </a:lnRef>
+          <a:fillRef idx="3">
+            <a:schemeClr val="accent1"/>
+          </a:fillRef>
+          <a:effectRef idx="2">
+            <a:schemeClr val="accent1"/>
+          </a:effectRef>
+          <a:fontRef idx="minor">
+            <a:schemeClr val="lt1"/>
+          </a:fontRef>
+        </p:style>
+        <p:txBody>
+          <a:bodyPr rtlCol="0" anchor="ctr" lIns="0" rIns="0" tIns="0" bIns="0"/>
+          <a:lstStyle/>
+          <a:p>
+            <a:pPr algn="ctr"/>
+            <a:r>
+              <a:rPr sz="1300" b="1">
+                <a:solidFill>
+                  <a:srgbClr val="FFFFFF"/>
+                </a:solidFill>
+                <a:latin typeface="Microsoft JhengHei"/>
+              </a:rPr>
+              <a:t/>
+            </a:r>
+          </a:p>
+        </p:txBody>
+      </p:sp>
+      <p:sp>
+        <p:nvSpPr>
+          <p:cNvPr id="13" name="TextBox 12"/>
+          <p:cNvSpPr txBox="1"/>
+          <p:nvPr/>
+        </p:nvSpPr>
+        <p:spPr>
+          <a:xfrm>
+            <a:off x="1005840" y="2057400"/>
+            <a:ext cx="4389120" cy="502920"/>
+          </a:xfrm>
+          <a:prstGeom prst="rect">
+            <a:avLst/>
+          </a:prstGeom>
+          <a:noFill/>
+        </p:spPr>
+        <p:txBody>
+          <a:bodyPr wrap="square" anchor="ctr" lIns="45720" rIns="45720" tIns="27432" bIns="27432">
+            <a:spAutoFit/>
+          </a:bodyPr>
+          <a:lstStyle/>
+          <a:p>
+            <a:pPr algn="l"/>
+            <a:r>
+              <a:rPr sz="1500" b="0">
+                <a:solidFill>
+                  <a:srgbClr val="16304F"/>
+                </a:solidFill>
+                <a:latin typeface="Microsoft JhengHei"/>
+              </a:rPr>
+              <a:t>五項分析</a:t>
+            </a:r>
+          </a:p>
+        </p:txBody>
+      </p:sp>
+      <p:sp>
+        <p:nvSpPr>
+          <p:cNvPr id="14" name="Rectangle 13"/>
+          <p:cNvSpPr/>
+          <p:nvPr/>
+        </p:nvSpPr>
+        <p:spPr>
+          <a:xfrm>
+            <a:off x="640080" y="2532888"/>
+            <a:ext cx="4754880" cy="9144"/>
+          </a:xfrm>
+          <a:prstGeom prst="rect">
+            <a:avLst/>
+          </a:prstGeom>
+          <a:solidFill>
+            <a:srgbClr val="E6EAF0"/>
+          </a:solidFill>
+          <a:ln>
+            <a:noFill/>
+          </a:ln>
+          <a:effectLst/>
+        </p:spPr>
+        <p:style>
+          <a:lnRef idx="1">
+            <a:schemeClr val="accent1"/>
+          </a:lnRef>
+          <a:fillRef idx="3">
+            <a:schemeClr val="accent1"/>
+          </a:fillRef>
+          <a:effectRef idx="2">
+            <a:schemeClr val="accent1"/>
+          </a:effectRef>
+          <a:fontRef idx="minor">
+            <a:schemeClr val="lt1"/>
+          </a:fontRef>
+        </p:style>
+        <p:txBody>
+          <a:bodyPr rtlCol="0" anchor="ctr"/>
+          <a:lstStyle/>
+          <a:p>
+            <a:pPr algn="ctr"/>
+          </a:p>
+        </p:txBody>
+      </p:sp>
+      <p:sp>
+        <p:nvSpPr>
+          <p:cNvPr id="15" name="Oval 14"/>
+          <p:cNvSpPr/>
+          <p:nvPr/>
+        </p:nvSpPr>
+        <p:spPr>
+          <a:xfrm>
+            <a:off x="640080" y="2697479"/>
+            <a:ext cx="228600" cy="228600"/>
+          </a:xfrm>
+          <a:prstGeom prst="ellipse">
+            <a:avLst/>
+          </a:prstGeom>
+          <a:solidFill>
+            <a:srgbClr val="2E7D32"/>
+          </a:solidFill>
+          <a:ln>
+            <a:noFill/>
+          </a:ln>
+          <a:effectLst/>
+        </p:spPr>
+        <p:style>
+          <a:lnRef idx="1">
+            <a:schemeClr val="accent1"/>
+          </a:lnRef>
+          <a:fillRef idx="3">
+            <a:schemeClr val="accent1"/>
+          </a:fillRef>
+          <a:effectRef idx="2">
+            <a:schemeClr val="accent1"/>
+          </a:effectRef>
+          <a:fontRef idx="minor">
+            <a:schemeClr val="lt1"/>
+          </a:fontRef>
+        </p:style>
+        <p:txBody>
+          <a:bodyPr rtlCol="0" anchor="ctr" lIns="0" rIns="0" tIns="0" bIns="0"/>
+          <a:lstStyle/>
+          <a:p>
+            <a:pPr algn="ctr"/>
+            <a:r>
+              <a:rPr sz="1300" b="1">
+                <a:solidFill>
+                  <a:srgbClr val="FFFFFF"/>
+                </a:solidFill>
+                <a:latin typeface="Microsoft JhengHei"/>
+              </a:rPr>
+              <a:t/>
+            </a:r>
+          </a:p>
+        </p:txBody>
+      </p:sp>
+      <p:sp>
+        <p:nvSpPr>
+          <p:cNvPr id="16" name="TextBox 15"/>
+          <p:cNvSpPr txBox="1"/>
+          <p:nvPr/>
+        </p:nvSpPr>
+        <p:spPr>
+          <a:xfrm>
+            <a:off x="1005840" y="2560320"/>
+            <a:ext cx="4389120" cy="502920"/>
+          </a:xfrm>
+          <a:prstGeom prst="rect">
+            <a:avLst/>
+          </a:prstGeom>
+          <a:noFill/>
+        </p:spPr>
+        <p:txBody>
+          <a:bodyPr wrap="square" anchor="ctr" lIns="45720" rIns="45720" tIns="27432" bIns="27432">
+            <a:spAutoFit/>
+          </a:bodyPr>
+          <a:lstStyle/>
+          <a:p>
+            <a:pPr algn="l"/>
+            <a:r>
+              <a:rPr sz="1500" b="0">
+                <a:solidFill>
+                  <a:srgbClr val="16304F"/>
+                </a:solidFill>
+                <a:latin typeface="Microsoft JhengHei"/>
+              </a:rPr>
+              <a:t>修正 → 確認 → 局部重算</a:t>
+            </a:r>
+          </a:p>
+        </p:txBody>
+      </p:sp>
+      <p:sp>
+        <p:nvSpPr>
+          <p:cNvPr id="17" name="Rectangle 16"/>
+          <p:cNvSpPr/>
+          <p:nvPr/>
+        </p:nvSpPr>
+        <p:spPr>
+          <a:xfrm>
+            <a:off x="640080" y="3035808"/>
+            <a:ext cx="4754880" cy="9144"/>
+          </a:xfrm>
+          <a:prstGeom prst="rect">
+            <a:avLst/>
+          </a:prstGeom>
+          <a:solidFill>
+            <a:srgbClr val="E6EAF0"/>
+          </a:solidFill>
+          <a:ln>
+            <a:noFill/>
+          </a:ln>
+          <a:effectLst/>
+        </p:spPr>
+        <p:style>
+          <a:lnRef idx="1">
+            <a:schemeClr val="accent1"/>
+          </a:lnRef>
+          <a:fillRef idx="3">
+            <a:schemeClr val="accent1"/>
+          </a:fillRef>
+          <a:effectRef idx="2">
+            <a:schemeClr val="accent1"/>
+          </a:effectRef>
+          <a:fontRef idx="minor">
+            <a:schemeClr val="lt1"/>
+          </a:fontRef>
+        </p:style>
+        <p:txBody>
+          <a:bodyPr rtlCol="0" anchor="ctr"/>
+          <a:lstStyle/>
+          <a:p>
+            <a:pPr algn="ctr"/>
+          </a:p>
+        </p:txBody>
+      </p:sp>
+      <p:sp>
+        <p:nvSpPr>
+          <p:cNvPr id="18" name="Oval 17"/>
+          <p:cNvSpPr/>
+          <p:nvPr/>
+        </p:nvSpPr>
+        <p:spPr>
+          <a:xfrm>
+            <a:off x="640080" y="3200400"/>
+            <a:ext cx="228600" cy="228600"/>
+          </a:xfrm>
+          <a:prstGeom prst="ellipse">
+            <a:avLst/>
+          </a:prstGeom>
+          <a:solidFill>
+            <a:srgbClr val="2E7D32"/>
+          </a:solidFill>
+          <a:ln>
+            <a:noFill/>
+          </a:ln>
+          <a:effectLst/>
+        </p:spPr>
+        <p:style>
+          <a:lnRef idx="1">
+            <a:schemeClr val="accent1"/>
+          </a:lnRef>
+          <a:fillRef idx="3">
+            <a:schemeClr val="accent1"/>
+          </a:fillRef>
+          <a:effectRef idx="2">
+            <a:schemeClr val="accent1"/>
+          </a:effectRef>
+          <a:fontRef idx="minor">
+            <a:schemeClr val="lt1"/>
+          </a:fontRef>
+        </p:style>
+        <p:txBody>
+          <a:bodyPr rtlCol="0" anchor="ctr" lIns="0" rIns="0" tIns="0" bIns="0"/>
+          <a:lstStyle/>
+          <a:p>
+            <a:pPr algn="ctr"/>
+            <a:r>
+              <a:rPr sz="1300" b="1">
+                <a:solidFill>
+                  <a:srgbClr val="FFFFFF"/>
+                </a:solidFill>
+                <a:latin typeface="Microsoft JhengHei"/>
+              </a:rPr>
+              <a:t/>
+            </a:r>
+          </a:p>
+        </p:txBody>
+      </p:sp>
+      <p:sp>
+        <p:nvSpPr>
+          <p:cNvPr id="19" name="TextBox 18"/>
+          <p:cNvSpPr txBox="1"/>
+          <p:nvPr/>
+        </p:nvSpPr>
+        <p:spPr>
+          <a:xfrm>
+            <a:off x="1005840" y="3063240"/>
+            <a:ext cx="4389120" cy="502920"/>
+          </a:xfrm>
+          <a:prstGeom prst="rect">
+            <a:avLst/>
+          </a:prstGeom>
+          <a:noFill/>
+        </p:spPr>
+        <p:txBody>
+          <a:bodyPr wrap="square" anchor="ctr" lIns="45720" rIns="45720" tIns="27432" bIns="27432">
+            <a:spAutoFit/>
+          </a:bodyPr>
+          <a:lstStyle/>
+          <a:p>
+            <a:pPr algn="l"/>
+            <a:r>
+              <a:rPr sz="1500" b="0">
+                <a:solidFill>
+                  <a:srgbClr val="16304F"/>
+                </a:solidFill>
+                <a:latin typeface="Microsoft JhengHei"/>
+              </a:rPr>
+              <a:t>法規庫同步</a:t>
+            </a:r>
+          </a:p>
+        </p:txBody>
+      </p:sp>
+      <p:sp>
+        <p:nvSpPr>
+          <p:cNvPr id="20" name="Rectangle 19"/>
+          <p:cNvSpPr/>
+          <p:nvPr/>
+        </p:nvSpPr>
+        <p:spPr>
+          <a:xfrm>
+            <a:off x="640080" y="3538728"/>
+            <a:ext cx="4754880" cy="9144"/>
+          </a:xfrm>
+          <a:prstGeom prst="rect">
+            <a:avLst/>
+          </a:prstGeom>
+          <a:solidFill>
+            <a:srgbClr val="E6EAF0"/>
+          </a:solidFill>
+          <a:ln>
+            <a:noFill/>
+          </a:ln>
+          <a:effectLst/>
+        </p:spPr>
+        <p:style>
+          <a:lnRef idx="1">
+            <a:schemeClr val="accent1"/>
+          </a:lnRef>
+          <a:fillRef idx="3">
+            <a:schemeClr val="accent1"/>
+          </a:fillRef>
+          <a:effectRef idx="2">
+            <a:schemeClr val="accent1"/>
+          </a:effectRef>
+          <a:fontRef idx="minor">
+            <a:schemeClr val="lt1"/>
+          </a:fontRef>
+        </p:style>
+        <p:txBody>
+          <a:bodyPr rtlCol="0" anchor="ctr"/>
+          <a:lstStyle/>
+          <a:p>
+            <a:pPr algn="ctr"/>
+          </a:p>
+        </p:txBody>
+      </p:sp>
+      <p:sp>
+        <p:nvSpPr>
+          <p:cNvPr id="21" name="Oval 20"/>
+          <p:cNvSpPr/>
+          <p:nvPr/>
+        </p:nvSpPr>
+        <p:spPr>
+          <a:xfrm>
+            <a:off x="640080" y="3703320"/>
+            <a:ext cx="228600" cy="228600"/>
+          </a:xfrm>
+          <a:prstGeom prst="ellipse">
+            <a:avLst/>
+          </a:prstGeom>
+          <a:solidFill>
+            <a:srgbClr val="2E7D32"/>
+          </a:solidFill>
+          <a:ln>
+            <a:noFill/>
+          </a:ln>
+          <a:effectLst/>
+        </p:spPr>
+        <p:style>
+          <a:lnRef idx="1">
+            <a:schemeClr val="accent1"/>
+          </a:lnRef>
+          <a:fillRef idx="3">
+            <a:schemeClr val="accent1"/>
+          </a:fillRef>
+          <a:effectRef idx="2">
+            <a:schemeClr val="accent1"/>
+          </a:effectRef>
+          <a:fontRef idx="minor">
+            <a:schemeClr val="lt1"/>
+          </a:fontRef>
+        </p:style>
+        <p:txBody>
+          <a:bodyPr rtlCol="0" anchor="ctr" lIns="0" rIns="0" tIns="0" bIns="0"/>
+          <a:lstStyle/>
+          <a:p>
+            <a:pPr algn="ctr"/>
+            <a:r>
+              <a:rPr sz="1300" b="1">
+                <a:solidFill>
+                  <a:srgbClr val="FFFFFF"/>
+                </a:solidFill>
+                <a:latin typeface="Microsoft JhengHei"/>
+              </a:rPr>
+              <a:t/>
+            </a:r>
+          </a:p>
+        </p:txBody>
+      </p:sp>
+      <p:sp>
+        <p:nvSpPr>
+          <p:cNvPr id="22" name="TextBox 21"/>
+          <p:cNvSpPr txBox="1"/>
+          <p:nvPr/>
+        </p:nvSpPr>
+        <p:spPr>
+          <a:xfrm>
+            <a:off x="1005840" y="3566160"/>
+            <a:ext cx="4389120" cy="502920"/>
+          </a:xfrm>
+          <a:prstGeom prst="rect">
+            <a:avLst/>
+          </a:prstGeom>
+          <a:noFill/>
+        </p:spPr>
+        <p:txBody>
+          <a:bodyPr wrap="square" anchor="ctr" lIns="45720" rIns="45720" tIns="27432" bIns="27432">
+            <a:spAutoFit/>
+          </a:bodyPr>
+          <a:lstStyle/>
+          <a:p>
+            <a:pPr algn="l"/>
+            <a:r>
+              <a:rPr sz="1500" b="0">
+                <a:solidFill>
+                  <a:srgbClr val="16304F"/>
+                </a:solidFill>
+                <a:latin typeface="Microsoft JhengHei"/>
+              </a:rPr>
+              <a:t>畫面全部連到線上系統</a:t>
+            </a:r>
+          </a:p>
+        </p:txBody>
+      </p:sp>
+      <p:sp>
+        <p:nvSpPr>
+          <p:cNvPr id="23" name="Rectangle 22"/>
+          <p:cNvSpPr/>
+          <p:nvPr/>
+        </p:nvSpPr>
+        <p:spPr>
+          <a:xfrm>
+            <a:off x="640080" y="4041648"/>
+            <a:ext cx="4754880" cy="9144"/>
+          </a:xfrm>
+          <a:prstGeom prst="rect">
+            <a:avLst/>
+          </a:prstGeom>
+          <a:solidFill>
+            <a:srgbClr val="E6EAF0"/>
+          </a:solidFill>
+          <a:ln>
+            <a:noFill/>
+          </a:ln>
+          <a:effectLst/>
+        </p:spPr>
+        <p:style>
+          <a:lnRef idx="1">
+            <a:schemeClr val="accent1"/>
+          </a:lnRef>
+          <a:fillRef idx="3">
+            <a:schemeClr val="accent1"/>
+          </a:fillRef>
+          <a:effectRef idx="2">
+            <a:schemeClr val="accent1"/>
+          </a:effectRef>
+          <a:fontRef idx="minor">
+            <a:schemeClr val="lt1"/>
+          </a:fontRef>
+        </p:style>
+        <p:txBody>
+          <a:bodyPr rtlCol="0" anchor="ctr"/>
+          <a:lstStyle/>
+          <a:p>
+            <a:pPr algn="ctr"/>
+          </a:p>
+        </p:txBody>
+      </p:sp>
+      <p:sp>
+        <p:nvSpPr>
+          <p:cNvPr id="24" name="Oval 23"/>
+          <p:cNvSpPr/>
+          <p:nvPr/>
+        </p:nvSpPr>
+        <p:spPr>
+          <a:xfrm>
+            <a:off x="640080" y="4206240"/>
+            <a:ext cx="228600" cy="228600"/>
+          </a:xfrm>
+          <a:prstGeom prst="ellipse">
+            <a:avLst/>
+          </a:prstGeom>
+          <a:solidFill>
+            <a:srgbClr val="2E7D32"/>
+          </a:solidFill>
+          <a:ln>
+            <a:noFill/>
+          </a:ln>
+          <a:effectLst/>
+        </p:spPr>
+        <p:style>
+          <a:lnRef idx="1">
+            <a:schemeClr val="accent1"/>
+          </a:lnRef>
+          <a:fillRef idx="3">
+            <a:schemeClr val="accent1"/>
+          </a:fillRef>
+          <a:effectRef idx="2">
+            <a:schemeClr val="accent1"/>
+          </a:effectRef>
+          <a:fontRef idx="minor">
+            <a:schemeClr val="lt1"/>
+          </a:fontRef>
+        </p:style>
+        <p:txBody>
+          <a:bodyPr rtlCol="0" anchor="ctr" lIns="0" rIns="0" tIns="0" bIns="0"/>
+          <a:lstStyle/>
+          <a:p>
+            <a:pPr algn="ctr"/>
+            <a:r>
+              <a:rPr sz="1300" b="1">
+                <a:solidFill>
+                  <a:srgbClr val="FFFFFF"/>
+                </a:solidFill>
+                <a:latin typeface="Microsoft JhengHei"/>
+              </a:rPr>
+              <a:t/>
+            </a:r>
+          </a:p>
+        </p:txBody>
+      </p:sp>
+      <p:sp>
+        <p:nvSpPr>
+          <p:cNvPr id="25" name="TextBox 24"/>
+          <p:cNvSpPr txBox="1"/>
+          <p:nvPr/>
+        </p:nvSpPr>
+        <p:spPr>
+          <a:xfrm>
+            <a:off x="1005840" y="4069080"/>
+            <a:ext cx="4389120" cy="502920"/>
+          </a:xfrm>
+          <a:prstGeom prst="rect">
+            <a:avLst/>
+          </a:prstGeom>
+          <a:noFill/>
+        </p:spPr>
+        <p:txBody>
+          <a:bodyPr wrap="square" anchor="ctr" lIns="45720" rIns="45720" tIns="27432" bIns="27432">
+            <a:spAutoFit/>
+          </a:bodyPr>
+          <a:lstStyle/>
+          <a:p>
+            <a:pPr algn="l"/>
+            <a:r>
+              <a:rPr sz="1500" b="0">
+                <a:solidFill>
+                  <a:srgbClr val="16304F"/>
+                </a:solidFill>
+                <a:latin typeface="Microsoft JhengHei"/>
+              </a:rPr>
+              <a:t>自動化測試 52 個</a:t>
+            </a:r>
+          </a:p>
+        </p:txBody>
+      </p:sp>
+      <p:sp>
+        <p:nvSpPr>
+          <p:cNvPr id="26" name="Rectangle 25"/>
+          <p:cNvSpPr/>
+          <p:nvPr/>
+        </p:nvSpPr>
+        <p:spPr>
+          <a:xfrm>
+            <a:off x="640080" y="4544568"/>
+            <a:ext cx="4754880" cy="9144"/>
+          </a:xfrm>
+          <a:prstGeom prst="rect">
+            <a:avLst/>
+          </a:prstGeom>
+          <a:solidFill>
+            <a:srgbClr val="E6EAF0"/>
+          </a:solidFill>
+          <a:ln>
+            <a:noFill/>
+          </a:ln>
+          <a:effectLst/>
+        </p:spPr>
+        <p:style>
+          <a:lnRef idx="1">
+            <a:schemeClr val="accent1"/>
+          </a:lnRef>
+          <a:fillRef idx="3">
+            <a:schemeClr val="accent1"/>
+          </a:fillRef>
+          <a:effectRef idx="2">
+            <a:schemeClr val="accent1"/>
+          </a:effectRef>
+          <a:fontRef idx="minor">
+            <a:schemeClr val="lt1"/>
+          </a:fontRef>
+        </p:style>
+        <p:txBody>
+          <a:bodyPr rtlCol="0" anchor="ctr"/>
+          <a:lstStyle/>
+          <a:p>
+            <a:pPr algn="ctr"/>
+          </a:p>
+        </p:txBody>
+      </p:sp>
+      <p:sp>
+        <p:nvSpPr>
+          <p:cNvPr id="27" name="Oval 26"/>
+          <p:cNvSpPr/>
+          <p:nvPr/>
+        </p:nvSpPr>
+        <p:spPr>
+          <a:xfrm>
+            <a:off x="640080" y="4709160"/>
+            <a:ext cx="228600" cy="228600"/>
+          </a:xfrm>
+          <a:prstGeom prst="ellipse">
+            <a:avLst/>
           </a:prstGeom>
           <a:solidFill>
             <a:srgbClr val="D98E04"/>
@@ -11648,33 +11505,73 @@
           </a:fontRef>
         </p:style>
         <p:txBody>
-          <a:bodyPr rtlCol="0" anchor="ctr"/>
+          <a:bodyPr rtlCol="0" anchor="ctr" lIns="0" rIns="0" tIns="0" bIns="0"/>
           <a:lstStyle/>
           <a:p>
             <a:pPr algn="ctr"/>
-          </a:p>
-        </p:txBody>
-      </p:sp>
-      <p:sp>
-        <p:nvSpPr>
-          <p:cNvPr id="11" name="Block Arc 10"/>
+            <a:r>
+              <a:rPr sz="1300" b="1">
+                <a:solidFill>
+                  <a:srgbClr val="FFFFFF"/>
+                </a:solidFill>
+                <a:latin typeface="Microsoft JhengHei"/>
+              </a:rPr>
+              <a:t/>
+            </a:r>
+          </a:p>
+        </p:txBody>
+      </p:sp>
+      <p:sp>
+        <p:nvSpPr>
+          <p:cNvPr id="28" name="TextBox 27"/>
+          <p:cNvSpPr txBox="1"/>
+          <p:nvPr/>
+        </p:nvSpPr>
+        <p:spPr>
+          <a:xfrm>
+            <a:off x="1005840" y="4572000"/>
+            <a:ext cx="4389120" cy="502920"/>
+          </a:xfrm>
+          <a:prstGeom prst="rect">
+            <a:avLst/>
+          </a:prstGeom>
+          <a:noFill/>
+        </p:spPr>
+        <p:txBody>
+          <a:bodyPr wrap="square" anchor="ctr" lIns="45720" rIns="45720" tIns="27432" bIns="27432">
+            <a:spAutoFit/>
+          </a:bodyPr>
+          <a:lstStyle/>
+          <a:p>
+            <a:pPr algn="l"/>
+            <a:r>
+              <a:rPr sz="1500" b="0">
+                <a:solidFill>
+                  <a:srgbClr val="16304F"/>
+                </a:solidFill>
+                <a:latin typeface="Microsoft JhengHei"/>
+              </a:rPr>
+              <a:t>補件辨識</a:t>
+            </a:r>
+          </a:p>
+        </p:txBody>
+      </p:sp>
+      <p:sp>
+        <p:nvSpPr>
+          <p:cNvPr id="29" name="Rectangle 28"/>
           <p:cNvSpPr/>
           <p:nvPr/>
         </p:nvSpPr>
         <p:spPr>
           <a:xfrm>
-            <a:off x="822960" y="1600200"/>
-            <a:ext cx="3566160" cy="3566160"/>
-          </a:xfrm>
-          <a:prstGeom prst="blockArc">
-            <a:avLst>
-              <a:gd name="adj1" fmla="val 21240000"/>
-              <a:gd name="adj2" fmla="val 26639999"/>
-              <a:gd name="adj3" fmla="val 20000"/>
-            </a:avLst>
+            <a:off x="640080" y="5047488"/>
+            <a:ext cx="4754880" cy="9144"/>
+          </a:xfrm>
+          <a:prstGeom prst="rect">
+            <a:avLst/>
           </a:prstGeom>
           <a:solidFill>
-            <a:srgbClr val="2E7D32"/>
+            <a:srgbClr val="E6EAF0"/>
           </a:solidFill>
           <a:ln>
             <a:noFill/>
@@ -11705,14 +11602,67 @@
       </p:sp>
       <p:sp>
         <p:nvSpPr>
-          <p:cNvPr id="12" name="TextBox 11"/>
+          <p:cNvPr id="30" name="Oval 29"/>
+          <p:cNvSpPr/>
+          <p:nvPr/>
+        </p:nvSpPr>
+        <p:spPr>
+          <a:xfrm>
+            <a:off x="640080" y="5212080"/>
+            <a:ext cx="228600" cy="228600"/>
+          </a:xfrm>
+          <a:prstGeom prst="ellipse">
+            <a:avLst/>
+          </a:prstGeom>
+          <a:solidFill>
+            <a:srgbClr val="C5CDD8"/>
+          </a:solidFill>
+          <a:ln>
+            <a:noFill/>
+          </a:ln>
+          <a:effectLst/>
+        </p:spPr>
+        <p:style>
+          <a:lnRef idx="1">
+            <a:schemeClr val="accent1"/>
+          </a:lnRef>
+          <a:fillRef idx="3">
+            <a:schemeClr val="accent1"/>
+          </a:fillRef>
+          <a:effectRef idx="2">
+            <a:schemeClr val="accent1"/>
+          </a:effectRef>
+          <a:fontRef idx="minor">
+            <a:schemeClr val="lt1"/>
+          </a:fontRef>
+        </p:style>
+        <p:txBody>
+          <a:bodyPr rtlCol="0" anchor="ctr" lIns="0" rIns="0" tIns="0" bIns="0"/>
+          <a:lstStyle/>
+          <a:p>
+            <a:pPr algn="ctr"/>
+            <a:r>
+              <a:rPr sz="1300" b="1">
+                <a:solidFill>
+                  <a:srgbClr val="FFFFFF"/>
+                </a:solidFill>
+                <a:latin typeface="Microsoft JhengHei"/>
+              </a:rPr>
+              <a:t/>
+            </a:r>
+          </a:p>
+        </p:txBody>
+      </p:sp>
+      <p:sp>
+        <p:nvSpPr>
+          <p:cNvPr id="31" name="TextBox 30"/>
           <p:cNvSpPr txBox="1"/>
           <p:nvPr/>
         </p:nvSpPr>
         <p:spPr>
           <a:xfrm>
-            <a:off x="822960" y="2743200"/>
-            <a:ext cx="3566160" cy="822960"/>
+            <a:off x="1005840" y="5074920"/>
+            <a:ext cx="4389120" cy="502920"/>
           </a:xfrm>
           <a:prstGeom prst="rect">
             <a:avLst/>
@@ -11720,174 +11670,78 @@
           <a:noFill/>
         </p:spPr>
         <p:txBody>
-          <a:bodyPr wrap="square" anchor="t" lIns="45720" rIns="45720" tIns="27432" bIns="27432">
+          <a:bodyPr wrap="square" anchor="ctr" lIns="45720" rIns="45720" tIns="27432" bIns="27432">
             <a:spAutoFit/>
           </a:bodyPr>
           <a:lstStyle/>
           <a:p>
+            <a:pPr algn="l"/>
+            <a:r>
+              <a:rPr sz="1500" b="0">
+                <a:solidFill>
+                  <a:srgbClr val="16304F"/>
+                </a:solidFill>
+                <a:latin typeface="Microsoft JhengHei"/>
+              </a:rPr>
+              <a:t>登入／HTTPS</a:t>
+            </a:r>
+          </a:p>
+        </p:txBody>
+      </p:sp>
+      <p:sp>
+        <p:nvSpPr>
+          <p:cNvPr id="32" name="Rectangle 31"/>
+          <p:cNvSpPr/>
+          <p:nvPr/>
+        </p:nvSpPr>
+        <p:spPr>
+          <a:xfrm>
+            <a:off x="640080" y="5550408"/>
+            <a:ext cx="4754880" cy="9144"/>
+          </a:xfrm>
+          <a:prstGeom prst="rect">
+            <a:avLst/>
+          </a:prstGeom>
+          <a:solidFill>
+            <a:srgbClr val="E6EAF0"/>
+          </a:solidFill>
+          <a:ln>
+            <a:noFill/>
+          </a:ln>
+          <a:effectLst/>
+        </p:spPr>
+        <p:style>
+          <a:lnRef idx="1">
+            <a:schemeClr val="accent1"/>
+          </a:lnRef>
+          <a:fillRef idx="3">
+            <a:schemeClr val="accent1"/>
+          </a:fillRef>
+          <a:effectRef idx="2">
+            <a:schemeClr val="accent1"/>
+          </a:effectRef>
+          <a:fontRef idx="minor">
+            <a:schemeClr val="lt1"/>
+          </a:fontRef>
+        </p:style>
+        <p:txBody>
+          <a:bodyPr rtlCol="0" anchor="ctr"/>
+          <a:lstStyle/>
+          <a:p>
             <a:pPr algn="ctr"/>
-            <a:r>
-              <a:rPr sz="4400" b="1">
-                <a:solidFill>
-                  <a:srgbClr val="16304F"/>
-                </a:solidFill>
-                <a:latin typeface="Microsoft JhengHei"/>
-              </a:rPr>
-              <a:t>69%</a:t>
-            </a:r>
-          </a:p>
-        </p:txBody>
-      </p:sp>
-      <p:sp>
-        <p:nvSpPr>
-          <p:cNvPr id="13" name="TextBox 12"/>
-          <p:cNvSpPr txBox="1"/>
-          <p:nvPr/>
-        </p:nvSpPr>
-        <p:spPr>
-          <a:xfrm>
-            <a:off x="822960" y="3520440"/>
-            <a:ext cx="3566160" cy="365760"/>
-          </a:xfrm>
-          <a:prstGeom prst="rect">
-            <a:avLst/>
-          </a:prstGeom>
-          <a:noFill/>
-        </p:spPr>
-        <p:txBody>
-          <a:bodyPr wrap="square" anchor="t" lIns="45720" rIns="45720" tIns="27432" bIns="27432">
-            <a:spAutoFit/>
-          </a:bodyPr>
-          <a:lstStyle/>
-          <a:p>
-            <a:pPr algn="ctr"/>
-            <a:r>
-              <a:rPr sz="1400" b="0">
-                <a:solidFill>
-                  <a:srgbClr val="5B6573"/>
-                </a:solidFill>
-                <a:latin typeface="Microsoft JhengHei"/>
-              </a:rPr>
-              <a:t>不受理</a:t>
-            </a:r>
-          </a:p>
-        </p:txBody>
-      </p:sp>
-      <p:sp>
-        <p:nvSpPr>
-          <p:cNvPr id="14" name="TextBox 13"/>
-          <p:cNvSpPr txBox="1"/>
-          <p:nvPr/>
-        </p:nvSpPr>
-        <p:spPr>
-          <a:xfrm>
-            <a:off x="822960" y="3840480"/>
-            <a:ext cx="3566160" cy="365760"/>
-          </a:xfrm>
-          <a:prstGeom prst="rect">
-            <a:avLst/>
-          </a:prstGeom>
-          <a:noFill/>
-        </p:spPr>
-        <p:txBody>
-          <a:bodyPr wrap="square" anchor="t" lIns="45720" rIns="45720" tIns="27432" bIns="27432">
-            <a:spAutoFit/>
-          </a:bodyPr>
-          <a:lstStyle/>
-          <a:p>
-            <a:pPr algn="ctr"/>
-            <a:r>
-              <a:rPr sz="1100" b="0">
-                <a:solidFill>
-                  <a:srgbClr val="8A93A0"/>
-                </a:solidFill>
-                <a:latin typeface="Microsoft JhengHei"/>
-              </a:rPr>
-              <a:t>駁回 15%・撤銷 15%</a:t>
-            </a:r>
-          </a:p>
-        </p:txBody>
-      </p:sp>
-      <p:sp>
-        <p:nvSpPr>
-          <p:cNvPr id="15" name="TextBox 14"/>
-          <p:cNvSpPr txBox="1"/>
-          <p:nvPr/>
-        </p:nvSpPr>
-        <p:spPr>
-          <a:xfrm>
-            <a:off x="4846320" y="1737360"/>
-            <a:ext cx="6675120" cy="1097280"/>
-          </a:xfrm>
-          <a:prstGeom prst="rect">
-            <a:avLst/>
-          </a:prstGeom>
-          <a:noFill/>
-        </p:spPr>
-        <p:txBody>
-          <a:bodyPr wrap="square" anchor="t" lIns="45720" rIns="45720" tIns="27432" bIns="27432">
-            <a:spAutoFit/>
-          </a:bodyPr>
-          <a:lstStyle/>
-          <a:p>
-            <a:pPr algn="l"/>
-            <a:r>
-              <a:rPr sz="2400" b="1">
-                <a:solidFill>
-                  <a:srgbClr val="16304F"/>
-                </a:solidFill>
-                <a:latin typeface="Microsoft JhengHei"/>
-              </a:rPr>
-              <a:t>七成案子在程序就結束了。</a:t>
-            </a:r>
-          </a:p>
-        </p:txBody>
-      </p:sp>
-      <p:sp>
-        <p:nvSpPr>
-          <p:cNvPr id="16" name="TextBox 15"/>
-          <p:cNvSpPr txBox="1"/>
-          <p:nvPr/>
-        </p:nvSpPr>
-        <p:spPr>
-          <a:xfrm>
-            <a:off x="4846320" y="2880360"/>
-            <a:ext cx="6675120" cy="822960"/>
-          </a:xfrm>
-          <a:prstGeom prst="rect">
-            <a:avLst/>
-          </a:prstGeom>
-          <a:noFill/>
-        </p:spPr>
-        <p:txBody>
-          <a:bodyPr wrap="square" anchor="t" lIns="45720" rIns="45720" tIns="27432" bIns="27432">
-            <a:spAutoFit/>
-          </a:bodyPr>
-          <a:lstStyle/>
-          <a:p>
-            <a:pPr algn="l"/>
-            <a:r>
-              <a:rPr sz="1500" b="0">
-                <a:solidFill>
-                  <a:srgbClr val="5B6573"/>
-                </a:solidFill>
-                <a:latin typeface="Microsoft JhengHei"/>
-              </a:rPr>
-              <a:t>所以期間交給程式算；不受理的案子，草稿一個字都不碰實體。</a:t>
-            </a:r>
-          </a:p>
-        </p:txBody>
-      </p:sp>
-      <p:sp>
-        <p:nvSpPr>
-          <p:cNvPr id="17" name="Rounded Rectangle 16"/>
+          </a:p>
+        </p:txBody>
+      </p:sp>
+      <p:sp>
+        <p:nvSpPr>
+          <p:cNvPr id="33" name="Rounded Rectangle 32"/>
           <p:cNvSpPr/>
           <p:nvPr/>
         </p:nvSpPr>
         <p:spPr>
           <a:xfrm>
-            <a:off x="4846320" y="4023360"/>
-            <a:ext cx="2103120" cy="914400"/>
+            <a:off x="5943600" y="1554480"/>
+            <a:ext cx="2697480" cy="1691640"/>
           </a:xfrm>
           <a:prstGeom prst="roundRect">
             <a:avLst>
@@ -11926,14 +11780,14 @@
       </p:sp>
       <p:sp>
         <p:nvSpPr>
-          <p:cNvPr id="18" name="TextBox 17"/>
+          <p:cNvPr id="34" name="TextBox 33"/>
           <p:cNvSpPr txBox="1"/>
           <p:nvPr/>
         </p:nvSpPr>
         <p:spPr>
           <a:xfrm>
-            <a:off x="4956048" y="4050791"/>
-            <a:ext cx="1920240" cy="457200"/>
+            <a:off x="6108192" y="1664207"/>
+            <a:ext cx="2377440" cy="640080"/>
           </a:xfrm>
           <a:prstGeom prst="rect">
             <a:avLst/>
@@ -11948,27 +11802,27 @@
           <a:p>
             <a:pPr algn="l"/>
             <a:r>
-              <a:rPr sz="1400" b="1">
+              <a:rPr sz="3000" b="1">
                 <a:solidFill>
                   <a:srgbClr val="16304F"/>
                 </a:solidFill>
                 <a:latin typeface="Microsoft JhengHei"/>
               </a:rPr>
-              <a:t>法規 11 部</a:t>
-            </a:r>
-          </a:p>
-        </p:txBody>
-      </p:sp>
-      <p:sp>
-        <p:nvSpPr>
-          <p:cNvPr id="19" name="TextBox 18"/>
+              <a:t>20%</a:t>
+            </a:r>
+          </a:p>
+        </p:txBody>
+      </p:sp>
+      <p:sp>
+        <p:nvSpPr>
+          <p:cNvPr id="35" name="TextBox 34"/>
           <p:cNvSpPr txBox="1"/>
           <p:nvPr/>
         </p:nvSpPr>
         <p:spPr>
           <a:xfrm>
-            <a:off x="4956048" y="4480560"/>
-            <a:ext cx="1920240" cy="365760"/>
+            <a:off x="6108192" y="2286000"/>
+            <a:ext cx="2377440" cy="365760"/>
           </a:xfrm>
           <a:prstGeom prst="rect">
             <a:avLst/>
@@ -11983,27 +11837,62 @@
           <a:p>
             <a:pPr algn="l"/>
             <a:r>
+              <a:rPr sz="1400" b="1">
+                <a:solidFill>
+                  <a:srgbClr val="16304F"/>
+                </a:solidFill>
+                <a:latin typeface="Microsoft JhengHei"/>
+              </a:rPr>
+              <a:t>技術可行性</a:t>
+            </a:r>
+          </a:p>
+        </p:txBody>
+      </p:sp>
+      <p:sp>
+        <p:nvSpPr>
+          <p:cNvPr id="36" name="TextBox 35"/>
+          <p:cNvSpPr txBox="1"/>
+          <p:nvPr/>
+        </p:nvSpPr>
+        <p:spPr>
+          <a:xfrm>
+            <a:off x="6108192" y="2633472"/>
+            <a:ext cx="2377440" cy="548640"/>
+          </a:xfrm>
+          <a:prstGeom prst="rect">
+            <a:avLst/>
+          </a:prstGeom>
+          <a:noFill/>
+        </p:spPr>
+        <p:txBody>
+          <a:bodyPr wrap="square" anchor="t" lIns="45720" rIns="45720" tIns="27432" bIns="27432">
+            <a:spAutoFit/>
+          </a:bodyPr>
+          <a:lstStyle/>
+          <a:p>
+            <a:pPr algn="l"/>
+            <a:r>
               <a:rPr sz="1050" b="0">
                 <a:solidFill>
-                  <a:srgbClr val="5B6573"/>
-                </a:solidFill>
-                <a:latin typeface="Microsoft JhengHei"/>
-              </a:rPr>
-              <a:t>逐條比對＋知識庫</a:t>
-            </a:r>
-          </a:p>
-        </p:txBody>
-      </p:sp>
-      <p:sp>
-        <p:nvSpPr>
-          <p:cNvPr id="20" name="Rounded Rectangle 19"/>
+                  <a:srgbClr val="334455"/>
+                </a:solidFill>
+                <a:latin typeface="Microsoft JhengHei"/>
+              </a:rPr>
+              <a:t>允許清單內；呼叫頻率限制下固定流程</a:t>
+            </a:r>
+          </a:p>
+        </p:txBody>
+      </p:sp>
+      <p:sp>
+        <p:nvSpPr>
+          <p:cNvPr id="37" name="Rounded Rectangle 36"/>
           <p:cNvSpPr/>
           <p:nvPr/>
         </p:nvSpPr>
         <p:spPr>
           <a:xfrm>
-            <a:off x="7086600" y="4023360"/>
-            <a:ext cx="2103120" cy="914400"/>
+            <a:off x="8778240" y="1554480"/>
+            <a:ext cx="2697480" cy="1691640"/>
           </a:xfrm>
           <a:prstGeom prst="roundRect">
             <a:avLst>
@@ -12042,14 +11931,14 @@
       </p:sp>
       <p:sp>
         <p:nvSpPr>
-          <p:cNvPr id="21" name="TextBox 20"/>
+          <p:cNvPr id="38" name="TextBox 37"/>
           <p:cNvSpPr txBox="1"/>
           <p:nvPr/>
         </p:nvSpPr>
         <p:spPr>
           <a:xfrm>
-            <a:off x="7196328" y="4050791"/>
-            <a:ext cx="1920240" cy="457200"/>
+            <a:off x="8942832" y="1664207"/>
+            <a:ext cx="2377440" cy="640080"/>
           </a:xfrm>
           <a:prstGeom prst="rect">
             <a:avLst/>
@@ -12064,27 +11953,27 @@
           <a:p>
             <a:pPr algn="l"/>
             <a:r>
-              <a:rPr sz="1400" b="1">
+              <a:rPr sz="3000" b="1">
                 <a:solidFill>
                   <a:srgbClr val="16304F"/>
                 </a:solidFill>
                 <a:latin typeface="Microsoft JhengHei"/>
               </a:rPr>
-              <a:t>判解 19・函釋 10</a:t>
-            </a:r>
-          </a:p>
-        </p:txBody>
-      </p:sp>
-      <p:sp>
-        <p:nvSpPr>
-          <p:cNvPr id="22" name="TextBox 21"/>
+              <a:t>25%</a:t>
+            </a:r>
+          </a:p>
+        </p:txBody>
+      </p:sp>
+      <p:sp>
+        <p:nvSpPr>
+          <p:cNvPr id="39" name="TextBox 38"/>
           <p:cNvSpPr txBox="1"/>
           <p:nvPr/>
         </p:nvSpPr>
         <p:spPr>
           <a:xfrm>
-            <a:off x="7196328" y="4480560"/>
-            <a:ext cx="1920240" cy="365760"/>
+            <a:off x="8942832" y="2286000"/>
+            <a:ext cx="2377440" cy="365760"/>
           </a:xfrm>
           <a:prstGeom prst="rect">
             <a:avLst/>
@@ -12099,27 +11988,62 @@
           <a:p>
             <a:pPr algn="l"/>
             <a:r>
+              <a:rPr sz="1400" b="1">
+                <a:solidFill>
+                  <a:srgbClr val="16304F"/>
+                </a:solidFill>
+                <a:latin typeface="Microsoft JhengHei"/>
+              </a:rPr>
+              <a:t>完成度</a:t>
+            </a:r>
+          </a:p>
+        </p:txBody>
+      </p:sp>
+      <p:sp>
+        <p:nvSpPr>
+          <p:cNvPr id="40" name="TextBox 39"/>
+          <p:cNvSpPr txBox="1"/>
+          <p:nvPr/>
+        </p:nvSpPr>
+        <p:spPr>
+          <a:xfrm>
+            <a:off x="8942832" y="2633472"/>
+            <a:ext cx="2377440" cy="548640"/>
+          </a:xfrm>
+          <a:prstGeom prst="rect">
+            <a:avLst/>
+          </a:prstGeom>
+          <a:noFill/>
+        </p:spPr>
+        <p:txBody>
+          <a:bodyPr wrap="square" anchor="t" lIns="45720" rIns="45720" tIns="27432" bIns="27432">
+            <a:spAutoFit/>
+          </a:bodyPr>
+          <a:lstStyle/>
+          <a:p>
+            <a:pPr algn="l"/>
+            <a:r>
               <a:rPr sz="1050" b="0">
                 <a:solidFill>
-                  <a:srgbClr val="5B6573"/>
-                </a:solidFill>
-                <a:latin typeface="Microsoft JhengHei"/>
-              </a:rPr>
-              <a:t>進知識庫並標註類型</a:t>
-            </a:r>
-          </a:p>
-        </p:txBody>
-      </p:sp>
-      <p:sp>
-        <p:nvSpPr>
-          <p:cNvPr id="23" name="Rounded Rectangle 22"/>
+                  <a:srgbClr val="334455"/>
+                </a:solidFill>
+                <a:latin typeface="Microsoft JhengHei"/>
+              </a:rPr>
+              <a:t>Live Demo 走完整流程；52 個測試</a:t>
+            </a:r>
+          </a:p>
+        </p:txBody>
+      </p:sp>
+      <p:sp>
+        <p:nvSpPr>
+          <p:cNvPr id="41" name="Rounded Rectangle 40"/>
           <p:cNvSpPr/>
           <p:nvPr/>
         </p:nvSpPr>
         <p:spPr>
           <a:xfrm>
-            <a:off x="9326880" y="4023360"/>
-            <a:ext cx="2103120" cy="914400"/>
+            <a:off x="5943600" y="3383280"/>
+            <a:ext cx="2697480" cy="1691640"/>
           </a:xfrm>
           <a:prstGeom prst="roundRect">
             <a:avLst>
@@ -12158,14 +12082,14 @@
       </p:sp>
       <p:sp>
         <p:nvSpPr>
-          <p:cNvPr id="24" name="TextBox 23"/>
+          <p:cNvPr id="42" name="TextBox 41"/>
           <p:cNvSpPr txBox="1"/>
           <p:nvPr/>
         </p:nvSpPr>
         <p:spPr>
           <a:xfrm>
-            <a:off x="9436607" y="4050791"/>
-            <a:ext cx="1920240" cy="457200"/>
+            <a:off x="6108192" y="3493008"/>
+            <a:ext cx="2377440" cy="640080"/>
           </a:xfrm>
           <a:prstGeom prst="rect">
             <a:avLst/>
@@ -12180,27 +12104,27 @@
           <a:p>
             <a:pPr algn="l"/>
             <a:r>
-              <a:rPr sz="1400" b="1">
+              <a:rPr sz="3000" b="1">
                 <a:solidFill>
                   <a:srgbClr val="16304F"/>
                 </a:solidFill>
                 <a:latin typeface="Microsoft JhengHei"/>
               </a:rPr>
-              <a:t>自行補 3 個缺口</a:t>
-            </a:r>
-          </a:p>
-        </p:txBody>
-      </p:sp>
-      <p:sp>
-        <p:nvSpPr>
-          <p:cNvPr id="25" name="TextBox 24"/>
+              <a:t>30%</a:t>
+            </a:r>
+          </a:p>
+        </p:txBody>
+      </p:sp>
+      <p:sp>
+        <p:nvSpPr>
+          <p:cNvPr id="43" name="TextBox 42"/>
           <p:cNvSpPr txBox="1"/>
           <p:nvPr/>
         </p:nvSpPr>
         <p:spPr>
           <a:xfrm>
-            <a:off x="9436607" y="4480560"/>
-            <a:ext cx="1920240" cy="365760"/>
+            <a:off x="6108192" y="4114800"/>
+            <a:ext cx="2377440" cy="365760"/>
           </a:xfrm>
           <a:prstGeom prst="rect">
             <a:avLst/>
@@ -12215,13 +12139,322 @@
           <a:p>
             <a:pPr algn="l"/>
             <a:r>
+              <a:rPr sz="1400" b="1">
+                <a:solidFill>
+                  <a:srgbClr val="16304F"/>
+                </a:solidFill>
+                <a:latin typeface="Microsoft JhengHei"/>
+              </a:rPr>
+              <a:t>資料應用性</a:t>
+            </a:r>
+          </a:p>
+        </p:txBody>
+      </p:sp>
+      <p:sp>
+        <p:nvSpPr>
+          <p:cNvPr id="44" name="TextBox 43"/>
+          <p:cNvSpPr txBox="1"/>
+          <p:nvPr/>
+        </p:nvSpPr>
+        <p:spPr>
+          <a:xfrm>
+            <a:off x="6108192" y="4462272"/>
+            <a:ext cx="2377440" cy="548640"/>
+          </a:xfrm>
+          <a:prstGeom prst="rect">
+            <a:avLst/>
+          </a:prstGeom>
+          <a:noFill/>
+        </p:spPr>
+        <p:txBody>
+          <a:bodyPr wrap="square" anchor="t" lIns="45720" rIns="45720" tIns="27432" bIns="27432">
+            <a:spAutoFit/>
+          </a:bodyPr>
+          <a:lstStyle/>
+          <a:p>
+            <a:pPr algn="l"/>
+            <a:r>
               <a:rPr sz="1050" b="0">
                 <a:solidFill>
-                  <a:srgbClr val="5B6573"/>
-                </a:solidFill>
-                <a:latin typeface="Microsoft JhengHei"/>
-              </a:rPr>
-              <a:t>政資法・洗錢判準・空污</a:t>
+                  <a:srgbClr val="334455"/>
+                </a:solidFill>
+                <a:latin typeface="Microsoft JhengHei"/>
+              </a:rPr>
+              <a:t>101 份讀完再設計；三套考題</a:t>
+            </a:r>
+          </a:p>
+        </p:txBody>
+      </p:sp>
+      <p:sp>
+        <p:nvSpPr>
+          <p:cNvPr id="45" name="Rounded Rectangle 44"/>
+          <p:cNvSpPr/>
+          <p:nvPr/>
+        </p:nvSpPr>
+        <p:spPr>
+          <a:xfrm>
+            <a:off x="8778240" y="3383280"/>
+            <a:ext cx="2697480" cy="1691640"/>
+          </a:xfrm>
+          <a:prstGeom prst="roundRect">
+            <a:avLst>
+              <a:gd name="adj" fmla="val 8000"/>
+            </a:avLst>
+          </a:prstGeom>
+          <a:solidFill>
+            <a:srgbClr val="F4F6F9"/>
+          </a:solidFill>
+          <a:ln>
+            <a:noFill/>
+          </a:ln>
+          <a:effectLst/>
+        </p:spPr>
+        <p:style>
+          <a:lnRef idx="1">
+            <a:schemeClr val="accent1"/>
+          </a:lnRef>
+          <a:fillRef idx="3">
+            <a:schemeClr val="accent1"/>
+          </a:fillRef>
+          <a:effectRef idx="2">
+            <a:schemeClr val="accent1"/>
+          </a:effectRef>
+          <a:fontRef idx="minor">
+            <a:schemeClr val="lt1"/>
+          </a:fontRef>
+        </p:style>
+        <p:txBody>
+          <a:bodyPr rtlCol="0" anchor="ctr"/>
+          <a:lstStyle/>
+          <a:p>
+            <a:pPr algn="ctr"/>
+          </a:p>
+        </p:txBody>
+      </p:sp>
+      <p:sp>
+        <p:nvSpPr>
+          <p:cNvPr id="46" name="TextBox 45"/>
+          <p:cNvSpPr txBox="1"/>
+          <p:nvPr/>
+        </p:nvSpPr>
+        <p:spPr>
+          <a:xfrm>
+            <a:off x="8942832" y="3493008"/>
+            <a:ext cx="2377440" cy="640080"/>
+          </a:xfrm>
+          <a:prstGeom prst="rect">
+            <a:avLst/>
+          </a:prstGeom>
+          <a:noFill/>
+        </p:spPr>
+        <p:txBody>
+          <a:bodyPr wrap="square" anchor="t" lIns="45720" rIns="45720" tIns="27432" bIns="27432">
+            <a:spAutoFit/>
+          </a:bodyPr>
+          <a:lstStyle/>
+          <a:p>
+            <a:pPr algn="l"/>
+            <a:r>
+              <a:rPr sz="3000" b="1">
+                <a:solidFill>
+                  <a:srgbClr val="16304F"/>
+                </a:solidFill>
+                <a:latin typeface="Microsoft JhengHei"/>
+              </a:rPr>
+              <a:t>25%</a:t>
+            </a:r>
+          </a:p>
+        </p:txBody>
+      </p:sp>
+      <p:sp>
+        <p:nvSpPr>
+          <p:cNvPr id="47" name="TextBox 46"/>
+          <p:cNvSpPr txBox="1"/>
+          <p:nvPr/>
+        </p:nvSpPr>
+        <p:spPr>
+          <a:xfrm>
+            <a:off x="8942832" y="4114800"/>
+            <a:ext cx="2377440" cy="365760"/>
+          </a:xfrm>
+          <a:prstGeom prst="rect">
+            <a:avLst/>
+          </a:prstGeom>
+          <a:noFill/>
+        </p:spPr>
+        <p:txBody>
+          <a:bodyPr wrap="square" anchor="t" lIns="45720" rIns="45720" tIns="27432" bIns="27432">
+            <a:spAutoFit/>
+          </a:bodyPr>
+          <a:lstStyle/>
+          <a:p>
+            <a:pPr algn="l"/>
+            <a:r>
+              <a:rPr sz="1400" b="1">
+                <a:solidFill>
+                  <a:srgbClr val="16304F"/>
+                </a:solidFill>
+                <a:latin typeface="Microsoft JhengHei"/>
+              </a:rPr>
+              <a:t>主題契合度</a:t>
+            </a:r>
+          </a:p>
+        </p:txBody>
+      </p:sp>
+      <p:sp>
+        <p:nvSpPr>
+          <p:cNvPr id="48" name="TextBox 47"/>
+          <p:cNvSpPr txBox="1"/>
+          <p:nvPr/>
+        </p:nvSpPr>
+        <p:spPr>
+          <a:xfrm>
+            <a:off x="8942832" y="4462272"/>
+            <a:ext cx="2377440" cy="548640"/>
+          </a:xfrm>
+          <a:prstGeom prst="rect">
+            <a:avLst/>
+          </a:prstGeom>
+          <a:noFill/>
+        </p:spPr>
+        <p:txBody>
+          <a:bodyPr wrap="square" anchor="t" lIns="45720" rIns="45720" tIns="27432" bIns="27432">
+            <a:spAutoFit/>
+          </a:bodyPr>
+          <a:lstStyle/>
+          <a:p>
+            <a:pPr algn="l"/>
+            <a:r>
+              <a:rPr sz="1050" b="0">
+                <a:solidFill>
+                  <a:srgbClr val="334455"/>
+                </a:solidFill>
+                <a:latin typeface="Microsoft JhengHei"/>
+              </a:rPr>
+              <a:t>四大功能對應；輔助不取代</a:t>
+            </a:r>
+          </a:p>
+        </p:txBody>
+      </p:sp>
+      <p:sp>
+        <p:nvSpPr>
+          <p:cNvPr id="49" name="Rectangle 48"/>
+          <p:cNvSpPr/>
+          <p:nvPr/>
+        </p:nvSpPr>
+        <p:spPr>
+          <a:xfrm>
+            <a:off x="640080" y="5623560"/>
+            <a:ext cx="10908792" cy="566928"/>
+          </a:xfrm>
+          <a:prstGeom prst="rect">
+            <a:avLst/>
+          </a:prstGeom>
+          <a:solidFill>
+            <a:srgbClr val="FFF8EA"/>
+          </a:solidFill>
+          <a:ln>
+            <a:noFill/>
+          </a:ln>
+          <a:effectLst/>
+        </p:spPr>
+        <p:style>
+          <a:lnRef idx="1">
+            <a:schemeClr val="accent1"/>
+          </a:lnRef>
+          <a:fillRef idx="3">
+            <a:schemeClr val="accent1"/>
+          </a:fillRef>
+          <a:effectRef idx="2">
+            <a:schemeClr val="accent1"/>
+          </a:effectRef>
+          <a:fontRef idx="minor">
+            <a:schemeClr val="lt1"/>
+          </a:fontRef>
+        </p:style>
+        <p:txBody>
+          <a:bodyPr rtlCol="0" anchor="ctr"/>
+          <a:lstStyle/>
+          <a:p>
+            <a:pPr algn="ctr"/>
+          </a:p>
+        </p:txBody>
+      </p:sp>
+      <p:sp>
+        <p:nvSpPr>
+          <p:cNvPr id="50" name="Rectangle 49"/>
+          <p:cNvSpPr/>
+          <p:nvPr/>
+        </p:nvSpPr>
+        <p:spPr>
+          <a:xfrm>
+            <a:off x="640080" y="5623560"/>
+            <a:ext cx="64008" cy="566928"/>
+          </a:xfrm>
+          <a:prstGeom prst="rect">
+            <a:avLst/>
+          </a:prstGeom>
+          <a:solidFill>
+            <a:srgbClr val="D98E04"/>
+          </a:solidFill>
+          <a:ln>
+            <a:noFill/>
+          </a:ln>
+          <a:effectLst/>
+        </p:spPr>
+        <p:style>
+          <a:lnRef idx="1">
+            <a:schemeClr val="accent1"/>
+          </a:lnRef>
+          <a:fillRef idx="3">
+            <a:schemeClr val="accent1"/>
+          </a:fillRef>
+          <a:effectRef idx="2">
+            <a:schemeClr val="accent1"/>
+          </a:effectRef>
+          <a:fontRef idx="minor">
+            <a:schemeClr val="lt1"/>
+          </a:fontRef>
+        </p:style>
+        <p:txBody>
+          <a:bodyPr rtlCol="0" anchor="ctr"/>
+          <a:lstStyle/>
+          <a:p>
+            <a:pPr algn="ctr"/>
+          </a:p>
+        </p:txBody>
+      </p:sp>
+      <p:sp>
+        <p:nvSpPr>
+          <p:cNvPr id="51" name="TextBox 50"/>
+          <p:cNvSpPr txBox="1"/>
+          <p:nvPr/>
+        </p:nvSpPr>
+        <p:spPr>
+          <a:xfrm>
+            <a:off x="822960" y="5641848"/>
+            <a:ext cx="10607040" cy="548640"/>
+          </a:xfrm>
+          <a:prstGeom prst="rect">
+            <a:avLst/>
+          </a:prstGeom>
+          <a:noFill/>
+        </p:spPr>
+        <p:txBody>
+          <a:bodyPr wrap="square" anchor="ctr" lIns="45720" rIns="45720" tIns="27432" bIns="27432">
+            <a:spAutoFit/>
+          </a:bodyPr>
+          <a:lstStyle/>
+          <a:p>
+            <a:pPr algn="l"/>
+            <a:r>
+              <a:rPr sz="1350" b="0">
+                <a:solidFill>
+                  <a:srgbClr val="334455"/>
+                </a:solidFill>
+                <a:latin typeface="Microsoft JhengHei"/>
+              </a:rPr>
+              <a:t>Live Demo　http://100.20.156.38/　— 所有畫面都是線上現跑的</a:t>
             </a:r>
           </a:p>
         </p:txBody>
@@ -12253,7 +12486,7 @@
         <p:spPr>
           <a:xfrm>
             <a:off x="0" y="0"/>
-            <a:ext cx="9509760" cy="73152"/>
+            <a:ext cx="12191695" cy="6858000"/>
           </a:xfrm>
           <a:prstGeom prst="rect">
             <a:avLst/>
@@ -12296,8 +12529,8 @@
         </p:nvSpPr>
         <p:spPr>
           <a:xfrm>
-            <a:off x="9509760" y="0"/>
-            <a:ext cx="2681935" cy="73152"/>
+            <a:off x="0" y="0"/>
+            <a:ext cx="91440" cy="6858000"/>
           </a:xfrm>
           <a:prstGeom prst="rect">
             <a:avLst/>
@@ -12334,90 +12567,20 @@
       </p:sp>
       <p:sp>
         <p:nvSpPr>
-          <p:cNvPr id="4" name="TextBox 3"/>
-          <p:cNvSpPr txBox="1"/>
-          <p:nvPr/>
-        </p:nvSpPr>
-        <p:spPr>
-          <a:xfrm>
-            <a:off x="640080" y="384048"/>
-            <a:ext cx="7315200" cy="274320"/>
-          </a:xfrm>
-          <a:prstGeom prst="rect">
-            <a:avLst/>
-          </a:prstGeom>
-          <a:noFill/>
-        </p:spPr>
-        <p:txBody>
-          <a:bodyPr wrap="square" anchor="t" lIns="45720" rIns="45720" tIns="27432" bIns="27432">
-            <a:spAutoFit/>
-          </a:bodyPr>
-          <a:lstStyle/>
-          <a:p>
-            <a:pPr algn="l"/>
-            <a:r>
-              <a:rPr sz="1100" b="1">
-                <a:solidFill>
-                  <a:srgbClr val="D98E04"/>
-                </a:solidFill>
-                <a:latin typeface="Microsoft JhengHei"/>
-              </a:rPr>
-              <a:t>08 ／ 資料應用</a:t>
-            </a:r>
-          </a:p>
-        </p:txBody>
-      </p:sp>
-      <p:sp>
-        <p:nvSpPr>
-          <p:cNvPr id="5" name="TextBox 4"/>
-          <p:cNvSpPr txBox="1"/>
-          <p:nvPr/>
-        </p:nvSpPr>
-        <p:spPr>
-          <a:xfrm>
-            <a:off x="640080" y="603504"/>
-            <a:ext cx="10972800" cy="731520"/>
-          </a:xfrm>
-          <a:prstGeom prst="rect">
-            <a:avLst/>
-          </a:prstGeom>
-          <a:noFill/>
-        </p:spPr>
-        <p:txBody>
-          <a:bodyPr wrap="square" anchor="t" lIns="45720" rIns="45720" tIns="27432" bIns="27432">
-            <a:spAutoFit/>
-          </a:bodyPr>
-          <a:lstStyle/>
-          <a:p>
-            <a:pPr algn="l"/>
-            <a:r>
-              <a:rPr sz="2800" b="1">
-                <a:solidFill>
-                  <a:srgbClr val="16304F"/>
-                </a:solidFill>
-                <a:latin typeface="Microsoft JhengHei"/>
-              </a:rPr>
-              <a:t>拿不到答辯書和卷宗，就自己出三套考題</a:t>
-            </a:r>
-          </a:p>
-        </p:txBody>
-      </p:sp>
-      <p:sp>
-        <p:nvSpPr>
-          <p:cNvPr id="6" name="Rectangle 5"/>
+          <p:cNvPr id="4" name="Oval 3"/>
           <p:cNvSpPr/>
           <p:nvPr/>
         </p:nvSpPr>
         <p:spPr>
           <a:xfrm>
-            <a:off x="640080" y="6400800"/>
-            <a:ext cx="10908792" cy="9144"/>
-          </a:xfrm>
-          <a:prstGeom prst="rect">
+            <a:off x="9326880" y="-1645920"/>
+            <a:ext cx="5120640" cy="5120640"/>
+          </a:xfrm>
+          <a:prstGeom prst="ellipse">
             <a:avLst/>
           </a:prstGeom>
           <a:solidFill>
-            <a:srgbClr val="E6EAF0"/>
+            <a:srgbClr val="1E3F68"/>
           </a:solidFill>
           <a:ln>
             <a:noFill/>
@@ -12448,14 +12611,14 @@
       </p:sp>
       <p:sp>
         <p:nvSpPr>
-          <p:cNvPr id="7" name="TextBox 6"/>
+          <p:cNvPr id="5" name="TextBox 4"/>
           <p:cNvSpPr txBox="1"/>
           <p:nvPr/>
         </p:nvSpPr>
         <p:spPr>
           <a:xfrm>
-            <a:off x="640080" y="6428232"/>
-            <a:ext cx="7315200" cy="274320"/>
+            <a:off x="914400" y="2103120"/>
+            <a:ext cx="10058400" cy="365760"/>
           </a:xfrm>
           <a:prstGeom prst="rect">
             <a:avLst/>
@@ -12470,27 +12633,27 @@
           <a:p>
             <a:pPr algn="l"/>
             <a:r>
-              <a:rPr sz="950" b="0">
-                <a:solidFill>
-                  <a:srgbClr val="8A93A0"/>
-                </a:solidFill>
-                <a:latin typeface="Microsoft JhengHei"/>
-              </a:rPr>
-              <a:t>訴願智審臺 ｜ 2026 新北市 AI 智慧城市黑客松・法制局組</a:t>
-            </a:r>
-          </a:p>
-        </p:txBody>
-      </p:sp>
-      <p:sp>
-        <p:nvSpPr>
-          <p:cNvPr id="8" name="TextBox 7"/>
+              <a:rPr sz="1200" b="1">
+                <a:solidFill>
+                  <a:srgbClr val="F2B544"/>
+                </a:solidFill>
+                <a:latin typeface="Microsoft JhengHei"/>
+              </a:rPr>
+              <a:t>2026 新北市 AI 智慧城市黑客松 ｜ 法制局組</a:t>
+            </a:r>
+          </a:p>
+        </p:txBody>
+      </p:sp>
+      <p:sp>
+        <p:nvSpPr>
+          <p:cNvPr id="6" name="TextBox 5"/>
           <p:cNvSpPr txBox="1"/>
           <p:nvPr/>
         </p:nvSpPr>
         <p:spPr>
           <a:xfrm>
-            <a:off x="10607040" y="6428232"/>
-            <a:ext cx="941832" cy="274320"/>
+            <a:off x="914400" y="2514600"/>
+            <a:ext cx="10515600" cy="1280160"/>
           </a:xfrm>
           <a:prstGeom prst="rect">
             <a:avLst/>
@@ -12503,77 +12666,29 @@
           </a:bodyPr>
           <a:lstStyle/>
           <a:p>
-            <a:pPr algn="r"/>
-            <a:r>
-              <a:rPr sz="950" b="0">
-                <a:solidFill>
-                  <a:srgbClr val="8A93A0"/>
-                </a:solidFill>
-                <a:latin typeface="Microsoft JhengHei"/>
-              </a:rPr>
-              <a:t>9 / 11</a:t>
-            </a:r>
-          </a:p>
-        </p:txBody>
-      </p:sp>
-      <p:sp>
-        <p:nvSpPr>
-          <p:cNvPr id="9" name="Rounded Rectangle 8"/>
-          <p:cNvSpPr/>
-          <p:nvPr/>
-        </p:nvSpPr>
-        <p:spPr>
-          <a:xfrm>
-            <a:off x="640080" y="1554480"/>
-            <a:ext cx="3520440" cy="3840480"/>
-          </a:xfrm>
-          <a:prstGeom prst="roundRect">
-            <a:avLst>
-              <a:gd name="adj" fmla="val 8000"/>
-            </a:avLst>
-          </a:prstGeom>
-          <a:solidFill>
-            <a:srgbClr val="FFFFFF"/>
-          </a:solidFill>
-          <a:ln w="19050">
-            <a:solidFill>
-              <a:srgbClr val="DDE3EA"/>
-            </a:solidFill>
-          </a:ln>
-          <a:effectLst/>
-        </p:spPr>
-        <p:style>
-          <a:lnRef idx="1">
-            <a:schemeClr val="accent1"/>
-          </a:lnRef>
-          <a:fillRef idx="3">
-            <a:schemeClr val="accent1"/>
-          </a:fillRef>
-          <a:effectRef idx="2">
-            <a:schemeClr val="accent1"/>
-          </a:effectRef>
-          <a:fontRef idx="minor">
-            <a:schemeClr val="lt1"/>
-          </a:fontRef>
-        </p:style>
-        <p:txBody>
-          <a:bodyPr rtlCol="0" anchor="ctr"/>
-          <a:lstStyle/>
-          <a:p>
-            <a:pPr algn="ctr"/>
-          </a:p>
-        </p:txBody>
-      </p:sp>
-      <p:sp>
-        <p:nvSpPr>
-          <p:cNvPr id="10" name="TextBox 9"/>
+            <a:pPr algn="l"/>
+            <a:r>
+              <a:rPr sz="5400" b="1">
+                <a:solidFill>
+                  <a:srgbClr val="FFFFFF"/>
+                </a:solidFill>
+                <a:latin typeface="Microsoft JhengHei"/>
+              </a:rPr>
+              <a:t>謝謝，請指教</a:t>
+            </a:r>
+          </a:p>
+        </p:txBody>
+      </p:sp>
+      <p:sp>
+        <p:nvSpPr>
+          <p:cNvPr id="7" name="TextBox 6"/>
           <p:cNvSpPr txBox="1"/>
           <p:nvPr/>
         </p:nvSpPr>
         <p:spPr>
           <a:xfrm>
-            <a:off x="841247" y="1691640"/>
-            <a:ext cx="3108960" cy="320040"/>
+            <a:off x="914400" y="3794760"/>
+            <a:ext cx="10515600" cy="548640"/>
           </a:xfrm>
           <a:prstGeom prst="rect">
             <a:avLst/>
@@ -12588,690 +12703,27 @@
           <a:p>
             <a:pPr algn="l"/>
             <a:r>
-              <a:rPr sz="1050" b="1">
-                <a:solidFill>
-                  <a:srgbClr val="D98E04"/>
-                </a:solidFill>
-                <a:latin typeface="Microsoft JhengHei"/>
-              </a:rPr>
-              <a:t>CASE 01 ／ 建築法</a:t>
-            </a:r>
-          </a:p>
-        </p:txBody>
-      </p:sp>
-      <p:sp>
-        <p:nvSpPr>
-          <p:cNvPr id="11" name="TextBox 10"/>
-          <p:cNvSpPr txBox="1"/>
-          <p:nvPr/>
-        </p:nvSpPr>
-        <p:spPr>
-          <a:xfrm>
-            <a:off x="841247" y="2011680"/>
-            <a:ext cx="3108960" cy="502920"/>
-          </a:xfrm>
-          <a:prstGeom prst="rect">
-            <a:avLst/>
-          </a:prstGeom>
-          <a:noFill/>
-        </p:spPr>
-        <p:txBody>
-          <a:bodyPr wrap="square" anchor="t" lIns="45720" rIns="45720" tIns="27432" bIns="27432">
-            <a:spAutoFit/>
-          </a:bodyPr>
-          <a:lstStyle/>
-          <a:p>
-            <a:pPr algn="l"/>
-            <a:r>
-              <a:rPr sz="2000" b="1">
-                <a:solidFill>
-                  <a:srgbClr val="16304F"/>
-                </a:solidFill>
-                <a:latin typeface="Microsoft JhengHei"/>
-              </a:rPr>
-              <a:t>訴願人遲了 7 天</a:t>
-            </a:r>
-          </a:p>
-        </p:txBody>
-      </p:sp>
-      <p:sp>
-        <p:nvSpPr>
-          <p:cNvPr id="12" name="Rounded Rectangle 11"/>
+              <a:rPr sz="2100" b="0">
+                <a:solidFill>
+                  <a:srgbClr val="C9D6E6"/>
+                </a:solidFill>
+                <a:latin typeface="Microsoft JhengHei"/>
+              </a:rPr>
+              <a:t>接下來：補件、法規自動更新、洗錢與空污案型</a:t>
+            </a:r>
+          </a:p>
+        </p:txBody>
+      </p:sp>
+      <p:sp>
+        <p:nvSpPr>
+          <p:cNvPr id="8" name="Rectangle 7"/>
           <p:cNvSpPr/>
           <p:nvPr/>
         </p:nvSpPr>
         <p:spPr>
           <a:xfrm>
-            <a:off x="841247" y="2606040"/>
-            <a:ext cx="1188720" cy="411480"/>
-          </a:xfrm>
-          <a:prstGeom prst="roundRect">
-            <a:avLst>
-              <a:gd name="adj" fmla="val 8000"/>
-            </a:avLst>
-          </a:prstGeom>
-          <a:solidFill>
-            <a:srgbClr val="16304F"/>
-          </a:solidFill>
-          <a:ln>
-            <a:noFill/>
-          </a:ln>
-          <a:effectLst/>
-        </p:spPr>
-        <p:style>
-          <a:lnRef idx="1">
-            <a:schemeClr val="accent1"/>
-          </a:lnRef>
-          <a:fillRef idx="3">
-            <a:schemeClr val="accent1"/>
-          </a:fillRef>
-          <a:effectRef idx="2">
-            <a:schemeClr val="accent1"/>
-          </a:effectRef>
-          <a:fontRef idx="minor">
-            <a:schemeClr val="lt1"/>
-          </a:fontRef>
-        </p:style>
-        <p:txBody>
-          <a:bodyPr rtlCol="0" anchor="ctr"/>
-          <a:lstStyle/>
-          <a:p>
-            <a:pPr algn="ctr"/>
-          </a:p>
-        </p:txBody>
-      </p:sp>
-      <p:sp>
-        <p:nvSpPr>
-          <p:cNvPr id="13" name="TextBox 12"/>
-          <p:cNvSpPr txBox="1"/>
-          <p:nvPr/>
-        </p:nvSpPr>
-        <p:spPr>
-          <a:xfrm>
-            <a:off x="841247" y="2606040"/>
-            <a:ext cx="1188720" cy="411480"/>
-          </a:xfrm>
-          <a:prstGeom prst="rect">
-            <a:avLst/>
-          </a:prstGeom>
-          <a:noFill/>
-        </p:spPr>
-        <p:txBody>
-          <a:bodyPr wrap="square" anchor="ctr" lIns="45720" rIns="45720" tIns="27432" bIns="27432">
-            <a:spAutoFit/>
-          </a:bodyPr>
-          <a:lstStyle/>
-          <a:p>
-            <a:pPr algn="ctr"/>
-            <a:r>
-              <a:rPr sz="1500" b="1">
-                <a:solidFill>
-                  <a:srgbClr val="FFFFFF"/>
-                </a:solidFill>
-                <a:latin typeface="Microsoft JhengHei"/>
-              </a:rPr>
-              <a:t>不受理</a:t>
-            </a:r>
-          </a:p>
-        </p:txBody>
-      </p:sp>
-      <p:sp>
-        <p:nvSpPr>
-          <p:cNvPr id="14" name="TextBox 13"/>
-          <p:cNvSpPr txBox="1"/>
-          <p:nvPr/>
-        </p:nvSpPr>
-        <p:spPr>
-          <a:xfrm>
-            <a:off x="841247" y="3154680"/>
-            <a:ext cx="3108960" cy="2103120"/>
-          </a:xfrm>
-          <a:prstGeom prst="rect">
-            <a:avLst/>
-          </a:prstGeom>
-          <a:noFill/>
-        </p:spPr>
-        <p:txBody>
-          <a:bodyPr wrap="square" anchor="t" lIns="45720" rIns="45720" tIns="27432" bIns="27432">
-            <a:spAutoFit/>
-          </a:bodyPr>
-          <a:lstStyle/>
-          <a:p>
-            <a:pPr algn="l"/>
-            <a:r>
-              <a:rPr sz="1350" b="0">
-                <a:solidFill>
-                  <a:srgbClr val="334455"/>
-                </a:solidFill>
-                <a:latin typeface="Microsoft JhengHei"/>
-              </a:rPr>
-              <a:t>卷宗塞滿實質理由和照片當干擾；正確答案仍是程序不受理，不能寫任何實質認定。</a:t>
-            </a:r>
-          </a:p>
-        </p:txBody>
-      </p:sp>
-      <p:sp>
-        <p:nvSpPr>
-          <p:cNvPr id="15" name="Rounded Rectangle 14"/>
-          <p:cNvSpPr/>
-          <p:nvPr/>
-        </p:nvSpPr>
-        <p:spPr>
-          <a:xfrm>
-            <a:off x="4325112" y="1554480"/>
-            <a:ext cx="3520440" cy="3840480"/>
-          </a:xfrm>
-          <a:prstGeom prst="roundRect">
-            <a:avLst>
-              <a:gd name="adj" fmla="val 8000"/>
-            </a:avLst>
-          </a:prstGeom>
-          <a:solidFill>
-            <a:srgbClr val="FFFFFF"/>
-          </a:solidFill>
-          <a:ln w="19050">
-            <a:solidFill>
-              <a:srgbClr val="DDE3EA"/>
-            </a:solidFill>
-          </a:ln>
-          <a:effectLst/>
-        </p:spPr>
-        <p:style>
-          <a:lnRef idx="1">
-            <a:schemeClr val="accent1"/>
-          </a:lnRef>
-          <a:fillRef idx="3">
-            <a:schemeClr val="accent1"/>
-          </a:fillRef>
-          <a:effectRef idx="2">
-            <a:schemeClr val="accent1"/>
-          </a:effectRef>
-          <a:fontRef idx="minor">
-            <a:schemeClr val="lt1"/>
-          </a:fontRef>
-        </p:style>
-        <p:txBody>
-          <a:bodyPr rtlCol="0" anchor="ctr"/>
-          <a:lstStyle/>
-          <a:p>
-            <a:pPr algn="ctr"/>
-          </a:p>
-        </p:txBody>
-      </p:sp>
-      <p:sp>
-        <p:nvSpPr>
-          <p:cNvPr id="16" name="TextBox 15"/>
-          <p:cNvSpPr txBox="1"/>
-          <p:nvPr/>
-        </p:nvSpPr>
-        <p:spPr>
-          <a:xfrm>
-            <a:off x="4526280" y="1691640"/>
-            <a:ext cx="3108960" cy="320040"/>
-          </a:xfrm>
-          <a:prstGeom prst="rect">
-            <a:avLst/>
-          </a:prstGeom>
-          <a:noFill/>
-        </p:spPr>
-        <p:txBody>
-          <a:bodyPr wrap="square" anchor="t" lIns="45720" rIns="45720" tIns="27432" bIns="27432">
-            <a:spAutoFit/>
-          </a:bodyPr>
-          <a:lstStyle/>
-          <a:p>
-            <a:pPr algn="l"/>
-            <a:r>
-              <a:rPr sz="1050" b="1">
-                <a:solidFill>
-                  <a:srgbClr val="D98E04"/>
-                </a:solidFill>
-                <a:latin typeface="Microsoft JhengHei"/>
-              </a:rPr>
-              <a:t>CASE 02 ／ 廢清法</a:t>
-            </a:r>
-          </a:p>
-        </p:txBody>
-      </p:sp>
-      <p:sp>
-        <p:nvSpPr>
-          <p:cNvPr id="17" name="TextBox 16"/>
-          <p:cNvSpPr txBox="1"/>
-          <p:nvPr/>
-        </p:nvSpPr>
-        <p:spPr>
-          <a:xfrm>
-            <a:off x="4526280" y="2011680"/>
-            <a:ext cx="3108960" cy="502920"/>
-          </a:xfrm>
-          <a:prstGeom prst="rect">
-            <a:avLst/>
-          </a:prstGeom>
-          <a:noFill/>
-        </p:spPr>
-        <p:txBody>
-          <a:bodyPr wrap="square" anchor="t" lIns="45720" rIns="45720" tIns="27432" bIns="27432">
-            <a:spAutoFit/>
-          </a:bodyPr>
-          <a:lstStyle/>
-          <a:p>
-            <a:pPr algn="l"/>
-            <a:r>
-              <a:rPr sz="2000" b="1">
-                <a:solidFill>
-                  <a:srgbClr val="16304F"/>
-                </a:solidFill>
-                <a:latin typeface="Microsoft JhengHei"/>
-              </a:rPr>
-              <a:t>亂丟煙蒂，說沒丟</a:t>
-            </a:r>
-          </a:p>
-        </p:txBody>
-      </p:sp>
-      <p:sp>
-        <p:nvSpPr>
-          <p:cNvPr id="18" name="Rounded Rectangle 17"/>
-          <p:cNvSpPr/>
-          <p:nvPr/>
-        </p:nvSpPr>
-        <p:spPr>
-          <a:xfrm>
-            <a:off x="4526280" y="2606040"/>
-            <a:ext cx="1188720" cy="411480"/>
-          </a:xfrm>
-          <a:prstGeom prst="roundRect">
-            <a:avLst>
-              <a:gd name="adj" fmla="val 8000"/>
-            </a:avLst>
-          </a:prstGeom>
-          <a:solidFill>
-            <a:srgbClr val="16304F"/>
-          </a:solidFill>
-          <a:ln>
-            <a:noFill/>
-          </a:ln>
-          <a:effectLst/>
-        </p:spPr>
-        <p:style>
-          <a:lnRef idx="1">
-            <a:schemeClr val="accent1"/>
-          </a:lnRef>
-          <a:fillRef idx="3">
-            <a:schemeClr val="accent1"/>
-          </a:fillRef>
-          <a:effectRef idx="2">
-            <a:schemeClr val="accent1"/>
-          </a:effectRef>
-          <a:fontRef idx="minor">
-            <a:schemeClr val="lt1"/>
-          </a:fontRef>
-        </p:style>
-        <p:txBody>
-          <a:bodyPr rtlCol="0" anchor="ctr"/>
-          <a:lstStyle/>
-          <a:p>
-            <a:pPr algn="ctr"/>
-          </a:p>
-        </p:txBody>
-      </p:sp>
-      <p:sp>
-        <p:nvSpPr>
-          <p:cNvPr id="19" name="TextBox 18"/>
-          <p:cNvSpPr txBox="1"/>
-          <p:nvPr/>
-        </p:nvSpPr>
-        <p:spPr>
-          <a:xfrm>
-            <a:off x="4526280" y="2606040"/>
-            <a:ext cx="1188720" cy="411480"/>
-          </a:xfrm>
-          <a:prstGeom prst="rect">
-            <a:avLst/>
-          </a:prstGeom>
-          <a:noFill/>
-        </p:spPr>
-        <p:txBody>
-          <a:bodyPr wrap="square" anchor="ctr" lIns="45720" rIns="45720" tIns="27432" bIns="27432">
-            <a:spAutoFit/>
-          </a:bodyPr>
-          <a:lstStyle/>
-          <a:p>
-            <a:pPr algn="ctr"/>
-            <a:r>
-              <a:rPr sz="1500" b="1">
-                <a:solidFill>
-                  <a:srgbClr val="FFFFFF"/>
-                </a:solidFill>
-                <a:latin typeface="Microsoft JhengHei"/>
-              </a:rPr>
-              <a:t>駁回</a:t>
-            </a:r>
-          </a:p>
-        </p:txBody>
-      </p:sp>
-      <p:sp>
-        <p:nvSpPr>
-          <p:cNvPr id="20" name="TextBox 19"/>
-          <p:cNvSpPr txBox="1"/>
-          <p:nvPr/>
-        </p:nvSpPr>
-        <p:spPr>
-          <a:xfrm>
-            <a:off x="4526280" y="3154680"/>
-            <a:ext cx="3108960" cy="2103120"/>
-          </a:xfrm>
-          <a:prstGeom prst="rect">
-            <a:avLst/>
-          </a:prstGeom>
-          <a:noFill/>
-        </p:spPr>
-        <p:txBody>
-          <a:bodyPr wrap="square" anchor="t" lIns="45720" rIns="45720" tIns="27432" bIns="27432">
-            <a:spAutoFit/>
-          </a:bodyPr>
-          <a:lstStyle/>
-          <a:p>
-            <a:pPr algn="l"/>
-            <a:r>
-              <a:rPr sz="1350" b="0">
-                <a:solidFill>
-                  <a:srgbClr val="334455"/>
-                </a:solidFill>
-                <a:latin typeface="Microsoft JhengHei"/>
-              </a:rPr>
-              <a:t>影片 00:14 拋擲、00:19 煙蒂還在；訴願書寫的收受日和送達證書差 2 天，要以證書為準。</a:t>
-            </a:r>
-          </a:p>
-        </p:txBody>
-      </p:sp>
-      <p:sp>
-        <p:nvSpPr>
-          <p:cNvPr id="21" name="Rounded Rectangle 20"/>
-          <p:cNvSpPr/>
-          <p:nvPr/>
-        </p:nvSpPr>
-        <p:spPr>
-          <a:xfrm>
-            <a:off x="8010144" y="1554480"/>
-            <a:ext cx="3520440" cy="3840480"/>
-          </a:xfrm>
-          <a:prstGeom prst="roundRect">
-            <a:avLst>
-              <a:gd name="adj" fmla="val 8000"/>
-            </a:avLst>
-          </a:prstGeom>
-          <a:solidFill>
-            <a:srgbClr val="FFFFFF"/>
-          </a:solidFill>
-          <a:ln w="19050">
-            <a:solidFill>
-              <a:srgbClr val="DDE3EA"/>
-            </a:solidFill>
-          </a:ln>
-          <a:effectLst/>
-        </p:spPr>
-        <p:style>
-          <a:lnRef idx="1">
-            <a:schemeClr val="accent1"/>
-          </a:lnRef>
-          <a:fillRef idx="3">
-            <a:schemeClr val="accent1"/>
-          </a:fillRef>
-          <a:effectRef idx="2">
-            <a:schemeClr val="accent1"/>
-          </a:effectRef>
-          <a:fontRef idx="minor">
-            <a:schemeClr val="lt1"/>
-          </a:fontRef>
-        </p:style>
-        <p:txBody>
-          <a:bodyPr rtlCol="0" anchor="ctr"/>
-          <a:lstStyle/>
-          <a:p>
-            <a:pPr algn="ctr"/>
-          </a:p>
-        </p:txBody>
-      </p:sp>
-      <p:sp>
-        <p:nvSpPr>
-          <p:cNvPr id="22" name="TextBox 21"/>
-          <p:cNvSpPr txBox="1"/>
-          <p:nvPr/>
-        </p:nvSpPr>
-        <p:spPr>
-          <a:xfrm>
-            <a:off x="8211312" y="1691640"/>
-            <a:ext cx="3108960" cy="320040"/>
-          </a:xfrm>
-          <a:prstGeom prst="rect">
-            <a:avLst/>
-          </a:prstGeom>
-          <a:noFill/>
-        </p:spPr>
-        <p:txBody>
-          <a:bodyPr wrap="square" anchor="t" lIns="45720" rIns="45720" tIns="27432" bIns="27432">
-            <a:spAutoFit/>
-          </a:bodyPr>
-          <a:lstStyle/>
-          <a:p>
-            <a:pPr algn="l"/>
-            <a:r>
-              <a:rPr sz="1050" b="1">
-                <a:solidFill>
-                  <a:srgbClr val="D98E04"/>
-                </a:solidFill>
-                <a:latin typeface="Microsoft JhengHei"/>
-              </a:rPr>
-              <a:t>CASE 03 ／ 建築法</a:t>
-            </a:r>
-          </a:p>
-        </p:txBody>
-      </p:sp>
-      <p:sp>
-        <p:nvSpPr>
-          <p:cNvPr id="23" name="TextBox 22"/>
-          <p:cNvSpPr txBox="1"/>
-          <p:nvPr/>
-        </p:nvSpPr>
-        <p:spPr>
-          <a:xfrm>
-            <a:off x="8211312" y="2011680"/>
-            <a:ext cx="3108960" cy="502920"/>
-          </a:xfrm>
-          <a:prstGeom prst="rect">
-            <a:avLst/>
-          </a:prstGeom>
-          <a:noFill/>
-        </p:spPr>
-        <p:txBody>
-          <a:bodyPr wrap="square" anchor="t" lIns="45720" rIns="45720" tIns="27432" bIns="27432">
-            <a:spAutoFit/>
-          </a:bodyPr>
-          <a:lstStyle/>
-          <a:p>
-            <a:pPr algn="l"/>
-            <a:r>
-              <a:rPr sz="2000" b="1">
-                <a:solidFill>
-                  <a:srgbClr val="16304F"/>
-                </a:solidFill>
-                <a:latin typeface="Microsoft JhengHei"/>
-              </a:rPr>
-              <a:t>政府遲了 26 天才罰</a:t>
-            </a:r>
-          </a:p>
-        </p:txBody>
-      </p:sp>
-      <p:sp>
-        <p:nvSpPr>
-          <p:cNvPr id="24" name="Rounded Rectangle 23"/>
-          <p:cNvSpPr/>
-          <p:nvPr/>
-        </p:nvSpPr>
-        <p:spPr>
-          <a:xfrm>
-            <a:off x="8211312" y="2606040"/>
-            <a:ext cx="1188720" cy="411480"/>
-          </a:xfrm>
-          <a:prstGeom prst="roundRect">
-            <a:avLst>
-              <a:gd name="adj" fmla="val 8000"/>
-            </a:avLst>
-          </a:prstGeom>
-          <a:solidFill>
-            <a:srgbClr val="16304F"/>
-          </a:solidFill>
-          <a:ln>
-            <a:noFill/>
-          </a:ln>
-          <a:effectLst/>
-        </p:spPr>
-        <p:style>
-          <a:lnRef idx="1">
-            <a:schemeClr val="accent1"/>
-          </a:lnRef>
-          <a:fillRef idx="3">
-            <a:schemeClr val="accent1"/>
-          </a:fillRef>
-          <a:effectRef idx="2">
-            <a:schemeClr val="accent1"/>
-          </a:effectRef>
-          <a:fontRef idx="minor">
-            <a:schemeClr val="lt1"/>
-          </a:fontRef>
-        </p:style>
-        <p:txBody>
-          <a:bodyPr rtlCol="0" anchor="ctr"/>
-          <a:lstStyle/>
-          <a:p>
-            <a:pPr algn="ctr"/>
-          </a:p>
-        </p:txBody>
-      </p:sp>
-      <p:sp>
-        <p:nvSpPr>
-          <p:cNvPr id="25" name="TextBox 24"/>
-          <p:cNvSpPr txBox="1"/>
-          <p:nvPr/>
-        </p:nvSpPr>
-        <p:spPr>
-          <a:xfrm>
-            <a:off x="8211312" y="2606040"/>
-            <a:ext cx="1188720" cy="411480"/>
-          </a:xfrm>
-          <a:prstGeom prst="rect">
-            <a:avLst/>
-          </a:prstGeom>
-          <a:noFill/>
-        </p:spPr>
-        <p:txBody>
-          <a:bodyPr wrap="square" anchor="ctr" lIns="45720" rIns="45720" tIns="27432" bIns="27432">
-            <a:spAutoFit/>
-          </a:bodyPr>
-          <a:lstStyle/>
-          <a:p>
-            <a:pPr algn="ctr"/>
-            <a:r>
-              <a:rPr sz="1500" b="1">
-                <a:solidFill>
-                  <a:srgbClr val="FFFFFF"/>
-                </a:solidFill>
-                <a:latin typeface="Microsoft JhengHei"/>
-              </a:rPr>
-              <a:t>撤銷</a:t>
-            </a:r>
-          </a:p>
-        </p:txBody>
-      </p:sp>
-      <p:sp>
-        <p:nvSpPr>
-          <p:cNvPr id="26" name="TextBox 25"/>
-          <p:cNvSpPr txBox="1"/>
-          <p:nvPr/>
-        </p:nvSpPr>
-        <p:spPr>
-          <a:xfrm>
-            <a:off x="8211312" y="3154680"/>
-            <a:ext cx="3108960" cy="2103120"/>
-          </a:xfrm>
-          <a:prstGeom prst="rect">
-            <a:avLst/>
-          </a:prstGeom>
-          <a:noFill/>
-        </p:spPr>
-        <p:txBody>
-          <a:bodyPr wrap="square" anchor="t" lIns="45720" rIns="45720" tIns="27432" bIns="27432">
-            <a:spAutoFit/>
-          </a:bodyPr>
-          <a:lstStyle/>
-          <a:p>
-            <a:pPr algn="l"/>
-            <a:r>
-              <a:rPr sz="1350" b="0">
-                <a:solidFill>
-                  <a:srgbClr val="334455"/>
-                </a:solidFill>
-                <a:latin typeface="Microsoft JhengHei"/>
-              </a:rPr>
-              <a:t>簽證不實證據很強，但三年裁處權時效已過；答辯書迴避不答，系統必須自行從卷內算出時效。</a:t>
-            </a:r>
-          </a:p>
-        </p:txBody>
-      </p:sp>
-      <p:sp>
-        <p:nvSpPr>
-          <p:cNvPr id="27" name="Rectangle 26"/>
-          <p:cNvSpPr/>
-          <p:nvPr/>
-        </p:nvSpPr>
-        <p:spPr>
-          <a:xfrm>
-            <a:off x="640080" y="5623560"/>
-            <a:ext cx="10908792" cy="566928"/>
-          </a:xfrm>
-          <a:prstGeom prst="rect">
-            <a:avLst/>
-          </a:prstGeom>
-          <a:solidFill>
-            <a:srgbClr val="FFF8EA"/>
-          </a:solidFill>
-          <a:ln>
-            <a:noFill/>
-          </a:ln>
-          <a:effectLst/>
-        </p:spPr>
-        <p:style>
-          <a:lnRef idx="1">
-            <a:schemeClr val="accent1"/>
-          </a:lnRef>
-          <a:fillRef idx="3">
-            <a:schemeClr val="accent1"/>
-          </a:fillRef>
-          <a:effectRef idx="2">
-            <a:schemeClr val="accent1"/>
-          </a:effectRef>
-          <a:fontRef idx="minor">
-            <a:schemeClr val="lt1"/>
-          </a:fontRef>
-        </p:style>
-        <p:txBody>
-          <a:bodyPr rtlCol="0" anchor="ctr"/>
-          <a:lstStyle/>
-          <a:p>
-            <a:pPr algn="ctr"/>
-          </a:p>
-        </p:txBody>
-      </p:sp>
-      <p:sp>
-        <p:nvSpPr>
-          <p:cNvPr id="28" name="Rectangle 27"/>
-          <p:cNvSpPr/>
-          <p:nvPr/>
-        </p:nvSpPr>
-        <p:spPr>
-          <a:xfrm>
-            <a:off x="640080" y="5623560"/>
-            <a:ext cx="64008" cy="566928"/>
+            <a:off x="914400" y="4480560"/>
+            <a:ext cx="45720" cy="685800"/>
           </a:xfrm>
           <a:prstGeom prst="rect">
             <a:avLst/>
@@ -13308,14 +12760,14 @@
       </p:sp>
       <p:sp>
         <p:nvSpPr>
-          <p:cNvPr id="29" name="TextBox 28"/>
+          <p:cNvPr id="9" name="TextBox 8"/>
           <p:cNvSpPr txBox="1"/>
           <p:nvPr/>
         </p:nvSpPr>
         <p:spPr>
           <a:xfrm>
-            <a:off x="822960" y="5641848"/>
-            <a:ext cx="10607040" cy="548640"/>
+            <a:off x="1051560" y="4434840"/>
+            <a:ext cx="9144000" cy="822960"/>
           </a:xfrm>
           <a:prstGeom prst="rect">
             <a:avLst/>
@@ -13323,20 +12775,20 @@
           <a:noFill/>
         </p:spPr>
         <p:txBody>
-          <a:bodyPr wrap="square" anchor="ctr" lIns="45720" rIns="45720" tIns="27432" bIns="27432">
+          <a:bodyPr wrap="square" anchor="t" lIns="45720" rIns="45720" tIns="27432" bIns="27432">
             <a:spAutoFit/>
           </a:bodyPr>
           <a:lstStyle/>
           <a:p>
             <a:pPr algn="l"/>
             <a:r>
-              <a:rPr sz="1350" b="0">
-                <a:solidFill>
-                  <a:srgbClr val="334455"/>
-                </a:solidFill>
-                <a:latin typeface="Microsoft JhengHei"/>
-              </a:rPr>
-              <a:t>每案 30 頁真實格式卷宗（掃描、手寫、系統截圖、影片）；對應決定書從知識庫排除，系統不能「認出答案」。</a:t>
+              <a:rPr sz="1700" b="0">
+                <a:solidFill>
+                  <a:srgbClr val="E6EDF5"/>
+                </a:solidFill>
+                <a:latin typeface="Microsoft JhengHei"/>
+              </a:rPr>
+              <a:t>Live Demo　http://100.20.156.38/　　GitHub　完整原始碼＋三套考題</a:t>
             </a:r>
           </a:p>
         </p:txBody>

--- a/docs/提案/提案簡報-訴願智審臺.pptx
+++ b/docs/提案/提案簡報-訴願智審臺.pptx
@@ -13,7 +13,6 @@
     <p:sldId id="261" r:id="rId12"/>
     <p:sldId id="262" r:id="rId13"/>
     <p:sldId id="263" r:id="rId14"/>
-    <p:sldId id="264" r:id="rId15"/>
   </p:sldIdLst>
   <p:sldSz cx="12191695" cy="6858000" type="screen4x3"/>
   <p:notesSz cx="6858000" cy="9144000"/>
@@ -3767,7 +3766,7 @@
                 </a:solidFill>
                 <a:latin typeface="Microsoft JhengHei"/>
               </a:rPr>
-              <a:t>2 / 9</a:t>
+              <a:t>2 / 8</a:t>
             </a:r>
           </a:p>
         </p:txBody>
@@ -4593,7 +4592,7 @@
                 </a:solidFill>
                 <a:latin typeface="Microsoft JhengHei"/>
               </a:rPr>
-              <a:t>3 / 9</a:t>
+              <a:t>3 / 8</a:t>
             </a:r>
           </a:p>
         </p:txBody>
@@ -5851,7 +5850,7 @@
                 </a:solidFill>
                 <a:latin typeface="Microsoft JhengHei"/>
               </a:rPr>
-              <a:t>4 / 9</a:t>
+              <a:t>4 / 8</a:t>
             </a:r>
           </a:p>
         </p:txBody>
@@ -6819,7 +6818,7 @@
                 </a:solidFill>
                 <a:latin typeface="Microsoft JhengHei"/>
               </a:rPr>
-              <a:t>5 / 9</a:t>
+              <a:t>5 / 8</a:t>
             </a:r>
           </a:p>
         </p:txBody>
@@ -6833,7 +6832,7 @@
         <p:spPr>
           <a:xfrm>
             <a:off x="640080" y="1463040"/>
-            <a:ext cx="1481328" cy="3017520"/>
+            <a:ext cx="1481328" cy="3108960"/>
           </a:xfrm>
           <a:prstGeom prst="roundRect">
             <a:avLst>
@@ -7083,257 +7082,7 @@
         <p:spPr>
           <a:xfrm>
             <a:off x="2203704" y="1463040"/>
-            <a:ext cx="1481328" cy="3017520"/>
-          </a:xfrm>
-          <a:prstGeom prst="roundRect">
-            <a:avLst>
-              <a:gd name="adj" fmla="val 8000"/>
-            </a:avLst>
-          </a:prstGeom>
-          <a:solidFill>
-            <a:srgbClr val="F2F8F3"/>
-          </a:solidFill>
-          <a:ln w="19050">
-            <a:solidFill>
-              <a:srgbClr val="2E7D32"/>
-            </a:solidFill>
-          </a:ln>
-          <a:effectLst/>
-        </p:spPr>
-        <p:style>
-          <a:lnRef idx="1">
-            <a:schemeClr val="accent1"/>
-          </a:lnRef>
-          <a:fillRef idx="3">
-            <a:schemeClr val="accent1"/>
-          </a:fillRef>
-          <a:effectRef idx="2">
-            <a:schemeClr val="accent1"/>
-          </a:effectRef>
-          <a:fontRef idx="minor">
-            <a:schemeClr val="lt1"/>
-          </a:fontRef>
-        </p:style>
-        <p:txBody>
-          <a:bodyPr rtlCol="0" anchor="ctr"/>
-          <a:lstStyle/>
-          <a:p>
-            <a:pPr algn="ctr"/>
-          </a:p>
-        </p:txBody>
-      </p:sp>
-      <p:sp>
-        <p:nvSpPr>
-          <p:cNvPr id="16" name="Oval 15"/>
-          <p:cNvSpPr/>
-          <p:nvPr/>
-        </p:nvSpPr>
-        <p:spPr>
-          <a:xfrm>
-            <a:off x="2313432" y="1572768"/>
-            <a:ext cx="292608" cy="292608"/>
-          </a:xfrm>
-          <a:prstGeom prst="ellipse">
-            <a:avLst/>
-          </a:prstGeom>
-          <a:solidFill>
-            <a:srgbClr val="2E7D32"/>
-          </a:solidFill>
-          <a:ln>
-            <a:noFill/>
-          </a:ln>
-          <a:effectLst/>
-        </p:spPr>
-        <p:style>
-          <a:lnRef idx="1">
-            <a:schemeClr val="accent1"/>
-          </a:lnRef>
-          <a:fillRef idx="3">
-            <a:schemeClr val="accent1"/>
-          </a:fillRef>
-          <a:effectRef idx="2">
-            <a:schemeClr val="accent1"/>
-          </a:effectRef>
-          <a:fontRef idx="minor">
-            <a:schemeClr val="lt1"/>
-          </a:fontRef>
-        </p:style>
-        <p:txBody>
-          <a:bodyPr rtlCol="0" anchor="ctr" lIns="0" rIns="0" tIns="0" bIns="0"/>
-          <a:lstStyle/>
-          <a:p>
-            <a:pPr algn="ctr"/>
-            <a:r>
-              <a:rPr sz="1100" b="1">
-                <a:solidFill>
-                  <a:srgbClr val="FFFFFF"/>
-                </a:solidFill>
-                <a:latin typeface="Microsoft JhengHei"/>
-              </a:rPr>
-              <a:t>2</a:t>
-            </a:r>
-          </a:p>
-        </p:txBody>
-      </p:sp>
-      <p:sp>
-        <p:nvSpPr>
-          <p:cNvPr id="17" name="TextBox 16"/>
-          <p:cNvSpPr txBox="1"/>
-          <p:nvPr/>
-        </p:nvSpPr>
-        <p:spPr>
-          <a:xfrm>
-            <a:off x="2276856" y="1920240"/>
-            <a:ext cx="1353312" cy="411480"/>
-          </a:xfrm>
-          <a:prstGeom prst="rect">
-            <a:avLst/>
-          </a:prstGeom>
-          <a:noFill/>
-        </p:spPr>
-        <p:txBody>
-          <a:bodyPr wrap="square" anchor="t" lIns="45720" rIns="45720" tIns="27432" bIns="27432">
-            <a:spAutoFit/>
-          </a:bodyPr>
-          <a:lstStyle/>
-          <a:p>
-            <a:pPr algn="l"/>
-            <a:r>
-              <a:rPr sz="1350" b="1">
-                <a:solidFill>
-                  <a:srgbClr val="16304F"/>
-                </a:solidFill>
-                <a:latin typeface="Microsoft JhengHei"/>
-              </a:rPr>
-              <a:t>期間・程序</a:t>
-            </a:r>
-          </a:p>
-        </p:txBody>
-      </p:sp>
-      <p:sp>
-        <p:nvSpPr>
-          <p:cNvPr id="18" name="TextBox 17"/>
-          <p:cNvSpPr txBox="1"/>
-          <p:nvPr/>
-        </p:nvSpPr>
-        <p:spPr>
-          <a:xfrm>
-            <a:off x="2276856" y="2331720"/>
-            <a:ext cx="1353312" cy="731520"/>
-          </a:xfrm>
-          <a:prstGeom prst="rect">
-            <a:avLst/>
-          </a:prstGeom>
-          <a:noFill/>
-        </p:spPr>
-        <p:txBody>
-          <a:bodyPr wrap="square" anchor="t" lIns="45720" rIns="45720" tIns="27432" bIns="27432">
-            <a:spAutoFit/>
-          </a:bodyPr>
-          <a:lstStyle/>
-          <a:p>
-            <a:pPr algn="l"/>
-            <a:r>
-              <a:rPr sz="1100" b="0">
-                <a:solidFill>
-                  <a:srgbClr val="0F2038"/>
-                </a:solidFill>
-                <a:latin typeface="Microsoft JhengHei"/>
-              </a:rPr>
-              <a:t>屆滿日、八款檢核</a:t>
-            </a:r>
-          </a:p>
-        </p:txBody>
-      </p:sp>
-      <p:sp>
-        <p:nvSpPr>
-          <p:cNvPr id="19" name="Rectangle 18"/>
-          <p:cNvSpPr/>
-          <p:nvPr/>
-        </p:nvSpPr>
-        <p:spPr>
-          <a:xfrm>
-            <a:off x="2313432" y="3291840"/>
-            <a:ext cx="1261872" cy="9144"/>
-          </a:xfrm>
-          <a:prstGeom prst="rect">
-            <a:avLst/>
-          </a:prstGeom>
-          <a:solidFill>
-            <a:srgbClr val="E6EAF0"/>
-          </a:solidFill>
-          <a:ln>
-            <a:noFill/>
-          </a:ln>
-          <a:effectLst/>
-        </p:spPr>
-        <p:style>
-          <a:lnRef idx="1">
-            <a:schemeClr val="accent1"/>
-          </a:lnRef>
-          <a:fillRef idx="3">
-            <a:schemeClr val="accent1"/>
-          </a:fillRef>
-          <a:effectRef idx="2">
-            <a:schemeClr val="accent1"/>
-          </a:effectRef>
-          <a:fontRef idx="minor">
-            <a:schemeClr val="lt1"/>
-          </a:fontRef>
-        </p:style>
-        <p:txBody>
-          <a:bodyPr rtlCol="0" anchor="ctr"/>
-          <a:lstStyle/>
-          <a:p>
-            <a:pPr algn="ctr"/>
-          </a:p>
-        </p:txBody>
-      </p:sp>
-      <p:sp>
-        <p:nvSpPr>
-          <p:cNvPr id="20" name="TextBox 19"/>
-          <p:cNvSpPr txBox="1"/>
-          <p:nvPr/>
-        </p:nvSpPr>
-        <p:spPr>
-          <a:xfrm>
-            <a:off x="2276856" y="3364992"/>
-            <a:ext cx="1353312" cy="1005840"/>
-          </a:xfrm>
-          <a:prstGeom prst="rect">
-            <a:avLst/>
-          </a:prstGeom>
-          <a:noFill/>
-        </p:spPr>
-        <p:txBody>
-          <a:bodyPr wrap="square" anchor="t" lIns="45720" rIns="45720" tIns="27432" bIns="27432">
-            <a:spAutoFit/>
-          </a:bodyPr>
-          <a:lstStyle/>
-          <a:p>
-            <a:pPr algn="l"/>
-            <a:r>
-              <a:rPr sz="1000" b="0">
-                <a:solidFill>
-                  <a:srgbClr val="8A93A0"/>
-                </a:solidFill>
-                <a:latin typeface="Microsoft JhengHei"/>
-              </a:rPr>
-              <a:t>依據 送達證書（程式計算）</a:t>
-            </a:r>
-          </a:p>
-        </p:txBody>
-      </p:sp>
-      <p:sp>
-        <p:nvSpPr>
-          <p:cNvPr id="21" name="Rounded Rectangle 20"/>
-          <p:cNvSpPr/>
-          <p:nvPr/>
-        </p:nvSpPr>
-        <p:spPr>
-          <a:xfrm>
-            <a:off x="3767328" y="1463040"/>
-            <a:ext cx="1481328" cy="3017520"/>
+            <a:ext cx="1481328" cy="3108960"/>
           </a:xfrm>
           <a:prstGeom prst="roundRect">
             <a:avLst>
@@ -7374,13 +7123,13 @@
       </p:sp>
       <p:sp>
         <p:nvSpPr>
-          <p:cNvPr id="22" name="Oval 21"/>
+          <p:cNvPr id="16" name="Oval 15"/>
           <p:cNvSpPr/>
           <p:nvPr/>
         </p:nvSpPr>
         <p:spPr>
           <a:xfrm>
-            <a:off x="3877056" y="1572768"/>
+            <a:off x="2313432" y="1572768"/>
             <a:ext cx="292608" cy="292608"/>
           </a:xfrm>
           <a:prstGeom prst="ellipse">
@@ -7420,20 +7169,20 @@
                 </a:solidFill>
                 <a:latin typeface="Microsoft JhengHei"/>
               </a:rPr>
-              <a:t>3</a:t>
-            </a:r>
-          </a:p>
-        </p:txBody>
-      </p:sp>
-      <p:sp>
-        <p:nvSpPr>
-          <p:cNvPr id="23" name="TextBox 22"/>
+              <a:t>2</a:t>
+            </a:r>
+          </a:p>
+        </p:txBody>
+      </p:sp>
+      <p:sp>
+        <p:nvSpPr>
+          <p:cNvPr id="17" name="TextBox 16"/>
           <p:cNvSpPr txBox="1"/>
           <p:nvPr/>
         </p:nvSpPr>
         <p:spPr>
           <a:xfrm>
-            <a:off x="3840480" y="1920240"/>
+            <a:off x="2276856" y="1920240"/>
             <a:ext cx="1353312" cy="411480"/>
           </a:xfrm>
           <a:prstGeom prst="rect">
@@ -7455,20 +7204,20 @@
                 </a:solidFill>
                 <a:latin typeface="Microsoft JhengHei"/>
               </a:rPr>
-              <a:t>整理爭點</a:t>
-            </a:r>
-          </a:p>
-        </p:txBody>
-      </p:sp>
-      <p:sp>
-        <p:nvSpPr>
-          <p:cNvPr id="24" name="TextBox 23"/>
+              <a:t>期間・程序</a:t>
+            </a:r>
+          </a:p>
+        </p:txBody>
+      </p:sp>
+      <p:sp>
+        <p:nvSpPr>
+          <p:cNvPr id="18" name="TextBox 17"/>
           <p:cNvSpPr txBox="1"/>
           <p:nvPr/>
         </p:nvSpPr>
         <p:spPr>
           <a:xfrm>
-            <a:off x="3840480" y="2331720"/>
+            <a:off x="2276856" y="2331720"/>
             <a:ext cx="1353312" cy="731520"/>
           </a:xfrm>
           <a:prstGeom prst="rect">
@@ -7490,20 +7239,20 @@
                 </a:solidFill>
                 <a:latin typeface="Microsoft JhengHei"/>
               </a:rPr>
-              <a:t>爭點＋AI 認定＋依據</a:t>
-            </a:r>
-          </a:p>
-        </p:txBody>
-      </p:sp>
-      <p:sp>
-        <p:nvSpPr>
-          <p:cNvPr id="25" name="Rectangle 24"/>
+              <a:t>屆滿日、八款檢核</a:t>
+            </a:r>
+          </a:p>
+        </p:txBody>
+      </p:sp>
+      <p:sp>
+        <p:nvSpPr>
+          <p:cNvPr id="19" name="Rectangle 18"/>
           <p:cNvSpPr/>
           <p:nvPr/>
         </p:nvSpPr>
         <p:spPr>
           <a:xfrm>
-            <a:off x="3877056" y="3291840"/>
+            <a:off x="2313432" y="3291840"/>
             <a:ext cx="1261872" cy="9144"/>
           </a:xfrm>
           <a:prstGeom prst="rect">
@@ -7541,13 +7290,13 @@
       </p:sp>
       <p:sp>
         <p:nvSpPr>
-          <p:cNvPr id="26" name="TextBox 25"/>
+          <p:cNvPr id="20" name="TextBox 19"/>
           <p:cNvSpPr txBox="1"/>
           <p:nvPr/>
         </p:nvSpPr>
         <p:spPr>
           <a:xfrm>
-            <a:off x="3840480" y="3364992"/>
+            <a:off x="2276856" y="3364992"/>
             <a:ext cx="1353312" cy="1005840"/>
           </a:xfrm>
           <a:prstGeom prst="rect">
@@ -7569,21 +7318,21 @@
                 </a:solidFill>
                 <a:latin typeface="Microsoft JhengHei"/>
               </a:rPr>
-              <a:t>依據 訴願書 vs 答辯書 vs 卷證</a:t>
-            </a:r>
-          </a:p>
-        </p:txBody>
-      </p:sp>
-      <p:sp>
-        <p:nvSpPr>
-          <p:cNvPr id="27" name="Rounded Rectangle 26"/>
+              <a:t>依據 送達證書（程式計算）</a:t>
+            </a:r>
+          </a:p>
+        </p:txBody>
+      </p:sp>
+      <p:sp>
+        <p:nvSpPr>
+          <p:cNvPr id="21" name="Rounded Rectangle 20"/>
           <p:cNvSpPr/>
           <p:nvPr/>
         </p:nvSpPr>
         <p:spPr>
           <a:xfrm>
-            <a:off x="5330952" y="1463040"/>
-            <a:ext cx="1481328" cy="3017520"/>
+            <a:off x="3767328" y="1463040"/>
+            <a:ext cx="1481328" cy="3108960"/>
           </a:xfrm>
           <a:prstGeom prst="roundRect">
             <a:avLst>
@@ -7624,13 +7373,13 @@
       </p:sp>
       <p:sp>
         <p:nvSpPr>
-          <p:cNvPr id="28" name="Oval 27"/>
+          <p:cNvPr id="22" name="Oval 21"/>
           <p:cNvSpPr/>
           <p:nvPr/>
         </p:nvSpPr>
         <p:spPr>
           <a:xfrm>
-            <a:off x="5440680" y="1572768"/>
+            <a:off x="3877056" y="1572768"/>
             <a:ext cx="292608" cy="292608"/>
           </a:xfrm>
           <a:prstGeom prst="ellipse">
@@ -7670,20 +7419,20 @@
                 </a:solidFill>
                 <a:latin typeface="Microsoft JhengHei"/>
               </a:rPr>
-              <a:t>4</a:t>
-            </a:r>
-          </a:p>
-        </p:txBody>
-      </p:sp>
-      <p:sp>
-        <p:nvSpPr>
-          <p:cNvPr id="29" name="TextBox 28"/>
+              <a:t>3</a:t>
+            </a:r>
+          </a:p>
+        </p:txBody>
+      </p:sp>
+      <p:sp>
+        <p:nvSpPr>
+          <p:cNvPr id="23" name="TextBox 22"/>
           <p:cNvSpPr txBox="1"/>
           <p:nvPr/>
         </p:nvSpPr>
         <p:spPr>
           <a:xfrm>
-            <a:off x="5404104" y="1920240"/>
+            <a:off x="3840480" y="1920240"/>
             <a:ext cx="1353312" cy="411480"/>
           </a:xfrm>
           <a:prstGeom prst="rect">
@@ -7705,20 +7454,20 @@
                 </a:solidFill>
                 <a:latin typeface="Microsoft JhengHei"/>
               </a:rPr>
-              <a:t>找法規</a:t>
-            </a:r>
-          </a:p>
-        </p:txBody>
-      </p:sp>
-      <p:sp>
-        <p:nvSpPr>
-          <p:cNvPr id="30" name="TextBox 29"/>
+              <a:t>整理爭點</a:t>
+            </a:r>
+          </a:p>
+        </p:txBody>
+      </p:sp>
+      <p:sp>
+        <p:nvSpPr>
+          <p:cNvPr id="24" name="TextBox 23"/>
           <p:cNvSpPr txBox="1"/>
           <p:nvPr/>
         </p:nvSpPr>
         <p:spPr>
           <a:xfrm>
-            <a:off x="5404104" y="2331720"/>
+            <a:off x="3840480" y="2331720"/>
             <a:ext cx="1353312" cy="731520"/>
           </a:xfrm>
           <a:prstGeom prst="rect">
@@ -7740,20 +7489,20 @@
                 </a:solidFill>
                 <a:latin typeface="Microsoft JhengHei"/>
               </a:rPr>
-              <a:t>條文＋版本狀態</a:t>
-            </a:r>
-          </a:p>
-        </p:txBody>
-      </p:sp>
-      <p:sp>
-        <p:nvSpPr>
-          <p:cNvPr id="31" name="Rectangle 30"/>
+              <a:t>爭點＋AI 認定＋依據</a:t>
+            </a:r>
+          </a:p>
+        </p:txBody>
+      </p:sp>
+      <p:sp>
+        <p:nvSpPr>
+          <p:cNvPr id="25" name="Rectangle 24"/>
           <p:cNvSpPr/>
           <p:nvPr/>
         </p:nvSpPr>
         <p:spPr>
           <a:xfrm>
-            <a:off x="5440680" y="3291840"/>
+            <a:off x="3877056" y="3291840"/>
             <a:ext cx="1261872" cy="9144"/>
           </a:xfrm>
           <a:prstGeom prst="rect">
@@ -7791,13 +7540,13 @@
       </p:sp>
       <p:sp>
         <p:nvSpPr>
-          <p:cNvPr id="32" name="TextBox 31"/>
+          <p:cNvPr id="26" name="TextBox 25"/>
           <p:cNvSpPr txBox="1"/>
           <p:nvPr/>
         </p:nvSpPr>
         <p:spPr>
           <a:xfrm>
-            <a:off x="5404104" y="3364992"/>
+            <a:off x="3840480" y="3364992"/>
             <a:ext cx="1353312" cy="1005840"/>
           </a:xfrm>
           <a:prstGeom prst="rect">
@@ -7819,21 +7568,21 @@
                 </a:solidFill>
                 <a:latin typeface="Microsoft JhengHei"/>
               </a:rPr>
-              <a:t>依據 法規庫</a:t>
-            </a:r>
-          </a:p>
-        </p:txBody>
-      </p:sp>
-      <p:sp>
-        <p:nvSpPr>
-          <p:cNvPr id="33" name="Rounded Rectangle 32"/>
+              <a:t>依據 訴願書 vs 答辯書 vs 卷證</a:t>
+            </a:r>
+          </a:p>
+        </p:txBody>
+      </p:sp>
+      <p:sp>
+        <p:nvSpPr>
+          <p:cNvPr id="27" name="Rounded Rectangle 26"/>
           <p:cNvSpPr/>
           <p:nvPr/>
         </p:nvSpPr>
         <p:spPr>
           <a:xfrm>
-            <a:off x="6894576" y="1463040"/>
-            <a:ext cx="1481328" cy="3017520"/>
+            <a:off x="5330952" y="1463040"/>
+            <a:ext cx="1481328" cy="3108960"/>
           </a:xfrm>
           <a:prstGeom prst="roundRect">
             <a:avLst>
@@ -7874,13 +7623,13 @@
       </p:sp>
       <p:sp>
         <p:nvSpPr>
-          <p:cNvPr id="34" name="Oval 33"/>
+          <p:cNvPr id="28" name="Oval 27"/>
           <p:cNvSpPr/>
           <p:nvPr/>
         </p:nvSpPr>
         <p:spPr>
           <a:xfrm>
-            <a:off x="7004304" y="1572768"/>
+            <a:off x="5440680" y="1572768"/>
             <a:ext cx="292608" cy="292608"/>
           </a:xfrm>
           <a:prstGeom prst="ellipse">
@@ -7920,20 +7669,20 @@
                 </a:solidFill>
                 <a:latin typeface="Microsoft JhengHei"/>
               </a:rPr>
-              <a:t>5</a:t>
-            </a:r>
-          </a:p>
-        </p:txBody>
-      </p:sp>
-      <p:sp>
-        <p:nvSpPr>
-          <p:cNvPr id="35" name="TextBox 34"/>
+              <a:t>4</a:t>
+            </a:r>
+          </a:p>
+        </p:txBody>
+      </p:sp>
+      <p:sp>
+        <p:nvSpPr>
+          <p:cNvPr id="29" name="TextBox 28"/>
           <p:cNvSpPr txBox="1"/>
           <p:nvPr/>
         </p:nvSpPr>
         <p:spPr>
           <a:xfrm>
-            <a:off x="6967728" y="1920240"/>
+            <a:off x="5404104" y="1920240"/>
             <a:ext cx="1353312" cy="411480"/>
           </a:xfrm>
           <a:prstGeom prst="rect">
@@ -7955,20 +7704,20 @@
                 </a:solidFill>
                 <a:latin typeface="Microsoft JhengHei"/>
               </a:rPr>
-              <a:t>找相似案例</a:t>
-            </a:r>
-          </a:p>
-        </p:txBody>
-      </p:sp>
-      <p:sp>
-        <p:nvSpPr>
-          <p:cNvPr id="36" name="TextBox 35"/>
+              <a:t>找法規</a:t>
+            </a:r>
+          </a:p>
+        </p:txBody>
+      </p:sp>
+      <p:sp>
+        <p:nvSpPr>
+          <p:cNvPr id="30" name="TextBox 29"/>
           <p:cNvSpPr txBox="1"/>
           <p:nvPr/>
         </p:nvSpPr>
         <p:spPr>
           <a:xfrm>
-            <a:off x="6967728" y="2331720"/>
+            <a:off x="5404104" y="2331720"/>
             <a:ext cx="1353312" cy="731520"/>
           </a:xfrm>
           <a:prstGeom prst="rect">
@@ -7990,20 +7739,20 @@
                 </a:solidFill>
                 <a:latin typeface="Microsoft JhengHei"/>
               </a:rPr>
-              <a:t>3–5 案＋可借用段落</a:t>
-            </a:r>
-          </a:p>
-        </p:txBody>
-      </p:sp>
-      <p:sp>
-        <p:nvSpPr>
-          <p:cNvPr id="37" name="Rectangle 36"/>
+              <a:t>條文＋版本狀態</a:t>
+            </a:r>
+          </a:p>
+        </p:txBody>
+      </p:sp>
+      <p:sp>
+        <p:nvSpPr>
+          <p:cNvPr id="31" name="Rectangle 30"/>
           <p:cNvSpPr/>
           <p:nvPr/>
         </p:nvSpPr>
         <p:spPr>
           <a:xfrm>
-            <a:off x="7004304" y="3291840"/>
+            <a:off x="5440680" y="3291840"/>
             <a:ext cx="1261872" cy="9144"/>
           </a:xfrm>
           <a:prstGeom prst="rect">
@@ -8041,13 +7790,13 @@
       </p:sp>
       <p:sp>
         <p:nvSpPr>
-          <p:cNvPr id="38" name="TextBox 37"/>
+          <p:cNvPr id="32" name="TextBox 31"/>
           <p:cNvSpPr txBox="1"/>
           <p:nvPr/>
         </p:nvSpPr>
         <p:spPr>
           <a:xfrm>
-            <a:off x="6967728" y="3364992"/>
+            <a:off x="5404104" y="3364992"/>
             <a:ext cx="1353312" cy="1005840"/>
           </a:xfrm>
           <a:prstGeom prst="rect">
@@ -8069,21 +7818,21 @@
                 </a:solidFill>
                 <a:latin typeface="Microsoft JhengHei"/>
               </a:rPr>
-              <a:t>依據 案件庫</a:t>
-            </a:r>
-          </a:p>
-        </p:txBody>
-      </p:sp>
-      <p:sp>
-        <p:nvSpPr>
-          <p:cNvPr id="39" name="Rounded Rectangle 38"/>
+              <a:t>依據 法規庫</a:t>
+            </a:r>
+          </a:p>
+        </p:txBody>
+      </p:sp>
+      <p:sp>
+        <p:nvSpPr>
+          <p:cNvPr id="33" name="Rounded Rectangle 32"/>
           <p:cNvSpPr/>
           <p:nvPr/>
         </p:nvSpPr>
         <p:spPr>
           <a:xfrm>
-            <a:off x="8458200" y="1463040"/>
-            <a:ext cx="1481328" cy="3017520"/>
+            <a:off x="6894576" y="1463040"/>
+            <a:ext cx="1481328" cy="3108960"/>
           </a:xfrm>
           <a:prstGeom prst="roundRect">
             <a:avLst>
@@ -8124,13 +7873,13 @@
       </p:sp>
       <p:sp>
         <p:nvSpPr>
-          <p:cNvPr id="40" name="Oval 39"/>
+          <p:cNvPr id="34" name="Oval 33"/>
           <p:cNvSpPr/>
           <p:nvPr/>
         </p:nvSpPr>
         <p:spPr>
           <a:xfrm>
-            <a:off x="8567928" y="1572768"/>
+            <a:off x="7004304" y="1572768"/>
             <a:ext cx="292608" cy="292608"/>
           </a:xfrm>
           <a:prstGeom prst="ellipse">
@@ -8170,20 +7919,20 @@
                 </a:solidFill>
                 <a:latin typeface="Microsoft JhengHei"/>
               </a:rPr>
-              <a:t>6</a:t>
-            </a:r>
-          </a:p>
-        </p:txBody>
-      </p:sp>
-      <p:sp>
-        <p:nvSpPr>
-          <p:cNvPr id="41" name="TextBox 40"/>
+              <a:t>5</a:t>
+            </a:r>
+          </a:p>
+        </p:txBody>
+      </p:sp>
+      <p:sp>
+        <p:nvSpPr>
+          <p:cNvPr id="35" name="TextBox 34"/>
           <p:cNvSpPr txBox="1"/>
           <p:nvPr/>
         </p:nvSpPr>
         <p:spPr>
           <a:xfrm>
-            <a:off x="8531352" y="1920240"/>
+            <a:off x="6967728" y="1920240"/>
             <a:ext cx="1353312" cy="411480"/>
           </a:xfrm>
           <a:prstGeom prst="rect">
@@ -8205,20 +7954,20 @@
                 </a:solidFill>
                 <a:latin typeface="Microsoft JhengHei"/>
               </a:rPr>
-              <a:t>寫草稿</a:t>
-            </a:r>
-          </a:p>
-        </p:txBody>
-      </p:sp>
-      <p:sp>
-        <p:nvSpPr>
-          <p:cNvPr id="42" name="TextBox 41"/>
+              <a:t>找相似案例</a:t>
+            </a:r>
+          </a:p>
+        </p:txBody>
+      </p:sp>
+      <p:sp>
+        <p:nvSpPr>
+          <p:cNvPr id="36" name="TextBox 35"/>
           <p:cNvSpPr txBox="1"/>
           <p:nvPr/>
         </p:nvSpPr>
         <p:spPr>
           <a:xfrm>
-            <a:off x="8531352" y="2331720"/>
+            <a:off x="6967728" y="2331720"/>
             <a:ext cx="1353312" cy="731520"/>
           </a:xfrm>
           <a:prstGeom prst="rect">
@@ -8240,20 +7989,20 @@
                 </a:solidFill>
                 <a:latin typeface="Microsoft JhengHei"/>
               </a:rPr>
-              <a:t>主文・事實・理由</a:t>
-            </a:r>
-          </a:p>
-        </p:txBody>
-      </p:sp>
-      <p:sp>
-        <p:nvSpPr>
-          <p:cNvPr id="43" name="Rectangle 42"/>
+              <a:t>3–5 案＋可借用段落</a:t>
+            </a:r>
+          </a:p>
+        </p:txBody>
+      </p:sp>
+      <p:sp>
+        <p:nvSpPr>
+          <p:cNvPr id="37" name="Rectangle 36"/>
           <p:cNvSpPr/>
           <p:nvPr/>
         </p:nvSpPr>
         <p:spPr>
           <a:xfrm>
-            <a:off x="8567928" y="3291840"/>
+            <a:off x="7004304" y="3291840"/>
             <a:ext cx="1261872" cy="9144"/>
           </a:xfrm>
           <a:prstGeom prst="rect">
@@ -8291,13 +8040,13 @@
       </p:sp>
       <p:sp>
         <p:nvSpPr>
-          <p:cNvPr id="44" name="TextBox 43"/>
+          <p:cNvPr id="38" name="TextBox 37"/>
           <p:cNvSpPr txBox="1"/>
           <p:nvPr/>
         </p:nvSpPr>
         <p:spPr>
           <a:xfrm>
-            <a:off x="8531352" y="3364992"/>
+            <a:off x="6967728" y="3364992"/>
             <a:ext cx="1353312" cy="1005840"/>
           </a:xfrm>
           <a:prstGeom prst="rect">
@@ -8319,21 +8068,21 @@
                 </a:solidFill>
                 <a:latin typeface="Microsoft JhengHei"/>
               </a:rPr>
-              <a:t>依據 相似決定書理由段</a:t>
-            </a:r>
-          </a:p>
-        </p:txBody>
-      </p:sp>
-      <p:sp>
-        <p:nvSpPr>
-          <p:cNvPr id="45" name="Rounded Rectangle 44"/>
+              <a:t>依據 案件庫</a:t>
+            </a:r>
+          </a:p>
+        </p:txBody>
+      </p:sp>
+      <p:sp>
+        <p:nvSpPr>
+          <p:cNvPr id="39" name="Rounded Rectangle 38"/>
           <p:cNvSpPr/>
           <p:nvPr/>
         </p:nvSpPr>
         <p:spPr>
           <a:xfrm>
-            <a:off x="10021824" y="1463040"/>
-            <a:ext cx="1481328" cy="3017520"/>
+            <a:off x="8458200" y="1463040"/>
+            <a:ext cx="1481328" cy="3108960"/>
           </a:xfrm>
           <a:prstGeom prst="roundRect">
             <a:avLst>
@@ -8374,13 +8123,13 @@
       </p:sp>
       <p:sp>
         <p:nvSpPr>
-          <p:cNvPr id="46" name="Oval 45"/>
+          <p:cNvPr id="40" name="Oval 39"/>
           <p:cNvSpPr/>
           <p:nvPr/>
         </p:nvSpPr>
         <p:spPr>
           <a:xfrm>
-            <a:off x="10131551" y="1572768"/>
+            <a:off x="8567928" y="1572768"/>
             <a:ext cx="292608" cy="292608"/>
           </a:xfrm>
           <a:prstGeom prst="ellipse">
@@ -8420,20 +8169,20 @@
                 </a:solidFill>
                 <a:latin typeface="Microsoft JhengHei"/>
               </a:rPr>
-              <a:t>7</a:t>
-            </a:r>
-          </a:p>
-        </p:txBody>
-      </p:sp>
-      <p:sp>
-        <p:nvSpPr>
-          <p:cNvPr id="47" name="TextBox 46"/>
+              <a:t>6</a:t>
+            </a:r>
+          </a:p>
+        </p:txBody>
+      </p:sp>
+      <p:sp>
+        <p:nvSpPr>
+          <p:cNvPr id="41" name="TextBox 40"/>
           <p:cNvSpPr txBox="1"/>
           <p:nvPr/>
         </p:nvSpPr>
         <p:spPr>
           <a:xfrm>
-            <a:off x="10094976" y="1920240"/>
+            <a:off x="8531352" y="1920240"/>
             <a:ext cx="1353312" cy="411480"/>
           </a:xfrm>
           <a:prstGeom prst="rect">
@@ -8455,20 +8204,20 @@
                 </a:solidFill>
                 <a:latin typeface="Microsoft JhengHei"/>
               </a:rPr>
-              <a:t>承辦人修正</a:t>
-            </a:r>
-          </a:p>
-        </p:txBody>
-      </p:sp>
-      <p:sp>
-        <p:nvSpPr>
-          <p:cNvPr id="48" name="TextBox 47"/>
+              <a:t>寫草稿</a:t>
+            </a:r>
+          </a:p>
+        </p:txBody>
+      </p:sp>
+      <p:sp>
+        <p:nvSpPr>
+          <p:cNvPr id="42" name="TextBox 41"/>
           <p:cNvSpPr txBox="1"/>
           <p:nvPr/>
         </p:nvSpPr>
         <p:spPr>
           <a:xfrm>
-            <a:off x="10094976" y="2331720"/>
+            <a:off x="8531352" y="2331720"/>
             <a:ext cx="1353312" cy="731520"/>
           </a:xfrm>
           <a:prstGeom prst="rect">
@@ -8490,20 +8239,20 @@
                 </a:solidFill>
                 <a:latin typeface="Microsoft JhengHei"/>
               </a:rPr>
-              <a:t>草稿 v2</a:t>
-            </a:r>
-          </a:p>
-        </p:txBody>
-      </p:sp>
-      <p:sp>
-        <p:nvSpPr>
-          <p:cNvPr id="49" name="Rectangle 48"/>
+              <a:t>主文・事實・理由</a:t>
+            </a:r>
+          </a:p>
+        </p:txBody>
+      </p:sp>
+      <p:sp>
+        <p:nvSpPr>
+          <p:cNvPr id="43" name="Rectangle 42"/>
           <p:cNvSpPr/>
           <p:nvPr/>
         </p:nvSpPr>
         <p:spPr>
           <a:xfrm>
-            <a:off x="10131551" y="3291840"/>
+            <a:off x="8567928" y="3291840"/>
             <a:ext cx="1261872" cy="9144"/>
           </a:xfrm>
           <a:prstGeom prst="rect">
@@ -8541,13 +8290,13 @@
       </p:sp>
       <p:sp>
         <p:nvSpPr>
-          <p:cNvPr id="50" name="TextBox 49"/>
+          <p:cNvPr id="44" name="TextBox 43"/>
           <p:cNvSpPr txBox="1"/>
           <p:nvPr/>
         </p:nvSpPr>
         <p:spPr>
           <a:xfrm>
-            <a:off x="10094976" y="3364992"/>
+            <a:off x="8531352" y="3364992"/>
             <a:ext cx="1353312" cy="1005840"/>
           </a:xfrm>
           <a:prstGeom prst="rect">
@@ -8569,21 +8318,21 @@
                 </a:solidFill>
                 <a:latin typeface="Microsoft JhengHei"/>
               </a:rPr>
-              <a:t>依據 承辦人意見，只重算受影響步驟</a:t>
-            </a:r>
-          </a:p>
-        </p:txBody>
-      </p:sp>
-      <p:sp>
-        <p:nvSpPr>
-          <p:cNvPr id="51" name="Rounded Rectangle 50"/>
+              <a:t>依據 相似決定書理由段</a:t>
+            </a:r>
+          </a:p>
+        </p:txBody>
+      </p:sp>
+      <p:sp>
+        <p:nvSpPr>
+          <p:cNvPr id="45" name="Rounded Rectangle 44"/>
           <p:cNvSpPr/>
           <p:nvPr/>
         </p:nvSpPr>
         <p:spPr>
           <a:xfrm>
-            <a:off x="640080" y="4800600"/>
-            <a:ext cx="3520440" cy="1234440"/>
+            <a:off x="10021824" y="1463040"/>
+            <a:ext cx="1481328" cy="3108960"/>
           </a:xfrm>
           <a:prstGeom prst="roundRect">
             <a:avLst>
@@ -8591,7 +8340,53 @@
             </a:avLst>
           </a:prstGeom>
           <a:solidFill>
-            <a:srgbClr val="F4F6F9"/>
+            <a:srgbClr val="FFFFFF"/>
+          </a:solidFill>
+          <a:ln w="19050">
+            <a:solidFill>
+              <a:srgbClr val="DDE3EA"/>
+            </a:solidFill>
+          </a:ln>
+          <a:effectLst/>
+        </p:spPr>
+        <p:style>
+          <a:lnRef idx="1">
+            <a:schemeClr val="accent1"/>
+          </a:lnRef>
+          <a:fillRef idx="3">
+            <a:schemeClr val="accent1"/>
+          </a:fillRef>
+          <a:effectRef idx="2">
+            <a:schemeClr val="accent1"/>
+          </a:effectRef>
+          <a:fontRef idx="minor">
+            <a:schemeClr val="lt1"/>
+          </a:fontRef>
+        </p:style>
+        <p:txBody>
+          <a:bodyPr rtlCol="0" anchor="ctr"/>
+          <a:lstStyle/>
+          <a:p>
+            <a:pPr algn="ctr"/>
+          </a:p>
+        </p:txBody>
+      </p:sp>
+      <p:sp>
+        <p:nvSpPr>
+          <p:cNvPr id="46" name="Oval 45"/>
+          <p:cNvSpPr/>
+          <p:nvPr/>
+        </p:nvSpPr>
+        <p:spPr>
+          <a:xfrm>
+            <a:off x="10131551" y="1572768"/>
+            <a:ext cx="292608" cy="292608"/>
+          </a:xfrm>
+          <a:prstGeom prst="ellipse">
+            <a:avLst/>
+          </a:prstGeom>
+          <a:solidFill>
+            <a:srgbClr val="16304F"/>
           </a:solidFill>
           <a:ln>
             <a:noFill/>
@@ -8613,23 +8408,32 @@
           </a:fontRef>
         </p:style>
         <p:txBody>
-          <a:bodyPr rtlCol="0" anchor="ctr"/>
+          <a:bodyPr rtlCol="0" anchor="ctr" lIns="0" rIns="0" tIns="0" bIns="0"/>
           <a:lstStyle/>
           <a:p>
             <a:pPr algn="ctr"/>
-          </a:p>
-        </p:txBody>
-      </p:sp>
-      <p:sp>
-        <p:nvSpPr>
-          <p:cNvPr id="52" name="TextBox 51"/>
+            <a:r>
+              <a:rPr sz="1100" b="1">
+                <a:solidFill>
+                  <a:srgbClr val="FFFFFF"/>
+                </a:solidFill>
+                <a:latin typeface="Microsoft JhengHei"/>
+              </a:rPr>
+              <a:t>7</a:t>
+            </a:r>
+          </a:p>
+        </p:txBody>
+      </p:sp>
+      <p:sp>
+        <p:nvSpPr>
+          <p:cNvPr id="47" name="TextBox 46"/>
           <p:cNvSpPr txBox="1"/>
           <p:nvPr/>
         </p:nvSpPr>
         <p:spPr>
           <a:xfrm>
-            <a:off x="822959" y="4846320"/>
-            <a:ext cx="1371600" cy="1143000"/>
+            <a:off x="10094976" y="1920240"/>
+            <a:ext cx="1353312" cy="411480"/>
           </a:xfrm>
           <a:prstGeom prst="rect">
             <a:avLst/>
@@ -8637,34 +8441,34 @@
           <a:noFill/>
         </p:spPr>
         <p:txBody>
-          <a:bodyPr wrap="square" anchor="ctr" lIns="45720" rIns="45720" tIns="27432" bIns="27432">
+          <a:bodyPr wrap="square" anchor="t" lIns="45720" rIns="45720" tIns="27432" bIns="27432">
             <a:spAutoFit/>
           </a:bodyPr>
           <a:lstStyle/>
           <a:p>
             <a:pPr algn="l"/>
             <a:r>
-              <a:rPr sz="1800" b="1">
+              <a:rPr sz="1350" b="1">
                 <a:solidFill>
                   <a:srgbClr val="16304F"/>
                 </a:solidFill>
                 <a:latin typeface="Microsoft JhengHei"/>
               </a:rPr>
-              <a:t>結果留底</a:t>
-            </a:r>
-          </a:p>
-        </p:txBody>
-      </p:sp>
-      <p:sp>
-        <p:nvSpPr>
-          <p:cNvPr id="53" name="TextBox 52"/>
+              <a:t>承辦人修正</a:t>
+            </a:r>
+          </a:p>
+        </p:txBody>
+      </p:sp>
+      <p:sp>
+        <p:nvSpPr>
+          <p:cNvPr id="48" name="TextBox 47"/>
           <p:cNvSpPr txBox="1"/>
           <p:nvPr/>
         </p:nvSpPr>
         <p:spPr>
           <a:xfrm>
-            <a:off x="2194560" y="4846320"/>
-            <a:ext cx="1828800" cy="1143000"/>
+            <a:off x="10094976" y="2331720"/>
+            <a:ext cx="1353312" cy="731520"/>
           </a:xfrm>
           <a:prstGeom prst="rect">
             <a:avLst/>
@@ -8672,42 +8476,40 @@
           <a:noFill/>
         </p:spPr>
         <p:txBody>
-          <a:bodyPr wrap="square" anchor="ctr" lIns="45720" rIns="45720" tIns="27432" bIns="27432">
+          <a:bodyPr wrap="square" anchor="t" lIns="45720" rIns="45720" tIns="27432" bIns="27432">
             <a:spAutoFit/>
           </a:bodyPr>
           <a:lstStyle/>
           <a:p>
             <a:pPr algn="l"/>
             <a:r>
-              <a:rPr sz="1150" b="0">
-                <a:solidFill>
-                  <a:srgbClr val="334455"/>
-                </a:solidFill>
-                <a:latin typeface="Microsoft JhengHei"/>
-              </a:rPr>
-              <a:t>每一步的產出都保存，隨時回看</a:t>
-            </a:r>
-          </a:p>
-        </p:txBody>
-      </p:sp>
-      <p:sp>
-        <p:nvSpPr>
-          <p:cNvPr id="54" name="Rounded Rectangle 53"/>
+              <a:rPr sz="1100" b="0">
+                <a:solidFill>
+                  <a:srgbClr val="0F2038"/>
+                </a:solidFill>
+                <a:latin typeface="Microsoft JhengHei"/>
+              </a:rPr>
+              <a:t>草稿 v2</a:t>
+            </a:r>
+          </a:p>
+        </p:txBody>
+      </p:sp>
+      <p:sp>
+        <p:nvSpPr>
+          <p:cNvPr id="49" name="Rectangle 48"/>
           <p:cNvSpPr/>
           <p:nvPr/>
         </p:nvSpPr>
         <p:spPr>
           <a:xfrm>
-            <a:off x="4325112" y="4800600"/>
-            <a:ext cx="3520440" cy="1234440"/>
-          </a:xfrm>
-          <a:prstGeom prst="roundRect">
-            <a:avLst>
-              <a:gd name="adj" fmla="val 8000"/>
-            </a:avLst>
+            <a:off x="10131551" y="3291840"/>
+            <a:ext cx="1261872" cy="9144"/>
+          </a:xfrm>
+          <a:prstGeom prst="rect">
+            <a:avLst/>
           </a:prstGeom>
           <a:solidFill>
-            <a:srgbClr val="F4F6F9"/>
+            <a:srgbClr val="E6EAF0"/>
           </a:solidFill>
           <a:ln>
             <a:noFill/>
@@ -8738,14 +8540,14 @@
       </p:sp>
       <p:sp>
         <p:nvSpPr>
-          <p:cNvPr id="55" name="TextBox 54"/>
+          <p:cNvPr id="50" name="TextBox 49"/>
           <p:cNvSpPr txBox="1"/>
           <p:nvPr/>
         </p:nvSpPr>
         <p:spPr>
           <a:xfrm>
-            <a:off x="4507992" y="4846320"/>
-            <a:ext cx="1371600" cy="1143000"/>
+            <a:off x="10094976" y="3364992"/>
+            <a:ext cx="1353312" cy="1005840"/>
           </a:xfrm>
           <a:prstGeom prst="rect">
             <a:avLst/>
@@ -8753,171 +8555,20 @@
           <a:noFill/>
         </p:spPr>
         <p:txBody>
-          <a:bodyPr wrap="square" anchor="ctr" lIns="45720" rIns="45720" tIns="27432" bIns="27432">
+          <a:bodyPr wrap="square" anchor="t" lIns="45720" rIns="45720" tIns="27432" bIns="27432">
             <a:spAutoFit/>
           </a:bodyPr>
           <a:lstStyle/>
           <a:p>
             <a:pPr algn="l"/>
             <a:r>
-              <a:rPr sz="1800" b="1">
-                <a:solidFill>
-                  <a:srgbClr val="16304F"/>
-                </a:solidFill>
-                <a:latin typeface="Microsoft JhengHei"/>
-              </a:rPr>
-              <a:t>可溯源</a:t>
-            </a:r>
-          </a:p>
-        </p:txBody>
-      </p:sp>
-      <p:sp>
-        <p:nvSpPr>
-          <p:cNvPr id="56" name="TextBox 55"/>
-          <p:cNvSpPr txBox="1"/>
-          <p:nvPr/>
-        </p:nvSpPr>
-        <p:spPr>
-          <a:xfrm>
-            <a:off x="5879592" y="4846320"/>
-            <a:ext cx="1828800" cy="1143000"/>
-          </a:xfrm>
-          <a:prstGeom prst="rect">
-            <a:avLst/>
-          </a:prstGeom>
-          <a:noFill/>
-        </p:spPr>
-        <p:txBody>
-          <a:bodyPr wrap="square" anchor="ctr" lIns="45720" rIns="45720" tIns="27432" bIns="27432">
-            <a:spAutoFit/>
-          </a:bodyPr>
-          <a:lstStyle/>
-          <a:p>
-            <a:pPr algn="l"/>
-            <a:r>
-              <a:rPr sz="1150" b="0">
-                <a:solidFill>
-                  <a:srgbClr val="334455"/>
-                </a:solidFill>
-                <a:latin typeface="Microsoft JhengHei"/>
-              </a:rPr>
-              <a:t>每個結論指得出卷證頁碼與條號</a:t>
-            </a:r>
-          </a:p>
-        </p:txBody>
-      </p:sp>
-      <p:sp>
-        <p:nvSpPr>
-          <p:cNvPr id="57" name="Rounded Rectangle 56"/>
-          <p:cNvSpPr/>
-          <p:nvPr/>
-        </p:nvSpPr>
-        <p:spPr>
-          <a:xfrm>
-            <a:off x="8010144" y="4800600"/>
-            <a:ext cx="3520440" cy="1234440"/>
-          </a:xfrm>
-          <a:prstGeom prst="roundRect">
-            <a:avLst>
-              <a:gd name="adj" fmla="val 8000"/>
-            </a:avLst>
-          </a:prstGeom>
-          <a:solidFill>
-            <a:srgbClr val="F4F6F9"/>
-          </a:solidFill>
-          <a:ln>
-            <a:noFill/>
-          </a:ln>
-          <a:effectLst/>
-        </p:spPr>
-        <p:style>
-          <a:lnRef idx="1">
-            <a:schemeClr val="accent1"/>
-          </a:lnRef>
-          <a:fillRef idx="3">
-            <a:schemeClr val="accent1"/>
-          </a:fillRef>
-          <a:effectRef idx="2">
-            <a:schemeClr val="accent1"/>
-          </a:effectRef>
-          <a:fontRef idx="minor">
-            <a:schemeClr val="lt1"/>
-          </a:fontRef>
-        </p:style>
-        <p:txBody>
-          <a:bodyPr rtlCol="0" anchor="ctr"/>
-          <a:lstStyle/>
-          <a:p>
-            <a:pPr algn="ctr"/>
-          </a:p>
-        </p:txBody>
-      </p:sp>
-      <p:sp>
-        <p:nvSpPr>
-          <p:cNvPr id="58" name="TextBox 57"/>
-          <p:cNvSpPr txBox="1"/>
-          <p:nvPr/>
-        </p:nvSpPr>
-        <p:spPr>
-          <a:xfrm>
-            <a:off x="8193023" y="4846320"/>
-            <a:ext cx="1371600" cy="1143000"/>
-          </a:xfrm>
-          <a:prstGeom prst="rect">
-            <a:avLst/>
-          </a:prstGeom>
-          <a:noFill/>
-        </p:spPr>
-        <p:txBody>
-          <a:bodyPr wrap="square" anchor="ctr" lIns="45720" rIns="45720" tIns="27432" bIns="27432">
-            <a:spAutoFit/>
-          </a:bodyPr>
-          <a:lstStyle/>
-          <a:p>
-            <a:pPr algn="l"/>
-            <a:r>
-              <a:rPr sz="1800" b="1">
-                <a:solidFill>
-                  <a:srgbClr val="16304F"/>
-                </a:solidFill>
-                <a:latin typeface="Microsoft JhengHei"/>
-              </a:rPr>
-              <a:t>局部重算</a:t>
-            </a:r>
-          </a:p>
-        </p:txBody>
-      </p:sp>
-      <p:sp>
-        <p:nvSpPr>
-          <p:cNvPr id="59" name="TextBox 58"/>
-          <p:cNvSpPr txBox="1"/>
-          <p:nvPr/>
-        </p:nvSpPr>
-        <p:spPr>
-          <a:xfrm>
-            <a:off x="9564624" y="4846320"/>
-            <a:ext cx="1828800" cy="1143000"/>
-          </a:xfrm>
-          <a:prstGeom prst="rect">
-            <a:avLst/>
-          </a:prstGeom>
-          <a:noFill/>
-        </p:spPr>
-        <p:txBody>
-          <a:bodyPr wrap="square" anchor="ctr" lIns="45720" rIns="45720" tIns="27432" bIns="27432">
-            <a:spAutoFit/>
-          </a:bodyPr>
-          <a:lstStyle/>
-          <a:p>
-            <a:pPr algn="l"/>
-            <a:r>
-              <a:rPr sz="1150" b="0">
-                <a:solidFill>
-                  <a:srgbClr val="334455"/>
-                </a:solidFill>
-                <a:latin typeface="Microsoft JhengHei"/>
-              </a:rPr>
-              <a:t>錯在哪一步，只修那一步</a:t>
+              <a:rPr sz="1000" b="0">
+                <a:solidFill>
+                  <a:srgbClr val="8A93A0"/>
+                </a:solidFill>
+                <a:latin typeface="Microsoft JhengHei"/>
+              </a:rPr>
+              <a:t>依據 承辦人意見，只重算受影響步驟</a:t>
             </a:r>
           </a:p>
         </p:txBody>
@@ -9207,7 +8858,7 @@
                 </a:solidFill>
                 <a:latin typeface="Microsoft JhengHei"/>
               </a:rPr>
-              <a:t>6 / 9</a:t>
+              <a:t>6 / 8</a:t>
             </a:r>
           </a:p>
         </p:txBody>
@@ -9407,7 +9058,7 @@
                 </a:solidFill>
                 <a:latin typeface="Microsoft JhengHei"/>
               </a:rPr>
-              <a:t>06 ／ 資料應用</a:t>
+              <a:t>06 ／ 準確性驗證</a:t>
             </a:r>
           </a:p>
         </p:txBody>
@@ -9442,7 +9093,7 @@
                 </a:solidFill>
                 <a:latin typeface="Microsoft JhengHei"/>
               </a:rPr>
-              <a:t>拿不到答辯書和卷宗，就自己出三套考題</a:t>
+              <a:t>三個真實案件：主文、條款、期間、時效，全部與決定書一致</a:t>
             </a:r>
           </a:p>
         </p:txBody>
@@ -9556,7 +9207,7 @@
                 </a:solidFill>
                 <a:latin typeface="Microsoft JhengHei"/>
               </a:rPr>
-              <a:t>7 / 9</a:t>
+              <a:t>7 / 8</a:t>
             </a:r>
           </a:p>
         </p:txBody>
@@ -9569,8 +9220,8 @@
         </p:nvSpPr>
         <p:spPr>
           <a:xfrm>
-            <a:off x="640080" y="1554480"/>
-            <a:ext cx="3520440" cy="3840480"/>
+            <a:off x="640080" y="1463040"/>
+            <a:ext cx="2468880" cy="868680"/>
           </a:xfrm>
           <a:prstGeom prst="roundRect">
             <a:avLst>
@@ -9578,12 +9229,10 @@
             </a:avLst>
           </a:prstGeom>
           <a:solidFill>
-            <a:srgbClr val="FFFFFF"/>
+            <a:srgbClr val="F4F6F9"/>
           </a:solidFill>
-          <a:ln w="19050">
-            <a:solidFill>
-              <a:srgbClr val="DDE3EA"/>
-            </a:solidFill>
+          <a:ln>
+            <a:noFill/>
           </a:ln>
           <a:effectLst/>
         </p:spPr>
@@ -9617,8 +9266,8 @@
         </p:nvSpPr>
         <p:spPr>
           <a:xfrm>
-            <a:off x="841247" y="1691640"/>
-            <a:ext cx="3108960" cy="320040"/>
+            <a:off x="777240" y="1508760"/>
+            <a:ext cx="2286000" cy="320040"/>
           </a:xfrm>
           <a:prstGeom prst="rect">
             <a:avLst/>
@@ -9633,13 +9282,13 @@
           <a:p>
             <a:pPr algn="l"/>
             <a:r>
-              <a:rPr sz="1050" b="1">
-                <a:solidFill>
-                  <a:srgbClr val="D98E04"/>
-                </a:solidFill>
-                <a:latin typeface="Microsoft JhengHei"/>
-              </a:rPr>
-              <a:t>CASE 01 ／ 建築法</a:t>
+              <a:rPr sz="1250" b="1">
+                <a:solidFill>
+                  <a:srgbClr val="16304F"/>
+                </a:solidFill>
+                <a:latin typeface="Microsoft JhengHei"/>
+              </a:rPr>
+              <a:t>真卷宗</a:t>
             </a:r>
           </a:p>
         </p:txBody>
@@ -9652,8 +9301,8 @@
         </p:nvSpPr>
         <p:spPr>
           <a:xfrm>
-            <a:off x="841247" y="2011680"/>
-            <a:ext cx="3108960" cy="502920"/>
+            <a:off x="777240" y="1810512"/>
+            <a:ext cx="2286000" cy="502920"/>
           </a:xfrm>
           <a:prstGeom prst="rect">
             <a:avLst/>
@@ -9668,13 +9317,13 @@
           <a:p>
             <a:pPr algn="l"/>
             <a:r>
-              <a:rPr sz="2000" b="1">
-                <a:solidFill>
-                  <a:srgbClr val="16304F"/>
-                </a:solidFill>
-                <a:latin typeface="Microsoft JhengHei"/>
-              </a:rPr>
-              <a:t>訴願人遲了 7 天</a:t>
+              <a:rPr sz="950" b="0">
+                <a:solidFill>
+                  <a:srgbClr val="334455"/>
+                </a:solidFill>
+                <a:latin typeface="Microsoft JhengHei"/>
+              </a:rPr>
+              <a:t>從法制局 101 份決定書挑 3 份，反推 30 頁卷宗：掃描、手寫、照片、影片</a:t>
             </a:r>
           </a:p>
         </p:txBody>
@@ -9687,8 +9336,8 @@
         </p:nvSpPr>
         <p:spPr>
           <a:xfrm>
-            <a:off x="841247" y="2606040"/>
-            <a:ext cx="1188720" cy="411480"/>
+            <a:off x="640080" y="2423160"/>
+            <a:ext cx="2468880" cy="868680"/>
           </a:xfrm>
           <a:prstGeom prst="roundRect">
             <a:avLst>
@@ -9696,7 +9345,7 @@
             </a:avLst>
           </a:prstGeom>
           <a:solidFill>
-            <a:srgbClr val="16304F"/>
+            <a:srgbClr val="F4F6F9"/>
           </a:solidFill>
           <a:ln>
             <a:noFill/>
@@ -9733,43 +9382,8 @@
         </p:nvSpPr>
         <p:spPr>
           <a:xfrm>
-            <a:off x="841247" y="2606040"/>
-            <a:ext cx="1188720" cy="411480"/>
-          </a:xfrm>
-          <a:prstGeom prst="rect">
-            <a:avLst/>
-          </a:prstGeom>
-          <a:noFill/>
-        </p:spPr>
-        <p:txBody>
-          <a:bodyPr wrap="square" anchor="ctr" lIns="45720" rIns="45720" tIns="27432" bIns="27432">
-            <a:spAutoFit/>
-          </a:bodyPr>
-          <a:lstStyle/>
-          <a:p>
-            <a:pPr algn="ctr"/>
-            <a:r>
-              <a:rPr sz="1500" b="1">
-                <a:solidFill>
-                  <a:srgbClr val="FFFFFF"/>
-                </a:solidFill>
-                <a:latin typeface="Microsoft JhengHei"/>
-              </a:rPr>
-              <a:t>不受理</a:t>
-            </a:r>
-          </a:p>
-        </p:txBody>
-      </p:sp>
-      <p:sp>
-        <p:nvSpPr>
-          <p:cNvPr id="14" name="TextBox 13"/>
-          <p:cNvSpPr txBox="1"/>
-          <p:nvPr/>
-        </p:nvSpPr>
-        <p:spPr>
-          <a:xfrm>
-            <a:off x="841247" y="3154680"/>
-            <a:ext cx="3108960" cy="2103120"/>
+            <a:off x="777240" y="2468880"/>
+            <a:ext cx="2286000" cy="320040"/>
           </a:xfrm>
           <a:prstGeom prst="rect">
             <a:avLst/>
@@ -9784,13 +9398,48 @@
           <a:p>
             <a:pPr algn="l"/>
             <a:r>
-              <a:rPr sz="1350" b="0">
+              <a:rPr sz="1250" b="1">
+                <a:solidFill>
+                  <a:srgbClr val="16304F"/>
+                </a:solidFill>
+                <a:latin typeface="Microsoft JhengHei"/>
+              </a:rPr>
+              <a:t>看不到答案</a:t>
+            </a:r>
+          </a:p>
+        </p:txBody>
+      </p:sp>
+      <p:sp>
+        <p:nvSpPr>
+          <p:cNvPr id="14" name="TextBox 13"/>
+          <p:cNvSpPr txBox="1"/>
+          <p:nvPr/>
+        </p:nvSpPr>
+        <p:spPr>
+          <a:xfrm>
+            <a:off x="777240" y="2770632"/>
+            <a:ext cx="2286000" cy="502920"/>
+          </a:xfrm>
+          <a:prstGeom prst="rect">
+            <a:avLst/>
+          </a:prstGeom>
+          <a:noFill/>
+        </p:spPr>
+        <p:txBody>
+          <a:bodyPr wrap="square" anchor="t" lIns="45720" rIns="45720" tIns="27432" bIns="27432">
+            <a:spAutoFit/>
+          </a:bodyPr>
+          <a:lstStyle/>
+          <a:p>
+            <a:pPr algn="l"/>
+            <a:r>
+              <a:rPr sz="950" b="0">
                 <a:solidFill>
                   <a:srgbClr val="334455"/>
                 </a:solidFill>
                 <a:latin typeface="Microsoft JhengHei"/>
               </a:rPr>
-              <a:t>卷宗塞滿實質理由和照片當干擾；正確答案仍是程序不受理，不能寫任何實質認定。</a:t>
+              <a:t>這 3 份決定書從知識庫與相似案例排除</a:t>
             </a:r>
           </a:p>
         </p:txBody>
@@ -9803,8 +9452,8 @@
         </p:nvSpPr>
         <p:spPr>
           <a:xfrm>
-            <a:off x="4325112" y="1554480"/>
-            <a:ext cx="3520440" cy="3840480"/>
+            <a:off x="640080" y="3383280"/>
+            <a:ext cx="2468880" cy="868680"/>
           </a:xfrm>
           <a:prstGeom prst="roundRect">
             <a:avLst>
@@ -9812,12 +9461,10 @@
             </a:avLst>
           </a:prstGeom>
           <a:solidFill>
-            <a:srgbClr val="FFFFFF"/>
+            <a:srgbClr val="F4F6F9"/>
           </a:solidFill>
-          <a:ln w="19050">
-            <a:solidFill>
-              <a:srgbClr val="DDE3EA"/>
-            </a:solidFill>
+          <a:ln>
+            <a:noFill/>
           </a:ln>
           <a:effectLst/>
         </p:spPr>
@@ -9851,8 +9498,8 @@
         </p:nvSpPr>
         <p:spPr>
           <a:xfrm>
-            <a:off x="4526280" y="1691640"/>
-            <a:ext cx="3108960" cy="320040"/>
+            <a:off x="777240" y="3429000"/>
+            <a:ext cx="2286000" cy="320040"/>
           </a:xfrm>
           <a:prstGeom prst="rect">
             <a:avLst/>
@@ -9867,13 +9514,13 @@
           <a:p>
             <a:pPr algn="l"/>
             <a:r>
-              <a:rPr sz="1050" b="1">
-                <a:solidFill>
-                  <a:srgbClr val="D98E04"/>
-                </a:solidFill>
-                <a:latin typeface="Microsoft JhengHei"/>
-              </a:rPr>
-              <a:t>CASE 02 ／ 廢清法</a:t>
+              <a:rPr sz="1250" b="1">
+                <a:solidFill>
+                  <a:srgbClr val="16304F"/>
+                </a:solidFill>
+                <a:latin typeface="Microsoft JhengHei"/>
+              </a:rPr>
+              <a:t>程式逐項比</a:t>
             </a:r>
           </a:p>
         </p:txBody>
@@ -9886,8 +9533,8 @@
         </p:nvSpPr>
         <p:spPr>
           <a:xfrm>
-            <a:off x="4526280" y="2011680"/>
-            <a:ext cx="3108960" cy="502920"/>
+            <a:off x="777240" y="3730752"/>
+            <a:ext cx="2286000" cy="502920"/>
           </a:xfrm>
           <a:prstGeom prst="rect">
             <a:avLst/>
@@ -9902,13 +9549,13 @@
           <a:p>
             <a:pPr algn="l"/>
             <a:r>
-              <a:rPr sz="2000" b="1">
-                <a:solidFill>
-                  <a:srgbClr val="16304F"/>
-                </a:solidFill>
-                <a:latin typeface="Microsoft JhengHei"/>
-              </a:rPr>
-              <a:t>亂丟煙蒂，說沒丟</a:t>
+              <a:rPr sz="950" b="0">
+                <a:solidFill>
+                  <a:srgbClr val="334455"/>
+                </a:solidFill>
+                <a:latin typeface="Microsoft JhengHei"/>
+              </a:rPr>
+              <a:t>期間三日期、法條、主文條款、論證點</a:t>
             </a:r>
           </a:p>
         </p:txBody>
@@ -9921,8 +9568,8 @@
         </p:nvSpPr>
         <p:spPr>
           <a:xfrm>
-            <a:off x="4526280" y="2606040"/>
-            <a:ext cx="1188720" cy="411480"/>
+            <a:off x="640080" y="4343400"/>
+            <a:ext cx="2468880" cy="868680"/>
           </a:xfrm>
           <a:prstGeom prst="roundRect">
             <a:avLst>
@@ -9930,7 +9577,7 @@
             </a:avLst>
           </a:prstGeom>
           <a:solidFill>
-            <a:srgbClr val="16304F"/>
+            <a:srgbClr val="F4F6F9"/>
           </a:solidFill>
           <a:ln>
             <a:noFill/>
@@ -9967,43 +9614,8 @@
         </p:nvSpPr>
         <p:spPr>
           <a:xfrm>
-            <a:off x="4526280" y="2606040"/>
-            <a:ext cx="1188720" cy="411480"/>
-          </a:xfrm>
-          <a:prstGeom prst="rect">
-            <a:avLst/>
-          </a:prstGeom>
-          <a:noFill/>
-        </p:spPr>
-        <p:txBody>
-          <a:bodyPr wrap="square" anchor="ctr" lIns="45720" rIns="45720" tIns="27432" bIns="27432">
-            <a:spAutoFit/>
-          </a:bodyPr>
-          <a:lstStyle/>
-          <a:p>
-            <a:pPr algn="ctr"/>
-            <a:r>
-              <a:rPr sz="1500" b="1">
-                <a:solidFill>
-                  <a:srgbClr val="FFFFFF"/>
-                </a:solidFill>
-                <a:latin typeface="Microsoft JhengHei"/>
-              </a:rPr>
-              <a:t>駁回</a:t>
-            </a:r>
-          </a:p>
-        </p:txBody>
-      </p:sp>
-      <p:sp>
-        <p:nvSpPr>
-          <p:cNvPr id="20" name="TextBox 19"/>
-          <p:cNvSpPr txBox="1"/>
-          <p:nvPr/>
-        </p:nvSpPr>
-        <p:spPr>
-          <a:xfrm>
-            <a:off x="4526280" y="3154680"/>
-            <a:ext cx="3108960" cy="2103120"/>
+            <a:off x="777240" y="4389120"/>
+            <a:ext cx="2286000" cy="320040"/>
           </a:xfrm>
           <a:prstGeom prst="rect">
             <a:avLst/>
@@ -10018,264 +9630,650 @@
           <a:p>
             <a:pPr algn="l"/>
             <a:r>
-              <a:rPr sz="1350" b="0">
+              <a:rPr sz="1250" b="1">
+                <a:solidFill>
+                  <a:srgbClr val="16304F"/>
+                </a:solidFill>
+                <a:latin typeface="Microsoft JhengHei"/>
+              </a:rPr>
+              <a:t>線上真跑</a:t>
+            </a:r>
+          </a:p>
+        </p:txBody>
+      </p:sp>
+      <p:sp>
+        <p:nvSpPr>
+          <p:cNvPr id="20" name="TextBox 19"/>
+          <p:cNvSpPr txBox="1"/>
+          <p:nvPr/>
+        </p:nvSpPr>
+        <p:spPr>
+          <a:xfrm>
+            <a:off x="777240" y="4690872"/>
+            <a:ext cx="2286000" cy="502920"/>
+          </a:xfrm>
+          <a:prstGeom prst="rect">
+            <a:avLst/>
+          </a:prstGeom>
+          <a:noFill/>
+        </p:spPr>
+        <p:txBody>
+          <a:bodyPr wrap="square" anchor="t" lIns="45720" rIns="45720" tIns="27432" bIns="27432">
+            <a:spAutoFit/>
+          </a:bodyPr>
+          <a:lstStyle/>
+          <a:p>
+            <a:pPr algn="l"/>
+            <a:r>
+              <a:rPr sz="950" b="0">
                 <a:solidFill>
                   <a:srgbClr val="334455"/>
                 </a:solidFill>
                 <a:latin typeface="Microsoft JhengHei"/>
               </a:rPr>
-              <a:t>影片 00:14 拋擲、00:19 煙蒂還在；訴願書寫的收受日和送達證書差 2 天，要以證書為準。</a:t>
-            </a:r>
-          </a:p>
-        </p:txBody>
-      </p:sp>
-      <p:sp>
-        <p:nvSpPr>
-          <p:cNvPr id="21" name="Rounded Rectangle 20"/>
+              <a:t>每案 4–5 分鐘，可重跑</a:t>
+            </a:r>
+          </a:p>
+        </p:txBody>
+      </p:sp>
+      <p:graphicFrame>
+        <p:nvGraphicFramePr>
+          <p:cNvPr id="21" name="Table 20"/>
+          <p:cNvGraphicFramePr>
+            <a:graphicFrameLocks noGrp="1"/>
+          </p:cNvGraphicFramePr>
+          <p:nvPr/>
+        </p:nvGraphicFramePr>
+        <p:xfrm>
+          <a:off x="3291840" y="1463040"/>
+          <a:ext cx="5394960" cy="2743200"/>
+        </p:xfrm>
+        <a:graphic>
+          <a:graphicData uri="http://schemas.openxmlformats.org/drawingml/2006/table">
+            <a:tbl>
+              <a:tblPr firstRow="1" bandRow="1">
+                <a:tableStyleId>{5C22544A-7EE6-4342-B048-85BDC9FD1C3A}</a:tableStyleId>
+              </a:tblPr>
+              <a:tblGrid>
+                <a:gridCol w="1005840"/>
+                <a:gridCol w="1371600"/>
+                <a:gridCol w="1645920"/>
+                <a:gridCol w="1371600"/>
+              </a:tblGrid>
+              <a:tr h="457200">
+                <a:tc>
+                  <a:txBody>
+                    <a:bodyPr/>
+                    <a:lstStyle/>
+                    <a:p>
+                      <a:pPr algn="ctr"/>
+                    </a:p>
+                  </a:txBody>
+                  <a:tcPr>
+                    <a:solidFill>
+                      <a:srgbClr val="16304F"/>
+                    </a:solidFill>
+                  </a:tcPr>
+                </a:tc>
+                <a:tc>
+                  <a:txBody>
+                    <a:bodyPr/>
+                    <a:lstStyle/>
+                    <a:p>
+                      <a:pPr algn="ctr"/>
+                      <a:r>
+                        <a:rPr sz="1050" b="1">
+                          <a:solidFill>
+                            <a:srgbClr val="FFFFFF"/>
+                          </a:solidFill>
+                          <a:latin typeface="Microsoft JhengHei"/>
+                        </a:rPr>
+                        <a:t>建築法・逾期</a:t>
+                      </a:r>
+                    </a:p>
+                  </a:txBody>
+                  <a:tcPr>
+                    <a:solidFill>
+                      <a:srgbClr val="16304F"/>
+                    </a:solidFill>
+                  </a:tcPr>
+                </a:tc>
+                <a:tc>
+                  <a:txBody>
+                    <a:bodyPr/>
+                    <a:lstStyle/>
+                    <a:p>
+                      <a:pPr algn="ctr"/>
+                      <a:r>
+                        <a:rPr sz="1050" b="1">
+                          <a:solidFill>
+                            <a:srgbClr val="FFFFFF"/>
+                          </a:solidFill>
+                          <a:latin typeface="Microsoft JhengHei"/>
+                        </a:rPr>
+                        <a:t>廢清法・煙蒂</a:t>
+                      </a:r>
+                    </a:p>
+                  </a:txBody>
+                  <a:tcPr>
+                    <a:solidFill>
+                      <a:srgbClr val="16304F"/>
+                    </a:solidFill>
+                  </a:tcPr>
+                </a:tc>
+                <a:tc>
+                  <a:txBody>
+                    <a:bodyPr/>
+                    <a:lstStyle/>
+                    <a:p>
+                      <a:pPr algn="ctr"/>
+                      <a:r>
+                        <a:rPr sz="1050" b="1">
+                          <a:solidFill>
+                            <a:srgbClr val="FFFFFF"/>
+                          </a:solidFill>
+                          <a:latin typeface="Microsoft JhengHei"/>
+                        </a:rPr>
+                        <a:t>建築法・公安簽證</a:t>
+                      </a:r>
+                    </a:p>
+                  </a:txBody>
+                  <a:tcPr>
+                    <a:solidFill>
+                      <a:srgbClr val="16304F"/>
+                    </a:solidFill>
+                  </a:tcPr>
+                </a:tc>
+              </a:tr>
+              <a:tr h="457200">
+                <a:tc>
+                  <a:txBody>
+                    <a:bodyPr/>
+                    <a:lstStyle/>
+                    <a:p>
+                      <a:pPr algn="l"/>
+                      <a:r>
+                        <a:rPr sz="1050" b="1">
+                          <a:solidFill>
+                            <a:srgbClr val="16304F"/>
+                          </a:solidFill>
+                          <a:latin typeface="Microsoft JhengHei"/>
+                        </a:rPr>
+                        <a:t>主文</a:t>
+                      </a:r>
+                    </a:p>
+                  </a:txBody>
+                  <a:tcPr marT="36576" marB="36576">
+                    <a:solidFill>
+                      <a:srgbClr val="F7F9FB"/>
+                    </a:solidFill>
+                  </a:tcPr>
+                </a:tc>
+                <a:tc>
+                  <a:txBody>
+                    <a:bodyPr/>
+                    <a:lstStyle/>
+                    <a:p>
+                      <a:pPr algn="ctr"/>
+                      <a:r>
+                        <a:rPr sz="1050" b="0">
+                          <a:solidFill>
+                            <a:srgbClr val="0F2038"/>
+                          </a:solidFill>
+                          <a:latin typeface="Microsoft JhengHei"/>
+                        </a:rPr>
+                        <a:t>不受理</a:t>
+                      </a:r>
+                    </a:p>
+                  </a:txBody>
+                  <a:tcPr marT="36576" marB="36576">
+                    <a:solidFill>
+                      <a:srgbClr val="FFFFFF"/>
+                    </a:solidFill>
+                  </a:tcPr>
+                </a:tc>
+                <a:tc>
+                  <a:txBody>
+                    <a:bodyPr/>
+                    <a:lstStyle/>
+                    <a:p>
+                      <a:pPr algn="ctr"/>
+                      <a:r>
+                        <a:rPr sz="1050" b="0">
+                          <a:solidFill>
+                            <a:srgbClr val="0F2038"/>
+                          </a:solidFill>
+                          <a:latin typeface="Microsoft JhengHei"/>
+                        </a:rPr>
+                        <a:t>駁回</a:t>
+                      </a:r>
+                    </a:p>
+                  </a:txBody>
+                  <a:tcPr marT="36576" marB="36576">
+                    <a:solidFill>
+                      <a:srgbClr val="FFFFFF"/>
+                    </a:solidFill>
+                  </a:tcPr>
+                </a:tc>
+                <a:tc>
+                  <a:txBody>
+                    <a:bodyPr/>
+                    <a:lstStyle/>
+                    <a:p>
+                      <a:pPr algn="ctr"/>
+                      <a:r>
+                        <a:rPr sz="1050" b="0">
+                          <a:solidFill>
+                            <a:srgbClr val="0F2038"/>
+                          </a:solidFill>
+                          <a:latin typeface="Microsoft JhengHei"/>
+                        </a:rPr>
+                        <a:t>撤銷（不另處）</a:t>
+                      </a:r>
+                    </a:p>
+                  </a:txBody>
+                  <a:tcPr marT="36576" marB="36576">
+                    <a:solidFill>
+                      <a:srgbClr val="FFFFFF"/>
+                    </a:solidFill>
+                  </a:tcPr>
+                </a:tc>
+              </a:tr>
+              <a:tr h="457200">
+                <a:tc>
+                  <a:txBody>
+                    <a:bodyPr/>
+                    <a:lstStyle/>
+                    <a:p>
+                      <a:pPr algn="l"/>
+                      <a:r>
+                        <a:rPr sz="1050" b="1">
+                          <a:solidFill>
+                            <a:srgbClr val="16304F"/>
+                          </a:solidFill>
+                          <a:latin typeface="Microsoft JhengHei"/>
+                        </a:rPr>
+                        <a:t>條款</a:t>
+                      </a:r>
+                    </a:p>
+                  </a:txBody>
+                  <a:tcPr marT="36576" marB="36576">
+                    <a:solidFill>
+                      <a:srgbClr val="F7F9FB"/>
+                    </a:solidFill>
+                  </a:tcPr>
+                </a:tc>
+                <a:tc>
+                  <a:txBody>
+                    <a:bodyPr/>
+                    <a:lstStyle/>
+                    <a:p>
+                      <a:pPr algn="ctr"/>
+                      <a:r>
+                        <a:rPr sz="1050" b="0">
+                          <a:solidFill>
+                            <a:srgbClr val="0F2038"/>
+                          </a:solidFill>
+                          <a:latin typeface="Microsoft JhengHei"/>
+                        </a:rPr>
+                        <a:t>§77 ②</a:t>
+                      </a:r>
+                    </a:p>
+                  </a:txBody>
+                  <a:tcPr marT="36576" marB="36576">
+                    <a:solidFill>
+                      <a:srgbClr val="FFFFFF"/>
+                    </a:solidFill>
+                  </a:tcPr>
+                </a:tc>
+                <a:tc>
+                  <a:txBody>
+                    <a:bodyPr/>
+                    <a:lstStyle/>
+                    <a:p>
+                      <a:pPr algn="ctr"/>
+                      <a:r>
+                        <a:rPr sz="1050" b="0">
+                          <a:solidFill>
+                            <a:srgbClr val="0F2038"/>
+                          </a:solidFill>
+                          <a:latin typeface="Microsoft JhengHei"/>
+                        </a:rPr>
+                        <a:t>§79 I</a:t>
+                      </a:r>
+                    </a:p>
+                  </a:txBody>
+                  <a:tcPr marT="36576" marB="36576">
+                    <a:solidFill>
+                      <a:srgbClr val="FFFFFF"/>
+                    </a:solidFill>
+                  </a:tcPr>
+                </a:tc>
+                <a:tc>
+                  <a:txBody>
+                    <a:bodyPr/>
+                    <a:lstStyle/>
+                    <a:p>
+                      <a:pPr algn="ctr"/>
+                      <a:r>
+                        <a:rPr sz="1050" b="0">
+                          <a:solidFill>
+                            <a:srgbClr val="0F2038"/>
+                          </a:solidFill>
+                          <a:latin typeface="Microsoft JhengHei"/>
+                        </a:rPr>
+                        <a:t>§81 I</a:t>
+                      </a:r>
+                    </a:p>
+                  </a:txBody>
+                  <a:tcPr marT="36576" marB="36576">
+                    <a:solidFill>
+                      <a:srgbClr val="FFFFFF"/>
+                    </a:solidFill>
+                  </a:tcPr>
+                </a:tc>
+              </a:tr>
+              <a:tr h="457200">
+                <a:tc>
+                  <a:txBody>
+                    <a:bodyPr/>
+                    <a:lstStyle/>
+                    <a:p>
+                      <a:pPr algn="l"/>
+                      <a:r>
+                        <a:rPr sz="1050" b="1">
+                          <a:solidFill>
+                            <a:srgbClr val="16304F"/>
+                          </a:solidFill>
+                          <a:latin typeface="Microsoft JhengHei"/>
+                        </a:rPr>
+                        <a:t>期間</a:t>
+                      </a:r>
+                    </a:p>
+                  </a:txBody>
+                  <a:tcPr marT="36576" marB="36576">
+                    <a:solidFill>
+                      <a:srgbClr val="F7F9FB"/>
+                    </a:solidFill>
+                  </a:tcPr>
+                </a:tc>
+                <a:tc>
+                  <a:txBody>
+                    <a:bodyPr/>
+                    <a:lstStyle/>
+                    <a:p>
+                      <a:pPr algn="ctr"/>
+                      <a:r>
+                        <a:rPr sz="1050" b="0">
+                          <a:solidFill>
+                            <a:srgbClr val="0F2038"/>
+                          </a:solidFill>
+                          <a:latin typeface="Microsoft JhengHei"/>
+                        </a:rPr>
+                        <a:t>逾期 7 日</a:t>
+                      </a:r>
+                    </a:p>
+                  </a:txBody>
+                  <a:tcPr marT="36576" marB="36576">
+                    <a:solidFill>
+                      <a:srgbClr val="FFFFFF"/>
+                    </a:solidFill>
+                  </a:tcPr>
+                </a:tc>
+                <a:tc>
+                  <a:txBody>
+                    <a:bodyPr/>
+                    <a:lstStyle/>
+                    <a:p>
+                      <a:pPr algn="ctr"/>
+                      <a:r>
+                        <a:rPr sz="1050" b="0">
+                          <a:solidFill>
+                            <a:srgbClr val="0F2038"/>
+                          </a:solidFill>
+                          <a:latin typeface="Microsoft JhengHei"/>
+                        </a:rPr>
+                        <a:t>期間內（依送達證書）</a:t>
+                      </a:r>
+                    </a:p>
+                  </a:txBody>
+                  <a:tcPr marT="36576" marB="36576">
+                    <a:solidFill>
+                      <a:srgbClr val="FFFFFF"/>
+                    </a:solidFill>
+                  </a:tcPr>
+                </a:tc>
+                <a:tc>
+                  <a:txBody>
+                    <a:bodyPr/>
+                    <a:lstStyle/>
+                    <a:p>
+                      <a:pPr algn="ctr"/>
+                      <a:r>
+                        <a:rPr sz="1050" b="0">
+                          <a:solidFill>
+                            <a:srgbClr val="0F2038"/>
+                          </a:solidFill>
+                          <a:latin typeface="Microsoft JhengHei"/>
+                        </a:rPr>
+                        <a:t>期間內</a:t>
+                      </a:r>
+                    </a:p>
+                  </a:txBody>
+                  <a:tcPr marT="36576" marB="36576">
+                    <a:solidFill>
+                      <a:srgbClr val="FFFFFF"/>
+                    </a:solidFill>
+                  </a:tcPr>
+                </a:tc>
+              </a:tr>
+              <a:tr h="457200">
+                <a:tc>
+                  <a:txBody>
+                    <a:bodyPr/>
+                    <a:lstStyle/>
+                    <a:p>
+                      <a:pPr algn="l"/>
+                      <a:r>
+                        <a:rPr sz="1050" b="1">
+                          <a:solidFill>
+                            <a:srgbClr val="16304F"/>
+                          </a:solidFill>
+                          <a:latin typeface="Microsoft JhengHei"/>
+                        </a:rPr>
+                        <a:t>關鍵爭點</a:t>
+                      </a:r>
+                    </a:p>
+                  </a:txBody>
+                  <a:tcPr marT="36576" marB="36576">
+                    <a:solidFill>
+                      <a:srgbClr val="F7F9FB"/>
+                    </a:solidFill>
+                  </a:tcPr>
+                </a:tc>
+                <a:tc>
+                  <a:txBody>
+                    <a:bodyPr/>
+                    <a:lstStyle/>
+                    <a:p>
+                      <a:pPr algn="ctr"/>
+                      <a:r>
+                        <a:rPr sz="1050" b="0">
+                          <a:solidFill>
+                            <a:srgbClr val="0F2038"/>
+                          </a:solidFill>
+                          <a:latin typeface="Microsoft JhengHei"/>
+                        </a:rPr>
+                        <a:t>逾期 → 採機關</a:t>
+                      </a:r>
+                    </a:p>
+                  </a:txBody>
+                  <a:tcPr marT="36576" marB="36576">
+                    <a:solidFill>
+                      <a:srgbClr val="FFFFFF"/>
+                    </a:solidFill>
+                  </a:tcPr>
+                </a:tc>
+                <a:tc>
+                  <a:txBody>
+                    <a:bodyPr/>
+                    <a:lstStyle/>
+                    <a:p>
+                      <a:pPr algn="ctr"/>
+                      <a:r>
+                        <a:rPr sz="1050" b="0">
+                          <a:solidFill>
+                            <a:srgbClr val="0F2038"/>
+                          </a:solidFill>
+                          <a:latin typeface="Microsoft JhengHei"/>
+                        </a:rPr>
+                        <a:t>舉證 → 採機關</a:t>
+                      </a:r>
+                    </a:p>
+                  </a:txBody>
+                  <a:tcPr marT="36576" marB="36576">
+                    <a:solidFill>
+                      <a:srgbClr val="FFFFFF"/>
+                    </a:solidFill>
+                  </a:tcPr>
+                </a:tc>
+                <a:tc>
+                  <a:txBody>
+                    <a:bodyPr/>
+                    <a:lstStyle/>
+                    <a:p>
+                      <a:pPr algn="ctr"/>
+                      <a:r>
+                        <a:rPr sz="1050" b="0">
+                          <a:solidFill>
+                            <a:srgbClr val="0F2038"/>
+                          </a:solidFill>
+                          <a:latin typeface="Microsoft JhengHei"/>
+                        </a:rPr>
+                        <a:t>時效 → 採訴願人</a:t>
+                      </a:r>
+                    </a:p>
+                  </a:txBody>
+                  <a:tcPr marT="36576" marB="36576">
+                    <a:solidFill>
+                      <a:srgbClr val="FFFFFF"/>
+                    </a:solidFill>
+                  </a:tcPr>
+                </a:tc>
+              </a:tr>
+              <a:tr h="457200">
+                <a:tc>
+                  <a:txBody>
+                    <a:bodyPr/>
+                    <a:lstStyle/>
+                    <a:p>
+                      <a:pPr algn="l"/>
+                      <a:r>
+                        <a:rPr sz="1050" b="1">
+                          <a:solidFill>
+                            <a:srgbClr val="16304F"/>
+                          </a:solidFill>
+                          <a:latin typeface="Microsoft JhengHei"/>
+                        </a:rPr>
+                        <a:t>與決定書</a:t>
+                      </a:r>
+                    </a:p>
+                  </a:txBody>
+                  <a:tcPr marT="36576" marB="36576">
+                    <a:solidFill>
+                      <a:srgbClr val="F7F9FB"/>
+                    </a:solidFill>
+                  </a:tcPr>
+                </a:tc>
+                <a:tc>
+                  <a:txBody>
+                    <a:bodyPr/>
+                    <a:lstStyle/>
+                    <a:p>
+                      <a:pPr algn="ctr"/>
+                      <a:r>
+                        <a:rPr sz="1050" b="1">
+                          <a:solidFill>
+                            <a:srgbClr val="2E7D32"/>
+                          </a:solidFill>
+                          <a:latin typeface="Microsoft JhengHei"/>
+                        </a:rPr>
+                        <a:t>一致</a:t>
+                      </a:r>
+                    </a:p>
+                  </a:txBody>
+                  <a:tcPr marT="36576" marB="36576">
+                    <a:solidFill>
+                      <a:srgbClr val="FFFFFF"/>
+                    </a:solidFill>
+                  </a:tcPr>
+                </a:tc>
+                <a:tc>
+                  <a:txBody>
+                    <a:bodyPr/>
+                    <a:lstStyle/>
+                    <a:p>
+                      <a:pPr algn="ctr"/>
+                      <a:r>
+                        <a:rPr sz="1050" b="1">
+                          <a:solidFill>
+                            <a:srgbClr val="2E7D32"/>
+                          </a:solidFill>
+                          <a:latin typeface="Microsoft JhengHei"/>
+                        </a:rPr>
+                        <a:t>一致</a:t>
+                      </a:r>
+                    </a:p>
+                  </a:txBody>
+                  <a:tcPr marT="36576" marB="36576">
+                    <a:solidFill>
+                      <a:srgbClr val="FFFFFF"/>
+                    </a:solidFill>
+                  </a:tcPr>
+                </a:tc>
+                <a:tc>
+                  <a:txBody>
+                    <a:bodyPr/>
+                    <a:lstStyle/>
+                    <a:p>
+                      <a:pPr algn="ctr"/>
+                      <a:r>
+                        <a:rPr sz="1050" b="1">
+                          <a:solidFill>
+                            <a:srgbClr val="2E7D32"/>
+                          </a:solidFill>
+                          <a:latin typeface="Microsoft JhengHei"/>
+                        </a:rPr>
+                        <a:t>一致</a:t>
+                      </a:r>
+                    </a:p>
+                  </a:txBody>
+                  <a:tcPr marT="36576" marB="36576">
+                    <a:solidFill>
+                      <a:srgbClr val="FFFFFF"/>
+                    </a:solidFill>
+                  </a:tcPr>
+                </a:tc>
+              </a:tr>
+            </a:tbl>
+          </a:graphicData>
+        </a:graphic>
+      </p:graphicFrame>
+      <p:sp>
+        <p:nvSpPr>
+          <p:cNvPr id="22" name="Rounded Rectangle 21"/>
           <p:cNvSpPr/>
           <p:nvPr/>
         </p:nvSpPr>
         <p:spPr>
           <a:xfrm>
-            <a:off x="8010144" y="1554480"/>
-            <a:ext cx="3520440" cy="3840480"/>
+            <a:off x="8915400" y="1463040"/>
+            <a:ext cx="2651760" cy="3840480"/>
           </a:xfrm>
           <a:prstGeom prst="roundRect">
             <a:avLst>
               <a:gd name="adj" fmla="val 8000"/>
             </a:avLst>
-          </a:prstGeom>
-          <a:solidFill>
-            <a:srgbClr val="FFFFFF"/>
-          </a:solidFill>
-          <a:ln w="19050">
-            <a:solidFill>
-              <a:srgbClr val="DDE3EA"/>
-            </a:solidFill>
-          </a:ln>
-          <a:effectLst/>
-        </p:spPr>
-        <p:style>
-          <a:lnRef idx="1">
-            <a:schemeClr val="accent1"/>
-          </a:lnRef>
-          <a:fillRef idx="3">
-            <a:schemeClr val="accent1"/>
-          </a:fillRef>
-          <a:effectRef idx="2">
-            <a:schemeClr val="accent1"/>
-          </a:effectRef>
-          <a:fontRef idx="minor">
-            <a:schemeClr val="lt1"/>
-          </a:fontRef>
-        </p:style>
-        <p:txBody>
-          <a:bodyPr rtlCol="0" anchor="ctr"/>
-          <a:lstStyle/>
-          <a:p>
-            <a:pPr algn="ctr"/>
-          </a:p>
-        </p:txBody>
-      </p:sp>
-      <p:sp>
-        <p:nvSpPr>
-          <p:cNvPr id="22" name="TextBox 21"/>
-          <p:cNvSpPr txBox="1"/>
-          <p:nvPr/>
-        </p:nvSpPr>
-        <p:spPr>
-          <a:xfrm>
-            <a:off x="8211312" y="1691640"/>
-            <a:ext cx="3108960" cy="320040"/>
-          </a:xfrm>
-          <a:prstGeom prst="rect">
-            <a:avLst/>
-          </a:prstGeom>
-          <a:noFill/>
-        </p:spPr>
-        <p:txBody>
-          <a:bodyPr wrap="square" anchor="t" lIns="45720" rIns="45720" tIns="27432" bIns="27432">
-            <a:spAutoFit/>
-          </a:bodyPr>
-          <a:lstStyle/>
-          <a:p>
-            <a:pPr algn="l"/>
-            <a:r>
-              <a:rPr sz="1050" b="1">
-                <a:solidFill>
-                  <a:srgbClr val="D98E04"/>
-                </a:solidFill>
-                <a:latin typeface="Microsoft JhengHei"/>
-              </a:rPr>
-              <a:t>CASE 03 ／ 建築法</a:t>
-            </a:r>
-          </a:p>
-        </p:txBody>
-      </p:sp>
-      <p:sp>
-        <p:nvSpPr>
-          <p:cNvPr id="23" name="TextBox 22"/>
-          <p:cNvSpPr txBox="1"/>
-          <p:nvPr/>
-        </p:nvSpPr>
-        <p:spPr>
-          <a:xfrm>
-            <a:off x="8211312" y="2011680"/>
-            <a:ext cx="3108960" cy="502920"/>
-          </a:xfrm>
-          <a:prstGeom prst="rect">
-            <a:avLst/>
-          </a:prstGeom>
-          <a:noFill/>
-        </p:spPr>
-        <p:txBody>
-          <a:bodyPr wrap="square" anchor="t" lIns="45720" rIns="45720" tIns="27432" bIns="27432">
-            <a:spAutoFit/>
-          </a:bodyPr>
-          <a:lstStyle/>
-          <a:p>
-            <a:pPr algn="l"/>
-            <a:r>
-              <a:rPr sz="2000" b="1">
-                <a:solidFill>
-                  <a:srgbClr val="16304F"/>
-                </a:solidFill>
-                <a:latin typeface="Microsoft JhengHei"/>
-              </a:rPr>
-              <a:t>政府遲了 26 天才罰</a:t>
-            </a:r>
-          </a:p>
-        </p:txBody>
-      </p:sp>
-      <p:sp>
-        <p:nvSpPr>
-          <p:cNvPr id="24" name="Rounded Rectangle 23"/>
-          <p:cNvSpPr/>
-          <p:nvPr/>
-        </p:nvSpPr>
-        <p:spPr>
-          <a:xfrm>
-            <a:off x="8211312" y="2606040"/>
-            <a:ext cx="1188720" cy="411480"/>
-          </a:xfrm>
-          <a:prstGeom prst="roundRect">
-            <a:avLst>
-              <a:gd name="adj" fmla="val 8000"/>
-            </a:avLst>
-          </a:prstGeom>
-          <a:solidFill>
-            <a:srgbClr val="16304F"/>
-          </a:solidFill>
-          <a:ln>
-            <a:noFill/>
-          </a:ln>
-          <a:effectLst/>
-        </p:spPr>
-        <p:style>
-          <a:lnRef idx="1">
-            <a:schemeClr val="accent1"/>
-          </a:lnRef>
-          <a:fillRef idx="3">
-            <a:schemeClr val="accent1"/>
-          </a:fillRef>
-          <a:effectRef idx="2">
-            <a:schemeClr val="accent1"/>
-          </a:effectRef>
-          <a:fontRef idx="minor">
-            <a:schemeClr val="lt1"/>
-          </a:fontRef>
-        </p:style>
-        <p:txBody>
-          <a:bodyPr rtlCol="0" anchor="ctr"/>
-          <a:lstStyle/>
-          <a:p>
-            <a:pPr algn="ctr"/>
-          </a:p>
-        </p:txBody>
-      </p:sp>
-      <p:sp>
-        <p:nvSpPr>
-          <p:cNvPr id="25" name="TextBox 24"/>
-          <p:cNvSpPr txBox="1"/>
-          <p:nvPr/>
-        </p:nvSpPr>
-        <p:spPr>
-          <a:xfrm>
-            <a:off x="8211312" y="2606040"/>
-            <a:ext cx="1188720" cy="411480"/>
-          </a:xfrm>
-          <a:prstGeom prst="rect">
-            <a:avLst/>
-          </a:prstGeom>
-          <a:noFill/>
-        </p:spPr>
-        <p:txBody>
-          <a:bodyPr wrap="square" anchor="ctr" lIns="45720" rIns="45720" tIns="27432" bIns="27432">
-            <a:spAutoFit/>
-          </a:bodyPr>
-          <a:lstStyle/>
-          <a:p>
-            <a:pPr algn="ctr"/>
-            <a:r>
-              <a:rPr sz="1500" b="1">
-                <a:solidFill>
-                  <a:srgbClr val="FFFFFF"/>
-                </a:solidFill>
-                <a:latin typeface="Microsoft JhengHei"/>
-              </a:rPr>
-              <a:t>撤銷</a:t>
-            </a:r>
-          </a:p>
-        </p:txBody>
-      </p:sp>
-      <p:sp>
-        <p:nvSpPr>
-          <p:cNvPr id="26" name="TextBox 25"/>
-          <p:cNvSpPr txBox="1"/>
-          <p:nvPr/>
-        </p:nvSpPr>
-        <p:spPr>
-          <a:xfrm>
-            <a:off x="8211312" y="3154680"/>
-            <a:ext cx="3108960" cy="2103120"/>
-          </a:xfrm>
-          <a:prstGeom prst="rect">
-            <a:avLst/>
-          </a:prstGeom>
-          <a:noFill/>
-        </p:spPr>
-        <p:txBody>
-          <a:bodyPr wrap="square" anchor="t" lIns="45720" rIns="45720" tIns="27432" bIns="27432">
-            <a:spAutoFit/>
-          </a:bodyPr>
-          <a:lstStyle/>
-          <a:p>
-            <a:pPr algn="l"/>
-            <a:r>
-              <a:rPr sz="1350" b="0">
-                <a:solidFill>
-                  <a:srgbClr val="334455"/>
-                </a:solidFill>
-                <a:latin typeface="Microsoft JhengHei"/>
-              </a:rPr>
-              <a:t>簽證不實證據很強，但三年裁處權時效已過；答辯書迴避不答，系統必須自行從卷內算出時效。</a:t>
-            </a:r>
-          </a:p>
-        </p:txBody>
-      </p:sp>
-      <p:sp>
-        <p:nvSpPr>
-          <p:cNvPr id="27" name="Rectangle 26"/>
-          <p:cNvSpPr/>
-          <p:nvPr/>
-        </p:nvSpPr>
-        <p:spPr>
-          <a:xfrm>
-            <a:off x="640080" y="5623560"/>
-            <a:ext cx="10908792" cy="566928"/>
-          </a:xfrm>
-          <a:prstGeom prst="rect">
-            <a:avLst/>
           </a:prstGeom>
           <a:solidFill>
             <a:srgbClr val="FFF8EA"/>
@@ -10309,14 +10307,14 @@
       </p:sp>
       <p:sp>
         <p:nvSpPr>
-          <p:cNvPr id="28" name="Rectangle 27"/>
+          <p:cNvPr id="23" name="Rectangle 22"/>
           <p:cNvSpPr/>
           <p:nvPr/>
         </p:nvSpPr>
         <p:spPr>
           <a:xfrm>
-            <a:off x="640080" y="5623560"/>
-            <a:ext cx="64008" cy="566928"/>
+            <a:off x="8915400" y="1463040"/>
+            <a:ext cx="64008" cy="3840480"/>
           </a:xfrm>
           <a:prstGeom prst="rect">
             <a:avLst/>
@@ -10353,14 +10351,14 @@
       </p:sp>
       <p:sp>
         <p:nvSpPr>
-          <p:cNvPr id="29" name="TextBox 28"/>
+          <p:cNvPr id="24" name="TextBox 23"/>
           <p:cNvSpPr txBox="1"/>
           <p:nvPr/>
         </p:nvSpPr>
         <p:spPr>
           <a:xfrm>
-            <a:off x="822960" y="5641848"/>
-            <a:ext cx="10607040" cy="548640"/>
+            <a:off x="9098280" y="1554480"/>
+            <a:ext cx="2377440" cy="548640"/>
           </a:xfrm>
           <a:prstGeom prst="rect">
             <a:avLst/>
@@ -10368,20 +10366,153 @@
           <a:noFill/>
         </p:spPr>
         <p:txBody>
-          <a:bodyPr wrap="square" anchor="ctr" lIns="45720" rIns="45720" tIns="27432" bIns="27432">
+          <a:bodyPr wrap="square" anchor="t" lIns="45720" rIns="45720" tIns="27432" bIns="27432">
             <a:spAutoFit/>
           </a:bodyPr>
           <a:lstStyle/>
           <a:p>
             <a:pPr algn="l"/>
             <a:r>
-              <a:rPr sz="1350" b="0">
+              <a:rPr sz="1250" b="1">
+                <a:solidFill>
+                  <a:srgbClr val="16304F"/>
+                </a:solidFill>
+                <a:latin typeface="Microsoft JhengHei"/>
+              </a:rPr>
+              <a:t>最難的一案：時效是委員會依職權發現的</a:t>
+            </a:r>
+          </a:p>
+        </p:txBody>
+      </p:sp>
+      <p:sp>
+        <p:nvSpPr>
+          <p:cNvPr id="25" name="TextBox 24"/>
+          <p:cNvSpPr txBox="1"/>
+          <p:nvPr/>
+        </p:nvSpPr>
+        <p:spPr>
+          <a:xfrm>
+            <a:off x="9098280" y="2148840"/>
+            <a:ext cx="2377440" cy="3108960"/>
+          </a:xfrm>
+          <a:prstGeom prst="rect">
+            <a:avLst/>
+          </a:prstGeom>
+          <a:noFill/>
+        </p:spPr>
+        <p:txBody>
+          <a:bodyPr wrap="square">
+            <a:spAutoFit/>
+          </a:bodyPr>
+          <a:lstStyle/>
+          <a:p>
+            <a:pPr>
+              <a:spcAft>
+                <a:spcPts val="600"/>
+              </a:spcAft>
+            </a:pPr>
+            <a:r>
+              <a:rPr sz="600">
+                <a:solidFill>
+                  <a:srgbClr val="D98E04"/>
+                </a:solidFill>
+                <a:latin typeface="Microsoft JhengHei"/>
+              </a:rPr>
+              <a:t>●  </a:t>
+            </a:r>
+            <a:r>
+              <a:rPr sz="1000">
                 <a:solidFill>
                   <a:srgbClr val="334455"/>
                 </a:solidFill>
                 <a:latin typeface="Microsoft JhengHei"/>
               </a:rPr>
-              <a:t>每案 30 頁真實格式卷宗（掃描、手寫、系統截圖、影片）；對應決定書從知識庫排除，系統不能「認出答案」。</a:t>
+              <a:t>訴願人沒主張到重點，機關答辯只說「複查時才發現」</a:t>
+            </a:r>
+          </a:p>
+          <a:p>
+            <a:pPr>
+              <a:spcAft>
+                <a:spcPts val="600"/>
+              </a:spcAft>
+            </a:pPr>
+            <a:r>
+              <a:rPr sz="600">
+                <a:solidFill>
+                  <a:srgbClr val="D98E04"/>
+                </a:solidFill>
+                <a:latin typeface="Microsoft JhengHei"/>
+              </a:rPr>
+              <a:t>●  </a:t>
+            </a:r>
+            <a:r>
+              <a:rPr sz="1000">
+                <a:solidFill>
+                  <a:srgbClr val="334455"/>
+                </a:solidFill>
+                <a:latin typeface="Microsoft JhengHei"/>
+              </a:rPr>
+              <a:t>系統從卷宗算出：111-06-09 行為終了 → 114-06-08 屆滿 → 114-07-04 才裁處，逾 26 日</a:t>
+            </a:r>
+          </a:p>
+          <a:p>
+            <a:pPr>
+              <a:spcAft>
+                <a:spcPts val="600"/>
+              </a:spcAft>
+            </a:pPr>
+            <a:r>
+              <a:rPr sz="600">
+                <a:solidFill>
+                  <a:srgbClr val="D98E04"/>
+                </a:solidFill>
+                <a:latin typeface="Microsoft JhengHei"/>
+              </a:rPr>
+              <a:t>●  </a:t>
+            </a:r>
+            <a:r>
+              <a:rPr sz="1000">
+                <a:solidFill>
+                  <a:srgbClr val="334455"/>
+                </a:solidFill>
+                <a:latin typeface="Microsoft JhengHei"/>
+              </a:rPr>
+              <a:t>主文寫「原處分撤銷」不寫「另為處分」，且不附教示——格式上最容易錯的細節</a:t>
+            </a:r>
+          </a:p>
+        </p:txBody>
+      </p:sp>
+      <p:sp>
+        <p:nvSpPr>
+          <p:cNvPr id="26" name="TextBox 25"/>
+          <p:cNvSpPr txBox="1"/>
+          <p:nvPr/>
+        </p:nvSpPr>
+        <p:spPr>
+          <a:xfrm>
+            <a:off x="640080" y="5760720"/>
+            <a:ext cx="10881360" cy="457200"/>
+          </a:xfrm>
+          <a:prstGeom prst="rect">
+            <a:avLst/>
+          </a:prstGeom>
+          <a:noFill/>
+        </p:spPr>
+        <p:txBody>
+          <a:bodyPr wrap="square" anchor="t" lIns="45720" rIns="45720" tIns="27432" bIns="27432">
+            <a:spAutoFit/>
+          </a:bodyPr>
+          <a:lstStyle/>
+          <a:p>
+            <a:pPr algn="l"/>
+            <a:r>
+              <a:rPr sz="950" b="0">
+                <a:solidFill>
+                  <a:srgbClr val="8A93A0"/>
+                </a:solidFill>
+                <a:latin typeface="Microsoft JhengHei"/>
+              </a:rPr>
+              <a:t>理由段論證點涵蓋 18／21；缺的 3 項是次要法條引用（行政程序法 §72／§73、申報辦法附表 1），不是判斷錯誤。比對腳本：experiments/eval/compare_truth.py</a:t>
             </a:r>
           </a:p>
         </p:txBody>
@@ -10395,2079 +10526,6 @@
 </file>
 
 <file path=ppt/slides/slide8.xml><?xml version="1.0" encoding="utf-8"?>
-<p:sld xmlns:a="http://schemas.openxmlformats.org/drawingml/2006/main" xmlns:p="http://schemas.openxmlformats.org/presentationml/2006/main" xmlns:r="http://schemas.openxmlformats.org/officeDocument/2006/relationships">
-  <p:cSld>
-    <p:spTree>
-      <p:nvGrpSpPr>
-        <p:cNvPr id="1" name=""/>
-        <p:cNvGrpSpPr/>
-        <p:nvPr/>
-      </p:nvGrpSpPr>
-      <p:grpSpPr/>
-      <p:sp>
-        <p:nvSpPr>
-          <p:cNvPr id="2" name="Rectangle 1"/>
-          <p:cNvSpPr/>
-          <p:nvPr/>
-        </p:nvSpPr>
-        <p:spPr>
-          <a:xfrm>
-            <a:off x="0" y="0"/>
-            <a:ext cx="9509760" cy="73152"/>
-          </a:xfrm>
-          <a:prstGeom prst="rect">
-            <a:avLst/>
-          </a:prstGeom>
-          <a:solidFill>
-            <a:srgbClr val="16304F"/>
-          </a:solidFill>
-          <a:ln>
-            <a:noFill/>
-          </a:ln>
-          <a:effectLst/>
-        </p:spPr>
-        <p:style>
-          <a:lnRef idx="1">
-            <a:schemeClr val="accent1"/>
-          </a:lnRef>
-          <a:fillRef idx="3">
-            <a:schemeClr val="accent1"/>
-          </a:fillRef>
-          <a:effectRef idx="2">
-            <a:schemeClr val="accent1"/>
-          </a:effectRef>
-          <a:fontRef idx="minor">
-            <a:schemeClr val="lt1"/>
-          </a:fontRef>
-        </p:style>
-        <p:txBody>
-          <a:bodyPr rtlCol="0" anchor="ctr"/>
-          <a:lstStyle/>
-          <a:p>
-            <a:pPr algn="ctr"/>
-          </a:p>
-        </p:txBody>
-      </p:sp>
-      <p:sp>
-        <p:nvSpPr>
-          <p:cNvPr id="3" name="Rectangle 2"/>
-          <p:cNvSpPr/>
-          <p:nvPr/>
-        </p:nvSpPr>
-        <p:spPr>
-          <a:xfrm>
-            <a:off x="9509760" y="0"/>
-            <a:ext cx="2681935" cy="73152"/>
-          </a:xfrm>
-          <a:prstGeom prst="rect">
-            <a:avLst/>
-          </a:prstGeom>
-          <a:solidFill>
-            <a:srgbClr val="D98E04"/>
-          </a:solidFill>
-          <a:ln>
-            <a:noFill/>
-          </a:ln>
-          <a:effectLst/>
-        </p:spPr>
-        <p:style>
-          <a:lnRef idx="1">
-            <a:schemeClr val="accent1"/>
-          </a:lnRef>
-          <a:fillRef idx="3">
-            <a:schemeClr val="accent1"/>
-          </a:fillRef>
-          <a:effectRef idx="2">
-            <a:schemeClr val="accent1"/>
-          </a:effectRef>
-          <a:fontRef idx="minor">
-            <a:schemeClr val="lt1"/>
-          </a:fontRef>
-        </p:style>
-        <p:txBody>
-          <a:bodyPr rtlCol="0" anchor="ctr"/>
-          <a:lstStyle/>
-          <a:p>
-            <a:pPr algn="ctr"/>
-          </a:p>
-        </p:txBody>
-      </p:sp>
-      <p:sp>
-        <p:nvSpPr>
-          <p:cNvPr id="4" name="TextBox 3"/>
-          <p:cNvSpPr txBox="1"/>
-          <p:nvPr/>
-        </p:nvSpPr>
-        <p:spPr>
-          <a:xfrm>
-            <a:off x="640080" y="384048"/>
-            <a:ext cx="7315200" cy="274320"/>
-          </a:xfrm>
-          <a:prstGeom prst="rect">
-            <a:avLst/>
-          </a:prstGeom>
-          <a:noFill/>
-        </p:spPr>
-        <p:txBody>
-          <a:bodyPr wrap="square" anchor="t" lIns="45720" rIns="45720" tIns="27432" bIns="27432">
-            <a:spAutoFit/>
-          </a:bodyPr>
-          <a:lstStyle/>
-          <a:p>
-            <a:pPr algn="l"/>
-            <a:r>
-              <a:rPr sz="1100" b="1">
-                <a:solidFill>
-                  <a:srgbClr val="D98E04"/>
-                </a:solidFill>
-                <a:latin typeface="Microsoft JhengHei"/>
-              </a:rPr>
-              <a:t>07 ／ 完成度與評分</a:t>
-            </a:r>
-          </a:p>
-        </p:txBody>
-      </p:sp>
-      <p:sp>
-        <p:nvSpPr>
-          <p:cNvPr id="5" name="TextBox 4"/>
-          <p:cNvSpPr txBox="1"/>
-          <p:nvPr/>
-        </p:nvSpPr>
-        <p:spPr>
-          <a:xfrm>
-            <a:off x="640080" y="603504"/>
-            <a:ext cx="10972800" cy="731520"/>
-          </a:xfrm>
-          <a:prstGeom prst="rect">
-            <a:avLst/>
-          </a:prstGeom>
-          <a:noFill/>
-        </p:spPr>
-        <p:txBody>
-          <a:bodyPr wrap="square" anchor="t" lIns="45720" rIns="45720" tIns="27432" bIns="27432">
-            <a:spAutoFit/>
-          </a:bodyPr>
-          <a:lstStyle/>
-          <a:p>
-            <a:pPr algn="l"/>
-            <a:r>
-              <a:rPr sz="2800" b="1">
-                <a:solidFill>
-                  <a:srgbClr val="16304F"/>
-                </a:solidFill>
-                <a:latin typeface="Microsoft JhengHei"/>
-              </a:rPr>
-              <a:t>今天做到哪裡</a:t>
-            </a:r>
-          </a:p>
-        </p:txBody>
-      </p:sp>
-      <p:sp>
-        <p:nvSpPr>
-          <p:cNvPr id="6" name="Rectangle 5"/>
-          <p:cNvSpPr/>
-          <p:nvPr/>
-        </p:nvSpPr>
-        <p:spPr>
-          <a:xfrm>
-            <a:off x="640080" y="6400800"/>
-            <a:ext cx="10908792" cy="9144"/>
-          </a:xfrm>
-          <a:prstGeom prst="rect">
-            <a:avLst/>
-          </a:prstGeom>
-          <a:solidFill>
-            <a:srgbClr val="E6EAF0"/>
-          </a:solidFill>
-          <a:ln>
-            <a:noFill/>
-          </a:ln>
-          <a:effectLst/>
-        </p:spPr>
-        <p:style>
-          <a:lnRef idx="1">
-            <a:schemeClr val="accent1"/>
-          </a:lnRef>
-          <a:fillRef idx="3">
-            <a:schemeClr val="accent1"/>
-          </a:fillRef>
-          <a:effectRef idx="2">
-            <a:schemeClr val="accent1"/>
-          </a:effectRef>
-          <a:fontRef idx="minor">
-            <a:schemeClr val="lt1"/>
-          </a:fontRef>
-        </p:style>
-        <p:txBody>
-          <a:bodyPr rtlCol="0" anchor="ctr"/>
-          <a:lstStyle/>
-          <a:p>
-            <a:pPr algn="ctr"/>
-          </a:p>
-        </p:txBody>
-      </p:sp>
-      <p:sp>
-        <p:nvSpPr>
-          <p:cNvPr id="7" name="TextBox 6"/>
-          <p:cNvSpPr txBox="1"/>
-          <p:nvPr/>
-        </p:nvSpPr>
-        <p:spPr>
-          <a:xfrm>
-            <a:off x="640080" y="6428232"/>
-            <a:ext cx="7315200" cy="274320"/>
-          </a:xfrm>
-          <a:prstGeom prst="rect">
-            <a:avLst/>
-          </a:prstGeom>
-          <a:noFill/>
-        </p:spPr>
-        <p:txBody>
-          <a:bodyPr wrap="square" anchor="t" lIns="45720" rIns="45720" tIns="27432" bIns="27432">
-            <a:spAutoFit/>
-          </a:bodyPr>
-          <a:lstStyle/>
-          <a:p>
-            <a:pPr algn="l"/>
-            <a:r>
-              <a:rPr sz="950" b="0">
-                <a:solidFill>
-                  <a:srgbClr val="8A93A0"/>
-                </a:solidFill>
-                <a:latin typeface="Microsoft JhengHei"/>
-              </a:rPr>
-              <a:t>訴願智審臺 ｜ 2026 新北市 AI 智慧城市黑客松・法制局組</a:t>
-            </a:r>
-          </a:p>
-        </p:txBody>
-      </p:sp>
-      <p:sp>
-        <p:nvSpPr>
-          <p:cNvPr id="8" name="TextBox 7"/>
-          <p:cNvSpPr txBox="1"/>
-          <p:nvPr/>
-        </p:nvSpPr>
-        <p:spPr>
-          <a:xfrm>
-            <a:off x="10607040" y="6428232"/>
-            <a:ext cx="941832" cy="274320"/>
-          </a:xfrm>
-          <a:prstGeom prst="rect">
-            <a:avLst/>
-          </a:prstGeom>
-          <a:noFill/>
-        </p:spPr>
-        <p:txBody>
-          <a:bodyPr wrap="square" anchor="t" lIns="45720" rIns="45720" tIns="27432" bIns="27432">
-            <a:spAutoFit/>
-          </a:bodyPr>
-          <a:lstStyle/>
-          <a:p>
-            <a:pPr algn="r"/>
-            <a:r>
-              <a:rPr sz="950" b="0">
-                <a:solidFill>
-                  <a:srgbClr val="8A93A0"/>
-                </a:solidFill>
-                <a:latin typeface="Microsoft JhengHei"/>
-              </a:rPr>
-              <a:t>8 / 9</a:t>
-            </a:r>
-          </a:p>
-        </p:txBody>
-      </p:sp>
-      <p:sp>
-        <p:nvSpPr>
-          <p:cNvPr id="9" name="Oval 8"/>
-          <p:cNvSpPr/>
-          <p:nvPr/>
-        </p:nvSpPr>
-        <p:spPr>
-          <a:xfrm>
-            <a:off x="640080" y="1691639"/>
-            <a:ext cx="228600" cy="228600"/>
-          </a:xfrm>
-          <a:prstGeom prst="ellipse">
-            <a:avLst/>
-          </a:prstGeom>
-          <a:solidFill>
-            <a:srgbClr val="2E7D32"/>
-          </a:solidFill>
-          <a:ln>
-            <a:noFill/>
-          </a:ln>
-          <a:effectLst/>
-        </p:spPr>
-        <p:style>
-          <a:lnRef idx="1">
-            <a:schemeClr val="accent1"/>
-          </a:lnRef>
-          <a:fillRef idx="3">
-            <a:schemeClr val="accent1"/>
-          </a:fillRef>
-          <a:effectRef idx="2">
-            <a:schemeClr val="accent1"/>
-          </a:effectRef>
-          <a:fontRef idx="minor">
-            <a:schemeClr val="lt1"/>
-          </a:fontRef>
-        </p:style>
-        <p:txBody>
-          <a:bodyPr rtlCol="0" anchor="ctr" lIns="0" rIns="0" tIns="0" bIns="0"/>
-          <a:lstStyle/>
-          <a:p>
-            <a:pPr algn="ctr"/>
-            <a:r>
-              <a:rPr sz="1300" b="1">
-                <a:solidFill>
-                  <a:srgbClr val="FFFFFF"/>
-                </a:solidFill>
-                <a:latin typeface="Microsoft JhengHei"/>
-              </a:rPr>
-              <a:t/>
-            </a:r>
-          </a:p>
-        </p:txBody>
-      </p:sp>
-      <p:sp>
-        <p:nvSpPr>
-          <p:cNvPr id="10" name="TextBox 9"/>
-          <p:cNvSpPr txBox="1"/>
-          <p:nvPr/>
-        </p:nvSpPr>
-        <p:spPr>
-          <a:xfrm>
-            <a:off x="1005840" y="1554480"/>
-            <a:ext cx="4389120" cy="502920"/>
-          </a:xfrm>
-          <a:prstGeom prst="rect">
-            <a:avLst/>
-          </a:prstGeom>
-          <a:noFill/>
-        </p:spPr>
-        <p:txBody>
-          <a:bodyPr wrap="square" anchor="ctr" lIns="45720" rIns="45720" tIns="27432" bIns="27432">
-            <a:spAutoFit/>
-          </a:bodyPr>
-          <a:lstStyle/>
-          <a:p>
-            <a:pPr algn="l"/>
-            <a:r>
-              <a:rPr sz="1500" b="0">
-                <a:solidFill>
-                  <a:srgbClr val="16304F"/>
-                </a:solidFill>
-                <a:latin typeface="Microsoft JhengHei"/>
-              </a:rPr>
-              <a:t>卷證分類</a:t>
-            </a:r>
-          </a:p>
-        </p:txBody>
-      </p:sp>
-      <p:sp>
-        <p:nvSpPr>
-          <p:cNvPr id="11" name="Rectangle 10"/>
-          <p:cNvSpPr/>
-          <p:nvPr/>
-        </p:nvSpPr>
-        <p:spPr>
-          <a:xfrm>
-            <a:off x="640080" y="2029967"/>
-            <a:ext cx="4754880" cy="9144"/>
-          </a:xfrm>
-          <a:prstGeom prst="rect">
-            <a:avLst/>
-          </a:prstGeom>
-          <a:solidFill>
-            <a:srgbClr val="E6EAF0"/>
-          </a:solidFill>
-          <a:ln>
-            <a:noFill/>
-          </a:ln>
-          <a:effectLst/>
-        </p:spPr>
-        <p:style>
-          <a:lnRef idx="1">
-            <a:schemeClr val="accent1"/>
-          </a:lnRef>
-          <a:fillRef idx="3">
-            <a:schemeClr val="accent1"/>
-          </a:fillRef>
-          <a:effectRef idx="2">
-            <a:schemeClr val="accent1"/>
-          </a:effectRef>
-          <a:fontRef idx="minor">
-            <a:schemeClr val="lt1"/>
-          </a:fontRef>
-        </p:style>
-        <p:txBody>
-          <a:bodyPr rtlCol="0" anchor="ctr"/>
-          <a:lstStyle/>
-          <a:p>
-            <a:pPr algn="ctr"/>
-          </a:p>
-        </p:txBody>
-      </p:sp>
-      <p:sp>
-        <p:nvSpPr>
-          <p:cNvPr id="12" name="Oval 11"/>
-          <p:cNvSpPr/>
-          <p:nvPr/>
-        </p:nvSpPr>
-        <p:spPr>
-          <a:xfrm>
-            <a:off x="640080" y="2194560"/>
-            <a:ext cx="228600" cy="228600"/>
-          </a:xfrm>
-          <a:prstGeom prst="ellipse">
-            <a:avLst/>
-          </a:prstGeom>
-          <a:solidFill>
-            <a:srgbClr val="2E7D32"/>
-          </a:solidFill>
-          <a:ln>
-            <a:noFill/>
-          </a:ln>
-          <a:effectLst/>
-        </p:spPr>
-        <p:style>
-          <a:lnRef idx="1">
-            <a:schemeClr val="accent1"/>
-          </a:lnRef>
-          <a:fillRef idx="3">
-            <a:schemeClr val="accent1"/>
-          </a:fillRef>
-          <a:effectRef idx="2">
-            <a:schemeClr val="accent1"/>
-          </a:effectRef>
-          <a:fontRef idx="minor">
-            <a:schemeClr val="lt1"/>
-          </a:fontRef>
-        </p:style>
-        <p:txBody>
-          <a:bodyPr rtlCol="0" anchor="ctr" lIns="0" rIns="0" tIns="0" bIns="0"/>
-          <a:lstStyle/>
-          <a:p>
-            <a:pPr algn="ctr"/>
-            <a:r>
-              <a:rPr sz="1300" b="1">
-                <a:solidFill>
-                  <a:srgbClr val="FFFFFF"/>
-                </a:solidFill>
-                <a:latin typeface="Microsoft JhengHei"/>
-              </a:rPr>
-              <a:t/>
-            </a:r>
-          </a:p>
-        </p:txBody>
-      </p:sp>
-      <p:sp>
-        <p:nvSpPr>
-          <p:cNvPr id="13" name="TextBox 12"/>
-          <p:cNvSpPr txBox="1"/>
-          <p:nvPr/>
-        </p:nvSpPr>
-        <p:spPr>
-          <a:xfrm>
-            <a:off x="1005840" y="2057400"/>
-            <a:ext cx="4389120" cy="502920"/>
-          </a:xfrm>
-          <a:prstGeom prst="rect">
-            <a:avLst/>
-          </a:prstGeom>
-          <a:noFill/>
-        </p:spPr>
-        <p:txBody>
-          <a:bodyPr wrap="square" anchor="ctr" lIns="45720" rIns="45720" tIns="27432" bIns="27432">
-            <a:spAutoFit/>
-          </a:bodyPr>
-          <a:lstStyle/>
-          <a:p>
-            <a:pPr algn="l"/>
-            <a:r>
-              <a:rPr sz="1500" b="0">
-                <a:solidFill>
-                  <a:srgbClr val="16304F"/>
-                </a:solidFill>
-                <a:latin typeface="Microsoft JhengHei"/>
-              </a:rPr>
-              <a:t>五項分析</a:t>
-            </a:r>
-          </a:p>
-        </p:txBody>
-      </p:sp>
-      <p:sp>
-        <p:nvSpPr>
-          <p:cNvPr id="14" name="Rectangle 13"/>
-          <p:cNvSpPr/>
-          <p:nvPr/>
-        </p:nvSpPr>
-        <p:spPr>
-          <a:xfrm>
-            <a:off x="640080" y="2532888"/>
-            <a:ext cx="4754880" cy="9144"/>
-          </a:xfrm>
-          <a:prstGeom prst="rect">
-            <a:avLst/>
-          </a:prstGeom>
-          <a:solidFill>
-            <a:srgbClr val="E6EAF0"/>
-          </a:solidFill>
-          <a:ln>
-            <a:noFill/>
-          </a:ln>
-          <a:effectLst/>
-        </p:spPr>
-        <p:style>
-          <a:lnRef idx="1">
-            <a:schemeClr val="accent1"/>
-          </a:lnRef>
-          <a:fillRef idx="3">
-            <a:schemeClr val="accent1"/>
-          </a:fillRef>
-          <a:effectRef idx="2">
-            <a:schemeClr val="accent1"/>
-          </a:effectRef>
-          <a:fontRef idx="minor">
-            <a:schemeClr val="lt1"/>
-          </a:fontRef>
-        </p:style>
-        <p:txBody>
-          <a:bodyPr rtlCol="0" anchor="ctr"/>
-          <a:lstStyle/>
-          <a:p>
-            <a:pPr algn="ctr"/>
-          </a:p>
-        </p:txBody>
-      </p:sp>
-      <p:sp>
-        <p:nvSpPr>
-          <p:cNvPr id="15" name="Oval 14"/>
-          <p:cNvSpPr/>
-          <p:nvPr/>
-        </p:nvSpPr>
-        <p:spPr>
-          <a:xfrm>
-            <a:off x="640080" y="2697479"/>
-            <a:ext cx="228600" cy="228600"/>
-          </a:xfrm>
-          <a:prstGeom prst="ellipse">
-            <a:avLst/>
-          </a:prstGeom>
-          <a:solidFill>
-            <a:srgbClr val="2E7D32"/>
-          </a:solidFill>
-          <a:ln>
-            <a:noFill/>
-          </a:ln>
-          <a:effectLst/>
-        </p:spPr>
-        <p:style>
-          <a:lnRef idx="1">
-            <a:schemeClr val="accent1"/>
-          </a:lnRef>
-          <a:fillRef idx="3">
-            <a:schemeClr val="accent1"/>
-          </a:fillRef>
-          <a:effectRef idx="2">
-            <a:schemeClr val="accent1"/>
-          </a:effectRef>
-          <a:fontRef idx="minor">
-            <a:schemeClr val="lt1"/>
-          </a:fontRef>
-        </p:style>
-        <p:txBody>
-          <a:bodyPr rtlCol="0" anchor="ctr" lIns="0" rIns="0" tIns="0" bIns="0"/>
-          <a:lstStyle/>
-          <a:p>
-            <a:pPr algn="ctr"/>
-            <a:r>
-              <a:rPr sz="1300" b="1">
-                <a:solidFill>
-                  <a:srgbClr val="FFFFFF"/>
-                </a:solidFill>
-                <a:latin typeface="Microsoft JhengHei"/>
-              </a:rPr>
-              <a:t/>
-            </a:r>
-          </a:p>
-        </p:txBody>
-      </p:sp>
-      <p:sp>
-        <p:nvSpPr>
-          <p:cNvPr id="16" name="TextBox 15"/>
-          <p:cNvSpPr txBox="1"/>
-          <p:nvPr/>
-        </p:nvSpPr>
-        <p:spPr>
-          <a:xfrm>
-            <a:off x="1005840" y="2560320"/>
-            <a:ext cx="4389120" cy="502920"/>
-          </a:xfrm>
-          <a:prstGeom prst="rect">
-            <a:avLst/>
-          </a:prstGeom>
-          <a:noFill/>
-        </p:spPr>
-        <p:txBody>
-          <a:bodyPr wrap="square" anchor="ctr" lIns="45720" rIns="45720" tIns="27432" bIns="27432">
-            <a:spAutoFit/>
-          </a:bodyPr>
-          <a:lstStyle/>
-          <a:p>
-            <a:pPr algn="l"/>
-            <a:r>
-              <a:rPr sz="1500" b="0">
-                <a:solidFill>
-                  <a:srgbClr val="16304F"/>
-                </a:solidFill>
-                <a:latin typeface="Microsoft JhengHei"/>
-              </a:rPr>
-              <a:t>修正 → 確認 → 局部重算</a:t>
-            </a:r>
-          </a:p>
-        </p:txBody>
-      </p:sp>
-      <p:sp>
-        <p:nvSpPr>
-          <p:cNvPr id="17" name="Rectangle 16"/>
-          <p:cNvSpPr/>
-          <p:nvPr/>
-        </p:nvSpPr>
-        <p:spPr>
-          <a:xfrm>
-            <a:off x="640080" y="3035808"/>
-            <a:ext cx="4754880" cy="9144"/>
-          </a:xfrm>
-          <a:prstGeom prst="rect">
-            <a:avLst/>
-          </a:prstGeom>
-          <a:solidFill>
-            <a:srgbClr val="E6EAF0"/>
-          </a:solidFill>
-          <a:ln>
-            <a:noFill/>
-          </a:ln>
-          <a:effectLst/>
-        </p:spPr>
-        <p:style>
-          <a:lnRef idx="1">
-            <a:schemeClr val="accent1"/>
-          </a:lnRef>
-          <a:fillRef idx="3">
-            <a:schemeClr val="accent1"/>
-          </a:fillRef>
-          <a:effectRef idx="2">
-            <a:schemeClr val="accent1"/>
-          </a:effectRef>
-          <a:fontRef idx="minor">
-            <a:schemeClr val="lt1"/>
-          </a:fontRef>
-        </p:style>
-        <p:txBody>
-          <a:bodyPr rtlCol="0" anchor="ctr"/>
-          <a:lstStyle/>
-          <a:p>
-            <a:pPr algn="ctr"/>
-          </a:p>
-        </p:txBody>
-      </p:sp>
-      <p:sp>
-        <p:nvSpPr>
-          <p:cNvPr id="18" name="Oval 17"/>
-          <p:cNvSpPr/>
-          <p:nvPr/>
-        </p:nvSpPr>
-        <p:spPr>
-          <a:xfrm>
-            <a:off x="640080" y="3200400"/>
-            <a:ext cx="228600" cy="228600"/>
-          </a:xfrm>
-          <a:prstGeom prst="ellipse">
-            <a:avLst/>
-          </a:prstGeom>
-          <a:solidFill>
-            <a:srgbClr val="2E7D32"/>
-          </a:solidFill>
-          <a:ln>
-            <a:noFill/>
-          </a:ln>
-          <a:effectLst/>
-        </p:spPr>
-        <p:style>
-          <a:lnRef idx="1">
-            <a:schemeClr val="accent1"/>
-          </a:lnRef>
-          <a:fillRef idx="3">
-            <a:schemeClr val="accent1"/>
-          </a:fillRef>
-          <a:effectRef idx="2">
-            <a:schemeClr val="accent1"/>
-          </a:effectRef>
-          <a:fontRef idx="minor">
-            <a:schemeClr val="lt1"/>
-          </a:fontRef>
-        </p:style>
-        <p:txBody>
-          <a:bodyPr rtlCol="0" anchor="ctr" lIns="0" rIns="0" tIns="0" bIns="0"/>
-          <a:lstStyle/>
-          <a:p>
-            <a:pPr algn="ctr"/>
-            <a:r>
-              <a:rPr sz="1300" b="1">
-                <a:solidFill>
-                  <a:srgbClr val="FFFFFF"/>
-                </a:solidFill>
-                <a:latin typeface="Microsoft JhengHei"/>
-              </a:rPr>
-              <a:t/>
-            </a:r>
-          </a:p>
-        </p:txBody>
-      </p:sp>
-      <p:sp>
-        <p:nvSpPr>
-          <p:cNvPr id="19" name="TextBox 18"/>
-          <p:cNvSpPr txBox="1"/>
-          <p:nvPr/>
-        </p:nvSpPr>
-        <p:spPr>
-          <a:xfrm>
-            <a:off x="1005840" y="3063240"/>
-            <a:ext cx="4389120" cy="502920"/>
-          </a:xfrm>
-          <a:prstGeom prst="rect">
-            <a:avLst/>
-          </a:prstGeom>
-          <a:noFill/>
-        </p:spPr>
-        <p:txBody>
-          <a:bodyPr wrap="square" anchor="ctr" lIns="45720" rIns="45720" tIns="27432" bIns="27432">
-            <a:spAutoFit/>
-          </a:bodyPr>
-          <a:lstStyle/>
-          <a:p>
-            <a:pPr algn="l"/>
-            <a:r>
-              <a:rPr sz="1500" b="0">
-                <a:solidFill>
-                  <a:srgbClr val="16304F"/>
-                </a:solidFill>
-                <a:latin typeface="Microsoft JhengHei"/>
-              </a:rPr>
-              <a:t>法規庫同步</a:t>
-            </a:r>
-          </a:p>
-        </p:txBody>
-      </p:sp>
-      <p:sp>
-        <p:nvSpPr>
-          <p:cNvPr id="20" name="Rectangle 19"/>
-          <p:cNvSpPr/>
-          <p:nvPr/>
-        </p:nvSpPr>
-        <p:spPr>
-          <a:xfrm>
-            <a:off x="640080" y="3538728"/>
-            <a:ext cx="4754880" cy="9144"/>
-          </a:xfrm>
-          <a:prstGeom prst="rect">
-            <a:avLst/>
-          </a:prstGeom>
-          <a:solidFill>
-            <a:srgbClr val="E6EAF0"/>
-          </a:solidFill>
-          <a:ln>
-            <a:noFill/>
-          </a:ln>
-          <a:effectLst/>
-        </p:spPr>
-        <p:style>
-          <a:lnRef idx="1">
-            <a:schemeClr val="accent1"/>
-          </a:lnRef>
-          <a:fillRef idx="3">
-            <a:schemeClr val="accent1"/>
-          </a:fillRef>
-          <a:effectRef idx="2">
-            <a:schemeClr val="accent1"/>
-          </a:effectRef>
-          <a:fontRef idx="minor">
-            <a:schemeClr val="lt1"/>
-          </a:fontRef>
-        </p:style>
-        <p:txBody>
-          <a:bodyPr rtlCol="0" anchor="ctr"/>
-          <a:lstStyle/>
-          <a:p>
-            <a:pPr algn="ctr"/>
-          </a:p>
-        </p:txBody>
-      </p:sp>
-      <p:sp>
-        <p:nvSpPr>
-          <p:cNvPr id="21" name="Oval 20"/>
-          <p:cNvSpPr/>
-          <p:nvPr/>
-        </p:nvSpPr>
-        <p:spPr>
-          <a:xfrm>
-            <a:off x="640080" y="3703320"/>
-            <a:ext cx="228600" cy="228600"/>
-          </a:xfrm>
-          <a:prstGeom prst="ellipse">
-            <a:avLst/>
-          </a:prstGeom>
-          <a:solidFill>
-            <a:srgbClr val="2E7D32"/>
-          </a:solidFill>
-          <a:ln>
-            <a:noFill/>
-          </a:ln>
-          <a:effectLst/>
-        </p:spPr>
-        <p:style>
-          <a:lnRef idx="1">
-            <a:schemeClr val="accent1"/>
-          </a:lnRef>
-          <a:fillRef idx="3">
-            <a:schemeClr val="accent1"/>
-          </a:fillRef>
-          <a:effectRef idx="2">
-            <a:schemeClr val="accent1"/>
-          </a:effectRef>
-          <a:fontRef idx="minor">
-            <a:schemeClr val="lt1"/>
-          </a:fontRef>
-        </p:style>
-        <p:txBody>
-          <a:bodyPr rtlCol="0" anchor="ctr" lIns="0" rIns="0" tIns="0" bIns="0"/>
-          <a:lstStyle/>
-          <a:p>
-            <a:pPr algn="ctr"/>
-            <a:r>
-              <a:rPr sz="1300" b="1">
-                <a:solidFill>
-                  <a:srgbClr val="FFFFFF"/>
-                </a:solidFill>
-                <a:latin typeface="Microsoft JhengHei"/>
-              </a:rPr>
-              <a:t/>
-            </a:r>
-          </a:p>
-        </p:txBody>
-      </p:sp>
-      <p:sp>
-        <p:nvSpPr>
-          <p:cNvPr id="22" name="TextBox 21"/>
-          <p:cNvSpPr txBox="1"/>
-          <p:nvPr/>
-        </p:nvSpPr>
-        <p:spPr>
-          <a:xfrm>
-            <a:off x="1005840" y="3566160"/>
-            <a:ext cx="4389120" cy="502920"/>
-          </a:xfrm>
-          <a:prstGeom prst="rect">
-            <a:avLst/>
-          </a:prstGeom>
-          <a:noFill/>
-        </p:spPr>
-        <p:txBody>
-          <a:bodyPr wrap="square" anchor="ctr" lIns="45720" rIns="45720" tIns="27432" bIns="27432">
-            <a:spAutoFit/>
-          </a:bodyPr>
-          <a:lstStyle/>
-          <a:p>
-            <a:pPr algn="l"/>
-            <a:r>
-              <a:rPr sz="1500" b="0">
-                <a:solidFill>
-                  <a:srgbClr val="16304F"/>
-                </a:solidFill>
-                <a:latin typeface="Microsoft JhengHei"/>
-              </a:rPr>
-              <a:t>畫面全部連到線上系統</a:t>
-            </a:r>
-          </a:p>
-        </p:txBody>
-      </p:sp>
-      <p:sp>
-        <p:nvSpPr>
-          <p:cNvPr id="23" name="Rectangle 22"/>
-          <p:cNvSpPr/>
-          <p:nvPr/>
-        </p:nvSpPr>
-        <p:spPr>
-          <a:xfrm>
-            <a:off x="640080" y="4041648"/>
-            <a:ext cx="4754880" cy="9144"/>
-          </a:xfrm>
-          <a:prstGeom prst="rect">
-            <a:avLst/>
-          </a:prstGeom>
-          <a:solidFill>
-            <a:srgbClr val="E6EAF0"/>
-          </a:solidFill>
-          <a:ln>
-            <a:noFill/>
-          </a:ln>
-          <a:effectLst/>
-        </p:spPr>
-        <p:style>
-          <a:lnRef idx="1">
-            <a:schemeClr val="accent1"/>
-          </a:lnRef>
-          <a:fillRef idx="3">
-            <a:schemeClr val="accent1"/>
-          </a:fillRef>
-          <a:effectRef idx="2">
-            <a:schemeClr val="accent1"/>
-          </a:effectRef>
-          <a:fontRef idx="minor">
-            <a:schemeClr val="lt1"/>
-          </a:fontRef>
-        </p:style>
-        <p:txBody>
-          <a:bodyPr rtlCol="0" anchor="ctr"/>
-          <a:lstStyle/>
-          <a:p>
-            <a:pPr algn="ctr"/>
-          </a:p>
-        </p:txBody>
-      </p:sp>
-      <p:sp>
-        <p:nvSpPr>
-          <p:cNvPr id="24" name="Oval 23"/>
-          <p:cNvSpPr/>
-          <p:nvPr/>
-        </p:nvSpPr>
-        <p:spPr>
-          <a:xfrm>
-            <a:off x="640080" y="4206240"/>
-            <a:ext cx="228600" cy="228600"/>
-          </a:xfrm>
-          <a:prstGeom prst="ellipse">
-            <a:avLst/>
-          </a:prstGeom>
-          <a:solidFill>
-            <a:srgbClr val="2E7D32"/>
-          </a:solidFill>
-          <a:ln>
-            <a:noFill/>
-          </a:ln>
-          <a:effectLst/>
-        </p:spPr>
-        <p:style>
-          <a:lnRef idx="1">
-            <a:schemeClr val="accent1"/>
-          </a:lnRef>
-          <a:fillRef idx="3">
-            <a:schemeClr val="accent1"/>
-          </a:fillRef>
-          <a:effectRef idx="2">
-            <a:schemeClr val="accent1"/>
-          </a:effectRef>
-          <a:fontRef idx="minor">
-            <a:schemeClr val="lt1"/>
-          </a:fontRef>
-        </p:style>
-        <p:txBody>
-          <a:bodyPr rtlCol="0" anchor="ctr" lIns="0" rIns="0" tIns="0" bIns="0"/>
-          <a:lstStyle/>
-          <a:p>
-            <a:pPr algn="ctr"/>
-            <a:r>
-              <a:rPr sz="1300" b="1">
-                <a:solidFill>
-                  <a:srgbClr val="FFFFFF"/>
-                </a:solidFill>
-                <a:latin typeface="Microsoft JhengHei"/>
-              </a:rPr>
-              <a:t/>
-            </a:r>
-          </a:p>
-        </p:txBody>
-      </p:sp>
-      <p:sp>
-        <p:nvSpPr>
-          <p:cNvPr id="25" name="TextBox 24"/>
-          <p:cNvSpPr txBox="1"/>
-          <p:nvPr/>
-        </p:nvSpPr>
-        <p:spPr>
-          <a:xfrm>
-            <a:off x="1005840" y="4069080"/>
-            <a:ext cx="4389120" cy="502920"/>
-          </a:xfrm>
-          <a:prstGeom prst="rect">
-            <a:avLst/>
-          </a:prstGeom>
-          <a:noFill/>
-        </p:spPr>
-        <p:txBody>
-          <a:bodyPr wrap="square" anchor="ctr" lIns="45720" rIns="45720" tIns="27432" bIns="27432">
-            <a:spAutoFit/>
-          </a:bodyPr>
-          <a:lstStyle/>
-          <a:p>
-            <a:pPr algn="l"/>
-            <a:r>
-              <a:rPr sz="1500" b="0">
-                <a:solidFill>
-                  <a:srgbClr val="16304F"/>
-                </a:solidFill>
-                <a:latin typeface="Microsoft JhengHei"/>
-              </a:rPr>
-              <a:t>自動化測試 52 個</a:t>
-            </a:r>
-          </a:p>
-        </p:txBody>
-      </p:sp>
-      <p:sp>
-        <p:nvSpPr>
-          <p:cNvPr id="26" name="Rectangle 25"/>
-          <p:cNvSpPr/>
-          <p:nvPr/>
-        </p:nvSpPr>
-        <p:spPr>
-          <a:xfrm>
-            <a:off x="640080" y="4544568"/>
-            <a:ext cx="4754880" cy="9144"/>
-          </a:xfrm>
-          <a:prstGeom prst="rect">
-            <a:avLst/>
-          </a:prstGeom>
-          <a:solidFill>
-            <a:srgbClr val="E6EAF0"/>
-          </a:solidFill>
-          <a:ln>
-            <a:noFill/>
-          </a:ln>
-          <a:effectLst/>
-        </p:spPr>
-        <p:style>
-          <a:lnRef idx="1">
-            <a:schemeClr val="accent1"/>
-          </a:lnRef>
-          <a:fillRef idx="3">
-            <a:schemeClr val="accent1"/>
-          </a:fillRef>
-          <a:effectRef idx="2">
-            <a:schemeClr val="accent1"/>
-          </a:effectRef>
-          <a:fontRef idx="minor">
-            <a:schemeClr val="lt1"/>
-          </a:fontRef>
-        </p:style>
-        <p:txBody>
-          <a:bodyPr rtlCol="0" anchor="ctr"/>
-          <a:lstStyle/>
-          <a:p>
-            <a:pPr algn="ctr"/>
-          </a:p>
-        </p:txBody>
-      </p:sp>
-      <p:sp>
-        <p:nvSpPr>
-          <p:cNvPr id="27" name="Oval 26"/>
-          <p:cNvSpPr/>
-          <p:nvPr/>
-        </p:nvSpPr>
-        <p:spPr>
-          <a:xfrm>
-            <a:off x="640080" y="4709160"/>
-            <a:ext cx="228600" cy="228600"/>
-          </a:xfrm>
-          <a:prstGeom prst="ellipse">
-            <a:avLst/>
-          </a:prstGeom>
-          <a:solidFill>
-            <a:srgbClr val="D98E04"/>
-          </a:solidFill>
-          <a:ln>
-            <a:noFill/>
-          </a:ln>
-          <a:effectLst/>
-        </p:spPr>
-        <p:style>
-          <a:lnRef idx="1">
-            <a:schemeClr val="accent1"/>
-          </a:lnRef>
-          <a:fillRef idx="3">
-            <a:schemeClr val="accent1"/>
-          </a:fillRef>
-          <a:effectRef idx="2">
-            <a:schemeClr val="accent1"/>
-          </a:effectRef>
-          <a:fontRef idx="minor">
-            <a:schemeClr val="lt1"/>
-          </a:fontRef>
-        </p:style>
-        <p:txBody>
-          <a:bodyPr rtlCol="0" anchor="ctr" lIns="0" rIns="0" tIns="0" bIns="0"/>
-          <a:lstStyle/>
-          <a:p>
-            <a:pPr algn="ctr"/>
-            <a:r>
-              <a:rPr sz="1300" b="1">
-                <a:solidFill>
-                  <a:srgbClr val="FFFFFF"/>
-                </a:solidFill>
-                <a:latin typeface="Microsoft JhengHei"/>
-              </a:rPr>
-              <a:t/>
-            </a:r>
-          </a:p>
-        </p:txBody>
-      </p:sp>
-      <p:sp>
-        <p:nvSpPr>
-          <p:cNvPr id="28" name="TextBox 27"/>
-          <p:cNvSpPr txBox="1"/>
-          <p:nvPr/>
-        </p:nvSpPr>
-        <p:spPr>
-          <a:xfrm>
-            <a:off x="1005840" y="4572000"/>
-            <a:ext cx="4389120" cy="502920"/>
-          </a:xfrm>
-          <a:prstGeom prst="rect">
-            <a:avLst/>
-          </a:prstGeom>
-          <a:noFill/>
-        </p:spPr>
-        <p:txBody>
-          <a:bodyPr wrap="square" anchor="ctr" lIns="45720" rIns="45720" tIns="27432" bIns="27432">
-            <a:spAutoFit/>
-          </a:bodyPr>
-          <a:lstStyle/>
-          <a:p>
-            <a:pPr algn="l"/>
-            <a:r>
-              <a:rPr sz="1500" b="0">
-                <a:solidFill>
-                  <a:srgbClr val="16304F"/>
-                </a:solidFill>
-                <a:latin typeface="Microsoft JhengHei"/>
-              </a:rPr>
-              <a:t>補件辨識</a:t>
-            </a:r>
-          </a:p>
-        </p:txBody>
-      </p:sp>
-      <p:sp>
-        <p:nvSpPr>
-          <p:cNvPr id="29" name="Rectangle 28"/>
-          <p:cNvSpPr/>
-          <p:nvPr/>
-        </p:nvSpPr>
-        <p:spPr>
-          <a:xfrm>
-            <a:off x="640080" y="5047488"/>
-            <a:ext cx="4754880" cy="9144"/>
-          </a:xfrm>
-          <a:prstGeom prst="rect">
-            <a:avLst/>
-          </a:prstGeom>
-          <a:solidFill>
-            <a:srgbClr val="E6EAF0"/>
-          </a:solidFill>
-          <a:ln>
-            <a:noFill/>
-          </a:ln>
-          <a:effectLst/>
-        </p:spPr>
-        <p:style>
-          <a:lnRef idx="1">
-            <a:schemeClr val="accent1"/>
-          </a:lnRef>
-          <a:fillRef idx="3">
-            <a:schemeClr val="accent1"/>
-          </a:fillRef>
-          <a:effectRef idx="2">
-            <a:schemeClr val="accent1"/>
-          </a:effectRef>
-          <a:fontRef idx="minor">
-            <a:schemeClr val="lt1"/>
-          </a:fontRef>
-        </p:style>
-        <p:txBody>
-          <a:bodyPr rtlCol="0" anchor="ctr"/>
-          <a:lstStyle/>
-          <a:p>
-            <a:pPr algn="ctr"/>
-          </a:p>
-        </p:txBody>
-      </p:sp>
-      <p:sp>
-        <p:nvSpPr>
-          <p:cNvPr id="30" name="Oval 29"/>
-          <p:cNvSpPr/>
-          <p:nvPr/>
-        </p:nvSpPr>
-        <p:spPr>
-          <a:xfrm>
-            <a:off x="640080" y="5212080"/>
-            <a:ext cx="228600" cy="228600"/>
-          </a:xfrm>
-          <a:prstGeom prst="ellipse">
-            <a:avLst/>
-          </a:prstGeom>
-          <a:solidFill>
-            <a:srgbClr val="C5CDD8"/>
-          </a:solidFill>
-          <a:ln>
-            <a:noFill/>
-          </a:ln>
-          <a:effectLst/>
-        </p:spPr>
-        <p:style>
-          <a:lnRef idx="1">
-            <a:schemeClr val="accent1"/>
-          </a:lnRef>
-          <a:fillRef idx="3">
-            <a:schemeClr val="accent1"/>
-          </a:fillRef>
-          <a:effectRef idx="2">
-            <a:schemeClr val="accent1"/>
-          </a:effectRef>
-          <a:fontRef idx="minor">
-            <a:schemeClr val="lt1"/>
-          </a:fontRef>
-        </p:style>
-        <p:txBody>
-          <a:bodyPr rtlCol="0" anchor="ctr" lIns="0" rIns="0" tIns="0" bIns="0"/>
-          <a:lstStyle/>
-          <a:p>
-            <a:pPr algn="ctr"/>
-            <a:r>
-              <a:rPr sz="1300" b="1">
-                <a:solidFill>
-                  <a:srgbClr val="FFFFFF"/>
-                </a:solidFill>
-                <a:latin typeface="Microsoft JhengHei"/>
-              </a:rPr>
-              <a:t/>
-            </a:r>
-          </a:p>
-        </p:txBody>
-      </p:sp>
-      <p:sp>
-        <p:nvSpPr>
-          <p:cNvPr id="31" name="TextBox 30"/>
-          <p:cNvSpPr txBox="1"/>
-          <p:nvPr/>
-        </p:nvSpPr>
-        <p:spPr>
-          <a:xfrm>
-            <a:off x="1005840" y="5074920"/>
-            <a:ext cx="4389120" cy="502920"/>
-          </a:xfrm>
-          <a:prstGeom prst="rect">
-            <a:avLst/>
-          </a:prstGeom>
-          <a:noFill/>
-        </p:spPr>
-        <p:txBody>
-          <a:bodyPr wrap="square" anchor="ctr" lIns="45720" rIns="45720" tIns="27432" bIns="27432">
-            <a:spAutoFit/>
-          </a:bodyPr>
-          <a:lstStyle/>
-          <a:p>
-            <a:pPr algn="l"/>
-            <a:r>
-              <a:rPr sz="1500" b="0">
-                <a:solidFill>
-                  <a:srgbClr val="16304F"/>
-                </a:solidFill>
-                <a:latin typeface="Microsoft JhengHei"/>
-              </a:rPr>
-              <a:t>登入／HTTPS</a:t>
-            </a:r>
-          </a:p>
-        </p:txBody>
-      </p:sp>
-      <p:sp>
-        <p:nvSpPr>
-          <p:cNvPr id="32" name="Rectangle 31"/>
-          <p:cNvSpPr/>
-          <p:nvPr/>
-        </p:nvSpPr>
-        <p:spPr>
-          <a:xfrm>
-            <a:off x="640080" y="5550408"/>
-            <a:ext cx="4754880" cy="9144"/>
-          </a:xfrm>
-          <a:prstGeom prst="rect">
-            <a:avLst/>
-          </a:prstGeom>
-          <a:solidFill>
-            <a:srgbClr val="E6EAF0"/>
-          </a:solidFill>
-          <a:ln>
-            <a:noFill/>
-          </a:ln>
-          <a:effectLst/>
-        </p:spPr>
-        <p:style>
-          <a:lnRef idx="1">
-            <a:schemeClr val="accent1"/>
-          </a:lnRef>
-          <a:fillRef idx="3">
-            <a:schemeClr val="accent1"/>
-          </a:fillRef>
-          <a:effectRef idx="2">
-            <a:schemeClr val="accent1"/>
-          </a:effectRef>
-          <a:fontRef idx="minor">
-            <a:schemeClr val="lt1"/>
-          </a:fontRef>
-        </p:style>
-        <p:txBody>
-          <a:bodyPr rtlCol="0" anchor="ctr"/>
-          <a:lstStyle/>
-          <a:p>
-            <a:pPr algn="ctr"/>
-          </a:p>
-        </p:txBody>
-      </p:sp>
-      <p:sp>
-        <p:nvSpPr>
-          <p:cNvPr id="33" name="Rounded Rectangle 32"/>
-          <p:cNvSpPr/>
-          <p:nvPr/>
-        </p:nvSpPr>
-        <p:spPr>
-          <a:xfrm>
-            <a:off x="5943600" y="1554480"/>
-            <a:ext cx="2697480" cy="1691640"/>
-          </a:xfrm>
-          <a:prstGeom prst="roundRect">
-            <a:avLst>
-              <a:gd name="adj" fmla="val 8000"/>
-            </a:avLst>
-          </a:prstGeom>
-          <a:solidFill>
-            <a:srgbClr val="F4F6F9"/>
-          </a:solidFill>
-          <a:ln>
-            <a:noFill/>
-          </a:ln>
-          <a:effectLst/>
-        </p:spPr>
-        <p:style>
-          <a:lnRef idx="1">
-            <a:schemeClr val="accent1"/>
-          </a:lnRef>
-          <a:fillRef idx="3">
-            <a:schemeClr val="accent1"/>
-          </a:fillRef>
-          <a:effectRef idx="2">
-            <a:schemeClr val="accent1"/>
-          </a:effectRef>
-          <a:fontRef idx="minor">
-            <a:schemeClr val="lt1"/>
-          </a:fontRef>
-        </p:style>
-        <p:txBody>
-          <a:bodyPr rtlCol="0" anchor="ctr"/>
-          <a:lstStyle/>
-          <a:p>
-            <a:pPr algn="ctr"/>
-          </a:p>
-        </p:txBody>
-      </p:sp>
-      <p:sp>
-        <p:nvSpPr>
-          <p:cNvPr id="34" name="TextBox 33"/>
-          <p:cNvSpPr txBox="1"/>
-          <p:nvPr/>
-        </p:nvSpPr>
-        <p:spPr>
-          <a:xfrm>
-            <a:off x="6108192" y="1664207"/>
-            <a:ext cx="2377440" cy="640080"/>
-          </a:xfrm>
-          <a:prstGeom prst="rect">
-            <a:avLst/>
-          </a:prstGeom>
-          <a:noFill/>
-        </p:spPr>
-        <p:txBody>
-          <a:bodyPr wrap="square" anchor="t" lIns="45720" rIns="45720" tIns="27432" bIns="27432">
-            <a:spAutoFit/>
-          </a:bodyPr>
-          <a:lstStyle/>
-          <a:p>
-            <a:pPr algn="l"/>
-            <a:r>
-              <a:rPr sz="3000" b="1">
-                <a:solidFill>
-                  <a:srgbClr val="16304F"/>
-                </a:solidFill>
-                <a:latin typeface="Microsoft JhengHei"/>
-              </a:rPr>
-              <a:t>20%</a:t>
-            </a:r>
-          </a:p>
-        </p:txBody>
-      </p:sp>
-      <p:sp>
-        <p:nvSpPr>
-          <p:cNvPr id="35" name="TextBox 34"/>
-          <p:cNvSpPr txBox="1"/>
-          <p:nvPr/>
-        </p:nvSpPr>
-        <p:spPr>
-          <a:xfrm>
-            <a:off x="6108192" y="2286000"/>
-            <a:ext cx="2377440" cy="365760"/>
-          </a:xfrm>
-          <a:prstGeom prst="rect">
-            <a:avLst/>
-          </a:prstGeom>
-          <a:noFill/>
-        </p:spPr>
-        <p:txBody>
-          <a:bodyPr wrap="square" anchor="t" lIns="45720" rIns="45720" tIns="27432" bIns="27432">
-            <a:spAutoFit/>
-          </a:bodyPr>
-          <a:lstStyle/>
-          <a:p>
-            <a:pPr algn="l"/>
-            <a:r>
-              <a:rPr sz="1400" b="1">
-                <a:solidFill>
-                  <a:srgbClr val="16304F"/>
-                </a:solidFill>
-                <a:latin typeface="Microsoft JhengHei"/>
-              </a:rPr>
-              <a:t>技術可行性</a:t>
-            </a:r>
-          </a:p>
-        </p:txBody>
-      </p:sp>
-      <p:sp>
-        <p:nvSpPr>
-          <p:cNvPr id="36" name="TextBox 35"/>
-          <p:cNvSpPr txBox="1"/>
-          <p:nvPr/>
-        </p:nvSpPr>
-        <p:spPr>
-          <a:xfrm>
-            <a:off x="6108192" y="2633472"/>
-            <a:ext cx="2377440" cy="548640"/>
-          </a:xfrm>
-          <a:prstGeom prst="rect">
-            <a:avLst/>
-          </a:prstGeom>
-          <a:noFill/>
-        </p:spPr>
-        <p:txBody>
-          <a:bodyPr wrap="square" anchor="t" lIns="45720" rIns="45720" tIns="27432" bIns="27432">
-            <a:spAutoFit/>
-          </a:bodyPr>
-          <a:lstStyle/>
-          <a:p>
-            <a:pPr algn="l"/>
-            <a:r>
-              <a:rPr sz="1050" b="0">
-                <a:solidFill>
-                  <a:srgbClr val="334455"/>
-                </a:solidFill>
-                <a:latin typeface="Microsoft JhengHei"/>
-              </a:rPr>
-              <a:t>允許清單內；呼叫頻率限制下固定流程</a:t>
-            </a:r>
-          </a:p>
-        </p:txBody>
-      </p:sp>
-      <p:sp>
-        <p:nvSpPr>
-          <p:cNvPr id="37" name="Rounded Rectangle 36"/>
-          <p:cNvSpPr/>
-          <p:nvPr/>
-        </p:nvSpPr>
-        <p:spPr>
-          <a:xfrm>
-            <a:off x="8778240" y="1554480"/>
-            <a:ext cx="2697480" cy="1691640"/>
-          </a:xfrm>
-          <a:prstGeom prst="roundRect">
-            <a:avLst>
-              <a:gd name="adj" fmla="val 8000"/>
-            </a:avLst>
-          </a:prstGeom>
-          <a:solidFill>
-            <a:srgbClr val="F4F6F9"/>
-          </a:solidFill>
-          <a:ln>
-            <a:noFill/>
-          </a:ln>
-          <a:effectLst/>
-        </p:spPr>
-        <p:style>
-          <a:lnRef idx="1">
-            <a:schemeClr val="accent1"/>
-          </a:lnRef>
-          <a:fillRef idx="3">
-            <a:schemeClr val="accent1"/>
-          </a:fillRef>
-          <a:effectRef idx="2">
-            <a:schemeClr val="accent1"/>
-          </a:effectRef>
-          <a:fontRef idx="minor">
-            <a:schemeClr val="lt1"/>
-          </a:fontRef>
-        </p:style>
-        <p:txBody>
-          <a:bodyPr rtlCol="0" anchor="ctr"/>
-          <a:lstStyle/>
-          <a:p>
-            <a:pPr algn="ctr"/>
-          </a:p>
-        </p:txBody>
-      </p:sp>
-      <p:sp>
-        <p:nvSpPr>
-          <p:cNvPr id="38" name="TextBox 37"/>
-          <p:cNvSpPr txBox="1"/>
-          <p:nvPr/>
-        </p:nvSpPr>
-        <p:spPr>
-          <a:xfrm>
-            <a:off x="8942832" y="1664207"/>
-            <a:ext cx="2377440" cy="640080"/>
-          </a:xfrm>
-          <a:prstGeom prst="rect">
-            <a:avLst/>
-          </a:prstGeom>
-          <a:noFill/>
-        </p:spPr>
-        <p:txBody>
-          <a:bodyPr wrap="square" anchor="t" lIns="45720" rIns="45720" tIns="27432" bIns="27432">
-            <a:spAutoFit/>
-          </a:bodyPr>
-          <a:lstStyle/>
-          <a:p>
-            <a:pPr algn="l"/>
-            <a:r>
-              <a:rPr sz="3000" b="1">
-                <a:solidFill>
-                  <a:srgbClr val="16304F"/>
-                </a:solidFill>
-                <a:latin typeface="Microsoft JhengHei"/>
-              </a:rPr>
-              <a:t>25%</a:t>
-            </a:r>
-          </a:p>
-        </p:txBody>
-      </p:sp>
-      <p:sp>
-        <p:nvSpPr>
-          <p:cNvPr id="39" name="TextBox 38"/>
-          <p:cNvSpPr txBox="1"/>
-          <p:nvPr/>
-        </p:nvSpPr>
-        <p:spPr>
-          <a:xfrm>
-            <a:off x="8942832" y="2286000"/>
-            <a:ext cx="2377440" cy="365760"/>
-          </a:xfrm>
-          <a:prstGeom prst="rect">
-            <a:avLst/>
-          </a:prstGeom>
-          <a:noFill/>
-        </p:spPr>
-        <p:txBody>
-          <a:bodyPr wrap="square" anchor="t" lIns="45720" rIns="45720" tIns="27432" bIns="27432">
-            <a:spAutoFit/>
-          </a:bodyPr>
-          <a:lstStyle/>
-          <a:p>
-            <a:pPr algn="l"/>
-            <a:r>
-              <a:rPr sz="1400" b="1">
-                <a:solidFill>
-                  <a:srgbClr val="16304F"/>
-                </a:solidFill>
-                <a:latin typeface="Microsoft JhengHei"/>
-              </a:rPr>
-              <a:t>完成度</a:t>
-            </a:r>
-          </a:p>
-        </p:txBody>
-      </p:sp>
-      <p:sp>
-        <p:nvSpPr>
-          <p:cNvPr id="40" name="TextBox 39"/>
-          <p:cNvSpPr txBox="1"/>
-          <p:nvPr/>
-        </p:nvSpPr>
-        <p:spPr>
-          <a:xfrm>
-            <a:off x="8942832" y="2633472"/>
-            <a:ext cx="2377440" cy="548640"/>
-          </a:xfrm>
-          <a:prstGeom prst="rect">
-            <a:avLst/>
-          </a:prstGeom>
-          <a:noFill/>
-        </p:spPr>
-        <p:txBody>
-          <a:bodyPr wrap="square" anchor="t" lIns="45720" rIns="45720" tIns="27432" bIns="27432">
-            <a:spAutoFit/>
-          </a:bodyPr>
-          <a:lstStyle/>
-          <a:p>
-            <a:pPr algn="l"/>
-            <a:r>
-              <a:rPr sz="1050" b="0">
-                <a:solidFill>
-                  <a:srgbClr val="334455"/>
-                </a:solidFill>
-                <a:latin typeface="Microsoft JhengHei"/>
-              </a:rPr>
-              <a:t>Live Demo 走完整流程；52 個測試</a:t>
-            </a:r>
-          </a:p>
-        </p:txBody>
-      </p:sp>
-      <p:sp>
-        <p:nvSpPr>
-          <p:cNvPr id="41" name="Rounded Rectangle 40"/>
-          <p:cNvSpPr/>
-          <p:nvPr/>
-        </p:nvSpPr>
-        <p:spPr>
-          <a:xfrm>
-            <a:off x="5943600" y="3383280"/>
-            <a:ext cx="2697480" cy="1691640"/>
-          </a:xfrm>
-          <a:prstGeom prst="roundRect">
-            <a:avLst>
-              <a:gd name="adj" fmla="val 8000"/>
-            </a:avLst>
-          </a:prstGeom>
-          <a:solidFill>
-            <a:srgbClr val="F4F6F9"/>
-          </a:solidFill>
-          <a:ln>
-            <a:noFill/>
-          </a:ln>
-          <a:effectLst/>
-        </p:spPr>
-        <p:style>
-          <a:lnRef idx="1">
-            <a:schemeClr val="accent1"/>
-          </a:lnRef>
-          <a:fillRef idx="3">
-            <a:schemeClr val="accent1"/>
-          </a:fillRef>
-          <a:effectRef idx="2">
-            <a:schemeClr val="accent1"/>
-          </a:effectRef>
-          <a:fontRef idx="minor">
-            <a:schemeClr val="lt1"/>
-          </a:fontRef>
-        </p:style>
-        <p:txBody>
-          <a:bodyPr rtlCol="0" anchor="ctr"/>
-          <a:lstStyle/>
-          <a:p>
-            <a:pPr algn="ctr"/>
-          </a:p>
-        </p:txBody>
-      </p:sp>
-      <p:sp>
-        <p:nvSpPr>
-          <p:cNvPr id="42" name="TextBox 41"/>
-          <p:cNvSpPr txBox="1"/>
-          <p:nvPr/>
-        </p:nvSpPr>
-        <p:spPr>
-          <a:xfrm>
-            <a:off x="6108192" y="3493008"/>
-            <a:ext cx="2377440" cy="640080"/>
-          </a:xfrm>
-          <a:prstGeom prst="rect">
-            <a:avLst/>
-          </a:prstGeom>
-          <a:noFill/>
-        </p:spPr>
-        <p:txBody>
-          <a:bodyPr wrap="square" anchor="t" lIns="45720" rIns="45720" tIns="27432" bIns="27432">
-            <a:spAutoFit/>
-          </a:bodyPr>
-          <a:lstStyle/>
-          <a:p>
-            <a:pPr algn="l"/>
-            <a:r>
-              <a:rPr sz="3000" b="1">
-                <a:solidFill>
-                  <a:srgbClr val="16304F"/>
-                </a:solidFill>
-                <a:latin typeface="Microsoft JhengHei"/>
-              </a:rPr>
-              <a:t>30%</a:t>
-            </a:r>
-          </a:p>
-        </p:txBody>
-      </p:sp>
-      <p:sp>
-        <p:nvSpPr>
-          <p:cNvPr id="43" name="TextBox 42"/>
-          <p:cNvSpPr txBox="1"/>
-          <p:nvPr/>
-        </p:nvSpPr>
-        <p:spPr>
-          <a:xfrm>
-            <a:off x="6108192" y="4114800"/>
-            <a:ext cx="2377440" cy="365760"/>
-          </a:xfrm>
-          <a:prstGeom prst="rect">
-            <a:avLst/>
-          </a:prstGeom>
-          <a:noFill/>
-        </p:spPr>
-        <p:txBody>
-          <a:bodyPr wrap="square" anchor="t" lIns="45720" rIns="45720" tIns="27432" bIns="27432">
-            <a:spAutoFit/>
-          </a:bodyPr>
-          <a:lstStyle/>
-          <a:p>
-            <a:pPr algn="l"/>
-            <a:r>
-              <a:rPr sz="1400" b="1">
-                <a:solidFill>
-                  <a:srgbClr val="16304F"/>
-                </a:solidFill>
-                <a:latin typeface="Microsoft JhengHei"/>
-              </a:rPr>
-              <a:t>資料應用性</a:t>
-            </a:r>
-          </a:p>
-        </p:txBody>
-      </p:sp>
-      <p:sp>
-        <p:nvSpPr>
-          <p:cNvPr id="44" name="TextBox 43"/>
-          <p:cNvSpPr txBox="1"/>
-          <p:nvPr/>
-        </p:nvSpPr>
-        <p:spPr>
-          <a:xfrm>
-            <a:off x="6108192" y="4462272"/>
-            <a:ext cx="2377440" cy="548640"/>
-          </a:xfrm>
-          <a:prstGeom prst="rect">
-            <a:avLst/>
-          </a:prstGeom>
-          <a:noFill/>
-        </p:spPr>
-        <p:txBody>
-          <a:bodyPr wrap="square" anchor="t" lIns="45720" rIns="45720" tIns="27432" bIns="27432">
-            <a:spAutoFit/>
-          </a:bodyPr>
-          <a:lstStyle/>
-          <a:p>
-            <a:pPr algn="l"/>
-            <a:r>
-              <a:rPr sz="1050" b="0">
-                <a:solidFill>
-                  <a:srgbClr val="334455"/>
-                </a:solidFill>
-                <a:latin typeface="Microsoft JhengHei"/>
-              </a:rPr>
-              <a:t>101 份讀完再設計；三套考題</a:t>
-            </a:r>
-          </a:p>
-        </p:txBody>
-      </p:sp>
-      <p:sp>
-        <p:nvSpPr>
-          <p:cNvPr id="45" name="Rounded Rectangle 44"/>
-          <p:cNvSpPr/>
-          <p:nvPr/>
-        </p:nvSpPr>
-        <p:spPr>
-          <a:xfrm>
-            <a:off x="8778240" y="3383280"/>
-            <a:ext cx="2697480" cy="1691640"/>
-          </a:xfrm>
-          <a:prstGeom prst="roundRect">
-            <a:avLst>
-              <a:gd name="adj" fmla="val 8000"/>
-            </a:avLst>
-          </a:prstGeom>
-          <a:solidFill>
-            <a:srgbClr val="F4F6F9"/>
-          </a:solidFill>
-          <a:ln>
-            <a:noFill/>
-          </a:ln>
-          <a:effectLst/>
-        </p:spPr>
-        <p:style>
-          <a:lnRef idx="1">
-            <a:schemeClr val="accent1"/>
-          </a:lnRef>
-          <a:fillRef idx="3">
-            <a:schemeClr val="accent1"/>
-          </a:fillRef>
-          <a:effectRef idx="2">
-            <a:schemeClr val="accent1"/>
-          </a:effectRef>
-          <a:fontRef idx="minor">
-            <a:schemeClr val="lt1"/>
-          </a:fontRef>
-        </p:style>
-        <p:txBody>
-          <a:bodyPr rtlCol="0" anchor="ctr"/>
-          <a:lstStyle/>
-          <a:p>
-            <a:pPr algn="ctr"/>
-          </a:p>
-        </p:txBody>
-      </p:sp>
-      <p:sp>
-        <p:nvSpPr>
-          <p:cNvPr id="46" name="TextBox 45"/>
-          <p:cNvSpPr txBox="1"/>
-          <p:nvPr/>
-        </p:nvSpPr>
-        <p:spPr>
-          <a:xfrm>
-            <a:off x="8942832" y="3493008"/>
-            <a:ext cx="2377440" cy="640080"/>
-          </a:xfrm>
-          <a:prstGeom prst="rect">
-            <a:avLst/>
-          </a:prstGeom>
-          <a:noFill/>
-        </p:spPr>
-        <p:txBody>
-          <a:bodyPr wrap="square" anchor="t" lIns="45720" rIns="45720" tIns="27432" bIns="27432">
-            <a:spAutoFit/>
-          </a:bodyPr>
-          <a:lstStyle/>
-          <a:p>
-            <a:pPr algn="l"/>
-            <a:r>
-              <a:rPr sz="3000" b="1">
-                <a:solidFill>
-                  <a:srgbClr val="16304F"/>
-                </a:solidFill>
-                <a:latin typeface="Microsoft JhengHei"/>
-              </a:rPr>
-              <a:t>25%</a:t>
-            </a:r>
-          </a:p>
-        </p:txBody>
-      </p:sp>
-      <p:sp>
-        <p:nvSpPr>
-          <p:cNvPr id="47" name="TextBox 46"/>
-          <p:cNvSpPr txBox="1"/>
-          <p:nvPr/>
-        </p:nvSpPr>
-        <p:spPr>
-          <a:xfrm>
-            <a:off x="8942832" y="4114800"/>
-            <a:ext cx="2377440" cy="365760"/>
-          </a:xfrm>
-          <a:prstGeom prst="rect">
-            <a:avLst/>
-          </a:prstGeom>
-          <a:noFill/>
-        </p:spPr>
-        <p:txBody>
-          <a:bodyPr wrap="square" anchor="t" lIns="45720" rIns="45720" tIns="27432" bIns="27432">
-            <a:spAutoFit/>
-          </a:bodyPr>
-          <a:lstStyle/>
-          <a:p>
-            <a:pPr algn="l"/>
-            <a:r>
-              <a:rPr sz="1400" b="1">
-                <a:solidFill>
-                  <a:srgbClr val="16304F"/>
-                </a:solidFill>
-                <a:latin typeface="Microsoft JhengHei"/>
-              </a:rPr>
-              <a:t>主題契合度</a:t>
-            </a:r>
-          </a:p>
-        </p:txBody>
-      </p:sp>
-      <p:sp>
-        <p:nvSpPr>
-          <p:cNvPr id="48" name="TextBox 47"/>
-          <p:cNvSpPr txBox="1"/>
-          <p:nvPr/>
-        </p:nvSpPr>
-        <p:spPr>
-          <a:xfrm>
-            <a:off x="8942832" y="4462272"/>
-            <a:ext cx="2377440" cy="548640"/>
-          </a:xfrm>
-          <a:prstGeom prst="rect">
-            <a:avLst/>
-          </a:prstGeom>
-          <a:noFill/>
-        </p:spPr>
-        <p:txBody>
-          <a:bodyPr wrap="square" anchor="t" lIns="45720" rIns="45720" tIns="27432" bIns="27432">
-            <a:spAutoFit/>
-          </a:bodyPr>
-          <a:lstStyle/>
-          <a:p>
-            <a:pPr algn="l"/>
-            <a:r>
-              <a:rPr sz="1050" b="0">
-                <a:solidFill>
-                  <a:srgbClr val="334455"/>
-                </a:solidFill>
-                <a:latin typeface="Microsoft JhengHei"/>
-              </a:rPr>
-              <a:t>四大功能對應；輔助不取代</a:t>
-            </a:r>
-          </a:p>
-        </p:txBody>
-      </p:sp>
-      <p:sp>
-        <p:nvSpPr>
-          <p:cNvPr id="49" name="Rectangle 48"/>
-          <p:cNvSpPr/>
-          <p:nvPr/>
-        </p:nvSpPr>
-        <p:spPr>
-          <a:xfrm>
-            <a:off x="640080" y="5623560"/>
-            <a:ext cx="10908792" cy="566928"/>
-          </a:xfrm>
-          <a:prstGeom prst="rect">
-            <a:avLst/>
-          </a:prstGeom>
-          <a:solidFill>
-            <a:srgbClr val="FFF8EA"/>
-          </a:solidFill>
-          <a:ln>
-            <a:noFill/>
-          </a:ln>
-          <a:effectLst/>
-        </p:spPr>
-        <p:style>
-          <a:lnRef idx="1">
-            <a:schemeClr val="accent1"/>
-          </a:lnRef>
-          <a:fillRef idx="3">
-            <a:schemeClr val="accent1"/>
-          </a:fillRef>
-          <a:effectRef idx="2">
-            <a:schemeClr val="accent1"/>
-          </a:effectRef>
-          <a:fontRef idx="minor">
-            <a:schemeClr val="lt1"/>
-          </a:fontRef>
-        </p:style>
-        <p:txBody>
-          <a:bodyPr rtlCol="0" anchor="ctr"/>
-          <a:lstStyle/>
-          <a:p>
-            <a:pPr algn="ctr"/>
-          </a:p>
-        </p:txBody>
-      </p:sp>
-      <p:sp>
-        <p:nvSpPr>
-          <p:cNvPr id="50" name="Rectangle 49"/>
-          <p:cNvSpPr/>
-          <p:nvPr/>
-        </p:nvSpPr>
-        <p:spPr>
-          <a:xfrm>
-            <a:off x="640080" y="5623560"/>
-            <a:ext cx="64008" cy="566928"/>
-          </a:xfrm>
-          <a:prstGeom prst="rect">
-            <a:avLst/>
-          </a:prstGeom>
-          <a:solidFill>
-            <a:srgbClr val="D98E04"/>
-          </a:solidFill>
-          <a:ln>
-            <a:noFill/>
-          </a:ln>
-          <a:effectLst/>
-        </p:spPr>
-        <p:style>
-          <a:lnRef idx="1">
-            <a:schemeClr val="accent1"/>
-          </a:lnRef>
-          <a:fillRef idx="3">
-            <a:schemeClr val="accent1"/>
-          </a:fillRef>
-          <a:effectRef idx="2">
-            <a:schemeClr val="accent1"/>
-          </a:effectRef>
-          <a:fontRef idx="minor">
-            <a:schemeClr val="lt1"/>
-          </a:fontRef>
-        </p:style>
-        <p:txBody>
-          <a:bodyPr rtlCol="0" anchor="ctr"/>
-          <a:lstStyle/>
-          <a:p>
-            <a:pPr algn="ctr"/>
-          </a:p>
-        </p:txBody>
-      </p:sp>
-      <p:sp>
-        <p:nvSpPr>
-          <p:cNvPr id="51" name="TextBox 50"/>
-          <p:cNvSpPr txBox="1"/>
-          <p:nvPr/>
-        </p:nvSpPr>
-        <p:spPr>
-          <a:xfrm>
-            <a:off x="822960" y="5641848"/>
-            <a:ext cx="10607040" cy="548640"/>
-          </a:xfrm>
-          <a:prstGeom prst="rect">
-            <a:avLst/>
-          </a:prstGeom>
-          <a:noFill/>
-        </p:spPr>
-        <p:txBody>
-          <a:bodyPr wrap="square" anchor="ctr" lIns="45720" rIns="45720" tIns="27432" bIns="27432">
-            <a:spAutoFit/>
-          </a:bodyPr>
-          <a:lstStyle/>
-          <a:p>
-            <a:pPr algn="l"/>
-            <a:r>
-              <a:rPr sz="1350" b="0">
-                <a:solidFill>
-                  <a:srgbClr val="334455"/>
-                </a:solidFill>
-                <a:latin typeface="Microsoft JhengHei"/>
-              </a:rPr>
-              <a:t>Live Demo　http://100.20.156.38/　— 所有畫面都是線上現跑的</a:t>
-            </a:r>
-          </a:p>
-        </p:txBody>
-      </p:sp>
-    </p:spTree>
-  </p:cSld>
-  <p:clrMapOvr>
-    <a:masterClrMapping/>
-  </p:clrMapOvr>
-</p:sld>
-</file>
-
-<file path=ppt/slides/slide9.xml><?xml version="1.0" encoding="utf-8"?>
 <p:sld xmlns:a="http://schemas.openxmlformats.org/drawingml/2006/main" xmlns:p="http://schemas.openxmlformats.org/presentationml/2006/main" xmlns:r="http://schemas.openxmlformats.org/officeDocument/2006/relationships">
   <p:cSld>
     <p:spTree>

--- a/docs/提案/提案簡報-訴願智審臺.pptx
+++ b/docs/提案/提案簡報-訴願智審臺.pptx
@@ -10732,121 +10732,7 @@
                 </a:solidFill>
                 <a:latin typeface="Microsoft JhengHei"/>
               </a:rPr>
-              <a:t>謝謝，請指教</a:t>
-            </a:r>
-          </a:p>
-        </p:txBody>
-      </p:sp>
-      <p:sp>
-        <p:nvSpPr>
-          <p:cNvPr id="7" name="TextBox 6"/>
-          <p:cNvSpPr txBox="1"/>
-          <p:nvPr/>
-        </p:nvSpPr>
-        <p:spPr>
-          <a:xfrm>
-            <a:off x="914400" y="3794760"/>
-            <a:ext cx="10515600" cy="548640"/>
-          </a:xfrm>
-          <a:prstGeom prst="rect">
-            <a:avLst/>
-          </a:prstGeom>
-          <a:noFill/>
-        </p:spPr>
-        <p:txBody>
-          <a:bodyPr wrap="square" anchor="t" lIns="45720" rIns="45720" tIns="27432" bIns="27432">
-            <a:spAutoFit/>
-          </a:bodyPr>
-          <a:lstStyle/>
-          <a:p>
-            <a:pPr algn="l"/>
-            <a:r>
-              <a:rPr sz="2100" b="0">
-                <a:solidFill>
-                  <a:srgbClr val="C9D6E6"/>
-                </a:solidFill>
-                <a:latin typeface="Microsoft JhengHei"/>
-              </a:rPr>
-              <a:t>接下來：補件、法規自動更新、洗錢與空污案型</a:t>
-            </a:r>
-          </a:p>
-        </p:txBody>
-      </p:sp>
-      <p:sp>
-        <p:nvSpPr>
-          <p:cNvPr id="8" name="Rectangle 7"/>
-          <p:cNvSpPr/>
-          <p:nvPr/>
-        </p:nvSpPr>
-        <p:spPr>
-          <a:xfrm>
-            <a:off x="914400" y="4480560"/>
-            <a:ext cx="45720" cy="685800"/>
-          </a:xfrm>
-          <a:prstGeom prst="rect">
-            <a:avLst/>
-          </a:prstGeom>
-          <a:solidFill>
-            <a:srgbClr val="D98E04"/>
-          </a:solidFill>
-          <a:ln>
-            <a:noFill/>
-          </a:ln>
-          <a:effectLst/>
-        </p:spPr>
-        <p:style>
-          <a:lnRef idx="1">
-            <a:schemeClr val="accent1"/>
-          </a:lnRef>
-          <a:fillRef idx="3">
-            <a:schemeClr val="accent1"/>
-          </a:fillRef>
-          <a:effectRef idx="2">
-            <a:schemeClr val="accent1"/>
-          </a:effectRef>
-          <a:fontRef idx="minor">
-            <a:schemeClr val="lt1"/>
-          </a:fontRef>
-        </p:style>
-        <p:txBody>
-          <a:bodyPr rtlCol="0" anchor="ctr"/>
-          <a:lstStyle/>
-          <a:p>
-            <a:pPr algn="ctr"/>
-          </a:p>
-        </p:txBody>
-      </p:sp>
-      <p:sp>
-        <p:nvSpPr>
-          <p:cNvPr id="9" name="TextBox 8"/>
-          <p:cNvSpPr txBox="1"/>
-          <p:nvPr/>
-        </p:nvSpPr>
-        <p:spPr>
-          <a:xfrm>
-            <a:off x="1051560" y="4434840"/>
-            <a:ext cx="9144000" cy="822960"/>
-          </a:xfrm>
-          <a:prstGeom prst="rect">
-            <a:avLst/>
-          </a:prstGeom>
-          <a:noFill/>
-        </p:spPr>
-        <p:txBody>
-          <a:bodyPr wrap="square" anchor="t" lIns="45720" rIns="45720" tIns="27432" bIns="27432">
-            <a:spAutoFit/>
-          </a:bodyPr>
-          <a:lstStyle/>
-          <a:p>
-            <a:pPr algn="l"/>
-            <a:r>
-              <a:rPr sz="1700" b="0">
-                <a:solidFill>
-                  <a:srgbClr val="E6EDF5"/>
-                </a:solidFill>
-                <a:latin typeface="Microsoft JhengHei"/>
-              </a:rPr>
-              <a:t>Live Demo　http://100.20.156.38/　　GitHub　完整原始碼＋三套考題</a:t>
+              <a:t>感謝聆聽</a:t>
             </a:r>
           </a:p>
         </p:txBody>

--- a/docs/提案/提案簡報-訴願智審臺.pptx
+++ b/docs/提案/提案簡報-訴願智審臺.pptx
@@ -9093,7 +9093,7 @@
                 </a:solidFill>
                 <a:latin typeface="Microsoft JhengHei"/>
               </a:rPr>
-              <a:t>三個真實案件：主文、條款、期間、時效，全部與決定書一致</a:t>
+              <a:t>三個案件：主文、條款、期間、時效，全部與決定書一致</a:t>
             </a:r>
           </a:p>
         </p:txBody>
@@ -9323,7 +9323,7 @@
                 </a:solidFill>
                 <a:latin typeface="Microsoft JhengHei"/>
               </a:rPr>
-              <a:t>從法制局 101 份決定書挑 3 份，反推 30 頁卷宗：掃描、手寫、照片、影片</a:t>
+              <a:t>從法制局 101 份決定書挑 3 份，依決定書反推 30 頁卷宗：掃描、手寫、照片、影片</a:t>
             </a:r>
           </a:p>
         </p:txBody>

--- a/docs/提案/提案簡報-訴願智審臺.pptx
+++ b/docs/提案/提案簡報-訴願智審臺.pptx
@@ -8887,41 +8887,6 @@
           </a:prstGeom>
         </p:spPr>
       </p:pic>
-      <p:sp>
-        <p:nvSpPr>
-          <p:cNvPr id="10" name="TextBox 9"/>
-          <p:cNvSpPr txBox="1"/>
-          <p:nvPr/>
-        </p:nvSpPr>
-        <p:spPr>
-          <a:xfrm>
-            <a:off x="7863840" y="384048"/>
-            <a:ext cx="3657600" cy="274320"/>
-          </a:xfrm>
-          <a:prstGeom prst="rect">
-            <a:avLst/>
-          </a:prstGeom>
-          <a:noFill/>
-        </p:spPr>
-        <p:txBody>
-          <a:bodyPr wrap="square" anchor="t" lIns="45720" rIns="45720" tIns="27432" bIns="27432">
-            <a:spAutoFit/>
-          </a:bodyPr>
-          <a:lstStyle/>
-          <a:p>
-            <a:pPr algn="r"/>
-            <a:r>
-              <a:rPr sz="1100" b="0">
-                <a:solidFill>
-                  <a:srgbClr val="8A93A0"/>
-                </a:solidFill>
-                <a:latin typeface="Microsoft JhengHei"/>
-              </a:rPr>
-              <a:t>全部在競賽允許清單內</a:t>
-            </a:r>
-          </a:p>
-        </p:txBody>
-      </p:sp>
     </p:spTree>
   </p:cSld>
   <p:clrMapOvr>

--- a/docs/提案/提案簡報-訴願智審臺.pptx
+++ b/docs/提案/提案簡報-訴願智審臺.pptx
@@ -9253,7 +9253,7 @@
                 </a:solidFill>
                 <a:latin typeface="Microsoft JhengHei"/>
               </a:rPr>
-              <a:t>真卷宗</a:t>
+              <a:t>重建卷宗</a:t>
             </a:r>
           </a:p>
         </p:txBody>
@@ -9288,7 +9288,7 @@
                 </a:solidFill>
                 <a:latin typeface="Microsoft JhengHei"/>
               </a:rPr>
-              <a:t>從法制局 101 份決定書挑 3 份，依決定書反推 30 頁卷宗：掃描、手寫、照片、影片</a:t>
+              <a:t>從法制局 101 份決定書挑 3 份，依決定書反推整套卷宗：掃描、手寫、照片、影片</a:t>
             </a:r>
           </a:p>
         </p:txBody>
@@ -9651,7 +9651,7 @@
         </p:nvGraphicFramePr>
         <p:xfrm>
           <a:off x="3291840" y="1463040"/>
-          <a:ext cx="5394960" cy="2743200"/>
+          <a:ext cx="5394960" cy="3511296"/>
         </p:xfrm>
         <a:graphic>
           <a:graphicData uri="http://schemas.openxmlformats.org/drawingml/2006/table">
@@ -9660,12 +9660,12 @@
                 <a:tableStyleId>{5C22544A-7EE6-4342-B048-85BDC9FD1C3A}</a:tableStyleId>
               </a:tblPr>
               <a:tblGrid>
-                <a:gridCol w="1005840"/>
-                <a:gridCol w="1371600"/>
+                <a:gridCol w="822960"/>
+                <a:gridCol w="1463040"/>
                 <a:gridCol w="1645920"/>
-                <a:gridCol w="1371600"/>
+                <a:gridCol w="1463040"/>
               </a:tblGrid>
-              <a:tr h="457200">
+              <a:tr h="438912">
                 <a:tc>
                   <a:txBody>
                     <a:bodyPr/>
@@ -9687,7 +9687,7 @@
                     <a:p>
                       <a:pPr algn="ctr"/>
                       <a:r>
-                        <a:rPr sz="1050" b="1">
+                        <a:rPr sz="950" b="1">
                           <a:solidFill>
                             <a:srgbClr val="FFFFFF"/>
                           </a:solidFill>
@@ -9710,7 +9710,7 @@
                     <a:p>
                       <a:pPr algn="ctr"/>
                       <a:r>
-                        <a:rPr sz="1050" b="1">
+                        <a:rPr sz="950" b="1">
                           <a:solidFill>
                             <a:srgbClr val="FFFFFF"/>
                           </a:solidFill>
@@ -9733,7 +9733,7 @@
                     <a:p>
                       <a:pPr algn="ctr"/>
                       <a:r>
-                        <a:rPr sz="1050" b="1">
+                        <a:rPr sz="950" b="1">
                           <a:solidFill>
                             <a:srgbClr val="FFFFFF"/>
                           </a:solidFill>
@@ -9750,7 +9750,7 @@
                   </a:tcPr>
                 </a:tc>
               </a:tr>
-              <a:tr h="457200">
+              <a:tr h="438912">
                 <a:tc>
                   <a:txBody>
                     <a:bodyPr/>
@@ -9758,7 +9758,195 @@
                     <a:p>
                       <a:pPr algn="l"/>
                       <a:r>
-                        <a:rPr sz="1050" b="1">
+                        <a:rPr sz="950" b="1">
+                          <a:solidFill>
+                            <a:srgbClr val="16304F"/>
+                          </a:solidFill>
+                          <a:latin typeface="Microsoft JhengHei"/>
+                        </a:rPr>
+                        <a:t>卷宗</a:t>
+                      </a:r>
+                    </a:p>
+                  </a:txBody>
+                  <a:tcPr marT="36576" marB="36576">
+                    <a:solidFill>
+                      <a:srgbClr val="F7F9FB"/>
+                    </a:solidFill>
+                  </a:tcPr>
+                </a:tc>
+                <a:tc>
+                  <a:txBody>
+                    <a:bodyPr/>
+                    <a:lstStyle/>
+                    <a:p>
+                      <a:pPr algn="ctr"/>
+                      <a:r>
+                        <a:rPr sz="950" b="0">
+                          <a:solidFill>
+                            <a:srgbClr val="0F2038"/>
+                          </a:solidFill>
+                          <a:latin typeface="Microsoft JhengHei"/>
+                        </a:rPr>
+                        <a:t>30 頁</a:t>
+                      </a:r>
+                    </a:p>
+                  </a:txBody>
+                  <a:tcPr marT="36576" marB="36576">
+                    <a:solidFill>
+                      <a:srgbClr val="FFFFFF"/>
+                    </a:solidFill>
+                  </a:tcPr>
+                </a:tc>
+                <a:tc>
+                  <a:txBody>
+                    <a:bodyPr/>
+                    <a:lstStyle/>
+                    <a:p>
+                      <a:pPr algn="ctr"/>
+                      <a:r>
+                        <a:rPr sz="950" b="0">
+                          <a:solidFill>
+                            <a:srgbClr val="0F2038"/>
+                          </a:solidFill>
+                          <a:latin typeface="Microsoft JhengHei"/>
+                        </a:rPr>
+                        <a:t>20 頁＋3 幀照片＋12 秒影片</a:t>
+                      </a:r>
+                    </a:p>
+                  </a:txBody>
+                  <a:tcPr marT="36576" marB="36576">
+                    <a:solidFill>
+                      <a:srgbClr val="FFFFFF"/>
+                    </a:solidFill>
+                  </a:tcPr>
+                </a:tc>
+                <a:tc>
+                  <a:txBody>
+                    <a:bodyPr/>
+                    <a:lstStyle/>
+                    <a:p>
+                      <a:pPr algn="ctr"/>
+                      <a:r>
+                        <a:rPr sz="950" b="0">
+                          <a:solidFill>
+                            <a:srgbClr val="0F2038"/>
+                          </a:solidFill>
+                          <a:latin typeface="Microsoft JhengHei"/>
+                        </a:rPr>
+                        <a:t>30 頁</a:t>
+                      </a:r>
+                    </a:p>
+                  </a:txBody>
+                  <a:tcPr marT="36576" marB="36576">
+                    <a:solidFill>
+                      <a:srgbClr val="FFFFFF"/>
+                    </a:solidFill>
+                  </a:tcPr>
+                </a:tc>
+              </a:tr>
+              <a:tr h="438912">
+                <a:tc>
+                  <a:txBody>
+                    <a:bodyPr/>
+                    <a:lstStyle/>
+                    <a:p>
+                      <a:pPr algn="l"/>
+                      <a:r>
+                        <a:rPr sz="950" b="1">
+                          <a:solidFill>
+                            <a:srgbClr val="16304F"/>
+                          </a:solidFill>
+                          <a:latin typeface="Microsoft JhengHei"/>
+                        </a:rPr>
+                        <a:t>文件</a:t>
+                      </a:r>
+                    </a:p>
+                  </a:txBody>
+                  <a:tcPr marT="36576" marB="36576">
+                    <a:solidFill>
+                      <a:srgbClr val="F7F9FB"/>
+                    </a:solidFill>
+                  </a:tcPr>
+                </a:tc>
+                <a:tc>
+                  <a:txBody>
+                    <a:bodyPr/>
+                    <a:lstStyle/>
+                    <a:p>
+                      <a:pPr algn="ctr"/>
+                      <a:r>
+                        <a:rPr sz="950" b="0">
+                          <a:solidFill>
+                            <a:srgbClr val="0F2038"/>
+                          </a:solidFill>
+                          <a:latin typeface="Microsoft JhengHei"/>
+                        </a:rPr>
+                        <a:t>訴願書 10・答辯書 10・卷證 10</a:t>
+                      </a:r>
+                    </a:p>
+                  </a:txBody>
+                  <a:tcPr marT="36576" marB="36576">
+                    <a:solidFill>
+                      <a:srgbClr val="FFFFFF"/>
+                    </a:solidFill>
+                  </a:tcPr>
+                </a:tc>
+                <a:tc>
+                  <a:txBody>
+                    <a:bodyPr/>
+                    <a:lstStyle/>
+                    <a:p>
+                      <a:pPr algn="ctr"/>
+                      <a:r>
+                        <a:rPr sz="950" b="0">
+                          <a:solidFill>
+                            <a:srgbClr val="0F2038"/>
+                          </a:solidFill>
+                          <a:latin typeface="Microsoft JhengHei"/>
+                        </a:rPr>
+                        <a:t>訴願書 3・答辯書 3・卷證 14</a:t>
+                      </a:r>
+                    </a:p>
+                  </a:txBody>
+                  <a:tcPr marT="36576" marB="36576">
+                    <a:solidFill>
+                      <a:srgbClr val="FFFFFF"/>
+                    </a:solidFill>
+                  </a:tcPr>
+                </a:tc>
+                <a:tc>
+                  <a:txBody>
+                    <a:bodyPr/>
+                    <a:lstStyle/>
+                    <a:p>
+                      <a:pPr algn="ctr"/>
+                      <a:r>
+                        <a:rPr sz="950" b="0">
+                          <a:solidFill>
+                            <a:srgbClr val="0F2038"/>
+                          </a:solidFill>
+                          <a:latin typeface="Microsoft JhengHei"/>
+                        </a:rPr>
+                        <a:t>訴願書 10・答辯書 10・卷證 10</a:t>
+                      </a:r>
+                    </a:p>
+                  </a:txBody>
+                  <a:tcPr marT="36576" marB="36576">
+                    <a:solidFill>
+                      <a:srgbClr val="FFFFFF"/>
+                    </a:solidFill>
+                  </a:tcPr>
+                </a:tc>
+              </a:tr>
+              <a:tr h="438912">
+                <a:tc>
+                  <a:txBody>
+                    <a:bodyPr/>
+                    <a:lstStyle/>
+                    <a:p>
+                      <a:pPr algn="l"/>
+                      <a:r>
+                        <a:rPr sz="950" b="1">
                           <a:solidFill>
                             <a:srgbClr val="16304F"/>
                           </a:solidFill>
@@ -9781,7 +9969,7 @@
                     <a:p>
                       <a:pPr algn="ctr"/>
                       <a:r>
-                        <a:rPr sz="1050" b="0">
+                        <a:rPr sz="950" b="0">
                           <a:solidFill>
                             <a:srgbClr val="0F2038"/>
                           </a:solidFill>
@@ -9804,7 +9992,7 @@
                     <a:p>
                       <a:pPr algn="ctr"/>
                       <a:r>
-                        <a:rPr sz="1050" b="0">
+                        <a:rPr sz="950" b="0">
                           <a:solidFill>
                             <a:srgbClr val="0F2038"/>
                           </a:solidFill>
@@ -9827,7 +10015,7 @@
                     <a:p>
                       <a:pPr algn="ctr"/>
                       <a:r>
-                        <a:rPr sz="1050" b="0">
+                        <a:rPr sz="950" b="0">
                           <a:solidFill>
                             <a:srgbClr val="0F2038"/>
                           </a:solidFill>
@@ -9844,7 +10032,7 @@
                   </a:tcPr>
                 </a:tc>
               </a:tr>
-              <a:tr h="457200">
+              <a:tr h="438912">
                 <a:tc>
                   <a:txBody>
                     <a:bodyPr/>
@@ -9852,7 +10040,7 @@
                     <a:p>
                       <a:pPr algn="l"/>
                       <a:r>
-                        <a:rPr sz="1050" b="1">
+                        <a:rPr sz="950" b="1">
                           <a:solidFill>
                             <a:srgbClr val="16304F"/>
                           </a:solidFill>
@@ -9875,7 +10063,7 @@
                     <a:p>
                       <a:pPr algn="ctr"/>
                       <a:r>
-                        <a:rPr sz="1050" b="0">
+                        <a:rPr sz="950" b="0">
                           <a:solidFill>
                             <a:srgbClr val="0F2038"/>
                           </a:solidFill>
@@ -9898,7 +10086,7 @@
                     <a:p>
                       <a:pPr algn="ctr"/>
                       <a:r>
-                        <a:rPr sz="1050" b="0">
+                        <a:rPr sz="950" b="0">
                           <a:solidFill>
                             <a:srgbClr val="0F2038"/>
                           </a:solidFill>
@@ -9921,7 +10109,7 @@
                     <a:p>
                       <a:pPr algn="ctr"/>
                       <a:r>
-                        <a:rPr sz="1050" b="0">
+                        <a:rPr sz="950" b="0">
                           <a:solidFill>
                             <a:srgbClr val="0F2038"/>
                           </a:solidFill>
@@ -9938,7 +10126,7 @@
                   </a:tcPr>
                 </a:tc>
               </a:tr>
-              <a:tr h="457200">
+              <a:tr h="438912">
                 <a:tc>
                   <a:txBody>
                     <a:bodyPr/>
@@ -9946,7 +10134,7 @@
                     <a:p>
                       <a:pPr algn="l"/>
                       <a:r>
-                        <a:rPr sz="1050" b="1">
+                        <a:rPr sz="950" b="1">
                           <a:solidFill>
                             <a:srgbClr val="16304F"/>
                           </a:solidFill>
@@ -9969,7 +10157,7 @@
                     <a:p>
                       <a:pPr algn="ctr"/>
                       <a:r>
-                        <a:rPr sz="1050" b="0">
+                        <a:rPr sz="950" b="0">
                           <a:solidFill>
                             <a:srgbClr val="0F2038"/>
                           </a:solidFill>
@@ -9992,7 +10180,7 @@
                     <a:p>
                       <a:pPr algn="ctr"/>
                       <a:r>
-                        <a:rPr sz="1050" b="0">
+                        <a:rPr sz="950" b="0">
                           <a:solidFill>
                             <a:srgbClr val="0F2038"/>
                           </a:solidFill>
@@ -10015,7 +10203,7 @@
                     <a:p>
                       <a:pPr algn="ctr"/>
                       <a:r>
-                        <a:rPr sz="1050" b="0">
+                        <a:rPr sz="950" b="0">
                           <a:solidFill>
                             <a:srgbClr val="0F2038"/>
                           </a:solidFill>
@@ -10032,7 +10220,7 @@
                   </a:tcPr>
                 </a:tc>
               </a:tr>
-              <a:tr h="457200">
+              <a:tr h="438912">
                 <a:tc>
                   <a:txBody>
                     <a:bodyPr/>
@@ -10040,7 +10228,7 @@
                     <a:p>
                       <a:pPr algn="l"/>
                       <a:r>
-                        <a:rPr sz="1050" b="1">
+                        <a:rPr sz="950" b="1">
                           <a:solidFill>
                             <a:srgbClr val="16304F"/>
                           </a:solidFill>
@@ -10063,7 +10251,7 @@
                     <a:p>
                       <a:pPr algn="ctr"/>
                       <a:r>
-                        <a:rPr sz="1050" b="0">
+                        <a:rPr sz="950" b="0">
                           <a:solidFill>
                             <a:srgbClr val="0F2038"/>
                           </a:solidFill>
@@ -10086,7 +10274,7 @@
                     <a:p>
                       <a:pPr algn="ctr"/>
                       <a:r>
-                        <a:rPr sz="1050" b="0">
+                        <a:rPr sz="950" b="0">
                           <a:solidFill>
                             <a:srgbClr val="0F2038"/>
                           </a:solidFill>
@@ -10109,7 +10297,7 @@
                     <a:p>
                       <a:pPr algn="ctr"/>
                       <a:r>
-                        <a:rPr sz="1050" b="0">
+                        <a:rPr sz="950" b="0">
                           <a:solidFill>
                             <a:srgbClr val="0F2038"/>
                           </a:solidFill>
@@ -10126,7 +10314,7 @@
                   </a:tcPr>
                 </a:tc>
               </a:tr>
-              <a:tr h="457200">
+              <a:tr h="438912">
                 <a:tc>
                   <a:txBody>
                     <a:bodyPr/>
@@ -10134,7 +10322,7 @@
                     <a:p>
                       <a:pPr algn="l"/>
                       <a:r>
-                        <a:rPr sz="1050" b="1">
+                        <a:rPr sz="950" b="1">
                           <a:solidFill>
                             <a:srgbClr val="16304F"/>
                           </a:solidFill>
@@ -10157,7 +10345,7 @@
                     <a:p>
                       <a:pPr algn="ctr"/>
                       <a:r>
-                        <a:rPr sz="1050" b="1">
+                        <a:rPr sz="950" b="1">
                           <a:solidFill>
                             <a:srgbClr val="2E7D32"/>
                           </a:solidFill>
@@ -10180,7 +10368,7 @@
                     <a:p>
                       <a:pPr algn="ctr"/>
                       <a:r>
-                        <a:rPr sz="1050" b="1">
+                        <a:rPr sz="950" b="1">
                           <a:solidFill>
                             <a:srgbClr val="2E7D32"/>
                           </a:solidFill>
@@ -10203,7 +10391,7 @@
                     <a:p>
                       <a:pPr algn="ctr"/>
                       <a:r>
-                        <a:rPr sz="1050" b="1">
+                        <a:rPr sz="950" b="1">
                           <a:solidFill>
                             <a:srgbClr val="2E7D32"/>
                           </a:solidFill>

--- a/docs/提案/提案簡報-訴願智審臺.pptx
+++ b/docs/提案/提案簡報-訴願智審臺.pptx
@@ -10635,41 +10635,6 @@
           </a:p>
         </p:txBody>
       </p:sp>
-      <p:sp>
-        <p:nvSpPr>
-          <p:cNvPr id="26" name="TextBox 25"/>
-          <p:cNvSpPr txBox="1"/>
-          <p:nvPr/>
-        </p:nvSpPr>
-        <p:spPr>
-          <a:xfrm>
-            <a:off x="640080" y="5760720"/>
-            <a:ext cx="10881360" cy="457200"/>
-          </a:xfrm>
-          <a:prstGeom prst="rect">
-            <a:avLst/>
-          </a:prstGeom>
-          <a:noFill/>
-        </p:spPr>
-        <p:txBody>
-          <a:bodyPr wrap="square" anchor="t" lIns="45720" rIns="45720" tIns="27432" bIns="27432">
-            <a:spAutoFit/>
-          </a:bodyPr>
-          <a:lstStyle/>
-          <a:p>
-            <a:pPr algn="l"/>
-            <a:r>
-              <a:rPr sz="950" b="0">
-                <a:solidFill>
-                  <a:srgbClr val="8A93A0"/>
-                </a:solidFill>
-                <a:latin typeface="Microsoft JhengHei"/>
-              </a:rPr>
-              <a:t>理由段論證點涵蓋 18／21；缺的 3 項是次要法條引用（行政程序法 §72／§73、申報辦法附表 1），不是判斷錯誤。比對腳本：experiments/eval/compare_truth.py</a:t>
-            </a:r>
-          </a:p>
-        </p:txBody>
-      </p:sp>
     </p:spTree>
   </p:cSld>
   <p:clrMapOvr>

--- a/docs/提案/提案簡報-訴願智審臺.pptx
+++ b/docs/提案/提案簡報-訴願智審臺.pptx
@@ -3406,7 +3406,7 @@
                 </a:solidFill>
                 <a:latin typeface="Microsoft JhengHei"/>
               </a:rPr>
-              <a:t>比對交給 AI，證據留給眼睛，判斷留給承辦人。</a:t>
+              <a:t>比對交給 AI，證據原文可查，判斷留給承辦人。</a:t>
             </a:r>
           </a:p>
         </p:txBody>
